--- a/samples/VK_Tech_шаблон__focus.pptx
+++ b/samples/VK_Tech_шаблон__focus.pptx
@@ -279,7 +279,7 @@
               <c:strCache>
                 <c:ptCount val="1"/>
                 <c:pt idx="0">
-                  <c:v>Время сборки</c:v>
+                  <c:v>Время</c:v>
                 </c:pt>
               </c:strCache>
             </c:strRef>
@@ -300,10 +300,10 @@
               <c:strCache>
                 <c:ptCount val="2"/>
                 <c:pt idx="0">
-                  <c:v>Текущий</c:v>
+                  <c:v>Сборка</c:v>
                 </c:pt>
                 <c:pt idx="1">
-                  <c:v>Пилот</c:v>
+                  <c:v>Правки</c:v>
                 </c:pt>
               </c:strCache>
             </c:strRef>
@@ -318,7 +318,7 @@
                   <c:v>186.0</c:v>
                 </c:pt>
                 <c:pt idx="1">
-                  <c:v>4.0</c:v>
+                  <c:v>74.0</c:v>
                 </c:pt>
               </c:numCache>
             </c:numRef>
@@ -393,193 +393,6 @@
                 </a:pPr>
                 <a:r>
                   <a:t>мин</a:t>
-                </a:r>
-              </a:p>
-            </c:rich>
-          </c:tx>
-          <c:layout/>
-          <c:overlay val="0"/>
-        </c:title>
-        <c:majorTickMark val="out"/>
-        <c:minorTickMark val="none"/>
-        <c:tickLblPos val="nextTo"/>
-        <c:txPr>
-          <a:bodyPr/>
-          <a:lstStyle/>
-          <a:p>
-            <a:pPr>
-              <a:defRPr sz="1100" b="0">
-                <a:solidFill>
-                  <a:srgbClr val="000000"/>
-                </a:solidFill>
-                <a:latin typeface="Play"/>
-                <a:ea typeface="Play"/>
-                <a:cs typeface="Play"/>
-              </a:defRPr>
-            </a:pPr>
-          </a:p>
-        </c:txPr>
-        <c:crossAx val="-2068027336"/>
-        <c:crosses val="autoZero"/>
-      </c:valAx>
-    </c:plotArea>
-    <c:dispBlanksAs val="gap"/>
-  </c:chart>
-  <c:txPr>
-    <a:bodyPr/>
-    <a:lstStyle/>
-    <a:p>
-      <a:pPr>
-        <a:defRPr sz="1200" b="0">
-          <a:solidFill>
-            <a:srgbClr val="000000"/>
-          </a:solidFill>
-          <a:latin typeface="Play"/>
-          <a:ea typeface="Play"/>
-          <a:cs typeface="Play"/>
-        </a:defRPr>
-      </a:pPr>
-      <a:endParaRPr lang="en-US"/>
-    </a:p>
-  </c:txPr>
-  <c:externalData r:id="rId1">
-    <c:autoUpdate val="0"/>
-  </c:externalData>
-</c:chartSpace>
-</file>
-
-<file path=ppt/charts/chart2.xml><?xml version="1.0" encoding="utf-8"?>
-<c:chartSpace xmlns:c="http://schemas.openxmlformats.org/drawingml/2006/chart" xmlns:a="http://schemas.openxmlformats.org/drawingml/2006/main" xmlns:r="http://schemas.openxmlformats.org/officeDocument/2006/relationships">
-  <c:date1904 val="0"/>
-  <c:chart>
-    <c:autoTitleDeleted val="1"/>
-    <c:plotArea>
-      <c:barChart>
-        <c:barDir val="col"/>
-        <c:grouping val="clustered"/>
-        <c:ser>
-          <c:idx val="0"/>
-          <c:order val="0"/>
-          <c:tx>
-            <c:strRef>
-              <c:f>Sheet1!$B$1</c:f>
-              <c:strCache>
-                <c:ptCount val="1"/>
-                <c:pt idx="0">
-                  <c:v>Время до первой версии</c:v>
-                </c:pt>
-              </c:strCache>
-            </c:strRef>
-          </c:tx>
-          <c:spPr>
-            <a:solidFill>
-              <a:srgbClr val="0077FF"/>
-            </a:solidFill>
-            <a:ln>
-              <a:solidFill>
-                <a:srgbClr val="0077FF"/>
-              </a:solidFill>
-            </a:ln>
-          </c:spPr>
-          <c:cat>
-            <c:strRef>
-              <c:f>Sheet1!$A$2:$A$3</c:f>
-              <c:strCache>
-                <c:ptCount val="2"/>
-                <c:pt idx="0">
-                  <c:v>Текущий</c:v>
-                </c:pt>
-                <c:pt idx="1">
-                  <c:v>Пилот</c:v>
-                </c:pt>
-              </c:strCache>
-            </c:strRef>
-          </c:cat>
-          <c:val>
-            <c:numRef>
-              <c:f>Sheet1!$B$2:$B$3</c:f>
-              <c:numCache>
-                <c:formatCode>General</c:formatCode>
-                <c:ptCount val="2"/>
-                <c:pt idx="0">
-                  <c:v>6.0</c:v>
-                </c:pt>
-                <c:pt idx="1">
-                  <c:v>1.0</c:v>
-                </c:pt>
-              </c:numCache>
-            </c:numRef>
-          </c:val>
-        </c:ser>
-        <c:gapWidth val="60"/>
-        <c:axId val="-2068027336"/>
-        <c:axId val="-2113994440"/>
-      </c:barChart>
-      <c:catAx>
-        <c:axId val="-2068027336"/>
-        <c:scaling>
-          <c:orientation val="minMax"/>
-        </c:scaling>
-        <c:delete val="0"/>
-        <c:axPos val="b"/>
-        <c:majorTickMark val="out"/>
-        <c:minorTickMark val="none"/>
-        <c:tickLblPos val="nextTo"/>
-        <c:txPr>
-          <a:bodyPr/>
-          <a:lstStyle/>
-          <a:p>
-            <a:pPr>
-              <a:defRPr sz="1100" b="0">
-                <a:solidFill>
-                  <a:srgbClr val="000000"/>
-                </a:solidFill>
-                <a:latin typeface="Play"/>
-                <a:ea typeface="Play"/>
-                <a:cs typeface="Play"/>
-              </a:defRPr>
-            </a:pPr>
-          </a:p>
-        </c:txPr>
-        <c:crossAx val="-2113994440"/>
-        <c:crosses val="autoZero"/>
-        <c:auto val="1"/>
-        <c:lblAlgn val="ctr"/>
-        <c:lblOffset val="100"/>
-        <c:noMultiLvlLbl val="0"/>
-      </c:catAx>
-      <c:valAx>
-        <c:axId val="-2113994440"/>
-        <c:scaling/>
-        <c:delete val="0"/>
-        <c:axPos val="l"/>
-        <c:majorGridlines>
-          <c:spPr>
-            <a:ln w="9525">
-              <a:solidFill>
-                <a:srgbClr val="D1D1D1"/>
-              </a:solidFill>
-            </a:ln>
-          </c:spPr>
-        </c:majorGridlines>
-        <c:title>
-          <c:tx>
-            <c:rich>
-              <a:bodyPr/>
-              <a:lstStyle/>
-              <a:p>
-                <a:pPr>
-                  <a:defRPr sz="1100" b="0">
-                    <a:solidFill>
-                      <a:srgbClr val="000000"/>
-                    </a:solidFill>
-                    <a:latin typeface="Play"/>
-                    <a:ea typeface="Play"/>
-                    <a:cs typeface="Play"/>
-                  </a:defRPr>
-                </a:pPr>
-                <a:r>
-                  <a:t>дней</a:t>
                 </a:r>
               </a:p>
             </c:rich>
@@ -5784,88 +5597,6 @@
       </p:sp>
       <p:sp>
         <p:nvSpPr>
-          <p:cNvPr id="533" name="Google Shape;533;p53"/>
-          <p:cNvSpPr/>
-          <p:nvPr/>
-        </p:nvSpPr>
-        <p:spPr>
-          <a:xfrm>
-            <a:off x="303214" y="1022533"/>
-            <a:ext cx="1395256" cy="1433588"/>
-          </a:xfrm>
-          <a:prstGeom prst="rect">
-            <a:avLst/>
-          </a:prstGeom>
-          <a:noFill/>
-          <a:ln>
-            <a:noFill/>
-          </a:ln>
-        </p:spPr>
-        <p:txBody>
-          <a:bodyPr anchorCtr="0" anchor="ctr" bIns="91425" lIns="91425" spcFirstLastPara="1" rIns="91425" wrap="square" tIns="91425">
-            <a:noAutofit/>
-          </a:bodyPr>
-          <a:lstStyle/>
-          <a:p>
-            <a:pPr indent="0" lvl="0" marL="0" rtl="0" algn="l">
-              <a:spcBef>
-                <a:spcPts val="0"/>
-              </a:spcBef>
-              <a:spcAft>
-                <a:spcPts val="0"/>
-              </a:spcAft>
-              <a:buNone/>
-            </a:pPr>
-            <a:r>
-              <a:t/>
-            </a:r>
-            <a:endParaRPr/>
-          </a:p>
-        </p:txBody>
-      </p:sp>
-      <p:sp>
-        <p:nvSpPr>
-          <p:cNvPr id="549" name="Google Shape;549;p53"/>
-          <p:cNvSpPr/>
-          <p:nvPr/>
-        </p:nvSpPr>
-        <p:spPr>
-          <a:xfrm>
-            <a:off x="7359897" y="1022533"/>
-            <a:ext cx="1395256" cy="1433588"/>
-          </a:xfrm>
-          <a:prstGeom prst="rect">
-            <a:avLst/>
-          </a:prstGeom>
-          <a:noFill/>
-          <a:ln>
-            <a:noFill/>
-          </a:ln>
-        </p:spPr>
-        <p:txBody>
-          <a:bodyPr anchorCtr="0" anchor="ctr" bIns="91425" lIns="91425" spcFirstLastPara="1" rIns="91425" wrap="square" tIns="91425">
-            <a:noAutofit/>
-          </a:bodyPr>
-          <a:lstStyle/>
-          <a:p>
-            <a:pPr indent="0" lvl="0" marL="0" rtl="0" algn="l">
-              <a:spcBef>
-                <a:spcPts val="0"/>
-              </a:spcBef>
-              <a:spcAft>
-                <a:spcPts val="0"/>
-              </a:spcAft>
-              <a:buNone/>
-            </a:pPr>
-            <a:r>
-              <a:t/>
-            </a:r>
-            <a:endParaRPr/>
-          </a:p>
-        </p:txBody>
-      </p:sp>
-      <p:sp>
-        <p:nvSpPr>
           <p:cNvPr id="553" name="Google Shape;553;p53"/>
           <p:cNvSpPr/>
           <p:nvPr/>
@@ -5948,48 +5679,7 @@
       </p:sp>
       <p:sp>
         <p:nvSpPr>
-          <p:cNvPr id="571" name="Google Shape;571;p53"/>
-          <p:cNvSpPr/>
-          <p:nvPr/>
-        </p:nvSpPr>
-        <p:spPr>
-          <a:xfrm>
-            <a:off x="7359897" y="2797849"/>
-            <a:ext cx="1395256" cy="1433588"/>
-          </a:xfrm>
-          <a:prstGeom prst="rect">
-            <a:avLst/>
-          </a:prstGeom>
-          <a:noFill/>
-          <a:ln>
-            <a:noFill/>
-          </a:ln>
-        </p:spPr>
-        <p:txBody>
-          <a:bodyPr anchorCtr="0" anchor="ctr" bIns="91425" lIns="91425" spcFirstLastPara="1" rIns="91425" wrap="square" tIns="91425">
-            <a:noAutofit/>
-          </a:bodyPr>
-          <a:lstStyle/>
-          <a:p>
-            <a:pPr indent="0" lvl="0" marL="0" rtl="0" algn="l">
-              <a:spcBef>
-                <a:spcPts val="0"/>
-              </a:spcBef>
-              <a:spcAft>
-                <a:spcPts val="0"/>
-              </a:spcAft>
-              <a:buNone/>
-            </a:pPr>
-            <a:r>
-              <a:t/>
-            </a:r>
-            <a:endParaRPr/>
-          </a:p>
-        </p:txBody>
-      </p:sp>
-      <p:sp>
-        <p:nvSpPr>
-          <p:cNvPr id="572" name="title"/>
+          <p:cNvPr id="555" name="title"/>
           <p:cNvSpPr txBox="1"/>
           <p:nvPr/>
         </p:nvSpPr>
@@ -6013,7 +5703,7 @@
               <a:spcAft>
                 <a:spcPts val="300"/>
               </a:spcAft>
-              <a:defRPr sz="2705">
+              <a:defRPr sz="2400">
                 <a:solidFill>
                   <a:srgbClr val="000000"/>
                 </a:solidFill>
@@ -6023,7 +5713,7 @@
               </a:defRPr>
             </a:pPr>
             <a:r>
-              <a:rPr sz="2705">
+              <a:rPr sz="2400">
                 <a:solidFill>
                   <a:srgbClr val="000000"/>
                 </a:solidFill>
@@ -6036,65 +5726,34 @@
           </a:p>
         </p:txBody>
       </p:sp>
-      <p:sp>
-        <p:nvSpPr>
-          <p:cNvPr id="573" name="lead"/>
+      <p:graphicFrame>
+        <p:nvGraphicFramePr>
+          <p:cNvPr id="556" name="Chart 555"/>
+          <p:cNvGraphicFramePr>
+            <a:graphicFrameLocks noGrp="1"/>
+          </p:cNvGraphicFramePr>
+          <p:nvPr/>
+        </p:nvGraphicFramePr>
+        <p:xfrm>
+          <a:off x="274320" y="1414513"/>
+          <a:ext cx="8344814" cy="1582531"/>
+        </p:xfrm>
+        <a:graphic>
+          <a:graphicData uri="http://schemas.openxmlformats.org/drawingml/2006/chart">
+            <c:chart xmlns:c="http://schemas.openxmlformats.org/drawingml/2006/chart" r:id="rId2"/>
+          </a:graphicData>
+        </a:graphic>
+      </p:graphicFrame>
+      <p:sp>
+        <p:nvSpPr>
+          <p:cNvPr id="557" name="body"/>
           <p:cNvSpPr txBox="1"/>
           <p:nvPr/>
         </p:nvSpPr>
         <p:spPr>
           <a:xfrm>
-            <a:off x="1108801" y="1414513"/>
-            <a:ext cx="6675851" cy="855559"/>
-          </a:xfrm>
-          <a:prstGeom prst="rect">
-            <a:avLst/>
-          </a:prstGeom>
-          <a:noFill/>
-        </p:spPr>
-        <p:txBody>
-          <a:bodyPr wrap="square" lIns="76200" rIns="76200" tIns="50800" bIns="50800">
-            <a:spAutoFit/>
-          </a:bodyPr>
-          <a:lstStyle/>
-          <a:p>
-            <a:pPr algn="ctr">
-              <a:spcAft>
-                <a:spcPts val="300"/>
-              </a:spcAft>
-              <a:defRPr sz="1800">
-                <a:solidFill>
-                  <a:srgbClr val="000000"/>
-                </a:solidFill>
-                <a:latin typeface="Play"/>
-                <a:ea typeface="Play"/>
-                <a:cs typeface="Play"/>
-              </a:defRPr>
-            </a:pPr>
-            <a:r>
-              <a:rPr sz="1800">
-                <a:solidFill>
-                  <a:srgbClr val="000000"/>
-                </a:solidFill>
-                <a:latin typeface="Play"/>
-                <a:ea typeface="Play"/>
-                <a:cs typeface="Play"/>
-              </a:rPr>
-              <a:t>42 колоды в первом квартале 2026 года</a:t>
-            </a:r>
-          </a:p>
-        </p:txBody>
-      </p:sp>
-      <p:sp>
-        <p:nvSpPr>
-          <p:cNvPr id="574" name="body"/>
-          <p:cNvSpPr txBox="1"/>
-          <p:nvPr/>
-        </p:nvSpPr>
-        <p:spPr>
-          <a:xfrm>
-            <a:off x="1108801" y="2441185"/>
-            <a:ext cx="6675851" cy="1825193"/>
+            <a:off x="274320" y="3125632"/>
+            <a:ext cx="8344814" cy="1140746"/>
           </a:xfrm>
           <a:prstGeom prst="rect">
             <a:avLst/>
@@ -6111,7 +5770,7 @@
               <a:spcAft>
                 <a:spcPts val="300"/>
               </a:spcAft>
-              <a:defRPr sz="1800">
+              <a:defRPr sz="1225">
                 <a:solidFill>
                   <a:srgbClr val="000000"/>
                 </a:solidFill>
@@ -6121,7 +5780,7 @@
               </a:defRPr>
             </a:pPr>
             <a:r>
-              <a:rPr sz="1800">
+              <a:rPr sz="1225">
                 <a:solidFill>
                   <a:srgbClr val="000000"/>
                 </a:solidFill>
@@ -6129,7 +5788,7 @@
                 <a:ea typeface="Play"/>
                 <a:cs typeface="Play"/>
               </a:rPr>
-              <a:t>• Средняя сборка 12 слайдов занимает 186 минут</a:t>
+              <a:t>• 186 минут на сборку одной презентации</a:t>
             </a:r>
           </a:p>
           <a:p>
@@ -6137,7 +5796,7 @@
               <a:spcAft>
                 <a:spcPts val="300"/>
               </a:spcAft>
-              <a:defRPr sz="1800">
+              <a:defRPr sz="1225">
                 <a:solidFill>
                   <a:srgbClr val="000000"/>
                 </a:solidFill>
@@ -6147,7 +5806,7 @@
               </a:defRPr>
             </a:pPr>
             <a:r>
-              <a:rPr sz="1800">
+              <a:rPr sz="1225">
                 <a:solidFill>
                   <a:srgbClr val="000000"/>
                 </a:solidFill>
@@ -6155,7 +5814,7 @@
                 <a:ea typeface="Play"/>
                 <a:cs typeface="Play"/>
               </a:rPr>
-              <a:t>• 74 минуты на правки после ревью дизайнера</a:t>
+              <a:t>• 74 минуты на правки после ревью</a:t>
             </a:r>
           </a:p>
           <a:p>
@@ -6163,7 +5822,7 @@
               <a:spcAft>
                 <a:spcPts val="300"/>
               </a:spcAft>
-              <a:defRPr sz="1800">
+              <a:defRPr sz="1225">
                 <a:solidFill>
                   <a:srgbClr val="000000"/>
                 </a:solidFill>
@@ -6173,7 +5832,7 @@
               </a:defRPr>
             </a:pPr>
             <a:r>
-              <a:rPr sz="1800">
+              <a:rPr sz="1225">
                 <a:solidFill>
                   <a:srgbClr val="000000"/>
                 </a:solidFill>
@@ -6189,7 +5848,7 @@
               <a:spcAft>
                 <a:spcPts val="300"/>
               </a:spcAft>
-              <a:defRPr sz="1800">
+              <a:defRPr sz="1225">
                 <a:solidFill>
                   <a:srgbClr val="000000"/>
                 </a:solidFill>
@@ -6199,7 +5858,7 @@
               </a:defRPr>
             </a:pPr>
             <a:r>
-              <a:rPr sz="1800">
+              <a:rPr sz="1225">
                 <a:solidFill>
                   <a:srgbClr val="000000"/>
                 </a:solidFill>
@@ -6207,7 +5866,33 @@
                 <a:ea typeface="Play"/>
                 <a:cs typeface="Play"/>
               </a:rPr>
-              <a:t>• Дизайн‑отдел из 4 человек закрывает 11 запросов в неделю</a:t>
+              <a:t>• 4 дизайнера закрывают 11 запросов в неделю</a:t>
+            </a:r>
+          </a:p>
+          <a:p>
+            <a:pPr algn="l">
+              <a:spcAft>
+                <a:spcPts val="300"/>
+              </a:spcAft>
+              <a:defRPr sz="1225">
+                <a:solidFill>
+                  <a:srgbClr val="000000"/>
+                </a:solidFill>
+                <a:latin typeface="Play"/>
+                <a:ea typeface="Play"/>
+                <a:cs typeface="Play"/>
+              </a:defRPr>
+            </a:pPr>
+            <a:r>
+              <a:rPr sz="1225">
+                <a:solidFill>
+                  <a:srgbClr val="000000"/>
+                </a:solidFill>
+                <a:latin typeface="Play"/>
+                <a:ea typeface="Play"/>
+                <a:cs typeface="Play"/>
+              </a:rPr>
+              <a:t>• Средний срок ожидания 6 рабочих дней</a:t>
             </a:r>
           </a:p>
         </p:txBody>
@@ -6221,957 +5906,6 @@
 </file>
 
 <file path=ppt/slides/slide57.xml><?xml version="1.0" encoding="utf-8"?>
-<p:sld xmlns:a="http://schemas.openxmlformats.org/drawingml/2006/main" xmlns:p="http://schemas.openxmlformats.org/presentationml/2006/main" xmlns:r="http://schemas.openxmlformats.org/officeDocument/2006/relationships">
-  <p:cSld>
-    <p:spTree>
-      <p:nvGrpSpPr>
-        <p:cNvPr id="1" name=""/>
-        <p:cNvGrpSpPr/>
-        <p:nvPr/>
-      </p:nvGrpSpPr>
-      <p:grpSpPr/>
-      <p:sp>
-        <p:nvSpPr>
-          <p:cNvPr id="1027" name="Google Shape;1027;p65"/>
-          <p:cNvSpPr/>
-          <p:nvPr/>
-        </p:nvSpPr>
-        <p:spPr>
-          <a:xfrm>
-            <a:off x="6064222" y="1209852"/>
-            <a:ext cx="2793985" cy="3014270"/>
-          </a:xfrm>
-          <a:prstGeom prst="roundRect">
-            <a:avLst>
-              <a:gd fmla="val 3436" name="adj"/>
-            </a:avLst>
-          </a:prstGeom>
-          <a:solidFill>
-            <a:schemeClr val="lt2"/>
-          </a:solidFill>
-          <a:ln>
-            <a:noFill/>
-          </a:ln>
-        </p:spPr>
-        <p:txBody>
-          <a:bodyPr anchorCtr="0" anchor="ctr" bIns="91425" lIns="91425" spcFirstLastPara="1" rIns="91425" wrap="square" tIns="91425">
-            <a:noAutofit/>
-          </a:bodyPr>
-          <a:lstStyle/>
-          <a:p>
-            <a:pPr indent="0" lvl="0" marL="0" rtl="0" algn="l">
-              <a:spcBef>
-                <a:spcPts val="0"/>
-              </a:spcBef>
-              <a:spcAft>
-                <a:spcPts val="0"/>
-              </a:spcAft>
-              <a:buNone/>
-            </a:pPr>
-            <a:r>
-              <a:t/>
-            </a:r>
-            <a:endParaRPr/>
-          </a:p>
-        </p:txBody>
-      </p:sp>
-      <p:pic>
-        <p:nvPicPr>
-          <p:cNvPr descr=" " id="1028" name="Google Shape;1028;p65"/>
-          <p:cNvPicPr preferRelativeResize="0"/>
-          <p:nvPr/>
-        </p:nvPicPr>
-        <p:blipFill rotWithShape="1">
-          <a:blip r:embed="rId2">
-            <a:alphaModFix/>
-          </a:blip>
-          <a:srcRect b="0" l="0" r="0" t="0"/>
-          <a:stretch/>
-        </p:blipFill>
-        <p:spPr>
-          <a:xfrm>
-            <a:off x="8203313" y="3566983"/>
-            <a:ext cx="466723" cy="466664"/>
-          </a:xfrm>
-          <a:prstGeom prst="rect">
-            <a:avLst/>
-          </a:prstGeom>
-          <a:noFill/>
-          <a:ln>
-            <a:noFill/>
-          </a:ln>
-        </p:spPr>
-      </p:pic>
-      <p:sp>
-        <p:nvSpPr>
-          <p:cNvPr id="1029" name="Google Shape;1029;p65"/>
-          <p:cNvSpPr/>
-          <p:nvPr/>
-        </p:nvSpPr>
-        <p:spPr>
-          <a:xfrm>
-            <a:off x="3174981" y="1209852"/>
-            <a:ext cx="2793985" cy="3014270"/>
-          </a:xfrm>
-          <a:prstGeom prst="roundRect">
-            <a:avLst>
-              <a:gd fmla="val 3436" name="adj"/>
-            </a:avLst>
-          </a:prstGeom>
-          <a:solidFill>
-            <a:schemeClr val="lt2"/>
-          </a:solidFill>
-          <a:ln>
-            <a:noFill/>
-          </a:ln>
-        </p:spPr>
-        <p:txBody>
-          <a:bodyPr anchorCtr="0" anchor="ctr" bIns="91425" lIns="91425" spcFirstLastPara="1" rIns="91425" wrap="square" tIns="91425">
-            <a:noAutofit/>
-          </a:bodyPr>
-          <a:lstStyle/>
-          <a:p>
-            <a:pPr indent="0" lvl="0" marL="0" rtl="0" algn="l">
-              <a:spcBef>
-                <a:spcPts val="0"/>
-              </a:spcBef>
-              <a:spcAft>
-                <a:spcPts val="0"/>
-              </a:spcAft>
-              <a:buNone/>
-            </a:pPr>
-            <a:r>
-              <a:t/>
-            </a:r>
-            <a:endParaRPr/>
-          </a:p>
-        </p:txBody>
-      </p:sp>
-      <p:pic>
-        <p:nvPicPr>
-          <p:cNvPr descr=" " id="1030" name="Google Shape;1030;p65"/>
-          <p:cNvPicPr preferRelativeResize="0"/>
-          <p:nvPr/>
-        </p:nvPicPr>
-        <p:blipFill rotWithShape="1">
-          <a:blip r:embed="rId2">
-            <a:alphaModFix/>
-          </a:blip>
-          <a:srcRect b="0" l="0" r="0" t="0"/>
-          <a:stretch/>
-        </p:blipFill>
-        <p:spPr>
-          <a:xfrm>
-            <a:off x="5310249" y="3566983"/>
-            <a:ext cx="466723" cy="466664"/>
-          </a:xfrm>
-          <a:prstGeom prst="rect">
-            <a:avLst/>
-          </a:prstGeom>
-          <a:noFill/>
-          <a:ln>
-            <a:noFill/>
-          </a:ln>
-        </p:spPr>
-      </p:pic>
-      <p:sp>
-        <p:nvSpPr>
-          <p:cNvPr id="1031" name="Google Shape;1031;p65"/>
-          <p:cNvSpPr/>
-          <p:nvPr/>
-        </p:nvSpPr>
-        <p:spPr>
-          <a:xfrm>
-            <a:off x="285749" y="1209852"/>
-            <a:ext cx="2793985" cy="3014270"/>
-          </a:xfrm>
-          <a:prstGeom prst="roundRect">
-            <a:avLst>
-              <a:gd fmla="val 3436" name="adj"/>
-            </a:avLst>
-          </a:prstGeom>
-          <a:solidFill>
-            <a:schemeClr val="lt2"/>
-          </a:solidFill>
-          <a:ln>
-            <a:noFill/>
-          </a:ln>
-        </p:spPr>
-        <p:txBody>
-          <a:bodyPr anchorCtr="0" anchor="ctr" bIns="91425" lIns="91425" spcFirstLastPara="1" rIns="91425" wrap="square" tIns="91425">
-            <a:noAutofit/>
-          </a:bodyPr>
-          <a:lstStyle/>
-          <a:p>
-            <a:pPr indent="0" lvl="0" marL="0" rtl="0" algn="l">
-              <a:spcBef>
-                <a:spcPts val="0"/>
-              </a:spcBef>
-              <a:spcAft>
-                <a:spcPts val="0"/>
-              </a:spcAft>
-              <a:buNone/>
-            </a:pPr>
-            <a:r>
-              <a:t/>
-            </a:r>
-            <a:endParaRPr/>
-          </a:p>
-        </p:txBody>
-      </p:sp>
-      <p:sp>
-        <p:nvSpPr>
-          <p:cNvPr id="1032" name="Google Shape;1032;p65"/>
-          <p:cNvSpPr/>
-          <p:nvPr/>
-        </p:nvSpPr>
-        <p:spPr>
-          <a:xfrm>
-            <a:off x="285748" y="286047"/>
-            <a:ext cx="8572456" cy="3938075"/>
-          </a:xfrm>
-          <a:prstGeom prst="rect">
-            <a:avLst/>
-          </a:prstGeom>
-          <a:noFill/>
-          <a:ln>
-            <a:noFill/>
-          </a:ln>
-        </p:spPr>
-        <p:txBody>
-          <a:bodyPr anchorCtr="0" anchor="ctr" bIns="91425" lIns="91425" spcFirstLastPara="1" rIns="91425" wrap="square" tIns="91425">
-            <a:noAutofit/>
-          </a:bodyPr>
-          <a:lstStyle/>
-          <a:p>
-            <a:pPr indent="0" lvl="0" marL="0" rtl="0" algn="l">
-              <a:spcBef>
-                <a:spcPts val="0"/>
-              </a:spcBef>
-              <a:spcAft>
-                <a:spcPts val="0"/>
-              </a:spcAft>
-              <a:buNone/>
-            </a:pPr>
-            <a:r>
-              <a:t/>
-            </a:r>
-            <a:endParaRPr/>
-          </a:p>
-        </p:txBody>
-      </p:sp>
-      <p:sp>
-        <p:nvSpPr>
-          <p:cNvPr id="1033" name="Google Shape;1033;p65"/>
-          <p:cNvSpPr/>
-          <p:nvPr/>
-        </p:nvSpPr>
-        <p:spPr>
-          <a:xfrm>
-            <a:off x="285748" y="1209852"/>
-            <a:ext cx="8572456" cy="3014270"/>
-          </a:xfrm>
-          <a:prstGeom prst="rect">
-            <a:avLst/>
-          </a:prstGeom>
-          <a:noFill/>
-          <a:ln>
-            <a:noFill/>
-          </a:ln>
-        </p:spPr>
-        <p:txBody>
-          <a:bodyPr anchorCtr="0" anchor="ctr" bIns="91425" lIns="91425" spcFirstLastPara="1" rIns="91425" wrap="square" tIns="91425">
-            <a:noAutofit/>
-          </a:bodyPr>
-          <a:lstStyle/>
-          <a:p>
-            <a:pPr indent="0" lvl="0" marL="0" rtl="0" algn="l">
-              <a:spcBef>
-                <a:spcPts val="0"/>
-              </a:spcBef>
-              <a:spcAft>
-                <a:spcPts val="0"/>
-              </a:spcAft>
-              <a:buNone/>
-            </a:pPr>
-            <a:r>
-              <a:t/>
-            </a:r>
-            <a:endParaRPr/>
-          </a:p>
-        </p:txBody>
-      </p:sp>
-      <p:sp>
-        <p:nvSpPr>
-          <p:cNvPr id="1034" name="Google Shape;1034;p65"/>
-          <p:cNvSpPr/>
-          <p:nvPr/>
-        </p:nvSpPr>
-        <p:spPr>
-          <a:xfrm>
-            <a:off x="476248" y="1400327"/>
-            <a:ext cx="2412987" cy="1009519"/>
-          </a:xfrm>
-          <a:prstGeom prst="rect">
-            <a:avLst/>
-          </a:prstGeom>
-          <a:noFill/>
-          <a:ln>
-            <a:noFill/>
-          </a:ln>
-        </p:spPr>
-        <p:txBody>
-          <a:bodyPr anchorCtr="0" anchor="ctr" bIns="91425" lIns="91425" spcFirstLastPara="1" rIns="91425" wrap="square" tIns="91425">
-            <a:noAutofit/>
-          </a:bodyPr>
-          <a:lstStyle/>
-          <a:p>
-            <a:pPr indent="0" lvl="0" marL="0" rtl="0" algn="l">
-              <a:spcBef>
-                <a:spcPts val="0"/>
-              </a:spcBef>
-              <a:spcAft>
-                <a:spcPts val="0"/>
-              </a:spcAft>
-              <a:buNone/>
-            </a:pPr>
-            <a:r>
-              <a:t/>
-            </a:r>
-            <a:endParaRPr/>
-          </a:p>
-        </p:txBody>
-      </p:sp>
-      <p:sp>
-        <p:nvSpPr>
-          <p:cNvPr id="1035" name="Google Shape;1035;p65"/>
-          <p:cNvSpPr/>
-          <p:nvPr/>
-        </p:nvSpPr>
-        <p:spPr>
-          <a:xfrm>
-            <a:off x="476248" y="1400328"/>
-            <a:ext cx="76199" cy="76190"/>
-          </a:xfrm>
-          <a:prstGeom prst="roundRect">
-            <a:avLst>
-              <a:gd fmla="val 31500" name="adj"/>
-            </a:avLst>
-          </a:prstGeom>
-          <a:solidFill>
-            <a:srgbClr val="0077FF"/>
-          </a:solidFill>
-          <a:ln>
-            <a:noFill/>
-          </a:ln>
-        </p:spPr>
-        <p:txBody>
-          <a:bodyPr anchorCtr="0" anchor="ctr" bIns="91425" lIns="91425" spcFirstLastPara="1" rIns="91425" wrap="square" tIns="91425">
-            <a:noAutofit/>
-          </a:bodyPr>
-          <a:lstStyle/>
-          <a:p>
-            <a:pPr indent="0" lvl="0" marL="0" rtl="0" algn="l">
-              <a:spcBef>
-                <a:spcPts val="0"/>
-              </a:spcBef>
-              <a:spcAft>
-                <a:spcPts val="0"/>
-              </a:spcAft>
-              <a:buNone/>
-            </a:pPr>
-            <a:r>
-              <a:t/>
-            </a:r>
-            <a:endParaRPr/>
-          </a:p>
-        </p:txBody>
-      </p:sp>
-      <p:sp>
-        <p:nvSpPr>
-          <p:cNvPr id="1037" name="Google Shape;1037;p65"/>
-          <p:cNvSpPr/>
-          <p:nvPr/>
-        </p:nvSpPr>
-        <p:spPr>
-          <a:xfrm>
-            <a:off x="2422509" y="3566983"/>
-            <a:ext cx="466723" cy="466664"/>
-          </a:xfrm>
-          <a:prstGeom prst="rect">
-            <a:avLst/>
-          </a:prstGeom>
-          <a:noFill/>
-          <a:ln>
-            <a:noFill/>
-          </a:ln>
-        </p:spPr>
-        <p:txBody>
-          <a:bodyPr anchorCtr="0" anchor="ctr" bIns="91425" lIns="91425" spcFirstLastPara="1" rIns="91425" wrap="square" tIns="91425">
-            <a:noAutofit/>
-          </a:bodyPr>
-          <a:lstStyle/>
-          <a:p>
-            <a:pPr indent="0" lvl="0" marL="0" rtl="0" algn="l">
-              <a:spcBef>
-                <a:spcPts val="0"/>
-              </a:spcBef>
-              <a:spcAft>
-                <a:spcPts val="0"/>
-              </a:spcAft>
-              <a:buNone/>
-            </a:pPr>
-            <a:r>
-              <a:t/>
-            </a:r>
-            <a:endParaRPr/>
-          </a:p>
-        </p:txBody>
-      </p:sp>
-      <p:pic>
-        <p:nvPicPr>
-          <p:cNvPr descr=" " id="1038" name="Google Shape;1038;p65"/>
-          <p:cNvPicPr preferRelativeResize="0"/>
-          <p:nvPr/>
-        </p:nvPicPr>
-        <p:blipFill rotWithShape="1">
-          <a:blip r:embed="rId2">
-            <a:alphaModFix/>
-          </a:blip>
-          <a:srcRect b="0" l="0" r="0" t="0"/>
-          <a:stretch/>
-        </p:blipFill>
-        <p:spPr>
-          <a:xfrm>
-            <a:off x="2422506" y="3566983"/>
-            <a:ext cx="466723" cy="466664"/>
-          </a:xfrm>
-          <a:prstGeom prst="rect">
-            <a:avLst/>
-          </a:prstGeom>
-          <a:noFill/>
-          <a:ln>
-            <a:noFill/>
-          </a:ln>
-        </p:spPr>
-      </p:pic>
-      <p:pic>
-        <p:nvPicPr>
-          <p:cNvPr descr=" " id="1039" name="Google Shape;1039;p65"/>
-          <p:cNvPicPr preferRelativeResize="0"/>
-          <p:nvPr/>
-        </p:nvPicPr>
-        <p:blipFill rotWithShape="1">
-          <a:blip r:embed="rId3">
-            <a:alphaModFix/>
-          </a:blip>
-          <a:srcRect b="0" l="0" r="0" t="0"/>
-          <a:stretch/>
-        </p:blipFill>
-        <p:spPr>
-          <a:xfrm>
-            <a:off x="2555859" y="3700316"/>
-            <a:ext cx="200024" cy="199999"/>
-          </a:xfrm>
-          <a:prstGeom prst="rect">
-            <a:avLst/>
-          </a:prstGeom>
-          <a:noFill/>
-          <a:ln>
-            <a:noFill/>
-          </a:ln>
-        </p:spPr>
-      </p:pic>
-      <p:sp>
-        <p:nvSpPr>
-          <p:cNvPr id="1040" name="Google Shape;1040;p65"/>
-          <p:cNvSpPr/>
-          <p:nvPr/>
-        </p:nvSpPr>
-        <p:spPr>
-          <a:xfrm>
-            <a:off x="3365480" y="1400327"/>
-            <a:ext cx="2412987" cy="1009519"/>
-          </a:xfrm>
-          <a:prstGeom prst="rect">
-            <a:avLst/>
-          </a:prstGeom>
-          <a:noFill/>
-          <a:ln>
-            <a:noFill/>
-          </a:ln>
-        </p:spPr>
-        <p:txBody>
-          <a:bodyPr anchorCtr="0" anchor="ctr" bIns="91425" lIns="91425" spcFirstLastPara="1" rIns="91425" wrap="square" tIns="91425">
-            <a:noAutofit/>
-          </a:bodyPr>
-          <a:lstStyle/>
-          <a:p>
-            <a:pPr indent="0" lvl="0" marL="0" rtl="0" algn="l">
-              <a:spcBef>
-                <a:spcPts val="0"/>
-              </a:spcBef>
-              <a:spcAft>
-                <a:spcPts val="0"/>
-              </a:spcAft>
-              <a:buNone/>
-            </a:pPr>
-            <a:r>
-              <a:t/>
-            </a:r>
-            <a:endParaRPr/>
-          </a:p>
-        </p:txBody>
-      </p:sp>
-      <p:sp>
-        <p:nvSpPr>
-          <p:cNvPr id="1041" name="Google Shape;1041;p65"/>
-          <p:cNvSpPr/>
-          <p:nvPr/>
-        </p:nvSpPr>
-        <p:spPr>
-          <a:xfrm>
-            <a:off x="3365480" y="1400328"/>
-            <a:ext cx="76199" cy="76190"/>
-          </a:xfrm>
-          <a:prstGeom prst="roundRect">
-            <a:avLst>
-              <a:gd fmla="val 31500" name="adj"/>
-            </a:avLst>
-          </a:prstGeom>
-          <a:solidFill>
-            <a:srgbClr val="0077FF"/>
-          </a:solidFill>
-          <a:ln>
-            <a:noFill/>
-          </a:ln>
-        </p:spPr>
-        <p:txBody>
-          <a:bodyPr anchorCtr="0" anchor="ctr" bIns="91425" lIns="91425" spcFirstLastPara="1" rIns="91425" wrap="square" tIns="91425">
-            <a:noAutofit/>
-          </a:bodyPr>
-          <a:lstStyle/>
-          <a:p>
-            <a:pPr indent="0" lvl="0" marL="0" rtl="0" algn="l">
-              <a:spcBef>
-                <a:spcPts val="0"/>
-              </a:spcBef>
-              <a:spcAft>
-                <a:spcPts val="0"/>
-              </a:spcAft>
-              <a:buNone/>
-            </a:pPr>
-            <a:r>
-              <a:t/>
-            </a:r>
-            <a:endParaRPr/>
-          </a:p>
-        </p:txBody>
-      </p:sp>
-      <p:sp>
-        <p:nvSpPr>
-          <p:cNvPr id="1043" name="Google Shape;1043;p65"/>
-          <p:cNvSpPr/>
-          <p:nvPr/>
-        </p:nvSpPr>
-        <p:spPr>
-          <a:xfrm>
-            <a:off x="5311741" y="3566983"/>
-            <a:ext cx="466723" cy="466664"/>
-          </a:xfrm>
-          <a:prstGeom prst="rect">
-            <a:avLst/>
-          </a:prstGeom>
-          <a:noFill/>
-          <a:ln>
-            <a:noFill/>
-          </a:ln>
-        </p:spPr>
-        <p:txBody>
-          <a:bodyPr anchorCtr="0" anchor="ctr" bIns="91425" lIns="91425" spcFirstLastPara="1" rIns="91425" wrap="square" tIns="91425">
-            <a:noAutofit/>
-          </a:bodyPr>
-          <a:lstStyle/>
-          <a:p>
-            <a:pPr indent="0" lvl="0" marL="0" rtl="0" algn="l">
-              <a:spcBef>
-                <a:spcPts val="0"/>
-              </a:spcBef>
-              <a:spcAft>
-                <a:spcPts val="0"/>
-              </a:spcAft>
-              <a:buNone/>
-            </a:pPr>
-            <a:r>
-              <a:t/>
-            </a:r>
-            <a:endParaRPr/>
-          </a:p>
-        </p:txBody>
-      </p:sp>
-      <p:pic>
-        <p:nvPicPr>
-          <p:cNvPr descr=" " id="1044" name="Google Shape;1044;p65"/>
-          <p:cNvPicPr preferRelativeResize="0"/>
-          <p:nvPr/>
-        </p:nvPicPr>
-        <p:blipFill rotWithShape="1">
-          <a:blip r:embed="rId3">
-            <a:alphaModFix/>
-          </a:blip>
-          <a:srcRect b="0" l="0" r="0" t="0"/>
-          <a:stretch/>
-        </p:blipFill>
-        <p:spPr>
-          <a:xfrm>
-            <a:off x="5445091" y="3700316"/>
-            <a:ext cx="200024" cy="199999"/>
-          </a:xfrm>
-          <a:prstGeom prst="rect">
-            <a:avLst/>
-          </a:prstGeom>
-          <a:noFill/>
-          <a:ln>
-            <a:noFill/>
-          </a:ln>
-        </p:spPr>
-      </p:pic>
-      <p:sp>
-        <p:nvSpPr>
-          <p:cNvPr id="1045" name="Google Shape;1045;p65"/>
-          <p:cNvSpPr/>
-          <p:nvPr/>
-        </p:nvSpPr>
-        <p:spPr>
-          <a:xfrm>
-            <a:off x="6254721" y="1400327"/>
-            <a:ext cx="2412987" cy="1009519"/>
-          </a:xfrm>
-          <a:prstGeom prst="rect">
-            <a:avLst/>
-          </a:prstGeom>
-          <a:noFill/>
-          <a:ln>
-            <a:noFill/>
-          </a:ln>
-        </p:spPr>
-        <p:txBody>
-          <a:bodyPr anchorCtr="0" anchor="ctr" bIns="91425" lIns="91425" spcFirstLastPara="1" rIns="91425" wrap="square" tIns="91425">
-            <a:noAutofit/>
-          </a:bodyPr>
-          <a:lstStyle/>
-          <a:p>
-            <a:pPr indent="0" lvl="0" marL="0" rtl="0" algn="l">
-              <a:spcBef>
-                <a:spcPts val="0"/>
-              </a:spcBef>
-              <a:spcAft>
-                <a:spcPts val="0"/>
-              </a:spcAft>
-              <a:buNone/>
-            </a:pPr>
-            <a:r>
-              <a:t/>
-            </a:r>
-            <a:endParaRPr/>
-          </a:p>
-        </p:txBody>
-      </p:sp>
-      <p:sp>
-        <p:nvSpPr>
-          <p:cNvPr id="1046" name="Google Shape;1046;p65"/>
-          <p:cNvSpPr/>
-          <p:nvPr/>
-        </p:nvSpPr>
-        <p:spPr>
-          <a:xfrm>
-            <a:off x="6254721" y="1400328"/>
-            <a:ext cx="76199" cy="76190"/>
-          </a:xfrm>
-          <a:prstGeom prst="roundRect">
-            <a:avLst>
-              <a:gd fmla="val 31500" name="adj"/>
-            </a:avLst>
-          </a:prstGeom>
-          <a:solidFill>
-            <a:srgbClr val="0077FF"/>
-          </a:solidFill>
-          <a:ln>
-            <a:noFill/>
-          </a:ln>
-        </p:spPr>
-        <p:txBody>
-          <a:bodyPr anchorCtr="0" anchor="ctr" bIns="91425" lIns="91425" spcFirstLastPara="1" rIns="91425" wrap="square" tIns="91425">
-            <a:noAutofit/>
-          </a:bodyPr>
-          <a:lstStyle/>
-          <a:p>
-            <a:pPr indent="0" lvl="0" marL="0" rtl="0" algn="l">
-              <a:spcBef>
-                <a:spcPts val="0"/>
-              </a:spcBef>
-              <a:spcAft>
-                <a:spcPts val="0"/>
-              </a:spcAft>
-              <a:buNone/>
-            </a:pPr>
-            <a:r>
-              <a:t/>
-            </a:r>
-            <a:endParaRPr/>
-          </a:p>
-        </p:txBody>
-      </p:sp>
-      <p:sp>
-        <p:nvSpPr>
-          <p:cNvPr id="1048" name="Google Shape;1048;p65"/>
-          <p:cNvSpPr/>
-          <p:nvPr/>
-        </p:nvSpPr>
-        <p:spPr>
-          <a:xfrm>
-            <a:off x="8200982" y="3566983"/>
-            <a:ext cx="466723" cy="466664"/>
-          </a:xfrm>
-          <a:prstGeom prst="rect">
-            <a:avLst/>
-          </a:prstGeom>
-          <a:noFill/>
-          <a:ln>
-            <a:noFill/>
-          </a:ln>
-        </p:spPr>
-        <p:txBody>
-          <a:bodyPr anchorCtr="0" anchor="ctr" bIns="91425" lIns="91425" spcFirstLastPara="1" rIns="91425" wrap="square" tIns="91425">
-            <a:noAutofit/>
-          </a:bodyPr>
-          <a:lstStyle/>
-          <a:p>
-            <a:pPr indent="0" lvl="0" marL="0" rtl="0" algn="l">
-              <a:spcBef>
-                <a:spcPts val="0"/>
-              </a:spcBef>
-              <a:spcAft>
-                <a:spcPts val="0"/>
-              </a:spcAft>
-              <a:buNone/>
-            </a:pPr>
-            <a:r>
-              <a:t/>
-            </a:r>
-            <a:endParaRPr/>
-          </a:p>
-        </p:txBody>
-      </p:sp>
-      <p:pic>
-        <p:nvPicPr>
-          <p:cNvPr descr=" " id="1049" name="Google Shape;1049;p65"/>
-          <p:cNvPicPr preferRelativeResize="0"/>
-          <p:nvPr/>
-        </p:nvPicPr>
-        <p:blipFill rotWithShape="1">
-          <a:blip r:embed="rId3">
-            <a:alphaModFix/>
-          </a:blip>
-          <a:srcRect b="0" l="0" r="0" t="0"/>
-          <a:stretch/>
-        </p:blipFill>
-        <p:spPr>
-          <a:xfrm>
-            <a:off x="8334332" y="3700316"/>
-            <a:ext cx="200024" cy="199999"/>
-          </a:xfrm>
-          <a:prstGeom prst="rect">
-            <a:avLst/>
-          </a:prstGeom>
-          <a:noFill/>
-          <a:ln>
-            <a:noFill/>
-          </a:ln>
-        </p:spPr>
-      </p:pic>
-      <p:sp>
-        <p:nvSpPr>
-          <p:cNvPr id="1050" name="title"/>
-          <p:cNvSpPr txBox="1"/>
-          <p:nvPr/>
-        </p:nvSpPr>
-        <p:spPr>
-          <a:xfrm>
-            <a:off x="274320" y="282943"/>
-            <a:ext cx="6792986" cy="617220"/>
-          </a:xfrm>
-          <a:prstGeom prst="rect">
-            <a:avLst/>
-          </a:prstGeom>
-          <a:noFill/>
-        </p:spPr>
-        <p:txBody>
-          <a:bodyPr wrap="square" lIns="76200" rIns="76200" tIns="50800" bIns="50800">
-            <a:spAutoFit/>
-          </a:bodyPr>
-          <a:lstStyle/>
-          <a:p>
-            <a:pPr algn="l">
-              <a:spcAft>
-                <a:spcPts val="300"/>
-              </a:spcAft>
-              <a:defRPr sz="2705">
-                <a:solidFill>
-                  <a:srgbClr val="000000"/>
-                </a:solidFill>
-                <a:latin typeface="Play"/>
-                <a:ea typeface="Play"/>
-                <a:cs typeface="Play"/>
-              </a:defRPr>
-            </a:pPr>
-            <a:r>
-              <a:rPr sz="2705">
-                <a:solidFill>
-                  <a:srgbClr val="000000"/>
-                </a:solidFill>
-                <a:latin typeface="Play"/>
-                <a:ea typeface="Play"/>
-                <a:cs typeface="Play"/>
-              </a:rPr>
-              <a:t>Предложение</a:t>
-            </a:r>
-          </a:p>
-        </p:txBody>
-      </p:sp>
-      <p:sp>
-        <p:nvSpPr>
-          <p:cNvPr id="1051" name="lead"/>
-          <p:cNvSpPr txBox="1"/>
-          <p:nvPr/>
-        </p:nvSpPr>
-        <p:spPr>
-          <a:xfrm>
-            <a:off x="1108801" y="1476493"/>
-            <a:ext cx="6675851" cy="295247"/>
-          </a:xfrm>
-          <a:prstGeom prst="rect">
-            <a:avLst/>
-          </a:prstGeom>
-          <a:noFill/>
-        </p:spPr>
-        <p:txBody>
-          <a:bodyPr wrap="square" lIns="76200" rIns="76200" tIns="50800" bIns="50800">
-            <a:spAutoFit/>
-          </a:bodyPr>
-          <a:lstStyle/>
-          <a:p>
-            <a:pPr algn="l">
-              <a:spcAft>
-                <a:spcPts val="300"/>
-              </a:spcAft>
-              <a:defRPr sz="1200">
-                <a:solidFill>
-                  <a:srgbClr val="000000"/>
-                </a:solidFill>
-                <a:latin typeface="Play"/>
-                <a:ea typeface="Play"/>
-                <a:cs typeface="Play"/>
-              </a:defRPr>
-            </a:pPr>
-            <a:r>
-              <a:rPr sz="1200">
-                <a:solidFill>
-                  <a:srgbClr val="000000"/>
-                </a:solidFill>
-                <a:latin typeface="Play"/>
-                <a:ea typeface="Play"/>
-                <a:cs typeface="Play"/>
-              </a:rPr>
-              <a:t>Сервис принимает шаблон pptx и материалы</a:t>
-            </a:r>
-          </a:p>
-        </p:txBody>
-      </p:sp>
-      <p:sp>
-        <p:nvSpPr>
-          <p:cNvPr id="1052" name="body"/>
-          <p:cNvSpPr txBox="1"/>
-          <p:nvPr/>
-        </p:nvSpPr>
-        <p:spPr>
-          <a:xfrm>
-            <a:off x="1108801" y="1830789"/>
-            <a:ext cx="6675851" cy="629860"/>
-          </a:xfrm>
-          <a:prstGeom prst="rect">
-            <a:avLst/>
-          </a:prstGeom>
-          <a:noFill/>
-        </p:spPr>
-        <p:txBody>
-          <a:bodyPr wrap="square" lIns="76200" rIns="76200" tIns="50800" bIns="50800">
-            <a:spAutoFit/>
-          </a:bodyPr>
-          <a:lstStyle/>
-          <a:p>
-            <a:pPr algn="l">
-              <a:spcAft>
-                <a:spcPts val="300"/>
-              </a:spcAft>
-              <a:defRPr sz="1406">
-                <a:solidFill>
-                  <a:srgbClr val="000000"/>
-                </a:solidFill>
-                <a:latin typeface="Play"/>
-                <a:ea typeface="Play"/>
-                <a:cs typeface="Play"/>
-              </a:defRPr>
-            </a:pPr>
-            <a:r>
-              <a:rPr sz="1406">
-                <a:solidFill>
-                  <a:srgbClr val="000000"/>
-                </a:solidFill>
-                <a:latin typeface="Play"/>
-                <a:ea typeface="Play"/>
-                <a:cs typeface="Play"/>
-              </a:rPr>
-              <a:t>• Автоматически формирует дизайн‑систему и план колоды</a:t>
-            </a:r>
-          </a:p>
-          <a:p>
-            <a:pPr algn="l">
-              <a:spcAft>
-                <a:spcPts val="300"/>
-              </a:spcAft>
-              <a:defRPr sz="1406">
-                <a:solidFill>
-                  <a:srgbClr val="000000"/>
-                </a:solidFill>
-                <a:latin typeface="Play"/>
-                <a:ea typeface="Play"/>
-                <a:cs typeface="Play"/>
-              </a:defRPr>
-            </a:pPr>
-            <a:r>
-              <a:rPr sz="1406">
-                <a:solidFill>
-                  <a:srgbClr val="000000"/>
-                </a:solidFill>
-                <a:latin typeface="Play"/>
-                <a:ea typeface="Play"/>
-                <a:cs typeface="Play"/>
-              </a:rPr>
-              <a:t>• Экспорт в pptx, pdf и html с редактируемыми слайдами</a:t>
-            </a:r>
-          </a:p>
-        </p:txBody>
-      </p:sp>
-    </p:spTree>
-  </p:cSld>
-  <p:clrMapOvr>
-    <a:masterClrMapping/>
-  </p:clrMapOvr>
-</p:sld>
-</file>
-
-<file path=ppt/slides/slide58.xml><?xml version="1.0" encoding="utf-8"?>
 <p:sld xmlns:a="http://schemas.openxmlformats.org/drawingml/2006/main" xmlns:p="http://schemas.openxmlformats.org/presentationml/2006/main" xmlns:r="http://schemas.openxmlformats.org/officeDocument/2006/relationships">
   <p:cSld>
     <p:spTree>
@@ -7279,7 +6013,7 @@
                 <a:ea typeface="Play"/>
                 <a:cs typeface="Play"/>
               </a:rPr>
-              <a:t>Ожидаемый эффект</a:t>
+              <a:t>Предложение</a:t>
             </a:r>
           </a:p>
         </p:txBody>
@@ -7292,8 +6026,8 @@
         </p:nvSpPr>
         <p:spPr>
           <a:xfrm>
-            <a:off x="993266" y="1414513"/>
-            <a:ext cx="5751575" cy="648590"/>
+            <a:off x="274320" y="1414513"/>
+            <a:ext cx="6792986" cy="648590"/>
           </a:xfrm>
           <a:prstGeom prst="rect">
             <a:avLst/>
@@ -7310,7 +6044,7 @@
               <a:spcAft>
                 <a:spcPts val="300"/>
               </a:spcAft>
-              <a:defRPr sz="1803" b="1">
+              <a:defRPr sz="2705" b="1">
                 <a:solidFill>
                   <a:srgbClr val="000000"/>
                 </a:solidFill>
@@ -7320,7 +6054,7 @@
               </a:defRPr>
             </a:pPr>
             <a:r>
-              <a:rPr sz="1803" b="1">
+              <a:rPr sz="2705" b="1">
                 <a:solidFill>
                   <a:srgbClr val="000000"/>
                 </a:solidFill>
@@ -7328,7 +6062,7 @@
                 <a:ea typeface="Play"/>
                 <a:cs typeface="Play"/>
               </a:rPr>
-              <a:t>68 презентаций собраны за 6 недель пилота</a:t>
+              <a:t>Принимает шаблон pptx и материалы</a:t>
             </a:r>
           </a:p>
         </p:txBody>
@@ -7341,8 +6075,8 @@
         </p:nvSpPr>
         <p:spPr>
           <a:xfrm>
-            <a:off x="993266" y="2192822"/>
-            <a:ext cx="5751575" cy="1383659"/>
+            <a:off x="274320" y="2192822"/>
+            <a:ext cx="6792986" cy="1383659"/>
           </a:xfrm>
           <a:prstGeom prst="rect">
             <a:avLst/>
@@ -7359,7 +6093,7 @@
               <a:spcAft>
                 <a:spcPts val="300"/>
               </a:spcAft>
-              <a:defRPr sz="1406" b="1">
+              <a:defRPr sz="1803" b="1">
                 <a:solidFill>
                   <a:srgbClr val="000000"/>
                 </a:solidFill>
@@ -7369,7 +6103,7 @@
               </a:defRPr>
             </a:pPr>
             <a:r>
-              <a:rPr sz="1406" b="1">
+              <a:rPr sz="1803" b="1">
                 <a:solidFill>
                   <a:srgbClr val="000000"/>
                 </a:solidFill>
@@ -7377,7 +6111,7 @@
                 <a:ea typeface="Play"/>
                 <a:cs typeface="Play"/>
               </a:rPr>
-              <a:t>• Средняя сборка 12 слайдов теперь 4 минуты</a:t>
+              <a:t>• Генерирует колоду по дизайн‑системе</a:t>
             </a:r>
           </a:p>
           <a:p>
@@ -7385,7 +6119,7 @@
               <a:spcAft>
                 <a:spcPts val="300"/>
               </a:spcAft>
-              <a:defRPr sz="1406" b="1">
+              <a:defRPr sz="1803" b="1">
                 <a:solidFill>
                   <a:srgbClr val="000000"/>
                 </a:solidFill>
@@ -7395,7 +6129,7 @@
               </a:defRPr>
             </a:pPr>
             <a:r>
-              <a:rPr sz="1406" b="1">
+              <a:rPr sz="1803" b="1">
                 <a:solidFill>
                   <a:srgbClr val="000000"/>
                 </a:solidFill>
@@ -7403,7 +6137,7 @@
                 <a:ea typeface="Play"/>
                 <a:cs typeface="Play"/>
               </a:rPr>
-              <a:t>• Время до первой версии сократилось с 6 дней до 1</a:t>
+              <a:t>• Аудит качества проверяет каждый элемент</a:t>
             </a:r>
           </a:p>
           <a:p>
@@ -7411,7 +6145,7 @@
               <a:spcAft>
                 <a:spcPts val="300"/>
               </a:spcAft>
-              <a:defRPr sz="1406" b="1">
+              <a:defRPr sz="1803" b="1">
                 <a:solidFill>
                   <a:srgbClr val="000000"/>
                 </a:solidFill>
@@ -7421,7 +6155,7 @@
               </a:defRPr>
             </a:pPr>
             <a:r>
-              <a:rPr sz="1406" b="1">
+              <a:rPr sz="1803" b="1">
                 <a:solidFill>
                   <a:srgbClr val="000000"/>
                 </a:solidFill>
@@ -7429,7 +6163,7 @@
                 <a:ea typeface="Play"/>
                 <a:cs typeface="Play"/>
               </a:rPr>
-              <a:t>• Нарушений фирменного стиля 2 из 68, исправлены автоматически</a:t>
+              <a:t>• Экспорт в pptx, pdf и html</a:t>
             </a:r>
           </a:p>
           <a:p>
@@ -7437,7 +6171,7 @@
               <a:spcAft>
                 <a:spcPts val="300"/>
               </a:spcAft>
-              <a:defRPr sz="1406" b="1">
+              <a:defRPr sz="1803" b="1">
                 <a:solidFill>
                   <a:srgbClr val="000000"/>
                 </a:solidFill>
@@ -7447,7 +6181,7 @@
               </a:defRPr>
             </a:pPr>
             <a:r>
-              <a:rPr sz="1406" b="1">
+              <a:rPr sz="1803" b="1">
                 <a:solidFill>
                   <a:srgbClr val="000000"/>
                 </a:solidFill>
@@ -7455,7 +6189,7 @@
                 <a:ea typeface="Play"/>
                 <a:cs typeface="Play"/>
               </a:rPr>
-              <a:t>• Дизайнеры закрыли 38 запросов вместо 11 в неделю</a:t>
+              <a:t>• Слайды остаются редактируемыми</a:t>
             </a:r>
           </a:p>
         </p:txBody>
@@ -7468,7 +6202,7 @@
 </p:sld>
 </file>
 
-<file path=ppt/slides/slide59.xml><?xml version="1.0" encoding="utf-8"?>
+<file path=ppt/slides/slide58.xml><?xml version="1.0" encoding="utf-8"?>
 <p:sld xmlns:a="http://schemas.openxmlformats.org/drawingml/2006/main" xmlns:p="http://schemas.openxmlformats.org/presentationml/2006/main" xmlns:r="http://schemas.openxmlformats.org/officeDocument/2006/relationships">
   <p:cSld>
     <p:spTree>
@@ -7548,49 +6282,6 @@
       </p:sp>
       <p:sp>
         <p:nvSpPr>
-          <p:cNvPr id="2387" name="Google Shape;2387;p88"/>
-          <p:cNvSpPr/>
-          <p:nvPr/>
-        </p:nvSpPr>
-        <p:spPr>
-          <a:xfrm>
-            <a:off x="319086" y="1933658"/>
-            <a:ext cx="138112" cy="138095"/>
-          </a:xfrm>
-          <a:prstGeom prst="ellipse">
-            <a:avLst/>
-          </a:prstGeom>
-          <a:solidFill>
-            <a:srgbClr val="0077FF"/>
-          </a:solidFill>
-          <a:ln>
-            <a:noFill/>
-          </a:ln>
-        </p:spPr>
-        <p:txBody>
-          <a:bodyPr anchorCtr="0" anchor="ctr" bIns="91425" lIns="91425" spcFirstLastPara="1" rIns="91425" wrap="square" tIns="91425">
-            <a:noAutofit/>
-          </a:bodyPr>
-          <a:lstStyle/>
-          <a:p>
-            <a:pPr indent="0" lvl="0" marL="0" rtl="0" algn="l">
-              <a:spcBef>
-                <a:spcPts val="0"/>
-              </a:spcBef>
-              <a:spcAft>
-                <a:spcPts val="0"/>
-              </a:spcAft>
-              <a:buNone/>
-            </a:pPr>
-            <a:r>
-              <a:t/>
-            </a:r>
-            <a:endParaRPr/>
-          </a:p>
-        </p:txBody>
-      </p:sp>
-      <p:sp>
-        <p:nvSpPr>
           <p:cNvPr id="2388" name="Google Shape;2388;p88"/>
           <p:cNvSpPr/>
           <p:nvPr/>
@@ -7632,49 +6323,6 @@
       </p:sp>
       <p:sp>
         <p:nvSpPr>
-          <p:cNvPr id="2389" name="Google Shape;2389;p88"/>
-          <p:cNvSpPr/>
-          <p:nvPr/>
-        </p:nvSpPr>
-        <p:spPr>
-          <a:xfrm>
-            <a:off x="2600312" y="1933658"/>
-            <a:ext cx="138112" cy="138095"/>
-          </a:xfrm>
-          <a:prstGeom prst="ellipse">
-            <a:avLst/>
-          </a:prstGeom>
-          <a:solidFill>
-            <a:srgbClr val="0077FF"/>
-          </a:solidFill>
-          <a:ln>
-            <a:noFill/>
-          </a:ln>
-        </p:spPr>
-        <p:txBody>
-          <a:bodyPr anchorCtr="0" anchor="ctr" bIns="91425" lIns="91425" spcFirstLastPara="1" rIns="91425" wrap="square" tIns="91425">
-            <a:noAutofit/>
-          </a:bodyPr>
-          <a:lstStyle/>
-          <a:p>
-            <a:pPr indent="0" lvl="0" marL="0" rtl="0" algn="l">
-              <a:spcBef>
-                <a:spcPts val="0"/>
-              </a:spcBef>
-              <a:spcAft>
-                <a:spcPts val="0"/>
-              </a:spcAft>
-              <a:buNone/>
-            </a:pPr>
-            <a:r>
-              <a:t/>
-            </a:r>
-            <a:endParaRPr/>
-          </a:p>
-        </p:txBody>
-      </p:sp>
-      <p:sp>
-        <p:nvSpPr>
           <p:cNvPr id="2390" name="Google Shape;2390;p88"/>
           <p:cNvSpPr/>
           <p:nvPr/>
@@ -7716,49 +6364,6 @@
       </p:sp>
       <p:sp>
         <p:nvSpPr>
-          <p:cNvPr id="2391" name="Google Shape;2391;p88"/>
-          <p:cNvSpPr/>
-          <p:nvPr/>
-        </p:nvSpPr>
-        <p:spPr>
-          <a:xfrm>
-            <a:off x="4881537" y="1933658"/>
-            <a:ext cx="138112" cy="138095"/>
-          </a:xfrm>
-          <a:prstGeom prst="ellipse">
-            <a:avLst/>
-          </a:prstGeom>
-          <a:solidFill>
-            <a:srgbClr val="0077FF"/>
-          </a:solidFill>
-          <a:ln>
-            <a:noFill/>
-          </a:ln>
-        </p:spPr>
-        <p:txBody>
-          <a:bodyPr anchorCtr="0" anchor="ctr" bIns="91425" lIns="91425" spcFirstLastPara="1" rIns="91425" wrap="square" tIns="91425">
-            <a:noAutofit/>
-          </a:bodyPr>
-          <a:lstStyle/>
-          <a:p>
-            <a:pPr indent="0" lvl="0" marL="0" rtl="0" algn="l">
-              <a:spcBef>
-                <a:spcPts val="0"/>
-              </a:spcBef>
-              <a:spcAft>
-                <a:spcPts val="0"/>
-              </a:spcAft>
-              <a:buNone/>
-            </a:pPr>
-            <a:r>
-              <a:t/>
-            </a:r>
-            <a:endParaRPr/>
-          </a:p>
-        </p:txBody>
-      </p:sp>
-      <p:sp>
-        <p:nvSpPr>
           <p:cNvPr id="2392" name="Google Shape;2392;p88"/>
           <p:cNvSpPr/>
           <p:nvPr/>
@@ -7772,49 +6377,6 @@
             <a:avLst/>
           </a:prstGeom>
           <a:noFill/>
-          <a:ln>
-            <a:noFill/>
-          </a:ln>
-        </p:spPr>
-        <p:txBody>
-          <a:bodyPr anchorCtr="0" anchor="ctr" bIns="91425" lIns="91425" spcFirstLastPara="1" rIns="91425" wrap="square" tIns="91425">
-            <a:noAutofit/>
-          </a:bodyPr>
-          <a:lstStyle/>
-          <a:p>
-            <a:pPr indent="0" lvl="0" marL="0" rtl="0" algn="l">
-              <a:spcBef>
-                <a:spcPts val="0"/>
-              </a:spcBef>
-              <a:spcAft>
-                <a:spcPts val="0"/>
-              </a:spcAft>
-              <a:buNone/>
-            </a:pPr>
-            <a:r>
-              <a:t/>
-            </a:r>
-            <a:endParaRPr/>
-          </a:p>
-        </p:txBody>
-      </p:sp>
-      <p:sp>
-        <p:nvSpPr>
-          <p:cNvPr id="2393" name="Google Shape;2393;p88"/>
-          <p:cNvSpPr/>
-          <p:nvPr/>
-        </p:nvSpPr>
-        <p:spPr>
-          <a:xfrm>
-            <a:off x="7162763" y="1933658"/>
-            <a:ext cx="138112" cy="138095"/>
-          </a:xfrm>
-          <a:prstGeom prst="ellipse">
-            <a:avLst/>
-          </a:prstGeom>
-          <a:solidFill>
-            <a:srgbClr val="0077FF"/>
-          </a:solidFill>
           <a:ln>
             <a:noFill/>
           </a:ln>
@@ -7870,136 +6432,7 @@
       </p:pic>
       <p:sp>
         <p:nvSpPr>
-          <p:cNvPr id="2396" name="Google Shape;2396;p88"/>
-          <p:cNvSpPr/>
-          <p:nvPr/>
-        </p:nvSpPr>
-        <p:spPr>
-          <a:xfrm>
-            <a:off x="319086" y="3647935"/>
-            <a:ext cx="138112" cy="138095"/>
-          </a:xfrm>
-          <a:prstGeom prst="ellipse">
-            <a:avLst/>
-          </a:prstGeom>
-          <a:solidFill>
-            <a:srgbClr val="0077FF"/>
-          </a:solidFill>
-          <a:ln>
-            <a:noFill/>
-          </a:ln>
-        </p:spPr>
-        <p:txBody>
-          <a:bodyPr anchorCtr="0" anchor="ctr" bIns="91425" lIns="91425" spcFirstLastPara="1" rIns="91425" wrap="square" tIns="91425">
-            <a:noAutofit/>
-          </a:bodyPr>
-          <a:lstStyle/>
-          <a:p>
-            <a:pPr indent="0" lvl="0" marL="0" rtl="0" algn="l">
-              <a:spcBef>
-                <a:spcPts val="0"/>
-              </a:spcBef>
-              <a:spcAft>
-                <a:spcPts val="0"/>
-              </a:spcAft>
-              <a:buNone/>
-            </a:pPr>
-            <a:r>
-              <a:t/>
-            </a:r>
-            <a:endParaRPr/>
-          </a:p>
-        </p:txBody>
-      </p:sp>
-      <p:sp>
-        <p:nvSpPr>
-          <p:cNvPr id="2398" name="Google Shape;2398;p88"/>
-          <p:cNvSpPr/>
-          <p:nvPr/>
-        </p:nvSpPr>
-        <p:spPr>
-          <a:xfrm>
-            <a:off x="2600312" y="3647935"/>
-            <a:ext cx="138112" cy="138095"/>
-          </a:xfrm>
-          <a:prstGeom prst="ellipse">
-            <a:avLst/>
-          </a:prstGeom>
-          <a:solidFill>
-            <a:srgbClr val="0077FF"/>
-          </a:solidFill>
-          <a:ln>
-            <a:noFill/>
-          </a:ln>
-        </p:spPr>
-        <p:txBody>
-          <a:bodyPr anchorCtr="0" anchor="ctr" bIns="91425" lIns="91425" spcFirstLastPara="1" rIns="91425" wrap="square" tIns="91425">
-            <a:noAutofit/>
-          </a:bodyPr>
-          <a:lstStyle/>
-          <a:p>
-            <a:pPr indent="0" lvl="0" marL="0" rtl="0" algn="l">
-              <a:spcBef>
-                <a:spcPts val="0"/>
-              </a:spcBef>
-              <a:spcAft>
-                <a:spcPts val="0"/>
-              </a:spcAft>
-              <a:buNone/>
-            </a:pPr>
-            <a:r>
-              <a:t/>
-            </a:r>
-            <a:endParaRPr/>
-          </a:p>
-        </p:txBody>
-      </p:sp>
-      <p:sp>
-        <p:nvSpPr>
-          <p:cNvPr id="2400" name="Google Shape;2400;p88"/>
-          <p:cNvSpPr/>
-          <p:nvPr/>
-        </p:nvSpPr>
-        <p:spPr>
-          <a:xfrm>
-            <a:off x="4881537" y="3647935"/>
-            <a:ext cx="138112" cy="138095"/>
-          </a:xfrm>
-          <a:prstGeom prst="ellipse">
-            <a:avLst/>
-          </a:prstGeom>
-          <a:solidFill>
-            <a:srgbClr val="0077FF"/>
-          </a:solidFill>
-          <a:ln>
-            <a:noFill/>
-          </a:ln>
-        </p:spPr>
-        <p:txBody>
-          <a:bodyPr anchorCtr="0" anchor="ctr" bIns="91425" lIns="91425" spcFirstLastPara="1" rIns="91425" wrap="square" tIns="91425">
-            <a:noAutofit/>
-          </a:bodyPr>
-          <a:lstStyle/>
-          <a:p>
-            <a:pPr indent="0" lvl="0" marL="0" rtl="0" algn="l">
-              <a:spcBef>
-                <a:spcPts val="0"/>
-              </a:spcBef>
-              <a:spcAft>
-                <a:spcPts val="0"/>
-              </a:spcAft>
-              <a:buNone/>
-            </a:pPr>
-            <a:r>
-              <a:t/>
-            </a:r>
-            <a:endParaRPr/>
-          </a:p>
-        </p:txBody>
-      </p:sp>
-      <p:sp>
-        <p:nvSpPr>
-          <p:cNvPr id="2401" name="title"/>
+          <p:cNvPr id="2395" name="title"/>
           <p:cNvSpPr txBox="1"/>
           <p:nvPr/>
         </p:nvSpPr>
@@ -8041,26 +6474,435 @@
                 <a:ea typeface="Play"/>
                 <a:cs typeface="Play"/>
               </a:rPr>
-              <a:t>Сравнение времени сборки</a:t>
+              <a:t>Ожидаемый эффект</a:t>
             </a:r>
           </a:p>
         </p:txBody>
       </p:sp>
       <p:graphicFrame>
         <p:nvGraphicFramePr>
-          <p:cNvPr id="2402" name="Chart 2401"/>
+          <p:cNvPr id="2396" name="Table 2395"/>
           <p:cNvGraphicFramePr>
             <a:graphicFrameLocks noGrp="1"/>
           </p:cNvGraphicFramePr>
           <p:nvPr/>
         </p:nvGraphicFramePr>
         <p:xfrm>
-          <a:off x="274320" y="2071750"/>
-          <a:ext cx="8344814" cy="1576174"/>
+          <a:off x="274320" y="2009822"/>
+          <a:ext cx="8344814" cy="1674466"/>
         </p:xfrm>
         <a:graphic>
-          <a:graphicData uri="http://schemas.openxmlformats.org/drawingml/2006/chart">
-            <c:chart xmlns:c="http://schemas.openxmlformats.org/drawingml/2006/chart" r:id="rId4"/>
+          <a:graphicData uri="http://schemas.openxmlformats.org/drawingml/2006/table">
+            <a:tbl>
+              <a:tblPr firstRow="1" bandRow="1">
+                <a:tableStyleId>{5C22544A-7EE6-4342-B048-85BDC9FD1C3A}</a:tableStyleId>
+              </a:tblPr>
+              <a:tblGrid>
+                <a:gridCol w="2781604"/>
+                <a:gridCol w="2781604"/>
+                <a:gridCol w="2781606"/>
+              </a:tblGrid>
+              <a:tr h="334893">
+                <a:tc>
+                  <a:txBody>
+                    <a:bodyPr/>
+                    <a:lstStyle/>
+                    <a:p>
+                      <a:pPr>
+                        <a:defRPr sz="1300" b="1">
+                          <a:solidFill>
+                            <a:srgbClr val="FFFFFF"/>
+                          </a:solidFill>
+                          <a:latin typeface="Play"/>
+                          <a:ea typeface="Play"/>
+                          <a:cs typeface="Play"/>
+                        </a:defRPr>
+                      </a:pPr>
+                      <a:r>
+                        <a:t>Метрика</a:t>
+                      </a:r>
+                    </a:p>
+                  </a:txBody>
+                  <a:tcPr>
+                    <a:solidFill>
+                      <a:srgbClr val="0077FF"/>
+                    </a:solidFill>
+                  </a:tcPr>
+                </a:tc>
+                <a:tc>
+                  <a:txBody>
+                    <a:bodyPr/>
+                    <a:lstStyle/>
+                    <a:p>
+                      <a:pPr>
+                        <a:defRPr sz="1300" b="1">
+                          <a:solidFill>
+                            <a:srgbClr val="FFFFFF"/>
+                          </a:solidFill>
+                          <a:latin typeface="Play"/>
+                          <a:ea typeface="Play"/>
+                          <a:cs typeface="Play"/>
+                        </a:defRPr>
+                      </a:pPr>
+                      <a:r>
+                        <a:t>Текущее</a:t>
+                      </a:r>
+                    </a:p>
+                  </a:txBody>
+                  <a:tcPr>
+                    <a:solidFill>
+                      <a:srgbClr val="0077FF"/>
+                    </a:solidFill>
+                  </a:tcPr>
+                </a:tc>
+                <a:tc>
+                  <a:txBody>
+                    <a:bodyPr/>
+                    <a:lstStyle/>
+                    <a:p>
+                      <a:pPr>
+                        <a:defRPr sz="1300" b="1">
+                          <a:solidFill>
+                            <a:srgbClr val="FFFFFF"/>
+                          </a:solidFill>
+                          <a:latin typeface="Play"/>
+                          <a:ea typeface="Play"/>
+                          <a:cs typeface="Play"/>
+                        </a:defRPr>
+                      </a:pPr>
+                      <a:r>
+                        <a:t>Пилот</a:t>
+                      </a:r>
+                    </a:p>
+                  </a:txBody>
+                  <a:tcPr>
+                    <a:solidFill>
+                      <a:srgbClr val="0077FF"/>
+                    </a:solidFill>
+                  </a:tcPr>
+                </a:tc>
+              </a:tr>
+              <a:tr h="334893">
+                <a:tc>
+                  <a:txBody>
+                    <a:bodyPr/>
+                    <a:lstStyle/>
+                    <a:p>
+                      <a:pPr>
+                        <a:defRPr sz="1300" b="0">
+                          <a:solidFill>
+                            <a:srgbClr val="000000"/>
+                          </a:solidFill>
+                          <a:latin typeface="Play"/>
+                          <a:ea typeface="Play"/>
+                          <a:cs typeface="Play"/>
+                        </a:defRPr>
+                      </a:pPr>
+                      <a:r>
+                        <a:t>Сборка (мин)</a:t>
+                      </a:r>
+                    </a:p>
+                  </a:txBody>
+                  <a:tcPr>
+                    <a:solidFill>
+                      <a:srgbClr val="FFFFFF"/>
+                    </a:solidFill>
+                  </a:tcPr>
+                </a:tc>
+                <a:tc>
+                  <a:txBody>
+                    <a:bodyPr/>
+                    <a:lstStyle/>
+                    <a:p>
+                      <a:pPr>
+                        <a:defRPr sz="1300" b="0">
+                          <a:solidFill>
+                            <a:srgbClr val="000000"/>
+                          </a:solidFill>
+                          <a:latin typeface="Play"/>
+                          <a:ea typeface="Play"/>
+                          <a:cs typeface="Play"/>
+                        </a:defRPr>
+                      </a:pPr>
+                      <a:r>
+                        <a:t>186</a:t>
+                      </a:r>
+                    </a:p>
+                  </a:txBody>
+                  <a:tcPr>
+                    <a:solidFill>
+                      <a:srgbClr val="FFFFFF"/>
+                    </a:solidFill>
+                  </a:tcPr>
+                </a:tc>
+                <a:tc>
+                  <a:txBody>
+                    <a:bodyPr/>
+                    <a:lstStyle/>
+                    <a:p>
+                      <a:pPr>
+                        <a:defRPr sz="1300" b="0">
+                          <a:solidFill>
+                            <a:srgbClr val="000000"/>
+                          </a:solidFill>
+                          <a:latin typeface="Play"/>
+                          <a:ea typeface="Play"/>
+                          <a:cs typeface="Play"/>
+                        </a:defRPr>
+                      </a:pPr>
+                      <a:r>
+                        <a:t>4</a:t>
+                      </a:r>
+                    </a:p>
+                  </a:txBody>
+                  <a:tcPr>
+                    <a:solidFill>
+                      <a:srgbClr val="FFFFFF"/>
+                    </a:solidFill>
+                  </a:tcPr>
+                </a:tc>
+              </a:tr>
+              <a:tr h="334893">
+                <a:tc>
+                  <a:txBody>
+                    <a:bodyPr/>
+                    <a:lstStyle/>
+                    <a:p>
+                      <a:pPr>
+                        <a:defRPr sz="1300" b="0">
+                          <a:solidFill>
+                            <a:srgbClr val="000000"/>
+                          </a:solidFill>
+                          <a:latin typeface="Play"/>
+                          <a:ea typeface="Play"/>
+                          <a:cs typeface="Play"/>
+                        </a:defRPr>
+                      </a:pPr>
+                      <a:r>
+                        <a:t>Время до первой версии (дней)</a:t>
+                      </a:r>
+                    </a:p>
+                  </a:txBody>
+                  <a:tcPr>
+                    <a:solidFill>
+                      <a:srgbClr val="FFFFFF"/>
+                    </a:solidFill>
+                  </a:tcPr>
+                </a:tc>
+                <a:tc>
+                  <a:txBody>
+                    <a:bodyPr/>
+                    <a:lstStyle/>
+                    <a:p>
+                      <a:pPr>
+                        <a:defRPr sz="1300" b="0">
+                          <a:solidFill>
+                            <a:srgbClr val="000000"/>
+                          </a:solidFill>
+                          <a:latin typeface="Play"/>
+                          <a:ea typeface="Play"/>
+                          <a:cs typeface="Play"/>
+                        </a:defRPr>
+                      </a:pPr>
+                      <a:r>
+                        <a:t>6</a:t>
+                      </a:r>
+                    </a:p>
+                  </a:txBody>
+                  <a:tcPr>
+                    <a:solidFill>
+                      <a:srgbClr val="FFFFFF"/>
+                    </a:solidFill>
+                  </a:tcPr>
+                </a:tc>
+                <a:tc>
+                  <a:txBody>
+                    <a:bodyPr/>
+                    <a:lstStyle/>
+                    <a:p>
+                      <a:pPr>
+                        <a:defRPr sz="1300" b="0">
+                          <a:solidFill>
+                            <a:srgbClr val="000000"/>
+                          </a:solidFill>
+                          <a:latin typeface="Play"/>
+                          <a:ea typeface="Play"/>
+                          <a:cs typeface="Play"/>
+                        </a:defRPr>
+                      </a:pPr>
+                      <a:r>
+                        <a:t>1</a:t>
+                      </a:r>
+                    </a:p>
+                  </a:txBody>
+                  <a:tcPr>
+                    <a:solidFill>
+                      <a:srgbClr val="FFFFFF"/>
+                    </a:solidFill>
+                  </a:tcPr>
+                </a:tc>
+              </a:tr>
+              <a:tr h="334893">
+                <a:tc>
+                  <a:txBody>
+                    <a:bodyPr/>
+                    <a:lstStyle/>
+                    <a:p>
+                      <a:pPr>
+                        <a:defRPr sz="1300" b="0">
+                          <a:solidFill>
+                            <a:srgbClr val="000000"/>
+                          </a:solidFill>
+                          <a:latin typeface="Play"/>
+                          <a:ea typeface="Play"/>
+                          <a:cs typeface="Play"/>
+                        </a:defRPr>
+                      </a:pPr>
+                      <a:r>
+                        <a:t>Нарушения (колод)</a:t>
+                      </a:r>
+                    </a:p>
+                  </a:txBody>
+                  <a:tcPr>
+                    <a:solidFill>
+                      <a:srgbClr val="FFFFFF"/>
+                    </a:solidFill>
+                  </a:tcPr>
+                </a:tc>
+                <a:tc>
+                  <a:txBody>
+                    <a:bodyPr/>
+                    <a:lstStyle/>
+                    <a:p>
+                      <a:pPr>
+                        <a:defRPr sz="1300" b="0">
+                          <a:solidFill>
+                            <a:srgbClr val="000000"/>
+                          </a:solidFill>
+                          <a:latin typeface="Play"/>
+                          <a:ea typeface="Play"/>
+                          <a:cs typeface="Play"/>
+                        </a:defRPr>
+                      </a:pPr>
+                      <a:r>
+                        <a:t>19</a:t>
+                      </a:r>
+                    </a:p>
+                  </a:txBody>
+                  <a:tcPr>
+                    <a:solidFill>
+                      <a:srgbClr val="FFFFFF"/>
+                    </a:solidFill>
+                  </a:tcPr>
+                </a:tc>
+                <a:tc>
+                  <a:txBody>
+                    <a:bodyPr/>
+                    <a:lstStyle/>
+                    <a:p>
+                      <a:pPr>
+                        <a:defRPr sz="1300" b="0">
+                          <a:solidFill>
+                            <a:srgbClr val="000000"/>
+                          </a:solidFill>
+                          <a:latin typeface="Play"/>
+                          <a:ea typeface="Play"/>
+                          <a:cs typeface="Play"/>
+                        </a:defRPr>
+                      </a:pPr>
+                      <a:r>
+                        <a:t>2</a:t>
+                      </a:r>
+                    </a:p>
+                  </a:txBody>
+                  <a:tcPr>
+                    <a:solidFill>
+                      <a:srgbClr val="FFFFFF"/>
+                    </a:solidFill>
+                  </a:tcPr>
+                </a:tc>
+              </a:tr>
+              <a:tr h="334894">
+                <a:tc>
+                  <a:txBody>
+                    <a:bodyPr/>
+                    <a:lstStyle/>
+                    <a:p>
+                      <a:pPr>
+                        <a:defRPr sz="1300" b="0">
+                          <a:solidFill>
+                            <a:srgbClr val="000000"/>
+                          </a:solidFill>
+                          <a:latin typeface="Play"/>
+                          <a:ea typeface="Play"/>
+                          <a:cs typeface="Play"/>
+                        </a:defRPr>
+                      </a:pPr>
+                      <a:r>
+                        <a:t>Запросы (запросов)</a:t>
+                      </a:r>
+                    </a:p>
+                  </a:txBody>
+                  <a:tcPr>
+                    <a:solidFill>
+                      <a:srgbClr val="FFFFFF"/>
+                    </a:solidFill>
+                  </a:tcPr>
+                </a:tc>
+                <a:tc>
+                  <a:txBody>
+                    <a:bodyPr/>
+                    <a:lstStyle/>
+                    <a:p>
+                      <a:pPr>
+                        <a:defRPr sz="1300" b="0">
+                          <a:solidFill>
+                            <a:srgbClr val="000000"/>
+                          </a:solidFill>
+                          <a:latin typeface="Play"/>
+                          <a:ea typeface="Play"/>
+                          <a:cs typeface="Play"/>
+                        </a:defRPr>
+                      </a:pPr>
+                      <a:r>
+                        <a:t>11</a:t>
+                      </a:r>
+                    </a:p>
+                  </a:txBody>
+                  <a:tcPr>
+                    <a:solidFill>
+                      <a:srgbClr val="FFFFFF"/>
+                    </a:solidFill>
+                  </a:tcPr>
+                </a:tc>
+                <a:tc>
+                  <a:txBody>
+                    <a:bodyPr/>
+                    <a:lstStyle/>
+                    <a:p>
+                      <a:pPr>
+                        <a:defRPr sz="1300" b="0">
+                          <a:solidFill>
+                            <a:srgbClr val="000000"/>
+                          </a:solidFill>
+                          <a:latin typeface="Play"/>
+                          <a:ea typeface="Play"/>
+                          <a:cs typeface="Play"/>
+                        </a:defRPr>
+                      </a:pPr>
+                      <a:r>
+                        <a:t>38</a:t>
+                      </a:r>
+                    </a:p>
+                  </a:txBody>
+                  <a:tcPr>
+                    <a:solidFill>
+                      <a:srgbClr val="FFFFFF"/>
+                    </a:solidFill>
+                  </a:tcPr>
+                </a:tc>
+              </a:tr>
+            </a:tbl>
           </a:graphicData>
         </a:graphic>
       </p:graphicFrame>
@@ -8072,7 +6914,7 @@
 </p:sld>
 </file>
 
-<file path=ppt/slides/slide60.xml><?xml version="1.0" encoding="utf-8"?>
+<file path=ppt/slides/slide59.xml><?xml version="1.0" encoding="utf-8"?>
 <p:sld xmlns:a="http://schemas.openxmlformats.org/drawingml/2006/main" xmlns:p="http://schemas.openxmlformats.org/presentationml/2006/main" xmlns:r="http://schemas.openxmlformats.org/officeDocument/2006/relationships">
   <p:cSld>
     <p:spTree>
@@ -8111,21 +6953,19 @@
       </p:pic>
       <p:sp>
         <p:nvSpPr>
-          <p:cNvPr id="2430" name="Google Shape;2430;p89"/>
+          <p:cNvPr id="2429" name="Google Shape;2429;p89"/>
           <p:cNvSpPr/>
           <p:nvPr/>
         </p:nvSpPr>
         <p:spPr>
           <a:xfrm>
-            <a:off x="553415" y="2684063"/>
-            <a:ext cx="182375" cy="182352"/>
+            <a:off x="553415" y="1828897"/>
+            <a:ext cx="2232516" cy="1490254"/>
           </a:xfrm>
-          <a:prstGeom prst="ellipse">
+          <a:prstGeom prst="rect">
             <a:avLst/>
           </a:prstGeom>
-          <a:solidFill>
-            <a:srgbClr val="0077FF"/>
-          </a:solidFill>
+          <a:noFill/>
           <a:ln>
             <a:noFill/>
           </a:ln>
@@ -8154,21 +6994,19 @@
       </p:sp>
       <p:sp>
         <p:nvSpPr>
-          <p:cNvPr id="2432" name="Google Shape;2432;p89"/>
+          <p:cNvPr id="2431" name="Google Shape;2431;p89"/>
           <p:cNvSpPr/>
           <p:nvPr/>
         </p:nvSpPr>
         <p:spPr>
           <a:xfrm>
-            <a:off x="3565736" y="2684063"/>
-            <a:ext cx="182375" cy="182352"/>
+            <a:off x="3565736" y="1828897"/>
+            <a:ext cx="2232516" cy="1490254"/>
           </a:xfrm>
-          <a:prstGeom prst="ellipse">
+          <a:prstGeom prst="rect">
             <a:avLst/>
           </a:prstGeom>
-          <a:solidFill>
-            <a:srgbClr val="0077FF"/>
-          </a:solidFill>
+          <a:noFill/>
           <a:ln>
             <a:noFill/>
           </a:ln>
@@ -8197,21 +7035,19 @@
       </p:sp>
       <p:sp>
         <p:nvSpPr>
-          <p:cNvPr id="2434" name="Google Shape;2434;p89"/>
+          <p:cNvPr id="2433" name="Google Shape;2433;p89"/>
           <p:cNvSpPr/>
           <p:nvPr/>
         </p:nvSpPr>
         <p:spPr>
           <a:xfrm>
-            <a:off x="6578067" y="2684063"/>
-            <a:ext cx="182375" cy="182352"/>
+            <a:off x="6578067" y="1828897"/>
+            <a:ext cx="2232516" cy="1490254"/>
           </a:xfrm>
-          <a:prstGeom prst="ellipse">
+          <a:prstGeom prst="rect">
             <a:avLst/>
           </a:prstGeom>
-          <a:solidFill>
-            <a:srgbClr val="0077FF"/>
-          </a:solidFill>
+          <a:noFill/>
           <a:ln>
             <a:noFill/>
           </a:ln>
@@ -8240,7 +7076,7 @@
       </p:sp>
       <p:sp>
         <p:nvSpPr>
-          <p:cNvPr id="2435" name="title"/>
+          <p:cNvPr id="2434" name="title"/>
           <p:cNvSpPr txBox="1"/>
           <p:nvPr/>
         </p:nvSpPr>
@@ -8282,1093 +7118,21 @@
                 <a:ea typeface="Play"/>
                 <a:cs typeface="Play"/>
               </a:rPr>
-              <a:t>Сравнение времени до первой версии</a:t>
+              <a:t>Ресурсы и сроки</a:t>
             </a:r>
           </a:p>
         </p:txBody>
       </p:sp>
-      <p:graphicFrame>
-        <p:nvGraphicFramePr>
-          <p:cNvPr id="2436" name="Chart 2435"/>
-          <p:cNvGraphicFramePr>
-            <a:graphicFrameLocks noGrp="1"/>
-          </p:cNvGraphicFramePr>
-          <p:nvPr/>
-        </p:nvGraphicFramePr>
-        <p:xfrm>
-          <a:off x="274320" y="1414513"/>
-          <a:ext cx="8344814" cy="1269570"/>
-        </p:xfrm>
-        <a:graphic>
-          <a:graphicData uri="http://schemas.openxmlformats.org/drawingml/2006/chart">
-            <c:chart xmlns:c="http://schemas.openxmlformats.org/drawingml/2006/chart" r:id="rId3"/>
-          </a:graphicData>
-        </a:graphic>
-      </p:graphicFrame>
-    </p:spTree>
-  </p:cSld>
-  <p:clrMapOvr>
-    <a:masterClrMapping/>
-  </p:clrMapOvr>
-</p:sld>
-</file>
-
-<file path=ppt/slides/slide61.xml><?xml version="1.0" encoding="utf-8"?>
-<p:sld xmlns:a="http://schemas.openxmlformats.org/drawingml/2006/main" xmlns:p="http://schemas.openxmlformats.org/presentationml/2006/main" xmlns:r="http://schemas.openxmlformats.org/officeDocument/2006/relationships">
-  <p:cSld>
-    <p:spTree>
-      <p:nvGrpSpPr>
-        <p:cNvPr id="1" name=""/>
-        <p:cNvGrpSpPr/>
-        <p:nvPr/>
-      </p:nvGrpSpPr>
-      <p:grpSpPr/>
-      <p:sp>
-        <p:nvSpPr>
-          <p:cNvPr id="662" name="Google Shape;662;p55"/>
+      <p:sp>
+        <p:nvSpPr>
+          <p:cNvPr id="2435" name="Rectangle 2434"/>
           <p:cNvSpPr/>
           <p:nvPr/>
         </p:nvSpPr>
         <p:spPr>
           <a:xfrm>
-            <a:off x="8667705" y="4666977"/>
-            <a:ext cx="190499" cy="190475"/>
-          </a:xfrm>
-          <a:prstGeom prst="rect">
-            <a:avLst/>
-          </a:prstGeom>
-          <a:noFill/>
-          <a:ln>
-            <a:noFill/>
-          </a:ln>
-        </p:spPr>
-        <p:txBody>
-          <a:bodyPr anchorCtr="0" anchor="ctr" bIns="91425" lIns="91425" spcFirstLastPara="1" rIns="91425" wrap="square" tIns="91425">
-            <a:noAutofit/>
-          </a:bodyPr>
-          <a:lstStyle/>
-          <a:p>
-            <a:pPr indent="0" lvl="0" marL="0" rtl="0" algn="l">
-              <a:spcBef>
-                <a:spcPts val="0"/>
-              </a:spcBef>
-              <a:spcAft>
-                <a:spcPts val="0"/>
-              </a:spcAft>
-              <a:buNone/>
-            </a:pPr>
-            <a:r>
-              <a:t/>
-            </a:r>
-            <a:endParaRPr/>
-          </a:p>
-        </p:txBody>
-      </p:sp>
-      <p:sp>
-        <p:nvSpPr>
-          <p:cNvPr id="663" name="Google Shape;663;p55"/>
-          <p:cNvSpPr/>
-          <p:nvPr/>
-        </p:nvSpPr>
-        <p:spPr>
-          <a:xfrm>
-            <a:off x="285748" y="286047"/>
-            <a:ext cx="8572456" cy="3938075"/>
-          </a:xfrm>
-          <a:prstGeom prst="rect">
-            <a:avLst/>
-          </a:prstGeom>
-          <a:noFill/>
-          <a:ln>
-            <a:noFill/>
-          </a:ln>
-        </p:spPr>
-        <p:txBody>
-          <a:bodyPr anchorCtr="0" anchor="ctr" bIns="91425" lIns="91425" spcFirstLastPara="1" rIns="91425" wrap="square" tIns="91425">
-            <a:noAutofit/>
-          </a:bodyPr>
-          <a:lstStyle/>
-          <a:p>
-            <a:pPr indent="0" lvl="0" marL="0" rtl="0" algn="l">
-              <a:spcBef>
-                <a:spcPts val="0"/>
-              </a:spcBef>
-              <a:spcAft>
-                <a:spcPts val="0"/>
-              </a:spcAft>
-              <a:buNone/>
-            </a:pPr>
-            <a:r>
-              <a:t/>
-            </a:r>
-            <a:endParaRPr/>
-          </a:p>
-        </p:txBody>
-      </p:sp>
-      <p:sp>
-        <p:nvSpPr>
-          <p:cNvPr id="664" name="Google Shape;664;p55"/>
-          <p:cNvSpPr/>
-          <p:nvPr/>
-        </p:nvSpPr>
-        <p:spPr>
-          <a:xfrm>
-            <a:off x="285748" y="1209852"/>
-            <a:ext cx="8572456" cy="3014270"/>
-          </a:xfrm>
-          <a:prstGeom prst="rect">
-            <a:avLst/>
-          </a:prstGeom>
-          <a:noFill/>
-          <a:ln>
-            <a:noFill/>
-          </a:ln>
-        </p:spPr>
-        <p:txBody>
-          <a:bodyPr anchorCtr="0" anchor="ctr" bIns="91425" lIns="91425" spcFirstLastPara="1" rIns="91425" wrap="square" tIns="91425">
-            <a:noAutofit/>
-          </a:bodyPr>
-          <a:lstStyle/>
-          <a:p>
-            <a:pPr indent="0" lvl="0" marL="0" rtl="0" algn="l">
-              <a:spcBef>
-                <a:spcPts val="0"/>
-              </a:spcBef>
-              <a:spcAft>
-                <a:spcPts val="0"/>
-              </a:spcAft>
-              <a:buNone/>
-            </a:pPr>
-            <a:r>
-              <a:t/>
-            </a:r>
-            <a:endParaRPr/>
-          </a:p>
-        </p:txBody>
-      </p:sp>
-      <p:sp>
-        <p:nvSpPr>
-          <p:cNvPr id="665" name="Google Shape;665;p55"/>
-          <p:cNvSpPr/>
-          <p:nvPr/>
-        </p:nvSpPr>
-        <p:spPr>
-          <a:xfrm>
-            <a:off x="285749" y="1209852"/>
-            <a:ext cx="2071677" cy="3014270"/>
-          </a:xfrm>
-          <a:prstGeom prst="roundRect">
-            <a:avLst>
-              <a:gd fmla="val 4634" name="adj"/>
-            </a:avLst>
-          </a:prstGeom>
-          <a:solidFill>
-            <a:schemeClr val="lt2"/>
-          </a:solidFill>
-          <a:ln>
-            <a:noFill/>
-          </a:ln>
-        </p:spPr>
-        <p:txBody>
-          <a:bodyPr anchorCtr="0" anchor="ctr" bIns="91425" lIns="91425" spcFirstLastPara="1" rIns="91425" wrap="square" tIns="91425">
-            <a:noAutofit/>
-          </a:bodyPr>
-          <a:lstStyle/>
-          <a:p>
-            <a:pPr indent="0" lvl="0" marL="0" rtl="0" algn="l">
-              <a:spcBef>
-                <a:spcPts val="0"/>
-              </a:spcBef>
-              <a:spcAft>
-                <a:spcPts val="0"/>
-              </a:spcAft>
-              <a:buNone/>
-            </a:pPr>
-            <a:r>
-              <a:t/>
-            </a:r>
-            <a:endParaRPr/>
-          </a:p>
-        </p:txBody>
-      </p:sp>
-      <p:sp>
-        <p:nvSpPr>
-          <p:cNvPr id="666" name="Google Shape;666;p55"/>
-          <p:cNvSpPr/>
-          <p:nvPr/>
-        </p:nvSpPr>
-        <p:spPr>
-          <a:xfrm>
-            <a:off x="438148" y="1362233"/>
-            <a:ext cx="1766878" cy="342855"/>
-          </a:xfrm>
-          <a:prstGeom prst="rect">
-            <a:avLst/>
-          </a:prstGeom>
-          <a:noFill/>
-          <a:ln>
-            <a:noFill/>
-          </a:ln>
-        </p:spPr>
-        <p:txBody>
-          <a:bodyPr anchorCtr="0" anchor="ctr" bIns="91425" lIns="91425" spcFirstLastPara="1" rIns="91425" wrap="square" tIns="91425">
-            <a:noAutofit/>
-          </a:bodyPr>
-          <a:lstStyle/>
-          <a:p>
-            <a:pPr indent="0" lvl="0" marL="0" rtl="0" algn="l">
-              <a:spcBef>
-                <a:spcPts val="0"/>
-              </a:spcBef>
-              <a:spcAft>
-                <a:spcPts val="0"/>
-              </a:spcAft>
-              <a:buNone/>
-            </a:pPr>
-            <a:r>
-              <a:t/>
-            </a:r>
-            <a:endParaRPr/>
-          </a:p>
-        </p:txBody>
-      </p:sp>
-      <p:sp>
-        <p:nvSpPr>
-          <p:cNvPr id="667" name="Google Shape;667;p55"/>
-          <p:cNvSpPr/>
-          <p:nvPr/>
-        </p:nvSpPr>
-        <p:spPr>
-          <a:xfrm>
-            <a:off x="438148" y="1362233"/>
-            <a:ext cx="76199" cy="76190"/>
-          </a:xfrm>
-          <a:prstGeom prst="roundRect">
-            <a:avLst>
-              <a:gd fmla="val 31500" name="adj"/>
-            </a:avLst>
-          </a:prstGeom>
-          <a:solidFill>
-            <a:srgbClr val="0077FF"/>
-          </a:solidFill>
-          <a:ln>
-            <a:noFill/>
-          </a:ln>
-        </p:spPr>
-        <p:txBody>
-          <a:bodyPr anchorCtr="0" anchor="ctr" bIns="91425" lIns="91425" spcFirstLastPara="1" rIns="91425" wrap="square" tIns="91425">
-            <a:noAutofit/>
-          </a:bodyPr>
-          <a:lstStyle/>
-          <a:p>
-            <a:pPr indent="0" lvl="0" marL="0" rtl="0" algn="l">
-              <a:spcBef>
-                <a:spcPts val="0"/>
-              </a:spcBef>
-              <a:spcAft>
-                <a:spcPts val="0"/>
-              </a:spcAft>
-              <a:buNone/>
-            </a:pPr>
-            <a:r>
-              <a:t/>
-            </a:r>
-            <a:endParaRPr/>
-          </a:p>
-        </p:txBody>
-      </p:sp>
-      <p:sp>
-        <p:nvSpPr>
-          <p:cNvPr id="670" name="Google Shape;670;p55"/>
-          <p:cNvSpPr/>
-          <p:nvPr/>
-        </p:nvSpPr>
-        <p:spPr>
-          <a:xfrm>
-            <a:off x="2452675" y="1209852"/>
-            <a:ext cx="2071677" cy="3014270"/>
-          </a:xfrm>
-          <a:prstGeom prst="roundRect">
-            <a:avLst>
-              <a:gd fmla="val 4634" name="adj"/>
-            </a:avLst>
-          </a:prstGeom>
-          <a:solidFill>
-            <a:schemeClr val="lt2"/>
-          </a:solidFill>
-          <a:ln>
-            <a:noFill/>
-          </a:ln>
-        </p:spPr>
-        <p:txBody>
-          <a:bodyPr anchorCtr="0" anchor="ctr" bIns="91425" lIns="91425" spcFirstLastPara="1" rIns="91425" wrap="square" tIns="91425">
-            <a:noAutofit/>
-          </a:bodyPr>
-          <a:lstStyle/>
-          <a:p>
-            <a:pPr indent="0" lvl="0" marL="0" rtl="0" algn="l">
-              <a:spcBef>
-                <a:spcPts val="0"/>
-              </a:spcBef>
-              <a:spcAft>
-                <a:spcPts val="0"/>
-              </a:spcAft>
-              <a:buNone/>
-            </a:pPr>
-            <a:r>
-              <a:t/>
-            </a:r>
-            <a:endParaRPr/>
-          </a:p>
-        </p:txBody>
-      </p:sp>
-      <p:sp>
-        <p:nvSpPr>
-          <p:cNvPr id="671" name="Google Shape;671;p55"/>
-          <p:cNvSpPr/>
-          <p:nvPr/>
-        </p:nvSpPr>
-        <p:spPr>
-          <a:xfrm>
-            <a:off x="2605074" y="1362233"/>
-            <a:ext cx="1766878" cy="342855"/>
-          </a:xfrm>
-          <a:prstGeom prst="rect">
-            <a:avLst/>
-          </a:prstGeom>
-          <a:noFill/>
-          <a:ln>
-            <a:noFill/>
-          </a:ln>
-        </p:spPr>
-        <p:txBody>
-          <a:bodyPr anchorCtr="0" anchor="ctr" bIns="91425" lIns="91425" spcFirstLastPara="1" rIns="91425" wrap="square" tIns="91425">
-            <a:noAutofit/>
-          </a:bodyPr>
-          <a:lstStyle/>
-          <a:p>
-            <a:pPr indent="0" lvl="0" marL="0" rtl="0" algn="l">
-              <a:spcBef>
-                <a:spcPts val="0"/>
-              </a:spcBef>
-              <a:spcAft>
-                <a:spcPts val="0"/>
-              </a:spcAft>
-              <a:buNone/>
-            </a:pPr>
-            <a:r>
-              <a:t/>
-            </a:r>
-            <a:endParaRPr/>
-          </a:p>
-        </p:txBody>
-      </p:sp>
-      <p:sp>
-        <p:nvSpPr>
-          <p:cNvPr id="672" name="Google Shape;672;p55"/>
-          <p:cNvSpPr/>
-          <p:nvPr/>
-        </p:nvSpPr>
-        <p:spPr>
-          <a:xfrm>
-            <a:off x="2605074" y="1362233"/>
-            <a:ext cx="76199" cy="76190"/>
-          </a:xfrm>
-          <a:prstGeom prst="roundRect">
-            <a:avLst>
-              <a:gd fmla="val 31500" name="adj"/>
-            </a:avLst>
-          </a:prstGeom>
-          <a:solidFill>
-            <a:srgbClr val="0077FF"/>
-          </a:solidFill>
-          <a:ln>
-            <a:noFill/>
-          </a:ln>
-        </p:spPr>
-        <p:txBody>
-          <a:bodyPr anchorCtr="0" anchor="ctr" bIns="91425" lIns="91425" spcFirstLastPara="1" rIns="91425" wrap="square" tIns="91425">
-            <a:noAutofit/>
-          </a:bodyPr>
-          <a:lstStyle/>
-          <a:p>
-            <a:pPr indent="0" lvl="0" marL="0" rtl="0" algn="l">
-              <a:spcBef>
-                <a:spcPts val="0"/>
-              </a:spcBef>
-              <a:spcAft>
-                <a:spcPts val="0"/>
-              </a:spcAft>
-              <a:buNone/>
-            </a:pPr>
-            <a:r>
-              <a:t/>
-            </a:r>
-            <a:endParaRPr/>
-          </a:p>
-        </p:txBody>
-      </p:sp>
-      <p:sp>
-        <p:nvSpPr>
-          <p:cNvPr id="675" name="Google Shape;675;p55"/>
-          <p:cNvSpPr/>
-          <p:nvPr/>
-        </p:nvSpPr>
-        <p:spPr>
-          <a:xfrm>
-            <a:off x="4619601" y="1209852"/>
-            <a:ext cx="2071677" cy="3014270"/>
-          </a:xfrm>
-          <a:prstGeom prst="roundRect">
-            <a:avLst>
-              <a:gd fmla="val 4634" name="adj"/>
-            </a:avLst>
-          </a:prstGeom>
-          <a:solidFill>
-            <a:schemeClr val="lt2"/>
-          </a:solidFill>
-          <a:ln>
-            <a:noFill/>
-          </a:ln>
-        </p:spPr>
-        <p:txBody>
-          <a:bodyPr anchorCtr="0" anchor="ctr" bIns="91425" lIns="91425" spcFirstLastPara="1" rIns="91425" wrap="square" tIns="91425">
-            <a:noAutofit/>
-          </a:bodyPr>
-          <a:lstStyle/>
-          <a:p>
-            <a:pPr indent="0" lvl="0" marL="0" rtl="0" algn="l">
-              <a:spcBef>
-                <a:spcPts val="0"/>
-              </a:spcBef>
-              <a:spcAft>
-                <a:spcPts val="0"/>
-              </a:spcAft>
-              <a:buNone/>
-            </a:pPr>
-            <a:r>
-              <a:t/>
-            </a:r>
-            <a:endParaRPr/>
-          </a:p>
-        </p:txBody>
-      </p:sp>
-      <p:sp>
-        <p:nvSpPr>
-          <p:cNvPr id="676" name="Google Shape;676;p55"/>
-          <p:cNvSpPr/>
-          <p:nvPr/>
-        </p:nvSpPr>
-        <p:spPr>
-          <a:xfrm>
-            <a:off x="4772001" y="1362233"/>
-            <a:ext cx="1766878" cy="342855"/>
-          </a:xfrm>
-          <a:prstGeom prst="rect">
-            <a:avLst/>
-          </a:prstGeom>
-          <a:noFill/>
-          <a:ln>
-            <a:noFill/>
-          </a:ln>
-        </p:spPr>
-        <p:txBody>
-          <a:bodyPr anchorCtr="0" anchor="ctr" bIns="91425" lIns="91425" spcFirstLastPara="1" rIns="91425" wrap="square" tIns="91425">
-            <a:noAutofit/>
-          </a:bodyPr>
-          <a:lstStyle/>
-          <a:p>
-            <a:pPr indent="0" lvl="0" marL="0" rtl="0" algn="l">
-              <a:spcBef>
-                <a:spcPts val="0"/>
-              </a:spcBef>
-              <a:spcAft>
-                <a:spcPts val="0"/>
-              </a:spcAft>
-              <a:buNone/>
-            </a:pPr>
-            <a:r>
-              <a:t/>
-            </a:r>
-            <a:endParaRPr/>
-          </a:p>
-        </p:txBody>
-      </p:sp>
-      <p:sp>
-        <p:nvSpPr>
-          <p:cNvPr id="677" name="Google Shape;677;p55"/>
-          <p:cNvSpPr/>
-          <p:nvPr/>
-        </p:nvSpPr>
-        <p:spPr>
-          <a:xfrm>
-            <a:off x="4772001" y="1362233"/>
-            <a:ext cx="76199" cy="76190"/>
-          </a:xfrm>
-          <a:prstGeom prst="roundRect">
-            <a:avLst>
-              <a:gd fmla="val 31500" name="adj"/>
-            </a:avLst>
-          </a:prstGeom>
-          <a:solidFill>
-            <a:srgbClr val="0077FF"/>
-          </a:solidFill>
-          <a:ln>
-            <a:noFill/>
-          </a:ln>
-        </p:spPr>
-        <p:txBody>
-          <a:bodyPr anchorCtr="0" anchor="ctr" bIns="91425" lIns="91425" spcFirstLastPara="1" rIns="91425" wrap="square" tIns="91425">
-            <a:noAutofit/>
-          </a:bodyPr>
-          <a:lstStyle/>
-          <a:p>
-            <a:pPr indent="0" lvl="0" marL="0" rtl="0" algn="l">
-              <a:spcBef>
-                <a:spcPts val="0"/>
-              </a:spcBef>
-              <a:spcAft>
-                <a:spcPts val="0"/>
-              </a:spcAft>
-              <a:buNone/>
-            </a:pPr>
-            <a:r>
-              <a:t/>
-            </a:r>
-            <a:endParaRPr/>
-          </a:p>
-        </p:txBody>
-      </p:sp>
-      <p:sp>
-        <p:nvSpPr>
-          <p:cNvPr id="680" name="Google Shape;680;p55"/>
-          <p:cNvSpPr/>
-          <p:nvPr/>
-        </p:nvSpPr>
-        <p:spPr>
-          <a:xfrm>
-            <a:off x="6786527" y="1209852"/>
-            <a:ext cx="2071677" cy="3014270"/>
-          </a:xfrm>
-          <a:prstGeom prst="roundRect">
-            <a:avLst>
-              <a:gd fmla="val 4634" name="adj"/>
-            </a:avLst>
-          </a:prstGeom>
-          <a:solidFill>
-            <a:schemeClr val="lt2"/>
-          </a:solidFill>
-          <a:ln>
-            <a:noFill/>
-          </a:ln>
-        </p:spPr>
-        <p:txBody>
-          <a:bodyPr anchorCtr="0" anchor="ctr" bIns="91425" lIns="91425" spcFirstLastPara="1" rIns="91425" wrap="square" tIns="91425">
-            <a:noAutofit/>
-          </a:bodyPr>
-          <a:lstStyle/>
-          <a:p>
-            <a:pPr indent="0" lvl="0" marL="0" rtl="0" algn="l">
-              <a:spcBef>
-                <a:spcPts val="0"/>
-              </a:spcBef>
-              <a:spcAft>
-                <a:spcPts val="0"/>
-              </a:spcAft>
-              <a:buNone/>
-            </a:pPr>
-            <a:r>
-              <a:t/>
-            </a:r>
-            <a:endParaRPr/>
-          </a:p>
-        </p:txBody>
-      </p:sp>
-      <p:sp>
-        <p:nvSpPr>
-          <p:cNvPr id="681" name="Google Shape;681;p55"/>
-          <p:cNvSpPr/>
-          <p:nvPr/>
-        </p:nvSpPr>
-        <p:spPr>
-          <a:xfrm>
-            <a:off x="6938927" y="1362233"/>
-            <a:ext cx="1766878" cy="342855"/>
-          </a:xfrm>
-          <a:prstGeom prst="rect">
-            <a:avLst/>
-          </a:prstGeom>
-          <a:noFill/>
-          <a:ln>
-            <a:noFill/>
-          </a:ln>
-        </p:spPr>
-        <p:txBody>
-          <a:bodyPr anchorCtr="0" anchor="ctr" bIns="91425" lIns="91425" spcFirstLastPara="1" rIns="91425" wrap="square" tIns="91425">
-            <a:noAutofit/>
-          </a:bodyPr>
-          <a:lstStyle/>
-          <a:p>
-            <a:pPr indent="0" lvl="0" marL="0" rtl="0" algn="l">
-              <a:spcBef>
-                <a:spcPts val="0"/>
-              </a:spcBef>
-              <a:spcAft>
-                <a:spcPts val="0"/>
-              </a:spcAft>
-              <a:buNone/>
-            </a:pPr>
-            <a:r>
-              <a:t/>
-            </a:r>
-            <a:endParaRPr/>
-          </a:p>
-        </p:txBody>
-      </p:sp>
-      <p:sp>
-        <p:nvSpPr>
-          <p:cNvPr id="682" name="Google Shape;682;p55"/>
-          <p:cNvSpPr/>
-          <p:nvPr/>
-        </p:nvSpPr>
-        <p:spPr>
-          <a:xfrm>
-            <a:off x="6938927" y="1362233"/>
-            <a:ext cx="76199" cy="76190"/>
-          </a:xfrm>
-          <a:prstGeom prst="roundRect">
-            <a:avLst>
-              <a:gd fmla="val 31500" name="adj"/>
-            </a:avLst>
-          </a:prstGeom>
-          <a:solidFill>
-            <a:srgbClr val="0077FF"/>
-          </a:solidFill>
-          <a:ln>
-            <a:noFill/>
-          </a:ln>
-        </p:spPr>
-        <p:txBody>
-          <a:bodyPr anchorCtr="0" anchor="ctr" bIns="91425" lIns="91425" spcFirstLastPara="1" rIns="91425" wrap="square" tIns="91425">
-            <a:noAutofit/>
-          </a:bodyPr>
-          <a:lstStyle/>
-          <a:p>
-            <a:pPr indent="0" lvl="0" marL="0" rtl="0" algn="l">
-              <a:spcBef>
-                <a:spcPts val="0"/>
-              </a:spcBef>
-              <a:spcAft>
-                <a:spcPts val="0"/>
-              </a:spcAft>
-              <a:buNone/>
-            </a:pPr>
-            <a:r>
-              <a:t/>
-            </a:r>
-            <a:endParaRPr/>
-          </a:p>
-        </p:txBody>
-      </p:sp>
-      <p:sp>
-        <p:nvSpPr>
-          <p:cNvPr id="683" name="title"/>
-          <p:cNvSpPr txBox="1"/>
-          <p:nvPr/>
-        </p:nvSpPr>
-        <p:spPr>
-          <a:xfrm>
-            <a:off x="274320" y="282943"/>
-            <a:ext cx="6792986" cy="617220"/>
-          </a:xfrm>
-          <a:prstGeom prst="rect">
-            <a:avLst/>
-          </a:prstGeom>
-          <a:noFill/>
-        </p:spPr>
-        <p:txBody>
-          <a:bodyPr wrap="square" lIns="76200" rIns="76200" tIns="50800" bIns="50800">
-            <a:spAutoFit/>
-          </a:bodyPr>
-          <a:lstStyle/>
-          <a:p>
-            <a:pPr algn="l">
-              <a:spcAft>
-                <a:spcPts val="300"/>
-              </a:spcAft>
-              <a:defRPr sz="2705">
-                <a:solidFill>
-                  <a:srgbClr val="000000"/>
-                </a:solidFill>
-                <a:latin typeface="Play"/>
-                <a:ea typeface="Play"/>
-                <a:cs typeface="Play"/>
-              </a:defRPr>
-            </a:pPr>
-            <a:r>
-              <a:rPr sz="2705">
-                <a:solidFill>
-                  <a:srgbClr val="000000"/>
-                </a:solidFill>
-                <a:latin typeface="Play"/>
-                <a:ea typeface="Play"/>
-                <a:cs typeface="Play"/>
-              </a:rPr>
-              <a:t>Ресурсы и затраты</a:t>
-            </a:r>
-          </a:p>
-        </p:txBody>
-      </p:sp>
-      <p:sp>
-        <p:nvSpPr>
-          <p:cNvPr id="684" name="lead"/>
-          <p:cNvSpPr txBox="1"/>
-          <p:nvPr/>
-        </p:nvSpPr>
-        <p:spPr>
-          <a:xfrm>
-            <a:off x="1108801" y="1705121"/>
-            <a:ext cx="6675851" cy="721406"/>
-          </a:xfrm>
-          <a:prstGeom prst="rect">
-            <a:avLst/>
-          </a:prstGeom>
-          <a:noFill/>
-        </p:spPr>
-        <p:txBody>
-          <a:bodyPr wrap="square" lIns="76200" rIns="76200" tIns="50800" bIns="50800">
-            <a:spAutoFit/>
-          </a:bodyPr>
-          <a:lstStyle/>
-          <a:p>
-            <a:pPr algn="l">
-              <a:spcAft>
-                <a:spcPts val="300"/>
-              </a:spcAft>
-              <a:defRPr sz="1406">
-                <a:solidFill>
-                  <a:srgbClr val="000000"/>
-                </a:solidFill>
-                <a:latin typeface="Play"/>
-                <a:ea typeface="Play"/>
-                <a:cs typeface="Play"/>
-              </a:defRPr>
-            </a:pPr>
-            <a:r>
-              <a:rPr sz="1406">
-                <a:solidFill>
-                  <a:srgbClr val="000000"/>
-                </a:solidFill>
-                <a:latin typeface="Play"/>
-                <a:ea typeface="Play"/>
-                <a:cs typeface="Play"/>
-              </a:rPr>
-              <a:t>Стоимость инференса за 6 недель 1 400 рублей</a:t>
-            </a:r>
-          </a:p>
-        </p:txBody>
-      </p:sp>
-      <p:sp>
-        <p:nvSpPr>
-          <p:cNvPr id="685" name="body"/>
-          <p:cNvSpPr txBox="1"/>
-          <p:nvPr/>
-        </p:nvSpPr>
-        <p:spPr>
-          <a:xfrm>
-            <a:off x="1108801" y="2570809"/>
-            <a:ext cx="6675851" cy="1539001"/>
-          </a:xfrm>
-          <a:prstGeom prst="rect">
-            <a:avLst/>
-          </a:prstGeom>
-          <a:noFill/>
-        </p:spPr>
-        <p:txBody>
-          <a:bodyPr wrap="square" lIns="76200" rIns="76200" tIns="50800" bIns="50800">
-            <a:spAutoFit/>
-          </a:bodyPr>
-          <a:lstStyle/>
-          <a:p>
-            <a:pPr algn="l">
-              <a:spcAft>
-                <a:spcPts val="300"/>
-              </a:spcAft>
-              <a:defRPr sz="1406">
-                <a:solidFill>
-                  <a:srgbClr val="000000"/>
-                </a:solidFill>
-                <a:latin typeface="Play"/>
-                <a:ea typeface="Play"/>
-                <a:cs typeface="Play"/>
-              </a:defRPr>
-            </a:pPr>
-            <a:r>
-              <a:rPr sz="1406">
-                <a:solidFill>
-                  <a:srgbClr val="000000"/>
-                </a:solidFill>
-                <a:latin typeface="Play"/>
-                <a:ea typeface="Play"/>
-                <a:cs typeface="Play"/>
-              </a:rPr>
-              <a:t>• Сервис работает на 2 vCPU / 2 ГБ RAM</a:t>
-            </a:r>
-          </a:p>
-          <a:p>
-            <a:pPr algn="l">
-              <a:spcAft>
-                <a:spcPts val="300"/>
-              </a:spcAft>
-              <a:defRPr sz="1406">
-                <a:solidFill>
-                  <a:srgbClr val="000000"/>
-                </a:solidFill>
-                <a:latin typeface="Play"/>
-                <a:ea typeface="Play"/>
-                <a:cs typeface="Play"/>
-              </a:defRPr>
-            </a:pPr>
-            <a:r>
-              <a:rPr sz="1406">
-                <a:solidFill>
-                  <a:srgbClr val="000000"/>
-                </a:solidFill>
-                <a:latin typeface="Play"/>
-                <a:ea typeface="Play"/>
-                <a:cs typeface="Play"/>
-              </a:rPr>
-              <a:t>• Модель gpt‑oss‑20b подключается по OpenAI‑совместимому протоколу</a:t>
-            </a:r>
-          </a:p>
-          <a:p>
-            <a:pPr algn="l">
-              <a:spcAft>
-                <a:spcPts val="300"/>
-              </a:spcAft>
-              <a:defRPr sz="1406">
-                <a:solidFill>
-                  <a:srgbClr val="000000"/>
-                </a:solidFill>
-                <a:latin typeface="Play"/>
-                <a:ea typeface="Play"/>
-                <a:cs typeface="Play"/>
-              </a:defRPr>
-            </a:pPr>
-            <a:r>
-              <a:rPr sz="1406">
-                <a:solidFill>
-                  <a:srgbClr val="000000"/>
-                </a:solidFill>
-                <a:latin typeface="Play"/>
-                <a:ea typeface="Play"/>
-                <a:cs typeface="Play"/>
-              </a:rPr>
-              <a:t>• При нагрузке более 20 задач требуется внешняя очередь</a:t>
-            </a:r>
-          </a:p>
-        </p:txBody>
-      </p:sp>
-    </p:spTree>
-  </p:cSld>
-  <p:clrMapOvr>
-    <a:masterClrMapping/>
-  </p:clrMapOvr>
-</p:sld>
-</file>
-
-<file path=ppt/slides/slide62.xml><?xml version="1.0" encoding="utf-8"?>
-<p:sld xmlns:a="http://schemas.openxmlformats.org/drawingml/2006/main" xmlns:p="http://schemas.openxmlformats.org/presentationml/2006/main" xmlns:r="http://schemas.openxmlformats.org/officeDocument/2006/relationships">
-  <p:cSld>
-    <p:spTree>
-      <p:nvGrpSpPr>
-        <p:cNvPr id="1" name=""/>
-        <p:cNvGrpSpPr/>
-        <p:nvPr/>
-      </p:nvGrpSpPr>
-      <p:grpSpPr/>
-      <p:sp>
-        <p:nvSpPr>
-          <p:cNvPr id="532" name="Google Shape;532;p53"/>
-          <p:cNvSpPr/>
-          <p:nvPr/>
-        </p:nvSpPr>
-        <p:spPr>
-          <a:xfrm>
-            <a:off x="303214" y="1022533"/>
-            <a:ext cx="8451939" cy="1433588"/>
-          </a:xfrm>
-          <a:prstGeom prst="rect">
-            <a:avLst/>
-          </a:prstGeom>
-          <a:noFill/>
-          <a:ln>
-            <a:noFill/>
-          </a:ln>
-        </p:spPr>
-        <p:txBody>
-          <a:bodyPr anchorCtr="0" anchor="ctr" bIns="91425" lIns="91425" spcFirstLastPara="1" rIns="91425" wrap="square" tIns="91425">
-            <a:noAutofit/>
-          </a:bodyPr>
-          <a:lstStyle/>
-          <a:p>
-            <a:pPr indent="0" lvl="0" marL="0" rtl="0" algn="l">
-              <a:spcBef>
-                <a:spcPts val="0"/>
-              </a:spcBef>
-              <a:spcAft>
-                <a:spcPts val="0"/>
-              </a:spcAft>
-              <a:buNone/>
-            </a:pPr>
-            <a:r>
-              <a:t/>
-            </a:r>
-            <a:endParaRPr/>
-          </a:p>
-        </p:txBody>
-      </p:sp>
-      <p:sp>
-        <p:nvSpPr>
-          <p:cNvPr id="553" name="Google Shape;553;p53"/>
-          <p:cNvSpPr/>
-          <p:nvPr/>
-        </p:nvSpPr>
-        <p:spPr>
-          <a:xfrm>
-            <a:off x="276488" y="2955549"/>
-            <a:ext cx="8451939" cy="1433588"/>
-          </a:xfrm>
-          <a:prstGeom prst="rect">
-            <a:avLst/>
-          </a:prstGeom>
-          <a:noFill/>
-          <a:ln>
-            <a:noFill/>
-          </a:ln>
-        </p:spPr>
-        <p:txBody>
-          <a:bodyPr anchorCtr="0" anchor="ctr" bIns="91425" lIns="91425" spcFirstLastPara="1" rIns="91425" wrap="square" tIns="91425">
-            <a:noAutofit/>
-          </a:bodyPr>
-          <a:lstStyle/>
-          <a:p>
-            <a:pPr indent="0" lvl="0" marL="0" rtl="0" algn="l">
-              <a:spcBef>
-                <a:spcPts val="0"/>
-              </a:spcBef>
-              <a:spcAft>
-                <a:spcPts val="0"/>
-              </a:spcAft>
-              <a:buNone/>
-            </a:pPr>
-            <a:r>
-              <a:t/>
-            </a:r>
-            <a:endParaRPr/>
-          </a:p>
-        </p:txBody>
-      </p:sp>
-      <p:sp>
-        <p:nvSpPr>
-          <p:cNvPr id="554" name="Google Shape;554;p53"/>
-          <p:cNvSpPr/>
-          <p:nvPr/>
-        </p:nvSpPr>
-        <p:spPr>
-          <a:xfrm>
-            <a:off x="303214" y="2797849"/>
-            <a:ext cx="8451939" cy="1433588"/>
-          </a:xfrm>
-          <a:prstGeom prst="rect">
-            <a:avLst/>
-          </a:prstGeom>
-          <a:noFill/>
-          <a:ln>
-            <a:noFill/>
-          </a:ln>
-        </p:spPr>
-        <p:txBody>
-          <a:bodyPr anchorCtr="0" anchor="ctr" bIns="91425" lIns="91425" spcFirstLastPara="1" rIns="91425" wrap="square" tIns="91425">
-            <a:noAutofit/>
-          </a:bodyPr>
-          <a:lstStyle/>
-          <a:p>
-            <a:pPr indent="0" lvl="0" marL="0" rtl="0" algn="l">
-              <a:spcBef>
-                <a:spcPts val="0"/>
-              </a:spcBef>
-              <a:spcAft>
-                <a:spcPts val="0"/>
-              </a:spcAft>
-              <a:buNone/>
-            </a:pPr>
-            <a:r>
-              <a:t/>
-            </a:r>
-            <a:endParaRPr/>
-          </a:p>
-        </p:txBody>
-      </p:sp>
-      <p:sp>
-        <p:nvSpPr>
-          <p:cNvPr id="555" name="title"/>
-          <p:cNvSpPr txBox="1"/>
-          <p:nvPr/>
-        </p:nvSpPr>
-        <p:spPr>
-          <a:xfrm>
-            <a:off x="274320" y="282943"/>
-            <a:ext cx="6792986" cy="617220"/>
-          </a:xfrm>
-          <a:prstGeom prst="rect">
-            <a:avLst/>
-          </a:prstGeom>
-          <a:noFill/>
-        </p:spPr>
-        <p:txBody>
-          <a:bodyPr wrap="square" lIns="76200" rIns="76200" tIns="50800" bIns="50800">
-            <a:spAutoFit/>
-          </a:bodyPr>
-          <a:lstStyle/>
-          <a:p>
-            <a:pPr algn="l">
-              <a:spcAft>
-                <a:spcPts val="300"/>
-              </a:spcAft>
-              <a:defRPr sz="2400">
-                <a:solidFill>
-                  <a:srgbClr val="000000"/>
-                </a:solidFill>
-                <a:latin typeface="Play"/>
-                <a:ea typeface="Play"/>
-                <a:cs typeface="Play"/>
-              </a:defRPr>
-            </a:pPr>
-            <a:r>
-              <a:rPr sz="2400">
-                <a:solidFill>
-                  <a:srgbClr val="000000"/>
-                </a:solidFill>
-                <a:latin typeface="Play"/>
-                <a:ea typeface="Play"/>
-                <a:cs typeface="Play"/>
-              </a:rPr>
-              <a:t>График масштабирования</a:t>
-            </a:r>
-          </a:p>
-        </p:txBody>
-      </p:sp>
-      <p:sp>
-        <p:nvSpPr>
-          <p:cNvPr id="556" name="Rectangle 555"/>
-          <p:cNvSpPr/>
-          <p:nvPr/>
-        </p:nvSpPr>
-        <p:spPr>
-          <a:xfrm>
-            <a:off x="274320" y="2726370"/>
-            <a:ext cx="8344814" cy="85555"/>
+            <a:off x="274320" y="1719008"/>
+            <a:ext cx="8344814" cy="19858"/>
           </a:xfrm>
           <a:prstGeom prst="rect">
             <a:avLst/>
@@ -9404,14 +7168,14 @@
       </p:sp>
       <p:sp>
         <p:nvSpPr>
-          <p:cNvPr id="557" name="Oval 556"/>
+          <p:cNvPr id="2436" name="Oval 2435"/>
           <p:cNvSpPr/>
           <p:nvPr/>
         </p:nvSpPr>
         <p:spPr>
           <a:xfrm>
-            <a:off x="1351417" y="2455443"/>
-            <a:ext cx="627410" cy="627410"/>
+            <a:off x="1244607" y="1656123"/>
+            <a:ext cx="145628" cy="145628"/>
           </a:xfrm>
           <a:prstGeom prst="ellipse">
             <a:avLst/>
@@ -9447,14 +7211,14 @@
       </p:sp>
       <p:sp>
         <p:nvSpPr>
-          <p:cNvPr id="558" name="TextBox 557"/>
+          <p:cNvPr id="2437" name="TextBox 2436"/>
           <p:cNvSpPr txBox="1"/>
           <p:nvPr/>
         </p:nvSpPr>
         <p:spPr>
           <a:xfrm>
             <a:off x="274320" y="1414513"/>
-            <a:ext cx="2781604" cy="1083708"/>
+            <a:ext cx="2086203" cy="251539"/>
           </a:xfrm>
           <a:prstGeom prst="rect">
             <a:avLst/>
@@ -9486,21 +7250,21 @@
                 <a:ea typeface="Play"/>
                 <a:cs typeface="Play"/>
               </a:rPr>
-              <a:t>Q3 2026</a:t>
+              <a:t>Подключение 4 команд</a:t>
             </a:r>
           </a:p>
         </p:txBody>
       </p:sp>
       <p:sp>
         <p:nvSpPr>
-          <p:cNvPr id="559" name="Oval 558"/>
+          <p:cNvPr id="2438" name="Oval 2437"/>
           <p:cNvSpPr/>
           <p:nvPr/>
         </p:nvSpPr>
         <p:spPr>
           <a:xfrm>
-            <a:off x="4133021" y="2455443"/>
-            <a:ext cx="627410" cy="627410"/>
+            <a:off x="3330811" y="1656123"/>
+            <a:ext cx="145628" cy="145628"/>
           </a:xfrm>
           <a:prstGeom prst="ellipse">
             <a:avLst/>
@@ -9536,14 +7300,14 @@
       </p:sp>
       <p:sp>
         <p:nvSpPr>
-          <p:cNvPr id="560" name="TextBox 559"/>
+          <p:cNvPr id="2439" name="TextBox 2438"/>
           <p:cNvSpPr txBox="1"/>
           <p:nvPr/>
         </p:nvSpPr>
         <p:spPr>
           <a:xfrm>
-            <a:off x="3055924" y="3353781"/>
-            <a:ext cx="2781604" cy="1083708"/>
+            <a:off x="2360523" y="1864636"/>
+            <a:ext cx="2086203" cy="251539"/>
           </a:xfrm>
           <a:prstGeom prst="rect">
             <a:avLst/>
@@ -9575,21 +7339,21 @@
                 <a:ea typeface="Play"/>
                 <a:cs typeface="Play"/>
               </a:rPr>
-              <a:t>Q4 2026</a:t>
+              <a:t>Домен и HTTPS</a:t>
             </a:r>
           </a:p>
         </p:txBody>
       </p:sp>
       <p:sp>
         <p:nvSpPr>
-          <p:cNvPr id="561" name="Oval 560"/>
+          <p:cNvPr id="2440" name="Oval 2439"/>
           <p:cNvSpPr/>
           <p:nvPr/>
         </p:nvSpPr>
         <p:spPr>
           <a:xfrm>
-            <a:off x="6914626" y="2455443"/>
-            <a:ext cx="627410" cy="627410"/>
+            <a:off x="5417014" y="1656123"/>
+            <a:ext cx="145628" cy="145628"/>
           </a:xfrm>
           <a:prstGeom prst="ellipse">
             <a:avLst/>
@@ -9625,14 +7389,14 @@
       </p:sp>
       <p:sp>
         <p:nvSpPr>
-          <p:cNvPr id="562" name="TextBox 561"/>
+          <p:cNvPr id="2441" name="TextBox 2440"/>
           <p:cNvSpPr txBox="1"/>
           <p:nvPr/>
         </p:nvSpPr>
         <p:spPr>
           <a:xfrm>
-            <a:off x="5837529" y="1414513"/>
-            <a:ext cx="2781604" cy="1083708"/>
+            <a:off x="4446727" y="1414513"/>
+            <a:ext cx="2086203" cy="251539"/>
           </a:xfrm>
           <a:prstGeom prst="rect">
             <a:avLst/>
@@ -9664,7 +7428,275 @@
                 <a:ea typeface="Play"/>
                 <a:cs typeface="Play"/>
               </a:rPr>
-              <a:t>Q1 2027</a:t>
+              <a:t>Доступ всей компании</a:t>
+            </a:r>
+          </a:p>
+        </p:txBody>
+      </p:sp>
+      <p:sp>
+        <p:nvSpPr>
+          <p:cNvPr id="2442" name="Oval 2441"/>
+          <p:cNvSpPr/>
+          <p:nvPr/>
+        </p:nvSpPr>
+        <p:spPr>
+          <a:xfrm>
+            <a:off x="7503218" y="1656123"/>
+            <a:ext cx="145628" cy="145628"/>
+          </a:xfrm>
+          <a:prstGeom prst="ellipse">
+            <a:avLst/>
+          </a:prstGeom>
+          <a:solidFill>
+            <a:srgbClr val="0077FF"/>
+          </a:solidFill>
+          <a:ln>
+            <a:noFill/>
+          </a:ln>
+        </p:spPr>
+        <p:style>
+          <a:lnRef idx="1">
+            <a:schemeClr val="accent1"/>
+          </a:lnRef>
+          <a:fillRef idx="3">
+            <a:schemeClr val="accent1"/>
+          </a:fillRef>
+          <a:effectRef idx="2">
+            <a:schemeClr val="accent1"/>
+          </a:effectRef>
+          <a:fontRef idx="minor">
+            <a:schemeClr val="lt1"/>
+          </a:fontRef>
+        </p:style>
+        <p:txBody>
+          <a:bodyPr rtlCol="0" anchor="ctr"/>
+          <a:lstStyle/>
+          <a:p>
+            <a:pPr algn="ctr"/>
+          </a:p>
+        </p:txBody>
+      </p:sp>
+      <p:sp>
+        <p:nvSpPr>
+          <p:cNvPr id="2443" name="TextBox 2442"/>
+          <p:cNvSpPr txBox="1"/>
+          <p:nvPr/>
+        </p:nvSpPr>
+        <p:spPr>
+          <a:xfrm>
+            <a:off x="6532930" y="1864636"/>
+            <a:ext cx="2086203" cy="251539"/>
+          </a:xfrm>
+          <a:prstGeom prst="rect">
+            <a:avLst/>
+          </a:prstGeom>
+          <a:noFill/>
+        </p:spPr>
+        <p:txBody>
+          <a:bodyPr wrap="square">
+            <a:spAutoFit/>
+          </a:bodyPr>
+          <a:lstStyle/>
+          <a:p>
+            <a:pPr algn="ctr">
+              <a:defRPr sz="1200" b="0">
+                <a:solidFill>
+                  <a:srgbClr val="000000"/>
+                </a:solidFill>
+                <a:latin typeface="Play"/>
+                <a:ea typeface="Play"/>
+                <a:cs typeface="Play"/>
+              </a:defRPr>
+            </a:pPr>
+            <a:r>
+              <a:rPr sz="1200" b="0">
+                <a:solidFill>
+                  <a:srgbClr val="000000"/>
+                </a:solidFill>
+                <a:latin typeface="Play"/>
+                <a:ea typeface="Play"/>
+                <a:cs typeface="Play"/>
+              </a:rPr>
+              <a:t>Генерация иллюстраций</a:t>
+            </a:r>
+          </a:p>
+        </p:txBody>
+      </p:sp>
+      <p:sp>
+        <p:nvSpPr>
+          <p:cNvPr id="2444" name="body"/>
+          <p:cNvSpPr txBox="1"/>
+          <p:nvPr/>
+        </p:nvSpPr>
+        <p:spPr>
+          <a:xfrm>
+            <a:off x="274320" y="2205049"/>
+            <a:ext cx="8344814" cy="527023"/>
+          </a:xfrm>
+          <a:prstGeom prst="rect">
+            <a:avLst/>
+          </a:prstGeom>
+          <a:noFill/>
+        </p:spPr>
+        <p:txBody>
+          <a:bodyPr wrap="square" lIns="76200" rIns="76200" tIns="50800" bIns="50800">
+            <a:spAutoFit/>
+          </a:bodyPr>
+          <a:lstStyle/>
+          <a:p>
+            <a:pPr algn="l">
+              <a:spcAft>
+                <a:spcPts val="300"/>
+              </a:spcAft>
+              <a:defRPr sz="1200">
+                <a:solidFill>
+                  <a:srgbClr val="000000"/>
+                </a:solidFill>
+                <a:latin typeface="Play"/>
+                <a:ea typeface="Play"/>
+                <a:cs typeface="Play"/>
+              </a:defRPr>
+            </a:pPr>
+            <a:r>
+              <a:rPr sz="1200">
+                <a:solidFill>
+                  <a:srgbClr val="000000"/>
+                </a:solidFill>
+                <a:latin typeface="Play"/>
+                <a:ea typeface="Play"/>
+                <a:cs typeface="Play"/>
+              </a:rPr>
+              <a:t>• 2 vCPU / 2 GB RAM</a:t>
+            </a:r>
+          </a:p>
+          <a:p>
+            <a:pPr algn="l">
+              <a:spcAft>
+                <a:spcPts val="300"/>
+              </a:spcAft>
+              <a:defRPr sz="1200">
+                <a:solidFill>
+                  <a:srgbClr val="000000"/>
+                </a:solidFill>
+                <a:latin typeface="Play"/>
+                <a:ea typeface="Play"/>
+                <a:cs typeface="Play"/>
+              </a:defRPr>
+            </a:pPr>
+            <a:r>
+              <a:rPr sz="1200">
+                <a:solidFill>
+                  <a:srgbClr val="000000"/>
+                </a:solidFill>
+                <a:latin typeface="Play"/>
+                <a:ea typeface="Play"/>
+                <a:cs typeface="Play"/>
+              </a:rPr>
+              <a:t>• 1 400 рублей за 6 недель</a:t>
+            </a:r>
+          </a:p>
+          <a:p>
+            <a:pPr algn="l">
+              <a:spcAft>
+                <a:spcPts val="300"/>
+              </a:spcAft>
+              <a:defRPr sz="1200">
+                <a:solidFill>
+                  <a:srgbClr val="000000"/>
+                </a:solidFill>
+                <a:latin typeface="Play"/>
+                <a:ea typeface="Play"/>
+                <a:cs typeface="Play"/>
+              </a:defRPr>
+            </a:pPr>
+            <a:r>
+              <a:rPr sz="1200">
+                <a:solidFill>
+                  <a:srgbClr val="000000"/>
+                </a:solidFill>
+                <a:latin typeface="Play"/>
+                <a:ea typeface="Play"/>
+                <a:cs typeface="Play"/>
+              </a:rPr>
+              <a:t>• Модель gpt-oss-20b</a:t>
+            </a:r>
+          </a:p>
+          <a:p>
+            <a:pPr algn="l">
+              <a:spcAft>
+                <a:spcPts val="300"/>
+              </a:spcAft>
+              <a:defRPr sz="1200">
+                <a:solidFill>
+                  <a:srgbClr val="000000"/>
+                </a:solidFill>
+                <a:latin typeface="Play"/>
+                <a:ea typeface="Play"/>
+                <a:cs typeface="Play"/>
+              </a:defRPr>
+            </a:pPr>
+            <a:r>
+              <a:rPr sz="1200">
+                <a:solidFill>
+                  <a:srgbClr val="000000"/>
+                </a:solidFill>
+                <a:latin typeface="Play"/>
+                <a:ea typeface="Play"/>
+                <a:cs typeface="Play"/>
+              </a:rPr>
+              <a:t>• Подключение 4 команд, домен и HTTPS</a:t>
+            </a:r>
+          </a:p>
+          <a:p>
+            <a:pPr algn="l">
+              <a:spcAft>
+                <a:spcPts val="300"/>
+              </a:spcAft>
+              <a:defRPr sz="1200">
+                <a:solidFill>
+                  <a:srgbClr val="000000"/>
+                </a:solidFill>
+                <a:latin typeface="Play"/>
+                <a:ea typeface="Play"/>
+                <a:cs typeface="Play"/>
+              </a:defRPr>
+            </a:pPr>
+            <a:r>
+              <a:rPr sz="1200">
+                <a:solidFill>
+                  <a:srgbClr val="000000"/>
+                </a:solidFill>
+                <a:latin typeface="Play"/>
+                <a:ea typeface="Play"/>
+                <a:cs typeface="Play"/>
+              </a:rPr>
+              <a:t>• Доступ всей компании, интеграция</a:t>
+            </a:r>
+          </a:p>
+          <a:p>
+            <a:pPr algn="l">
+              <a:spcAft>
+                <a:spcPts val="300"/>
+              </a:spcAft>
+              <a:defRPr sz="1200">
+                <a:solidFill>
+                  <a:srgbClr val="000000"/>
+                </a:solidFill>
+                <a:latin typeface="Play"/>
+                <a:ea typeface="Play"/>
+                <a:cs typeface="Play"/>
+              </a:defRPr>
+            </a:pPr>
+            <a:r>
+              <a:rPr sz="1200">
+                <a:solidFill>
+                  <a:srgbClr val="000000"/>
+                </a:solidFill>
+                <a:latin typeface="Play"/>
+                <a:ea typeface="Play"/>
+                <a:cs typeface="Play"/>
+              </a:rPr>
+              <a:t>• Генерация иллюстраций в Q1 2027</a:t>
             </a:r>
           </a:p>
         </p:txBody>
@@ -9677,7 +7709,1296 @@
 </p:sld>
 </file>
 
-<file path=ppt/slides/slide63.xml><?xml version="1.0" encoding="utf-8"?>
+<file path=ppt/slides/slide60.xml><?xml version="1.0" encoding="utf-8"?>
+<p:sld xmlns:a="http://schemas.openxmlformats.org/drawingml/2006/main" xmlns:p="http://schemas.openxmlformats.org/presentationml/2006/main" xmlns:r="http://schemas.openxmlformats.org/officeDocument/2006/relationships">
+  <p:cSld>
+    <p:spTree>
+      <p:nvGrpSpPr>
+        <p:cNvPr id="1" name=""/>
+        <p:cNvGrpSpPr/>
+        <p:nvPr/>
+      </p:nvGrpSpPr>
+      <p:grpSpPr/>
+      <p:sp>
+        <p:nvSpPr>
+          <p:cNvPr id="532" name="Google Shape;532;p53"/>
+          <p:cNvSpPr/>
+          <p:nvPr/>
+        </p:nvSpPr>
+        <p:spPr>
+          <a:xfrm>
+            <a:off x="303214" y="1022533"/>
+            <a:ext cx="8451939" cy="1433588"/>
+          </a:xfrm>
+          <a:prstGeom prst="rect">
+            <a:avLst/>
+          </a:prstGeom>
+          <a:noFill/>
+          <a:ln>
+            <a:noFill/>
+          </a:ln>
+        </p:spPr>
+        <p:txBody>
+          <a:bodyPr anchorCtr="0" anchor="ctr" bIns="91425" lIns="91425" spcFirstLastPara="1" rIns="91425" wrap="square" tIns="91425">
+            <a:noAutofit/>
+          </a:bodyPr>
+          <a:lstStyle/>
+          <a:p>
+            <a:pPr indent="0" lvl="0" marL="0" rtl="0" algn="l">
+              <a:spcBef>
+                <a:spcPts val="0"/>
+              </a:spcBef>
+              <a:spcAft>
+                <a:spcPts val="0"/>
+              </a:spcAft>
+              <a:buNone/>
+            </a:pPr>
+            <a:r>
+              <a:t/>
+            </a:r>
+            <a:endParaRPr/>
+          </a:p>
+        </p:txBody>
+      </p:sp>
+      <p:sp>
+        <p:nvSpPr>
+          <p:cNvPr id="549" name="Google Shape;549;p53"/>
+          <p:cNvSpPr/>
+          <p:nvPr/>
+        </p:nvSpPr>
+        <p:spPr>
+          <a:xfrm>
+            <a:off x="7359897" y="1022533"/>
+            <a:ext cx="1395256" cy="1433588"/>
+          </a:xfrm>
+          <a:prstGeom prst="rect">
+            <a:avLst/>
+          </a:prstGeom>
+          <a:noFill/>
+          <a:ln>
+            <a:noFill/>
+          </a:ln>
+        </p:spPr>
+        <p:txBody>
+          <a:bodyPr anchorCtr="0" anchor="ctr" bIns="91425" lIns="91425" spcFirstLastPara="1" rIns="91425" wrap="square" tIns="91425">
+            <a:noAutofit/>
+          </a:bodyPr>
+          <a:lstStyle/>
+          <a:p>
+            <a:pPr indent="0" lvl="0" marL="0" rtl="0" algn="l">
+              <a:spcBef>
+                <a:spcPts val="0"/>
+              </a:spcBef>
+              <a:spcAft>
+                <a:spcPts val="0"/>
+              </a:spcAft>
+              <a:buNone/>
+            </a:pPr>
+            <a:r>
+              <a:t/>
+            </a:r>
+            <a:endParaRPr/>
+          </a:p>
+        </p:txBody>
+      </p:sp>
+      <p:sp>
+        <p:nvSpPr>
+          <p:cNvPr id="553" name="Google Shape;553;p53"/>
+          <p:cNvSpPr/>
+          <p:nvPr/>
+        </p:nvSpPr>
+        <p:spPr>
+          <a:xfrm>
+            <a:off x="276488" y="2955549"/>
+            <a:ext cx="8451939" cy="1433588"/>
+          </a:xfrm>
+          <a:prstGeom prst="rect">
+            <a:avLst/>
+          </a:prstGeom>
+          <a:noFill/>
+          <a:ln>
+            <a:noFill/>
+          </a:ln>
+        </p:spPr>
+        <p:txBody>
+          <a:bodyPr anchorCtr="0" anchor="ctr" bIns="91425" lIns="91425" spcFirstLastPara="1" rIns="91425" wrap="square" tIns="91425">
+            <a:noAutofit/>
+          </a:bodyPr>
+          <a:lstStyle/>
+          <a:p>
+            <a:pPr indent="0" lvl="0" marL="0" rtl="0" algn="l">
+              <a:spcBef>
+                <a:spcPts val="0"/>
+              </a:spcBef>
+              <a:spcAft>
+                <a:spcPts val="0"/>
+              </a:spcAft>
+              <a:buNone/>
+            </a:pPr>
+            <a:r>
+              <a:t/>
+            </a:r>
+            <a:endParaRPr/>
+          </a:p>
+        </p:txBody>
+      </p:sp>
+      <p:sp>
+        <p:nvSpPr>
+          <p:cNvPr id="554" name="Google Shape;554;p53"/>
+          <p:cNvSpPr/>
+          <p:nvPr/>
+        </p:nvSpPr>
+        <p:spPr>
+          <a:xfrm>
+            <a:off x="303214" y="2797849"/>
+            <a:ext cx="8451939" cy="1433588"/>
+          </a:xfrm>
+          <a:prstGeom prst="rect">
+            <a:avLst/>
+          </a:prstGeom>
+          <a:noFill/>
+          <a:ln>
+            <a:noFill/>
+          </a:ln>
+        </p:spPr>
+        <p:txBody>
+          <a:bodyPr anchorCtr="0" anchor="ctr" bIns="91425" lIns="91425" spcFirstLastPara="1" rIns="91425" wrap="square" tIns="91425">
+            <a:noAutofit/>
+          </a:bodyPr>
+          <a:lstStyle/>
+          <a:p>
+            <a:pPr indent="0" lvl="0" marL="0" rtl="0" algn="l">
+              <a:spcBef>
+                <a:spcPts val="0"/>
+              </a:spcBef>
+              <a:spcAft>
+                <a:spcPts val="0"/>
+              </a:spcAft>
+              <a:buNone/>
+            </a:pPr>
+            <a:r>
+              <a:t/>
+            </a:r>
+            <a:endParaRPr/>
+          </a:p>
+        </p:txBody>
+      </p:sp>
+      <p:sp>
+        <p:nvSpPr>
+          <p:cNvPr id="571" name="Google Shape;571;p53"/>
+          <p:cNvSpPr/>
+          <p:nvPr/>
+        </p:nvSpPr>
+        <p:spPr>
+          <a:xfrm>
+            <a:off x="7359897" y="2797849"/>
+            <a:ext cx="1395256" cy="1433588"/>
+          </a:xfrm>
+          <a:prstGeom prst="rect">
+            <a:avLst/>
+          </a:prstGeom>
+          <a:noFill/>
+          <a:ln>
+            <a:noFill/>
+          </a:ln>
+        </p:spPr>
+        <p:txBody>
+          <a:bodyPr anchorCtr="0" anchor="ctr" bIns="91425" lIns="91425" spcFirstLastPara="1" rIns="91425" wrap="square" tIns="91425">
+            <a:noAutofit/>
+          </a:bodyPr>
+          <a:lstStyle/>
+          <a:p>
+            <a:pPr indent="0" lvl="0" marL="0" rtl="0" algn="l">
+              <a:spcBef>
+                <a:spcPts val="0"/>
+              </a:spcBef>
+              <a:spcAft>
+                <a:spcPts val="0"/>
+              </a:spcAft>
+              <a:buNone/>
+            </a:pPr>
+            <a:r>
+              <a:t/>
+            </a:r>
+            <a:endParaRPr/>
+          </a:p>
+        </p:txBody>
+      </p:sp>
+      <p:sp>
+        <p:nvSpPr>
+          <p:cNvPr id="572" name="title"/>
+          <p:cNvSpPr txBox="1"/>
+          <p:nvPr/>
+        </p:nvSpPr>
+        <p:spPr>
+          <a:xfrm>
+            <a:off x="274320" y="282943"/>
+            <a:ext cx="6792986" cy="617220"/>
+          </a:xfrm>
+          <a:prstGeom prst="rect">
+            <a:avLst/>
+          </a:prstGeom>
+          <a:noFill/>
+        </p:spPr>
+        <p:txBody>
+          <a:bodyPr wrap="square" lIns="76200" rIns="76200" tIns="50800" bIns="50800">
+            <a:spAutoFit/>
+          </a:bodyPr>
+          <a:lstStyle/>
+          <a:p>
+            <a:pPr algn="l">
+              <a:spcAft>
+                <a:spcPts val="300"/>
+              </a:spcAft>
+              <a:defRPr sz="2705">
+                <a:solidFill>
+                  <a:srgbClr val="000000"/>
+                </a:solidFill>
+                <a:latin typeface="Play"/>
+                <a:ea typeface="Play"/>
+                <a:cs typeface="Play"/>
+              </a:defRPr>
+            </a:pPr>
+            <a:r>
+              <a:rPr sz="2705">
+                <a:solidFill>
+                  <a:srgbClr val="000000"/>
+                </a:solidFill>
+                <a:latin typeface="Play"/>
+                <a:ea typeface="Play"/>
+                <a:cs typeface="Play"/>
+              </a:rPr>
+              <a:t>План пилота</a:t>
+            </a:r>
+          </a:p>
+        </p:txBody>
+      </p:sp>
+      <p:sp>
+        <p:nvSpPr>
+          <p:cNvPr id="573" name="lead"/>
+          <p:cNvSpPr txBox="1"/>
+          <p:nvPr/>
+        </p:nvSpPr>
+        <p:spPr>
+          <a:xfrm>
+            <a:off x="274320" y="1414513"/>
+            <a:ext cx="6792986" cy="855559"/>
+          </a:xfrm>
+          <a:prstGeom prst="rect">
+            <a:avLst/>
+          </a:prstGeom>
+          <a:noFill/>
+        </p:spPr>
+        <p:txBody>
+          <a:bodyPr wrap="square" lIns="76200" rIns="76200" tIns="50800" bIns="50800">
+            <a:spAutoFit/>
+          </a:bodyPr>
+          <a:lstStyle/>
+          <a:p>
+            <a:pPr algn="ctr">
+              <a:spcAft>
+                <a:spcPts val="300"/>
+              </a:spcAft>
+              <a:defRPr sz="1800">
+                <a:solidFill>
+                  <a:srgbClr val="000000"/>
+                </a:solidFill>
+                <a:latin typeface="Play"/>
+                <a:ea typeface="Play"/>
+                <a:cs typeface="Play"/>
+              </a:defRPr>
+            </a:pPr>
+            <a:r>
+              <a:rPr sz="1800">
+                <a:solidFill>
+                  <a:srgbClr val="000000"/>
+                </a:solidFill>
+                <a:latin typeface="Play"/>
+                <a:ea typeface="Play"/>
+                <a:cs typeface="Play"/>
+              </a:rPr>
+              <a:t>6 недель</a:t>
+            </a:r>
+          </a:p>
+        </p:txBody>
+      </p:sp>
+      <p:sp>
+        <p:nvSpPr>
+          <p:cNvPr id="574" name="body"/>
+          <p:cNvSpPr txBox="1"/>
+          <p:nvPr/>
+        </p:nvSpPr>
+        <p:spPr>
+          <a:xfrm>
+            <a:off x="274320" y="2441185"/>
+            <a:ext cx="6792986" cy="1825193"/>
+          </a:xfrm>
+          <a:prstGeom prst="rect">
+            <a:avLst/>
+          </a:prstGeom>
+          <a:noFill/>
+        </p:spPr>
+        <p:txBody>
+          <a:bodyPr wrap="square" lIns="76200" rIns="76200" tIns="50800" bIns="50800">
+            <a:spAutoFit/>
+          </a:bodyPr>
+          <a:lstStyle/>
+          <a:p>
+            <a:pPr algn="l">
+              <a:spcAft>
+                <a:spcPts val="300"/>
+              </a:spcAft>
+              <a:defRPr sz="1800">
+                <a:solidFill>
+                  <a:srgbClr val="000000"/>
+                </a:solidFill>
+                <a:latin typeface="Play"/>
+                <a:ea typeface="Play"/>
+                <a:cs typeface="Play"/>
+              </a:defRPr>
+            </a:pPr>
+            <a:r>
+              <a:rPr sz="1800">
+                <a:solidFill>
+                  <a:srgbClr val="000000"/>
+                </a:solidFill>
+                <a:latin typeface="Play"/>
+                <a:ea typeface="Play"/>
+                <a:cs typeface="Play"/>
+              </a:rPr>
+              <a:t>• 2 команды</a:t>
+            </a:r>
+          </a:p>
+          <a:p>
+            <a:pPr algn="l">
+              <a:spcAft>
+                <a:spcPts val="300"/>
+              </a:spcAft>
+              <a:defRPr sz="1800">
+                <a:solidFill>
+                  <a:srgbClr val="000000"/>
+                </a:solidFill>
+                <a:latin typeface="Play"/>
+                <a:ea typeface="Play"/>
+                <a:cs typeface="Play"/>
+              </a:defRPr>
+            </a:pPr>
+            <a:r>
+              <a:rPr sz="1800">
+                <a:solidFill>
+                  <a:srgbClr val="000000"/>
+                </a:solidFill>
+                <a:latin typeface="Play"/>
+                <a:ea typeface="Play"/>
+                <a:cs typeface="Play"/>
+              </a:rPr>
+              <a:t>• 68 презентаций</a:t>
+            </a:r>
+          </a:p>
+          <a:p>
+            <a:pPr algn="l">
+              <a:spcAft>
+                <a:spcPts val="300"/>
+              </a:spcAft>
+              <a:defRPr sz="1800">
+                <a:solidFill>
+                  <a:srgbClr val="000000"/>
+                </a:solidFill>
+                <a:latin typeface="Play"/>
+                <a:ea typeface="Play"/>
+                <a:cs typeface="Play"/>
+              </a:defRPr>
+            </a:pPr>
+            <a:r>
+              <a:rPr sz="1800">
+                <a:solidFill>
+                  <a:srgbClr val="000000"/>
+                </a:solidFill>
+                <a:latin typeface="Play"/>
+                <a:ea typeface="Play"/>
+                <a:cs typeface="Play"/>
+              </a:rPr>
+              <a:t>• Сборка 4 мин вместо 186</a:t>
+            </a:r>
+          </a:p>
+          <a:p>
+            <a:pPr algn="l">
+              <a:spcAft>
+                <a:spcPts val="300"/>
+              </a:spcAft>
+              <a:defRPr sz="1800">
+                <a:solidFill>
+                  <a:srgbClr val="000000"/>
+                </a:solidFill>
+                <a:latin typeface="Play"/>
+                <a:ea typeface="Play"/>
+                <a:cs typeface="Play"/>
+              </a:defRPr>
+            </a:pPr>
+            <a:r>
+              <a:rPr sz="1800">
+                <a:solidFill>
+                  <a:srgbClr val="000000"/>
+                </a:solidFill>
+                <a:latin typeface="Play"/>
+                <a:ea typeface="Play"/>
+                <a:cs typeface="Play"/>
+              </a:rPr>
+              <a:t>• Время до первой версии 1 день вместо 6</a:t>
+            </a:r>
+          </a:p>
+          <a:p>
+            <a:pPr algn="l">
+              <a:spcAft>
+                <a:spcPts val="300"/>
+              </a:spcAft>
+              <a:defRPr sz="1800">
+                <a:solidFill>
+                  <a:srgbClr val="000000"/>
+                </a:solidFill>
+                <a:latin typeface="Play"/>
+                <a:ea typeface="Play"/>
+                <a:cs typeface="Play"/>
+              </a:defRPr>
+            </a:pPr>
+            <a:r>
+              <a:rPr sz="1800">
+                <a:solidFill>
+                  <a:srgbClr val="000000"/>
+                </a:solidFill>
+                <a:latin typeface="Play"/>
+                <a:ea typeface="Play"/>
+                <a:cs typeface="Play"/>
+              </a:rPr>
+              <a:t>• Нарушения 2 из 68, запросы 38 вместо 11</a:t>
+            </a:r>
+          </a:p>
+        </p:txBody>
+      </p:sp>
+    </p:spTree>
+  </p:cSld>
+  <p:clrMapOvr>
+    <a:masterClrMapping/>
+  </p:clrMapOvr>
+</p:sld>
+</file>
+
+<file path=ppt/slides/slide61.xml><?xml version="1.0" encoding="utf-8"?>
+<p:sld xmlns:a="http://schemas.openxmlformats.org/drawingml/2006/main" xmlns:p="http://schemas.openxmlformats.org/presentationml/2006/main" xmlns:r="http://schemas.openxmlformats.org/officeDocument/2006/relationships">
+  <p:cSld>
+    <p:spTree>
+      <p:nvGrpSpPr>
+        <p:cNvPr id="1" name=""/>
+        <p:cNvGrpSpPr/>
+        <p:nvPr/>
+      </p:nvGrpSpPr>
+      <p:grpSpPr/>
+      <p:sp>
+        <p:nvSpPr>
+          <p:cNvPr id="1027" name="Google Shape;1027;p65"/>
+          <p:cNvSpPr/>
+          <p:nvPr/>
+        </p:nvSpPr>
+        <p:spPr>
+          <a:xfrm>
+            <a:off x="6064222" y="1209852"/>
+            <a:ext cx="2793985" cy="3014270"/>
+          </a:xfrm>
+          <a:prstGeom prst="roundRect">
+            <a:avLst>
+              <a:gd fmla="val 3436" name="adj"/>
+            </a:avLst>
+          </a:prstGeom>
+          <a:solidFill>
+            <a:schemeClr val="lt2"/>
+          </a:solidFill>
+          <a:ln>
+            <a:noFill/>
+          </a:ln>
+        </p:spPr>
+        <p:txBody>
+          <a:bodyPr anchorCtr="0" anchor="ctr" bIns="91425" lIns="91425" spcFirstLastPara="1" rIns="91425" wrap="square" tIns="91425">
+            <a:noAutofit/>
+          </a:bodyPr>
+          <a:lstStyle/>
+          <a:p>
+            <a:pPr indent="0" lvl="0" marL="0" rtl="0" algn="l">
+              <a:spcBef>
+                <a:spcPts val="0"/>
+              </a:spcBef>
+              <a:spcAft>
+                <a:spcPts val="0"/>
+              </a:spcAft>
+              <a:buNone/>
+            </a:pPr>
+            <a:r>
+              <a:t/>
+            </a:r>
+            <a:endParaRPr/>
+          </a:p>
+        </p:txBody>
+      </p:sp>
+      <p:sp>
+        <p:nvSpPr>
+          <p:cNvPr id="1029" name="Google Shape;1029;p65"/>
+          <p:cNvSpPr/>
+          <p:nvPr/>
+        </p:nvSpPr>
+        <p:spPr>
+          <a:xfrm>
+            <a:off x="3174981" y="1209852"/>
+            <a:ext cx="2793985" cy="3014270"/>
+          </a:xfrm>
+          <a:prstGeom prst="roundRect">
+            <a:avLst>
+              <a:gd fmla="val 3436" name="adj"/>
+            </a:avLst>
+          </a:prstGeom>
+          <a:solidFill>
+            <a:schemeClr val="lt2"/>
+          </a:solidFill>
+          <a:ln>
+            <a:noFill/>
+          </a:ln>
+        </p:spPr>
+        <p:txBody>
+          <a:bodyPr anchorCtr="0" anchor="ctr" bIns="91425" lIns="91425" spcFirstLastPara="1" rIns="91425" wrap="square" tIns="91425">
+            <a:noAutofit/>
+          </a:bodyPr>
+          <a:lstStyle/>
+          <a:p>
+            <a:pPr indent="0" lvl="0" marL="0" rtl="0" algn="l">
+              <a:spcBef>
+                <a:spcPts val="0"/>
+              </a:spcBef>
+              <a:spcAft>
+                <a:spcPts val="0"/>
+              </a:spcAft>
+              <a:buNone/>
+            </a:pPr>
+            <a:r>
+              <a:t/>
+            </a:r>
+            <a:endParaRPr/>
+          </a:p>
+        </p:txBody>
+      </p:sp>
+      <p:sp>
+        <p:nvSpPr>
+          <p:cNvPr id="1031" name="Google Shape;1031;p65"/>
+          <p:cNvSpPr/>
+          <p:nvPr/>
+        </p:nvSpPr>
+        <p:spPr>
+          <a:xfrm>
+            <a:off x="285749" y="1209852"/>
+            <a:ext cx="2793985" cy="3014270"/>
+          </a:xfrm>
+          <a:prstGeom prst="roundRect">
+            <a:avLst>
+              <a:gd fmla="val 3436" name="adj"/>
+            </a:avLst>
+          </a:prstGeom>
+          <a:solidFill>
+            <a:schemeClr val="lt2"/>
+          </a:solidFill>
+          <a:ln>
+            <a:noFill/>
+          </a:ln>
+        </p:spPr>
+        <p:txBody>
+          <a:bodyPr anchorCtr="0" anchor="ctr" bIns="91425" lIns="91425" spcFirstLastPara="1" rIns="91425" wrap="square" tIns="91425">
+            <a:noAutofit/>
+          </a:bodyPr>
+          <a:lstStyle/>
+          <a:p>
+            <a:pPr indent="0" lvl="0" marL="0" rtl="0" algn="l">
+              <a:spcBef>
+                <a:spcPts val="0"/>
+              </a:spcBef>
+              <a:spcAft>
+                <a:spcPts val="0"/>
+              </a:spcAft>
+              <a:buNone/>
+            </a:pPr>
+            <a:r>
+              <a:t/>
+            </a:r>
+            <a:endParaRPr/>
+          </a:p>
+        </p:txBody>
+      </p:sp>
+      <p:sp>
+        <p:nvSpPr>
+          <p:cNvPr id="1032" name="Google Shape;1032;p65"/>
+          <p:cNvSpPr/>
+          <p:nvPr/>
+        </p:nvSpPr>
+        <p:spPr>
+          <a:xfrm>
+            <a:off x="285748" y="286047"/>
+            <a:ext cx="8572456" cy="3938075"/>
+          </a:xfrm>
+          <a:prstGeom prst="rect">
+            <a:avLst/>
+          </a:prstGeom>
+          <a:noFill/>
+          <a:ln>
+            <a:noFill/>
+          </a:ln>
+        </p:spPr>
+        <p:txBody>
+          <a:bodyPr anchorCtr="0" anchor="ctr" bIns="91425" lIns="91425" spcFirstLastPara="1" rIns="91425" wrap="square" tIns="91425">
+            <a:noAutofit/>
+          </a:bodyPr>
+          <a:lstStyle/>
+          <a:p>
+            <a:pPr indent="0" lvl="0" marL="0" rtl="0" algn="l">
+              <a:spcBef>
+                <a:spcPts val="0"/>
+              </a:spcBef>
+              <a:spcAft>
+                <a:spcPts val="0"/>
+              </a:spcAft>
+              <a:buNone/>
+            </a:pPr>
+            <a:r>
+              <a:t/>
+            </a:r>
+            <a:endParaRPr/>
+          </a:p>
+        </p:txBody>
+      </p:sp>
+      <p:sp>
+        <p:nvSpPr>
+          <p:cNvPr id="1033" name="Google Shape;1033;p65"/>
+          <p:cNvSpPr/>
+          <p:nvPr/>
+        </p:nvSpPr>
+        <p:spPr>
+          <a:xfrm>
+            <a:off x="285748" y="1209852"/>
+            <a:ext cx="8572456" cy="3014270"/>
+          </a:xfrm>
+          <a:prstGeom prst="rect">
+            <a:avLst/>
+          </a:prstGeom>
+          <a:noFill/>
+          <a:ln>
+            <a:noFill/>
+          </a:ln>
+        </p:spPr>
+        <p:txBody>
+          <a:bodyPr anchorCtr="0" anchor="ctr" bIns="91425" lIns="91425" spcFirstLastPara="1" rIns="91425" wrap="square" tIns="91425">
+            <a:noAutofit/>
+          </a:bodyPr>
+          <a:lstStyle/>
+          <a:p>
+            <a:pPr indent="0" lvl="0" marL="0" rtl="0" algn="l">
+              <a:spcBef>
+                <a:spcPts val="0"/>
+              </a:spcBef>
+              <a:spcAft>
+                <a:spcPts val="0"/>
+              </a:spcAft>
+              <a:buNone/>
+            </a:pPr>
+            <a:r>
+              <a:t/>
+            </a:r>
+            <a:endParaRPr/>
+          </a:p>
+        </p:txBody>
+      </p:sp>
+      <p:sp>
+        <p:nvSpPr>
+          <p:cNvPr id="1035" name="Google Shape;1035;p65"/>
+          <p:cNvSpPr/>
+          <p:nvPr/>
+        </p:nvSpPr>
+        <p:spPr>
+          <a:xfrm>
+            <a:off x="476248" y="1400328"/>
+            <a:ext cx="76199" cy="76190"/>
+          </a:xfrm>
+          <a:prstGeom prst="roundRect">
+            <a:avLst>
+              <a:gd fmla="val 31500" name="adj"/>
+            </a:avLst>
+          </a:prstGeom>
+          <a:solidFill>
+            <a:srgbClr val="0077FF"/>
+          </a:solidFill>
+          <a:ln>
+            <a:noFill/>
+          </a:ln>
+        </p:spPr>
+        <p:txBody>
+          <a:bodyPr anchorCtr="0" anchor="ctr" bIns="91425" lIns="91425" spcFirstLastPara="1" rIns="91425" wrap="square" tIns="91425">
+            <a:noAutofit/>
+          </a:bodyPr>
+          <a:lstStyle/>
+          <a:p>
+            <a:pPr indent="0" lvl="0" marL="0" rtl="0" algn="l">
+              <a:spcBef>
+                <a:spcPts val="0"/>
+              </a:spcBef>
+              <a:spcAft>
+                <a:spcPts val="0"/>
+              </a:spcAft>
+              <a:buNone/>
+            </a:pPr>
+            <a:r>
+              <a:t/>
+            </a:r>
+            <a:endParaRPr/>
+          </a:p>
+        </p:txBody>
+      </p:sp>
+      <p:sp>
+        <p:nvSpPr>
+          <p:cNvPr id="1041" name="Google Shape;1041;p65"/>
+          <p:cNvSpPr/>
+          <p:nvPr/>
+        </p:nvSpPr>
+        <p:spPr>
+          <a:xfrm>
+            <a:off x="3365480" y="1400328"/>
+            <a:ext cx="76199" cy="76190"/>
+          </a:xfrm>
+          <a:prstGeom prst="roundRect">
+            <a:avLst>
+              <a:gd fmla="val 31500" name="adj"/>
+            </a:avLst>
+          </a:prstGeom>
+          <a:solidFill>
+            <a:srgbClr val="0077FF"/>
+          </a:solidFill>
+          <a:ln>
+            <a:noFill/>
+          </a:ln>
+        </p:spPr>
+        <p:txBody>
+          <a:bodyPr anchorCtr="0" anchor="ctr" bIns="91425" lIns="91425" spcFirstLastPara="1" rIns="91425" wrap="square" tIns="91425">
+            <a:noAutofit/>
+          </a:bodyPr>
+          <a:lstStyle/>
+          <a:p>
+            <a:pPr indent="0" lvl="0" marL="0" rtl="0" algn="l">
+              <a:spcBef>
+                <a:spcPts val="0"/>
+              </a:spcBef>
+              <a:spcAft>
+                <a:spcPts val="0"/>
+              </a:spcAft>
+              <a:buNone/>
+            </a:pPr>
+            <a:r>
+              <a:t/>
+            </a:r>
+            <a:endParaRPr/>
+          </a:p>
+        </p:txBody>
+      </p:sp>
+      <p:sp>
+        <p:nvSpPr>
+          <p:cNvPr id="1046" name="Google Shape;1046;p65"/>
+          <p:cNvSpPr/>
+          <p:nvPr/>
+        </p:nvSpPr>
+        <p:spPr>
+          <a:xfrm>
+            <a:off x="6254721" y="1400328"/>
+            <a:ext cx="76199" cy="76190"/>
+          </a:xfrm>
+          <a:prstGeom prst="roundRect">
+            <a:avLst>
+              <a:gd fmla="val 31500" name="adj"/>
+            </a:avLst>
+          </a:prstGeom>
+          <a:solidFill>
+            <a:srgbClr val="0077FF"/>
+          </a:solidFill>
+          <a:ln>
+            <a:noFill/>
+          </a:ln>
+        </p:spPr>
+        <p:txBody>
+          <a:bodyPr anchorCtr="0" anchor="ctr" bIns="91425" lIns="91425" spcFirstLastPara="1" rIns="91425" wrap="square" tIns="91425">
+            <a:noAutofit/>
+          </a:bodyPr>
+          <a:lstStyle/>
+          <a:p>
+            <a:pPr indent="0" lvl="0" marL="0" rtl="0" algn="l">
+              <a:spcBef>
+                <a:spcPts val="0"/>
+              </a:spcBef>
+              <a:spcAft>
+                <a:spcPts val="0"/>
+              </a:spcAft>
+              <a:buNone/>
+            </a:pPr>
+            <a:r>
+              <a:t/>
+            </a:r>
+            <a:endParaRPr/>
+          </a:p>
+        </p:txBody>
+      </p:sp>
+      <p:sp>
+        <p:nvSpPr>
+          <p:cNvPr id="1047" name="title"/>
+          <p:cNvSpPr txBox="1"/>
+          <p:nvPr/>
+        </p:nvSpPr>
+        <p:spPr>
+          <a:xfrm>
+            <a:off x="274320" y="282943"/>
+            <a:ext cx="6792986" cy="617220"/>
+          </a:xfrm>
+          <a:prstGeom prst="rect">
+            <a:avLst/>
+          </a:prstGeom>
+          <a:noFill/>
+        </p:spPr>
+        <p:txBody>
+          <a:bodyPr wrap="square" lIns="76200" rIns="76200" tIns="50800" bIns="50800">
+            <a:spAutoFit/>
+          </a:bodyPr>
+          <a:lstStyle/>
+          <a:p>
+            <a:pPr algn="l">
+              <a:spcAft>
+                <a:spcPts val="300"/>
+              </a:spcAft>
+              <a:defRPr sz="2705">
+                <a:solidFill>
+                  <a:srgbClr val="000000"/>
+                </a:solidFill>
+                <a:latin typeface="Play"/>
+                <a:ea typeface="Play"/>
+                <a:cs typeface="Play"/>
+              </a:defRPr>
+            </a:pPr>
+            <a:r>
+              <a:rPr sz="2705">
+                <a:solidFill>
+                  <a:srgbClr val="000000"/>
+                </a:solidFill>
+                <a:latin typeface="Play"/>
+                <a:ea typeface="Play"/>
+                <a:cs typeface="Play"/>
+              </a:rPr>
+              <a:t>Риски</a:t>
+            </a:r>
+          </a:p>
+        </p:txBody>
+      </p:sp>
+      <p:sp>
+        <p:nvSpPr>
+          <p:cNvPr id="1048" name="Oval 1047"/>
+          <p:cNvSpPr/>
+          <p:nvPr/>
+        </p:nvSpPr>
+        <p:spPr>
+          <a:xfrm>
+            <a:off x="1411519" y="1530621"/>
+            <a:ext cx="433029" cy="433029"/>
+          </a:xfrm>
+          <a:prstGeom prst="ellipse">
+            <a:avLst/>
+          </a:prstGeom>
+          <a:solidFill>
+            <a:srgbClr val="0077FF"/>
+          </a:solidFill>
+          <a:ln>
+            <a:noFill/>
+          </a:ln>
+        </p:spPr>
+        <p:style>
+          <a:lnRef idx="1">
+            <a:schemeClr val="accent1"/>
+          </a:lnRef>
+          <a:fillRef idx="3">
+            <a:schemeClr val="accent1"/>
+          </a:fillRef>
+          <a:effectRef idx="2">
+            <a:schemeClr val="accent1"/>
+          </a:effectRef>
+          <a:fontRef idx="minor">
+            <a:schemeClr val="lt1"/>
+          </a:fontRef>
+        </p:style>
+        <p:txBody>
+          <a:bodyPr rtlCol="0" anchor="ctr"/>
+          <a:lstStyle/>
+          <a:p>
+            <a:pPr algn="ctr"/>
+          </a:p>
+        </p:txBody>
+      </p:sp>
+      <p:sp>
+        <p:nvSpPr>
+          <p:cNvPr id="1049" name="TextBox 1048"/>
+          <p:cNvSpPr txBox="1"/>
+          <p:nvPr/>
+        </p:nvSpPr>
+        <p:spPr>
+          <a:xfrm>
+            <a:off x="274320" y="2076828"/>
+            <a:ext cx="2707428" cy="383821"/>
+          </a:xfrm>
+          <a:prstGeom prst="rect">
+            <a:avLst/>
+          </a:prstGeom>
+          <a:noFill/>
+        </p:spPr>
+        <p:txBody>
+          <a:bodyPr wrap="square">
+            <a:spAutoFit/>
+          </a:bodyPr>
+          <a:lstStyle/>
+          <a:p>
+            <a:pPr algn="ctr">
+              <a:defRPr sz="1200" b="0">
+                <a:solidFill>
+                  <a:srgbClr val="000000"/>
+                </a:solidFill>
+                <a:latin typeface="Play"/>
+                <a:ea typeface="Play"/>
+                <a:cs typeface="Play"/>
+              </a:defRPr>
+            </a:pPr>
+            <a:r>
+              <a:rPr sz="1200" b="0">
+                <a:solidFill>
+                  <a:srgbClr val="000000"/>
+                </a:solidFill>
+                <a:latin typeface="Play"/>
+                <a:ea typeface="Play"/>
+                <a:cs typeface="Play"/>
+              </a:rPr>
+              <a:t>Слабая модель может выдумать цифры</a:t>
+            </a:r>
+          </a:p>
+        </p:txBody>
+      </p:sp>
+      <p:sp>
+        <p:nvSpPr>
+          <p:cNvPr id="1050" name="Document 1049"/>
+          <p:cNvSpPr/>
+          <p:nvPr/>
+        </p:nvSpPr>
+        <p:spPr>
+          <a:xfrm>
+            <a:off x="4241038" y="1519795"/>
+            <a:ext cx="411377" cy="454680"/>
+          </a:xfrm>
+          <a:prstGeom prst="flowChartDocument">
+            <a:avLst/>
+          </a:prstGeom>
+          <a:solidFill>
+            <a:srgbClr val="0077FF"/>
+          </a:solidFill>
+          <a:ln>
+            <a:noFill/>
+          </a:ln>
+        </p:spPr>
+        <p:style>
+          <a:lnRef idx="1">
+            <a:schemeClr val="accent1"/>
+          </a:lnRef>
+          <a:fillRef idx="3">
+            <a:schemeClr val="accent1"/>
+          </a:fillRef>
+          <a:effectRef idx="2">
+            <a:schemeClr val="accent1"/>
+          </a:effectRef>
+          <a:fontRef idx="minor">
+            <a:schemeClr val="lt1"/>
+          </a:fontRef>
+        </p:style>
+        <p:txBody>
+          <a:bodyPr rtlCol="0" anchor="ctr"/>
+          <a:lstStyle/>
+          <a:p>
+            <a:pPr algn="ctr"/>
+          </a:p>
+        </p:txBody>
+      </p:sp>
+      <p:sp>
+        <p:nvSpPr>
+          <p:cNvPr id="1051" name="TextBox 1050"/>
+          <p:cNvSpPr txBox="1"/>
+          <p:nvPr/>
+        </p:nvSpPr>
+        <p:spPr>
+          <a:xfrm>
+            <a:off x="3093012" y="2076828"/>
+            <a:ext cx="2707428" cy="383821"/>
+          </a:xfrm>
+          <a:prstGeom prst="rect">
+            <a:avLst/>
+          </a:prstGeom>
+          <a:noFill/>
+        </p:spPr>
+        <p:txBody>
+          <a:bodyPr wrap="square">
+            <a:spAutoFit/>
+          </a:bodyPr>
+          <a:lstStyle/>
+          <a:p>
+            <a:pPr algn="ctr">
+              <a:defRPr sz="1200" b="0">
+                <a:solidFill>
+                  <a:srgbClr val="000000"/>
+                </a:solidFill>
+                <a:latin typeface="Play"/>
+                <a:ea typeface="Play"/>
+                <a:cs typeface="Play"/>
+              </a:defRPr>
+            </a:pPr>
+            <a:r>
+              <a:rPr sz="1200" b="0">
+                <a:solidFill>
+                  <a:srgbClr val="000000"/>
+                </a:solidFill>
+                <a:latin typeface="Play"/>
+                <a:ea typeface="Play"/>
+                <a:cs typeface="Play"/>
+              </a:rPr>
+              <a:t>Незнакомый шаблон может быть плохо сделан</a:t>
+            </a:r>
+          </a:p>
+        </p:txBody>
+      </p:sp>
+      <p:sp>
+        <p:nvSpPr>
+          <p:cNvPr id="1052" name="Oval 1051"/>
+          <p:cNvSpPr/>
+          <p:nvPr/>
+        </p:nvSpPr>
+        <p:spPr>
+          <a:xfrm>
+            <a:off x="7016428" y="1498144"/>
+            <a:ext cx="497983" cy="497983"/>
+          </a:xfrm>
+          <a:prstGeom prst="ellipse">
+            <a:avLst/>
+          </a:prstGeom>
+          <a:solidFill>
+            <a:srgbClr val="0077FF"/>
+          </a:solidFill>
+          <a:ln>
+            <a:noFill/>
+          </a:ln>
+        </p:spPr>
+        <p:style>
+          <a:lnRef idx="1">
+            <a:schemeClr val="accent1"/>
+          </a:lnRef>
+          <a:fillRef idx="3">
+            <a:schemeClr val="accent1"/>
+          </a:fillRef>
+          <a:effectRef idx="2">
+            <a:schemeClr val="accent1"/>
+          </a:effectRef>
+          <a:fontRef idx="minor">
+            <a:schemeClr val="lt1"/>
+          </a:fontRef>
+        </p:style>
+        <p:txBody>
+          <a:bodyPr rtlCol="0" anchor="ctr"/>
+          <a:lstStyle/>
+          <a:p>
+            <a:pPr algn="ctr"/>
+          </a:p>
+        </p:txBody>
+      </p:sp>
+      <p:sp>
+        <p:nvSpPr>
+          <p:cNvPr id="1053" name="Oval 1052"/>
+          <p:cNvSpPr/>
+          <p:nvPr/>
+        </p:nvSpPr>
+        <p:spPr>
+          <a:xfrm>
+            <a:off x="7103033" y="1584750"/>
+            <a:ext cx="324771" cy="324771"/>
+          </a:xfrm>
+          <a:prstGeom prst="ellipse">
+            <a:avLst/>
+          </a:prstGeom>
+          <a:solidFill>
+            <a:srgbClr val="FFFFFF"/>
+          </a:solidFill>
+          <a:ln>
+            <a:noFill/>
+          </a:ln>
+        </p:spPr>
+        <p:style>
+          <a:lnRef idx="1">
+            <a:schemeClr val="accent1"/>
+          </a:lnRef>
+          <a:fillRef idx="3">
+            <a:schemeClr val="accent1"/>
+          </a:fillRef>
+          <a:effectRef idx="2">
+            <a:schemeClr val="accent1"/>
+          </a:effectRef>
+          <a:fontRef idx="minor">
+            <a:schemeClr val="lt1"/>
+          </a:fontRef>
+        </p:style>
+        <p:txBody>
+          <a:bodyPr rtlCol="0" anchor="ctr"/>
+          <a:lstStyle/>
+          <a:p>
+            <a:pPr algn="ctr"/>
+          </a:p>
+        </p:txBody>
+      </p:sp>
+      <p:sp>
+        <p:nvSpPr>
+          <p:cNvPr id="1054" name="Oval 1053"/>
+          <p:cNvSpPr/>
+          <p:nvPr/>
+        </p:nvSpPr>
+        <p:spPr>
+          <a:xfrm>
+            <a:off x="7178813" y="1660530"/>
+            <a:ext cx="173211" cy="173211"/>
+          </a:xfrm>
+          <a:prstGeom prst="ellipse">
+            <a:avLst/>
+          </a:prstGeom>
+          <a:solidFill>
+            <a:srgbClr val="0077FF"/>
+          </a:solidFill>
+          <a:ln>
+            <a:noFill/>
+          </a:ln>
+        </p:spPr>
+        <p:style>
+          <a:lnRef idx="1">
+            <a:schemeClr val="accent1"/>
+          </a:lnRef>
+          <a:fillRef idx="3">
+            <a:schemeClr val="accent1"/>
+          </a:fillRef>
+          <a:effectRef idx="2">
+            <a:schemeClr val="accent1"/>
+          </a:effectRef>
+          <a:fontRef idx="minor">
+            <a:schemeClr val="lt1"/>
+          </a:fontRef>
+        </p:style>
+        <p:txBody>
+          <a:bodyPr rtlCol="0" anchor="ctr"/>
+          <a:lstStyle/>
+          <a:p>
+            <a:pPr algn="ctr"/>
+          </a:p>
+        </p:txBody>
+      </p:sp>
+      <p:sp>
+        <p:nvSpPr>
+          <p:cNvPr id="1055" name="Oval 1054"/>
+          <p:cNvSpPr/>
+          <p:nvPr/>
+        </p:nvSpPr>
+        <p:spPr>
+          <a:xfrm>
+            <a:off x="7232942" y="1714658"/>
+            <a:ext cx="64954" cy="64954"/>
+          </a:xfrm>
+          <a:prstGeom prst="ellipse">
+            <a:avLst/>
+          </a:prstGeom>
+          <a:solidFill>
+            <a:srgbClr val="FFFFFF"/>
+          </a:solidFill>
+          <a:ln>
+            <a:noFill/>
+          </a:ln>
+        </p:spPr>
+        <p:style>
+          <a:lnRef idx="1">
+            <a:schemeClr val="accent1"/>
+          </a:lnRef>
+          <a:fillRef idx="3">
+            <a:schemeClr val="accent1"/>
+          </a:fillRef>
+          <a:effectRef idx="2">
+            <a:schemeClr val="accent1"/>
+          </a:effectRef>
+          <a:fontRef idx="minor">
+            <a:schemeClr val="lt1"/>
+          </a:fontRef>
+        </p:style>
+        <p:txBody>
+          <a:bodyPr rtlCol="0" anchor="ctr"/>
+          <a:lstStyle/>
+          <a:p>
+            <a:pPr algn="ctr"/>
+          </a:p>
+        </p:txBody>
+      </p:sp>
+      <p:sp>
+        <p:nvSpPr>
+          <p:cNvPr id="1056" name="TextBox 1055"/>
+          <p:cNvSpPr txBox="1"/>
+          <p:nvPr/>
+        </p:nvSpPr>
+        <p:spPr>
+          <a:xfrm>
+            <a:off x="5911705" y="2076828"/>
+            <a:ext cx="2707428" cy="383821"/>
+          </a:xfrm>
+          <a:prstGeom prst="rect">
+            <a:avLst/>
+          </a:prstGeom>
+          <a:noFill/>
+        </p:spPr>
+        <p:txBody>
+          <a:bodyPr wrap="square">
+            <a:spAutoFit/>
+          </a:bodyPr>
+          <a:lstStyle/>
+          <a:p>
+            <a:pPr algn="ctr">
+              <a:defRPr sz="1200" b="0">
+                <a:solidFill>
+                  <a:srgbClr val="000000"/>
+                </a:solidFill>
+                <a:latin typeface="Play"/>
+                <a:ea typeface="Play"/>
+                <a:cs typeface="Play"/>
+              </a:defRPr>
+            </a:pPr>
+            <a:r>
+              <a:rPr sz="1200" b="0">
+                <a:solidFill>
+                  <a:srgbClr val="000000"/>
+                </a:solidFill>
+                <a:latin typeface="Play"/>
+                <a:ea typeface="Play"/>
+                <a:cs typeface="Play"/>
+              </a:rPr>
+              <a:t>Нагрузка более 20 задач требует внешней очереди</a:t>
+            </a:r>
+          </a:p>
+        </p:txBody>
+      </p:sp>
+    </p:spTree>
+  </p:cSld>
+  <p:clrMapOvr>
+    <a:masterClrMapping/>
+  </p:clrMapOvr>
+</p:sld>
+</file>
+
+<file path=ppt/slides/slide62.xml><?xml version="1.0" encoding="utf-8"?>
 <p:sld xmlns:a="http://schemas.openxmlformats.org/drawingml/2006/main" xmlns:p="http://schemas.openxmlformats.org/presentationml/2006/main" xmlns:r="http://schemas.openxmlformats.org/officeDocument/2006/relationships">
   <p:cSld>
     <p:spTree>
@@ -9785,7 +9106,7 @@
                 <a:ea typeface="Play"/>
                 <a:cs typeface="Play"/>
               </a:rPr>
-              <a:t>План пилота</a:t>
+              <a:t>Потенциальные выгоды</a:t>
             </a:r>
           </a:p>
         </p:txBody>
@@ -9798,8 +9119,8 @@
         </p:nvSpPr>
         <p:spPr>
           <a:xfrm>
-            <a:off x="993266" y="1414513"/>
-            <a:ext cx="5751575" cy="648590"/>
+            <a:off x="274320" y="1414513"/>
+            <a:ext cx="6792986" cy="648590"/>
           </a:xfrm>
           <a:prstGeom prst="rect">
             <a:avLst/>
@@ -9816,7 +9137,7 @@
               <a:spcAft>
                 <a:spcPts val="300"/>
               </a:spcAft>
-              <a:defRPr sz="1600" b="1">
+              <a:defRPr sz="1803" b="1">
                 <a:solidFill>
                   <a:srgbClr val="000000"/>
                 </a:solidFill>
@@ -9826,7 +9147,7 @@
               </a:defRPr>
             </a:pPr>
             <a:r>
-              <a:rPr sz="1600" b="1">
+              <a:rPr sz="1803" b="1">
                 <a:solidFill>
                   <a:srgbClr val="000000"/>
                 </a:solidFill>
@@ -9834,7 +9155,7 @@
                 <a:ea typeface="Play"/>
                 <a:cs typeface="Play"/>
               </a:rPr>
-              <a:t>План пилота: 6 недель, 2 команды, 68 презентаций</a:t>
+              <a:t>Сокращение времени на создание презентаций</a:t>
             </a:r>
           </a:p>
         </p:txBody>
@@ -9847,8 +9168,8 @@
         </p:nvSpPr>
         <p:spPr>
           <a:xfrm>
-            <a:off x="993266" y="2192822"/>
-            <a:ext cx="5751575" cy="1383659"/>
+            <a:off x="274320" y="2192822"/>
+            <a:ext cx="6792986" cy="1383659"/>
           </a:xfrm>
           <a:prstGeom prst="rect">
             <a:avLst/>
@@ -9865,7 +9186,7 @@
               <a:spcAft>
                 <a:spcPts val="300"/>
               </a:spcAft>
-              <a:defRPr sz="1406" b="1">
+              <a:defRPr sz="2438" b="1">
                 <a:solidFill>
                   <a:srgbClr val="000000"/>
                 </a:solidFill>
@@ -9875,7 +9196,7 @@
               </a:defRPr>
             </a:pPr>
             <a:r>
-              <a:rPr sz="1406" b="1">
+              <a:rPr sz="2438" b="1">
                 <a:solidFill>
                   <a:srgbClr val="000000"/>
                 </a:solidFill>
@@ -9883,7 +9204,7 @@
                 <a:ea typeface="Play"/>
                 <a:cs typeface="Play"/>
               </a:rPr>
-              <a:t>• Цель – доказать экономию времени и соблюдение стиля</a:t>
+              <a:t>• Уменьшение нарушений фирменного стиля</a:t>
             </a:r>
           </a:p>
           <a:p>
@@ -9891,7 +9212,7 @@
               <a:spcAft>
                 <a:spcPts val="300"/>
               </a:spcAft>
-              <a:defRPr sz="1406" b="1">
+              <a:defRPr sz="2438" b="1">
                 <a:solidFill>
                   <a:srgbClr val="000000"/>
                 </a:solidFill>
@@ -9901,7 +9222,7 @@
               </a:defRPr>
             </a:pPr>
             <a:r>
-              <a:rPr sz="1406" b="1">
+              <a:rPr sz="2438" b="1">
                 <a:solidFill>
                   <a:srgbClr val="000000"/>
                 </a:solidFill>
@@ -9909,15 +9230,531 @@
                 <a:ea typeface="Play"/>
                 <a:cs typeface="Play"/>
               </a:rPr>
-              <a:t>• После пилота масштабируем на 4 команды в Q3 2026</a:t>
+              <a:t>• Повышение продуктивности дизайнеров</a:t>
             </a:r>
           </a:p>
+        </p:txBody>
+      </p:sp>
+    </p:spTree>
+  </p:cSld>
+  <p:clrMapOvr>
+    <a:masterClrMapping/>
+  </p:clrMapOvr>
+</p:sld>
+</file>
+
+<file path=ppt/slides/slide63.xml><?xml version="1.0" encoding="utf-8"?>
+<p:sld xmlns:a="http://schemas.openxmlformats.org/drawingml/2006/main" xmlns:p="http://schemas.openxmlformats.org/presentationml/2006/main" xmlns:r="http://schemas.openxmlformats.org/officeDocument/2006/relationships">
+  <p:cSld>
+    <p:spTree>
+      <p:nvGrpSpPr>
+        <p:cNvPr id="1" name=""/>
+        <p:cNvGrpSpPr/>
+        <p:nvPr/>
+      </p:nvGrpSpPr>
+      <p:grpSpPr/>
+      <p:sp>
+        <p:nvSpPr>
+          <p:cNvPr id="1027" name="Google Shape;1027;p65"/>
+          <p:cNvSpPr/>
+          <p:nvPr/>
+        </p:nvSpPr>
+        <p:spPr>
+          <a:xfrm>
+            <a:off x="6064222" y="1209852"/>
+            <a:ext cx="2793985" cy="3014270"/>
+          </a:xfrm>
+          <a:prstGeom prst="roundRect">
+            <a:avLst>
+              <a:gd fmla="val 3436" name="adj"/>
+            </a:avLst>
+          </a:prstGeom>
+          <a:solidFill>
+            <a:schemeClr val="lt2"/>
+          </a:solidFill>
+          <a:ln>
+            <a:noFill/>
+          </a:ln>
+        </p:spPr>
+        <p:txBody>
+          <a:bodyPr anchorCtr="0" anchor="ctr" bIns="91425" lIns="91425" spcFirstLastPara="1" rIns="91425" wrap="square" tIns="91425">
+            <a:noAutofit/>
+          </a:bodyPr>
+          <a:lstStyle/>
+          <a:p>
+            <a:pPr indent="0" lvl="0" marL="0" rtl="0" algn="l">
+              <a:spcBef>
+                <a:spcPts val="0"/>
+              </a:spcBef>
+              <a:spcAft>
+                <a:spcPts val="0"/>
+              </a:spcAft>
+              <a:buNone/>
+            </a:pPr>
+            <a:r>
+              <a:t/>
+            </a:r>
+            <a:endParaRPr/>
+          </a:p>
+        </p:txBody>
+      </p:sp>
+      <p:sp>
+        <p:nvSpPr>
+          <p:cNvPr id="1029" name="Google Shape;1029;p65"/>
+          <p:cNvSpPr/>
+          <p:nvPr/>
+        </p:nvSpPr>
+        <p:spPr>
+          <a:xfrm>
+            <a:off x="3174981" y="1209852"/>
+            <a:ext cx="2793985" cy="3014270"/>
+          </a:xfrm>
+          <a:prstGeom prst="roundRect">
+            <a:avLst>
+              <a:gd fmla="val 3436" name="adj"/>
+            </a:avLst>
+          </a:prstGeom>
+          <a:solidFill>
+            <a:schemeClr val="lt2"/>
+          </a:solidFill>
+          <a:ln>
+            <a:noFill/>
+          </a:ln>
+        </p:spPr>
+        <p:txBody>
+          <a:bodyPr anchorCtr="0" anchor="ctr" bIns="91425" lIns="91425" spcFirstLastPara="1" rIns="91425" wrap="square" tIns="91425">
+            <a:noAutofit/>
+          </a:bodyPr>
+          <a:lstStyle/>
+          <a:p>
+            <a:pPr indent="0" lvl="0" marL="0" rtl="0" algn="l">
+              <a:spcBef>
+                <a:spcPts val="0"/>
+              </a:spcBef>
+              <a:spcAft>
+                <a:spcPts val="0"/>
+              </a:spcAft>
+              <a:buNone/>
+            </a:pPr>
+            <a:r>
+              <a:t/>
+            </a:r>
+            <a:endParaRPr/>
+          </a:p>
+        </p:txBody>
+      </p:sp>
+      <p:sp>
+        <p:nvSpPr>
+          <p:cNvPr id="1031" name="Google Shape;1031;p65"/>
+          <p:cNvSpPr/>
+          <p:nvPr/>
+        </p:nvSpPr>
+        <p:spPr>
+          <a:xfrm>
+            <a:off x="285749" y="1209852"/>
+            <a:ext cx="2793985" cy="3014270"/>
+          </a:xfrm>
+          <a:prstGeom prst="roundRect">
+            <a:avLst>
+              <a:gd fmla="val 3436" name="adj"/>
+            </a:avLst>
+          </a:prstGeom>
+          <a:solidFill>
+            <a:schemeClr val="lt2"/>
+          </a:solidFill>
+          <a:ln>
+            <a:noFill/>
+          </a:ln>
+        </p:spPr>
+        <p:txBody>
+          <a:bodyPr anchorCtr="0" anchor="ctr" bIns="91425" lIns="91425" spcFirstLastPara="1" rIns="91425" wrap="square" tIns="91425">
+            <a:noAutofit/>
+          </a:bodyPr>
+          <a:lstStyle/>
+          <a:p>
+            <a:pPr indent="0" lvl="0" marL="0" rtl="0" algn="l">
+              <a:spcBef>
+                <a:spcPts val="0"/>
+              </a:spcBef>
+              <a:spcAft>
+                <a:spcPts val="0"/>
+              </a:spcAft>
+              <a:buNone/>
+            </a:pPr>
+            <a:r>
+              <a:t/>
+            </a:r>
+            <a:endParaRPr/>
+          </a:p>
+        </p:txBody>
+      </p:sp>
+      <p:sp>
+        <p:nvSpPr>
+          <p:cNvPr id="1032" name="Google Shape;1032;p65"/>
+          <p:cNvSpPr/>
+          <p:nvPr/>
+        </p:nvSpPr>
+        <p:spPr>
+          <a:xfrm>
+            <a:off x="285748" y="286047"/>
+            <a:ext cx="8572456" cy="3938075"/>
+          </a:xfrm>
+          <a:prstGeom prst="rect">
+            <a:avLst/>
+          </a:prstGeom>
+          <a:noFill/>
+          <a:ln>
+            <a:noFill/>
+          </a:ln>
+        </p:spPr>
+        <p:txBody>
+          <a:bodyPr anchorCtr="0" anchor="ctr" bIns="91425" lIns="91425" spcFirstLastPara="1" rIns="91425" wrap="square" tIns="91425">
+            <a:noAutofit/>
+          </a:bodyPr>
+          <a:lstStyle/>
+          <a:p>
+            <a:pPr indent="0" lvl="0" marL="0" rtl="0" algn="l">
+              <a:spcBef>
+                <a:spcPts val="0"/>
+              </a:spcBef>
+              <a:spcAft>
+                <a:spcPts val="0"/>
+              </a:spcAft>
+              <a:buNone/>
+            </a:pPr>
+            <a:r>
+              <a:t/>
+            </a:r>
+            <a:endParaRPr/>
+          </a:p>
+        </p:txBody>
+      </p:sp>
+      <p:sp>
+        <p:nvSpPr>
+          <p:cNvPr id="1033" name="Google Shape;1033;p65"/>
+          <p:cNvSpPr/>
+          <p:nvPr/>
+        </p:nvSpPr>
+        <p:spPr>
+          <a:xfrm>
+            <a:off x="285748" y="1209852"/>
+            <a:ext cx="8572456" cy="3014270"/>
+          </a:xfrm>
+          <a:prstGeom prst="rect">
+            <a:avLst/>
+          </a:prstGeom>
+          <a:noFill/>
+          <a:ln>
+            <a:noFill/>
+          </a:ln>
+        </p:spPr>
+        <p:txBody>
+          <a:bodyPr anchorCtr="0" anchor="ctr" bIns="91425" lIns="91425" spcFirstLastPara="1" rIns="91425" wrap="square" tIns="91425">
+            <a:noAutofit/>
+          </a:bodyPr>
+          <a:lstStyle/>
+          <a:p>
+            <a:pPr indent="0" lvl="0" marL="0" rtl="0" algn="l">
+              <a:spcBef>
+                <a:spcPts val="0"/>
+              </a:spcBef>
+              <a:spcAft>
+                <a:spcPts val="0"/>
+              </a:spcAft>
+              <a:buNone/>
+            </a:pPr>
+            <a:r>
+              <a:t/>
+            </a:r>
+            <a:endParaRPr/>
+          </a:p>
+        </p:txBody>
+      </p:sp>
+      <p:sp>
+        <p:nvSpPr>
+          <p:cNvPr id="1034" name="Google Shape;1034;p65"/>
+          <p:cNvSpPr/>
+          <p:nvPr/>
+        </p:nvSpPr>
+        <p:spPr>
+          <a:xfrm>
+            <a:off x="476248" y="1400327"/>
+            <a:ext cx="2412987" cy="1009519"/>
+          </a:xfrm>
+          <a:prstGeom prst="rect">
+            <a:avLst/>
+          </a:prstGeom>
+          <a:noFill/>
+          <a:ln>
+            <a:noFill/>
+          </a:ln>
+        </p:spPr>
+        <p:txBody>
+          <a:bodyPr anchorCtr="0" anchor="ctr" bIns="91425" lIns="91425" spcFirstLastPara="1" rIns="91425" wrap="square" tIns="91425">
+            <a:noAutofit/>
+          </a:bodyPr>
+          <a:lstStyle/>
+          <a:p>
+            <a:pPr indent="0" lvl="0" marL="0" rtl="0" algn="l">
+              <a:spcBef>
+                <a:spcPts val="0"/>
+              </a:spcBef>
+              <a:spcAft>
+                <a:spcPts val="0"/>
+              </a:spcAft>
+              <a:buNone/>
+            </a:pPr>
+            <a:r>
+              <a:t/>
+            </a:r>
+            <a:endParaRPr/>
+          </a:p>
+        </p:txBody>
+      </p:sp>
+      <p:sp>
+        <p:nvSpPr>
+          <p:cNvPr id="1035" name="Google Shape;1035;p65"/>
+          <p:cNvSpPr/>
+          <p:nvPr/>
+        </p:nvSpPr>
+        <p:spPr>
+          <a:xfrm>
+            <a:off x="476248" y="1400328"/>
+            <a:ext cx="76199" cy="76190"/>
+          </a:xfrm>
+          <a:prstGeom prst="roundRect">
+            <a:avLst>
+              <a:gd fmla="val 31500" name="adj"/>
+            </a:avLst>
+          </a:prstGeom>
+          <a:solidFill>
+            <a:srgbClr val="0077FF"/>
+          </a:solidFill>
+          <a:ln>
+            <a:noFill/>
+          </a:ln>
+        </p:spPr>
+        <p:txBody>
+          <a:bodyPr anchorCtr="0" anchor="ctr" bIns="91425" lIns="91425" spcFirstLastPara="1" rIns="91425" wrap="square" tIns="91425">
+            <a:noAutofit/>
+          </a:bodyPr>
+          <a:lstStyle/>
+          <a:p>
+            <a:pPr indent="0" lvl="0" marL="0" rtl="0" algn="l">
+              <a:spcBef>
+                <a:spcPts val="0"/>
+              </a:spcBef>
+              <a:spcAft>
+                <a:spcPts val="0"/>
+              </a:spcAft>
+              <a:buNone/>
+            </a:pPr>
+            <a:r>
+              <a:t/>
+            </a:r>
+            <a:endParaRPr/>
+          </a:p>
+        </p:txBody>
+      </p:sp>
+      <p:sp>
+        <p:nvSpPr>
+          <p:cNvPr id="1040" name="Google Shape;1040;p65"/>
+          <p:cNvSpPr/>
+          <p:nvPr/>
+        </p:nvSpPr>
+        <p:spPr>
+          <a:xfrm>
+            <a:off x="3365480" y="1400327"/>
+            <a:ext cx="2412987" cy="1009519"/>
+          </a:xfrm>
+          <a:prstGeom prst="rect">
+            <a:avLst/>
+          </a:prstGeom>
+          <a:noFill/>
+          <a:ln>
+            <a:noFill/>
+          </a:ln>
+        </p:spPr>
+        <p:txBody>
+          <a:bodyPr anchorCtr="0" anchor="ctr" bIns="91425" lIns="91425" spcFirstLastPara="1" rIns="91425" wrap="square" tIns="91425">
+            <a:noAutofit/>
+          </a:bodyPr>
+          <a:lstStyle/>
+          <a:p>
+            <a:pPr indent="0" lvl="0" marL="0" rtl="0" algn="l">
+              <a:spcBef>
+                <a:spcPts val="0"/>
+              </a:spcBef>
+              <a:spcAft>
+                <a:spcPts val="0"/>
+              </a:spcAft>
+              <a:buNone/>
+            </a:pPr>
+            <a:r>
+              <a:t/>
+            </a:r>
+            <a:endParaRPr/>
+          </a:p>
+        </p:txBody>
+      </p:sp>
+      <p:sp>
+        <p:nvSpPr>
+          <p:cNvPr id="1041" name="Google Shape;1041;p65"/>
+          <p:cNvSpPr/>
+          <p:nvPr/>
+        </p:nvSpPr>
+        <p:spPr>
+          <a:xfrm>
+            <a:off x="3365480" y="1400328"/>
+            <a:ext cx="76199" cy="76190"/>
+          </a:xfrm>
+          <a:prstGeom prst="roundRect">
+            <a:avLst>
+              <a:gd fmla="val 31500" name="adj"/>
+            </a:avLst>
+          </a:prstGeom>
+          <a:solidFill>
+            <a:srgbClr val="0077FF"/>
+          </a:solidFill>
+          <a:ln>
+            <a:noFill/>
+          </a:ln>
+        </p:spPr>
+        <p:txBody>
+          <a:bodyPr anchorCtr="0" anchor="ctr" bIns="91425" lIns="91425" spcFirstLastPara="1" rIns="91425" wrap="square" tIns="91425">
+            <a:noAutofit/>
+          </a:bodyPr>
+          <a:lstStyle/>
+          <a:p>
+            <a:pPr indent="0" lvl="0" marL="0" rtl="0" algn="l">
+              <a:spcBef>
+                <a:spcPts val="0"/>
+              </a:spcBef>
+              <a:spcAft>
+                <a:spcPts val="0"/>
+              </a:spcAft>
+              <a:buNone/>
+            </a:pPr>
+            <a:r>
+              <a:t/>
+            </a:r>
+            <a:endParaRPr/>
+          </a:p>
+        </p:txBody>
+      </p:sp>
+      <p:sp>
+        <p:nvSpPr>
+          <p:cNvPr id="1045" name="Google Shape;1045;p65"/>
+          <p:cNvSpPr/>
+          <p:nvPr/>
+        </p:nvSpPr>
+        <p:spPr>
+          <a:xfrm>
+            <a:off x="6254721" y="1400327"/>
+            <a:ext cx="2412987" cy="1009519"/>
+          </a:xfrm>
+          <a:prstGeom prst="rect">
+            <a:avLst/>
+          </a:prstGeom>
+          <a:noFill/>
+          <a:ln>
+            <a:noFill/>
+          </a:ln>
+        </p:spPr>
+        <p:txBody>
+          <a:bodyPr anchorCtr="0" anchor="ctr" bIns="91425" lIns="91425" spcFirstLastPara="1" rIns="91425" wrap="square" tIns="91425">
+            <a:noAutofit/>
+          </a:bodyPr>
+          <a:lstStyle/>
+          <a:p>
+            <a:pPr indent="0" lvl="0" marL="0" rtl="0" algn="l">
+              <a:spcBef>
+                <a:spcPts val="0"/>
+              </a:spcBef>
+              <a:spcAft>
+                <a:spcPts val="0"/>
+              </a:spcAft>
+              <a:buNone/>
+            </a:pPr>
+            <a:r>
+              <a:t/>
+            </a:r>
+            <a:endParaRPr/>
+          </a:p>
+        </p:txBody>
+      </p:sp>
+      <p:sp>
+        <p:nvSpPr>
+          <p:cNvPr id="1046" name="Google Shape;1046;p65"/>
+          <p:cNvSpPr/>
+          <p:nvPr/>
+        </p:nvSpPr>
+        <p:spPr>
+          <a:xfrm>
+            <a:off x="6254721" y="1400328"/>
+            <a:ext cx="76199" cy="76190"/>
+          </a:xfrm>
+          <a:prstGeom prst="roundRect">
+            <a:avLst>
+              <a:gd fmla="val 31500" name="adj"/>
+            </a:avLst>
+          </a:prstGeom>
+          <a:solidFill>
+            <a:srgbClr val="0077FF"/>
+          </a:solidFill>
+          <a:ln>
+            <a:noFill/>
+          </a:ln>
+        </p:spPr>
+        <p:txBody>
+          <a:bodyPr anchorCtr="0" anchor="ctr" bIns="91425" lIns="91425" spcFirstLastPara="1" rIns="91425" wrap="square" tIns="91425">
+            <a:noAutofit/>
+          </a:bodyPr>
+          <a:lstStyle/>
+          <a:p>
+            <a:pPr indent="0" lvl="0" marL="0" rtl="0" algn="l">
+              <a:spcBef>
+                <a:spcPts val="0"/>
+              </a:spcBef>
+              <a:spcAft>
+                <a:spcPts val="0"/>
+              </a:spcAft>
+              <a:buNone/>
+            </a:pPr>
+            <a:r>
+              <a:t/>
+            </a:r>
+            <a:endParaRPr/>
+          </a:p>
+        </p:txBody>
+      </p:sp>
+      <p:sp>
+        <p:nvSpPr>
+          <p:cNvPr id="1047" name="title"/>
+          <p:cNvSpPr txBox="1"/>
+          <p:nvPr/>
+        </p:nvSpPr>
+        <p:spPr>
+          <a:xfrm>
+            <a:off x="274320" y="282943"/>
+            <a:ext cx="6792986" cy="617220"/>
+          </a:xfrm>
+          <a:prstGeom prst="rect">
+            <a:avLst/>
+          </a:prstGeom>
+          <a:noFill/>
+        </p:spPr>
+        <p:txBody>
+          <a:bodyPr wrap="square" lIns="76200" rIns="76200" tIns="50800" bIns="50800">
+            <a:spAutoFit/>
+          </a:bodyPr>
+          <a:lstStyle/>
           <a:p>
             <a:pPr algn="l">
               <a:spcAft>
                 <a:spcPts val="300"/>
               </a:spcAft>
-              <a:defRPr sz="1406" b="1">
+              <a:defRPr sz="2705">
                 <a:solidFill>
                   <a:srgbClr val="000000"/>
                 </a:solidFill>
@@ -9927,7 +9764,7 @@
               </a:defRPr>
             </a:pPr>
             <a:r>
-              <a:rPr sz="1406" b="1">
+              <a:rPr sz="2705">
                 <a:solidFill>
                   <a:srgbClr val="000000"/>
                 </a:solidFill>
@@ -9935,15 +9772,38 @@
                 <a:ea typeface="Play"/>
                 <a:cs typeface="Play"/>
               </a:rPr>
-              <a:t>• Далее – доступ для всей компании в Q4 2026</a:t>
+              <a:t>Что мы просим решить</a:t>
             </a:r>
           </a:p>
+        </p:txBody>
+      </p:sp>
+      <p:sp>
+        <p:nvSpPr>
+          <p:cNvPr id="1048" name="lead"/>
+          <p:cNvSpPr txBox="1"/>
+          <p:nvPr/>
+        </p:nvSpPr>
+        <p:spPr>
+          <a:xfrm>
+            <a:off x="274320" y="1476493"/>
+            <a:ext cx="6792986" cy="295247"/>
+          </a:xfrm>
+          <a:prstGeom prst="rect">
+            <a:avLst/>
+          </a:prstGeom>
+          <a:noFill/>
+        </p:spPr>
+        <p:txBody>
+          <a:bodyPr wrap="square" lIns="76200" rIns="76200" tIns="50800" bIns="50800">
+            <a:spAutoFit/>
+          </a:bodyPr>
+          <a:lstStyle/>
           <a:p>
             <a:pPr algn="l">
               <a:spcAft>
                 <a:spcPts val="300"/>
               </a:spcAft>
-              <a:defRPr sz="1406" b="1">
+              <a:defRPr sz="1200">
                 <a:solidFill>
                   <a:srgbClr val="000000"/>
                 </a:solidFill>
@@ -9953,7 +9813,7 @@
               </a:defRPr>
             </a:pPr>
             <a:r>
-              <a:rPr sz="1406" b="1">
+              <a:rPr sz="1200">
                 <a:solidFill>
                   <a:srgbClr val="000000"/>
                 </a:solidFill>
@@ -9961,7 +9821,82 @@
                 <a:ea typeface="Play"/>
                 <a:cs typeface="Play"/>
               </a:rPr>
-              <a:t>• И генерация иллюстраций в Q1 2027</a:t>
+              <a:t>Одобрить запуск сервиса на всю компанию</a:t>
+            </a:r>
+          </a:p>
+        </p:txBody>
+      </p:sp>
+      <p:sp>
+        <p:nvSpPr>
+          <p:cNvPr id="1049" name="body"/>
+          <p:cNvSpPr txBox="1"/>
+          <p:nvPr/>
+        </p:nvSpPr>
+        <p:spPr>
+          <a:xfrm>
+            <a:off x="274320" y="1830789"/>
+            <a:ext cx="6792986" cy="629860"/>
+          </a:xfrm>
+          <a:prstGeom prst="rect">
+            <a:avLst/>
+          </a:prstGeom>
+          <a:noFill/>
+        </p:spPr>
+        <p:txBody>
+          <a:bodyPr wrap="square" lIns="76200" rIns="76200" tIns="50800" bIns="50800">
+            <a:spAutoFit/>
+          </a:bodyPr>
+          <a:lstStyle/>
+          <a:p>
+            <a:pPr algn="l">
+              <a:spcAft>
+                <a:spcPts val="300"/>
+              </a:spcAft>
+              <a:defRPr sz="1406">
+                <a:solidFill>
+                  <a:srgbClr val="000000"/>
+                </a:solidFill>
+                <a:latin typeface="Play"/>
+                <a:ea typeface="Play"/>
+                <a:cs typeface="Play"/>
+              </a:defRPr>
+            </a:pPr>
+            <a:r>
+              <a:rPr sz="1406">
+                <a:solidFill>
+                  <a:srgbClr val="000000"/>
+                </a:solidFill>
+                <a:latin typeface="Play"/>
+                <a:ea typeface="Play"/>
+                <a:cs typeface="Play"/>
+              </a:rPr>
+              <a:t>• Обеспечить инфраструктуру и интеграцию</a:t>
+            </a:r>
+          </a:p>
+          <a:p>
+            <a:pPr algn="l">
+              <a:spcAft>
+                <a:spcPts val="300"/>
+              </a:spcAft>
+              <a:defRPr sz="1406">
+                <a:solidFill>
+                  <a:srgbClr val="000000"/>
+                </a:solidFill>
+                <a:latin typeface="Play"/>
+                <a:ea typeface="Play"/>
+                <a:cs typeface="Play"/>
+              </a:defRPr>
+            </a:pPr>
+            <a:r>
+              <a:rPr sz="1406">
+                <a:solidFill>
+                  <a:srgbClr val="000000"/>
+                </a:solidFill>
+                <a:latin typeface="Play"/>
+                <a:ea typeface="Play"/>
+                <a:cs typeface="Play"/>
+              </a:rPr>
+              <a:t>• Поддерживать модель и обновления</a:t>
             </a:r>
           </a:p>
         </p:txBody>
@@ -9993,7 +9928,7 @@
         <p:spPr>
           <a:xfrm>
             <a:off x="445963" y="1555901"/>
-            <a:ext cx="7495554" cy="2911318"/>
+            <a:ext cx="4627118" cy="2379662"/>
           </a:xfrm>
           <a:prstGeom prst="roundRect">
             <a:avLst/>
@@ -10039,7 +9974,7 @@
         <p:spPr>
           <a:xfrm>
             <a:off x="572963" y="1682901"/>
-            <a:ext cx="4373118" cy="1183640"/>
+            <a:ext cx="4373118" cy="655320"/>
           </a:xfrm>
           <a:prstGeom prst="rect">
             <a:avLst/>
@@ -10074,7 +10009,7 @@
                 <a:ea typeface="Play"/>
                 <a:cs typeface="Play"/>
               </a:rPr>
-              <a:t>Что мы просим решить</a:t>
+              <a:t>Вывод</a:t>
             </a:r>
           </a:p>
         </p:txBody>
@@ -10087,8 +10022,8 @@
         </p:nvSpPr>
         <p:spPr>
           <a:xfrm>
-            <a:off x="1377580" y="3046564"/>
-            <a:ext cx="6436937" cy="413053"/>
+            <a:off x="572963" y="2518244"/>
+            <a:ext cx="4373118" cy="1905165"/>
           </a:xfrm>
           <a:prstGeom prst="rect">
             <a:avLst/>
@@ -10105,7 +10040,7 @@
               <a:spcAft>
                 <a:spcPts val="300"/>
               </a:spcAft>
-              <a:defRPr sz="1803">
+              <a:defRPr sz="2400">
                 <a:solidFill>
                   <a:srgbClr val="000000"/>
                 </a:solidFill>
@@ -10115,7 +10050,7 @@
               </a:defRPr>
             </a:pPr>
             <a:r>
-              <a:rPr sz="1803">
+              <a:rPr sz="2400">
                 <a:solidFill>
                   <a:srgbClr val="000000"/>
                 </a:solidFill>
@@ -10123,108 +10058,7 @@
                 <a:ea typeface="Play"/>
                 <a:cs typeface="Play"/>
               </a:rPr>
-              <a:t>Запрос решения о запуске сервиса на всю компанию</a:t>
-            </a:r>
-          </a:p>
-        </p:txBody>
-      </p:sp>
-      <p:sp>
-        <p:nvSpPr>
-          <p:cNvPr id="5" name="body"/>
-          <p:cNvSpPr txBox="1"/>
-          <p:nvPr/>
-        </p:nvSpPr>
-        <p:spPr>
-          <a:xfrm>
-            <a:off x="1377580" y="3542228"/>
-            <a:ext cx="6436937" cy="881181"/>
-          </a:xfrm>
-          <a:prstGeom prst="rect">
-            <a:avLst/>
-          </a:prstGeom>
-          <a:noFill/>
-        </p:spPr>
-        <p:txBody>
-          <a:bodyPr wrap="square" lIns="76200" rIns="76200" tIns="50800" bIns="50800">
-            <a:spAutoFit/>
-          </a:bodyPr>
-          <a:lstStyle/>
-          <a:p>
-            <a:pPr algn="l">
-              <a:spcAft>
-                <a:spcPts val="300"/>
-              </a:spcAft>
-              <a:defRPr sz="1406">
-                <a:solidFill>
-                  <a:srgbClr val="000000"/>
-                </a:solidFill>
-                <a:latin typeface="Play"/>
-                <a:ea typeface="Play"/>
-                <a:cs typeface="Play"/>
-              </a:defRPr>
-            </a:pPr>
-            <a:r>
-              <a:rPr sz="1406">
-                <a:solidFill>
-                  <a:srgbClr val="000000"/>
-                </a:solidFill>
-                <a:latin typeface="Play"/>
-                <a:ea typeface="Play"/>
-                <a:cs typeface="Play"/>
-              </a:rPr>
-              <a:t>• Ожидаем одобрение руководства к концу Q4 2026</a:t>
-            </a:r>
-          </a:p>
-          <a:p>
-            <a:pPr algn="l">
-              <a:spcAft>
-                <a:spcPts val="300"/>
-              </a:spcAft>
-              <a:defRPr sz="1406">
-                <a:solidFill>
-                  <a:srgbClr val="000000"/>
-                </a:solidFill>
-                <a:latin typeface="Play"/>
-                <a:ea typeface="Play"/>
-                <a:cs typeface="Play"/>
-              </a:defRPr>
-            </a:pPr>
-            <a:r>
-              <a:rPr sz="1406">
-                <a:solidFill>
-                  <a:srgbClr val="000000"/>
-                </a:solidFill>
-                <a:latin typeface="Play"/>
-                <a:ea typeface="Play"/>
-                <a:cs typeface="Play"/>
-              </a:rPr>
-              <a:t>• При поддержке выделить бюджет на инфраструктуру и обучение</a:t>
-            </a:r>
-          </a:p>
-          <a:p>
-            <a:pPr algn="l">
-              <a:spcAft>
-                <a:spcPts val="300"/>
-              </a:spcAft>
-              <a:defRPr sz="1406">
-                <a:solidFill>
-                  <a:srgbClr val="000000"/>
-                </a:solidFill>
-                <a:latin typeface="Play"/>
-                <a:ea typeface="Play"/>
-                <a:cs typeface="Play"/>
-              </a:defRPr>
-            </a:pPr>
-            <a:r>
-              <a:rPr sz="1406">
-                <a:solidFill>
-                  <a:srgbClr val="000000"/>
-                </a:solidFill>
-                <a:latin typeface="Play"/>
-                <a:ea typeface="Play"/>
-                <a:cs typeface="Play"/>
-              </a:rPr>
-              <a:t>• Готовы предоставить детальный план внедрения</a:t>
+              <a:t>Успешный запуск позволит ускорить создание презентаций и повысить качество</a:t>
             </a:r>
           </a:p>
         </p:txBody>

--- a/samples/VK_Tech_шаблон__focus.pptx
+++ b/samples/VK_Tech_шаблон__focus.pptx
@@ -261,193 +261,6 @@
 </p:presentation>
 </file>
 
-<file path=ppt/charts/chart1.xml><?xml version="1.0" encoding="utf-8"?>
-<c:chartSpace xmlns:c="http://schemas.openxmlformats.org/drawingml/2006/chart" xmlns:a="http://schemas.openxmlformats.org/drawingml/2006/main" xmlns:r="http://schemas.openxmlformats.org/officeDocument/2006/relationships">
-  <c:date1904 val="0"/>
-  <c:chart>
-    <c:autoTitleDeleted val="1"/>
-    <c:plotArea>
-      <c:barChart>
-        <c:barDir val="col"/>
-        <c:grouping val="clustered"/>
-        <c:ser>
-          <c:idx val="0"/>
-          <c:order val="0"/>
-          <c:tx>
-            <c:strRef>
-              <c:f>Sheet1!$B$1</c:f>
-              <c:strCache>
-                <c:ptCount val="1"/>
-                <c:pt idx="0">
-                  <c:v>Время</c:v>
-                </c:pt>
-              </c:strCache>
-            </c:strRef>
-          </c:tx>
-          <c:spPr>
-            <a:solidFill>
-              <a:srgbClr val="0077FF"/>
-            </a:solidFill>
-            <a:ln>
-              <a:solidFill>
-                <a:srgbClr val="0077FF"/>
-              </a:solidFill>
-            </a:ln>
-          </c:spPr>
-          <c:cat>
-            <c:strRef>
-              <c:f>Sheet1!$A$2:$A$3</c:f>
-              <c:strCache>
-                <c:ptCount val="2"/>
-                <c:pt idx="0">
-                  <c:v>Сборка</c:v>
-                </c:pt>
-                <c:pt idx="1">
-                  <c:v>Правки</c:v>
-                </c:pt>
-              </c:strCache>
-            </c:strRef>
-          </c:cat>
-          <c:val>
-            <c:numRef>
-              <c:f>Sheet1!$B$2:$B$3</c:f>
-              <c:numCache>
-                <c:formatCode>General</c:formatCode>
-                <c:ptCount val="2"/>
-                <c:pt idx="0">
-                  <c:v>186.0</c:v>
-                </c:pt>
-                <c:pt idx="1">
-                  <c:v>74.0</c:v>
-                </c:pt>
-              </c:numCache>
-            </c:numRef>
-          </c:val>
-        </c:ser>
-        <c:gapWidth val="60"/>
-        <c:axId val="-2068027336"/>
-        <c:axId val="-2113994440"/>
-      </c:barChart>
-      <c:catAx>
-        <c:axId val="-2068027336"/>
-        <c:scaling>
-          <c:orientation val="minMax"/>
-        </c:scaling>
-        <c:delete val="0"/>
-        <c:axPos val="b"/>
-        <c:majorTickMark val="out"/>
-        <c:minorTickMark val="none"/>
-        <c:tickLblPos val="nextTo"/>
-        <c:txPr>
-          <a:bodyPr/>
-          <a:lstStyle/>
-          <a:p>
-            <a:pPr>
-              <a:defRPr sz="1100" b="0">
-                <a:solidFill>
-                  <a:srgbClr val="000000"/>
-                </a:solidFill>
-                <a:latin typeface="Play"/>
-                <a:ea typeface="Play"/>
-                <a:cs typeface="Play"/>
-              </a:defRPr>
-            </a:pPr>
-          </a:p>
-        </c:txPr>
-        <c:crossAx val="-2113994440"/>
-        <c:crosses val="autoZero"/>
-        <c:auto val="1"/>
-        <c:lblAlgn val="ctr"/>
-        <c:lblOffset val="100"/>
-        <c:noMultiLvlLbl val="0"/>
-      </c:catAx>
-      <c:valAx>
-        <c:axId val="-2113994440"/>
-        <c:scaling/>
-        <c:delete val="0"/>
-        <c:axPos val="l"/>
-        <c:majorGridlines>
-          <c:spPr>
-            <a:ln w="9525">
-              <a:solidFill>
-                <a:srgbClr val="D1D1D1"/>
-              </a:solidFill>
-            </a:ln>
-          </c:spPr>
-        </c:majorGridlines>
-        <c:title>
-          <c:tx>
-            <c:rich>
-              <a:bodyPr/>
-              <a:lstStyle/>
-              <a:p>
-                <a:pPr>
-                  <a:defRPr sz="1100" b="0">
-                    <a:solidFill>
-                      <a:srgbClr val="000000"/>
-                    </a:solidFill>
-                    <a:latin typeface="Play"/>
-                    <a:ea typeface="Play"/>
-                    <a:cs typeface="Play"/>
-                  </a:defRPr>
-                </a:pPr>
-                <a:r>
-                  <a:t>мин</a:t>
-                </a:r>
-              </a:p>
-            </c:rich>
-          </c:tx>
-          <c:layout/>
-          <c:overlay val="0"/>
-        </c:title>
-        <c:majorTickMark val="out"/>
-        <c:minorTickMark val="none"/>
-        <c:tickLblPos val="nextTo"/>
-        <c:txPr>
-          <a:bodyPr/>
-          <a:lstStyle/>
-          <a:p>
-            <a:pPr>
-              <a:defRPr sz="1100" b="0">
-                <a:solidFill>
-                  <a:srgbClr val="000000"/>
-                </a:solidFill>
-                <a:latin typeface="Play"/>
-                <a:ea typeface="Play"/>
-                <a:cs typeface="Play"/>
-              </a:defRPr>
-            </a:pPr>
-          </a:p>
-        </c:txPr>
-        <c:crossAx val="-2068027336"/>
-        <c:crosses val="autoZero"/>
-      </c:valAx>
-    </c:plotArea>
-    <c:dispBlanksAs val="gap"/>
-  </c:chart>
-  <c:txPr>
-    <a:bodyPr/>
-    <a:lstStyle/>
-    <a:p>
-      <a:pPr>
-        <a:defRPr sz="1200" b="0">
-          <a:solidFill>
-            <a:srgbClr val="000000"/>
-          </a:solidFill>
-          <a:latin typeface="Play"/>
-          <a:ea typeface="Play"/>
-          <a:cs typeface="Play"/>
-        </a:defRPr>
-      </a:pPr>
-      <a:endParaRPr lang="en-US"/>
-    </a:p>
-  </c:txPr>
-  <c:externalData r:id="rId1">
-    <c:autoUpdate val="0"/>
-  </c:externalData>
-</c:chartSpace>
-</file>
-
 <file path=ppt/notesMasters/notesMaster1.xml><?xml version="1.0" encoding="utf-8"?>
 <p:notesMaster xmlns:a="http://schemas.openxmlformats.org/drawingml/2006/main" xmlns:r="http://schemas.openxmlformats.org/officeDocument/2006/relationships" xmlns:mc="http://schemas.openxmlformats.org/markup-compatibility/2006" xmlns:mv="urn:schemas-microsoft-com:mac:vml" xmlns:p="http://schemas.openxmlformats.org/presentationml/2006/main" xmlns:c="http://schemas.openxmlformats.org/drawingml/2006/chart" xmlns:dgm="http://schemas.openxmlformats.org/drawingml/2006/diagram" xmlns:o="urn:schemas-microsoft-com:office:office" xmlns:v="urn:schemas-microsoft-com:vml" xmlns:pvml="urn:schemas-microsoft-com:office:powerpoint" xmlns:com="http://schemas.openxmlformats.org/drawingml/2006/compatibility" xmlns:p14="http://schemas.microsoft.com/office/powerpoint/2010/main" xmlns:p15="http://schemas.microsoft.com/office/powerpoint/2012/main" xmlns:ahyp="http://schemas.microsoft.com/office/drawing/2018/hyperlinkcolor">
   <p:cSld>
@@ -5450,7 +5263,7 @@
         <p:spPr>
           <a:xfrm>
             <a:off x="2159000" y="1243485"/>
-            <a:ext cx="4542261" cy="1248791"/>
+            <a:ext cx="4542261" cy="949960"/>
           </a:xfrm>
           <a:prstGeom prst="roundRect">
             <a:avLst/>
@@ -5496,7 +5309,7 @@
         <p:spPr>
           <a:xfrm>
             <a:off x="2286000" y="1370485"/>
-            <a:ext cx="4288261" cy="1020191"/>
+            <a:ext cx="4288261" cy="721360"/>
           </a:xfrm>
           <a:prstGeom prst="rect">
             <a:avLst/>
@@ -5513,7 +5326,7 @@
               <a:spcAft>
                 <a:spcPts val="300"/>
               </a:spcAft>
-              <a:defRPr sz="2705">
+              <a:defRPr sz="1800">
                 <a:solidFill>
                   <a:srgbClr val="FFFFFF"/>
                 </a:solidFill>
@@ -5523,7 +5336,7 @@
               </a:defRPr>
             </a:pPr>
             <a:r>
-              <a:rPr sz="2705">
+              <a:rPr sz="1800">
                 <a:solidFill>
                   <a:srgbClr val="FFFFFF"/>
                 </a:solidFill>
@@ -5531,7 +5344,7 @@
                 <a:ea typeface="Play"/>
                 <a:cs typeface="Play"/>
               </a:rPr>
-              <a:t>Автоматическая вёрстка презентаций</a:t>
+              <a:t>Защита инициативы: сервис автоматической вёрстки презентаций</a:t>
             </a:r>
           </a:p>
         </p:txBody>
@@ -5556,14 +5369,14 @@
       <p:grpSpPr/>
       <p:sp>
         <p:nvSpPr>
-          <p:cNvPr id="532" name="Google Shape;532;p53"/>
+          <p:cNvPr id="662" name="Google Shape;662;p55"/>
           <p:cNvSpPr/>
           <p:nvPr/>
         </p:nvSpPr>
         <p:spPr>
           <a:xfrm>
-            <a:off x="303214" y="1022533"/>
-            <a:ext cx="8451939" cy="1433588"/>
+            <a:off x="8667705" y="4666977"/>
+            <a:ext cx="190499" cy="190475"/>
           </a:xfrm>
           <a:prstGeom prst="rect">
             <a:avLst/>
@@ -5597,14 +5410,14 @@
       </p:sp>
       <p:sp>
         <p:nvSpPr>
-          <p:cNvPr id="553" name="Google Shape;553;p53"/>
+          <p:cNvPr id="663" name="Google Shape;663;p55"/>
           <p:cNvSpPr/>
           <p:nvPr/>
         </p:nvSpPr>
         <p:spPr>
           <a:xfrm>
-            <a:off x="276488" y="2955549"/>
-            <a:ext cx="8451939" cy="1433588"/>
+            <a:off x="285748" y="286047"/>
+            <a:ext cx="8572456" cy="3938075"/>
           </a:xfrm>
           <a:prstGeom prst="rect">
             <a:avLst/>
@@ -5638,14 +5451,14 @@
       </p:sp>
       <p:sp>
         <p:nvSpPr>
-          <p:cNvPr id="554" name="Google Shape;554;p53"/>
+          <p:cNvPr id="664" name="Google Shape;664;p55"/>
           <p:cNvSpPr/>
           <p:nvPr/>
         </p:nvSpPr>
         <p:spPr>
           <a:xfrm>
-            <a:off x="303214" y="2797849"/>
-            <a:ext cx="8451939" cy="1433588"/>
+            <a:off x="285748" y="1209852"/>
+            <a:ext cx="8572456" cy="3014270"/>
           </a:xfrm>
           <a:prstGeom prst="rect">
             <a:avLst/>
@@ -5679,7 +5492,367 @@
       </p:sp>
       <p:sp>
         <p:nvSpPr>
-          <p:cNvPr id="555" name="title"/>
+          <p:cNvPr id="665" name="Google Shape;665;p55"/>
+          <p:cNvSpPr/>
+          <p:nvPr/>
+        </p:nvSpPr>
+        <p:spPr>
+          <a:xfrm>
+            <a:off x="285749" y="1209852"/>
+            <a:ext cx="2071677" cy="3014270"/>
+          </a:xfrm>
+          <a:prstGeom prst="roundRect">
+            <a:avLst>
+              <a:gd fmla="val 4634" name="adj"/>
+            </a:avLst>
+          </a:prstGeom>
+          <a:solidFill>
+            <a:schemeClr val="lt2"/>
+          </a:solidFill>
+          <a:ln>
+            <a:noFill/>
+          </a:ln>
+        </p:spPr>
+        <p:txBody>
+          <a:bodyPr anchorCtr="0" anchor="ctr" bIns="91425" lIns="91425" spcFirstLastPara="1" rIns="91425" wrap="square" tIns="91425">
+            <a:noAutofit/>
+          </a:bodyPr>
+          <a:lstStyle/>
+          <a:p>
+            <a:pPr indent="0" lvl="0" marL="0" rtl="0" algn="l">
+              <a:spcBef>
+                <a:spcPts val="0"/>
+              </a:spcBef>
+              <a:spcAft>
+                <a:spcPts val="0"/>
+              </a:spcAft>
+              <a:buNone/>
+            </a:pPr>
+            <a:r>
+              <a:t/>
+            </a:r>
+            <a:endParaRPr/>
+          </a:p>
+        </p:txBody>
+      </p:sp>
+      <p:sp>
+        <p:nvSpPr>
+          <p:cNvPr id="667" name="Google Shape;667;p55"/>
+          <p:cNvSpPr/>
+          <p:nvPr/>
+        </p:nvSpPr>
+        <p:spPr>
+          <a:xfrm>
+            <a:off x="438148" y="1362233"/>
+            <a:ext cx="76199" cy="76190"/>
+          </a:xfrm>
+          <a:prstGeom prst="roundRect">
+            <a:avLst>
+              <a:gd fmla="val 31500" name="adj"/>
+            </a:avLst>
+          </a:prstGeom>
+          <a:solidFill>
+            <a:srgbClr val="0077FF"/>
+          </a:solidFill>
+          <a:ln>
+            <a:noFill/>
+          </a:ln>
+        </p:spPr>
+        <p:txBody>
+          <a:bodyPr anchorCtr="0" anchor="ctr" bIns="91425" lIns="91425" spcFirstLastPara="1" rIns="91425" wrap="square" tIns="91425">
+            <a:noAutofit/>
+          </a:bodyPr>
+          <a:lstStyle/>
+          <a:p>
+            <a:pPr indent="0" lvl="0" marL="0" rtl="0" algn="l">
+              <a:spcBef>
+                <a:spcPts val="0"/>
+              </a:spcBef>
+              <a:spcAft>
+                <a:spcPts val="0"/>
+              </a:spcAft>
+              <a:buNone/>
+            </a:pPr>
+            <a:r>
+              <a:t/>
+            </a:r>
+            <a:endParaRPr/>
+          </a:p>
+        </p:txBody>
+      </p:sp>
+      <p:sp>
+        <p:nvSpPr>
+          <p:cNvPr id="670" name="Google Shape;670;p55"/>
+          <p:cNvSpPr/>
+          <p:nvPr/>
+        </p:nvSpPr>
+        <p:spPr>
+          <a:xfrm>
+            <a:off x="2452675" y="1209852"/>
+            <a:ext cx="2071677" cy="3014270"/>
+          </a:xfrm>
+          <a:prstGeom prst="roundRect">
+            <a:avLst>
+              <a:gd fmla="val 4634" name="adj"/>
+            </a:avLst>
+          </a:prstGeom>
+          <a:solidFill>
+            <a:schemeClr val="lt2"/>
+          </a:solidFill>
+          <a:ln>
+            <a:noFill/>
+          </a:ln>
+        </p:spPr>
+        <p:txBody>
+          <a:bodyPr anchorCtr="0" anchor="ctr" bIns="91425" lIns="91425" spcFirstLastPara="1" rIns="91425" wrap="square" tIns="91425">
+            <a:noAutofit/>
+          </a:bodyPr>
+          <a:lstStyle/>
+          <a:p>
+            <a:pPr indent="0" lvl="0" marL="0" rtl="0" algn="l">
+              <a:spcBef>
+                <a:spcPts val="0"/>
+              </a:spcBef>
+              <a:spcAft>
+                <a:spcPts val="0"/>
+              </a:spcAft>
+              <a:buNone/>
+            </a:pPr>
+            <a:r>
+              <a:t/>
+            </a:r>
+            <a:endParaRPr/>
+          </a:p>
+        </p:txBody>
+      </p:sp>
+      <p:sp>
+        <p:nvSpPr>
+          <p:cNvPr id="672" name="Google Shape;672;p55"/>
+          <p:cNvSpPr/>
+          <p:nvPr/>
+        </p:nvSpPr>
+        <p:spPr>
+          <a:xfrm>
+            <a:off x="2605074" y="1362233"/>
+            <a:ext cx="76199" cy="76190"/>
+          </a:xfrm>
+          <a:prstGeom prst="roundRect">
+            <a:avLst>
+              <a:gd fmla="val 31500" name="adj"/>
+            </a:avLst>
+          </a:prstGeom>
+          <a:solidFill>
+            <a:srgbClr val="0077FF"/>
+          </a:solidFill>
+          <a:ln>
+            <a:noFill/>
+          </a:ln>
+        </p:spPr>
+        <p:txBody>
+          <a:bodyPr anchorCtr="0" anchor="ctr" bIns="91425" lIns="91425" spcFirstLastPara="1" rIns="91425" wrap="square" tIns="91425">
+            <a:noAutofit/>
+          </a:bodyPr>
+          <a:lstStyle/>
+          <a:p>
+            <a:pPr indent="0" lvl="0" marL="0" rtl="0" algn="l">
+              <a:spcBef>
+                <a:spcPts val="0"/>
+              </a:spcBef>
+              <a:spcAft>
+                <a:spcPts val="0"/>
+              </a:spcAft>
+              <a:buNone/>
+            </a:pPr>
+            <a:r>
+              <a:t/>
+            </a:r>
+            <a:endParaRPr/>
+          </a:p>
+        </p:txBody>
+      </p:sp>
+      <p:sp>
+        <p:nvSpPr>
+          <p:cNvPr id="675" name="Google Shape;675;p55"/>
+          <p:cNvSpPr/>
+          <p:nvPr/>
+        </p:nvSpPr>
+        <p:spPr>
+          <a:xfrm>
+            <a:off x="4619601" y="1209852"/>
+            <a:ext cx="2071677" cy="3014270"/>
+          </a:xfrm>
+          <a:prstGeom prst="roundRect">
+            <a:avLst>
+              <a:gd fmla="val 4634" name="adj"/>
+            </a:avLst>
+          </a:prstGeom>
+          <a:solidFill>
+            <a:schemeClr val="lt2"/>
+          </a:solidFill>
+          <a:ln>
+            <a:noFill/>
+          </a:ln>
+        </p:spPr>
+        <p:txBody>
+          <a:bodyPr anchorCtr="0" anchor="ctr" bIns="91425" lIns="91425" spcFirstLastPara="1" rIns="91425" wrap="square" tIns="91425">
+            <a:noAutofit/>
+          </a:bodyPr>
+          <a:lstStyle/>
+          <a:p>
+            <a:pPr indent="0" lvl="0" marL="0" rtl="0" algn="l">
+              <a:spcBef>
+                <a:spcPts val="0"/>
+              </a:spcBef>
+              <a:spcAft>
+                <a:spcPts val="0"/>
+              </a:spcAft>
+              <a:buNone/>
+            </a:pPr>
+            <a:r>
+              <a:t/>
+            </a:r>
+            <a:endParaRPr/>
+          </a:p>
+        </p:txBody>
+      </p:sp>
+      <p:sp>
+        <p:nvSpPr>
+          <p:cNvPr id="677" name="Google Shape;677;p55"/>
+          <p:cNvSpPr/>
+          <p:nvPr/>
+        </p:nvSpPr>
+        <p:spPr>
+          <a:xfrm>
+            <a:off x="4772001" y="1362233"/>
+            <a:ext cx="76199" cy="76190"/>
+          </a:xfrm>
+          <a:prstGeom prst="roundRect">
+            <a:avLst>
+              <a:gd fmla="val 31500" name="adj"/>
+            </a:avLst>
+          </a:prstGeom>
+          <a:solidFill>
+            <a:srgbClr val="0077FF"/>
+          </a:solidFill>
+          <a:ln>
+            <a:noFill/>
+          </a:ln>
+        </p:spPr>
+        <p:txBody>
+          <a:bodyPr anchorCtr="0" anchor="ctr" bIns="91425" lIns="91425" spcFirstLastPara="1" rIns="91425" wrap="square" tIns="91425">
+            <a:noAutofit/>
+          </a:bodyPr>
+          <a:lstStyle/>
+          <a:p>
+            <a:pPr indent="0" lvl="0" marL="0" rtl="0" algn="l">
+              <a:spcBef>
+                <a:spcPts val="0"/>
+              </a:spcBef>
+              <a:spcAft>
+                <a:spcPts val="0"/>
+              </a:spcAft>
+              <a:buNone/>
+            </a:pPr>
+            <a:r>
+              <a:t/>
+            </a:r>
+            <a:endParaRPr/>
+          </a:p>
+        </p:txBody>
+      </p:sp>
+      <p:sp>
+        <p:nvSpPr>
+          <p:cNvPr id="680" name="Google Shape;680;p55"/>
+          <p:cNvSpPr/>
+          <p:nvPr/>
+        </p:nvSpPr>
+        <p:spPr>
+          <a:xfrm>
+            <a:off x="6786527" y="1209852"/>
+            <a:ext cx="2071677" cy="3014270"/>
+          </a:xfrm>
+          <a:prstGeom prst="roundRect">
+            <a:avLst>
+              <a:gd fmla="val 4634" name="adj"/>
+            </a:avLst>
+          </a:prstGeom>
+          <a:solidFill>
+            <a:schemeClr val="lt2"/>
+          </a:solidFill>
+          <a:ln>
+            <a:noFill/>
+          </a:ln>
+        </p:spPr>
+        <p:txBody>
+          <a:bodyPr anchorCtr="0" anchor="ctr" bIns="91425" lIns="91425" spcFirstLastPara="1" rIns="91425" wrap="square" tIns="91425">
+            <a:noAutofit/>
+          </a:bodyPr>
+          <a:lstStyle/>
+          <a:p>
+            <a:pPr indent="0" lvl="0" marL="0" rtl="0" algn="l">
+              <a:spcBef>
+                <a:spcPts val="0"/>
+              </a:spcBef>
+              <a:spcAft>
+                <a:spcPts val="0"/>
+              </a:spcAft>
+              <a:buNone/>
+            </a:pPr>
+            <a:r>
+              <a:t/>
+            </a:r>
+            <a:endParaRPr/>
+          </a:p>
+        </p:txBody>
+      </p:sp>
+      <p:sp>
+        <p:nvSpPr>
+          <p:cNvPr id="682" name="Google Shape;682;p55"/>
+          <p:cNvSpPr/>
+          <p:nvPr/>
+        </p:nvSpPr>
+        <p:spPr>
+          <a:xfrm>
+            <a:off x="6938927" y="1362233"/>
+            <a:ext cx="76199" cy="76190"/>
+          </a:xfrm>
+          <a:prstGeom prst="roundRect">
+            <a:avLst>
+              <a:gd fmla="val 31500" name="adj"/>
+            </a:avLst>
+          </a:prstGeom>
+          <a:solidFill>
+            <a:srgbClr val="0077FF"/>
+          </a:solidFill>
+          <a:ln>
+            <a:noFill/>
+          </a:ln>
+        </p:spPr>
+        <p:txBody>
+          <a:bodyPr anchorCtr="0" anchor="ctr" bIns="91425" lIns="91425" spcFirstLastPara="1" rIns="91425" wrap="square" tIns="91425">
+            <a:noAutofit/>
+          </a:bodyPr>
+          <a:lstStyle/>
+          <a:p>
+            <a:pPr indent="0" lvl="0" marL="0" rtl="0" algn="l">
+              <a:spcBef>
+                <a:spcPts val="0"/>
+              </a:spcBef>
+              <a:spcAft>
+                <a:spcPts val="0"/>
+              </a:spcAft>
+              <a:buNone/>
+            </a:pPr>
+            <a:r>
+              <a:t/>
+            </a:r>
+            <a:endParaRPr/>
+          </a:p>
+        </p:txBody>
+      </p:sp>
+      <p:sp>
+        <p:nvSpPr>
+          <p:cNvPr id="683" name="title"/>
           <p:cNvSpPr txBox="1"/>
           <p:nvPr/>
         </p:nvSpPr>
@@ -5703,7 +5876,7 @@
               <a:spcAft>
                 <a:spcPts val="300"/>
               </a:spcAft>
-              <a:defRPr sz="2400">
+              <a:defRPr sz="2705">
                 <a:solidFill>
                   <a:srgbClr val="000000"/>
                 </a:solidFill>
@@ -5713,7 +5886,7 @@
               </a:defRPr>
             </a:pPr>
             <a:r>
-              <a:rPr sz="2400">
+              <a:rPr sz="2705">
                 <a:solidFill>
                   <a:srgbClr val="000000"/>
                 </a:solidFill>
@@ -5726,34 +5899,16 @@
           </a:p>
         </p:txBody>
       </p:sp>
-      <p:graphicFrame>
-        <p:nvGraphicFramePr>
-          <p:cNvPr id="556" name="Chart 555"/>
-          <p:cNvGraphicFramePr>
-            <a:graphicFrameLocks noGrp="1"/>
-          </p:cNvGraphicFramePr>
-          <p:nvPr/>
-        </p:nvGraphicFramePr>
-        <p:xfrm>
-          <a:off x="274320" y="1414513"/>
-          <a:ext cx="8344814" cy="1582531"/>
-        </p:xfrm>
-        <a:graphic>
-          <a:graphicData uri="http://schemas.openxmlformats.org/drawingml/2006/chart">
-            <c:chart xmlns:c="http://schemas.openxmlformats.org/drawingml/2006/chart" r:id="rId2"/>
-          </a:graphicData>
-        </a:graphic>
-      </p:graphicFrame>
-      <p:sp>
-        <p:nvSpPr>
-          <p:cNvPr id="557" name="body"/>
+      <p:sp>
+        <p:nvSpPr>
+          <p:cNvPr id="684" name="lead"/>
           <p:cNvSpPr txBox="1"/>
           <p:nvPr/>
         </p:nvSpPr>
         <p:spPr>
           <a:xfrm>
-            <a:off x="274320" y="3125632"/>
-            <a:ext cx="8344814" cy="1140746"/>
+            <a:off x="274320" y="1438431"/>
+            <a:ext cx="6792986" cy="1001011"/>
           </a:xfrm>
           <a:prstGeom prst="rect">
             <a:avLst/>
@@ -5770,7 +5925,7 @@
               <a:spcAft>
                 <a:spcPts val="300"/>
               </a:spcAft>
-              <a:defRPr sz="1225">
+              <a:defRPr sz="2705">
                 <a:solidFill>
                   <a:srgbClr val="000000"/>
                 </a:solidFill>
@@ -5780,7 +5935,7 @@
               </a:defRPr>
             </a:pPr>
             <a:r>
-              <a:rPr sz="1225">
+              <a:rPr sz="2705">
                 <a:solidFill>
                   <a:srgbClr val="000000"/>
                 </a:solidFill>
@@ -5788,15 +5943,38 @@
                 <a:ea typeface="Play"/>
                 <a:cs typeface="Play"/>
               </a:rPr>
-              <a:t>• 186 минут на сборку одной презентации</a:t>
+              <a:t>Сборка одной презентации 12 слайдов занимает 186 минут</a:t>
             </a:r>
           </a:p>
+        </p:txBody>
+      </p:sp>
+      <p:sp>
+        <p:nvSpPr>
+          <p:cNvPr id="685" name="body"/>
+          <p:cNvSpPr txBox="1"/>
+          <p:nvPr/>
+        </p:nvSpPr>
+        <p:spPr>
+          <a:xfrm>
+            <a:off x="274320" y="2599725"/>
+            <a:ext cx="6792986" cy="1510085"/>
+          </a:xfrm>
+          <a:prstGeom prst="rect">
+            <a:avLst/>
+          </a:prstGeom>
+          <a:noFill/>
+        </p:spPr>
+        <p:txBody>
+          <a:bodyPr wrap="square" lIns="76200" rIns="76200" tIns="50800" bIns="50800">
+            <a:spAutoFit/>
+          </a:bodyPr>
+          <a:lstStyle/>
           <a:p>
             <a:pPr algn="l">
               <a:spcAft>
                 <a:spcPts val="300"/>
               </a:spcAft>
-              <a:defRPr sz="1225">
+              <a:defRPr sz="1600">
                 <a:solidFill>
                   <a:srgbClr val="000000"/>
                 </a:solidFill>
@@ -5806,7 +5984,7 @@
               </a:defRPr>
             </a:pPr>
             <a:r>
-              <a:rPr sz="1225">
+              <a:rPr sz="1600">
                 <a:solidFill>
                   <a:srgbClr val="000000"/>
                 </a:solidFill>
@@ -5814,7 +5992,7 @@
                 <a:ea typeface="Play"/>
                 <a:cs typeface="Play"/>
               </a:rPr>
-              <a:t>• 74 минуты на правки после ревью</a:t>
+              <a:t>• Дополнительно 74 минуты на правки после ревью дизайнера</a:t>
             </a:r>
           </a:p>
           <a:p>
@@ -5822,7 +6000,7 @@
               <a:spcAft>
                 <a:spcPts val="300"/>
               </a:spcAft>
-              <a:defRPr sz="1225">
+              <a:defRPr sz="1600">
                 <a:solidFill>
                   <a:srgbClr val="000000"/>
                 </a:solidFill>
@@ -5832,7 +6010,7 @@
               </a:defRPr>
             </a:pPr>
             <a:r>
-              <a:rPr sz="1225">
+              <a:rPr sz="1600">
                 <a:solidFill>
                   <a:srgbClr val="000000"/>
                 </a:solidFill>
@@ -5840,7 +6018,7 @@
                 <a:ea typeface="Play"/>
                 <a:cs typeface="Play"/>
               </a:rPr>
-              <a:t>• 19 из 42 колод нарушили фирменный стиль</a:t>
+              <a:t>• 19 из 42 колод нарушают фирменный стиль</a:t>
             </a:r>
           </a:p>
           <a:p>
@@ -5848,7 +6026,7 @@
               <a:spcAft>
                 <a:spcPts val="300"/>
               </a:spcAft>
-              <a:defRPr sz="1225">
+              <a:defRPr sz="1600">
                 <a:solidFill>
                   <a:srgbClr val="000000"/>
                 </a:solidFill>
@@ -5858,7 +6036,7 @@
               </a:defRPr>
             </a:pPr>
             <a:r>
-              <a:rPr sz="1225">
+              <a:rPr sz="1600">
                 <a:solidFill>
                   <a:srgbClr val="000000"/>
                 </a:solidFill>
@@ -5866,33 +6044,7 @@
                 <a:ea typeface="Play"/>
                 <a:cs typeface="Play"/>
               </a:rPr>
-              <a:t>• 4 дизайнера закрывают 11 запросов в неделю</a:t>
-            </a:r>
-          </a:p>
-          <a:p>
-            <a:pPr algn="l">
-              <a:spcAft>
-                <a:spcPts val="300"/>
-              </a:spcAft>
-              <a:defRPr sz="1225">
-                <a:solidFill>
-                  <a:srgbClr val="000000"/>
-                </a:solidFill>
-                <a:latin typeface="Play"/>
-                <a:ea typeface="Play"/>
-                <a:cs typeface="Play"/>
-              </a:defRPr>
-            </a:pPr>
-            <a:r>
-              <a:rPr sz="1225">
-                <a:solidFill>
-                  <a:srgbClr val="000000"/>
-                </a:solidFill>
-                <a:latin typeface="Play"/>
-                <a:ea typeface="Play"/>
-                <a:cs typeface="Play"/>
-              </a:rPr>
-              <a:t>• Средний срок ожидания 6 рабочих дней</a:t>
+              <a:t>• Дизайн‑отдел из 4 человек закрывает 11 запросов, ожидание 6 дней</a:t>
             </a:r>
           </a:p>
         </p:txBody>
@@ -5906,6 +6058,1128 @@
 </file>
 
 <file path=ppt/slides/slide57.xml><?xml version="1.0" encoding="utf-8"?>
+<p:sld xmlns:a="http://schemas.openxmlformats.org/drawingml/2006/main" xmlns:p="http://schemas.openxmlformats.org/presentationml/2006/main" xmlns:r="http://schemas.openxmlformats.org/officeDocument/2006/relationships">
+  <p:cSld>
+    <p:spTree>
+      <p:nvGrpSpPr>
+        <p:cNvPr id="1" name=""/>
+        <p:cNvGrpSpPr/>
+        <p:nvPr/>
+      </p:nvGrpSpPr>
+      <p:grpSpPr/>
+      <p:sp>
+        <p:nvSpPr>
+          <p:cNvPr id="532" name="Google Shape;532;p53"/>
+          <p:cNvSpPr/>
+          <p:nvPr/>
+        </p:nvSpPr>
+        <p:spPr>
+          <a:xfrm>
+            <a:off x="303214" y="1022533"/>
+            <a:ext cx="8451939" cy="1433588"/>
+          </a:xfrm>
+          <a:prstGeom prst="rect">
+            <a:avLst/>
+          </a:prstGeom>
+          <a:noFill/>
+          <a:ln>
+            <a:noFill/>
+          </a:ln>
+        </p:spPr>
+        <p:txBody>
+          <a:bodyPr anchorCtr="0" anchor="ctr" bIns="91425" lIns="91425" spcFirstLastPara="1" rIns="91425" wrap="square" tIns="91425">
+            <a:noAutofit/>
+          </a:bodyPr>
+          <a:lstStyle/>
+          <a:p>
+            <a:pPr indent="0" lvl="0" marL="0" rtl="0" algn="l">
+              <a:spcBef>
+                <a:spcPts val="0"/>
+              </a:spcBef>
+              <a:spcAft>
+                <a:spcPts val="0"/>
+              </a:spcAft>
+              <a:buNone/>
+            </a:pPr>
+            <a:r>
+              <a:t/>
+            </a:r>
+            <a:endParaRPr/>
+          </a:p>
+        </p:txBody>
+      </p:sp>
+      <p:sp>
+        <p:nvSpPr>
+          <p:cNvPr id="549" name="Google Shape;549;p53"/>
+          <p:cNvSpPr/>
+          <p:nvPr/>
+        </p:nvSpPr>
+        <p:spPr>
+          <a:xfrm>
+            <a:off x="7359897" y="1022533"/>
+            <a:ext cx="1395256" cy="1433588"/>
+          </a:xfrm>
+          <a:prstGeom prst="rect">
+            <a:avLst/>
+          </a:prstGeom>
+          <a:noFill/>
+          <a:ln>
+            <a:noFill/>
+          </a:ln>
+        </p:spPr>
+        <p:txBody>
+          <a:bodyPr anchorCtr="0" anchor="ctr" bIns="91425" lIns="91425" spcFirstLastPara="1" rIns="91425" wrap="square" tIns="91425">
+            <a:noAutofit/>
+          </a:bodyPr>
+          <a:lstStyle/>
+          <a:p>
+            <a:pPr indent="0" lvl="0" marL="0" rtl="0" algn="l">
+              <a:spcBef>
+                <a:spcPts val="0"/>
+              </a:spcBef>
+              <a:spcAft>
+                <a:spcPts val="0"/>
+              </a:spcAft>
+              <a:buNone/>
+            </a:pPr>
+            <a:r>
+              <a:t/>
+            </a:r>
+            <a:endParaRPr/>
+          </a:p>
+        </p:txBody>
+      </p:sp>
+      <p:sp>
+        <p:nvSpPr>
+          <p:cNvPr id="553" name="Google Shape;553;p53"/>
+          <p:cNvSpPr/>
+          <p:nvPr/>
+        </p:nvSpPr>
+        <p:spPr>
+          <a:xfrm>
+            <a:off x="276488" y="2955549"/>
+            <a:ext cx="8451939" cy="1433588"/>
+          </a:xfrm>
+          <a:prstGeom prst="rect">
+            <a:avLst/>
+          </a:prstGeom>
+          <a:noFill/>
+          <a:ln>
+            <a:noFill/>
+          </a:ln>
+        </p:spPr>
+        <p:txBody>
+          <a:bodyPr anchorCtr="0" anchor="ctr" bIns="91425" lIns="91425" spcFirstLastPara="1" rIns="91425" wrap="square" tIns="91425">
+            <a:noAutofit/>
+          </a:bodyPr>
+          <a:lstStyle/>
+          <a:p>
+            <a:pPr indent="0" lvl="0" marL="0" rtl="0" algn="l">
+              <a:spcBef>
+                <a:spcPts val="0"/>
+              </a:spcBef>
+              <a:spcAft>
+                <a:spcPts val="0"/>
+              </a:spcAft>
+              <a:buNone/>
+            </a:pPr>
+            <a:r>
+              <a:t/>
+            </a:r>
+            <a:endParaRPr/>
+          </a:p>
+        </p:txBody>
+      </p:sp>
+      <p:sp>
+        <p:nvSpPr>
+          <p:cNvPr id="554" name="Google Shape;554;p53"/>
+          <p:cNvSpPr/>
+          <p:nvPr/>
+        </p:nvSpPr>
+        <p:spPr>
+          <a:xfrm>
+            <a:off x="303214" y="2797849"/>
+            <a:ext cx="8451939" cy="1433588"/>
+          </a:xfrm>
+          <a:prstGeom prst="rect">
+            <a:avLst/>
+          </a:prstGeom>
+          <a:noFill/>
+          <a:ln>
+            <a:noFill/>
+          </a:ln>
+        </p:spPr>
+        <p:txBody>
+          <a:bodyPr anchorCtr="0" anchor="ctr" bIns="91425" lIns="91425" spcFirstLastPara="1" rIns="91425" wrap="square" tIns="91425">
+            <a:noAutofit/>
+          </a:bodyPr>
+          <a:lstStyle/>
+          <a:p>
+            <a:pPr indent="0" lvl="0" marL="0" rtl="0" algn="l">
+              <a:spcBef>
+                <a:spcPts val="0"/>
+              </a:spcBef>
+              <a:spcAft>
+                <a:spcPts val="0"/>
+              </a:spcAft>
+              <a:buNone/>
+            </a:pPr>
+            <a:r>
+              <a:t/>
+            </a:r>
+            <a:endParaRPr/>
+          </a:p>
+        </p:txBody>
+      </p:sp>
+      <p:sp>
+        <p:nvSpPr>
+          <p:cNvPr id="571" name="Google Shape;571;p53"/>
+          <p:cNvSpPr/>
+          <p:nvPr/>
+        </p:nvSpPr>
+        <p:spPr>
+          <a:xfrm>
+            <a:off x="7359897" y="2797849"/>
+            <a:ext cx="1395256" cy="1433588"/>
+          </a:xfrm>
+          <a:prstGeom prst="rect">
+            <a:avLst/>
+          </a:prstGeom>
+          <a:noFill/>
+          <a:ln>
+            <a:noFill/>
+          </a:ln>
+        </p:spPr>
+        <p:txBody>
+          <a:bodyPr anchorCtr="0" anchor="ctr" bIns="91425" lIns="91425" spcFirstLastPara="1" rIns="91425" wrap="square" tIns="91425">
+            <a:noAutofit/>
+          </a:bodyPr>
+          <a:lstStyle/>
+          <a:p>
+            <a:pPr indent="0" lvl="0" marL="0" rtl="0" algn="l">
+              <a:spcBef>
+                <a:spcPts val="0"/>
+              </a:spcBef>
+              <a:spcAft>
+                <a:spcPts val="0"/>
+              </a:spcAft>
+              <a:buNone/>
+            </a:pPr>
+            <a:r>
+              <a:t/>
+            </a:r>
+            <a:endParaRPr/>
+          </a:p>
+        </p:txBody>
+      </p:sp>
+      <p:sp>
+        <p:nvSpPr>
+          <p:cNvPr id="572" name="title"/>
+          <p:cNvSpPr txBox="1"/>
+          <p:nvPr/>
+        </p:nvSpPr>
+        <p:spPr>
+          <a:xfrm>
+            <a:off x="274320" y="282943"/>
+            <a:ext cx="6792986" cy="617220"/>
+          </a:xfrm>
+          <a:prstGeom prst="rect">
+            <a:avLst/>
+          </a:prstGeom>
+          <a:noFill/>
+        </p:spPr>
+        <p:txBody>
+          <a:bodyPr wrap="square" lIns="76200" rIns="76200" tIns="50800" bIns="50800">
+            <a:spAutoFit/>
+          </a:bodyPr>
+          <a:lstStyle/>
+          <a:p>
+            <a:pPr algn="l">
+              <a:spcAft>
+                <a:spcPts val="300"/>
+              </a:spcAft>
+              <a:defRPr sz="2705">
+                <a:solidFill>
+                  <a:srgbClr val="000000"/>
+                </a:solidFill>
+                <a:latin typeface="Play"/>
+                <a:ea typeface="Play"/>
+                <a:cs typeface="Play"/>
+              </a:defRPr>
+            </a:pPr>
+            <a:r>
+              <a:rPr sz="2705">
+                <a:solidFill>
+                  <a:srgbClr val="000000"/>
+                </a:solidFill>
+                <a:latin typeface="Play"/>
+                <a:ea typeface="Play"/>
+                <a:cs typeface="Play"/>
+              </a:rPr>
+              <a:t>Предложение</a:t>
+            </a:r>
+          </a:p>
+        </p:txBody>
+      </p:sp>
+      <p:sp>
+        <p:nvSpPr>
+          <p:cNvPr id="573" name="lead"/>
+          <p:cNvSpPr txBox="1"/>
+          <p:nvPr/>
+        </p:nvSpPr>
+        <p:spPr>
+          <a:xfrm>
+            <a:off x="274320" y="1414513"/>
+            <a:ext cx="6792986" cy="1292845"/>
+          </a:xfrm>
+          <a:prstGeom prst="rect">
+            <a:avLst/>
+          </a:prstGeom>
+          <a:noFill/>
+        </p:spPr>
+        <p:txBody>
+          <a:bodyPr wrap="square" lIns="76200" rIns="76200" tIns="50800" bIns="50800">
+            <a:spAutoFit/>
+          </a:bodyPr>
+          <a:lstStyle/>
+          <a:p>
+            <a:pPr algn="ctr">
+              <a:spcAft>
+                <a:spcPts val="300"/>
+              </a:spcAft>
+              <a:defRPr sz="2438">
+                <a:solidFill>
+                  <a:srgbClr val="000000"/>
+                </a:solidFill>
+                <a:latin typeface="Play"/>
+                <a:ea typeface="Play"/>
+                <a:cs typeface="Play"/>
+              </a:defRPr>
+            </a:pPr>
+            <a:r>
+              <a:rPr sz="2438">
+                <a:solidFill>
+                  <a:srgbClr val="000000"/>
+                </a:solidFill>
+                <a:latin typeface="Play"/>
+                <a:ea typeface="Play"/>
+                <a:cs typeface="Play"/>
+              </a:rPr>
+              <a:t>Сервис принимает шаблон pptx и материалы, генерирует колоду по дизайн‑системе</a:t>
+            </a:r>
+          </a:p>
+        </p:txBody>
+      </p:sp>
+      <p:sp>
+        <p:nvSpPr>
+          <p:cNvPr id="574" name="body"/>
+          <p:cNvSpPr txBox="1"/>
+          <p:nvPr/>
+        </p:nvSpPr>
+        <p:spPr>
+          <a:xfrm>
+            <a:off x="274320" y="2878471"/>
+            <a:ext cx="6792986" cy="1387907"/>
+          </a:xfrm>
+          <a:prstGeom prst="rect">
+            <a:avLst/>
+          </a:prstGeom>
+          <a:noFill/>
+        </p:spPr>
+        <p:txBody>
+          <a:bodyPr wrap="square" lIns="76200" rIns="76200" tIns="50800" bIns="50800">
+            <a:spAutoFit/>
+          </a:bodyPr>
+          <a:lstStyle/>
+          <a:p>
+            <a:pPr algn="l">
+              <a:spcAft>
+                <a:spcPts val="300"/>
+              </a:spcAft>
+              <a:defRPr sz="1600">
+                <a:solidFill>
+                  <a:srgbClr val="000000"/>
+                </a:solidFill>
+                <a:latin typeface="Play"/>
+                <a:ea typeface="Play"/>
+                <a:cs typeface="Play"/>
+              </a:defRPr>
+            </a:pPr>
+            <a:r>
+              <a:rPr sz="1600">
+                <a:solidFill>
+                  <a:srgbClr val="000000"/>
+                </a:solidFill>
+                <a:latin typeface="Play"/>
+                <a:ea typeface="Play"/>
+                <a:cs typeface="Play"/>
+              </a:rPr>
+              <a:t>• Экспорт в pptx, pdf, html с редактируемыми слайдами</a:t>
+            </a:r>
+          </a:p>
+          <a:p>
+            <a:pPr algn="l">
+              <a:spcAft>
+                <a:spcPts val="300"/>
+              </a:spcAft>
+              <a:defRPr sz="1600">
+                <a:solidFill>
+                  <a:srgbClr val="000000"/>
+                </a:solidFill>
+                <a:latin typeface="Play"/>
+                <a:ea typeface="Play"/>
+                <a:cs typeface="Play"/>
+              </a:defRPr>
+            </a:pPr>
+            <a:r>
+              <a:rPr sz="1600">
+                <a:solidFill>
+                  <a:srgbClr val="000000"/>
+                </a:solidFill>
+                <a:latin typeface="Play"/>
+                <a:ea typeface="Play"/>
+                <a:cs typeface="Play"/>
+              </a:rPr>
+              <a:t>• Аудит качества проверяет стиль и корректирует автоматически</a:t>
+            </a:r>
+          </a:p>
+          <a:p>
+            <a:pPr algn="l">
+              <a:spcAft>
+                <a:spcPts val="300"/>
+              </a:spcAft>
+              <a:defRPr sz="1600">
+                <a:solidFill>
+                  <a:srgbClr val="000000"/>
+                </a:solidFill>
+                <a:latin typeface="Play"/>
+                <a:ea typeface="Play"/>
+                <a:cs typeface="Play"/>
+              </a:defRPr>
+            </a:pPr>
+            <a:r>
+              <a:rPr sz="1600">
+                <a:solidFill>
+                  <a:srgbClr val="000000"/>
+                </a:solidFill>
+                <a:latin typeface="Play"/>
+                <a:ea typeface="Play"/>
+                <a:cs typeface="Play"/>
+              </a:rPr>
+              <a:t>• Слайды остаются редактируемыми, без картинок</a:t>
+            </a:r>
+          </a:p>
+        </p:txBody>
+      </p:sp>
+    </p:spTree>
+  </p:cSld>
+  <p:clrMapOvr>
+    <a:masterClrMapping/>
+  </p:clrMapOvr>
+</p:sld>
+</file>
+
+<file path=ppt/slides/slide58.xml><?xml version="1.0" encoding="utf-8"?>
+<p:sld xmlns:a="http://schemas.openxmlformats.org/drawingml/2006/main" xmlns:p="http://schemas.openxmlformats.org/presentationml/2006/main" xmlns:r="http://schemas.openxmlformats.org/officeDocument/2006/relationships">
+  <p:cSld>
+    <p:spTree>
+      <p:nvGrpSpPr>
+        <p:cNvPr id="1" name=""/>
+        <p:cNvGrpSpPr/>
+        <p:nvPr/>
+      </p:nvGrpSpPr>
+      <p:grpSpPr/>
+      <p:sp>
+        <p:nvSpPr>
+          <p:cNvPr id="662" name="Google Shape;662;p55"/>
+          <p:cNvSpPr/>
+          <p:nvPr/>
+        </p:nvSpPr>
+        <p:spPr>
+          <a:xfrm>
+            <a:off x="8667705" y="4666977"/>
+            <a:ext cx="190499" cy="190475"/>
+          </a:xfrm>
+          <a:prstGeom prst="rect">
+            <a:avLst/>
+          </a:prstGeom>
+          <a:noFill/>
+          <a:ln>
+            <a:noFill/>
+          </a:ln>
+        </p:spPr>
+        <p:txBody>
+          <a:bodyPr anchorCtr="0" anchor="ctr" bIns="91425" lIns="91425" spcFirstLastPara="1" rIns="91425" wrap="square" tIns="91425">
+            <a:noAutofit/>
+          </a:bodyPr>
+          <a:lstStyle/>
+          <a:p>
+            <a:pPr indent="0" lvl="0" marL="0" rtl="0" algn="l">
+              <a:spcBef>
+                <a:spcPts val="0"/>
+              </a:spcBef>
+              <a:spcAft>
+                <a:spcPts val="0"/>
+              </a:spcAft>
+              <a:buNone/>
+            </a:pPr>
+            <a:r>
+              <a:t/>
+            </a:r>
+            <a:endParaRPr/>
+          </a:p>
+        </p:txBody>
+      </p:sp>
+      <p:sp>
+        <p:nvSpPr>
+          <p:cNvPr id="663" name="Google Shape;663;p55"/>
+          <p:cNvSpPr/>
+          <p:nvPr/>
+        </p:nvSpPr>
+        <p:spPr>
+          <a:xfrm>
+            <a:off x="285748" y="286047"/>
+            <a:ext cx="8572456" cy="3938075"/>
+          </a:xfrm>
+          <a:prstGeom prst="rect">
+            <a:avLst/>
+          </a:prstGeom>
+          <a:noFill/>
+          <a:ln>
+            <a:noFill/>
+          </a:ln>
+        </p:spPr>
+        <p:txBody>
+          <a:bodyPr anchorCtr="0" anchor="ctr" bIns="91425" lIns="91425" spcFirstLastPara="1" rIns="91425" wrap="square" tIns="91425">
+            <a:noAutofit/>
+          </a:bodyPr>
+          <a:lstStyle/>
+          <a:p>
+            <a:pPr indent="0" lvl="0" marL="0" rtl="0" algn="l">
+              <a:spcBef>
+                <a:spcPts val="0"/>
+              </a:spcBef>
+              <a:spcAft>
+                <a:spcPts val="0"/>
+              </a:spcAft>
+              <a:buNone/>
+            </a:pPr>
+            <a:r>
+              <a:t/>
+            </a:r>
+            <a:endParaRPr/>
+          </a:p>
+        </p:txBody>
+      </p:sp>
+      <p:sp>
+        <p:nvSpPr>
+          <p:cNvPr id="664" name="Google Shape;664;p55"/>
+          <p:cNvSpPr/>
+          <p:nvPr/>
+        </p:nvSpPr>
+        <p:spPr>
+          <a:xfrm>
+            <a:off x="285748" y="1209852"/>
+            <a:ext cx="8572456" cy="3014270"/>
+          </a:xfrm>
+          <a:prstGeom prst="rect">
+            <a:avLst/>
+          </a:prstGeom>
+          <a:noFill/>
+          <a:ln>
+            <a:noFill/>
+          </a:ln>
+        </p:spPr>
+        <p:txBody>
+          <a:bodyPr anchorCtr="0" anchor="ctr" bIns="91425" lIns="91425" spcFirstLastPara="1" rIns="91425" wrap="square" tIns="91425">
+            <a:noAutofit/>
+          </a:bodyPr>
+          <a:lstStyle/>
+          <a:p>
+            <a:pPr indent="0" lvl="0" marL="0" rtl="0" algn="l">
+              <a:spcBef>
+                <a:spcPts val="0"/>
+              </a:spcBef>
+              <a:spcAft>
+                <a:spcPts val="0"/>
+              </a:spcAft>
+              <a:buNone/>
+            </a:pPr>
+            <a:r>
+              <a:t/>
+            </a:r>
+            <a:endParaRPr/>
+          </a:p>
+        </p:txBody>
+      </p:sp>
+      <p:sp>
+        <p:nvSpPr>
+          <p:cNvPr id="665" name="Google Shape;665;p55"/>
+          <p:cNvSpPr/>
+          <p:nvPr/>
+        </p:nvSpPr>
+        <p:spPr>
+          <a:xfrm>
+            <a:off x="285749" y="1209852"/>
+            <a:ext cx="2071677" cy="3014270"/>
+          </a:xfrm>
+          <a:prstGeom prst="roundRect">
+            <a:avLst>
+              <a:gd fmla="val 4634" name="adj"/>
+            </a:avLst>
+          </a:prstGeom>
+          <a:solidFill>
+            <a:schemeClr val="lt2"/>
+          </a:solidFill>
+          <a:ln>
+            <a:noFill/>
+          </a:ln>
+        </p:spPr>
+        <p:txBody>
+          <a:bodyPr anchorCtr="0" anchor="ctr" bIns="91425" lIns="91425" spcFirstLastPara="1" rIns="91425" wrap="square" tIns="91425">
+            <a:noAutofit/>
+          </a:bodyPr>
+          <a:lstStyle/>
+          <a:p>
+            <a:pPr indent="0" lvl="0" marL="0" rtl="0" algn="l">
+              <a:spcBef>
+                <a:spcPts val="0"/>
+              </a:spcBef>
+              <a:spcAft>
+                <a:spcPts val="0"/>
+              </a:spcAft>
+              <a:buNone/>
+            </a:pPr>
+            <a:r>
+              <a:t/>
+            </a:r>
+            <a:endParaRPr/>
+          </a:p>
+        </p:txBody>
+      </p:sp>
+      <p:sp>
+        <p:nvSpPr>
+          <p:cNvPr id="667" name="Google Shape;667;p55"/>
+          <p:cNvSpPr/>
+          <p:nvPr/>
+        </p:nvSpPr>
+        <p:spPr>
+          <a:xfrm>
+            <a:off x="438148" y="1362233"/>
+            <a:ext cx="76199" cy="76190"/>
+          </a:xfrm>
+          <a:prstGeom prst="roundRect">
+            <a:avLst>
+              <a:gd fmla="val 31500" name="adj"/>
+            </a:avLst>
+          </a:prstGeom>
+          <a:solidFill>
+            <a:srgbClr val="0077FF"/>
+          </a:solidFill>
+          <a:ln>
+            <a:noFill/>
+          </a:ln>
+        </p:spPr>
+        <p:txBody>
+          <a:bodyPr anchorCtr="0" anchor="ctr" bIns="91425" lIns="91425" spcFirstLastPara="1" rIns="91425" wrap="square" tIns="91425">
+            <a:noAutofit/>
+          </a:bodyPr>
+          <a:lstStyle/>
+          <a:p>
+            <a:pPr indent="0" lvl="0" marL="0" rtl="0" algn="l">
+              <a:spcBef>
+                <a:spcPts val="0"/>
+              </a:spcBef>
+              <a:spcAft>
+                <a:spcPts val="0"/>
+              </a:spcAft>
+              <a:buNone/>
+            </a:pPr>
+            <a:r>
+              <a:t/>
+            </a:r>
+            <a:endParaRPr/>
+          </a:p>
+        </p:txBody>
+      </p:sp>
+      <p:sp>
+        <p:nvSpPr>
+          <p:cNvPr id="670" name="Google Shape;670;p55"/>
+          <p:cNvSpPr/>
+          <p:nvPr/>
+        </p:nvSpPr>
+        <p:spPr>
+          <a:xfrm>
+            <a:off x="2452675" y="1209852"/>
+            <a:ext cx="2071677" cy="3014270"/>
+          </a:xfrm>
+          <a:prstGeom prst="roundRect">
+            <a:avLst>
+              <a:gd fmla="val 4634" name="adj"/>
+            </a:avLst>
+          </a:prstGeom>
+          <a:solidFill>
+            <a:schemeClr val="lt2"/>
+          </a:solidFill>
+          <a:ln>
+            <a:noFill/>
+          </a:ln>
+        </p:spPr>
+        <p:txBody>
+          <a:bodyPr anchorCtr="0" anchor="ctr" bIns="91425" lIns="91425" spcFirstLastPara="1" rIns="91425" wrap="square" tIns="91425">
+            <a:noAutofit/>
+          </a:bodyPr>
+          <a:lstStyle/>
+          <a:p>
+            <a:pPr indent="0" lvl="0" marL="0" rtl="0" algn="l">
+              <a:spcBef>
+                <a:spcPts val="0"/>
+              </a:spcBef>
+              <a:spcAft>
+                <a:spcPts val="0"/>
+              </a:spcAft>
+              <a:buNone/>
+            </a:pPr>
+            <a:r>
+              <a:t/>
+            </a:r>
+            <a:endParaRPr/>
+          </a:p>
+        </p:txBody>
+      </p:sp>
+      <p:sp>
+        <p:nvSpPr>
+          <p:cNvPr id="672" name="Google Shape;672;p55"/>
+          <p:cNvSpPr/>
+          <p:nvPr/>
+        </p:nvSpPr>
+        <p:spPr>
+          <a:xfrm>
+            <a:off x="2605074" y="1362233"/>
+            <a:ext cx="76199" cy="76190"/>
+          </a:xfrm>
+          <a:prstGeom prst="roundRect">
+            <a:avLst>
+              <a:gd fmla="val 31500" name="adj"/>
+            </a:avLst>
+          </a:prstGeom>
+          <a:solidFill>
+            <a:srgbClr val="0077FF"/>
+          </a:solidFill>
+          <a:ln>
+            <a:noFill/>
+          </a:ln>
+        </p:spPr>
+        <p:txBody>
+          <a:bodyPr anchorCtr="0" anchor="ctr" bIns="91425" lIns="91425" spcFirstLastPara="1" rIns="91425" wrap="square" tIns="91425">
+            <a:noAutofit/>
+          </a:bodyPr>
+          <a:lstStyle/>
+          <a:p>
+            <a:pPr indent="0" lvl="0" marL="0" rtl="0" algn="l">
+              <a:spcBef>
+                <a:spcPts val="0"/>
+              </a:spcBef>
+              <a:spcAft>
+                <a:spcPts val="0"/>
+              </a:spcAft>
+              <a:buNone/>
+            </a:pPr>
+            <a:r>
+              <a:t/>
+            </a:r>
+            <a:endParaRPr/>
+          </a:p>
+        </p:txBody>
+      </p:sp>
+      <p:sp>
+        <p:nvSpPr>
+          <p:cNvPr id="675" name="Google Shape;675;p55"/>
+          <p:cNvSpPr/>
+          <p:nvPr/>
+        </p:nvSpPr>
+        <p:spPr>
+          <a:xfrm>
+            <a:off x="4619601" y="1209852"/>
+            <a:ext cx="2071677" cy="3014270"/>
+          </a:xfrm>
+          <a:prstGeom prst="roundRect">
+            <a:avLst>
+              <a:gd fmla="val 4634" name="adj"/>
+            </a:avLst>
+          </a:prstGeom>
+          <a:solidFill>
+            <a:schemeClr val="lt2"/>
+          </a:solidFill>
+          <a:ln>
+            <a:noFill/>
+          </a:ln>
+        </p:spPr>
+        <p:txBody>
+          <a:bodyPr anchorCtr="0" anchor="ctr" bIns="91425" lIns="91425" spcFirstLastPara="1" rIns="91425" wrap="square" tIns="91425">
+            <a:noAutofit/>
+          </a:bodyPr>
+          <a:lstStyle/>
+          <a:p>
+            <a:pPr indent="0" lvl="0" marL="0" rtl="0" algn="l">
+              <a:spcBef>
+                <a:spcPts val="0"/>
+              </a:spcBef>
+              <a:spcAft>
+                <a:spcPts val="0"/>
+              </a:spcAft>
+              <a:buNone/>
+            </a:pPr>
+            <a:r>
+              <a:t/>
+            </a:r>
+            <a:endParaRPr/>
+          </a:p>
+        </p:txBody>
+      </p:sp>
+      <p:sp>
+        <p:nvSpPr>
+          <p:cNvPr id="677" name="Google Shape;677;p55"/>
+          <p:cNvSpPr/>
+          <p:nvPr/>
+        </p:nvSpPr>
+        <p:spPr>
+          <a:xfrm>
+            <a:off x="4772001" y="1362233"/>
+            <a:ext cx="76199" cy="76190"/>
+          </a:xfrm>
+          <a:prstGeom prst="roundRect">
+            <a:avLst>
+              <a:gd fmla="val 31500" name="adj"/>
+            </a:avLst>
+          </a:prstGeom>
+          <a:solidFill>
+            <a:srgbClr val="0077FF"/>
+          </a:solidFill>
+          <a:ln>
+            <a:noFill/>
+          </a:ln>
+        </p:spPr>
+        <p:txBody>
+          <a:bodyPr anchorCtr="0" anchor="ctr" bIns="91425" lIns="91425" spcFirstLastPara="1" rIns="91425" wrap="square" tIns="91425">
+            <a:noAutofit/>
+          </a:bodyPr>
+          <a:lstStyle/>
+          <a:p>
+            <a:pPr indent="0" lvl="0" marL="0" rtl="0" algn="l">
+              <a:spcBef>
+                <a:spcPts val="0"/>
+              </a:spcBef>
+              <a:spcAft>
+                <a:spcPts val="0"/>
+              </a:spcAft>
+              <a:buNone/>
+            </a:pPr>
+            <a:r>
+              <a:t/>
+            </a:r>
+            <a:endParaRPr/>
+          </a:p>
+        </p:txBody>
+      </p:sp>
+      <p:sp>
+        <p:nvSpPr>
+          <p:cNvPr id="680" name="Google Shape;680;p55"/>
+          <p:cNvSpPr/>
+          <p:nvPr/>
+        </p:nvSpPr>
+        <p:spPr>
+          <a:xfrm>
+            <a:off x="6786527" y="1209852"/>
+            <a:ext cx="2071677" cy="3014270"/>
+          </a:xfrm>
+          <a:prstGeom prst="roundRect">
+            <a:avLst>
+              <a:gd fmla="val 4634" name="adj"/>
+            </a:avLst>
+          </a:prstGeom>
+          <a:solidFill>
+            <a:schemeClr val="lt2"/>
+          </a:solidFill>
+          <a:ln>
+            <a:noFill/>
+          </a:ln>
+        </p:spPr>
+        <p:txBody>
+          <a:bodyPr anchorCtr="0" anchor="ctr" bIns="91425" lIns="91425" spcFirstLastPara="1" rIns="91425" wrap="square" tIns="91425">
+            <a:noAutofit/>
+          </a:bodyPr>
+          <a:lstStyle/>
+          <a:p>
+            <a:pPr indent="0" lvl="0" marL="0" rtl="0" algn="l">
+              <a:spcBef>
+                <a:spcPts val="0"/>
+              </a:spcBef>
+              <a:spcAft>
+                <a:spcPts val="0"/>
+              </a:spcAft>
+              <a:buNone/>
+            </a:pPr>
+            <a:r>
+              <a:t/>
+            </a:r>
+            <a:endParaRPr/>
+          </a:p>
+        </p:txBody>
+      </p:sp>
+      <p:sp>
+        <p:nvSpPr>
+          <p:cNvPr id="682" name="Google Shape;682;p55"/>
+          <p:cNvSpPr/>
+          <p:nvPr/>
+        </p:nvSpPr>
+        <p:spPr>
+          <a:xfrm>
+            <a:off x="6938927" y="1362233"/>
+            <a:ext cx="76199" cy="76190"/>
+          </a:xfrm>
+          <a:prstGeom prst="roundRect">
+            <a:avLst>
+              <a:gd fmla="val 31500" name="adj"/>
+            </a:avLst>
+          </a:prstGeom>
+          <a:solidFill>
+            <a:srgbClr val="0077FF"/>
+          </a:solidFill>
+          <a:ln>
+            <a:noFill/>
+          </a:ln>
+        </p:spPr>
+        <p:txBody>
+          <a:bodyPr anchorCtr="0" anchor="ctr" bIns="91425" lIns="91425" spcFirstLastPara="1" rIns="91425" wrap="square" tIns="91425">
+            <a:noAutofit/>
+          </a:bodyPr>
+          <a:lstStyle/>
+          <a:p>
+            <a:pPr indent="0" lvl="0" marL="0" rtl="0" algn="l">
+              <a:spcBef>
+                <a:spcPts val="0"/>
+              </a:spcBef>
+              <a:spcAft>
+                <a:spcPts val="0"/>
+              </a:spcAft>
+              <a:buNone/>
+            </a:pPr>
+            <a:r>
+              <a:t/>
+            </a:r>
+            <a:endParaRPr/>
+          </a:p>
+        </p:txBody>
+      </p:sp>
+      <p:sp>
+        <p:nvSpPr>
+          <p:cNvPr id="683" name="title"/>
+          <p:cNvSpPr txBox="1"/>
+          <p:nvPr/>
+        </p:nvSpPr>
+        <p:spPr>
+          <a:xfrm>
+            <a:off x="274320" y="282943"/>
+            <a:ext cx="6792986" cy="617220"/>
+          </a:xfrm>
+          <a:prstGeom prst="rect">
+            <a:avLst/>
+          </a:prstGeom>
+          <a:noFill/>
+        </p:spPr>
+        <p:txBody>
+          <a:bodyPr wrap="square" lIns="76200" rIns="76200" tIns="50800" bIns="50800">
+            <a:spAutoFit/>
+          </a:bodyPr>
+          <a:lstStyle/>
+          <a:p>
+            <a:pPr algn="l">
+              <a:spcAft>
+                <a:spcPts val="300"/>
+              </a:spcAft>
+              <a:defRPr sz="2705">
+                <a:solidFill>
+                  <a:srgbClr val="000000"/>
+                </a:solidFill>
+                <a:latin typeface="Play"/>
+                <a:ea typeface="Play"/>
+                <a:cs typeface="Play"/>
+              </a:defRPr>
+            </a:pPr>
+            <a:r>
+              <a:rPr sz="2705">
+                <a:solidFill>
+                  <a:srgbClr val="000000"/>
+                </a:solidFill>
+                <a:latin typeface="Play"/>
+                <a:ea typeface="Play"/>
+                <a:cs typeface="Play"/>
+              </a:rPr>
+              <a:t>Ожидаемый эффект</a:t>
+            </a:r>
+          </a:p>
+        </p:txBody>
+      </p:sp>
+      <p:sp>
+        <p:nvSpPr>
+          <p:cNvPr id="684" name="lead"/>
+          <p:cNvSpPr txBox="1"/>
+          <p:nvPr/>
+        </p:nvSpPr>
+        <p:spPr>
+          <a:xfrm>
+            <a:off x="274320" y="1438431"/>
+            <a:ext cx="6792986" cy="943132"/>
+          </a:xfrm>
+          <a:prstGeom prst="rect">
+            <a:avLst/>
+          </a:prstGeom>
+          <a:noFill/>
+        </p:spPr>
+        <p:txBody>
+          <a:bodyPr wrap="square" lIns="76200" rIns="76200" tIns="50800" bIns="50800">
+            <a:spAutoFit/>
+          </a:bodyPr>
+          <a:lstStyle/>
+          <a:p>
+            <a:pPr algn="l">
+              <a:spcAft>
+                <a:spcPts val="300"/>
+              </a:spcAft>
+              <a:defRPr sz="2438">
+                <a:solidFill>
+                  <a:srgbClr val="000000"/>
+                </a:solidFill>
+                <a:latin typeface="Play"/>
+                <a:ea typeface="Play"/>
+                <a:cs typeface="Play"/>
+              </a:defRPr>
+            </a:pPr>
+            <a:r>
+              <a:rPr sz="2438">
+                <a:solidFill>
+                  <a:srgbClr val="000000"/>
+                </a:solidFill>
+                <a:latin typeface="Play"/>
+                <a:ea typeface="Play"/>
+                <a:cs typeface="Play"/>
+              </a:rPr>
+              <a:t>Средняя сборка колоды 12 слайдов сократилась до 4 минут</a:t>
+            </a:r>
+          </a:p>
+        </p:txBody>
+      </p:sp>
+      <p:sp>
+        <p:nvSpPr>
+          <p:cNvPr id="685" name="body"/>
+          <p:cNvSpPr txBox="1"/>
+          <p:nvPr/>
+        </p:nvSpPr>
+        <p:spPr>
+          <a:xfrm>
+            <a:off x="274320" y="2541846"/>
+            <a:ext cx="6792986" cy="1567963"/>
+          </a:xfrm>
+          <a:prstGeom prst="rect">
+            <a:avLst/>
+          </a:prstGeom>
+          <a:noFill/>
+        </p:spPr>
+        <p:txBody>
+          <a:bodyPr wrap="square" lIns="76200" rIns="76200" tIns="50800" bIns="50800">
+            <a:spAutoFit/>
+          </a:bodyPr>
+          <a:lstStyle/>
+          <a:p>
+            <a:pPr algn="l">
+              <a:spcAft>
+                <a:spcPts val="300"/>
+              </a:spcAft>
+              <a:defRPr sz="1600">
+                <a:solidFill>
+                  <a:srgbClr val="000000"/>
+                </a:solidFill>
+                <a:latin typeface="Play"/>
+                <a:ea typeface="Play"/>
+                <a:cs typeface="Play"/>
+              </a:defRPr>
+            </a:pPr>
+            <a:r>
+              <a:rPr sz="1600">
+                <a:solidFill>
+                  <a:srgbClr val="000000"/>
+                </a:solidFill>
+                <a:latin typeface="Play"/>
+                <a:ea typeface="Play"/>
+                <a:cs typeface="Play"/>
+              </a:rPr>
+              <a:t>• Время до первой версии уменьшилось с 6 дней до 1 дня</a:t>
+            </a:r>
+          </a:p>
+          <a:p>
+            <a:pPr algn="l">
+              <a:spcAft>
+                <a:spcPts val="300"/>
+              </a:spcAft>
+              <a:defRPr sz="1600">
+                <a:solidFill>
+                  <a:srgbClr val="000000"/>
+                </a:solidFill>
+                <a:latin typeface="Play"/>
+                <a:ea typeface="Play"/>
+                <a:cs typeface="Play"/>
+              </a:defRPr>
+            </a:pPr>
+            <a:r>
+              <a:rPr sz="1600">
+                <a:solidFill>
+                  <a:srgbClr val="000000"/>
+                </a:solidFill>
+                <a:latin typeface="Play"/>
+                <a:ea typeface="Play"/>
+                <a:cs typeface="Play"/>
+              </a:rPr>
+              <a:t>• Нарушения фирменного стиля в пилоте 2 из 68, исправлены автоматически</a:t>
+            </a:r>
+          </a:p>
+          <a:p>
+            <a:pPr algn="l">
+              <a:spcAft>
+                <a:spcPts val="300"/>
+              </a:spcAft>
+              <a:defRPr sz="1600">
+                <a:solidFill>
+                  <a:srgbClr val="000000"/>
+                </a:solidFill>
+                <a:latin typeface="Play"/>
+                <a:ea typeface="Play"/>
+                <a:cs typeface="Play"/>
+              </a:defRPr>
+            </a:pPr>
+            <a:r>
+              <a:rPr sz="1600">
+                <a:solidFill>
+                  <a:srgbClr val="000000"/>
+                </a:solidFill>
+                <a:latin typeface="Play"/>
+                <a:ea typeface="Play"/>
+                <a:cs typeface="Play"/>
+              </a:rPr>
+              <a:t>• Дизайнеры закрыли 38 запросов за 6 недель вместо 11 в неделю</a:t>
+            </a:r>
+          </a:p>
+        </p:txBody>
+      </p:sp>
+    </p:spTree>
+  </p:cSld>
+  <p:clrMapOvr>
+    <a:masterClrMapping/>
+  </p:clrMapOvr>
+</p:sld>
+</file>
+
+<file path=ppt/slides/slide59.xml><?xml version="1.0" encoding="utf-8"?>
 <p:sld xmlns:a="http://schemas.openxmlformats.org/drawingml/2006/main" xmlns:p="http://schemas.openxmlformats.org/presentationml/2006/main" xmlns:r="http://schemas.openxmlformats.org/officeDocument/2006/relationships">
   <p:cSld>
     <p:spTree>
@@ -6013,7 +7287,7 @@
                 <a:ea typeface="Play"/>
                 <a:cs typeface="Play"/>
               </a:rPr>
-              <a:t>Предложение</a:t>
+              <a:t>Что потребуется: ресурсы и сроки</a:t>
             </a:r>
           </a:p>
         </p:txBody>
@@ -6027,7 +7301,7 @@
         <p:spPr>
           <a:xfrm>
             <a:off x="274320" y="1414513"/>
-            <a:ext cx="6792986" cy="648590"/>
+            <a:ext cx="6792986" cy="735068"/>
           </a:xfrm>
           <a:prstGeom prst="rect">
             <a:avLst/>
@@ -6044,7 +7318,7 @@
               <a:spcAft>
                 <a:spcPts val="300"/>
               </a:spcAft>
-              <a:defRPr sz="2705" b="1">
+              <a:defRPr sz="1800" b="1">
                 <a:solidFill>
                   <a:srgbClr val="000000"/>
                 </a:solidFill>
@@ -6054,7 +7328,7 @@
               </a:defRPr>
             </a:pPr>
             <a:r>
-              <a:rPr sz="2705" b="1">
+              <a:rPr sz="1800" b="1">
                 <a:solidFill>
                   <a:srgbClr val="000000"/>
                 </a:solidFill>
@@ -6062,7 +7336,7 @@
                 <a:ea typeface="Play"/>
                 <a:cs typeface="Play"/>
               </a:rPr>
-              <a:t>Принимает шаблон pptx и материалы</a:t>
+              <a:t>Сервис работает на машине 2 vCPU / 2 ГБ RAM</a:t>
             </a:r>
           </a:p>
         </p:txBody>
@@ -6075,8 +7349,8 @@
         </p:nvSpPr>
         <p:spPr>
           <a:xfrm>
-            <a:off x="274320" y="2192822"/>
-            <a:ext cx="6792986" cy="1383659"/>
+            <a:off x="274320" y="2279300"/>
+            <a:ext cx="6792986" cy="1297180"/>
           </a:xfrm>
           <a:prstGeom prst="rect">
             <a:avLst/>
@@ -6093,7 +7367,7 @@
               <a:spcAft>
                 <a:spcPts val="300"/>
               </a:spcAft>
-              <a:defRPr sz="1803" b="1">
+              <a:defRPr sz="1600" b="1">
                 <a:solidFill>
                   <a:srgbClr val="000000"/>
                 </a:solidFill>
@@ -6103,7 +7377,7 @@
               </a:defRPr>
             </a:pPr>
             <a:r>
-              <a:rPr sz="1803" b="1">
+              <a:rPr sz="1600" b="1">
                 <a:solidFill>
                   <a:srgbClr val="000000"/>
                 </a:solidFill>
@@ -6111,7 +7385,7 @@
                 <a:ea typeface="Play"/>
                 <a:cs typeface="Play"/>
               </a:rPr>
-              <a:t>• Генерирует колоду по дизайн‑системе</a:t>
+              <a:t>• Модель gpt-oss-20b, инференс за 6 недель 1 400 руб</a:t>
             </a:r>
           </a:p>
           <a:p>
@@ -6119,7 +7393,7 @@
               <a:spcAft>
                 <a:spcPts val="300"/>
               </a:spcAft>
-              <a:defRPr sz="1803" b="1">
+              <a:defRPr sz="1600" b="1">
                 <a:solidFill>
                   <a:srgbClr val="000000"/>
                 </a:solidFill>
@@ -6129,7 +7403,7 @@
               </a:defRPr>
             </a:pPr>
             <a:r>
-              <a:rPr sz="1803" b="1">
+              <a:rPr sz="1600" b="1">
                 <a:solidFill>
                   <a:srgbClr val="000000"/>
                 </a:solidFill>
@@ -6137,7 +7411,7 @@
                 <a:ea typeface="Play"/>
                 <a:cs typeface="Play"/>
               </a:rPr>
-              <a:t>• Аудит качества проверяет каждый элемент</a:t>
+              <a:t>• Третий квартал 2026: подключение 4 команд, домен и HTTPS</a:t>
             </a:r>
           </a:p>
           <a:p>
@@ -6145,7 +7419,7 @@
               <a:spcAft>
                 <a:spcPts val="300"/>
               </a:spcAft>
-              <a:defRPr sz="1803" b="1">
+              <a:defRPr sz="1600" b="1">
                 <a:solidFill>
                   <a:srgbClr val="000000"/>
                 </a:solidFill>
@@ -6155,7 +7429,7 @@
               </a:defRPr>
             </a:pPr>
             <a:r>
-              <a:rPr sz="1803" b="1">
+              <a:rPr sz="1600" b="1">
                 <a:solidFill>
                   <a:srgbClr val="000000"/>
                 </a:solidFill>
@@ -6163,33 +7437,7 @@
                 <a:ea typeface="Play"/>
                 <a:cs typeface="Play"/>
               </a:rPr>
-              <a:t>• Экспорт в pptx, pdf и html</a:t>
-            </a:r>
-          </a:p>
-          <a:p>
-            <a:pPr algn="l">
-              <a:spcAft>
-                <a:spcPts val="300"/>
-              </a:spcAft>
-              <a:defRPr sz="1803" b="1">
-                <a:solidFill>
-                  <a:srgbClr val="000000"/>
-                </a:solidFill>
-                <a:latin typeface="Play"/>
-                <a:ea typeface="Play"/>
-                <a:cs typeface="Play"/>
-              </a:defRPr>
-            </a:pPr>
-            <a:r>
-              <a:rPr sz="1803" b="1">
-                <a:solidFill>
-                  <a:srgbClr val="000000"/>
-                </a:solidFill>
-                <a:latin typeface="Play"/>
-                <a:ea typeface="Play"/>
-                <a:cs typeface="Play"/>
-              </a:rPr>
-              <a:t>• Слайды остаются редактируемыми</a:t>
+              <a:t>• Четвёртый квартал 2026: доступ для всей компании, интеграция с хранилищем</a:t>
             </a:r>
           </a:p>
         </p:txBody>
@@ -6202,7 +7450,7 @@
 </p:sld>
 </file>
 
-<file path=ppt/slides/slide58.xml><?xml version="1.0" encoding="utf-8"?>
+<file path=ppt/slides/slide60.xml><?xml version="1.0" encoding="utf-8"?>
 <p:sld xmlns:a="http://schemas.openxmlformats.org/drawingml/2006/main" xmlns:p="http://schemas.openxmlformats.org/presentationml/2006/main" xmlns:r="http://schemas.openxmlformats.org/officeDocument/2006/relationships">
   <p:cSld>
     <p:spTree>
@@ -6474,665 +7722,21 @@
                 <a:ea typeface="Play"/>
                 <a:cs typeface="Play"/>
               </a:rPr>
-              <a:t>Ожидаемый эффект</a:t>
+              <a:t>План пилота</a:t>
             </a:r>
           </a:p>
         </p:txBody>
       </p:sp>
-      <p:graphicFrame>
-        <p:nvGraphicFramePr>
-          <p:cNvPr id="2396" name="Table 2395"/>
-          <p:cNvGraphicFramePr>
-            <a:graphicFrameLocks noGrp="1"/>
-          </p:cNvGraphicFramePr>
-          <p:nvPr/>
-        </p:nvGraphicFramePr>
-        <p:xfrm>
-          <a:off x="274320" y="2009822"/>
-          <a:ext cx="8344814" cy="1674466"/>
-        </p:xfrm>
-        <a:graphic>
-          <a:graphicData uri="http://schemas.openxmlformats.org/drawingml/2006/table">
-            <a:tbl>
-              <a:tblPr firstRow="1" bandRow="1">
-                <a:tableStyleId>{5C22544A-7EE6-4342-B048-85BDC9FD1C3A}</a:tableStyleId>
-              </a:tblPr>
-              <a:tblGrid>
-                <a:gridCol w="2781604"/>
-                <a:gridCol w="2781604"/>
-                <a:gridCol w="2781606"/>
-              </a:tblGrid>
-              <a:tr h="334893">
-                <a:tc>
-                  <a:txBody>
-                    <a:bodyPr/>
-                    <a:lstStyle/>
-                    <a:p>
-                      <a:pPr>
-                        <a:defRPr sz="1300" b="1">
-                          <a:solidFill>
-                            <a:srgbClr val="FFFFFF"/>
-                          </a:solidFill>
-                          <a:latin typeface="Play"/>
-                          <a:ea typeface="Play"/>
-                          <a:cs typeface="Play"/>
-                        </a:defRPr>
-                      </a:pPr>
-                      <a:r>
-                        <a:t>Метрика</a:t>
-                      </a:r>
-                    </a:p>
-                  </a:txBody>
-                  <a:tcPr>
-                    <a:solidFill>
-                      <a:srgbClr val="0077FF"/>
-                    </a:solidFill>
-                  </a:tcPr>
-                </a:tc>
-                <a:tc>
-                  <a:txBody>
-                    <a:bodyPr/>
-                    <a:lstStyle/>
-                    <a:p>
-                      <a:pPr>
-                        <a:defRPr sz="1300" b="1">
-                          <a:solidFill>
-                            <a:srgbClr val="FFFFFF"/>
-                          </a:solidFill>
-                          <a:latin typeface="Play"/>
-                          <a:ea typeface="Play"/>
-                          <a:cs typeface="Play"/>
-                        </a:defRPr>
-                      </a:pPr>
-                      <a:r>
-                        <a:t>Текущее</a:t>
-                      </a:r>
-                    </a:p>
-                  </a:txBody>
-                  <a:tcPr>
-                    <a:solidFill>
-                      <a:srgbClr val="0077FF"/>
-                    </a:solidFill>
-                  </a:tcPr>
-                </a:tc>
-                <a:tc>
-                  <a:txBody>
-                    <a:bodyPr/>
-                    <a:lstStyle/>
-                    <a:p>
-                      <a:pPr>
-                        <a:defRPr sz="1300" b="1">
-                          <a:solidFill>
-                            <a:srgbClr val="FFFFFF"/>
-                          </a:solidFill>
-                          <a:latin typeface="Play"/>
-                          <a:ea typeface="Play"/>
-                          <a:cs typeface="Play"/>
-                        </a:defRPr>
-                      </a:pPr>
-                      <a:r>
-                        <a:t>Пилот</a:t>
-                      </a:r>
-                    </a:p>
-                  </a:txBody>
-                  <a:tcPr>
-                    <a:solidFill>
-                      <a:srgbClr val="0077FF"/>
-                    </a:solidFill>
-                  </a:tcPr>
-                </a:tc>
-              </a:tr>
-              <a:tr h="334893">
-                <a:tc>
-                  <a:txBody>
-                    <a:bodyPr/>
-                    <a:lstStyle/>
-                    <a:p>
-                      <a:pPr>
-                        <a:defRPr sz="1300" b="0">
-                          <a:solidFill>
-                            <a:srgbClr val="000000"/>
-                          </a:solidFill>
-                          <a:latin typeface="Play"/>
-                          <a:ea typeface="Play"/>
-                          <a:cs typeface="Play"/>
-                        </a:defRPr>
-                      </a:pPr>
-                      <a:r>
-                        <a:t>Сборка (мин)</a:t>
-                      </a:r>
-                    </a:p>
-                  </a:txBody>
-                  <a:tcPr>
-                    <a:solidFill>
-                      <a:srgbClr val="FFFFFF"/>
-                    </a:solidFill>
-                  </a:tcPr>
-                </a:tc>
-                <a:tc>
-                  <a:txBody>
-                    <a:bodyPr/>
-                    <a:lstStyle/>
-                    <a:p>
-                      <a:pPr>
-                        <a:defRPr sz="1300" b="0">
-                          <a:solidFill>
-                            <a:srgbClr val="000000"/>
-                          </a:solidFill>
-                          <a:latin typeface="Play"/>
-                          <a:ea typeface="Play"/>
-                          <a:cs typeface="Play"/>
-                        </a:defRPr>
-                      </a:pPr>
-                      <a:r>
-                        <a:t>186</a:t>
-                      </a:r>
-                    </a:p>
-                  </a:txBody>
-                  <a:tcPr>
-                    <a:solidFill>
-                      <a:srgbClr val="FFFFFF"/>
-                    </a:solidFill>
-                  </a:tcPr>
-                </a:tc>
-                <a:tc>
-                  <a:txBody>
-                    <a:bodyPr/>
-                    <a:lstStyle/>
-                    <a:p>
-                      <a:pPr>
-                        <a:defRPr sz="1300" b="0">
-                          <a:solidFill>
-                            <a:srgbClr val="000000"/>
-                          </a:solidFill>
-                          <a:latin typeface="Play"/>
-                          <a:ea typeface="Play"/>
-                          <a:cs typeface="Play"/>
-                        </a:defRPr>
-                      </a:pPr>
-                      <a:r>
-                        <a:t>4</a:t>
-                      </a:r>
-                    </a:p>
-                  </a:txBody>
-                  <a:tcPr>
-                    <a:solidFill>
-                      <a:srgbClr val="FFFFFF"/>
-                    </a:solidFill>
-                  </a:tcPr>
-                </a:tc>
-              </a:tr>
-              <a:tr h="334893">
-                <a:tc>
-                  <a:txBody>
-                    <a:bodyPr/>
-                    <a:lstStyle/>
-                    <a:p>
-                      <a:pPr>
-                        <a:defRPr sz="1300" b="0">
-                          <a:solidFill>
-                            <a:srgbClr val="000000"/>
-                          </a:solidFill>
-                          <a:latin typeface="Play"/>
-                          <a:ea typeface="Play"/>
-                          <a:cs typeface="Play"/>
-                        </a:defRPr>
-                      </a:pPr>
-                      <a:r>
-                        <a:t>Время до первой версии (дней)</a:t>
-                      </a:r>
-                    </a:p>
-                  </a:txBody>
-                  <a:tcPr>
-                    <a:solidFill>
-                      <a:srgbClr val="FFFFFF"/>
-                    </a:solidFill>
-                  </a:tcPr>
-                </a:tc>
-                <a:tc>
-                  <a:txBody>
-                    <a:bodyPr/>
-                    <a:lstStyle/>
-                    <a:p>
-                      <a:pPr>
-                        <a:defRPr sz="1300" b="0">
-                          <a:solidFill>
-                            <a:srgbClr val="000000"/>
-                          </a:solidFill>
-                          <a:latin typeface="Play"/>
-                          <a:ea typeface="Play"/>
-                          <a:cs typeface="Play"/>
-                        </a:defRPr>
-                      </a:pPr>
-                      <a:r>
-                        <a:t>6</a:t>
-                      </a:r>
-                    </a:p>
-                  </a:txBody>
-                  <a:tcPr>
-                    <a:solidFill>
-                      <a:srgbClr val="FFFFFF"/>
-                    </a:solidFill>
-                  </a:tcPr>
-                </a:tc>
-                <a:tc>
-                  <a:txBody>
-                    <a:bodyPr/>
-                    <a:lstStyle/>
-                    <a:p>
-                      <a:pPr>
-                        <a:defRPr sz="1300" b="0">
-                          <a:solidFill>
-                            <a:srgbClr val="000000"/>
-                          </a:solidFill>
-                          <a:latin typeface="Play"/>
-                          <a:ea typeface="Play"/>
-                          <a:cs typeface="Play"/>
-                        </a:defRPr>
-                      </a:pPr>
-                      <a:r>
-                        <a:t>1</a:t>
-                      </a:r>
-                    </a:p>
-                  </a:txBody>
-                  <a:tcPr>
-                    <a:solidFill>
-                      <a:srgbClr val="FFFFFF"/>
-                    </a:solidFill>
-                  </a:tcPr>
-                </a:tc>
-              </a:tr>
-              <a:tr h="334893">
-                <a:tc>
-                  <a:txBody>
-                    <a:bodyPr/>
-                    <a:lstStyle/>
-                    <a:p>
-                      <a:pPr>
-                        <a:defRPr sz="1300" b="0">
-                          <a:solidFill>
-                            <a:srgbClr val="000000"/>
-                          </a:solidFill>
-                          <a:latin typeface="Play"/>
-                          <a:ea typeface="Play"/>
-                          <a:cs typeface="Play"/>
-                        </a:defRPr>
-                      </a:pPr>
-                      <a:r>
-                        <a:t>Нарушения (колод)</a:t>
-                      </a:r>
-                    </a:p>
-                  </a:txBody>
-                  <a:tcPr>
-                    <a:solidFill>
-                      <a:srgbClr val="FFFFFF"/>
-                    </a:solidFill>
-                  </a:tcPr>
-                </a:tc>
-                <a:tc>
-                  <a:txBody>
-                    <a:bodyPr/>
-                    <a:lstStyle/>
-                    <a:p>
-                      <a:pPr>
-                        <a:defRPr sz="1300" b="0">
-                          <a:solidFill>
-                            <a:srgbClr val="000000"/>
-                          </a:solidFill>
-                          <a:latin typeface="Play"/>
-                          <a:ea typeface="Play"/>
-                          <a:cs typeface="Play"/>
-                        </a:defRPr>
-                      </a:pPr>
-                      <a:r>
-                        <a:t>19</a:t>
-                      </a:r>
-                    </a:p>
-                  </a:txBody>
-                  <a:tcPr>
-                    <a:solidFill>
-                      <a:srgbClr val="FFFFFF"/>
-                    </a:solidFill>
-                  </a:tcPr>
-                </a:tc>
-                <a:tc>
-                  <a:txBody>
-                    <a:bodyPr/>
-                    <a:lstStyle/>
-                    <a:p>
-                      <a:pPr>
-                        <a:defRPr sz="1300" b="0">
-                          <a:solidFill>
-                            <a:srgbClr val="000000"/>
-                          </a:solidFill>
-                          <a:latin typeface="Play"/>
-                          <a:ea typeface="Play"/>
-                          <a:cs typeface="Play"/>
-                        </a:defRPr>
-                      </a:pPr>
-                      <a:r>
-                        <a:t>2</a:t>
-                      </a:r>
-                    </a:p>
-                  </a:txBody>
-                  <a:tcPr>
-                    <a:solidFill>
-                      <a:srgbClr val="FFFFFF"/>
-                    </a:solidFill>
-                  </a:tcPr>
-                </a:tc>
-              </a:tr>
-              <a:tr h="334894">
-                <a:tc>
-                  <a:txBody>
-                    <a:bodyPr/>
-                    <a:lstStyle/>
-                    <a:p>
-                      <a:pPr>
-                        <a:defRPr sz="1300" b="0">
-                          <a:solidFill>
-                            <a:srgbClr val="000000"/>
-                          </a:solidFill>
-                          <a:latin typeface="Play"/>
-                          <a:ea typeface="Play"/>
-                          <a:cs typeface="Play"/>
-                        </a:defRPr>
-                      </a:pPr>
-                      <a:r>
-                        <a:t>Запросы (запросов)</a:t>
-                      </a:r>
-                    </a:p>
-                  </a:txBody>
-                  <a:tcPr>
-                    <a:solidFill>
-                      <a:srgbClr val="FFFFFF"/>
-                    </a:solidFill>
-                  </a:tcPr>
-                </a:tc>
-                <a:tc>
-                  <a:txBody>
-                    <a:bodyPr/>
-                    <a:lstStyle/>
-                    <a:p>
-                      <a:pPr>
-                        <a:defRPr sz="1300" b="0">
-                          <a:solidFill>
-                            <a:srgbClr val="000000"/>
-                          </a:solidFill>
-                          <a:latin typeface="Play"/>
-                          <a:ea typeface="Play"/>
-                          <a:cs typeface="Play"/>
-                        </a:defRPr>
-                      </a:pPr>
-                      <a:r>
-                        <a:t>11</a:t>
-                      </a:r>
-                    </a:p>
-                  </a:txBody>
-                  <a:tcPr>
-                    <a:solidFill>
-                      <a:srgbClr val="FFFFFF"/>
-                    </a:solidFill>
-                  </a:tcPr>
-                </a:tc>
-                <a:tc>
-                  <a:txBody>
-                    <a:bodyPr/>
-                    <a:lstStyle/>
-                    <a:p>
-                      <a:pPr>
-                        <a:defRPr sz="1300" b="0">
-                          <a:solidFill>
-                            <a:srgbClr val="000000"/>
-                          </a:solidFill>
-                          <a:latin typeface="Play"/>
-                          <a:ea typeface="Play"/>
-                          <a:cs typeface="Play"/>
-                        </a:defRPr>
-                      </a:pPr>
-                      <a:r>
-                        <a:t>38</a:t>
-                      </a:r>
-                    </a:p>
-                  </a:txBody>
-                  <a:tcPr>
-                    <a:solidFill>
-                      <a:srgbClr val="FFFFFF"/>
-                    </a:solidFill>
-                  </a:tcPr>
-                </a:tc>
-              </a:tr>
-            </a:tbl>
-          </a:graphicData>
-        </a:graphic>
-      </p:graphicFrame>
-    </p:spTree>
-  </p:cSld>
-  <p:clrMapOvr>
-    <a:masterClrMapping/>
-  </p:clrMapOvr>
-</p:sld>
-</file>
-
-<file path=ppt/slides/slide59.xml><?xml version="1.0" encoding="utf-8"?>
-<p:sld xmlns:a="http://schemas.openxmlformats.org/drawingml/2006/main" xmlns:p="http://schemas.openxmlformats.org/presentationml/2006/main" xmlns:r="http://schemas.openxmlformats.org/officeDocument/2006/relationships">
-  <p:cSld>
-    <p:spTree>
-      <p:nvGrpSpPr>
-        <p:cNvPr id="1" name=""/>
-        <p:cNvGrpSpPr/>
-        <p:nvPr/>
-      </p:nvGrpSpPr>
-      <p:grpSpPr/>
-      <p:pic>
-        <p:nvPicPr>
-          <p:cNvPr descr=" " id="2428" name="Google Shape;2428;p89"/>
-          <p:cNvPicPr preferRelativeResize="0"/>
-          <p:nvPr/>
-        </p:nvPicPr>
-        <p:blipFill rotWithShape="1">
-          <a:blip r:embed="rId2">
-            <a:alphaModFix/>
-          </a:blip>
-          <a:srcRect b="0" l="0" r="0" t="0"/>
-          <a:stretch/>
-        </p:blipFill>
-        <p:spPr>
-          <a:xfrm>
-            <a:off x="0" y="2732082"/>
-            <a:ext cx="8515008" cy="92615"/>
-          </a:xfrm>
-          <a:prstGeom prst="rect">
-            <a:avLst/>
-          </a:prstGeom>
-          <a:noFill/>
-          <a:ln>
-            <a:noFill/>
-          </a:ln>
-        </p:spPr>
-      </p:pic>
-      <p:sp>
-        <p:nvSpPr>
-          <p:cNvPr id="2429" name="Google Shape;2429;p89"/>
+      <p:sp>
+        <p:nvSpPr>
+          <p:cNvPr id="2396" name="Rectangle 2395"/>
           <p:cNvSpPr/>
           <p:nvPr/>
         </p:nvSpPr>
         <p:spPr>
           <a:xfrm>
-            <a:off x="553415" y="1828897"/>
-            <a:ext cx="2232516" cy="1490254"/>
-          </a:xfrm>
-          <a:prstGeom prst="rect">
-            <a:avLst/>
-          </a:prstGeom>
-          <a:noFill/>
-          <a:ln>
-            <a:noFill/>
-          </a:ln>
-        </p:spPr>
-        <p:txBody>
-          <a:bodyPr anchorCtr="0" anchor="ctr" bIns="91425" lIns="91425" spcFirstLastPara="1" rIns="91425" wrap="square" tIns="91425">
-            <a:noAutofit/>
-          </a:bodyPr>
-          <a:lstStyle/>
-          <a:p>
-            <a:pPr indent="0" lvl="0" marL="0" rtl="0" algn="l">
-              <a:spcBef>
-                <a:spcPts val="0"/>
-              </a:spcBef>
-              <a:spcAft>
-                <a:spcPts val="0"/>
-              </a:spcAft>
-              <a:buNone/>
-            </a:pPr>
-            <a:r>
-              <a:t/>
-            </a:r>
-            <a:endParaRPr/>
-          </a:p>
-        </p:txBody>
-      </p:sp>
-      <p:sp>
-        <p:nvSpPr>
-          <p:cNvPr id="2431" name="Google Shape;2431;p89"/>
-          <p:cNvSpPr/>
-          <p:nvPr/>
-        </p:nvSpPr>
-        <p:spPr>
-          <a:xfrm>
-            <a:off x="3565736" y="1828897"/>
-            <a:ext cx="2232516" cy="1490254"/>
-          </a:xfrm>
-          <a:prstGeom prst="rect">
-            <a:avLst/>
-          </a:prstGeom>
-          <a:noFill/>
-          <a:ln>
-            <a:noFill/>
-          </a:ln>
-        </p:spPr>
-        <p:txBody>
-          <a:bodyPr anchorCtr="0" anchor="ctr" bIns="91425" lIns="91425" spcFirstLastPara="1" rIns="91425" wrap="square" tIns="91425">
-            <a:noAutofit/>
-          </a:bodyPr>
-          <a:lstStyle/>
-          <a:p>
-            <a:pPr indent="0" lvl="0" marL="0" rtl="0" algn="l">
-              <a:spcBef>
-                <a:spcPts val="0"/>
-              </a:spcBef>
-              <a:spcAft>
-                <a:spcPts val="0"/>
-              </a:spcAft>
-              <a:buNone/>
-            </a:pPr>
-            <a:r>
-              <a:t/>
-            </a:r>
-            <a:endParaRPr/>
-          </a:p>
-        </p:txBody>
-      </p:sp>
-      <p:sp>
-        <p:nvSpPr>
-          <p:cNvPr id="2433" name="Google Shape;2433;p89"/>
-          <p:cNvSpPr/>
-          <p:nvPr/>
-        </p:nvSpPr>
-        <p:spPr>
-          <a:xfrm>
-            <a:off x="6578067" y="1828897"/>
-            <a:ext cx="2232516" cy="1490254"/>
-          </a:xfrm>
-          <a:prstGeom prst="rect">
-            <a:avLst/>
-          </a:prstGeom>
-          <a:noFill/>
-          <a:ln>
-            <a:noFill/>
-          </a:ln>
-        </p:spPr>
-        <p:txBody>
-          <a:bodyPr anchorCtr="0" anchor="ctr" bIns="91425" lIns="91425" spcFirstLastPara="1" rIns="91425" wrap="square" tIns="91425">
-            <a:noAutofit/>
-          </a:bodyPr>
-          <a:lstStyle/>
-          <a:p>
-            <a:pPr indent="0" lvl="0" marL="0" rtl="0" algn="l">
-              <a:spcBef>
-                <a:spcPts val="0"/>
-              </a:spcBef>
-              <a:spcAft>
-                <a:spcPts val="0"/>
-              </a:spcAft>
-              <a:buNone/>
-            </a:pPr>
-            <a:r>
-              <a:t/>
-            </a:r>
-            <a:endParaRPr/>
-          </a:p>
-        </p:txBody>
-      </p:sp>
-      <p:sp>
-        <p:nvSpPr>
-          <p:cNvPr id="2434" name="title"/>
-          <p:cNvSpPr txBox="1"/>
-          <p:nvPr/>
-        </p:nvSpPr>
-        <p:spPr>
-          <a:xfrm>
-            <a:off x="274320" y="282943"/>
-            <a:ext cx="6792986" cy="617220"/>
-          </a:xfrm>
-          <a:prstGeom prst="rect">
-            <a:avLst/>
-          </a:prstGeom>
-          <a:noFill/>
-        </p:spPr>
-        <p:txBody>
-          <a:bodyPr wrap="square" lIns="76200" rIns="76200" tIns="50800" bIns="50800">
-            <a:spAutoFit/>
-          </a:bodyPr>
-          <a:lstStyle/>
-          <a:p>
-            <a:pPr algn="l">
-              <a:spcAft>
-                <a:spcPts val="300"/>
-              </a:spcAft>
-              <a:defRPr sz="2705">
-                <a:solidFill>
-                  <a:srgbClr val="000000"/>
-                </a:solidFill>
-                <a:latin typeface="Play"/>
-                <a:ea typeface="Play"/>
-                <a:cs typeface="Play"/>
-              </a:defRPr>
-            </a:pPr>
-            <a:r>
-              <a:rPr sz="2705">
-                <a:solidFill>
-                  <a:srgbClr val="000000"/>
-                </a:solidFill>
-                <a:latin typeface="Play"/>
-                <a:ea typeface="Play"/>
-                <a:cs typeface="Play"/>
-              </a:rPr>
-              <a:t>Ресурсы и сроки</a:t>
-            </a:r>
-          </a:p>
-        </p:txBody>
-      </p:sp>
-      <p:sp>
-        <p:nvSpPr>
-          <p:cNvPr id="2435" name="Rectangle 2434"/>
-          <p:cNvSpPr/>
-          <p:nvPr/>
-        </p:nvSpPr>
-        <p:spPr>
-          <a:xfrm>
-            <a:off x="274320" y="1719008"/>
-            <a:ext cx="8344814" cy="19858"/>
+            <a:off x="274320" y="2412824"/>
+            <a:ext cx="8344814" cy="26282"/>
           </a:xfrm>
           <a:prstGeom prst="rect">
             <a:avLst/>
@@ -7168,14 +7772,14 @@
       </p:sp>
       <p:sp>
         <p:nvSpPr>
-          <p:cNvPr id="2436" name="Oval 2435"/>
+          <p:cNvPr id="2397" name="Oval 2396"/>
           <p:cNvSpPr/>
           <p:nvPr/>
         </p:nvSpPr>
         <p:spPr>
           <a:xfrm>
-            <a:off x="1244607" y="1656123"/>
-            <a:ext cx="145628" cy="145628"/>
+            <a:off x="1568752" y="2329595"/>
+            <a:ext cx="192740" cy="192740"/>
           </a:xfrm>
           <a:prstGeom prst="ellipse">
             <a:avLst/>
@@ -7211,14 +7815,14 @@
       </p:sp>
       <p:sp>
         <p:nvSpPr>
-          <p:cNvPr id="2437" name="TextBox 2436"/>
+          <p:cNvPr id="2398" name="TextBox 2397"/>
           <p:cNvSpPr txBox="1"/>
           <p:nvPr/>
         </p:nvSpPr>
         <p:spPr>
           <a:xfrm>
-            <a:off x="274320" y="1414513"/>
-            <a:ext cx="2086203" cy="251539"/>
+            <a:off x="274320" y="2009822"/>
+            <a:ext cx="4172407" cy="332914"/>
           </a:xfrm>
           <a:prstGeom prst="rect">
             <a:avLst/>
@@ -7226,13 +7830,13 @@
           <a:noFill/>
         </p:spPr>
         <p:txBody>
-          <a:bodyPr wrap="square">
+          <a:bodyPr wrap="square" lIns="12700" rIns="12700" tIns="12700" bIns="12700">
             <a:spAutoFit/>
           </a:bodyPr>
           <a:lstStyle/>
           <a:p>
             <a:pPr algn="ctr">
-              <a:defRPr sz="1200" b="0">
+              <a:defRPr sz="1400" b="0">
                 <a:solidFill>
                   <a:srgbClr val="000000"/>
                 </a:solidFill>
@@ -7242,7 +7846,7 @@
               </a:defRPr>
             </a:pPr>
             <a:r>
-              <a:rPr sz="1200" b="0">
+              <a:rPr sz="1400" b="0">
                 <a:solidFill>
                   <a:srgbClr val="000000"/>
                 </a:solidFill>
@@ -7250,21 +7854,21 @@
                 <a:ea typeface="Play"/>
                 <a:cs typeface="Play"/>
               </a:rPr>
-              <a:t>Подключение 4 команд</a:t>
+              <a:t>Подготовка</a:t>
             </a:r>
           </a:p>
         </p:txBody>
       </p:sp>
       <p:sp>
         <p:nvSpPr>
-          <p:cNvPr id="2438" name="Oval 2437"/>
+          <p:cNvPr id="2399" name="Oval 2398"/>
           <p:cNvSpPr/>
           <p:nvPr/>
         </p:nvSpPr>
         <p:spPr>
           <a:xfrm>
-            <a:off x="3330811" y="1656123"/>
-            <a:ext cx="145628" cy="145628"/>
+            <a:off x="4350356" y="2329595"/>
+            <a:ext cx="192740" cy="192740"/>
           </a:xfrm>
           <a:prstGeom prst="ellipse">
             <a:avLst/>
@@ -7300,14 +7904,14 @@
       </p:sp>
       <p:sp>
         <p:nvSpPr>
-          <p:cNvPr id="2439" name="TextBox 2438"/>
+          <p:cNvPr id="2400" name="TextBox 2399"/>
           <p:cNvSpPr txBox="1"/>
           <p:nvPr/>
         </p:nvSpPr>
         <p:spPr>
           <a:xfrm>
-            <a:off x="2360523" y="1864636"/>
-            <a:ext cx="2086203" cy="251539"/>
+            <a:off x="2360523" y="2605564"/>
+            <a:ext cx="4172407" cy="332914"/>
           </a:xfrm>
           <a:prstGeom prst="rect">
             <a:avLst/>
@@ -7315,13 +7919,13 @@
           <a:noFill/>
         </p:spPr>
         <p:txBody>
-          <a:bodyPr wrap="square">
+          <a:bodyPr wrap="square" lIns="12700" rIns="12700" tIns="12700" bIns="12700">
             <a:spAutoFit/>
           </a:bodyPr>
           <a:lstStyle/>
           <a:p>
             <a:pPr algn="ctr">
-              <a:defRPr sz="1200" b="0">
+              <a:defRPr sz="1400" b="0">
                 <a:solidFill>
                   <a:srgbClr val="000000"/>
                 </a:solidFill>
@@ -7331,7 +7935,7 @@
               </a:defRPr>
             </a:pPr>
             <a:r>
-              <a:rPr sz="1200" b="0">
+              <a:rPr sz="1400" b="0">
                 <a:solidFill>
                   <a:srgbClr val="000000"/>
                 </a:solidFill>
@@ -7339,21 +7943,21 @@
                 <a:ea typeface="Play"/>
                 <a:cs typeface="Play"/>
               </a:rPr>
-              <a:t>Домен и HTTPS</a:t>
+              <a:t>Запуск</a:t>
             </a:r>
           </a:p>
         </p:txBody>
       </p:sp>
       <p:sp>
         <p:nvSpPr>
-          <p:cNvPr id="2440" name="Oval 2439"/>
+          <p:cNvPr id="2401" name="Oval 2400"/>
           <p:cNvSpPr/>
           <p:nvPr/>
         </p:nvSpPr>
         <p:spPr>
           <a:xfrm>
-            <a:off x="5417014" y="1656123"/>
-            <a:ext cx="145628" cy="145628"/>
+            <a:off x="7131961" y="2329595"/>
+            <a:ext cx="192740" cy="192740"/>
           </a:xfrm>
           <a:prstGeom prst="ellipse">
             <a:avLst/>
@@ -7389,14 +7993,14 @@
       </p:sp>
       <p:sp>
         <p:nvSpPr>
-          <p:cNvPr id="2441" name="TextBox 2440"/>
+          <p:cNvPr id="2402" name="TextBox 2401"/>
           <p:cNvSpPr txBox="1"/>
           <p:nvPr/>
         </p:nvSpPr>
         <p:spPr>
           <a:xfrm>
-            <a:off x="4446727" y="1414513"/>
-            <a:ext cx="2086203" cy="251539"/>
+            <a:off x="4446727" y="2009822"/>
+            <a:ext cx="4172407" cy="332914"/>
           </a:xfrm>
           <a:prstGeom prst="rect">
             <a:avLst/>
@@ -7404,13 +8008,13 @@
           <a:noFill/>
         </p:spPr>
         <p:txBody>
-          <a:bodyPr wrap="square">
+          <a:bodyPr wrap="square" lIns="12700" rIns="12700" tIns="12700" bIns="12700">
             <a:spAutoFit/>
           </a:bodyPr>
           <a:lstStyle/>
           <a:p>
             <a:pPr algn="ctr">
-              <a:defRPr sz="1200" b="0">
+              <a:defRPr sz="1400" b="0">
                 <a:solidFill>
                   <a:srgbClr val="000000"/>
                 </a:solidFill>
@@ -7420,7 +8024,7 @@
               </a:defRPr>
             </a:pPr>
             <a:r>
-              <a:rPr sz="1200" b="0">
+              <a:rPr sz="1400" b="0">
                 <a:solidFill>
                   <a:srgbClr val="000000"/>
                 </a:solidFill>
@@ -7428,110 +8032,21 @@
                 <a:ea typeface="Play"/>
                 <a:cs typeface="Play"/>
               </a:rPr>
-              <a:t>Доступ всей компании</a:t>
+              <a:t>Оценка</a:t>
             </a:r>
           </a:p>
         </p:txBody>
       </p:sp>
       <p:sp>
         <p:nvSpPr>
-          <p:cNvPr id="2442" name="Oval 2441"/>
-          <p:cNvSpPr/>
-          <p:nvPr/>
-        </p:nvSpPr>
-        <p:spPr>
-          <a:xfrm>
-            <a:off x="7503218" y="1656123"/>
-            <a:ext cx="145628" cy="145628"/>
-          </a:xfrm>
-          <a:prstGeom prst="ellipse">
-            <a:avLst/>
-          </a:prstGeom>
-          <a:solidFill>
-            <a:srgbClr val="0077FF"/>
-          </a:solidFill>
-          <a:ln>
-            <a:noFill/>
-          </a:ln>
-        </p:spPr>
-        <p:style>
-          <a:lnRef idx="1">
-            <a:schemeClr val="accent1"/>
-          </a:lnRef>
-          <a:fillRef idx="3">
-            <a:schemeClr val="accent1"/>
-          </a:fillRef>
-          <a:effectRef idx="2">
-            <a:schemeClr val="accent1"/>
-          </a:effectRef>
-          <a:fontRef idx="minor">
-            <a:schemeClr val="lt1"/>
-          </a:fontRef>
-        </p:style>
-        <p:txBody>
-          <a:bodyPr rtlCol="0" anchor="ctr"/>
-          <a:lstStyle/>
-          <a:p>
-            <a:pPr algn="ctr"/>
-          </a:p>
-        </p:txBody>
-      </p:sp>
-      <p:sp>
-        <p:nvSpPr>
-          <p:cNvPr id="2443" name="TextBox 2442"/>
+          <p:cNvPr id="2403" name="body"/>
           <p:cNvSpPr txBox="1"/>
           <p:nvPr/>
         </p:nvSpPr>
         <p:spPr>
           <a:xfrm>
-            <a:off x="6532930" y="1864636"/>
-            <a:ext cx="2086203" cy="251539"/>
-          </a:xfrm>
-          <a:prstGeom prst="rect">
-            <a:avLst/>
-          </a:prstGeom>
-          <a:noFill/>
-        </p:spPr>
-        <p:txBody>
-          <a:bodyPr wrap="square">
-            <a:spAutoFit/>
-          </a:bodyPr>
-          <a:lstStyle/>
-          <a:p>
-            <a:pPr algn="ctr">
-              <a:defRPr sz="1200" b="0">
-                <a:solidFill>
-                  <a:srgbClr val="000000"/>
-                </a:solidFill>
-                <a:latin typeface="Play"/>
-                <a:ea typeface="Play"/>
-                <a:cs typeface="Play"/>
-              </a:defRPr>
-            </a:pPr>
-            <a:r>
-              <a:rPr sz="1200" b="0">
-                <a:solidFill>
-                  <a:srgbClr val="000000"/>
-                </a:solidFill>
-                <a:latin typeface="Play"/>
-                <a:ea typeface="Play"/>
-                <a:cs typeface="Play"/>
-              </a:rPr>
-              <a:t>Генерация иллюстраций</a:t>
-            </a:r>
-          </a:p>
-        </p:txBody>
-      </p:sp>
-      <p:sp>
-        <p:nvSpPr>
-          <p:cNvPr id="2444" name="body"/>
-          <p:cNvSpPr txBox="1"/>
-          <p:nvPr/>
-        </p:nvSpPr>
-        <p:spPr>
-          <a:xfrm>
-            <a:off x="274320" y="2205049"/>
-            <a:ext cx="8344814" cy="527023"/>
+            <a:off x="274320" y="2885914"/>
+            <a:ext cx="8344814" cy="798374"/>
           </a:xfrm>
           <a:prstGeom prst="rect">
             <a:avLst/>
@@ -7566,7 +8081,7 @@
                 <a:ea typeface="Play"/>
                 <a:cs typeface="Play"/>
               </a:rPr>
-              <a:t>• 2 vCPU / 2 GB RAM</a:t>
+              <a:t>• Пилот 6 недель на двух командах</a:t>
             </a:r>
           </a:p>
           <a:p>
@@ -7592,7 +8107,7 @@
                 <a:ea typeface="Play"/>
                 <a:cs typeface="Play"/>
               </a:rPr>
-              <a:t>• 1 400 рублей за 6 недель</a:t>
+              <a:t>• Собрано 68 презентаций</a:t>
             </a:r>
           </a:p>
           <a:p>
@@ -7618,7 +8133,7 @@
                 <a:ea typeface="Play"/>
                 <a:cs typeface="Play"/>
               </a:rPr>
-              <a:t>• Модель gpt-oss-20b</a:t>
+              <a:t>• Время сборки 4 мин, ожидание 1 день</a:t>
             </a:r>
           </a:p>
           <a:p>
@@ -7644,533 +8159,7 @@
                 <a:ea typeface="Play"/>
                 <a:cs typeface="Play"/>
               </a:rPr>
-              <a:t>• Подключение 4 команд, домен и HTTPS</a:t>
-            </a:r>
-          </a:p>
-          <a:p>
-            <a:pPr algn="l">
-              <a:spcAft>
-                <a:spcPts val="300"/>
-              </a:spcAft>
-              <a:defRPr sz="1200">
-                <a:solidFill>
-                  <a:srgbClr val="000000"/>
-                </a:solidFill>
-                <a:latin typeface="Play"/>
-                <a:ea typeface="Play"/>
-                <a:cs typeface="Play"/>
-              </a:defRPr>
-            </a:pPr>
-            <a:r>
-              <a:rPr sz="1200">
-                <a:solidFill>
-                  <a:srgbClr val="000000"/>
-                </a:solidFill>
-                <a:latin typeface="Play"/>
-                <a:ea typeface="Play"/>
-                <a:cs typeface="Play"/>
-              </a:rPr>
-              <a:t>• Доступ всей компании, интеграция</a:t>
-            </a:r>
-          </a:p>
-          <a:p>
-            <a:pPr algn="l">
-              <a:spcAft>
-                <a:spcPts val="300"/>
-              </a:spcAft>
-              <a:defRPr sz="1200">
-                <a:solidFill>
-                  <a:srgbClr val="000000"/>
-                </a:solidFill>
-                <a:latin typeface="Play"/>
-                <a:ea typeface="Play"/>
-                <a:cs typeface="Play"/>
-              </a:defRPr>
-            </a:pPr>
-            <a:r>
-              <a:rPr sz="1200">
-                <a:solidFill>
-                  <a:srgbClr val="000000"/>
-                </a:solidFill>
-                <a:latin typeface="Play"/>
-                <a:ea typeface="Play"/>
-                <a:cs typeface="Play"/>
-              </a:rPr>
-              <a:t>• Генерация иллюстраций в Q1 2027</a:t>
-            </a:r>
-          </a:p>
-        </p:txBody>
-      </p:sp>
-    </p:spTree>
-  </p:cSld>
-  <p:clrMapOvr>
-    <a:masterClrMapping/>
-  </p:clrMapOvr>
-</p:sld>
-</file>
-
-<file path=ppt/slides/slide60.xml><?xml version="1.0" encoding="utf-8"?>
-<p:sld xmlns:a="http://schemas.openxmlformats.org/drawingml/2006/main" xmlns:p="http://schemas.openxmlformats.org/presentationml/2006/main" xmlns:r="http://schemas.openxmlformats.org/officeDocument/2006/relationships">
-  <p:cSld>
-    <p:spTree>
-      <p:nvGrpSpPr>
-        <p:cNvPr id="1" name=""/>
-        <p:cNvGrpSpPr/>
-        <p:nvPr/>
-      </p:nvGrpSpPr>
-      <p:grpSpPr/>
-      <p:sp>
-        <p:nvSpPr>
-          <p:cNvPr id="532" name="Google Shape;532;p53"/>
-          <p:cNvSpPr/>
-          <p:nvPr/>
-        </p:nvSpPr>
-        <p:spPr>
-          <a:xfrm>
-            <a:off x="303214" y="1022533"/>
-            <a:ext cx="8451939" cy="1433588"/>
-          </a:xfrm>
-          <a:prstGeom prst="rect">
-            <a:avLst/>
-          </a:prstGeom>
-          <a:noFill/>
-          <a:ln>
-            <a:noFill/>
-          </a:ln>
-        </p:spPr>
-        <p:txBody>
-          <a:bodyPr anchorCtr="0" anchor="ctr" bIns="91425" lIns="91425" spcFirstLastPara="1" rIns="91425" wrap="square" tIns="91425">
-            <a:noAutofit/>
-          </a:bodyPr>
-          <a:lstStyle/>
-          <a:p>
-            <a:pPr indent="0" lvl="0" marL="0" rtl="0" algn="l">
-              <a:spcBef>
-                <a:spcPts val="0"/>
-              </a:spcBef>
-              <a:spcAft>
-                <a:spcPts val="0"/>
-              </a:spcAft>
-              <a:buNone/>
-            </a:pPr>
-            <a:r>
-              <a:t/>
-            </a:r>
-            <a:endParaRPr/>
-          </a:p>
-        </p:txBody>
-      </p:sp>
-      <p:sp>
-        <p:nvSpPr>
-          <p:cNvPr id="549" name="Google Shape;549;p53"/>
-          <p:cNvSpPr/>
-          <p:nvPr/>
-        </p:nvSpPr>
-        <p:spPr>
-          <a:xfrm>
-            <a:off x="7359897" y="1022533"/>
-            <a:ext cx="1395256" cy="1433588"/>
-          </a:xfrm>
-          <a:prstGeom prst="rect">
-            <a:avLst/>
-          </a:prstGeom>
-          <a:noFill/>
-          <a:ln>
-            <a:noFill/>
-          </a:ln>
-        </p:spPr>
-        <p:txBody>
-          <a:bodyPr anchorCtr="0" anchor="ctr" bIns="91425" lIns="91425" spcFirstLastPara="1" rIns="91425" wrap="square" tIns="91425">
-            <a:noAutofit/>
-          </a:bodyPr>
-          <a:lstStyle/>
-          <a:p>
-            <a:pPr indent="0" lvl="0" marL="0" rtl="0" algn="l">
-              <a:spcBef>
-                <a:spcPts val="0"/>
-              </a:spcBef>
-              <a:spcAft>
-                <a:spcPts val="0"/>
-              </a:spcAft>
-              <a:buNone/>
-            </a:pPr>
-            <a:r>
-              <a:t/>
-            </a:r>
-            <a:endParaRPr/>
-          </a:p>
-        </p:txBody>
-      </p:sp>
-      <p:sp>
-        <p:nvSpPr>
-          <p:cNvPr id="553" name="Google Shape;553;p53"/>
-          <p:cNvSpPr/>
-          <p:nvPr/>
-        </p:nvSpPr>
-        <p:spPr>
-          <a:xfrm>
-            <a:off x="276488" y="2955549"/>
-            <a:ext cx="8451939" cy="1433588"/>
-          </a:xfrm>
-          <a:prstGeom prst="rect">
-            <a:avLst/>
-          </a:prstGeom>
-          <a:noFill/>
-          <a:ln>
-            <a:noFill/>
-          </a:ln>
-        </p:spPr>
-        <p:txBody>
-          <a:bodyPr anchorCtr="0" anchor="ctr" bIns="91425" lIns="91425" spcFirstLastPara="1" rIns="91425" wrap="square" tIns="91425">
-            <a:noAutofit/>
-          </a:bodyPr>
-          <a:lstStyle/>
-          <a:p>
-            <a:pPr indent="0" lvl="0" marL="0" rtl="0" algn="l">
-              <a:spcBef>
-                <a:spcPts val="0"/>
-              </a:spcBef>
-              <a:spcAft>
-                <a:spcPts val="0"/>
-              </a:spcAft>
-              <a:buNone/>
-            </a:pPr>
-            <a:r>
-              <a:t/>
-            </a:r>
-            <a:endParaRPr/>
-          </a:p>
-        </p:txBody>
-      </p:sp>
-      <p:sp>
-        <p:nvSpPr>
-          <p:cNvPr id="554" name="Google Shape;554;p53"/>
-          <p:cNvSpPr/>
-          <p:nvPr/>
-        </p:nvSpPr>
-        <p:spPr>
-          <a:xfrm>
-            <a:off x="303214" y="2797849"/>
-            <a:ext cx="8451939" cy="1433588"/>
-          </a:xfrm>
-          <a:prstGeom prst="rect">
-            <a:avLst/>
-          </a:prstGeom>
-          <a:noFill/>
-          <a:ln>
-            <a:noFill/>
-          </a:ln>
-        </p:spPr>
-        <p:txBody>
-          <a:bodyPr anchorCtr="0" anchor="ctr" bIns="91425" lIns="91425" spcFirstLastPara="1" rIns="91425" wrap="square" tIns="91425">
-            <a:noAutofit/>
-          </a:bodyPr>
-          <a:lstStyle/>
-          <a:p>
-            <a:pPr indent="0" lvl="0" marL="0" rtl="0" algn="l">
-              <a:spcBef>
-                <a:spcPts val="0"/>
-              </a:spcBef>
-              <a:spcAft>
-                <a:spcPts val="0"/>
-              </a:spcAft>
-              <a:buNone/>
-            </a:pPr>
-            <a:r>
-              <a:t/>
-            </a:r>
-            <a:endParaRPr/>
-          </a:p>
-        </p:txBody>
-      </p:sp>
-      <p:sp>
-        <p:nvSpPr>
-          <p:cNvPr id="571" name="Google Shape;571;p53"/>
-          <p:cNvSpPr/>
-          <p:nvPr/>
-        </p:nvSpPr>
-        <p:spPr>
-          <a:xfrm>
-            <a:off x="7359897" y="2797849"/>
-            <a:ext cx="1395256" cy="1433588"/>
-          </a:xfrm>
-          <a:prstGeom prst="rect">
-            <a:avLst/>
-          </a:prstGeom>
-          <a:noFill/>
-          <a:ln>
-            <a:noFill/>
-          </a:ln>
-        </p:spPr>
-        <p:txBody>
-          <a:bodyPr anchorCtr="0" anchor="ctr" bIns="91425" lIns="91425" spcFirstLastPara="1" rIns="91425" wrap="square" tIns="91425">
-            <a:noAutofit/>
-          </a:bodyPr>
-          <a:lstStyle/>
-          <a:p>
-            <a:pPr indent="0" lvl="0" marL="0" rtl="0" algn="l">
-              <a:spcBef>
-                <a:spcPts val="0"/>
-              </a:spcBef>
-              <a:spcAft>
-                <a:spcPts val="0"/>
-              </a:spcAft>
-              <a:buNone/>
-            </a:pPr>
-            <a:r>
-              <a:t/>
-            </a:r>
-            <a:endParaRPr/>
-          </a:p>
-        </p:txBody>
-      </p:sp>
-      <p:sp>
-        <p:nvSpPr>
-          <p:cNvPr id="572" name="title"/>
-          <p:cNvSpPr txBox="1"/>
-          <p:nvPr/>
-        </p:nvSpPr>
-        <p:spPr>
-          <a:xfrm>
-            <a:off x="274320" y="282943"/>
-            <a:ext cx="6792986" cy="617220"/>
-          </a:xfrm>
-          <a:prstGeom prst="rect">
-            <a:avLst/>
-          </a:prstGeom>
-          <a:noFill/>
-        </p:spPr>
-        <p:txBody>
-          <a:bodyPr wrap="square" lIns="76200" rIns="76200" tIns="50800" bIns="50800">
-            <a:spAutoFit/>
-          </a:bodyPr>
-          <a:lstStyle/>
-          <a:p>
-            <a:pPr algn="l">
-              <a:spcAft>
-                <a:spcPts val="300"/>
-              </a:spcAft>
-              <a:defRPr sz="2705">
-                <a:solidFill>
-                  <a:srgbClr val="000000"/>
-                </a:solidFill>
-                <a:latin typeface="Play"/>
-                <a:ea typeface="Play"/>
-                <a:cs typeface="Play"/>
-              </a:defRPr>
-            </a:pPr>
-            <a:r>
-              <a:rPr sz="2705">
-                <a:solidFill>
-                  <a:srgbClr val="000000"/>
-                </a:solidFill>
-                <a:latin typeface="Play"/>
-                <a:ea typeface="Play"/>
-                <a:cs typeface="Play"/>
-              </a:rPr>
-              <a:t>План пилота</a:t>
-            </a:r>
-          </a:p>
-        </p:txBody>
-      </p:sp>
-      <p:sp>
-        <p:nvSpPr>
-          <p:cNvPr id="573" name="lead"/>
-          <p:cNvSpPr txBox="1"/>
-          <p:nvPr/>
-        </p:nvSpPr>
-        <p:spPr>
-          <a:xfrm>
-            <a:off x="274320" y="1414513"/>
-            <a:ext cx="6792986" cy="855559"/>
-          </a:xfrm>
-          <a:prstGeom prst="rect">
-            <a:avLst/>
-          </a:prstGeom>
-          <a:noFill/>
-        </p:spPr>
-        <p:txBody>
-          <a:bodyPr wrap="square" lIns="76200" rIns="76200" tIns="50800" bIns="50800">
-            <a:spAutoFit/>
-          </a:bodyPr>
-          <a:lstStyle/>
-          <a:p>
-            <a:pPr algn="ctr">
-              <a:spcAft>
-                <a:spcPts val="300"/>
-              </a:spcAft>
-              <a:defRPr sz="1800">
-                <a:solidFill>
-                  <a:srgbClr val="000000"/>
-                </a:solidFill>
-                <a:latin typeface="Play"/>
-                <a:ea typeface="Play"/>
-                <a:cs typeface="Play"/>
-              </a:defRPr>
-            </a:pPr>
-            <a:r>
-              <a:rPr sz="1800">
-                <a:solidFill>
-                  <a:srgbClr val="000000"/>
-                </a:solidFill>
-                <a:latin typeface="Play"/>
-                <a:ea typeface="Play"/>
-                <a:cs typeface="Play"/>
-              </a:rPr>
-              <a:t>6 недель</a:t>
-            </a:r>
-          </a:p>
-        </p:txBody>
-      </p:sp>
-      <p:sp>
-        <p:nvSpPr>
-          <p:cNvPr id="574" name="body"/>
-          <p:cNvSpPr txBox="1"/>
-          <p:nvPr/>
-        </p:nvSpPr>
-        <p:spPr>
-          <a:xfrm>
-            <a:off x="274320" y="2441185"/>
-            <a:ext cx="6792986" cy="1825193"/>
-          </a:xfrm>
-          <a:prstGeom prst="rect">
-            <a:avLst/>
-          </a:prstGeom>
-          <a:noFill/>
-        </p:spPr>
-        <p:txBody>
-          <a:bodyPr wrap="square" lIns="76200" rIns="76200" tIns="50800" bIns="50800">
-            <a:spAutoFit/>
-          </a:bodyPr>
-          <a:lstStyle/>
-          <a:p>
-            <a:pPr algn="l">
-              <a:spcAft>
-                <a:spcPts val="300"/>
-              </a:spcAft>
-              <a:defRPr sz="1800">
-                <a:solidFill>
-                  <a:srgbClr val="000000"/>
-                </a:solidFill>
-                <a:latin typeface="Play"/>
-                <a:ea typeface="Play"/>
-                <a:cs typeface="Play"/>
-              </a:defRPr>
-            </a:pPr>
-            <a:r>
-              <a:rPr sz="1800">
-                <a:solidFill>
-                  <a:srgbClr val="000000"/>
-                </a:solidFill>
-                <a:latin typeface="Play"/>
-                <a:ea typeface="Play"/>
-                <a:cs typeface="Play"/>
-              </a:rPr>
-              <a:t>• 2 команды</a:t>
-            </a:r>
-          </a:p>
-          <a:p>
-            <a:pPr algn="l">
-              <a:spcAft>
-                <a:spcPts val="300"/>
-              </a:spcAft>
-              <a:defRPr sz="1800">
-                <a:solidFill>
-                  <a:srgbClr val="000000"/>
-                </a:solidFill>
-                <a:latin typeface="Play"/>
-                <a:ea typeface="Play"/>
-                <a:cs typeface="Play"/>
-              </a:defRPr>
-            </a:pPr>
-            <a:r>
-              <a:rPr sz="1800">
-                <a:solidFill>
-                  <a:srgbClr val="000000"/>
-                </a:solidFill>
-                <a:latin typeface="Play"/>
-                <a:ea typeface="Play"/>
-                <a:cs typeface="Play"/>
-              </a:rPr>
-              <a:t>• 68 презентаций</a:t>
-            </a:r>
-          </a:p>
-          <a:p>
-            <a:pPr algn="l">
-              <a:spcAft>
-                <a:spcPts val="300"/>
-              </a:spcAft>
-              <a:defRPr sz="1800">
-                <a:solidFill>
-                  <a:srgbClr val="000000"/>
-                </a:solidFill>
-                <a:latin typeface="Play"/>
-                <a:ea typeface="Play"/>
-                <a:cs typeface="Play"/>
-              </a:defRPr>
-            </a:pPr>
-            <a:r>
-              <a:rPr sz="1800">
-                <a:solidFill>
-                  <a:srgbClr val="000000"/>
-                </a:solidFill>
-                <a:latin typeface="Play"/>
-                <a:ea typeface="Play"/>
-                <a:cs typeface="Play"/>
-              </a:rPr>
-              <a:t>• Сборка 4 мин вместо 186</a:t>
-            </a:r>
-          </a:p>
-          <a:p>
-            <a:pPr algn="l">
-              <a:spcAft>
-                <a:spcPts val="300"/>
-              </a:spcAft>
-              <a:defRPr sz="1800">
-                <a:solidFill>
-                  <a:srgbClr val="000000"/>
-                </a:solidFill>
-                <a:latin typeface="Play"/>
-                <a:ea typeface="Play"/>
-                <a:cs typeface="Play"/>
-              </a:defRPr>
-            </a:pPr>
-            <a:r>
-              <a:rPr sz="1800">
-                <a:solidFill>
-                  <a:srgbClr val="000000"/>
-                </a:solidFill>
-                <a:latin typeface="Play"/>
-                <a:ea typeface="Play"/>
-                <a:cs typeface="Play"/>
-              </a:rPr>
-              <a:t>• Время до первой версии 1 день вместо 6</a:t>
-            </a:r>
-          </a:p>
-          <a:p>
-            <a:pPr algn="l">
-              <a:spcAft>
-                <a:spcPts val="300"/>
-              </a:spcAft>
-              <a:defRPr sz="1800">
-                <a:solidFill>
-                  <a:srgbClr val="000000"/>
-                </a:solidFill>
-                <a:latin typeface="Play"/>
-                <a:ea typeface="Play"/>
-                <a:cs typeface="Play"/>
-              </a:defRPr>
-            </a:pPr>
-            <a:r>
-              <a:rPr sz="1800">
-                <a:solidFill>
-                  <a:srgbClr val="000000"/>
-                </a:solidFill>
-                <a:latin typeface="Play"/>
-                <a:ea typeface="Play"/>
-                <a:cs typeface="Play"/>
-              </a:rPr>
-              <a:t>• Нарушения 2 из 68, запросы 38 вместо 11</a:t>
+              <a:t>• Нарушения стиля 2 из 68, исправлены автоматически</a:t>
             </a:r>
           </a:p>
         </p:txBody>
@@ -8193,20 +8182,932 @@
         <p:nvPr/>
       </p:nvGrpSpPr>
       <p:grpSpPr/>
-      <p:sp>
-        <p:nvSpPr>
-          <p:cNvPr id="1027" name="Google Shape;1027;p65"/>
+      <p:pic>
+        <p:nvPicPr>
+          <p:cNvPr descr=" " id="2428" name="Google Shape;2428;p89"/>
+          <p:cNvPicPr preferRelativeResize="0"/>
+          <p:nvPr/>
+        </p:nvPicPr>
+        <p:blipFill rotWithShape="1">
+          <a:blip r:embed="rId2">
+            <a:alphaModFix/>
+          </a:blip>
+          <a:srcRect b="0" l="0" r="0" t="0"/>
+          <a:stretch/>
+        </p:blipFill>
+        <p:spPr>
+          <a:xfrm>
+            <a:off x="0" y="2732082"/>
+            <a:ext cx="8515008" cy="92615"/>
+          </a:xfrm>
+          <a:prstGeom prst="rect">
+            <a:avLst/>
+          </a:prstGeom>
+          <a:noFill/>
+          <a:ln>
+            <a:noFill/>
+          </a:ln>
+        </p:spPr>
+      </p:pic>
+      <p:sp>
+        <p:nvSpPr>
+          <p:cNvPr id="2429" name="Google Shape;2429;p89"/>
           <p:cNvSpPr/>
           <p:nvPr/>
         </p:nvSpPr>
         <p:spPr>
           <a:xfrm>
-            <a:off x="6064222" y="1209852"/>
-            <a:ext cx="2793985" cy="3014270"/>
+            <a:off x="553415" y="1828897"/>
+            <a:ext cx="2232516" cy="1490254"/>
+          </a:xfrm>
+          <a:prstGeom prst="rect">
+            <a:avLst/>
+          </a:prstGeom>
+          <a:noFill/>
+          <a:ln>
+            <a:noFill/>
+          </a:ln>
+        </p:spPr>
+        <p:txBody>
+          <a:bodyPr anchorCtr="0" anchor="ctr" bIns="91425" lIns="91425" spcFirstLastPara="1" rIns="91425" wrap="square" tIns="91425">
+            <a:noAutofit/>
+          </a:bodyPr>
+          <a:lstStyle/>
+          <a:p>
+            <a:pPr indent="0" lvl="0" marL="0" rtl="0" algn="l">
+              <a:spcBef>
+                <a:spcPts val="0"/>
+              </a:spcBef>
+              <a:spcAft>
+                <a:spcPts val="0"/>
+              </a:spcAft>
+              <a:buNone/>
+            </a:pPr>
+            <a:r>
+              <a:t/>
+            </a:r>
+            <a:endParaRPr/>
+          </a:p>
+        </p:txBody>
+      </p:sp>
+      <p:sp>
+        <p:nvSpPr>
+          <p:cNvPr id="2431" name="Google Shape;2431;p89"/>
+          <p:cNvSpPr/>
+          <p:nvPr/>
+        </p:nvSpPr>
+        <p:spPr>
+          <a:xfrm>
+            <a:off x="3565736" y="1828897"/>
+            <a:ext cx="2232516" cy="1490254"/>
+          </a:xfrm>
+          <a:prstGeom prst="rect">
+            <a:avLst/>
+          </a:prstGeom>
+          <a:noFill/>
+          <a:ln>
+            <a:noFill/>
+          </a:ln>
+        </p:spPr>
+        <p:txBody>
+          <a:bodyPr anchorCtr="0" anchor="ctr" bIns="91425" lIns="91425" spcFirstLastPara="1" rIns="91425" wrap="square" tIns="91425">
+            <a:noAutofit/>
+          </a:bodyPr>
+          <a:lstStyle/>
+          <a:p>
+            <a:pPr indent="0" lvl="0" marL="0" rtl="0" algn="l">
+              <a:spcBef>
+                <a:spcPts val="0"/>
+              </a:spcBef>
+              <a:spcAft>
+                <a:spcPts val="0"/>
+              </a:spcAft>
+              <a:buNone/>
+            </a:pPr>
+            <a:r>
+              <a:t/>
+            </a:r>
+            <a:endParaRPr/>
+          </a:p>
+        </p:txBody>
+      </p:sp>
+      <p:sp>
+        <p:nvSpPr>
+          <p:cNvPr id="2433" name="Google Shape;2433;p89"/>
+          <p:cNvSpPr/>
+          <p:nvPr/>
+        </p:nvSpPr>
+        <p:spPr>
+          <a:xfrm>
+            <a:off x="6578067" y="1828897"/>
+            <a:ext cx="2232516" cy="1490254"/>
+          </a:xfrm>
+          <a:prstGeom prst="rect">
+            <a:avLst/>
+          </a:prstGeom>
+          <a:noFill/>
+          <a:ln>
+            <a:noFill/>
+          </a:ln>
+        </p:spPr>
+        <p:txBody>
+          <a:bodyPr anchorCtr="0" anchor="ctr" bIns="91425" lIns="91425" spcFirstLastPara="1" rIns="91425" wrap="square" tIns="91425">
+            <a:noAutofit/>
+          </a:bodyPr>
+          <a:lstStyle/>
+          <a:p>
+            <a:pPr indent="0" lvl="0" marL="0" rtl="0" algn="l">
+              <a:spcBef>
+                <a:spcPts val="0"/>
+              </a:spcBef>
+              <a:spcAft>
+                <a:spcPts val="0"/>
+              </a:spcAft>
+              <a:buNone/>
+            </a:pPr>
+            <a:r>
+              <a:t/>
+            </a:r>
+            <a:endParaRPr/>
+          </a:p>
+        </p:txBody>
+      </p:sp>
+      <p:sp>
+        <p:nvSpPr>
+          <p:cNvPr id="2434" name="title"/>
+          <p:cNvSpPr txBox="1"/>
+          <p:nvPr/>
+        </p:nvSpPr>
+        <p:spPr>
+          <a:xfrm>
+            <a:off x="274320" y="282943"/>
+            <a:ext cx="6792986" cy="617220"/>
+          </a:xfrm>
+          <a:prstGeom prst="rect">
+            <a:avLst/>
+          </a:prstGeom>
+          <a:noFill/>
+        </p:spPr>
+        <p:txBody>
+          <a:bodyPr wrap="square" lIns="76200" rIns="76200" tIns="50800" bIns="50800">
+            <a:spAutoFit/>
+          </a:bodyPr>
+          <a:lstStyle/>
+          <a:p>
+            <a:pPr algn="l">
+              <a:spcAft>
+                <a:spcPts val="300"/>
+              </a:spcAft>
+              <a:defRPr sz="2705">
+                <a:solidFill>
+                  <a:srgbClr val="000000"/>
+                </a:solidFill>
+                <a:latin typeface="Play"/>
+                <a:ea typeface="Play"/>
+                <a:cs typeface="Play"/>
+              </a:defRPr>
+            </a:pPr>
+            <a:r>
+              <a:rPr sz="2705">
+                <a:solidFill>
+                  <a:srgbClr val="000000"/>
+                </a:solidFill>
+                <a:latin typeface="Play"/>
+                <a:ea typeface="Play"/>
+                <a:cs typeface="Play"/>
+              </a:rPr>
+              <a:t>Что мы просим решить</a:t>
+            </a:r>
+          </a:p>
+        </p:txBody>
+      </p:sp>
+      <p:sp>
+        <p:nvSpPr>
+          <p:cNvPr id="2435" name="lead"/>
+          <p:cNvSpPr txBox="1"/>
+          <p:nvPr/>
+        </p:nvSpPr>
+        <p:spPr>
+          <a:xfrm>
+            <a:off x="274320" y="1414513"/>
+            <a:ext cx="6792986" cy="447970"/>
+          </a:xfrm>
+          <a:prstGeom prst="rect">
+            <a:avLst/>
+          </a:prstGeom>
+          <a:noFill/>
+        </p:spPr>
+        <p:txBody>
+          <a:bodyPr wrap="square" lIns="76200" rIns="76200" tIns="50800" bIns="50800">
+            <a:spAutoFit/>
+          </a:bodyPr>
+          <a:lstStyle/>
+          <a:p>
+            <a:pPr algn="l">
+              <a:spcAft>
+                <a:spcPts val="300"/>
+              </a:spcAft>
+              <a:defRPr sz="1800">
+                <a:solidFill>
+                  <a:srgbClr val="000000"/>
+                </a:solidFill>
+                <a:latin typeface="Play"/>
+                <a:ea typeface="Play"/>
+                <a:cs typeface="Play"/>
+              </a:defRPr>
+            </a:pPr>
+            <a:r>
+              <a:rPr sz="1800">
+                <a:solidFill>
+                  <a:srgbClr val="000000"/>
+                </a:solidFill>
+                <a:latin typeface="Play"/>
+                <a:ea typeface="Play"/>
+                <a:cs typeface="Play"/>
+              </a:rPr>
+              <a:t>Решить о запуске сервиса на всю компанию</a:t>
+            </a:r>
+          </a:p>
+        </p:txBody>
+      </p:sp>
+      <p:sp>
+        <p:nvSpPr>
+          <p:cNvPr id="2436" name="body"/>
+          <p:cNvSpPr txBox="1"/>
+          <p:nvPr/>
+        </p:nvSpPr>
+        <p:spPr>
+          <a:xfrm>
+            <a:off x="274320" y="1941537"/>
+            <a:ext cx="6792986" cy="790535"/>
+          </a:xfrm>
+          <a:prstGeom prst="rect">
+            <a:avLst/>
+          </a:prstGeom>
+          <a:noFill/>
+        </p:spPr>
+        <p:txBody>
+          <a:bodyPr wrap="square" lIns="76200" rIns="76200" tIns="50800" bIns="50800">
+            <a:spAutoFit/>
+          </a:bodyPr>
+          <a:lstStyle/>
+          <a:p>
+            <a:pPr algn="l">
+              <a:spcAft>
+                <a:spcPts val="300"/>
+              </a:spcAft>
+              <a:defRPr sz="1200">
+                <a:solidFill>
+                  <a:srgbClr val="000000"/>
+                </a:solidFill>
+                <a:latin typeface="Play"/>
+                <a:ea typeface="Play"/>
+                <a:cs typeface="Play"/>
+              </a:defRPr>
+            </a:pPr>
+            <a:r>
+              <a:rPr sz="1200">
+                <a:solidFill>
+                  <a:srgbClr val="000000"/>
+                </a:solidFill>
+                <a:latin typeface="Play"/>
+                <a:ea typeface="Play"/>
+                <a:cs typeface="Play"/>
+              </a:rPr>
+              <a:t>• Подтвердить бюджет и ресурсы для масштабирования</a:t>
+            </a:r>
+          </a:p>
+          <a:p>
+            <a:pPr algn="l">
+              <a:spcAft>
+                <a:spcPts val="300"/>
+              </a:spcAft>
+              <a:defRPr sz="1200">
+                <a:solidFill>
+                  <a:srgbClr val="000000"/>
+                </a:solidFill>
+                <a:latin typeface="Play"/>
+                <a:ea typeface="Play"/>
+                <a:cs typeface="Play"/>
+              </a:defRPr>
+            </a:pPr>
+            <a:r>
+              <a:rPr sz="1200">
+                <a:solidFill>
+                  <a:srgbClr val="000000"/>
+                </a:solidFill>
+                <a:latin typeface="Play"/>
+                <a:ea typeface="Play"/>
+                <a:cs typeface="Play"/>
+              </a:rPr>
+              <a:t>• Определить ответственных за интеграцию с корпоративными системами</a:t>
+            </a:r>
+          </a:p>
+          <a:p>
+            <a:pPr algn="l">
+              <a:spcAft>
+                <a:spcPts val="300"/>
+              </a:spcAft>
+              <a:defRPr sz="1200">
+                <a:solidFill>
+                  <a:srgbClr val="000000"/>
+                </a:solidFill>
+                <a:latin typeface="Play"/>
+                <a:ea typeface="Play"/>
+                <a:cs typeface="Play"/>
+              </a:defRPr>
+            </a:pPr>
+            <a:r>
+              <a:rPr sz="1200">
+                <a:solidFill>
+                  <a:srgbClr val="000000"/>
+                </a:solidFill>
+                <a:latin typeface="Play"/>
+                <a:ea typeface="Play"/>
+                <a:cs typeface="Play"/>
+              </a:rPr>
+              <a:t>• Утвердить сроки внедрения в Q4 2026</a:t>
+            </a:r>
+          </a:p>
+        </p:txBody>
+      </p:sp>
+    </p:spTree>
+  </p:cSld>
+  <p:clrMapOvr>
+    <a:masterClrMapping/>
+  </p:clrMapOvr>
+</p:sld>
+</file>
+
+<file path=ppt/slides/slide62.xml><?xml version="1.0" encoding="utf-8"?>
+<p:sld xmlns:a="http://schemas.openxmlformats.org/drawingml/2006/main" xmlns:p="http://schemas.openxmlformats.org/presentationml/2006/main" xmlns:r="http://schemas.openxmlformats.org/officeDocument/2006/relationships">
+  <p:cSld>
+    <p:spTree>
+      <p:nvGrpSpPr>
+        <p:cNvPr id="1" name=""/>
+        <p:cNvGrpSpPr/>
+        <p:nvPr/>
+      </p:nvGrpSpPr>
+      <p:grpSpPr/>
+      <p:sp>
+        <p:nvSpPr>
+          <p:cNvPr id="532" name="Google Shape;532;p53"/>
+          <p:cNvSpPr/>
+          <p:nvPr/>
+        </p:nvSpPr>
+        <p:spPr>
+          <a:xfrm>
+            <a:off x="303214" y="1022533"/>
+            <a:ext cx="8451939" cy="1433588"/>
+          </a:xfrm>
+          <a:prstGeom prst="rect">
+            <a:avLst/>
+          </a:prstGeom>
+          <a:noFill/>
+          <a:ln>
+            <a:noFill/>
+          </a:ln>
+        </p:spPr>
+        <p:txBody>
+          <a:bodyPr anchorCtr="0" anchor="ctr" bIns="91425" lIns="91425" spcFirstLastPara="1" rIns="91425" wrap="square" tIns="91425">
+            <a:noAutofit/>
+          </a:bodyPr>
+          <a:lstStyle/>
+          <a:p>
+            <a:pPr indent="0" lvl="0" marL="0" rtl="0" algn="l">
+              <a:spcBef>
+                <a:spcPts val="0"/>
+              </a:spcBef>
+              <a:spcAft>
+                <a:spcPts val="0"/>
+              </a:spcAft>
+              <a:buNone/>
+            </a:pPr>
+            <a:r>
+              <a:t/>
+            </a:r>
+            <a:endParaRPr/>
+          </a:p>
+        </p:txBody>
+      </p:sp>
+      <p:sp>
+        <p:nvSpPr>
+          <p:cNvPr id="549" name="Google Shape;549;p53"/>
+          <p:cNvSpPr/>
+          <p:nvPr/>
+        </p:nvSpPr>
+        <p:spPr>
+          <a:xfrm>
+            <a:off x="7359897" y="1022533"/>
+            <a:ext cx="1395256" cy="1433588"/>
+          </a:xfrm>
+          <a:prstGeom prst="rect">
+            <a:avLst/>
+          </a:prstGeom>
+          <a:noFill/>
+          <a:ln>
+            <a:noFill/>
+          </a:ln>
+        </p:spPr>
+        <p:txBody>
+          <a:bodyPr anchorCtr="0" anchor="ctr" bIns="91425" lIns="91425" spcFirstLastPara="1" rIns="91425" wrap="square" tIns="91425">
+            <a:noAutofit/>
+          </a:bodyPr>
+          <a:lstStyle/>
+          <a:p>
+            <a:pPr indent="0" lvl="0" marL="0" rtl="0" algn="l">
+              <a:spcBef>
+                <a:spcPts val="0"/>
+              </a:spcBef>
+              <a:spcAft>
+                <a:spcPts val="0"/>
+              </a:spcAft>
+              <a:buNone/>
+            </a:pPr>
+            <a:r>
+              <a:t/>
+            </a:r>
+            <a:endParaRPr/>
+          </a:p>
+        </p:txBody>
+      </p:sp>
+      <p:sp>
+        <p:nvSpPr>
+          <p:cNvPr id="553" name="Google Shape;553;p53"/>
+          <p:cNvSpPr/>
+          <p:nvPr/>
+        </p:nvSpPr>
+        <p:spPr>
+          <a:xfrm>
+            <a:off x="276488" y="2955549"/>
+            <a:ext cx="8451939" cy="1433588"/>
+          </a:xfrm>
+          <a:prstGeom prst="rect">
+            <a:avLst/>
+          </a:prstGeom>
+          <a:noFill/>
+          <a:ln>
+            <a:noFill/>
+          </a:ln>
+        </p:spPr>
+        <p:txBody>
+          <a:bodyPr anchorCtr="0" anchor="ctr" bIns="91425" lIns="91425" spcFirstLastPara="1" rIns="91425" wrap="square" tIns="91425">
+            <a:noAutofit/>
+          </a:bodyPr>
+          <a:lstStyle/>
+          <a:p>
+            <a:pPr indent="0" lvl="0" marL="0" rtl="0" algn="l">
+              <a:spcBef>
+                <a:spcPts val="0"/>
+              </a:spcBef>
+              <a:spcAft>
+                <a:spcPts val="0"/>
+              </a:spcAft>
+              <a:buNone/>
+            </a:pPr>
+            <a:r>
+              <a:t/>
+            </a:r>
+            <a:endParaRPr/>
+          </a:p>
+        </p:txBody>
+      </p:sp>
+      <p:sp>
+        <p:nvSpPr>
+          <p:cNvPr id="554" name="Google Shape;554;p53"/>
+          <p:cNvSpPr/>
+          <p:nvPr/>
+        </p:nvSpPr>
+        <p:spPr>
+          <a:xfrm>
+            <a:off x="303214" y="2797849"/>
+            <a:ext cx="8451939" cy="1433588"/>
+          </a:xfrm>
+          <a:prstGeom prst="rect">
+            <a:avLst/>
+          </a:prstGeom>
+          <a:noFill/>
+          <a:ln>
+            <a:noFill/>
+          </a:ln>
+        </p:spPr>
+        <p:txBody>
+          <a:bodyPr anchorCtr="0" anchor="ctr" bIns="91425" lIns="91425" spcFirstLastPara="1" rIns="91425" wrap="square" tIns="91425">
+            <a:noAutofit/>
+          </a:bodyPr>
+          <a:lstStyle/>
+          <a:p>
+            <a:pPr indent="0" lvl="0" marL="0" rtl="0" algn="l">
+              <a:spcBef>
+                <a:spcPts val="0"/>
+              </a:spcBef>
+              <a:spcAft>
+                <a:spcPts val="0"/>
+              </a:spcAft>
+              <a:buNone/>
+            </a:pPr>
+            <a:r>
+              <a:t/>
+            </a:r>
+            <a:endParaRPr/>
+          </a:p>
+        </p:txBody>
+      </p:sp>
+      <p:sp>
+        <p:nvSpPr>
+          <p:cNvPr id="571" name="Google Shape;571;p53"/>
+          <p:cNvSpPr/>
+          <p:nvPr/>
+        </p:nvSpPr>
+        <p:spPr>
+          <a:xfrm>
+            <a:off x="7359897" y="2797849"/>
+            <a:ext cx="1395256" cy="1433588"/>
+          </a:xfrm>
+          <a:prstGeom prst="rect">
+            <a:avLst/>
+          </a:prstGeom>
+          <a:noFill/>
+          <a:ln>
+            <a:noFill/>
+          </a:ln>
+        </p:spPr>
+        <p:txBody>
+          <a:bodyPr anchorCtr="0" anchor="ctr" bIns="91425" lIns="91425" spcFirstLastPara="1" rIns="91425" wrap="square" tIns="91425">
+            <a:noAutofit/>
+          </a:bodyPr>
+          <a:lstStyle/>
+          <a:p>
+            <a:pPr indent="0" lvl="0" marL="0" rtl="0" algn="l">
+              <a:spcBef>
+                <a:spcPts val="0"/>
+              </a:spcBef>
+              <a:spcAft>
+                <a:spcPts val="0"/>
+              </a:spcAft>
+              <a:buNone/>
+            </a:pPr>
+            <a:r>
+              <a:t/>
+            </a:r>
+            <a:endParaRPr/>
+          </a:p>
+        </p:txBody>
+      </p:sp>
+      <p:sp>
+        <p:nvSpPr>
+          <p:cNvPr id="572" name="title"/>
+          <p:cNvSpPr txBox="1"/>
+          <p:nvPr/>
+        </p:nvSpPr>
+        <p:spPr>
+          <a:xfrm>
+            <a:off x="274320" y="282943"/>
+            <a:ext cx="6792986" cy="617220"/>
+          </a:xfrm>
+          <a:prstGeom prst="rect">
+            <a:avLst/>
+          </a:prstGeom>
+          <a:noFill/>
+        </p:spPr>
+        <p:txBody>
+          <a:bodyPr wrap="square" lIns="76200" rIns="76200" tIns="50800" bIns="50800">
+            <a:spAutoFit/>
+          </a:bodyPr>
+          <a:lstStyle/>
+          <a:p>
+            <a:pPr algn="l">
+              <a:spcAft>
+                <a:spcPts val="300"/>
+              </a:spcAft>
+              <a:defRPr sz="2705">
+                <a:solidFill>
+                  <a:srgbClr val="000000"/>
+                </a:solidFill>
+                <a:latin typeface="Play"/>
+                <a:ea typeface="Play"/>
+                <a:cs typeface="Play"/>
+              </a:defRPr>
+            </a:pPr>
+            <a:r>
+              <a:rPr sz="2705">
+                <a:solidFill>
+                  <a:srgbClr val="000000"/>
+                </a:solidFill>
+                <a:latin typeface="Play"/>
+                <a:ea typeface="Play"/>
+                <a:cs typeface="Play"/>
+              </a:rPr>
+              <a:t>Риски</a:t>
+            </a:r>
+          </a:p>
+        </p:txBody>
+      </p:sp>
+      <p:sp>
+        <p:nvSpPr>
+          <p:cNvPr id="573" name="lead"/>
+          <p:cNvSpPr txBox="1"/>
+          <p:nvPr/>
+        </p:nvSpPr>
+        <p:spPr>
+          <a:xfrm>
+            <a:off x="274320" y="1414513"/>
+            <a:ext cx="6792986" cy="1028386"/>
+          </a:xfrm>
+          <a:prstGeom prst="rect">
+            <a:avLst/>
+          </a:prstGeom>
+          <a:noFill/>
+        </p:spPr>
+        <p:txBody>
+          <a:bodyPr wrap="square" lIns="76200" rIns="76200" tIns="50800" bIns="50800">
+            <a:spAutoFit/>
+          </a:bodyPr>
+          <a:lstStyle/>
+          <a:p>
+            <a:pPr algn="ctr">
+              <a:spcAft>
+                <a:spcPts val="300"/>
+              </a:spcAft>
+              <a:defRPr sz="2705">
+                <a:solidFill>
+                  <a:srgbClr val="000000"/>
+                </a:solidFill>
+                <a:latin typeface="Play"/>
+                <a:ea typeface="Play"/>
+                <a:cs typeface="Play"/>
+              </a:defRPr>
+            </a:pPr>
+            <a:r>
+              <a:rPr sz="2705">
+                <a:solidFill>
+                  <a:srgbClr val="000000"/>
+                </a:solidFill>
+                <a:latin typeface="Play"/>
+                <a:ea typeface="Play"/>
+                <a:cs typeface="Play"/>
+              </a:rPr>
+              <a:t>Слабая модель может выдумать цифры, аудит проверяет каждое число</a:t>
+            </a:r>
+          </a:p>
+        </p:txBody>
+      </p:sp>
+      <p:sp>
+        <p:nvSpPr>
+          <p:cNvPr id="574" name="body"/>
+          <p:cNvSpPr txBox="1"/>
+          <p:nvPr/>
+        </p:nvSpPr>
+        <p:spPr>
+          <a:xfrm>
+            <a:off x="274320" y="2614012"/>
+            <a:ext cx="6792986" cy="1652366"/>
+          </a:xfrm>
+          <a:prstGeom prst="rect">
+            <a:avLst/>
+          </a:prstGeom>
+          <a:noFill/>
+        </p:spPr>
+        <p:txBody>
+          <a:bodyPr wrap="square" lIns="76200" rIns="76200" tIns="50800" bIns="50800">
+            <a:spAutoFit/>
+          </a:bodyPr>
+          <a:lstStyle/>
+          <a:p>
+            <a:pPr algn="l">
+              <a:spcAft>
+                <a:spcPts val="300"/>
+              </a:spcAft>
+              <a:defRPr sz="1800">
+                <a:solidFill>
+                  <a:srgbClr val="000000"/>
+                </a:solidFill>
+                <a:latin typeface="Play"/>
+                <a:ea typeface="Play"/>
+                <a:cs typeface="Play"/>
+              </a:defRPr>
+            </a:pPr>
+            <a:r>
+              <a:rPr sz="1800">
+                <a:solidFill>
+                  <a:srgbClr val="000000"/>
+                </a:solidFill>
+                <a:latin typeface="Play"/>
+                <a:ea typeface="Play"/>
+                <a:cs typeface="Play"/>
+              </a:rPr>
+              <a:t>• Неправильный шаблон может привести к плохому дизайну, сервис использует рабочую область</a:t>
+            </a:r>
+          </a:p>
+          <a:p>
+            <a:pPr algn="l">
+              <a:spcAft>
+                <a:spcPts val="300"/>
+              </a:spcAft>
+              <a:defRPr sz="1800">
+                <a:solidFill>
+                  <a:srgbClr val="000000"/>
+                </a:solidFill>
+                <a:latin typeface="Play"/>
+                <a:ea typeface="Play"/>
+                <a:cs typeface="Play"/>
+              </a:defRPr>
+            </a:pPr>
+            <a:r>
+              <a:rPr sz="1800">
+                <a:solidFill>
+                  <a:srgbClr val="000000"/>
+                </a:solidFill>
+                <a:latin typeface="Play"/>
+                <a:ea typeface="Play"/>
+                <a:cs typeface="Play"/>
+              </a:rPr>
+              <a:t>• Нагрузка выше 20 задач требует внешней очереди</a:t>
+            </a:r>
+          </a:p>
+          <a:p>
+            <a:pPr algn="l">
+              <a:spcAft>
+                <a:spcPts val="300"/>
+              </a:spcAft>
+              <a:defRPr sz="1800">
+                <a:solidFill>
+                  <a:srgbClr val="000000"/>
+                </a:solidFill>
+                <a:latin typeface="Play"/>
+                <a:ea typeface="Play"/>
+                <a:cs typeface="Play"/>
+              </a:defRPr>
+            </a:pPr>
+            <a:r>
+              <a:rPr sz="1800">
+                <a:solidFill>
+                  <a:srgbClr val="000000"/>
+                </a:solidFill>
+                <a:latin typeface="Play"/>
+                <a:ea typeface="Play"/>
+                <a:cs typeface="Play"/>
+              </a:rPr>
+              <a:t>• Зависимость от OpenAI‑совместимого протокола может ограничить масштаб</a:t>
+            </a:r>
+          </a:p>
+        </p:txBody>
+      </p:sp>
+    </p:spTree>
+  </p:cSld>
+  <p:clrMapOvr>
+    <a:masterClrMapping/>
+  </p:clrMapOvr>
+</p:sld>
+</file>
+
+<file path=ppt/slides/slide63.xml><?xml version="1.0" encoding="utf-8"?>
+<p:sld xmlns:a="http://schemas.openxmlformats.org/drawingml/2006/main" xmlns:p="http://schemas.openxmlformats.org/presentationml/2006/main" xmlns:r="http://schemas.openxmlformats.org/officeDocument/2006/relationships">
+  <p:cSld>
+    <p:spTree>
+      <p:nvGrpSpPr>
+        <p:cNvPr id="1" name=""/>
+        <p:cNvGrpSpPr/>
+        <p:nvPr/>
+      </p:nvGrpSpPr>
+      <p:grpSpPr/>
+      <p:sp>
+        <p:nvSpPr>
+          <p:cNvPr id="662" name="Google Shape;662;p55"/>
+          <p:cNvSpPr/>
+          <p:nvPr/>
+        </p:nvSpPr>
+        <p:spPr>
+          <a:xfrm>
+            <a:off x="8667705" y="4666977"/>
+            <a:ext cx="190499" cy="190475"/>
+          </a:xfrm>
+          <a:prstGeom prst="rect">
+            <a:avLst/>
+          </a:prstGeom>
+          <a:noFill/>
+          <a:ln>
+            <a:noFill/>
+          </a:ln>
+        </p:spPr>
+        <p:txBody>
+          <a:bodyPr anchorCtr="0" anchor="ctr" bIns="91425" lIns="91425" spcFirstLastPara="1" rIns="91425" wrap="square" tIns="91425">
+            <a:noAutofit/>
+          </a:bodyPr>
+          <a:lstStyle/>
+          <a:p>
+            <a:pPr indent="0" lvl="0" marL="0" rtl="0" algn="l">
+              <a:spcBef>
+                <a:spcPts val="0"/>
+              </a:spcBef>
+              <a:spcAft>
+                <a:spcPts val="0"/>
+              </a:spcAft>
+              <a:buNone/>
+            </a:pPr>
+            <a:r>
+              <a:t/>
+            </a:r>
+            <a:endParaRPr/>
+          </a:p>
+        </p:txBody>
+      </p:sp>
+      <p:sp>
+        <p:nvSpPr>
+          <p:cNvPr id="663" name="Google Shape;663;p55"/>
+          <p:cNvSpPr/>
+          <p:nvPr/>
+        </p:nvSpPr>
+        <p:spPr>
+          <a:xfrm>
+            <a:off x="285748" y="286047"/>
+            <a:ext cx="8572456" cy="3938075"/>
+          </a:xfrm>
+          <a:prstGeom prst="rect">
+            <a:avLst/>
+          </a:prstGeom>
+          <a:noFill/>
+          <a:ln>
+            <a:noFill/>
+          </a:ln>
+        </p:spPr>
+        <p:txBody>
+          <a:bodyPr anchorCtr="0" anchor="ctr" bIns="91425" lIns="91425" spcFirstLastPara="1" rIns="91425" wrap="square" tIns="91425">
+            <a:noAutofit/>
+          </a:bodyPr>
+          <a:lstStyle/>
+          <a:p>
+            <a:pPr indent="0" lvl="0" marL="0" rtl="0" algn="l">
+              <a:spcBef>
+                <a:spcPts val="0"/>
+              </a:spcBef>
+              <a:spcAft>
+                <a:spcPts val="0"/>
+              </a:spcAft>
+              <a:buNone/>
+            </a:pPr>
+            <a:r>
+              <a:t/>
+            </a:r>
+            <a:endParaRPr/>
+          </a:p>
+        </p:txBody>
+      </p:sp>
+      <p:sp>
+        <p:nvSpPr>
+          <p:cNvPr id="664" name="Google Shape;664;p55"/>
+          <p:cNvSpPr/>
+          <p:nvPr/>
+        </p:nvSpPr>
+        <p:spPr>
+          <a:xfrm>
+            <a:off x="285748" y="1209852"/>
+            <a:ext cx="8572456" cy="3014270"/>
+          </a:xfrm>
+          <a:prstGeom prst="rect">
+            <a:avLst/>
+          </a:prstGeom>
+          <a:noFill/>
+          <a:ln>
+            <a:noFill/>
+          </a:ln>
+        </p:spPr>
+        <p:txBody>
+          <a:bodyPr anchorCtr="0" anchor="ctr" bIns="91425" lIns="91425" spcFirstLastPara="1" rIns="91425" wrap="square" tIns="91425">
+            <a:noAutofit/>
+          </a:bodyPr>
+          <a:lstStyle/>
+          <a:p>
+            <a:pPr indent="0" lvl="0" marL="0" rtl="0" algn="l">
+              <a:spcBef>
+                <a:spcPts val="0"/>
+              </a:spcBef>
+              <a:spcAft>
+                <a:spcPts val="0"/>
+              </a:spcAft>
+              <a:buNone/>
+            </a:pPr>
+            <a:r>
+              <a:t/>
+            </a:r>
+            <a:endParaRPr/>
+          </a:p>
+        </p:txBody>
+      </p:sp>
+      <p:sp>
+        <p:nvSpPr>
+          <p:cNvPr id="665" name="Google Shape;665;p55"/>
+          <p:cNvSpPr/>
+          <p:nvPr/>
+        </p:nvSpPr>
+        <p:spPr>
+          <a:xfrm>
+            <a:off x="285749" y="1209852"/>
+            <a:ext cx="2071677" cy="3014270"/>
           </a:xfrm>
           <a:prstGeom prst="roundRect">
             <a:avLst>
-              <a:gd fmla="val 3436" name="adj"/>
+              <a:gd fmla="val 4634" name="adj"/>
             </a:avLst>
           </a:prstGeom>
           <a:solidFill>
@@ -8240,185 +9141,13 @@
       </p:sp>
       <p:sp>
         <p:nvSpPr>
-          <p:cNvPr id="1029" name="Google Shape;1029;p65"/>
+          <p:cNvPr id="667" name="Google Shape;667;p55"/>
           <p:cNvSpPr/>
           <p:nvPr/>
         </p:nvSpPr>
         <p:spPr>
           <a:xfrm>
-            <a:off x="3174981" y="1209852"/>
-            <a:ext cx="2793985" cy="3014270"/>
-          </a:xfrm>
-          <a:prstGeom prst="roundRect">
-            <a:avLst>
-              <a:gd fmla="val 3436" name="adj"/>
-            </a:avLst>
-          </a:prstGeom>
-          <a:solidFill>
-            <a:schemeClr val="lt2"/>
-          </a:solidFill>
-          <a:ln>
-            <a:noFill/>
-          </a:ln>
-        </p:spPr>
-        <p:txBody>
-          <a:bodyPr anchorCtr="0" anchor="ctr" bIns="91425" lIns="91425" spcFirstLastPara="1" rIns="91425" wrap="square" tIns="91425">
-            <a:noAutofit/>
-          </a:bodyPr>
-          <a:lstStyle/>
-          <a:p>
-            <a:pPr indent="0" lvl="0" marL="0" rtl="0" algn="l">
-              <a:spcBef>
-                <a:spcPts val="0"/>
-              </a:spcBef>
-              <a:spcAft>
-                <a:spcPts val="0"/>
-              </a:spcAft>
-              <a:buNone/>
-            </a:pPr>
-            <a:r>
-              <a:t/>
-            </a:r>
-            <a:endParaRPr/>
-          </a:p>
-        </p:txBody>
-      </p:sp>
-      <p:sp>
-        <p:nvSpPr>
-          <p:cNvPr id="1031" name="Google Shape;1031;p65"/>
-          <p:cNvSpPr/>
-          <p:nvPr/>
-        </p:nvSpPr>
-        <p:spPr>
-          <a:xfrm>
-            <a:off x="285749" y="1209852"/>
-            <a:ext cx="2793985" cy="3014270"/>
-          </a:xfrm>
-          <a:prstGeom prst="roundRect">
-            <a:avLst>
-              <a:gd fmla="val 3436" name="adj"/>
-            </a:avLst>
-          </a:prstGeom>
-          <a:solidFill>
-            <a:schemeClr val="lt2"/>
-          </a:solidFill>
-          <a:ln>
-            <a:noFill/>
-          </a:ln>
-        </p:spPr>
-        <p:txBody>
-          <a:bodyPr anchorCtr="0" anchor="ctr" bIns="91425" lIns="91425" spcFirstLastPara="1" rIns="91425" wrap="square" tIns="91425">
-            <a:noAutofit/>
-          </a:bodyPr>
-          <a:lstStyle/>
-          <a:p>
-            <a:pPr indent="0" lvl="0" marL="0" rtl="0" algn="l">
-              <a:spcBef>
-                <a:spcPts val="0"/>
-              </a:spcBef>
-              <a:spcAft>
-                <a:spcPts val="0"/>
-              </a:spcAft>
-              <a:buNone/>
-            </a:pPr>
-            <a:r>
-              <a:t/>
-            </a:r>
-            <a:endParaRPr/>
-          </a:p>
-        </p:txBody>
-      </p:sp>
-      <p:sp>
-        <p:nvSpPr>
-          <p:cNvPr id="1032" name="Google Shape;1032;p65"/>
-          <p:cNvSpPr/>
-          <p:nvPr/>
-        </p:nvSpPr>
-        <p:spPr>
-          <a:xfrm>
-            <a:off x="285748" y="286047"/>
-            <a:ext cx="8572456" cy="3938075"/>
-          </a:xfrm>
-          <a:prstGeom prst="rect">
-            <a:avLst/>
-          </a:prstGeom>
-          <a:noFill/>
-          <a:ln>
-            <a:noFill/>
-          </a:ln>
-        </p:spPr>
-        <p:txBody>
-          <a:bodyPr anchorCtr="0" anchor="ctr" bIns="91425" lIns="91425" spcFirstLastPara="1" rIns="91425" wrap="square" tIns="91425">
-            <a:noAutofit/>
-          </a:bodyPr>
-          <a:lstStyle/>
-          <a:p>
-            <a:pPr indent="0" lvl="0" marL="0" rtl="0" algn="l">
-              <a:spcBef>
-                <a:spcPts val="0"/>
-              </a:spcBef>
-              <a:spcAft>
-                <a:spcPts val="0"/>
-              </a:spcAft>
-              <a:buNone/>
-            </a:pPr>
-            <a:r>
-              <a:t/>
-            </a:r>
-            <a:endParaRPr/>
-          </a:p>
-        </p:txBody>
-      </p:sp>
-      <p:sp>
-        <p:nvSpPr>
-          <p:cNvPr id="1033" name="Google Shape;1033;p65"/>
-          <p:cNvSpPr/>
-          <p:nvPr/>
-        </p:nvSpPr>
-        <p:spPr>
-          <a:xfrm>
-            <a:off x="285748" y="1209852"/>
-            <a:ext cx="8572456" cy="3014270"/>
-          </a:xfrm>
-          <a:prstGeom prst="rect">
-            <a:avLst/>
-          </a:prstGeom>
-          <a:noFill/>
-          <a:ln>
-            <a:noFill/>
-          </a:ln>
-        </p:spPr>
-        <p:txBody>
-          <a:bodyPr anchorCtr="0" anchor="ctr" bIns="91425" lIns="91425" spcFirstLastPara="1" rIns="91425" wrap="square" tIns="91425">
-            <a:noAutofit/>
-          </a:bodyPr>
-          <a:lstStyle/>
-          <a:p>
-            <a:pPr indent="0" lvl="0" marL="0" rtl="0" algn="l">
-              <a:spcBef>
-                <a:spcPts val="0"/>
-              </a:spcBef>
-              <a:spcAft>
-                <a:spcPts val="0"/>
-              </a:spcAft>
-              <a:buNone/>
-            </a:pPr>
-            <a:r>
-              <a:t/>
-            </a:r>
-            <a:endParaRPr/>
-          </a:p>
-        </p:txBody>
-      </p:sp>
-      <p:sp>
-        <p:nvSpPr>
-          <p:cNvPr id="1035" name="Google Shape;1035;p65"/>
-          <p:cNvSpPr/>
-          <p:nvPr/>
-        </p:nvSpPr>
-        <p:spPr>
-          <a:xfrm>
-            <a:off x="476248" y="1400328"/>
+            <a:off x="438148" y="1362233"/>
             <a:ext cx="76199" cy="76190"/>
           </a:xfrm>
           <a:prstGeom prst="roundRect">
@@ -8457,13 +9186,58 @@
       </p:sp>
       <p:sp>
         <p:nvSpPr>
-          <p:cNvPr id="1041" name="Google Shape;1041;p65"/>
+          <p:cNvPr id="670" name="Google Shape;670;p55"/>
           <p:cNvSpPr/>
           <p:nvPr/>
         </p:nvSpPr>
         <p:spPr>
           <a:xfrm>
-            <a:off x="3365480" y="1400328"/>
+            <a:off x="2452675" y="1209852"/>
+            <a:ext cx="2071677" cy="3014270"/>
+          </a:xfrm>
+          <a:prstGeom prst="roundRect">
+            <a:avLst>
+              <a:gd fmla="val 4634" name="adj"/>
+            </a:avLst>
+          </a:prstGeom>
+          <a:solidFill>
+            <a:schemeClr val="lt2"/>
+          </a:solidFill>
+          <a:ln>
+            <a:noFill/>
+          </a:ln>
+        </p:spPr>
+        <p:txBody>
+          <a:bodyPr anchorCtr="0" anchor="ctr" bIns="91425" lIns="91425" spcFirstLastPara="1" rIns="91425" wrap="square" tIns="91425">
+            <a:noAutofit/>
+          </a:bodyPr>
+          <a:lstStyle/>
+          <a:p>
+            <a:pPr indent="0" lvl="0" marL="0" rtl="0" algn="l">
+              <a:spcBef>
+                <a:spcPts val="0"/>
+              </a:spcBef>
+              <a:spcAft>
+                <a:spcPts val="0"/>
+              </a:spcAft>
+              <a:buNone/>
+            </a:pPr>
+            <a:r>
+              <a:t/>
+            </a:r>
+            <a:endParaRPr/>
+          </a:p>
+        </p:txBody>
+      </p:sp>
+      <p:sp>
+        <p:nvSpPr>
+          <p:cNvPr id="672" name="Google Shape;672;p55"/>
+          <p:cNvSpPr/>
+          <p:nvPr/>
+        </p:nvSpPr>
+        <p:spPr>
+          <a:xfrm>
+            <a:off x="2605074" y="1362233"/>
             <a:ext cx="76199" cy="76190"/>
           </a:xfrm>
           <a:prstGeom prst="roundRect">
@@ -8502,13 +9276,58 @@
       </p:sp>
       <p:sp>
         <p:nvSpPr>
-          <p:cNvPr id="1046" name="Google Shape;1046;p65"/>
+          <p:cNvPr id="675" name="Google Shape;675;p55"/>
           <p:cNvSpPr/>
           <p:nvPr/>
         </p:nvSpPr>
         <p:spPr>
           <a:xfrm>
-            <a:off x="6254721" y="1400328"/>
+            <a:off x="4619601" y="1209852"/>
+            <a:ext cx="2071677" cy="3014270"/>
+          </a:xfrm>
+          <a:prstGeom prst="roundRect">
+            <a:avLst>
+              <a:gd fmla="val 4634" name="adj"/>
+            </a:avLst>
+          </a:prstGeom>
+          <a:solidFill>
+            <a:schemeClr val="lt2"/>
+          </a:solidFill>
+          <a:ln>
+            <a:noFill/>
+          </a:ln>
+        </p:spPr>
+        <p:txBody>
+          <a:bodyPr anchorCtr="0" anchor="ctr" bIns="91425" lIns="91425" spcFirstLastPara="1" rIns="91425" wrap="square" tIns="91425">
+            <a:noAutofit/>
+          </a:bodyPr>
+          <a:lstStyle/>
+          <a:p>
+            <a:pPr indent="0" lvl="0" marL="0" rtl="0" algn="l">
+              <a:spcBef>
+                <a:spcPts val="0"/>
+              </a:spcBef>
+              <a:spcAft>
+                <a:spcPts val="0"/>
+              </a:spcAft>
+              <a:buNone/>
+            </a:pPr>
+            <a:r>
+              <a:t/>
+            </a:r>
+            <a:endParaRPr/>
+          </a:p>
+        </p:txBody>
+      </p:sp>
+      <p:sp>
+        <p:nvSpPr>
+          <p:cNvPr id="677" name="Google Shape;677;p55"/>
+          <p:cNvSpPr/>
+          <p:nvPr/>
+        </p:nvSpPr>
+        <p:spPr>
+          <a:xfrm>
+            <a:off x="4772001" y="1362233"/>
             <a:ext cx="76199" cy="76190"/>
           </a:xfrm>
           <a:prstGeom prst="roundRect">
@@ -8547,726 +9366,18 @@
       </p:sp>
       <p:sp>
         <p:nvSpPr>
-          <p:cNvPr id="1047" name="title"/>
-          <p:cNvSpPr txBox="1"/>
-          <p:nvPr/>
-        </p:nvSpPr>
-        <p:spPr>
-          <a:xfrm>
-            <a:off x="274320" y="282943"/>
-            <a:ext cx="6792986" cy="617220"/>
-          </a:xfrm>
-          <a:prstGeom prst="rect">
-            <a:avLst/>
-          </a:prstGeom>
-          <a:noFill/>
-        </p:spPr>
-        <p:txBody>
-          <a:bodyPr wrap="square" lIns="76200" rIns="76200" tIns="50800" bIns="50800">
-            <a:spAutoFit/>
-          </a:bodyPr>
-          <a:lstStyle/>
-          <a:p>
-            <a:pPr algn="l">
-              <a:spcAft>
-                <a:spcPts val="300"/>
-              </a:spcAft>
-              <a:defRPr sz="2705">
-                <a:solidFill>
-                  <a:srgbClr val="000000"/>
-                </a:solidFill>
-                <a:latin typeface="Play"/>
-                <a:ea typeface="Play"/>
-                <a:cs typeface="Play"/>
-              </a:defRPr>
-            </a:pPr>
-            <a:r>
-              <a:rPr sz="2705">
-                <a:solidFill>
-                  <a:srgbClr val="000000"/>
-                </a:solidFill>
-                <a:latin typeface="Play"/>
-                <a:ea typeface="Play"/>
-                <a:cs typeface="Play"/>
-              </a:rPr>
-              <a:t>Риски</a:t>
-            </a:r>
-          </a:p>
-        </p:txBody>
-      </p:sp>
-      <p:sp>
-        <p:nvSpPr>
-          <p:cNvPr id="1048" name="Oval 1047"/>
+          <p:cNvPr id="680" name="Google Shape;680;p55"/>
           <p:cNvSpPr/>
           <p:nvPr/>
         </p:nvSpPr>
         <p:spPr>
           <a:xfrm>
-            <a:off x="1411519" y="1530621"/>
-            <a:ext cx="433029" cy="433029"/>
-          </a:xfrm>
-          <a:prstGeom prst="ellipse">
-            <a:avLst/>
-          </a:prstGeom>
-          <a:solidFill>
-            <a:srgbClr val="0077FF"/>
-          </a:solidFill>
-          <a:ln>
-            <a:noFill/>
-          </a:ln>
-        </p:spPr>
-        <p:style>
-          <a:lnRef idx="1">
-            <a:schemeClr val="accent1"/>
-          </a:lnRef>
-          <a:fillRef idx="3">
-            <a:schemeClr val="accent1"/>
-          </a:fillRef>
-          <a:effectRef idx="2">
-            <a:schemeClr val="accent1"/>
-          </a:effectRef>
-          <a:fontRef idx="minor">
-            <a:schemeClr val="lt1"/>
-          </a:fontRef>
-        </p:style>
-        <p:txBody>
-          <a:bodyPr rtlCol="0" anchor="ctr"/>
-          <a:lstStyle/>
-          <a:p>
-            <a:pPr algn="ctr"/>
-          </a:p>
-        </p:txBody>
-      </p:sp>
-      <p:sp>
-        <p:nvSpPr>
-          <p:cNvPr id="1049" name="TextBox 1048"/>
-          <p:cNvSpPr txBox="1"/>
-          <p:nvPr/>
-        </p:nvSpPr>
-        <p:spPr>
-          <a:xfrm>
-            <a:off x="274320" y="2076828"/>
-            <a:ext cx="2707428" cy="383821"/>
-          </a:xfrm>
-          <a:prstGeom prst="rect">
-            <a:avLst/>
-          </a:prstGeom>
-          <a:noFill/>
-        </p:spPr>
-        <p:txBody>
-          <a:bodyPr wrap="square">
-            <a:spAutoFit/>
-          </a:bodyPr>
-          <a:lstStyle/>
-          <a:p>
-            <a:pPr algn="ctr">
-              <a:defRPr sz="1200" b="0">
-                <a:solidFill>
-                  <a:srgbClr val="000000"/>
-                </a:solidFill>
-                <a:latin typeface="Play"/>
-                <a:ea typeface="Play"/>
-                <a:cs typeface="Play"/>
-              </a:defRPr>
-            </a:pPr>
-            <a:r>
-              <a:rPr sz="1200" b="0">
-                <a:solidFill>
-                  <a:srgbClr val="000000"/>
-                </a:solidFill>
-                <a:latin typeface="Play"/>
-                <a:ea typeface="Play"/>
-                <a:cs typeface="Play"/>
-              </a:rPr>
-              <a:t>Слабая модель может выдумать цифры</a:t>
-            </a:r>
-          </a:p>
-        </p:txBody>
-      </p:sp>
-      <p:sp>
-        <p:nvSpPr>
-          <p:cNvPr id="1050" name="Document 1049"/>
-          <p:cNvSpPr/>
-          <p:nvPr/>
-        </p:nvSpPr>
-        <p:spPr>
-          <a:xfrm>
-            <a:off x="4241038" y="1519795"/>
-            <a:ext cx="411377" cy="454680"/>
-          </a:xfrm>
-          <a:prstGeom prst="flowChartDocument">
-            <a:avLst/>
-          </a:prstGeom>
-          <a:solidFill>
-            <a:srgbClr val="0077FF"/>
-          </a:solidFill>
-          <a:ln>
-            <a:noFill/>
-          </a:ln>
-        </p:spPr>
-        <p:style>
-          <a:lnRef idx="1">
-            <a:schemeClr val="accent1"/>
-          </a:lnRef>
-          <a:fillRef idx="3">
-            <a:schemeClr val="accent1"/>
-          </a:fillRef>
-          <a:effectRef idx="2">
-            <a:schemeClr val="accent1"/>
-          </a:effectRef>
-          <a:fontRef idx="minor">
-            <a:schemeClr val="lt1"/>
-          </a:fontRef>
-        </p:style>
-        <p:txBody>
-          <a:bodyPr rtlCol="0" anchor="ctr"/>
-          <a:lstStyle/>
-          <a:p>
-            <a:pPr algn="ctr"/>
-          </a:p>
-        </p:txBody>
-      </p:sp>
-      <p:sp>
-        <p:nvSpPr>
-          <p:cNvPr id="1051" name="TextBox 1050"/>
-          <p:cNvSpPr txBox="1"/>
-          <p:nvPr/>
-        </p:nvSpPr>
-        <p:spPr>
-          <a:xfrm>
-            <a:off x="3093012" y="2076828"/>
-            <a:ext cx="2707428" cy="383821"/>
-          </a:xfrm>
-          <a:prstGeom prst="rect">
-            <a:avLst/>
-          </a:prstGeom>
-          <a:noFill/>
-        </p:spPr>
-        <p:txBody>
-          <a:bodyPr wrap="square">
-            <a:spAutoFit/>
-          </a:bodyPr>
-          <a:lstStyle/>
-          <a:p>
-            <a:pPr algn="ctr">
-              <a:defRPr sz="1200" b="0">
-                <a:solidFill>
-                  <a:srgbClr val="000000"/>
-                </a:solidFill>
-                <a:latin typeface="Play"/>
-                <a:ea typeface="Play"/>
-                <a:cs typeface="Play"/>
-              </a:defRPr>
-            </a:pPr>
-            <a:r>
-              <a:rPr sz="1200" b="0">
-                <a:solidFill>
-                  <a:srgbClr val="000000"/>
-                </a:solidFill>
-                <a:latin typeface="Play"/>
-                <a:ea typeface="Play"/>
-                <a:cs typeface="Play"/>
-              </a:rPr>
-              <a:t>Незнакомый шаблон может быть плохо сделан</a:t>
-            </a:r>
-          </a:p>
-        </p:txBody>
-      </p:sp>
-      <p:sp>
-        <p:nvSpPr>
-          <p:cNvPr id="1052" name="Oval 1051"/>
-          <p:cNvSpPr/>
-          <p:nvPr/>
-        </p:nvSpPr>
-        <p:spPr>
-          <a:xfrm>
-            <a:off x="7016428" y="1498144"/>
-            <a:ext cx="497983" cy="497983"/>
-          </a:xfrm>
-          <a:prstGeom prst="ellipse">
-            <a:avLst/>
-          </a:prstGeom>
-          <a:solidFill>
-            <a:srgbClr val="0077FF"/>
-          </a:solidFill>
-          <a:ln>
-            <a:noFill/>
-          </a:ln>
-        </p:spPr>
-        <p:style>
-          <a:lnRef idx="1">
-            <a:schemeClr val="accent1"/>
-          </a:lnRef>
-          <a:fillRef idx="3">
-            <a:schemeClr val="accent1"/>
-          </a:fillRef>
-          <a:effectRef idx="2">
-            <a:schemeClr val="accent1"/>
-          </a:effectRef>
-          <a:fontRef idx="minor">
-            <a:schemeClr val="lt1"/>
-          </a:fontRef>
-        </p:style>
-        <p:txBody>
-          <a:bodyPr rtlCol="0" anchor="ctr"/>
-          <a:lstStyle/>
-          <a:p>
-            <a:pPr algn="ctr"/>
-          </a:p>
-        </p:txBody>
-      </p:sp>
-      <p:sp>
-        <p:nvSpPr>
-          <p:cNvPr id="1053" name="Oval 1052"/>
-          <p:cNvSpPr/>
-          <p:nvPr/>
-        </p:nvSpPr>
-        <p:spPr>
-          <a:xfrm>
-            <a:off x="7103033" y="1584750"/>
-            <a:ext cx="324771" cy="324771"/>
-          </a:xfrm>
-          <a:prstGeom prst="ellipse">
-            <a:avLst/>
-          </a:prstGeom>
-          <a:solidFill>
-            <a:srgbClr val="FFFFFF"/>
-          </a:solidFill>
-          <a:ln>
-            <a:noFill/>
-          </a:ln>
-        </p:spPr>
-        <p:style>
-          <a:lnRef idx="1">
-            <a:schemeClr val="accent1"/>
-          </a:lnRef>
-          <a:fillRef idx="3">
-            <a:schemeClr val="accent1"/>
-          </a:fillRef>
-          <a:effectRef idx="2">
-            <a:schemeClr val="accent1"/>
-          </a:effectRef>
-          <a:fontRef idx="minor">
-            <a:schemeClr val="lt1"/>
-          </a:fontRef>
-        </p:style>
-        <p:txBody>
-          <a:bodyPr rtlCol="0" anchor="ctr"/>
-          <a:lstStyle/>
-          <a:p>
-            <a:pPr algn="ctr"/>
-          </a:p>
-        </p:txBody>
-      </p:sp>
-      <p:sp>
-        <p:nvSpPr>
-          <p:cNvPr id="1054" name="Oval 1053"/>
-          <p:cNvSpPr/>
-          <p:nvPr/>
-        </p:nvSpPr>
-        <p:spPr>
-          <a:xfrm>
-            <a:off x="7178813" y="1660530"/>
-            <a:ext cx="173211" cy="173211"/>
-          </a:xfrm>
-          <a:prstGeom prst="ellipse">
-            <a:avLst/>
-          </a:prstGeom>
-          <a:solidFill>
-            <a:srgbClr val="0077FF"/>
-          </a:solidFill>
-          <a:ln>
-            <a:noFill/>
-          </a:ln>
-        </p:spPr>
-        <p:style>
-          <a:lnRef idx="1">
-            <a:schemeClr val="accent1"/>
-          </a:lnRef>
-          <a:fillRef idx="3">
-            <a:schemeClr val="accent1"/>
-          </a:fillRef>
-          <a:effectRef idx="2">
-            <a:schemeClr val="accent1"/>
-          </a:effectRef>
-          <a:fontRef idx="minor">
-            <a:schemeClr val="lt1"/>
-          </a:fontRef>
-        </p:style>
-        <p:txBody>
-          <a:bodyPr rtlCol="0" anchor="ctr"/>
-          <a:lstStyle/>
-          <a:p>
-            <a:pPr algn="ctr"/>
-          </a:p>
-        </p:txBody>
-      </p:sp>
-      <p:sp>
-        <p:nvSpPr>
-          <p:cNvPr id="1055" name="Oval 1054"/>
-          <p:cNvSpPr/>
-          <p:nvPr/>
-        </p:nvSpPr>
-        <p:spPr>
-          <a:xfrm>
-            <a:off x="7232942" y="1714658"/>
-            <a:ext cx="64954" cy="64954"/>
-          </a:xfrm>
-          <a:prstGeom prst="ellipse">
-            <a:avLst/>
-          </a:prstGeom>
-          <a:solidFill>
-            <a:srgbClr val="FFFFFF"/>
-          </a:solidFill>
-          <a:ln>
-            <a:noFill/>
-          </a:ln>
-        </p:spPr>
-        <p:style>
-          <a:lnRef idx="1">
-            <a:schemeClr val="accent1"/>
-          </a:lnRef>
-          <a:fillRef idx="3">
-            <a:schemeClr val="accent1"/>
-          </a:fillRef>
-          <a:effectRef idx="2">
-            <a:schemeClr val="accent1"/>
-          </a:effectRef>
-          <a:fontRef idx="minor">
-            <a:schemeClr val="lt1"/>
-          </a:fontRef>
-        </p:style>
-        <p:txBody>
-          <a:bodyPr rtlCol="0" anchor="ctr"/>
-          <a:lstStyle/>
-          <a:p>
-            <a:pPr algn="ctr"/>
-          </a:p>
-        </p:txBody>
-      </p:sp>
-      <p:sp>
-        <p:nvSpPr>
-          <p:cNvPr id="1056" name="TextBox 1055"/>
-          <p:cNvSpPr txBox="1"/>
-          <p:nvPr/>
-        </p:nvSpPr>
-        <p:spPr>
-          <a:xfrm>
-            <a:off x="5911705" y="2076828"/>
-            <a:ext cx="2707428" cy="383821"/>
-          </a:xfrm>
-          <a:prstGeom prst="rect">
-            <a:avLst/>
-          </a:prstGeom>
-          <a:noFill/>
-        </p:spPr>
-        <p:txBody>
-          <a:bodyPr wrap="square">
-            <a:spAutoFit/>
-          </a:bodyPr>
-          <a:lstStyle/>
-          <a:p>
-            <a:pPr algn="ctr">
-              <a:defRPr sz="1200" b="0">
-                <a:solidFill>
-                  <a:srgbClr val="000000"/>
-                </a:solidFill>
-                <a:latin typeface="Play"/>
-                <a:ea typeface="Play"/>
-                <a:cs typeface="Play"/>
-              </a:defRPr>
-            </a:pPr>
-            <a:r>
-              <a:rPr sz="1200" b="0">
-                <a:solidFill>
-                  <a:srgbClr val="000000"/>
-                </a:solidFill>
-                <a:latin typeface="Play"/>
-                <a:ea typeface="Play"/>
-                <a:cs typeface="Play"/>
-              </a:rPr>
-              <a:t>Нагрузка более 20 задач требует внешней очереди</a:t>
-            </a:r>
-          </a:p>
-        </p:txBody>
-      </p:sp>
-    </p:spTree>
-  </p:cSld>
-  <p:clrMapOvr>
-    <a:masterClrMapping/>
-  </p:clrMapOvr>
-</p:sld>
-</file>
-
-<file path=ppt/slides/slide62.xml><?xml version="1.0" encoding="utf-8"?>
-<p:sld xmlns:a="http://schemas.openxmlformats.org/drawingml/2006/main" xmlns:p="http://schemas.openxmlformats.org/presentationml/2006/main" xmlns:r="http://schemas.openxmlformats.org/officeDocument/2006/relationships">
-  <p:cSld>
-    <p:spTree>
-      <p:nvGrpSpPr>
-        <p:cNvPr id="1" name=""/>
-        <p:cNvGrpSpPr/>
-        <p:nvPr/>
-      </p:nvGrpSpPr>
-      <p:grpSpPr/>
-      <p:pic>
-        <p:nvPicPr>
-          <p:cNvPr descr=" " id="2249" name="Google Shape;2249;p83"/>
-          <p:cNvPicPr preferRelativeResize="0"/>
-          <p:nvPr/>
-        </p:nvPicPr>
-        <p:blipFill rotWithShape="1">
-          <a:blip r:embed="rId2">
-            <a:alphaModFix/>
-          </a:blip>
-          <a:srcRect b="0" l="0" r="0" t="0"/>
-          <a:stretch/>
-        </p:blipFill>
-        <p:spPr>
-          <a:xfrm>
-            <a:off x="285748" y="3576507"/>
-            <a:ext cx="2381238" cy="28571"/>
-          </a:xfrm>
-          <a:prstGeom prst="rect">
-            <a:avLst/>
-          </a:prstGeom>
-          <a:noFill/>
-          <a:ln>
-            <a:noFill/>
-          </a:ln>
-        </p:spPr>
-      </p:pic>
-      <p:pic>
-        <p:nvPicPr>
-          <p:cNvPr descr=" " id="2250" name="Google Shape;2250;p83"/>
-          <p:cNvPicPr preferRelativeResize="0"/>
-          <p:nvPr/>
-        </p:nvPicPr>
-        <p:blipFill rotWithShape="1">
-          <a:blip r:embed="rId3">
-            <a:alphaModFix/>
-          </a:blip>
-          <a:srcRect b="0" l="0" r="0" t="0"/>
-          <a:stretch/>
-        </p:blipFill>
-        <p:spPr>
-          <a:xfrm>
-            <a:off x="3143234" y="3576507"/>
-            <a:ext cx="3762355" cy="28571"/>
-          </a:xfrm>
-          <a:prstGeom prst="rect">
-            <a:avLst/>
-          </a:prstGeom>
-          <a:noFill/>
-          <a:ln>
-            <a:noFill/>
-          </a:ln>
-        </p:spPr>
-      </p:pic>
-      <p:sp>
-        <p:nvSpPr>
-          <p:cNvPr id="2251" name="title"/>
-          <p:cNvSpPr txBox="1"/>
-          <p:nvPr/>
-        </p:nvSpPr>
-        <p:spPr>
-          <a:xfrm>
-            <a:off x="274320" y="282943"/>
-            <a:ext cx="6792986" cy="617220"/>
-          </a:xfrm>
-          <a:prstGeom prst="rect">
-            <a:avLst/>
-          </a:prstGeom>
-          <a:noFill/>
-        </p:spPr>
-        <p:txBody>
-          <a:bodyPr wrap="square" lIns="76200" rIns="76200" tIns="50800" bIns="50800">
-            <a:spAutoFit/>
-          </a:bodyPr>
-          <a:lstStyle/>
-          <a:p>
-            <a:pPr algn="l">
-              <a:spcAft>
-                <a:spcPts val="300"/>
-              </a:spcAft>
-              <a:defRPr sz="2705">
-                <a:solidFill>
-                  <a:srgbClr val="000000"/>
-                </a:solidFill>
-                <a:latin typeface="Play"/>
-                <a:ea typeface="Play"/>
-                <a:cs typeface="Play"/>
-              </a:defRPr>
-            </a:pPr>
-            <a:r>
-              <a:rPr sz="2705">
-                <a:solidFill>
-                  <a:srgbClr val="000000"/>
-                </a:solidFill>
-                <a:latin typeface="Play"/>
-                <a:ea typeface="Play"/>
-                <a:cs typeface="Play"/>
-              </a:rPr>
-              <a:t>Потенциальные выгоды</a:t>
-            </a:r>
-          </a:p>
-        </p:txBody>
-      </p:sp>
-      <p:sp>
-        <p:nvSpPr>
-          <p:cNvPr id="2252" name="lead"/>
-          <p:cNvSpPr txBox="1"/>
-          <p:nvPr/>
-        </p:nvSpPr>
-        <p:spPr>
-          <a:xfrm>
-            <a:off x="274320" y="1414513"/>
-            <a:ext cx="6792986" cy="648590"/>
-          </a:xfrm>
-          <a:prstGeom prst="rect">
-            <a:avLst/>
-          </a:prstGeom>
-          <a:noFill/>
-        </p:spPr>
-        <p:txBody>
-          <a:bodyPr wrap="square" lIns="76200" rIns="76200" tIns="50800" bIns="50800">
-            <a:spAutoFit/>
-          </a:bodyPr>
-          <a:lstStyle/>
-          <a:p>
-            <a:pPr algn="l">
-              <a:spcAft>
-                <a:spcPts val="300"/>
-              </a:spcAft>
-              <a:defRPr sz="1803" b="1">
-                <a:solidFill>
-                  <a:srgbClr val="000000"/>
-                </a:solidFill>
-                <a:latin typeface="Play"/>
-                <a:ea typeface="Play"/>
-                <a:cs typeface="Play"/>
-              </a:defRPr>
-            </a:pPr>
-            <a:r>
-              <a:rPr sz="1803" b="1">
-                <a:solidFill>
-                  <a:srgbClr val="000000"/>
-                </a:solidFill>
-                <a:latin typeface="Play"/>
-                <a:ea typeface="Play"/>
-                <a:cs typeface="Play"/>
-              </a:rPr>
-              <a:t>Сокращение времени на создание презентаций</a:t>
-            </a:r>
-          </a:p>
-        </p:txBody>
-      </p:sp>
-      <p:sp>
-        <p:nvSpPr>
-          <p:cNvPr id="2253" name="body"/>
-          <p:cNvSpPr txBox="1"/>
-          <p:nvPr/>
-        </p:nvSpPr>
-        <p:spPr>
-          <a:xfrm>
-            <a:off x="274320" y="2192822"/>
-            <a:ext cx="6792986" cy="1383659"/>
-          </a:xfrm>
-          <a:prstGeom prst="rect">
-            <a:avLst/>
-          </a:prstGeom>
-          <a:noFill/>
-        </p:spPr>
-        <p:txBody>
-          <a:bodyPr wrap="square" lIns="76200" rIns="76200" tIns="50800" bIns="50800">
-            <a:spAutoFit/>
-          </a:bodyPr>
-          <a:lstStyle/>
-          <a:p>
-            <a:pPr algn="l">
-              <a:spcAft>
-                <a:spcPts val="300"/>
-              </a:spcAft>
-              <a:defRPr sz="2438" b="1">
-                <a:solidFill>
-                  <a:srgbClr val="000000"/>
-                </a:solidFill>
-                <a:latin typeface="Play"/>
-                <a:ea typeface="Play"/>
-                <a:cs typeface="Play"/>
-              </a:defRPr>
-            </a:pPr>
-            <a:r>
-              <a:rPr sz="2438" b="1">
-                <a:solidFill>
-                  <a:srgbClr val="000000"/>
-                </a:solidFill>
-                <a:latin typeface="Play"/>
-                <a:ea typeface="Play"/>
-                <a:cs typeface="Play"/>
-              </a:rPr>
-              <a:t>• Уменьшение нарушений фирменного стиля</a:t>
-            </a:r>
-          </a:p>
-          <a:p>
-            <a:pPr algn="l">
-              <a:spcAft>
-                <a:spcPts val="300"/>
-              </a:spcAft>
-              <a:defRPr sz="2438" b="1">
-                <a:solidFill>
-                  <a:srgbClr val="000000"/>
-                </a:solidFill>
-                <a:latin typeface="Play"/>
-                <a:ea typeface="Play"/>
-                <a:cs typeface="Play"/>
-              </a:defRPr>
-            </a:pPr>
-            <a:r>
-              <a:rPr sz="2438" b="1">
-                <a:solidFill>
-                  <a:srgbClr val="000000"/>
-                </a:solidFill>
-                <a:latin typeface="Play"/>
-                <a:ea typeface="Play"/>
-                <a:cs typeface="Play"/>
-              </a:rPr>
-              <a:t>• Повышение продуктивности дизайнеров</a:t>
-            </a:r>
-          </a:p>
-        </p:txBody>
-      </p:sp>
-    </p:spTree>
-  </p:cSld>
-  <p:clrMapOvr>
-    <a:masterClrMapping/>
-  </p:clrMapOvr>
-</p:sld>
-</file>
-
-<file path=ppt/slides/slide63.xml><?xml version="1.0" encoding="utf-8"?>
-<p:sld xmlns:a="http://schemas.openxmlformats.org/drawingml/2006/main" xmlns:p="http://schemas.openxmlformats.org/presentationml/2006/main" xmlns:r="http://schemas.openxmlformats.org/officeDocument/2006/relationships">
-  <p:cSld>
-    <p:spTree>
-      <p:nvGrpSpPr>
-        <p:cNvPr id="1" name=""/>
-        <p:cNvGrpSpPr/>
-        <p:nvPr/>
-      </p:nvGrpSpPr>
-      <p:grpSpPr/>
-      <p:sp>
-        <p:nvSpPr>
-          <p:cNvPr id="1027" name="Google Shape;1027;p65"/>
-          <p:cNvSpPr/>
-          <p:nvPr/>
-        </p:nvSpPr>
-        <p:spPr>
-          <a:xfrm>
-            <a:off x="6064222" y="1209852"/>
-            <a:ext cx="2793985" cy="3014270"/>
+            <a:off x="6786527" y="1209852"/>
+            <a:ext cx="2071677" cy="3014270"/>
           </a:xfrm>
           <a:prstGeom prst="roundRect">
             <a:avLst>
-              <a:gd fmla="val 3436" name="adj"/>
+              <a:gd fmla="val 4634" name="adj"/>
             </a:avLst>
           </a:prstGeom>
           <a:solidFill>
@@ -9300,226 +9411,13 @@
       </p:sp>
       <p:sp>
         <p:nvSpPr>
-          <p:cNvPr id="1029" name="Google Shape;1029;p65"/>
+          <p:cNvPr id="682" name="Google Shape;682;p55"/>
           <p:cNvSpPr/>
           <p:nvPr/>
         </p:nvSpPr>
         <p:spPr>
           <a:xfrm>
-            <a:off x="3174981" y="1209852"/>
-            <a:ext cx="2793985" cy="3014270"/>
-          </a:xfrm>
-          <a:prstGeom prst="roundRect">
-            <a:avLst>
-              <a:gd fmla="val 3436" name="adj"/>
-            </a:avLst>
-          </a:prstGeom>
-          <a:solidFill>
-            <a:schemeClr val="lt2"/>
-          </a:solidFill>
-          <a:ln>
-            <a:noFill/>
-          </a:ln>
-        </p:spPr>
-        <p:txBody>
-          <a:bodyPr anchorCtr="0" anchor="ctr" bIns="91425" lIns="91425" spcFirstLastPara="1" rIns="91425" wrap="square" tIns="91425">
-            <a:noAutofit/>
-          </a:bodyPr>
-          <a:lstStyle/>
-          <a:p>
-            <a:pPr indent="0" lvl="0" marL="0" rtl="0" algn="l">
-              <a:spcBef>
-                <a:spcPts val="0"/>
-              </a:spcBef>
-              <a:spcAft>
-                <a:spcPts val="0"/>
-              </a:spcAft>
-              <a:buNone/>
-            </a:pPr>
-            <a:r>
-              <a:t/>
-            </a:r>
-            <a:endParaRPr/>
-          </a:p>
-        </p:txBody>
-      </p:sp>
-      <p:sp>
-        <p:nvSpPr>
-          <p:cNvPr id="1031" name="Google Shape;1031;p65"/>
-          <p:cNvSpPr/>
-          <p:nvPr/>
-        </p:nvSpPr>
-        <p:spPr>
-          <a:xfrm>
-            <a:off x="285749" y="1209852"/>
-            <a:ext cx="2793985" cy="3014270"/>
-          </a:xfrm>
-          <a:prstGeom prst="roundRect">
-            <a:avLst>
-              <a:gd fmla="val 3436" name="adj"/>
-            </a:avLst>
-          </a:prstGeom>
-          <a:solidFill>
-            <a:schemeClr val="lt2"/>
-          </a:solidFill>
-          <a:ln>
-            <a:noFill/>
-          </a:ln>
-        </p:spPr>
-        <p:txBody>
-          <a:bodyPr anchorCtr="0" anchor="ctr" bIns="91425" lIns="91425" spcFirstLastPara="1" rIns="91425" wrap="square" tIns="91425">
-            <a:noAutofit/>
-          </a:bodyPr>
-          <a:lstStyle/>
-          <a:p>
-            <a:pPr indent="0" lvl="0" marL="0" rtl="0" algn="l">
-              <a:spcBef>
-                <a:spcPts val="0"/>
-              </a:spcBef>
-              <a:spcAft>
-                <a:spcPts val="0"/>
-              </a:spcAft>
-              <a:buNone/>
-            </a:pPr>
-            <a:r>
-              <a:t/>
-            </a:r>
-            <a:endParaRPr/>
-          </a:p>
-        </p:txBody>
-      </p:sp>
-      <p:sp>
-        <p:nvSpPr>
-          <p:cNvPr id="1032" name="Google Shape;1032;p65"/>
-          <p:cNvSpPr/>
-          <p:nvPr/>
-        </p:nvSpPr>
-        <p:spPr>
-          <a:xfrm>
-            <a:off x="285748" y="286047"/>
-            <a:ext cx="8572456" cy="3938075"/>
-          </a:xfrm>
-          <a:prstGeom prst="rect">
-            <a:avLst/>
-          </a:prstGeom>
-          <a:noFill/>
-          <a:ln>
-            <a:noFill/>
-          </a:ln>
-        </p:spPr>
-        <p:txBody>
-          <a:bodyPr anchorCtr="0" anchor="ctr" bIns="91425" lIns="91425" spcFirstLastPara="1" rIns="91425" wrap="square" tIns="91425">
-            <a:noAutofit/>
-          </a:bodyPr>
-          <a:lstStyle/>
-          <a:p>
-            <a:pPr indent="0" lvl="0" marL="0" rtl="0" algn="l">
-              <a:spcBef>
-                <a:spcPts val="0"/>
-              </a:spcBef>
-              <a:spcAft>
-                <a:spcPts val="0"/>
-              </a:spcAft>
-              <a:buNone/>
-            </a:pPr>
-            <a:r>
-              <a:t/>
-            </a:r>
-            <a:endParaRPr/>
-          </a:p>
-        </p:txBody>
-      </p:sp>
-      <p:sp>
-        <p:nvSpPr>
-          <p:cNvPr id="1033" name="Google Shape;1033;p65"/>
-          <p:cNvSpPr/>
-          <p:nvPr/>
-        </p:nvSpPr>
-        <p:spPr>
-          <a:xfrm>
-            <a:off x="285748" y="1209852"/>
-            <a:ext cx="8572456" cy="3014270"/>
-          </a:xfrm>
-          <a:prstGeom prst="rect">
-            <a:avLst/>
-          </a:prstGeom>
-          <a:noFill/>
-          <a:ln>
-            <a:noFill/>
-          </a:ln>
-        </p:spPr>
-        <p:txBody>
-          <a:bodyPr anchorCtr="0" anchor="ctr" bIns="91425" lIns="91425" spcFirstLastPara="1" rIns="91425" wrap="square" tIns="91425">
-            <a:noAutofit/>
-          </a:bodyPr>
-          <a:lstStyle/>
-          <a:p>
-            <a:pPr indent="0" lvl="0" marL="0" rtl="0" algn="l">
-              <a:spcBef>
-                <a:spcPts val="0"/>
-              </a:spcBef>
-              <a:spcAft>
-                <a:spcPts val="0"/>
-              </a:spcAft>
-              <a:buNone/>
-            </a:pPr>
-            <a:r>
-              <a:t/>
-            </a:r>
-            <a:endParaRPr/>
-          </a:p>
-        </p:txBody>
-      </p:sp>
-      <p:sp>
-        <p:nvSpPr>
-          <p:cNvPr id="1034" name="Google Shape;1034;p65"/>
-          <p:cNvSpPr/>
-          <p:nvPr/>
-        </p:nvSpPr>
-        <p:spPr>
-          <a:xfrm>
-            <a:off x="476248" y="1400327"/>
-            <a:ext cx="2412987" cy="1009519"/>
-          </a:xfrm>
-          <a:prstGeom prst="rect">
-            <a:avLst/>
-          </a:prstGeom>
-          <a:noFill/>
-          <a:ln>
-            <a:noFill/>
-          </a:ln>
-        </p:spPr>
-        <p:txBody>
-          <a:bodyPr anchorCtr="0" anchor="ctr" bIns="91425" lIns="91425" spcFirstLastPara="1" rIns="91425" wrap="square" tIns="91425">
-            <a:noAutofit/>
-          </a:bodyPr>
-          <a:lstStyle/>
-          <a:p>
-            <a:pPr indent="0" lvl="0" marL="0" rtl="0" algn="l">
-              <a:spcBef>
-                <a:spcPts val="0"/>
-              </a:spcBef>
-              <a:spcAft>
-                <a:spcPts val="0"/>
-              </a:spcAft>
-              <a:buNone/>
-            </a:pPr>
-            <a:r>
-              <a:t/>
-            </a:r>
-            <a:endParaRPr/>
-          </a:p>
-        </p:txBody>
-      </p:sp>
-      <p:sp>
-        <p:nvSpPr>
-          <p:cNvPr id="1035" name="Google Shape;1035;p65"/>
-          <p:cNvSpPr/>
-          <p:nvPr/>
-        </p:nvSpPr>
-        <p:spPr>
-          <a:xfrm>
-            <a:off x="476248" y="1400328"/>
+            <a:off x="6938927" y="1362233"/>
             <a:ext cx="76199" cy="76190"/>
           </a:xfrm>
           <a:prstGeom prst="roundRect">
@@ -9558,179 +9456,7 @@
       </p:sp>
       <p:sp>
         <p:nvSpPr>
-          <p:cNvPr id="1040" name="Google Shape;1040;p65"/>
-          <p:cNvSpPr/>
-          <p:nvPr/>
-        </p:nvSpPr>
-        <p:spPr>
-          <a:xfrm>
-            <a:off x="3365480" y="1400327"/>
-            <a:ext cx="2412987" cy="1009519"/>
-          </a:xfrm>
-          <a:prstGeom prst="rect">
-            <a:avLst/>
-          </a:prstGeom>
-          <a:noFill/>
-          <a:ln>
-            <a:noFill/>
-          </a:ln>
-        </p:spPr>
-        <p:txBody>
-          <a:bodyPr anchorCtr="0" anchor="ctr" bIns="91425" lIns="91425" spcFirstLastPara="1" rIns="91425" wrap="square" tIns="91425">
-            <a:noAutofit/>
-          </a:bodyPr>
-          <a:lstStyle/>
-          <a:p>
-            <a:pPr indent="0" lvl="0" marL="0" rtl="0" algn="l">
-              <a:spcBef>
-                <a:spcPts val="0"/>
-              </a:spcBef>
-              <a:spcAft>
-                <a:spcPts val="0"/>
-              </a:spcAft>
-              <a:buNone/>
-            </a:pPr>
-            <a:r>
-              <a:t/>
-            </a:r>
-            <a:endParaRPr/>
-          </a:p>
-        </p:txBody>
-      </p:sp>
-      <p:sp>
-        <p:nvSpPr>
-          <p:cNvPr id="1041" name="Google Shape;1041;p65"/>
-          <p:cNvSpPr/>
-          <p:nvPr/>
-        </p:nvSpPr>
-        <p:spPr>
-          <a:xfrm>
-            <a:off x="3365480" y="1400328"/>
-            <a:ext cx="76199" cy="76190"/>
-          </a:xfrm>
-          <a:prstGeom prst="roundRect">
-            <a:avLst>
-              <a:gd fmla="val 31500" name="adj"/>
-            </a:avLst>
-          </a:prstGeom>
-          <a:solidFill>
-            <a:srgbClr val="0077FF"/>
-          </a:solidFill>
-          <a:ln>
-            <a:noFill/>
-          </a:ln>
-        </p:spPr>
-        <p:txBody>
-          <a:bodyPr anchorCtr="0" anchor="ctr" bIns="91425" lIns="91425" spcFirstLastPara="1" rIns="91425" wrap="square" tIns="91425">
-            <a:noAutofit/>
-          </a:bodyPr>
-          <a:lstStyle/>
-          <a:p>
-            <a:pPr indent="0" lvl="0" marL="0" rtl="0" algn="l">
-              <a:spcBef>
-                <a:spcPts val="0"/>
-              </a:spcBef>
-              <a:spcAft>
-                <a:spcPts val="0"/>
-              </a:spcAft>
-              <a:buNone/>
-            </a:pPr>
-            <a:r>
-              <a:t/>
-            </a:r>
-            <a:endParaRPr/>
-          </a:p>
-        </p:txBody>
-      </p:sp>
-      <p:sp>
-        <p:nvSpPr>
-          <p:cNvPr id="1045" name="Google Shape;1045;p65"/>
-          <p:cNvSpPr/>
-          <p:nvPr/>
-        </p:nvSpPr>
-        <p:spPr>
-          <a:xfrm>
-            <a:off x="6254721" y="1400327"/>
-            <a:ext cx="2412987" cy="1009519"/>
-          </a:xfrm>
-          <a:prstGeom prst="rect">
-            <a:avLst/>
-          </a:prstGeom>
-          <a:noFill/>
-          <a:ln>
-            <a:noFill/>
-          </a:ln>
-        </p:spPr>
-        <p:txBody>
-          <a:bodyPr anchorCtr="0" anchor="ctr" bIns="91425" lIns="91425" spcFirstLastPara="1" rIns="91425" wrap="square" tIns="91425">
-            <a:noAutofit/>
-          </a:bodyPr>
-          <a:lstStyle/>
-          <a:p>
-            <a:pPr indent="0" lvl="0" marL="0" rtl="0" algn="l">
-              <a:spcBef>
-                <a:spcPts val="0"/>
-              </a:spcBef>
-              <a:spcAft>
-                <a:spcPts val="0"/>
-              </a:spcAft>
-              <a:buNone/>
-            </a:pPr>
-            <a:r>
-              <a:t/>
-            </a:r>
-            <a:endParaRPr/>
-          </a:p>
-        </p:txBody>
-      </p:sp>
-      <p:sp>
-        <p:nvSpPr>
-          <p:cNvPr id="1046" name="Google Shape;1046;p65"/>
-          <p:cNvSpPr/>
-          <p:nvPr/>
-        </p:nvSpPr>
-        <p:spPr>
-          <a:xfrm>
-            <a:off x="6254721" y="1400328"/>
-            <a:ext cx="76199" cy="76190"/>
-          </a:xfrm>
-          <a:prstGeom prst="roundRect">
-            <a:avLst>
-              <a:gd fmla="val 31500" name="adj"/>
-            </a:avLst>
-          </a:prstGeom>
-          <a:solidFill>
-            <a:srgbClr val="0077FF"/>
-          </a:solidFill>
-          <a:ln>
-            <a:noFill/>
-          </a:ln>
-        </p:spPr>
-        <p:txBody>
-          <a:bodyPr anchorCtr="0" anchor="ctr" bIns="91425" lIns="91425" spcFirstLastPara="1" rIns="91425" wrap="square" tIns="91425">
-            <a:noAutofit/>
-          </a:bodyPr>
-          <a:lstStyle/>
-          <a:p>
-            <a:pPr indent="0" lvl="0" marL="0" rtl="0" algn="l">
-              <a:spcBef>
-                <a:spcPts val="0"/>
-              </a:spcBef>
-              <a:spcAft>
-                <a:spcPts val="0"/>
-              </a:spcAft>
-              <a:buNone/>
-            </a:pPr>
-            <a:r>
-              <a:t/>
-            </a:r>
-            <a:endParaRPr/>
-          </a:p>
-        </p:txBody>
-      </p:sp>
-      <p:sp>
-        <p:nvSpPr>
-          <p:cNvPr id="1047" name="title"/>
+          <p:cNvPr id="683" name="title"/>
           <p:cNvSpPr txBox="1"/>
           <p:nvPr/>
         </p:nvSpPr>
@@ -9772,21 +9498,21 @@
                 <a:ea typeface="Play"/>
                 <a:cs typeface="Play"/>
               </a:rPr>
-              <a:t>Что мы просим решить</a:t>
+              <a:t>Преимущества для компании</a:t>
             </a:r>
           </a:p>
         </p:txBody>
       </p:sp>
       <p:sp>
         <p:nvSpPr>
-          <p:cNvPr id="1048" name="lead"/>
+          <p:cNvPr id="684" name="lead"/>
           <p:cNvSpPr txBox="1"/>
           <p:nvPr/>
         </p:nvSpPr>
         <p:spPr>
           <a:xfrm>
-            <a:off x="274320" y="1476493"/>
-            <a:ext cx="6792986" cy="295247"/>
+            <a:off x="274320" y="1438431"/>
+            <a:ext cx="6792986" cy="949125"/>
           </a:xfrm>
           <a:prstGeom prst="rect">
             <a:avLst/>
@@ -9803,7 +9529,7 @@
               <a:spcAft>
                 <a:spcPts val="300"/>
               </a:spcAft>
-              <a:defRPr sz="1200">
+              <a:defRPr sz="2438">
                 <a:solidFill>
                   <a:srgbClr val="000000"/>
                 </a:solidFill>
@@ -9813,7 +9539,7 @@
               </a:defRPr>
             </a:pPr>
             <a:r>
-              <a:rPr sz="1200">
+              <a:rPr sz="2438">
                 <a:solidFill>
                   <a:srgbClr val="000000"/>
                 </a:solidFill>
@@ -9821,21 +9547,21 @@
                 <a:ea typeface="Play"/>
                 <a:cs typeface="Play"/>
               </a:rPr>
-              <a:t>Одобрить запуск сервиса на всю компанию</a:t>
+              <a:t>Сокращение времени создания презентаций до 4 мин</a:t>
             </a:r>
           </a:p>
         </p:txBody>
       </p:sp>
       <p:sp>
         <p:nvSpPr>
-          <p:cNvPr id="1049" name="body"/>
+          <p:cNvPr id="685" name="body"/>
           <p:cNvSpPr txBox="1"/>
           <p:nvPr/>
         </p:nvSpPr>
         <p:spPr>
           <a:xfrm>
-            <a:off x="274320" y="1830789"/>
-            <a:ext cx="6792986" cy="629860"/>
+            <a:off x="274320" y="2547839"/>
+            <a:ext cx="6792986" cy="1561971"/>
           </a:xfrm>
           <a:prstGeom prst="rect">
             <a:avLst/>
@@ -9852,7 +9578,7 @@
               <a:spcAft>
                 <a:spcPts val="300"/>
               </a:spcAft>
-              <a:defRPr sz="1406">
+              <a:defRPr sz="1600">
                 <a:solidFill>
                   <a:srgbClr val="000000"/>
                 </a:solidFill>
@@ -9862,7 +9588,7 @@
               </a:defRPr>
             </a:pPr>
             <a:r>
-              <a:rPr sz="1406">
+              <a:rPr sz="1600">
                 <a:solidFill>
                   <a:srgbClr val="000000"/>
                 </a:solidFill>
@@ -9870,7 +9596,7 @@
                 <a:ea typeface="Play"/>
                 <a:cs typeface="Play"/>
               </a:rPr>
-              <a:t>• Обеспечить инфраструктуру и интеграцию</a:t>
+              <a:t>• Увеличение количества готовых колод за тот же период</a:t>
             </a:r>
           </a:p>
           <a:p>
@@ -9878,7 +9604,7 @@
               <a:spcAft>
                 <a:spcPts val="300"/>
               </a:spcAft>
-              <a:defRPr sz="1406">
+              <a:defRPr sz="1600">
                 <a:solidFill>
                   <a:srgbClr val="000000"/>
                 </a:solidFill>
@@ -9888,7 +9614,7 @@
               </a:defRPr>
             </a:pPr>
             <a:r>
-              <a:rPr sz="1406">
+              <a:rPr sz="1600">
                 <a:solidFill>
                   <a:srgbClr val="000000"/>
                 </a:solidFill>
@@ -9896,7 +9622,33 @@
                 <a:ea typeface="Play"/>
                 <a:cs typeface="Play"/>
               </a:rPr>
-              <a:t>• Поддерживать модель и обновления</a:t>
+              <a:t>• Снижение ошибок фирменного стиля до 3%</a:t>
+            </a:r>
+          </a:p>
+          <a:p>
+            <a:pPr algn="l">
+              <a:spcAft>
+                <a:spcPts val="300"/>
+              </a:spcAft>
+              <a:defRPr sz="1600">
+                <a:solidFill>
+                  <a:srgbClr val="000000"/>
+                </a:solidFill>
+                <a:latin typeface="Play"/>
+                <a:ea typeface="Play"/>
+                <a:cs typeface="Play"/>
+              </a:defRPr>
+            </a:pPr>
+            <a:r>
+              <a:rPr sz="1600">
+                <a:solidFill>
+                  <a:srgbClr val="000000"/>
+                </a:solidFill>
+                <a:latin typeface="Play"/>
+                <a:ea typeface="Play"/>
+                <a:cs typeface="Play"/>
+              </a:rPr>
+              <a:t>• Повышение эффективности дизайнеров, освобождение от рутинных задач</a:t>
             </a:r>
           </a:p>
         </p:txBody>
@@ -9928,7 +9680,7 @@
         <p:spPr>
           <a:xfrm>
             <a:off x="445963" y="1555901"/>
-            <a:ext cx="4627118" cy="2379662"/>
+            <a:ext cx="4627118" cy="2988158"/>
           </a:xfrm>
           <a:prstGeom prst="roundRect">
             <a:avLst/>
@@ -10009,7 +9761,7 @@
                 <a:ea typeface="Play"/>
                 <a:cs typeface="Play"/>
               </a:rPr>
-              <a:t>Вывод</a:t>
+              <a:t>Итоги</a:t>
             </a:r>
           </a:p>
         </p:txBody>
@@ -10023,7 +9775,7 @@
         <p:spPr>
           <a:xfrm>
             <a:off x="572963" y="2518244"/>
-            <a:ext cx="4373118" cy="1905165"/>
+            <a:ext cx="4373118" cy="771721"/>
           </a:xfrm>
           <a:prstGeom prst="rect">
             <a:avLst/>
@@ -10040,7 +9792,7 @@
               <a:spcAft>
                 <a:spcPts val="300"/>
               </a:spcAft>
-              <a:defRPr sz="2400">
+              <a:defRPr sz="1800">
                 <a:solidFill>
                   <a:srgbClr val="000000"/>
                 </a:solidFill>
@@ -10050,7 +9802,7 @@
               </a:defRPr>
             </a:pPr>
             <a:r>
-              <a:rPr sz="2400">
+              <a:rPr sz="1800">
                 <a:solidFill>
                   <a:srgbClr val="000000"/>
                 </a:solidFill>
@@ -10058,7 +9810,108 @@
                 <a:ea typeface="Play"/>
                 <a:cs typeface="Play"/>
               </a:rPr>
-              <a:t>Успешный запуск позволит ускорить создание презентаций и повысить качество</a:t>
+              <a:t>Сервис готов к масштабированию, требуется одобрение руководства</a:t>
+            </a:r>
+          </a:p>
+        </p:txBody>
+      </p:sp>
+      <p:sp>
+        <p:nvSpPr>
+          <p:cNvPr id="5" name="body"/>
+          <p:cNvSpPr txBox="1"/>
+          <p:nvPr/>
+        </p:nvSpPr>
+        <p:spPr>
+          <a:xfrm>
+            <a:off x="572963" y="3324860"/>
+            <a:ext cx="4373118" cy="1098550"/>
+          </a:xfrm>
+          <a:prstGeom prst="rect">
+            <a:avLst/>
+          </a:prstGeom>
+          <a:noFill/>
+        </p:spPr>
+        <p:txBody>
+          <a:bodyPr wrap="square" lIns="76200" rIns="76200" tIns="50800" bIns="50800">
+            <a:spAutoFit/>
+          </a:bodyPr>
+          <a:lstStyle/>
+          <a:p>
+            <a:pPr algn="l">
+              <a:spcAft>
+                <a:spcPts val="300"/>
+              </a:spcAft>
+              <a:defRPr sz="1200">
+                <a:solidFill>
+                  <a:srgbClr val="000000"/>
+                </a:solidFill>
+                <a:latin typeface="Play"/>
+                <a:ea typeface="Play"/>
+                <a:cs typeface="Play"/>
+              </a:defRPr>
+            </a:pPr>
+            <a:r>
+              <a:rPr sz="1200">
+                <a:solidFill>
+                  <a:srgbClr val="000000"/>
+                </a:solidFill>
+                <a:latin typeface="Play"/>
+                <a:ea typeface="Play"/>
+                <a:cs typeface="Play"/>
+              </a:rPr>
+              <a:t>• Ожидается экономия времени и повышение качества презентаций</a:t>
+            </a:r>
+          </a:p>
+          <a:p>
+            <a:pPr algn="l">
+              <a:spcAft>
+                <a:spcPts val="300"/>
+              </a:spcAft>
+              <a:defRPr sz="1200">
+                <a:solidFill>
+                  <a:srgbClr val="000000"/>
+                </a:solidFill>
+                <a:latin typeface="Play"/>
+                <a:ea typeface="Play"/>
+                <a:cs typeface="Play"/>
+              </a:defRPr>
+            </a:pPr>
+            <a:r>
+              <a:rPr sz="1200">
+                <a:solidFill>
+                  <a:srgbClr val="000000"/>
+                </a:solidFill>
+                <a:latin typeface="Play"/>
+                <a:ea typeface="Play"/>
+                <a:cs typeface="Play"/>
+              </a:rPr>
+              <a:t>• Пилот подтвердил работоспособность и низкие затраты</a:t>
+            </a:r>
+          </a:p>
+          <a:p>
+            <a:pPr algn="l">
+              <a:spcAft>
+                <a:spcPts val="300"/>
+              </a:spcAft>
+              <a:defRPr sz="1200">
+                <a:solidFill>
+                  <a:srgbClr val="000000"/>
+                </a:solidFill>
+                <a:latin typeface="Play"/>
+                <a:ea typeface="Play"/>
+                <a:cs typeface="Play"/>
+              </a:defRPr>
+            </a:pPr>
+            <a:r>
+              <a:rPr sz="1200">
+                <a:solidFill>
+                  <a:srgbClr val="000000"/>
+                </a:solidFill>
+                <a:latin typeface="Play"/>
+                <a:ea typeface="Play"/>
+                <a:cs typeface="Play"/>
+              </a:rPr>
+              <a:t>• Риски минимизированы благодаря аудитам и резерву</a:t>
             </a:r>
           </a:p>
         </p:txBody>

--- a/samples/VK_Tech_шаблон__focus.pptx
+++ b/samples/VK_Tech_шаблон__focus.pptx
@@ -261,6 +261,434 @@
 </p:presentation>
 </file>
 
+<file path=ppt/charts/chart1.xml><?xml version="1.0" encoding="utf-8"?>
+<c:chartSpace xmlns:c="http://schemas.openxmlformats.org/drawingml/2006/chart" xmlns:a="http://schemas.openxmlformats.org/drawingml/2006/main" xmlns:r="http://schemas.openxmlformats.org/officeDocument/2006/relationships">
+  <c:date1904 val="0"/>
+  <c:chart>
+    <c:autoTitleDeleted val="1"/>
+    <c:plotArea>
+      <c:barChart>
+        <c:barDir val="col"/>
+        <c:grouping val="clustered"/>
+        <c:ser>
+          <c:idx val="0"/>
+          <c:order val="0"/>
+          <c:tx>
+            <c:strRef>
+              <c:f>Sheet1!$B$1</c:f>
+              <c:strCache>
+                <c:ptCount val="1"/>
+                <c:pt idx="0">
+                  <c:v>Время, мин</c:v>
+                </c:pt>
+              </c:strCache>
+            </c:strRef>
+          </c:tx>
+          <c:spPr>
+            <a:solidFill>
+              <a:srgbClr val="0077FF"/>
+            </a:solidFill>
+            <a:ln>
+              <a:solidFill>
+                <a:srgbClr val="0077FF"/>
+              </a:solidFill>
+            </a:ln>
+          </c:spPr>
+          <c:cat>
+            <c:strRef>
+              <c:f>Sheet1!$A$2:$A$3</c:f>
+              <c:strCache>
+                <c:ptCount val="2"/>
+                <c:pt idx="0">
+                  <c:v>До</c:v>
+                </c:pt>
+                <c:pt idx="1">
+                  <c:v>После</c:v>
+                </c:pt>
+              </c:strCache>
+            </c:strRef>
+          </c:cat>
+          <c:val>
+            <c:numRef>
+              <c:f>Sheet1!$B$2:$B$3</c:f>
+              <c:numCache>
+                <c:formatCode>General</c:formatCode>
+                <c:ptCount val="2"/>
+                <c:pt idx="0">
+                  <c:v>186.0</c:v>
+                </c:pt>
+                <c:pt idx="1">
+                  <c:v>4.0</c:v>
+                </c:pt>
+              </c:numCache>
+            </c:numRef>
+          </c:val>
+        </c:ser>
+        <c:dLbls>
+          <c:numFmt formatCode="0&quot; мин&quot;" sourceLinked="0"/>
+          <c:txPr>
+            <a:bodyPr wrap="none"/>
+            <a:lstStyle/>
+            <a:p>
+              <a:pPr>
+                <a:defRPr sz="1100" b="0">
+                  <a:solidFill>
+                    <a:srgbClr val="000000"/>
+                  </a:solidFill>
+                  <a:latin typeface="Play"/>
+                  <a:ea typeface="Play"/>
+                  <a:cs typeface="Play"/>
+                </a:defRPr>
+              </a:pPr>
+            </a:p>
+          </c:txPr>
+          <c:dLblPos val="outEnd"/>
+          <c:showLegendKey val="0"/>
+          <c:showVal val="1"/>
+          <c:showCatName val="0"/>
+          <c:showSerName val="0"/>
+          <c:showPercent val="0"/>
+          <c:showBubbleSize val="0"/>
+          <c:showLeaderLines val="1"/>
+        </c:dLbls>
+        <c:gapWidth val="60"/>
+        <c:axId val="-2068027336"/>
+        <c:axId val="-2113994440"/>
+      </c:barChart>
+      <c:catAx>
+        <c:axId val="-2068027336"/>
+        <c:scaling>
+          <c:orientation val="minMax"/>
+        </c:scaling>
+        <c:delete val="0"/>
+        <c:axPos val="b"/>
+        <c:majorTickMark val="out"/>
+        <c:minorTickMark val="none"/>
+        <c:tickLblPos val="nextTo"/>
+        <c:txPr>
+          <a:bodyPr/>
+          <a:lstStyle/>
+          <a:p>
+            <a:pPr>
+              <a:defRPr sz="1100" b="0">
+                <a:solidFill>
+                  <a:srgbClr val="000000"/>
+                </a:solidFill>
+                <a:latin typeface="Play"/>
+                <a:ea typeface="Play"/>
+                <a:cs typeface="Play"/>
+              </a:defRPr>
+            </a:pPr>
+          </a:p>
+        </c:txPr>
+        <c:crossAx val="-2113994440"/>
+        <c:crosses val="autoZero"/>
+        <c:auto val="1"/>
+        <c:lblAlgn val="ctr"/>
+        <c:lblOffset val="100"/>
+        <c:noMultiLvlLbl val="0"/>
+      </c:catAx>
+      <c:valAx>
+        <c:axId val="-2113994440"/>
+        <c:scaling/>
+        <c:delete val="0"/>
+        <c:axPos val="l"/>
+        <c:majorGridlines>
+          <c:spPr>
+            <a:ln w="9525">
+              <a:solidFill>
+                <a:srgbClr val="D1D1D1"/>
+              </a:solidFill>
+            </a:ln>
+          </c:spPr>
+        </c:majorGridlines>
+        <c:title>
+          <c:tx>
+            <c:rich>
+              <a:bodyPr rot="0" vert="horz"/>
+              <a:lstStyle/>
+              <a:p>
+                <a:pPr>
+                  <a:defRPr sz="1100" b="0">
+                    <a:solidFill>
+                      <a:srgbClr val="000000"/>
+                    </a:solidFill>
+                    <a:latin typeface="Play"/>
+                    <a:ea typeface="Play"/>
+                    <a:cs typeface="Play"/>
+                  </a:defRPr>
+                </a:pPr>
+                <a:r>
+                  <a:t>Время, мин, мин</a:t>
+                </a:r>
+              </a:p>
+            </c:rich>
+          </c:tx>
+          <c:layout/>
+          <c:overlay val="0"/>
+        </c:title>
+        <c:majorTickMark val="out"/>
+        <c:minorTickMark val="none"/>
+        <c:tickLblPos val="nextTo"/>
+        <c:txPr>
+          <a:bodyPr/>
+          <a:lstStyle/>
+          <a:p>
+            <a:pPr>
+              <a:defRPr sz="1100" b="0">
+                <a:solidFill>
+                  <a:srgbClr val="000000"/>
+                </a:solidFill>
+                <a:latin typeface="Play"/>
+                <a:ea typeface="Play"/>
+                <a:cs typeface="Play"/>
+              </a:defRPr>
+            </a:pPr>
+          </a:p>
+        </c:txPr>
+        <c:crossAx val="-2068027336"/>
+        <c:crosses val="autoZero"/>
+      </c:valAx>
+    </c:plotArea>
+    <c:dispBlanksAs val="gap"/>
+  </c:chart>
+  <c:txPr>
+    <a:bodyPr/>
+    <a:lstStyle/>
+    <a:p>
+      <a:pPr>
+        <a:defRPr sz="1200" b="0">
+          <a:solidFill>
+            <a:srgbClr val="000000"/>
+          </a:solidFill>
+          <a:latin typeface="Play"/>
+          <a:ea typeface="Play"/>
+          <a:cs typeface="Play"/>
+        </a:defRPr>
+      </a:pPr>
+      <a:endParaRPr lang="en-US"/>
+    </a:p>
+  </c:txPr>
+  <c:externalData r:id="rId1">
+    <c:autoUpdate val="0"/>
+  </c:externalData>
+</c:chartSpace>
+</file>
+
+<file path=ppt/charts/chart2.xml><?xml version="1.0" encoding="utf-8"?>
+<c:chartSpace xmlns:c="http://schemas.openxmlformats.org/drawingml/2006/chart" xmlns:a="http://schemas.openxmlformats.org/drawingml/2006/main" xmlns:r="http://schemas.openxmlformats.org/officeDocument/2006/relationships">
+  <c:date1904 val="0"/>
+  <c:chart>
+    <c:autoTitleDeleted val="1"/>
+    <c:plotArea>
+      <c:barChart>
+        <c:barDir val="col"/>
+        <c:grouping val="clustered"/>
+        <c:ser>
+          <c:idx val="0"/>
+          <c:order val="0"/>
+          <c:tx>
+            <c:strRef>
+              <c:f>Sheet1!$B$1</c:f>
+              <c:strCache>
+                <c:ptCount val="1"/>
+                <c:pt idx="0">
+                  <c:v>Нарушения</c:v>
+                </c:pt>
+              </c:strCache>
+            </c:strRef>
+          </c:tx>
+          <c:spPr>
+            <a:solidFill>
+              <a:srgbClr val="0077FF"/>
+            </a:solidFill>
+            <a:ln>
+              <a:solidFill>
+                <a:srgbClr val="0077FF"/>
+              </a:solidFill>
+            </a:ln>
+          </c:spPr>
+          <c:cat>
+            <c:strRef>
+              <c:f>Sheet1!$A$2:$A$3</c:f>
+              <c:strCache>
+                <c:ptCount val="2"/>
+                <c:pt idx="0">
+                  <c:v>До</c:v>
+                </c:pt>
+                <c:pt idx="1">
+                  <c:v>После</c:v>
+                </c:pt>
+              </c:strCache>
+            </c:strRef>
+          </c:cat>
+          <c:val>
+            <c:numRef>
+              <c:f>Sheet1!$B$2:$B$3</c:f>
+              <c:numCache>
+                <c:formatCode>General</c:formatCode>
+                <c:ptCount val="2"/>
+                <c:pt idx="0">
+                  <c:v>19.0</c:v>
+                </c:pt>
+                <c:pt idx="1">
+                  <c:v>2.0</c:v>
+                </c:pt>
+              </c:numCache>
+            </c:numRef>
+          </c:val>
+        </c:ser>
+        <c:dLbls>
+          <c:numFmt formatCode="0&quot; кол-во&quot;" sourceLinked="0"/>
+          <c:txPr>
+            <a:bodyPr wrap="none"/>
+            <a:lstStyle/>
+            <a:p>
+              <a:pPr>
+                <a:defRPr sz="1100" b="0">
+                  <a:solidFill>
+                    <a:srgbClr val="000000"/>
+                  </a:solidFill>
+                  <a:latin typeface="Play"/>
+                  <a:ea typeface="Play"/>
+                  <a:cs typeface="Play"/>
+                </a:defRPr>
+              </a:pPr>
+            </a:p>
+          </c:txPr>
+          <c:dLblPos val="outEnd"/>
+          <c:showLegendKey val="0"/>
+          <c:showVal val="1"/>
+          <c:showCatName val="0"/>
+          <c:showSerName val="0"/>
+          <c:showPercent val="0"/>
+          <c:showBubbleSize val="0"/>
+          <c:showLeaderLines val="1"/>
+        </c:dLbls>
+        <c:gapWidth val="60"/>
+        <c:axId val="-2068027336"/>
+        <c:axId val="-2113994440"/>
+      </c:barChart>
+      <c:catAx>
+        <c:axId val="-2068027336"/>
+        <c:scaling>
+          <c:orientation val="minMax"/>
+        </c:scaling>
+        <c:delete val="0"/>
+        <c:axPos val="b"/>
+        <c:majorTickMark val="out"/>
+        <c:minorTickMark val="none"/>
+        <c:tickLblPos val="nextTo"/>
+        <c:txPr>
+          <a:bodyPr/>
+          <a:lstStyle/>
+          <a:p>
+            <a:pPr>
+              <a:defRPr sz="1100" b="0">
+                <a:solidFill>
+                  <a:srgbClr val="000000"/>
+                </a:solidFill>
+                <a:latin typeface="Play"/>
+                <a:ea typeface="Play"/>
+                <a:cs typeface="Play"/>
+              </a:defRPr>
+            </a:pPr>
+          </a:p>
+        </c:txPr>
+        <c:crossAx val="-2113994440"/>
+        <c:crosses val="autoZero"/>
+        <c:auto val="1"/>
+        <c:lblAlgn val="ctr"/>
+        <c:lblOffset val="100"/>
+        <c:noMultiLvlLbl val="0"/>
+      </c:catAx>
+      <c:valAx>
+        <c:axId val="-2113994440"/>
+        <c:scaling/>
+        <c:delete val="0"/>
+        <c:axPos val="l"/>
+        <c:majorGridlines>
+          <c:spPr>
+            <a:ln w="9525">
+              <a:solidFill>
+                <a:srgbClr val="D1D1D1"/>
+              </a:solidFill>
+            </a:ln>
+          </c:spPr>
+        </c:majorGridlines>
+        <c:title>
+          <c:tx>
+            <c:rich>
+              <a:bodyPr rot="0" vert="horz"/>
+              <a:lstStyle/>
+              <a:p>
+                <a:pPr>
+                  <a:defRPr sz="1100" b="0">
+                    <a:solidFill>
+                      <a:srgbClr val="000000"/>
+                    </a:solidFill>
+                    <a:latin typeface="Play"/>
+                    <a:ea typeface="Play"/>
+                    <a:cs typeface="Play"/>
+                  </a:defRPr>
+                </a:pPr>
+                <a:r>
+                  <a:t>Нарушения, кол-во</a:t>
+                </a:r>
+              </a:p>
+            </c:rich>
+          </c:tx>
+          <c:layout/>
+          <c:overlay val="0"/>
+        </c:title>
+        <c:majorTickMark val="out"/>
+        <c:minorTickMark val="none"/>
+        <c:tickLblPos val="nextTo"/>
+        <c:txPr>
+          <a:bodyPr/>
+          <a:lstStyle/>
+          <a:p>
+            <a:pPr>
+              <a:defRPr sz="1100" b="0">
+                <a:solidFill>
+                  <a:srgbClr val="000000"/>
+                </a:solidFill>
+                <a:latin typeface="Play"/>
+                <a:ea typeface="Play"/>
+                <a:cs typeface="Play"/>
+              </a:defRPr>
+            </a:pPr>
+          </a:p>
+        </c:txPr>
+        <c:crossAx val="-2068027336"/>
+        <c:crosses val="autoZero"/>
+      </c:valAx>
+    </c:plotArea>
+    <c:dispBlanksAs val="gap"/>
+  </c:chart>
+  <c:txPr>
+    <a:bodyPr/>
+    <a:lstStyle/>
+    <a:p>
+      <a:pPr>
+        <a:defRPr sz="1200" b="0">
+          <a:solidFill>
+            <a:srgbClr val="000000"/>
+          </a:solidFill>
+          <a:latin typeface="Play"/>
+          <a:ea typeface="Play"/>
+          <a:cs typeface="Play"/>
+        </a:defRPr>
+      </a:pPr>
+      <a:endParaRPr lang="en-US"/>
+    </a:p>
+  </c:txPr>
+  <c:externalData r:id="rId1">
+    <c:autoUpdate val="0"/>
+  </c:externalData>
+</c:chartSpace>
+</file>
+
 <file path=ppt/notesMasters/notesMaster1.xml><?xml version="1.0" encoding="utf-8"?>
 <p:notesMaster xmlns:a="http://schemas.openxmlformats.org/drawingml/2006/main" xmlns:r="http://schemas.openxmlformats.org/officeDocument/2006/relationships" xmlns:mc="http://schemas.openxmlformats.org/markup-compatibility/2006" xmlns:mv="urn:schemas-microsoft-com:mac:vml" xmlns:p="http://schemas.openxmlformats.org/presentationml/2006/main" xmlns:c="http://schemas.openxmlformats.org/drawingml/2006/chart" xmlns:dgm="http://schemas.openxmlformats.org/drawingml/2006/diagram" xmlns:o="urn:schemas-microsoft-com:office:office" xmlns:v="urn:schemas-microsoft-com:vml" xmlns:pvml="urn:schemas-microsoft-com:office:powerpoint" xmlns:com="http://schemas.openxmlformats.org/drawingml/2006/compatibility" xmlns:p14="http://schemas.microsoft.com/office/powerpoint/2010/main" xmlns:p15="http://schemas.microsoft.com/office/powerpoint/2012/main" xmlns:ahyp="http://schemas.microsoft.com/office/drawing/2018/hyperlinkcolor">
   <p:cSld>
@@ -5369,19 +5797,23 @@
       <p:grpSpPr/>
       <p:sp>
         <p:nvSpPr>
-          <p:cNvPr id="662" name="Google Shape;662;p55"/>
+          <p:cNvPr id="1027" name="Google Shape;1027;p65"/>
           <p:cNvSpPr/>
           <p:nvPr/>
         </p:nvSpPr>
         <p:spPr>
           <a:xfrm>
-            <a:off x="8667705" y="4666977"/>
-            <a:ext cx="190499" cy="190475"/>
+            <a:off x="6064222" y="1209852"/>
+            <a:ext cx="2793985" cy="3014270"/>
           </a:xfrm>
-          <a:prstGeom prst="rect">
-            <a:avLst/>
+          <a:prstGeom prst="roundRect">
+            <a:avLst>
+              <a:gd fmla="val 3436" name="adj"/>
+            </a:avLst>
           </a:prstGeom>
-          <a:noFill/>
+          <a:solidFill>
+            <a:schemeClr val="lt2"/>
+          </a:solidFill>
           <a:ln>
             <a:noFill/>
           </a:ln>
@@ -5410,7 +5842,97 @@
       </p:sp>
       <p:sp>
         <p:nvSpPr>
-          <p:cNvPr id="663" name="Google Shape;663;p55"/>
+          <p:cNvPr id="1029" name="Google Shape;1029;p65"/>
+          <p:cNvSpPr/>
+          <p:nvPr/>
+        </p:nvSpPr>
+        <p:spPr>
+          <a:xfrm>
+            <a:off x="3174981" y="1209852"/>
+            <a:ext cx="2793985" cy="3014270"/>
+          </a:xfrm>
+          <a:prstGeom prst="roundRect">
+            <a:avLst>
+              <a:gd fmla="val 3436" name="adj"/>
+            </a:avLst>
+          </a:prstGeom>
+          <a:solidFill>
+            <a:schemeClr val="lt2"/>
+          </a:solidFill>
+          <a:ln>
+            <a:noFill/>
+          </a:ln>
+        </p:spPr>
+        <p:txBody>
+          <a:bodyPr anchorCtr="0" anchor="ctr" bIns="91425" lIns="91425" spcFirstLastPara="1" rIns="91425" wrap="square" tIns="91425">
+            <a:noAutofit/>
+          </a:bodyPr>
+          <a:lstStyle/>
+          <a:p>
+            <a:pPr indent="0" lvl="0" marL="0" rtl="0" algn="l">
+              <a:spcBef>
+                <a:spcPts val="0"/>
+              </a:spcBef>
+              <a:spcAft>
+                <a:spcPts val="0"/>
+              </a:spcAft>
+              <a:buNone/>
+            </a:pPr>
+            <a:r>
+              <a:t/>
+            </a:r>
+            <a:endParaRPr/>
+          </a:p>
+        </p:txBody>
+      </p:sp>
+      <p:sp>
+        <p:nvSpPr>
+          <p:cNvPr id="1031" name="Google Shape;1031;p65"/>
+          <p:cNvSpPr/>
+          <p:nvPr/>
+        </p:nvSpPr>
+        <p:spPr>
+          <a:xfrm>
+            <a:off x="285749" y="1209852"/>
+            <a:ext cx="2793985" cy="3014270"/>
+          </a:xfrm>
+          <a:prstGeom prst="roundRect">
+            <a:avLst>
+              <a:gd fmla="val 3436" name="adj"/>
+            </a:avLst>
+          </a:prstGeom>
+          <a:solidFill>
+            <a:schemeClr val="lt2"/>
+          </a:solidFill>
+          <a:ln>
+            <a:noFill/>
+          </a:ln>
+        </p:spPr>
+        <p:txBody>
+          <a:bodyPr anchorCtr="0" anchor="ctr" bIns="91425" lIns="91425" spcFirstLastPara="1" rIns="91425" wrap="square" tIns="91425">
+            <a:noAutofit/>
+          </a:bodyPr>
+          <a:lstStyle/>
+          <a:p>
+            <a:pPr indent="0" lvl="0" marL="0" rtl="0" algn="l">
+              <a:spcBef>
+                <a:spcPts val="0"/>
+              </a:spcBef>
+              <a:spcAft>
+                <a:spcPts val="0"/>
+              </a:spcAft>
+              <a:buNone/>
+            </a:pPr>
+            <a:r>
+              <a:t/>
+            </a:r>
+            <a:endParaRPr/>
+          </a:p>
+        </p:txBody>
+      </p:sp>
+      <p:sp>
+        <p:nvSpPr>
+          <p:cNvPr id="1032" name="Google Shape;1032;p65"/>
           <p:cNvSpPr/>
           <p:nvPr/>
         </p:nvSpPr>
@@ -5451,7 +5973,7 @@
       </p:sp>
       <p:sp>
         <p:nvSpPr>
-          <p:cNvPr id="664" name="Google Shape;664;p55"/>
+          <p:cNvPr id="1033" name="Google Shape;1033;p65"/>
           <p:cNvSpPr/>
           <p:nvPr/>
         </p:nvSpPr>
@@ -5492,23 +6014,19 @@
       </p:sp>
       <p:sp>
         <p:nvSpPr>
-          <p:cNvPr id="665" name="Google Shape;665;p55"/>
+          <p:cNvPr id="1034" name="Google Shape;1034;p65"/>
           <p:cNvSpPr/>
           <p:nvPr/>
         </p:nvSpPr>
         <p:spPr>
           <a:xfrm>
-            <a:off x="285749" y="1209852"/>
-            <a:ext cx="2071677" cy="3014270"/>
+            <a:off x="476248" y="1400327"/>
+            <a:ext cx="2412987" cy="1009519"/>
           </a:xfrm>
-          <a:prstGeom prst="roundRect">
-            <a:avLst>
-              <a:gd fmla="val 4634" name="adj"/>
-            </a:avLst>
+          <a:prstGeom prst="rect">
+            <a:avLst/>
           </a:prstGeom>
-          <a:solidFill>
-            <a:schemeClr val="lt2"/>
-          </a:solidFill>
+          <a:noFill/>
           <a:ln>
             <a:noFill/>
           </a:ln>
@@ -5537,13 +6055,13 @@
       </p:sp>
       <p:sp>
         <p:nvSpPr>
-          <p:cNvPr id="667" name="Google Shape;667;p55"/>
+          <p:cNvPr id="1035" name="Google Shape;1035;p65"/>
           <p:cNvSpPr/>
           <p:nvPr/>
         </p:nvSpPr>
         <p:spPr>
           <a:xfrm>
-            <a:off x="438148" y="1362233"/>
+            <a:off x="476248" y="1400328"/>
             <a:ext cx="76199" cy="76190"/>
           </a:xfrm>
           <a:prstGeom prst="roundRect">
@@ -5582,23 +6100,19 @@
       </p:sp>
       <p:sp>
         <p:nvSpPr>
-          <p:cNvPr id="670" name="Google Shape;670;p55"/>
+          <p:cNvPr id="1040" name="Google Shape;1040;p65"/>
           <p:cNvSpPr/>
           <p:nvPr/>
         </p:nvSpPr>
         <p:spPr>
           <a:xfrm>
-            <a:off x="2452675" y="1209852"/>
-            <a:ext cx="2071677" cy="3014270"/>
+            <a:off x="3365480" y="1400327"/>
+            <a:ext cx="2412987" cy="1009519"/>
           </a:xfrm>
-          <a:prstGeom prst="roundRect">
-            <a:avLst>
-              <a:gd fmla="val 4634" name="adj"/>
-            </a:avLst>
+          <a:prstGeom prst="rect">
+            <a:avLst/>
           </a:prstGeom>
-          <a:solidFill>
-            <a:schemeClr val="lt2"/>
-          </a:solidFill>
+          <a:noFill/>
           <a:ln>
             <a:noFill/>
           </a:ln>
@@ -5627,13 +6141,13 @@
       </p:sp>
       <p:sp>
         <p:nvSpPr>
-          <p:cNvPr id="672" name="Google Shape;672;p55"/>
+          <p:cNvPr id="1041" name="Google Shape;1041;p65"/>
           <p:cNvSpPr/>
           <p:nvPr/>
         </p:nvSpPr>
         <p:spPr>
           <a:xfrm>
-            <a:off x="2605074" y="1362233"/>
+            <a:off x="3365480" y="1400328"/>
             <a:ext cx="76199" cy="76190"/>
           </a:xfrm>
           <a:prstGeom prst="roundRect">
@@ -5672,23 +6186,19 @@
       </p:sp>
       <p:sp>
         <p:nvSpPr>
-          <p:cNvPr id="675" name="Google Shape;675;p55"/>
+          <p:cNvPr id="1045" name="Google Shape;1045;p65"/>
           <p:cNvSpPr/>
           <p:nvPr/>
         </p:nvSpPr>
         <p:spPr>
           <a:xfrm>
-            <a:off x="4619601" y="1209852"/>
-            <a:ext cx="2071677" cy="3014270"/>
+            <a:off x="6254721" y="1400327"/>
+            <a:ext cx="2412987" cy="1009519"/>
           </a:xfrm>
-          <a:prstGeom prst="roundRect">
-            <a:avLst>
-              <a:gd fmla="val 4634" name="adj"/>
-            </a:avLst>
+          <a:prstGeom prst="rect">
+            <a:avLst/>
           </a:prstGeom>
-          <a:solidFill>
-            <a:schemeClr val="lt2"/>
-          </a:solidFill>
+          <a:noFill/>
           <a:ln>
             <a:noFill/>
           </a:ln>
@@ -5717,13 +6227,13 @@
       </p:sp>
       <p:sp>
         <p:nvSpPr>
-          <p:cNvPr id="677" name="Google Shape;677;p55"/>
+          <p:cNvPr id="1046" name="Google Shape;1046;p65"/>
           <p:cNvSpPr/>
           <p:nvPr/>
         </p:nvSpPr>
         <p:spPr>
           <a:xfrm>
-            <a:off x="4772001" y="1362233"/>
+            <a:off x="6254721" y="1400328"/>
             <a:ext cx="76199" cy="76190"/>
           </a:xfrm>
           <a:prstGeom prst="roundRect">
@@ -5762,18 +6272,605 @@
       </p:sp>
       <p:sp>
         <p:nvSpPr>
-          <p:cNvPr id="680" name="Google Shape;680;p55"/>
+          <p:cNvPr id="1047" name="title"/>
+          <p:cNvSpPr txBox="1"/>
+          <p:nvPr/>
+        </p:nvSpPr>
+        <p:spPr>
+          <a:xfrm>
+            <a:off x="274320" y="282943"/>
+            <a:ext cx="6792986" cy="617220"/>
+          </a:xfrm>
+          <a:prstGeom prst="rect">
+            <a:avLst/>
+          </a:prstGeom>
+          <a:noFill/>
+        </p:spPr>
+        <p:txBody>
+          <a:bodyPr wrap="square" lIns="76200" rIns="76200" tIns="50800" bIns="50800">
+            <a:spAutoFit/>
+          </a:bodyPr>
+          <a:lstStyle/>
+          <a:p>
+            <a:pPr algn="l">
+              <a:spcAft>
+                <a:spcPts val="300"/>
+              </a:spcAft>
+              <a:defRPr sz="2705">
+                <a:solidFill>
+                  <a:srgbClr val="000000"/>
+                </a:solidFill>
+                <a:latin typeface="Play"/>
+                <a:ea typeface="Play"/>
+                <a:cs typeface="Play"/>
+              </a:defRPr>
+            </a:pPr>
+            <a:r>
+              <a:rPr sz="2705">
+                <a:solidFill>
+                  <a:srgbClr val="000000"/>
+                </a:solidFill>
+                <a:latin typeface="Play"/>
+                <a:ea typeface="Play"/>
+                <a:cs typeface="Play"/>
+              </a:rPr>
+              <a:t>Сейчас: 42 колоды, 186 мин сборки</a:t>
+            </a:r>
+          </a:p>
+        </p:txBody>
+      </p:sp>
+      <p:sp>
+        <p:nvSpPr>
+          <p:cNvPr id="1048" name="lead"/>
+          <p:cNvSpPr txBox="1"/>
+          <p:nvPr/>
+        </p:nvSpPr>
+        <p:spPr>
+          <a:xfrm>
+            <a:off x="274320" y="1476493"/>
+            <a:ext cx="6792986" cy="479797"/>
+          </a:xfrm>
+          <a:prstGeom prst="rect">
+            <a:avLst/>
+          </a:prstGeom>
+          <a:noFill/>
+        </p:spPr>
+        <p:txBody>
+          <a:bodyPr wrap="square" lIns="76200" rIns="76200" tIns="50800" bIns="50800">
+            <a:spAutoFit/>
+          </a:bodyPr>
+          <a:lstStyle/>
+          <a:p>
+            <a:pPr algn="l">
+              <a:spcAft>
+                <a:spcPts val="300"/>
+              </a:spcAft>
+              <a:defRPr sz="1800">
+                <a:solidFill>
+                  <a:srgbClr val="000000"/>
+                </a:solidFill>
+                <a:latin typeface="Play"/>
+                <a:ea typeface="Play"/>
+                <a:cs typeface="Play"/>
+              </a:defRPr>
+            </a:pPr>
+            <a:r>
+              <a:rPr sz="1800">
+                <a:solidFill>
+                  <a:srgbClr val="000000"/>
+                </a:solidFill>
+                <a:latin typeface="Play"/>
+                <a:ea typeface="Play"/>
+                <a:cs typeface="Play"/>
+              </a:rPr>
+              <a:t>42 колоды, 186 мин сборки одной презентации</a:t>
+            </a:r>
+          </a:p>
+        </p:txBody>
+      </p:sp>
+      <p:sp>
+        <p:nvSpPr>
+          <p:cNvPr id="1049" name="body"/>
+          <p:cNvSpPr txBox="1"/>
+          <p:nvPr/>
+        </p:nvSpPr>
+        <p:spPr>
+          <a:xfrm>
+            <a:off x="274320" y="1956460"/>
+            <a:ext cx="6792986" cy="504189"/>
+          </a:xfrm>
+          <a:prstGeom prst="rect">
+            <a:avLst/>
+          </a:prstGeom>
+          <a:noFill/>
+        </p:spPr>
+        <p:txBody>
+          <a:bodyPr wrap="square" lIns="76200" rIns="76200" tIns="50800" bIns="50800">
+            <a:spAutoFit/>
+          </a:bodyPr>
+          <a:lstStyle/>
+          <a:p>
+            <a:pPr algn="l">
+              <a:spcAft>
+                <a:spcPts val="300"/>
+              </a:spcAft>
+              <a:defRPr sz="1200">
+                <a:solidFill>
+                  <a:srgbClr val="000000"/>
+                </a:solidFill>
+                <a:latin typeface="Play"/>
+                <a:ea typeface="Play"/>
+                <a:cs typeface="Play"/>
+              </a:defRPr>
+            </a:pPr>
+            <a:r>
+              <a:rPr sz="1200">
+                <a:solidFill>
+                  <a:srgbClr val="000000"/>
+                </a:solidFill>
+                <a:latin typeface="Play"/>
+                <a:ea typeface="Play"/>
+                <a:cs typeface="Play"/>
+              </a:rPr>
+              <a:t>• 74 мин правок после ревью дизайнера</a:t>
+            </a:r>
+          </a:p>
+          <a:p>
+            <a:pPr algn="l">
+              <a:spcAft>
+                <a:spcPts val="300"/>
+              </a:spcAft>
+              <a:defRPr sz="1200">
+                <a:solidFill>
+                  <a:srgbClr val="000000"/>
+                </a:solidFill>
+                <a:latin typeface="Play"/>
+                <a:ea typeface="Play"/>
+                <a:cs typeface="Play"/>
+              </a:defRPr>
+            </a:pPr>
+            <a:r>
+              <a:rPr sz="1200">
+                <a:solidFill>
+                  <a:srgbClr val="000000"/>
+                </a:solidFill>
+                <a:latin typeface="Play"/>
+                <a:ea typeface="Play"/>
+                <a:cs typeface="Play"/>
+              </a:rPr>
+              <a:t>• 19 из 42 колод нарушили фирменный стиль</a:t>
+            </a:r>
+          </a:p>
+        </p:txBody>
+      </p:sp>
+    </p:spTree>
+  </p:cSld>
+  <p:clrMapOvr>
+    <a:masterClrMapping/>
+  </p:clrMapOvr>
+</p:sld>
+</file>
+
+<file path=ppt/slides/slide57.xml><?xml version="1.0" encoding="utf-8"?>
+<p:sld xmlns:a="http://schemas.openxmlformats.org/drawingml/2006/main" xmlns:p="http://schemas.openxmlformats.org/presentationml/2006/main" xmlns:r="http://schemas.openxmlformats.org/officeDocument/2006/relationships">
+  <p:cSld>
+    <p:spTree>
+      <p:nvGrpSpPr>
+        <p:cNvPr id="1" name=""/>
+        <p:cNvGrpSpPr/>
+        <p:nvPr/>
+      </p:nvGrpSpPr>
+      <p:grpSpPr/>
+      <p:sp>
+        <p:nvSpPr>
+          <p:cNvPr id="532" name="Google Shape;532;p53"/>
           <p:cNvSpPr/>
           <p:nvPr/>
         </p:nvSpPr>
         <p:spPr>
           <a:xfrm>
-            <a:off x="6786527" y="1209852"/>
-            <a:ext cx="2071677" cy="3014270"/>
+            <a:off x="303214" y="1022533"/>
+            <a:ext cx="8451939" cy="1433588"/>
+          </a:xfrm>
+          <a:prstGeom prst="rect">
+            <a:avLst/>
+          </a:prstGeom>
+          <a:noFill/>
+          <a:ln>
+            <a:noFill/>
+          </a:ln>
+        </p:spPr>
+        <p:txBody>
+          <a:bodyPr anchorCtr="0" anchor="ctr" bIns="91425" lIns="91425" spcFirstLastPara="1" rIns="91425" wrap="square" tIns="91425">
+            <a:noAutofit/>
+          </a:bodyPr>
+          <a:lstStyle/>
+          <a:p>
+            <a:pPr indent="0" lvl="0" marL="0" rtl="0" algn="l">
+              <a:spcBef>
+                <a:spcPts val="0"/>
+              </a:spcBef>
+              <a:spcAft>
+                <a:spcPts val="0"/>
+              </a:spcAft>
+              <a:buNone/>
+            </a:pPr>
+            <a:r>
+              <a:t/>
+            </a:r>
+            <a:endParaRPr/>
+          </a:p>
+        </p:txBody>
+      </p:sp>
+      <p:sp>
+        <p:nvSpPr>
+          <p:cNvPr id="549" name="Google Shape;549;p53"/>
+          <p:cNvSpPr/>
+          <p:nvPr/>
+        </p:nvSpPr>
+        <p:spPr>
+          <a:xfrm>
+            <a:off x="7359897" y="1022533"/>
+            <a:ext cx="1395256" cy="1433588"/>
+          </a:xfrm>
+          <a:prstGeom prst="rect">
+            <a:avLst/>
+          </a:prstGeom>
+          <a:noFill/>
+          <a:ln>
+            <a:noFill/>
+          </a:ln>
+        </p:spPr>
+        <p:txBody>
+          <a:bodyPr anchorCtr="0" anchor="ctr" bIns="91425" lIns="91425" spcFirstLastPara="1" rIns="91425" wrap="square" tIns="91425">
+            <a:noAutofit/>
+          </a:bodyPr>
+          <a:lstStyle/>
+          <a:p>
+            <a:pPr indent="0" lvl="0" marL="0" rtl="0" algn="l">
+              <a:spcBef>
+                <a:spcPts val="0"/>
+              </a:spcBef>
+              <a:spcAft>
+                <a:spcPts val="0"/>
+              </a:spcAft>
+              <a:buNone/>
+            </a:pPr>
+            <a:r>
+              <a:t/>
+            </a:r>
+            <a:endParaRPr/>
+          </a:p>
+        </p:txBody>
+      </p:sp>
+      <p:sp>
+        <p:nvSpPr>
+          <p:cNvPr id="553" name="Google Shape;553;p53"/>
+          <p:cNvSpPr/>
+          <p:nvPr/>
+        </p:nvSpPr>
+        <p:spPr>
+          <a:xfrm>
+            <a:off x="276488" y="2955549"/>
+            <a:ext cx="8451939" cy="1433588"/>
+          </a:xfrm>
+          <a:prstGeom prst="rect">
+            <a:avLst/>
+          </a:prstGeom>
+          <a:noFill/>
+          <a:ln>
+            <a:noFill/>
+          </a:ln>
+        </p:spPr>
+        <p:txBody>
+          <a:bodyPr anchorCtr="0" anchor="ctr" bIns="91425" lIns="91425" spcFirstLastPara="1" rIns="91425" wrap="square" tIns="91425">
+            <a:noAutofit/>
+          </a:bodyPr>
+          <a:lstStyle/>
+          <a:p>
+            <a:pPr indent="0" lvl="0" marL="0" rtl="0" algn="l">
+              <a:spcBef>
+                <a:spcPts val="0"/>
+              </a:spcBef>
+              <a:spcAft>
+                <a:spcPts val="0"/>
+              </a:spcAft>
+              <a:buNone/>
+            </a:pPr>
+            <a:r>
+              <a:t/>
+            </a:r>
+            <a:endParaRPr/>
+          </a:p>
+        </p:txBody>
+      </p:sp>
+      <p:sp>
+        <p:nvSpPr>
+          <p:cNvPr id="554" name="Google Shape;554;p53"/>
+          <p:cNvSpPr/>
+          <p:nvPr/>
+        </p:nvSpPr>
+        <p:spPr>
+          <a:xfrm>
+            <a:off x="303214" y="2797849"/>
+            <a:ext cx="8451939" cy="1433588"/>
+          </a:xfrm>
+          <a:prstGeom prst="rect">
+            <a:avLst/>
+          </a:prstGeom>
+          <a:noFill/>
+          <a:ln>
+            <a:noFill/>
+          </a:ln>
+        </p:spPr>
+        <p:txBody>
+          <a:bodyPr anchorCtr="0" anchor="ctr" bIns="91425" lIns="91425" spcFirstLastPara="1" rIns="91425" wrap="square" tIns="91425">
+            <a:noAutofit/>
+          </a:bodyPr>
+          <a:lstStyle/>
+          <a:p>
+            <a:pPr indent="0" lvl="0" marL="0" rtl="0" algn="l">
+              <a:spcBef>
+                <a:spcPts val="0"/>
+              </a:spcBef>
+              <a:spcAft>
+                <a:spcPts val="0"/>
+              </a:spcAft>
+              <a:buNone/>
+            </a:pPr>
+            <a:r>
+              <a:t/>
+            </a:r>
+            <a:endParaRPr/>
+          </a:p>
+        </p:txBody>
+      </p:sp>
+      <p:sp>
+        <p:nvSpPr>
+          <p:cNvPr id="571" name="Google Shape;571;p53"/>
+          <p:cNvSpPr/>
+          <p:nvPr/>
+        </p:nvSpPr>
+        <p:spPr>
+          <a:xfrm>
+            <a:off x="7359897" y="2797849"/>
+            <a:ext cx="1395256" cy="1433588"/>
+          </a:xfrm>
+          <a:prstGeom prst="rect">
+            <a:avLst/>
+          </a:prstGeom>
+          <a:noFill/>
+          <a:ln>
+            <a:noFill/>
+          </a:ln>
+        </p:spPr>
+        <p:txBody>
+          <a:bodyPr anchorCtr="0" anchor="ctr" bIns="91425" lIns="91425" spcFirstLastPara="1" rIns="91425" wrap="square" tIns="91425">
+            <a:noAutofit/>
+          </a:bodyPr>
+          <a:lstStyle/>
+          <a:p>
+            <a:pPr indent="0" lvl="0" marL="0" rtl="0" algn="l">
+              <a:spcBef>
+                <a:spcPts val="0"/>
+              </a:spcBef>
+              <a:spcAft>
+                <a:spcPts val="0"/>
+              </a:spcAft>
+              <a:buNone/>
+            </a:pPr>
+            <a:r>
+              <a:t/>
+            </a:r>
+            <a:endParaRPr/>
+          </a:p>
+        </p:txBody>
+      </p:sp>
+      <p:sp>
+        <p:nvSpPr>
+          <p:cNvPr id="572" name="title"/>
+          <p:cNvSpPr txBox="1"/>
+          <p:nvPr/>
+        </p:nvSpPr>
+        <p:spPr>
+          <a:xfrm>
+            <a:off x="274320" y="282943"/>
+            <a:ext cx="6792986" cy="617220"/>
+          </a:xfrm>
+          <a:prstGeom prst="rect">
+            <a:avLst/>
+          </a:prstGeom>
+          <a:noFill/>
+        </p:spPr>
+        <p:txBody>
+          <a:bodyPr wrap="square" lIns="76200" rIns="76200" tIns="50800" bIns="50800">
+            <a:spAutoFit/>
+          </a:bodyPr>
+          <a:lstStyle/>
+          <a:p>
+            <a:pPr algn="l">
+              <a:spcAft>
+                <a:spcPts val="300"/>
+              </a:spcAft>
+              <a:defRPr sz="2705">
+                <a:solidFill>
+                  <a:srgbClr val="000000"/>
+                </a:solidFill>
+                <a:latin typeface="Play"/>
+                <a:ea typeface="Play"/>
+                <a:cs typeface="Play"/>
+              </a:defRPr>
+            </a:pPr>
+            <a:r>
+              <a:rPr sz="2705">
+                <a:solidFill>
+                  <a:srgbClr val="000000"/>
+                </a:solidFill>
+                <a:latin typeface="Play"/>
+                <a:ea typeface="Play"/>
+                <a:cs typeface="Play"/>
+              </a:rPr>
+              <a:t>Сервис: автоматическая вёрстка</a:t>
+            </a:r>
+          </a:p>
+        </p:txBody>
+      </p:sp>
+      <p:sp>
+        <p:nvSpPr>
+          <p:cNvPr id="573" name="lead"/>
+          <p:cNvSpPr txBox="1"/>
+          <p:nvPr/>
+        </p:nvSpPr>
+        <p:spPr>
+          <a:xfrm>
+            <a:off x="274320" y="1414513"/>
+            <a:ext cx="6792986" cy="991268"/>
+          </a:xfrm>
+          <a:prstGeom prst="rect">
+            <a:avLst/>
+          </a:prstGeom>
+          <a:noFill/>
+        </p:spPr>
+        <p:txBody>
+          <a:bodyPr wrap="square" lIns="76200" rIns="76200" tIns="50800" bIns="50800">
+            <a:spAutoFit/>
+          </a:bodyPr>
+          <a:lstStyle/>
+          <a:p>
+            <a:pPr algn="ctr">
+              <a:spcAft>
+                <a:spcPts val="300"/>
+              </a:spcAft>
+              <a:defRPr sz="2705">
+                <a:solidFill>
+                  <a:srgbClr val="000000"/>
+                </a:solidFill>
+                <a:latin typeface="Play"/>
+                <a:ea typeface="Play"/>
+                <a:cs typeface="Play"/>
+              </a:defRPr>
+            </a:pPr>
+            <a:r>
+              <a:rPr sz="2705">
+                <a:solidFill>
+                  <a:srgbClr val="000000"/>
+                </a:solidFill>
+                <a:latin typeface="Play"/>
+                <a:ea typeface="Play"/>
+                <a:cs typeface="Play"/>
+              </a:rPr>
+              <a:t>Принимает шаблон pptx и материалы</a:t>
+            </a:r>
+          </a:p>
+        </p:txBody>
+      </p:sp>
+      <p:sp>
+        <p:nvSpPr>
+          <p:cNvPr id="574" name="body"/>
+          <p:cNvSpPr txBox="1"/>
+          <p:nvPr/>
+        </p:nvSpPr>
+        <p:spPr>
+          <a:xfrm>
+            <a:off x="274320" y="2576894"/>
+            <a:ext cx="6792986" cy="1689484"/>
+          </a:xfrm>
+          <a:prstGeom prst="rect">
+            <a:avLst/>
+          </a:prstGeom>
+          <a:noFill/>
+        </p:spPr>
+        <p:txBody>
+          <a:bodyPr wrap="square" lIns="76200" rIns="76200" tIns="50800" bIns="50800">
+            <a:spAutoFit/>
+          </a:bodyPr>
+          <a:lstStyle/>
+          <a:p>
+            <a:pPr algn="l">
+              <a:spcAft>
+                <a:spcPts val="300"/>
+              </a:spcAft>
+              <a:defRPr sz="1800">
+                <a:solidFill>
+                  <a:srgbClr val="000000"/>
+                </a:solidFill>
+                <a:latin typeface="Play"/>
+                <a:ea typeface="Play"/>
+                <a:cs typeface="Play"/>
+              </a:defRPr>
+            </a:pPr>
+            <a:r>
+              <a:rPr sz="1800">
+                <a:solidFill>
+                  <a:srgbClr val="000000"/>
+                </a:solidFill>
+                <a:latin typeface="Play"/>
+                <a:ea typeface="Play"/>
+                <a:cs typeface="Play"/>
+              </a:rPr>
+              <a:t>• Автоматически формирует дизайн-систему и план колоды</a:t>
+            </a:r>
+          </a:p>
+          <a:p>
+            <a:pPr algn="l">
+              <a:spcAft>
+                <a:spcPts val="300"/>
+              </a:spcAft>
+              <a:defRPr sz="1800">
+                <a:solidFill>
+                  <a:srgbClr val="000000"/>
+                </a:solidFill>
+                <a:latin typeface="Play"/>
+                <a:ea typeface="Play"/>
+                <a:cs typeface="Play"/>
+              </a:defRPr>
+            </a:pPr>
+            <a:r>
+              <a:rPr sz="1800">
+                <a:solidFill>
+                  <a:srgbClr val="000000"/>
+                </a:solidFill>
+                <a:latin typeface="Play"/>
+                <a:ea typeface="Play"/>
+                <a:cs typeface="Play"/>
+              </a:rPr>
+              <a:t>• Экспортирует pptx, pdf, html, слайды остаются редактируемыми</a:t>
+            </a:r>
+          </a:p>
+        </p:txBody>
+      </p:sp>
+    </p:spTree>
+  </p:cSld>
+  <p:clrMapOvr>
+    <a:masterClrMapping/>
+  </p:clrMapOvr>
+</p:sld>
+</file>
+
+<file path=ppt/slides/slide58.xml><?xml version="1.0" encoding="utf-8"?>
+<p:sld xmlns:a="http://schemas.openxmlformats.org/drawingml/2006/main" xmlns:p="http://schemas.openxmlformats.org/presentationml/2006/main" xmlns:r="http://schemas.openxmlformats.org/officeDocument/2006/relationships">
+  <p:cSld>
+    <p:spTree>
+      <p:nvGrpSpPr>
+        <p:cNvPr id="1" name=""/>
+        <p:cNvGrpSpPr/>
+        <p:nvPr/>
+      </p:nvGrpSpPr>
+      <p:grpSpPr/>
+      <p:sp>
+        <p:nvSpPr>
+          <p:cNvPr id="1027" name="Google Shape;1027;p65"/>
+          <p:cNvSpPr/>
+          <p:nvPr/>
+        </p:nvSpPr>
+        <p:spPr>
+          <a:xfrm>
+            <a:off x="6064222" y="1209852"/>
+            <a:ext cx="2793985" cy="3014270"/>
           </a:xfrm>
           <a:prstGeom prst="roundRect">
             <a:avLst>
-              <a:gd fmla="val 4634" name="adj"/>
+              <a:gd fmla="val 3436" name="adj"/>
             </a:avLst>
           </a:prstGeom>
           <a:solidFill>
@@ -5807,13 +6904,226 @@
       </p:sp>
       <p:sp>
         <p:nvSpPr>
-          <p:cNvPr id="682" name="Google Shape;682;p55"/>
+          <p:cNvPr id="1029" name="Google Shape;1029;p65"/>
           <p:cNvSpPr/>
           <p:nvPr/>
         </p:nvSpPr>
         <p:spPr>
           <a:xfrm>
-            <a:off x="6938927" y="1362233"/>
+            <a:off x="3174981" y="1209852"/>
+            <a:ext cx="2793985" cy="3014270"/>
+          </a:xfrm>
+          <a:prstGeom prst="roundRect">
+            <a:avLst>
+              <a:gd fmla="val 3436" name="adj"/>
+            </a:avLst>
+          </a:prstGeom>
+          <a:solidFill>
+            <a:schemeClr val="lt2"/>
+          </a:solidFill>
+          <a:ln>
+            <a:noFill/>
+          </a:ln>
+        </p:spPr>
+        <p:txBody>
+          <a:bodyPr anchorCtr="0" anchor="ctr" bIns="91425" lIns="91425" spcFirstLastPara="1" rIns="91425" wrap="square" tIns="91425">
+            <a:noAutofit/>
+          </a:bodyPr>
+          <a:lstStyle/>
+          <a:p>
+            <a:pPr indent="0" lvl="0" marL="0" rtl="0" algn="l">
+              <a:spcBef>
+                <a:spcPts val="0"/>
+              </a:spcBef>
+              <a:spcAft>
+                <a:spcPts val="0"/>
+              </a:spcAft>
+              <a:buNone/>
+            </a:pPr>
+            <a:r>
+              <a:t/>
+            </a:r>
+            <a:endParaRPr/>
+          </a:p>
+        </p:txBody>
+      </p:sp>
+      <p:sp>
+        <p:nvSpPr>
+          <p:cNvPr id="1031" name="Google Shape;1031;p65"/>
+          <p:cNvSpPr/>
+          <p:nvPr/>
+        </p:nvSpPr>
+        <p:spPr>
+          <a:xfrm>
+            <a:off x="285749" y="1209852"/>
+            <a:ext cx="2793985" cy="3014270"/>
+          </a:xfrm>
+          <a:prstGeom prst="roundRect">
+            <a:avLst>
+              <a:gd fmla="val 3436" name="adj"/>
+            </a:avLst>
+          </a:prstGeom>
+          <a:solidFill>
+            <a:schemeClr val="lt2"/>
+          </a:solidFill>
+          <a:ln>
+            <a:noFill/>
+          </a:ln>
+        </p:spPr>
+        <p:txBody>
+          <a:bodyPr anchorCtr="0" anchor="ctr" bIns="91425" lIns="91425" spcFirstLastPara="1" rIns="91425" wrap="square" tIns="91425">
+            <a:noAutofit/>
+          </a:bodyPr>
+          <a:lstStyle/>
+          <a:p>
+            <a:pPr indent="0" lvl="0" marL="0" rtl="0" algn="l">
+              <a:spcBef>
+                <a:spcPts val="0"/>
+              </a:spcBef>
+              <a:spcAft>
+                <a:spcPts val="0"/>
+              </a:spcAft>
+              <a:buNone/>
+            </a:pPr>
+            <a:r>
+              <a:t/>
+            </a:r>
+            <a:endParaRPr/>
+          </a:p>
+        </p:txBody>
+      </p:sp>
+      <p:sp>
+        <p:nvSpPr>
+          <p:cNvPr id="1032" name="Google Shape;1032;p65"/>
+          <p:cNvSpPr/>
+          <p:nvPr/>
+        </p:nvSpPr>
+        <p:spPr>
+          <a:xfrm>
+            <a:off x="285748" y="286047"/>
+            <a:ext cx="8572456" cy="3938075"/>
+          </a:xfrm>
+          <a:prstGeom prst="rect">
+            <a:avLst/>
+          </a:prstGeom>
+          <a:noFill/>
+          <a:ln>
+            <a:noFill/>
+          </a:ln>
+        </p:spPr>
+        <p:txBody>
+          <a:bodyPr anchorCtr="0" anchor="ctr" bIns="91425" lIns="91425" spcFirstLastPara="1" rIns="91425" wrap="square" tIns="91425">
+            <a:noAutofit/>
+          </a:bodyPr>
+          <a:lstStyle/>
+          <a:p>
+            <a:pPr indent="0" lvl="0" marL="0" rtl="0" algn="l">
+              <a:spcBef>
+                <a:spcPts val="0"/>
+              </a:spcBef>
+              <a:spcAft>
+                <a:spcPts val="0"/>
+              </a:spcAft>
+              <a:buNone/>
+            </a:pPr>
+            <a:r>
+              <a:t/>
+            </a:r>
+            <a:endParaRPr/>
+          </a:p>
+        </p:txBody>
+      </p:sp>
+      <p:sp>
+        <p:nvSpPr>
+          <p:cNvPr id="1033" name="Google Shape;1033;p65"/>
+          <p:cNvSpPr/>
+          <p:nvPr/>
+        </p:nvSpPr>
+        <p:spPr>
+          <a:xfrm>
+            <a:off x="285748" y="1209852"/>
+            <a:ext cx="8572456" cy="3014270"/>
+          </a:xfrm>
+          <a:prstGeom prst="rect">
+            <a:avLst/>
+          </a:prstGeom>
+          <a:noFill/>
+          <a:ln>
+            <a:noFill/>
+          </a:ln>
+        </p:spPr>
+        <p:txBody>
+          <a:bodyPr anchorCtr="0" anchor="ctr" bIns="91425" lIns="91425" spcFirstLastPara="1" rIns="91425" wrap="square" tIns="91425">
+            <a:noAutofit/>
+          </a:bodyPr>
+          <a:lstStyle/>
+          <a:p>
+            <a:pPr indent="0" lvl="0" marL="0" rtl="0" algn="l">
+              <a:spcBef>
+                <a:spcPts val="0"/>
+              </a:spcBef>
+              <a:spcAft>
+                <a:spcPts val="0"/>
+              </a:spcAft>
+              <a:buNone/>
+            </a:pPr>
+            <a:r>
+              <a:t/>
+            </a:r>
+            <a:endParaRPr/>
+          </a:p>
+        </p:txBody>
+      </p:sp>
+      <p:sp>
+        <p:nvSpPr>
+          <p:cNvPr id="1034" name="Google Shape;1034;p65"/>
+          <p:cNvSpPr/>
+          <p:nvPr/>
+        </p:nvSpPr>
+        <p:spPr>
+          <a:xfrm>
+            <a:off x="476248" y="1400327"/>
+            <a:ext cx="2412987" cy="1009519"/>
+          </a:xfrm>
+          <a:prstGeom prst="rect">
+            <a:avLst/>
+          </a:prstGeom>
+          <a:noFill/>
+          <a:ln>
+            <a:noFill/>
+          </a:ln>
+        </p:spPr>
+        <p:txBody>
+          <a:bodyPr anchorCtr="0" anchor="ctr" bIns="91425" lIns="91425" spcFirstLastPara="1" rIns="91425" wrap="square" tIns="91425">
+            <a:noAutofit/>
+          </a:bodyPr>
+          <a:lstStyle/>
+          <a:p>
+            <a:pPr indent="0" lvl="0" marL="0" rtl="0" algn="l">
+              <a:spcBef>
+                <a:spcPts val="0"/>
+              </a:spcBef>
+              <a:spcAft>
+                <a:spcPts val="0"/>
+              </a:spcAft>
+              <a:buNone/>
+            </a:pPr>
+            <a:r>
+              <a:t/>
+            </a:r>
+            <a:endParaRPr/>
+          </a:p>
+        </p:txBody>
+      </p:sp>
+      <p:sp>
+        <p:nvSpPr>
+          <p:cNvPr id="1035" name="Google Shape;1035;p65"/>
+          <p:cNvSpPr/>
+          <p:nvPr/>
+        </p:nvSpPr>
+        <p:spPr>
+          <a:xfrm>
+            <a:off x="476248" y="1400328"/>
             <a:ext cx="76199" cy="76190"/>
           </a:xfrm>
           <a:prstGeom prst="roundRect">
@@ -5852,231 +7162,14 @@
       </p:sp>
       <p:sp>
         <p:nvSpPr>
-          <p:cNvPr id="683" name="title"/>
-          <p:cNvSpPr txBox="1"/>
+          <p:cNvPr id="1040" name="Google Shape;1040;p65"/>
+          <p:cNvSpPr/>
           <p:nvPr/>
         </p:nvSpPr>
         <p:spPr>
           <a:xfrm>
-            <a:off x="274320" y="282943"/>
-            <a:ext cx="6792986" cy="617220"/>
-          </a:xfrm>
-          <a:prstGeom prst="rect">
-            <a:avLst/>
-          </a:prstGeom>
-          <a:noFill/>
-        </p:spPr>
-        <p:txBody>
-          <a:bodyPr wrap="square" lIns="76200" rIns="76200" tIns="50800" bIns="50800">
-            <a:spAutoFit/>
-          </a:bodyPr>
-          <a:lstStyle/>
-          <a:p>
-            <a:pPr algn="l">
-              <a:spcAft>
-                <a:spcPts val="300"/>
-              </a:spcAft>
-              <a:defRPr sz="2705">
-                <a:solidFill>
-                  <a:srgbClr val="000000"/>
-                </a:solidFill>
-                <a:latin typeface="Play"/>
-                <a:ea typeface="Play"/>
-                <a:cs typeface="Play"/>
-              </a:defRPr>
-            </a:pPr>
-            <a:r>
-              <a:rPr sz="2705">
-                <a:solidFill>
-                  <a:srgbClr val="000000"/>
-                </a:solidFill>
-                <a:latin typeface="Play"/>
-                <a:ea typeface="Play"/>
-                <a:cs typeface="Play"/>
-              </a:rPr>
-              <a:t>Контекст и возможность</a:t>
-            </a:r>
-          </a:p>
-        </p:txBody>
-      </p:sp>
-      <p:sp>
-        <p:nvSpPr>
-          <p:cNvPr id="684" name="lead"/>
-          <p:cNvSpPr txBox="1"/>
-          <p:nvPr/>
-        </p:nvSpPr>
-        <p:spPr>
-          <a:xfrm>
-            <a:off x="274320" y="1438431"/>
-            <a:ext cx="6792986" cy="1001011"/>
-          </a:xfrm>
-          <a:prstGeom prst="rect">
-            <a:avLst/>
-          </a:prstGeom>
-          <a:noFill/>
-        </p:spPr>
-        <p:txBody>
-          <a:bodyPr wrap="square" lIns="76200" rIns="76200" tIns="50800" bIns="50800">
-            <a:spAutoFit/>
-          </a:bodyPr>
-          <a:lstStyle/>
-          <a:p>
-            <a:pPr algn="l">
-              <a:spcAft>
-                <a:spcPts val="300"/>
-              </a:spcAft>
-              <a:defRPr sz="2705">
-                <a:solidFill>
-                  <a:srgbClr val="000000"/>
-                </a:solidFill>
-                <a:latin typeface="Play"/>
-                <a:ea typeface="Play"/>
-                <a:cs typeface="Play"/>
-              </a:defRPr>
-            </a:pPr>
-            <a:r>
-              <a:rPr sz="2705">
-                <a:solidFill>
-                  <a:srgbClr val="000000"/>
-                </a:solidFill>
-                <a:latin typeface="Play"/>
-                <a:ea typeface="Play"/>
-                <a:cs typeface="Play"/>
-              </a:rPr>
-              <a:t>Сборка одной презентации 12 слайдов занимает 186 минут</a:t>
-            </a:r>
-          </a:p>
-        </p:txBody>
-      </p:sp>
-      <p:sp>
-        <p:nvSpPr>
-          <p:cNvPr id="685" name="body"/>
-          <p:cNvSpPr txBox="1"/>
-          <p:nvPr/>
-        </p:nvSpPr>
-        <p:spPr>
-          <a:xfrm>
-            <a:off x="274320" y="2599725"/>
-            <a:ext cx="6792986" cy="1510085"/>
-          </a:xfrm>
-          <a:prstGeom prst="rect">
-            <a:avLst/>
-          </a:prstGeom>
-          <a:noFill/>
-        </p:spPr>
-        <p:txBody>
-          <a:bodyPr wrap="square" lIns="76200" rIns="76200" tIns="50800" bIns="50800">
-            <a:spAutoFit/>
-          </a:bodyPr>
-          <a:lstStyle/>
-          <a:p>
-            <a:pPr algn="l">
-              <a:spcAft>
-                <a:spcPts val="300"/>
-              </a:spcAft>
-              <a:defRPr sz="1600">
-                <a:solidFill>
-                  <a:srgbClr val="000000"/>
-                </a:solidFill>
-                <a:latin typeface="Play"/>
-                <a:ea typeface="Play"/>
-                <a:cs typeface="Play"/>
-              </a:defRPr>
-            </a:pPr>
-            <a:r>
-              <a:rPr sz="1600">
-                <a:solidFill>
-                  <a:srgbClr val="000000"/>
-                </a:solidFill>
-                <a:latin typeface="Play"/>
-                <a:ea typeface="Play"/>
-                <a:cs typeface="Play"/>
-              </a:rPr>
-              <a:t>• Дополнительно 74 минуты на правки после ревью дизайнера</a:t>
-            </a:r>
-          </a:p>
-          <a:p>
-            <a:pPr algn="l">
-              <a:spcAft>
-                <a:spcPts val="300"/>
-              </a:spcAft>
-              <a:defRPr sz="1600">
-                <a:solidFill>
-                  <a:srgbClr val="000000"/>
-                </a:solidFill>
-                <a:latin typeface="Play"/>
-                <a:ea typeface="Play"/>
-                <a:cs typeface="Play"/>
-              </a:defRPr>
-            </a:pPr>
-            <a:r>
-              <a:rPr sz="1600">
-                <a:solidFill>
-                  <a:srgbClr val="000000"/>
-                </a:solidFill>
-                <a:latin typeface="Play"/>
-                <a:ea typeface="Play"/>
-                <a:cs typeface="Play"/>
-              </a:rPr>
-              <a:t>• 19 из 42 колод нарушают фирменный стиль</a:t>
-            </a:r>
-          </a:p>
-          <a:p>
-            <a:pPr algn="l">
-              <a:spcAft>
-                <a:spcPts val="300"/>
-              </a:spcAft>
-              <a:defRPr sz="1600">
-                <a:solidFill>
-                  <a:srgbClr val="000000"/>
-                </a:solidFill>
-                <a:latin typeface="Play"/>
-                <a:ea typeface="Play"/>
-                <a:cs typeface="Play"/>
-              </a:defRPr>
-            </a:pPr>
-            <a:r>
-              <a:rPr sz="1600">
-                <a:solidFill>
-                  <a:srgbClr val="000000"/>
-                </a:solidFill>
-                <a:latin typeface="Play"/>
-                <a:ea typeface="Play"/>
-                <a:cs typeface="Play"/>
-              </a:rPr>
-              <a:t>• Дизайн‑отдел из 4 человек закрывает 11 запросов, ожидание 6 дней</a:t>
-            </a:r>
-          </a:p>
-        </p:txBody>
-      </p:sp>
-    </p:spTree>
-  </p:cSld>
-  <p:clrMapOvr>
-    <a:masterClrMapping/>
-  </p:clrMapOvr>
-</p:sld>
-</file>
-
-<file path=ppt/slides/slide57.xml><?xml version="1.0" encoding="utf-8"?>
-<p:sld xmlns:a="http://schemas.openxmlformats.org/drawingml/2006/main" xmlns:p="http://schemas.openxmlformats.org/presentationml/2006/main" xmlns:r="http://schemas.openxmlformats.org/officeDocument/2006/relationships">
-  <p:cSld>
-    <p:spTree>
-      <p:nvGrpSpPr>
-        <p:cNvPr id="1" name=""/>
-        <p:cNvGrpSpPr/>
-        <p:nvPr/>
-      </p:nvGrpSpPr>
-      <p:grpSpPr/>
-      <p:sp>
-        <p:nvSpPr>
-          <p:cNvPr id="532" name="Google Shape;532;p53"/>
-          <p:cNvSpPr/>
-          <p:nvPr/>
-        </p:nvSpPr>
-        <p:spPr>
-          <a:xfrm>
-            <a:off x="303214" y="1022533"/>
-            <a:ext cx="8451939" cy="1433588"/>
+            <a:off x="3365480" y="1400327"/>
+            <a:ext cx="2412987" cy="1009519"/>
           </a:xfrm>
           <a:prstGeom prst="rect">
             <a:avLst/>
@@ -6110,562 +7203,13 @@
       </p:sp>
       <p:sp>
         <p:nvSpPr>
-          <p:cNvPr id="549" name="Google Shape;549;p53"/>
+          <p:cNvPr id="1041" name="Google Shape;1041;p65"/>
           <p:cNvSpPr/>
           <p:nvPr/>
         </p:nvSpPr>
         <p:spPr>
           <a:xfrm>
-            <a:off x="7359897" y="1022533"/>
-            <a:ext cx="1395256" cy="1433588"/>
-          </a:xfrm>
-          <a:prstGeom prst="rect">
-            <a:avLst/>
-          </a:prstGeom>
-          <a:noFill/>
-          <a:ln>
-            <a:noFill/>
-          </a:ln>
-        </p:spPr>
-        <p:txBody>
-          <a:bodyPr anchorCtr="0" anchor="ctr" bIns="91425" lIns="91425" spcFirstLastPara="1" rIns="91425" wrap="square" tIns="91425">
-            <a:noAutofit/>
-          </a:bodyPr>
-          <a:lstStyle/>
-          <a:p>
-            <a:pPr indent="0" lvl="0" marL="0" rtl="0" algn="l">
-              <a:spcBef>
-                <a:spcPts val="0"/>
-              </a:spcBef>
-              <a:spcAft>
-                <a:spcPts val="0"/>
-              </a:spcAft>
-              <a:buNone/>
-            </a:pPr>
-            <a:r>
-              <a:t/>
-            </a:r>
-            <a:endParaRPr/>
-          </a:p>
-        </p:txBody>
-      </p:sp>
-      <p:sp>
-        <p:nvSpPr>
-          <p:cNvPr id="553" name="Google Shape;553;p53"/>
-          <p:cNvSpPr/>
-          <p:nvPr/>
-        </p:nvSpPr>
-        <p:spPr>
-          <a:xfrm>
-            <a:off x="276488" y="2955549"/>
-            <a:ext cx="8451939" cy="1433588"/>
-          </a:xfrm>
-          <a:prstGeom prst="rect">
-            <a:avLst/>
-          </a:prstGeom>
-          <a:noFill/>
-          <a:ln>
-            <a:noFill/>
-          </a:ln>
-        </p:spPr>
-        <p:txBody>
-          <a:bodyPr anchorCtr="0" anchor="ctr" bIns="91425" lIns="91425" spcFirstLastPara="1" rIns="91425" wrap="square" tIns="91425">
-            <a:noAutofit/>
-          </a:bodyPr>
-          <a:lstStyle/>
-          <a:p>
-            <a:pPr indent="0" lvl="0" marL="0" rtl="0" algn="l">
-              <a:spcBef>
-                <a:spcPts val="0"/>
-              </a:spcBef>
-              <a:spcAft>
-                <a:spcPts val="0"/>
-              </a:spcAft>
-              <a:buNone/>
-            </a:pPr>
-            <a:r>
-              <a:t/>
-            </a:r>
-            <a:endParaRPr/>
-          </a:p>
-        </p:txBody>
-      </p:sp>
-      <p:sp>
-        <p:nvSpPr>
-          <p:cNvPr id="554" name="Google Shape;554;p53"/>
-          <p:cNvSpPr/>
-          <p:nvPr/>
-        </p:nvSpPr>
-        <p:spPr>
-          <a:xfrm>
-            <a:off x="303214" y="2797849"/>
-            <a:ext cx="8451939" cy="1433588"/>
-          </a:xfrm>
-          <a:prstGeom prst="rect">
-            <a:avLst/>
-          </a:prstGeom>
-          <a:noFill/>
-          <a:ln>
-            <a:noFill/>
-          </a:ln>
-        </p:spPr>
-        <p:txBody>
-          <a:bodyPr anchorCtr="0" anchor="ctr" bIns="91425" lIns="91425" spcFirstLastPara="1" rIns="91425" wrap="square" tIns="91425">
-            <a:noAutofit/>
-          </a:bodyPr>
-          <a:lstStyle/>
-          <a:p>
-            <a:pPr indent="0" lvl="0" marL="0" rtl="0" algn="l">
-              <a:spcBef>
-                <a:spcPts val="0"/>
-              </a:spcBef>
-              <a:spcAft>
-                <a:spcPts val="0"/>
-              </a:spcAft>
-              <a:buNone/>
-            </a:pPr>
-            <a:r>
-              <a:t/>
-            </a:r>
-            <a:endParaRPr/>
-          </a:p>
-        </p:txBody>
-      </p:sp>
-      <p:sp>
-        <p:nvSpPr>
-          <p:cNvPr id="571" name="Google Shape;571;p53"/>
-          <p:cNvSpPr/>
-          <p:nvPr/>
-        </p:nvSpPr>
-        <p:spPr>
-          <a:xfrm>
-            <a:off x="7359897" y="2797849"/>
-            <a:ext cx="1395256" cy="1433588"/>
-          </a:xfrm>
-          <a:prstGeom prst="rect">
-            <a:avLst/>
-          </a:prstGeom>
-          <a:noFill/>
-          <a:ln>
-            <a:noFill/>
-          </a:ln>
-        </p:spPr>
-        <p:txBody>
-          <a:bodyPr anchorCtr="0" anchor="ctr" bIns="91425" lIns="91425" spcFirstLastPara="1" rIns="91425" wrap="square" tIns="91425">
-            <a:noAutofit/>
-          </a:bodyPr>
-          <a:lstStyle/>
-          <a:p>
-            <a:pPr indent="0" lvl="0" marL="0" rtl="0" algn="l">
-              <a:spcBef>
-                <a:spcPts val="0"/>
-              </a:spcBef>
-              <a:spcAft>
-                <a:spcPts val="0"/>
-              </a:spcAft>
-              <a:buNone/>
-            </a:pPr>
-            <a:r>
-              <a:t/>
-            </a:r>
-            <a:endParaRPr/>
-          </a:p>
-        </p:txBody>
-      </p:sp>
-      <p:sp>
-        <p:nvSpPr>
-          <p:cNvPr id="572" name="title"/>
-          <p:cNvSpPr txBox="1"/>
-          <p:nvPr/>
-        </p:nvSpPr>
-        <p:spPr>
-          <a:xfrm>
-            <a:off x="274320" y="282943"/>
-            <a:ext cx="6792986" cy="617220"/>
-          </a:xfrm>
-          <a:prstGeom prst="rect">
-            <a:avLst/>
-          </a:prstGeom>
-          <a:noFill/>
-        </p:spPr>
-        <p:txBody>
-          <a:bodyPr wrap="square" lIns="76200" rIns="76200" tIns="50800" bIns="50800">
-            <a:spAutoFit/>
-          </a:bodyPr>
-          <a:lstStyle/>
-          <a:p>
-            <a:pPr algn="l">
-              <a:spcAft>
-                <a:spcPts val="300"/>
-              </a:spcAft>
-              <a:defRPr sz="2705">
-                <a:solidFill>
-                  <a:srgbClr val="000000"/>
-                </a:solidFill>
-                <a:latin typeface="Play"/>
-                <a:ea typeface="Play"/>
-                <a:cs typeface="Play"/>
-              </a:defRPr>
-            </a:pPr>
-            <a:r>
-              <a:rPr sz="2705">
-                <a:solidFill>
-                  <a:srgbClr val="000000"/>
-                </a:solidFill>
-                <a:latin typeface="Play"/>
-                <a:ea typeface="Play"/>
-                <a:cs typeface="Play"/>
-              </a:rPr>
-              <a:t>Предложение</a:t>
-            </a:r>
-          </a:p>
-        </p:txBody>
-      </p:sp>
-      <p:sp>
-        <p:nvSpPr>
-          <p:cNvPr id="573" name="lead"/>
-          <p:cNvSpPr txBox="1"/>
-          <p:nvPr/>
-        </p:nvSpPr>
-        <p:spPr>
-          <a:xfrm>
-            <a:off x="274320" y="1414513"/>
-            <a:ext cx="6792986" cy="1292845"/>
-          </a:xfrm>
-          <a:prstGeom prst="rect">
-            <a:avLst/>
-          </a:prstGeom>
-          <a:noFill/>
-        </p:spPr>
-        <p:txBody>
-          <a:bodyPr wrap="square" lIns="76200" rIns="76200" tIns="50800" bIns="50800">
-            <a:spAutoFit/>
-          </a:bodyPr>
-          <a:lstStyle/>
-          <a:p>
-            <a:pPr algn="ctr">
-              <a:spcAft>
-                <a:spcPts val="300"/>
-              </a:spcAft>
-              <a:defRPr sz="2438">
-                <a:solidFill>
-                  <a:srgbClr val="000000"/>
-                </a:solidFill>
-                <a:latin typeface="Play"/>
-                <a:ea typeface="Play"/>
-                <a:cs typeface="Play"/>
-              </a:defRPr>
-            </a:pPr>
-            <a:r>
-              <a:rPr sz="2438">
-                <a:solidFill>
-                  <a:srgbClr val="000000"/>
-                </a:solidFill>
-                <a:latin typeface="Play"/>
-                <a:ea typeface="Play"/>
-                <a:cs typeface="Play"/>
-              </a:rPr>
-              <a:t>Сервис принимает шаблон pptx и материалы, генерирует колоду по дизайн‑системе</a:t>
-            </a:r>
-          </a:p>
-        </p:txBody>
-      </p:sp>
-      <p:sp>
-        <p:nvSpPr>
-          <p:cNvPr id="574" name="body"/>
-          <p:cNvSpPr txBox="1"/>
-          <p:nvPr/>
-        </p:nvSpPr>
-        <p:spPr>
-          <a:xfrm>
-            <a:off x="274320" y="2878471"/>
-            <a:ext cx="6792986" cy="1387907"/>
-          </a:xfrm>
-          <a:prstGeom prst="rect">
-            <a:avLst/>
-          </a:prstGeom>
-          <a:noFill/>
-        </p:spPr>
-        <p:txBody>
-          <a:bodyPr wrap="square" lIns="76200" rIns="76200" tIns="50800" bIns="50800">
-            <a:spAutoFit/>
-          </a:bodyPr>
-          <a:lstStyle/>
-          <a:p>
-            <a:pPr algn="l">
-              <a:spcAft>
-                <a:spcPts val="300"/>
-              </a:spcAft>
-              <a:defRPr sz="1600">
-                <a:solidFill>
-                  <a:srgbClr val="000000"/>
-                </a:solidFill>
-                <a:latin typeface="Play"/>
-                <a:ea typeface="Play"/>
-                <a:cs typeface="Play"/>
-              </a:defRPr>
-            </a:pPr>
-            <a:r>
-              <a:rPr sz="1600">
-                <a:solidFill>
-                  <a:srgbClr val="000000"/>
-                </a:solidFill>
-                <a:latin typeface="Play"/>
-                <a:ea typeface="Play"/>
-                <a:cs typeface="Play"/>
-              </a:rPr>
-              <a:t>• Экспорт в pptx, pdf, html с редактируемыми слайдами</a:t>
-            </a:r>
-          </a:p>
-          <a:p>
-            <a:pPr algn="l">
-              <a:spcAft>
-                <a:spcPts val="300"/>
-              </a:spcAft>
-              <a:defRPr sz="1600">
-                <a:solidFill>
-                  <a:srgbClr val="000000"/>
-                </a:solidFill>
-                <a:latin typeface="Play"/>
-                <a:ea typeface="Play"/>
-                <a:cs typeface="Play"/>
-              </a:defRPr>
-            </a:pPr>
-            <a:r>
-              <a:rPr sz="1600">
-                <a:solidFill>
-                  <a:srgbClr val="000000"/>
-                </a:solidFill>
-                <a:latin typeface="Play"/>
-                <a:ea typeface="Play"/>
-                <a:cs typeface="Play"/>
-              </a:rPr>
-              <a:t>• Аудит качества проверяет стиль и корректирует автоматически</a:t>
-            </a:r>
-          </a:p>
-          <a:p>
-            <a:pPr algn="l">
-              <a:spcAft>
-                <a:spcPts val="300"/>
-              </a:spcAft>
-              <a:defRPr sz="1600">
-                <a:solidFill>
-                  <a:srgbClr val="000000"/>
-                </a:solidFill>
-                <a:latin typeface="Play"/>
-                <a:ea typeface="Play"/>
-                <a:cs typeface="Play"/>
-              </a:defRPr>
-            </a:pPr>
-            <a:r>
-              <a:rPr sz="1600">
-                <a:solidFill>
-                  <a:srgbClr val="000000"/>
-                </a:solidFill>
-                <a:latin typeface="Play"/>
-                <a:ea typeface="Play"/>
-                <a:cs typeface="Play"/>
-              </a:rPr>
-              <a:t>• Слайды остаются редактируемыми, без картинок</a:t>
-            </a:r>
-          </a:p>
-        </p:txBody>
-      </p:sp>
-    </p:spTree>
-  </p:cSld>
-  <p:clrMapOvr>
-    <a:masterClrMapping/>
-  </p:clrMapOvr>
-</p:sld>
-</file>
-
-<file path=ppt/slides/slide58.xml><?xml version="1.0" encoding="utf-8"?>
-<p:sld xmlns:a="http://schemas.openxmlformats.org/drawingml/2006/main" xmlns:p="http://schemas.openxmlformats.org/presentationml/2006/main" xmlns:r="http://schemas.openxmlformats.org/officeDocument/2006/relationships">
-  <p:cSld>
-    <p:spTree>
-      <p:nvGrpSpPr>
-        <p:cNvPr id="1" name=""/>
-        <p:cNvGrpSpPr/>
-        <p:nvPr/>
-      </p:nvGrpSpPr>
-      <p:grpSpPr/>
-      <p:sp>
-        <p:nvSpPr>
-          <p:cNvPr id="662" name="Google Shape;662;p55"/>
-          <p:cNvSpPr/>
-          <p:nvPr/>
-        </p:nvSpPr>
-        <p:spPr>
-          <a:xfrm>
-            <a:off x="8667705" y="4666977"/>
-            <a:ext cx="190499" cy="190475"/>
-          </a:xfrm>
-          <a:prstGeom prst="rect">
-            <a:avLst/>
-          </a:prstGeom>
-          <a:noFill/>
-          <a:ln>
-            <a:noFill/>
-          </a:ln>
-        </p:spPr>
-        <p:txBody>
-          <a:bodyPr anchorCtr="0" anchor="ctr" bIns="91425" lIns="91425" spcFirstLastPara="1" rIns="91425" wrap="square" tIns="91425">
-            <a:noAutofit/>
-          </a:bodyPr>
-          <a:lstStyle/>
-          <a:p>
-            <a:pPr indent="0" lvl="0" marL="0" rtl="0" algn="l">
-              <a:spcBef>
-                <a:spcPts val="0"/>
-              </a:spcBef>
-              <a:spcAft>
-                <a:spcPts val="0"/>
-              </a:spcAft>
-              <a:buNone/>
-            </a:pPr>
-            <a:r>
-              <a:t/>
-            </a:r>
-            <a:endParaRPr/>
-          </a:p>
-        </p:txBody>
-      </p:sp>
-      <p:sp>
-        <p:nvSpPr>
-          <p:cNvPr id="663" name="Google Shape;663;p55"/>
-          <p:cNvSpPr/>
-          <p:nvPr/>
-        </p:nvSpPr>
-        <p:spPr>
-          <a:xfrm>
-            <a:off x="285748" y="286047"/>
-            <a:ext cx="8572456" cy="3938075"/>
-          </a:xfrm>
-          <a:prstGeom prst="rect">
-            <a:avLst/>
-          </a:prstGeom>
-          <a:noFill/>
-          <a:ln>
-            <a:noFill/>
-          </a:ln>
-        </p:spPr>
-        <p:txBody>
-          <a:bodyPr anchorCtr="0" anchor="ctr" bIns="91425" lIns="91425" spcFirstLastPara="1" rIns="91425" wrap="square" tIns="91425">
-            <a:noAutofit/>
-          </a:bodyPr>
-          <a:lstStyle/>
-          <a:p>
-            <a:pPr indent="0" lvl="0" marL="0" rtl="0" algn="l">
-              <a:spcBef>
-                <a:spcPts val="0"/>
-              </a:spcBef>
-              <a:spcAft>
-                <a:spcPts val="0"/>
-              </a:spcAft>
-              <a:buNone/>
-            </a:pPr>
-            <a:r>
-              <a:t/>
-            </a:r>
-            <a:endParaRPr/>
-          </a:p>
-        </p:txBody>
-      </p:sp>
-      <p:sp>
-        <p:nvSpPr>
-          <p:cNvPr id="664" name="Google Shape;664;p55"/>
-          <p:cNvSpPr/>
-          <p:nvPr/>
-        </p:nvSpPr>
-        <p:spPr>
-          <a:xfrm>
-            <a:off x="285748" y="1209852"/>
-            <a:ext cx="8572456" cy="3014270"/>
-          </a:xfrm>
-          <a:prstGeom prst="rect">
-            <a:avLst/>
-          </a:prstGeom>
-          <a:noFill/>
-          <a:ln>
-            <a:noFill/>
-          </a:ln>
-        </p:spPr>
-        <p:txBody>
-          <a:bodyPr anchorCtr="0" anchor="ctr" bIns="91425" lIns="91425" spcFirstLastPara="1" rIns="91425" wrap="square" tIns="91425">
-            <a:noAutofit/>
-          </a:bodyPr>
-          <a:lstStyle/>
-          <a:p>
-            <a:pPr indent="0" lvl="0" marL="0" rtl="0" algn="l">
-              <a:spcBef>
-                <a:spcPts val="0"/>
-              </a:spcBef>
-              <a:spcAft>
-                <a:spcPts val="0"/>
-              </a:spcAft>
-              <a:buNone/>
-            </a:pPr>
-            <a:r>
-              <a:t/>
-            </a:r>
-            <a:endParaRPr/>
-          </a:p>
-        </p:txBody>
-      </p:sp>
-      <p:sp>
-        <p:nvSpPr>
-          <p:cNvPr id="665" name="Google Shape;665;p55"/>
-          <p:cNvSpPr/>
-          <p:nvPr/>
-        </p:nvSpPr>
-        <p:spPr>
-          <a:xfrm>
-            <a:off x="285749" y="1209852"/>
-            <a:ext cx="2071677" cy="3014270"/>
-          </a:xfrm>
-          <a:prstGeom prst="roundRect">
-            <a:avLst>
-              <a:gd fmla="val 4634" name="adj"/>
-            </a:avLst>
-          </a:prstGeom>
-          <a:solidFill>
-            <a:schemeClr val="lt2"/>
-          </a:solidFill>
-          <a:ln>
-            <a:noFill/>
-          </a:ln>
-        </p:spPr>
-        <p:txBody>
-          <a:bodyPr anchorCtr="0" anchor="ctr" bIns="91425" lIns="91425" spcFirstLastPara="1" rIns="91425" wrap="square" tIns="91425">
-            <a:noAutofit/>
-          </a:bodyPr>
-          <a:lstStyle/>
-          <a:p>
-            <a:pPr indent="0" lvl="0" marL="0" rtl="0" algn="l">
-              <a:spcBef>
-                <a:spcPts val="0"/>
-              </a:spcBef>
-              <a:spcAft>
-                <a:spcPts val="0"/>
-              </a:spcAft>
-              <a:buNone/>
-            </a:pPr>
-            <a:r>
-              <a:t/>
-            </a:r>
-            <a:endParaRPr/>
-          </a:p>
-        </p:txBody>
-      </p:sp>
-      <p:sp>
-        <p:nvSpPr>
-          <p:cNvPr id="667" name="Google Shape;667;p55"/>
-          <p:cNvSpPr/>
-          <p:nvPr/>
-        </p:nvSpPr>
-        <p:spPr>
-          <a:xfrm>
-            <a:off x="438148" y="1362233"/>
+            <a:off x="3365480" y="1400328"/>
             <a:ext cx="76199" cy="76190"/>
           </a:xfrm>
           <a:prstGeom prst="roundRect">
@@ -6704,23 +7248,19 @@
       </p:sp>
       <p:sp>
         <p:nvSpPr>
-          <p:cNvPr id="670" name="Google Shape;670;p55"/>
+          <p:cNvPr id="1045" name="Google Shape;1045;p65"/>
           <p:cNvSpPr/>
           <p:nvPr/>
         </p:nvSpPr>
         <p:spPr>
           <a:xfrm>
-            <a:off x="2452675" y="1209852"/>
-            <a:ext cx="2071677" cy="3014270"/>
+            <a:off x="6254721" y="1400327"/>
+            <a:ext cx="2412987" cy="1009519"/>
           </a:xfrm>
-          <a:prstGeom prst="roundRect">
-            <a:avLst>
-              <a:gd fmla="val 4634" name="adj"/>
-            </a:avLst>
+          <a:prstGeom prst="rect">
+            <a:avLst/>
           </a:prstGeom>
-          <a:solidFill>
-            <a:schemeClr val="lt2"/>
-          </a:solidFill>
+          <a:noFill/>
           <a:ln>
             <a:noFill/>
           </a:ln>
@@ -6749,13 +7289,13 @@
       </p:sp>
       <p:sp>
         <p:nvSpPr>
-          <p:cNvPr id="672" name="Google Shape;672;p55"/>
+          <p:cNvPr id="1046" name="Google Shape;1046;p65"/>
           <p:cNvSpPr/>
           <p:nvPr/>
         </p:nvSpPr>
         <p:spPr>
           <a:xfrm>
-            <a:off x="2605074" y="1362233"/>
+            <a:off x="6254721" y="1400328"/>
             <a:ext cx="76199" cy="76190"/>
           </a:xfrm>
           <a:prstGeom prst="roundRect">
@@ -6794,187 +7334,7 @@
       </p:sp>
       <p:sp>
         <p:nvSpPr>
-          <p:cNvPr id="675" name="Google Shape;675;p55"/>
-          <p:cNvSpPr/>
-          <p:nvPr/>
-        </p:nvSpPr>
-        <p:spPr>
-          <a:xfrm>
-            <a:off x="4619601" y="1209852"/>
-            <a:ext cx="2071677" cy="3014270"/>
-          </a:xfrm>
-          <a:prstGeom prst="roundRect">
-            <a:avLst>
-              <a:gd fmla="val 4634" name="adj"/>
-            </a:avLst>
-          </a:prstGeom>
-          <a:solidFill>
-            <a:schemeClr val="lt2"/>
-          </a:solidFill>
-          <a:ln>
-            <a:noFill/>
-          </a:ln>
-        </p:spPr>
-        <p:txBody>
-          <a:bodyPr anchorCtr="0" anchor="ctr" bIns="91425" lIns="91425" spcFirstLastPara="1" rIns="91425" wrap="square" tIns="91425">
-            <a:noAutofit/>
-          </a:bodyPr>
-          <a:lstStyle/>
-          <a:p>
-            <a:pPr indent="0" lvl="0" marL="0" rtl="0" algn="l">
-              <a:spcBef>
-                <a:spcPts val="0"/>
-              </a:spcBef>
-              <a:spcAft>
-                <a:spcPts val="0"/>
-              </a:spcAft>
-              <a:buNone/>
-            </a:pPr>
-            <a:r>
-              <a:t/>
-            </a:r>
-            <a:endParaRPr/>
-          </a:p>
-        </p:txBody>
-      </p:sp>
-      <p:sp>
-        <p:nvSpPr>
-          <p:cNvPr id="677" name="Google Shape;677;p55"/>
-          <p:cNvSpPr/>
-          <p:nvPr/>
-        </p:nvSpPr>
-        <p:spPr>
-          <a:xfrm>
-            <a:off x="4772001" y="1362233"/>
-            <a:ext cx="76199" cy="76190"/>
-          </a:xfrm>
-          <a:prstGeom prst="roundRect">
-            <a:avLst>
-              <a:gd fmla="val 31500" name="adj"/>
-            </a:avLst>
-          </a:prstGeom>
-          <a:solidFill>
-            <a:srgbClr val="0077FF"/>
-          </a:solidFill>
-          <a:ln>
-            <a:noFill/>
-          </a:ln>
-        </p:spPr>
-        <p:txBody>
-          <a:bodyPr anchorCtr="0" anchor="ctr" bIns="91425" lIns="91425" spcFirstLastPara="1" rIns="91425" wrap="square" tIns="91425">
-            <a:noAutofit/>
-          </a:bodyPr>
-          <a:lstStyle/>
-          <a:p>
-            <a:pPr indent="0" lvl="0" marL="0" rtl="0" algn="l">
-              <a:spcBef>
-                <a:spcPts val="0"/>
-              </a:spcBef>
-              <a:spcAft>
-                <a:spcPts val="0"/>
-              </a:spcAft>
-              <a:buNone/>
-            </a:pPr>
-            <a:r>
-              <a:t/>
-            </a:r>
-            <a:endParaRPr/>
-          </a:p>
-        </p:txBody>
-      </p:sp>
-      <p:sp>
-        <p:nvSpPr>
-          <p:cNvPr id="680" name="Google Shape;680;p55"/>
-          <p:cNvSpPr/>
-          <p:nvPr/>
-        </p:nvSpPr>
-        <p:spPr>
-          <a:xfrm>
-            <a:off x="6786527" y="1209852"/>
-            <a:ext cx="2071677" cy="3014270"/>
-          </a:xfrm>
-          <a:prstGeom prst="roundRect">
-            <a:avLst>
-              <a:gd fmla="val 4634" name="adj"/>
-            </a:avLst>
-          </a:prstGeom>
-          <a:solidFill>
-            <a:schemeClr val="lt2"/>
-          </a:solidFill>
-          <a:ln>
-            <a:noFill/>
-          </a:ln>
-        </p:spPr>
-        <p:txBody>
-          <a:bodyPr anchorCtr="0" anchor="ctr" bIns="91425" lIns="91425" spcFirstLastPara="1" rIns="91425" wrap="square" tIns="91425">
-            <a:noAutofit/>
-          </a:bodyPr>
-          <a:lstStyle/>
-          <a:p>
-            <a:pPr indent="0" lvl="0" marL="0" rtl="0" algn="l">
-              <a:spcBef>
-                <a:spcPts val="0"/>
-              </a:spcBef>
-              <a:spcAft>
-                <a:spcPts val="0"/>
-              </a:spcAft>
-              <a:buNone/>
-            </a:pPr>
-            <a:r>
-              <a:t/>
-            </a:r>
-            <a:endParaRPr/>
-          </a:p>
-        </p:txBody>
-      </p:sp>
-      <p:sp>
-        <p:nvSpPr>
-          <p:cNvPr id="682" name="Google Shape;682;p55"/>
-          <p:cNvSpPr/>
-          <p:nvPr/>
-        </p:nvSpPr>
-        <p:spPr>
-          <a:xfrm>
-            <a:off x="6938927" y="1362233"/>
-            <a:ext cx="76199" cy="76190"/>
-          </a:xfrm>
-          <a:prstGeom prst="roundRect">
-            <a:avLst>
-              <a:gd fmla="val 31500" name="adj"/>
-            </a:avLst>
-          </a:prstGeom>
-          <a:solidFill>
-            <a:srgbClr val="0077FF"/>
-          </a:solidFill>
-          <a:ln>
-            <a:noFill/>
-          </a:ln>
-        </p:spPr>
-        <p:txBody>
-          <a:bodyPr anchorCtr="0" anchor="ctr" bIns="91425" lIns="91425" spcFirstLastPara="1" rIns="91425" wrap="square" tIns="91425">
-            <a:noAutofit/>
-          </a:bodyPr>
-          <a:lstStyle/>
-          <a:p>
-            <a:pPr indent="0" lvl="0" marL="0" rtl="0" algn="l">
-              <a:spcBef>
-                <a:spcPts val="0"/>
-              </a:spcBef>
-              <a:spcAft>
-                <a:spcPts val="0"/>
-              </a:spcAft>
-              <a:buNone/>
-            </a:pPr>
-            <a:r>
-              <a:t/>
-            </a:r>
-            <a:endParaRPr/>
-          </a:p>
-        </p:txBody>
-      </p:sp>
-      <p:sp>
-        <p:nvSpPr>
-          <p:cNvPr id="683" name="title"/>
+          <p:cNvPr id="1047" name="title"/>
           <p:cNvSpPr txBox="1"/>
           <p:nvPr/>
         </p:nvSpPr>
@@ -7016,21 +7376,21 @@
                 <a:ea typeface="Play"/>
                 <a:cs typeface="Play"/>
               </a:rPr>
-              <a:t>Ожидаемый эффект</a:t>
+              <a:t>Пилот: 68 колод, 4 мин сборки</a:t>
             </a:r>
           </a:p>
         </p:txBody>
       </p:sp>
       <p:sp>
         <p:nvSpPr>
-          <p:cNvPr id="684" name="lead"/>
+          <p:cNvPr id="1048" name="lead"/>
           <p:cNvSpPr txBox="1"/>
           <p:nvPr/>
         </p:nvSpPr>
         <p:spPr>
           <a:xfrm>
-            <a:off x="274320" y="1438431"/>
-            <a:ext cx="6792986" cy="943132"/>
+            <a:off x="274320" y="1476493"/>
+            <a:ext cx="6792986" cy="361960"/>
           </a:xfrm>
           <a:prstGeom prst="rect">
             <a:avLst/>
@@ -7047,7 +7407,7 @@
               <a:spcAft>
                 <a:spcPts val="300"/>
               </a:spcAft>
-              <a:defRPr sz="2438">
+              <a:defRPr sz="1400">
                 <a:solidFill>
                   <a:srgbClr val="000000"/>
                 </a:solidFill>
@@ -7057,7 +7417,7 @@
               </a:defRPr>
             </a:pPr>
             <a:r>
-              <a:rPr sz="2438">
+              <a:rPr sz="1400">
                 <a:solidFill>
                   <a:srgbClr val="000000"/>
                 </a:solidFill>
@@ -7065,21 +7425,21 @@
                 <a:ea typeface="Play"/>
                 <a:cs typeface="Play"/>
               </a:rPr>
-              <a:t>Средняя сборка колоды 12 слайдов сократилась до 4 минут</a:t>
+              <a:t>68 колод собраны за 6 недель</a:t>
             </a:r>
           </a:p>
         </p:txBody>
       </p:sp>
       <p:sp>
         <p:nvSpPr>
-          <p:cNvPr id="685" name="body"/>
+          <p:cNvPr id="1049" name="body"/>
           <p:cNvSpPr txBox="1"/>
           <p:nvPr/>
         </p:nvSpPr>
         <p:spPr>
           <a:xfrm>
-            <a:off x="274320" y="2541846"/>
-            <a:ext cx="6792986" cy="1567963"/>
+            <a:off x="274320" y="1897503"/>
+            <a:ext cx="6792986" cy="563146"/>
           </a:xfrm>
           <a:prstGeom prst="rect">
             <a:avLst/>
@@ -7096,7 +7456,7 @@
               <a:spcAft>
                 <a:spcPts val="300"/>
               </a:spcAft>
-              <a:defRPr sz="1600">
+              <a:defRPr sz="1200">
                 <a:solidFill>
                   <a:srgbClr val="000000"/>
                 </a:solidFill>
@@ -7106,7 +7466,7 @@
               </a:defRPr>
             </a:pPr>
             <a:r>
-              <a:rPr sz="1600">
+              <a:rPr sz="1200">
                 <a:solidFill>
                   <a:srgbClr val="000000"/>
                 </a:solidFill>
@@ -7114,7 +7474,7 @@
                 <a:ea typeface="Play"/>
                 <a:cs typeface="Play"/>
               </a:rPr>
-              <a:t>• Время до первой версии уменьшилось с 6 дней до 1 дня</a:t>
+              <a:t>• Среднее время сборки 4 мин вместо 186</a:t>
             </a:r>
           </a:p>
           <a:p>
@@ -7122,7 +7482,7 @@
               <a:spcAft>
                 <a:spcPts val="300"/>
               </a:spcAft>
-              <a:defRPr sz="1600">
+              <a:defRPr sz="1200">
                 <a:solidFill>
                   <a:srgbClr val="000000"/>
                 </a:solidFill>
@@ -7132,7 +7492,7 @@
               </a:defRPr>
             </a:pPr>
             <a:r>
-              <a:rPr sz="1600">
+              <a:rPr sz="1200">
                 <a:solidFill>
                   <a:srgbClr val="000000"/>
                 </a:solidFill>
@@ -7140,33 +7500,7 @@
                 <a:ea typeface="Play"/>
                 <a:cs typeface="Play"/>
               </a:rPr>
-              <a:t>• Нарушения фирменного стиля в пилоте 2 из 68, исправлены автоматически</a:t>
-            </a:r>
-          </a:p>
-          <a:p>
-            <a:pPr algn="l">
-              <a:spcAft>
-                <a:spcPts val="300"/>
-              </a:spcAft>
-              <a:defRPr sz="1600">
-                <a:solidFill>
-                  <a:srgbClr val="000000"/>
-                </a:solidFill>
-                <a:latin typeface="Play"/>
-                <a:ea typeface="Play"/>
-                <a:cs typeface="Play"/>
-              </a:defRPr>
-            </a:pPr>
-            <a:r>
-              <a:rPr sz="1600">
-                <a:solidFill>
-                  <a:srgbClr val="000000"/>
-                </a:solidFill>
-                <a:latin typeface="Play"/>
-                <a:ea typeface="Play"/>
-                <a:cs typeface="Play"/>
-              </a:rPr>
-              <a:t>• Дизайнеры закрыли 38 запросов за 6 недель вместо 11 в неделю</a:t>
+              <a:t>• Время до первой версии сократилось с 6 дней до 1</a:t>
             </a:r>
           </a:p>
         </p:txBody>
@@ -7269,7 +7603,7 @@
               <a:spcAft>
                 <a:spcPts val="300"/>
               </a:spcAft>
-              <a:defRPr sz="2705">
+              <a:defRPr sz="2438">
                 <a:solidFill>
                   <a:srgbClr val="000000"/>
                 </a:solidFill>
@@ -7279,7 +7613,7 @@
               </a:defRPr>
             </a:pPr>
             <a:r>
-              <a:rPr sz="2705">
+              <a:rPr sz="2438">
                 <a:solidFill>
                   <a:srgbClr val="000000"/>
                 </a:solidFill>
@@ -7287,161 +7621,29 @@
                 <a:ea typeface="Play"/>
                 <a:cs typeface="Play"/>
               </a:rPr>
-              <a:t>Что потребуется: ресурсы и сроки</a:t>
+              <a:t>Время сборки</a:t>
             </a:r>
           </a:p>
         </p:txBody>
       </p:sp>
-      <p:sp>
-        <p:nvSpPr>
-          <p:cNvPr id="2252" name="lead"/>
-          <p:cNvSpPr txBox="1"/>
+      <p:graphicFrame>
+        <p:nvGraphicFramePr>
+          <p:cNvPr id="2252" name="Chart 2251"/>
+          <p:cNvGraphicFramePr>
+            <a:graphicFrameLocks noGrp="1"/>
+          </p:cNvGraphicFramePr>
           <p:nvPr/>
-        </p:nvSpPr>
-        <p:spPr>
-          <a:xfrm>
-            <a:off x="274320" y="1414513"/>
-            <a:ext cx="6792986" cy="735068"/>
-          </a:xfrm>
-          <a:prstGeom prst="rect">
-            <a:avLst/>
-          </a:prstGeom>
-          <a:noFill/>
-        </p:spPr>
-        <p:txBody>
-          <a:bodyPr wrap="square" lIns="76200" rIns="76200" tIns="50800" bIns="50800">
-            <a:spAutoFit/>
-          </a:bodyPr>
-          <a:lstStyle/>
-          <a:p>
-            <a:pPr algn="l">
-              <a:spcAft>
-                <a:spcPts val="300"/>
-              </a:spcAft>
-              <a:defRPr sz="1800" b="1">
-                <a:solidFill>
-                  <a:srgbClr val="000000"/>
-                </a:solidFill>
-                <a:latin typeface="Play"/>
-                <a:ea typeface="Play"/>
-                <a:cs typeface="Play"/>
-              </a:defRPr>
-            </a:pPr>
-            <a:r>
-              <a:rPr sz="1800" b="1">
-                <a:solidFill>
-                  <a:srgbClr val="000000"/>
-                </a:solidFill>
-                <a:latin typeface="Play"/>
-                <a:ea typeface="Play"/>
-                <a:cs typeface="Play"/>
-              </a:rPr>
-              <a:t>Сервис работает на машине 2 vCPU / 2 ГБ RAM</a:t>
-            </a:r>
-          </a:p>
-        </p:txBody>
-      </p:sp>
-      <p:sp>
-        <p:nvSpPr>
-          <p:cNvPr id="2253" name="body"/>
-          <p:cNvSpPr txBox="1"/>
-          <p:nvPr/>
-        </p:nvSpPr>
-        <p:spPr>
-          <a:xfrm>
-            <a:off x="274320" y="2279300"/>
-            <a:ext cx="6792986" cy="1297180"/>
-          </a:xfrm>
-          <a:prstGeom prst="rect">
-            <a:avLst/>
-          </a:prstGeom>
-          <a:noFill/>
-        </p:spPr>
-        <p:txBody>
-          <a:bodyPr wrap="square" lIns="76200" rIns="76200" tIns="50800" bIns="50800">
-            <a:spAutoFit/>
-          </a:bodyPr>
-          <a:lstStyle/>
-          <a:p>
-            <a:pPr algn="l">
-              <a:spcAft>
-                <a:spcPts val="300"/>
-              </a:spcAft>
-              <a:defRPr sz="1600" b="1">
-                <a:solidFill>
-                  <a:srgbClr val="000000"/>
-                </a:solidFill>
-                <a:latin typeface="Play"/>
-                <a:ea typeface="Play"/>
-                <a:cs typeface="Play"/>
-              </a:defRPr>
-            </a:pPr>
-            <a:r>
-              <a:rPr sz="1600" b="1">
-                <a:solidFill>
-                  <a:srgbClr val="000000"/>
-                </a:solidFill>
-                <a:latin typeface="Play"/>
-                <a:ea typeface="Play"/>
-                <a:cs typeface="Play"/>
-              </a:rPr>
-              <a:t>• Модель gpt-oss-20b, инференс за 6 недель 1 400 руб</a:t>
-            </a:r>
-          </a:p>
-          <a:p>
-            <a:pPr algn="l">
-              <a:spcAft>
-                <a:spcPts val="300"/>
-              </a:spcAft>
-              <a:defRPr sz="1600" b="1">
-                <a:solidFill>
-                  <a:srgbClr val="000000"/>
-                </a:solidFill>
-                <a:latin typeface="Play"/>
-                <a:ea typeface="Play"/>
-                <a:cs typeface="Play"/>
-              </a:defRPr>
-            </a:pPr>
-            <a:r>
-              <a:rPr sz="1600" b="1">
-                <a:solidFill>
-                  <a:srgbClr val="000000"/>
-                </a:solidFill>
-                <a:latin typeface="Play"/>
-                <a:ea typeface="Play"/>
-                <a:cs typeface="Play"/>
-              </a:rPr>
-              <a:t>• Третий квартал 2026: подключение 4 команд, домен и HTTPS</a:t>
-            </a:r>
-          </a:p>
-          <a:p>
-            <a:pPr algn="l">
-              <a:spcAft>
-                <a:spcPts val="300"/>
-              </a:spcAft>
-              <a:defRPr sz="1600" b="1">
-                <a:solidFill>
-                  <a:srgbClr val="000000"/>
-                </a:solidFill>
-                <a:latin typeface="Play"/>
-                <a:ea typeface="Play"/>
-                <a:cs typeface="Play"/>
-              </a:defRPr>
-            </a:pPr>
-            <a:r>
-              <a:rPr sz="1600" b="1">
-                <a:solidFill>
-                  <a:srgbClr val="000000"/>
-                </a:solidFill>
-                <a:latin typeface="Play"/>
-                <a:ea typeface="Play"/>
-                <a:cs typeface="Play"/>
-              </a:rPr>
-              <a:t>• Четвёртый квартал 2026: доступ для всей компании, интеграция с хранилищем</a:t>
-            </a:r>
-          </a:p>
-        </p:txBody>
-      </p:sp>
+        </p:nvGraphicFramePr>
+        <p:xfrm>
+          <a:off x="274320" y="1414513"/>
+          <a:ext cx="7189469" cy="2161967"/>
+        </p:xfrm>
+        <a:graphic>
+          <a:graphicData uri="http://schemas.openxmlformats.org/drawingml/2006/chart">
+            <c:chart xmlns:c="http://schemas.openxmlformats.org/drawingml/2006/chart" r:id="rId4"/>
+          </a:graphicData>
+        </a:graphic>
+      </p:graphicFrame>
     </p:spTree>
   </p:cSld>
   <p:clrMapOvr>
@@ -7651,36 +7853,9 @@
           </a:p>
         </p:txBody>
       </p:sp>
-      <p:pic>
-        <p:nvPicPr>
-          <p:cNvPr descr=" " id="2394" name="Google Shape;2394;p88"/>
-          <p:cNvPicPr preferRelativeResize="0"/>
-          <p:nvPr/>
-        </p:nvPicPr>
-        <p:blipFill rotWithShape="1">
-          <a:blip r:embed="rId3">
-            <a:alphaModFix/>
-          </a:blip>
-          <a:srcRect b="0" l="0" r="0" t="0"/>
-          <a:stretch/>
-        </p:blipFill>
-        <p:spPr>
-          <a:xfrm>
-            <a:off x="1" y="3684300"/>
-            <a:ext cx="7238962" cy="70126"/>
-          </a:xfrm>
-          <a:prstGeom prst="rect">
-            <a:avLst/>
-          </a:prstGeom>
-          <a:noFill/>
-          <a:ln>
-            <a:noFill/>
-          </a:ln>
-        </p:spPr>
-      </p:pic>
-      <p:sp>
-        <p:nvSpPr>
-          <p:cNvPr id="2395" name="title"/>
+      <p:sp>
+        <p:nvSpPr>
+          <p:cNvPr id="2393" name="title"/>
           <p:cNvSpPr txBox="1"/>
           <p:nvPr/>
         </p:nvSpPr>
@@ -7704,7 +7879,7 @@
               <a:spcAft>
                 <a:spcPts val="300"/>
               </a:spcAft>
-              <a:defRPr sz="2705">
+              <a:defRPr sz="2438">
                 <a:solidFill>
                   <a:srgbClr val="000000"/>
                 </a:solidFill>
@@ -7714,7 +7889,7 @@
               </a:defRPr>
             </a:pPr>
             <a:r>
-              <a:rPr sz="2705">
+              <a:rPr sz="2438">
                 <a:solidFill>
                   <a:srgbClr val="000000"/>
                 </a:solidFill>
@@ -7722,448 +7897,29 @@
                 <a:ea typeface="Play"/>
                 <a:cs typeface="Play"/>
               </a:rPr>
-              <a:t>План пилота</a:t>
+              <a:t>Нарушения фирменного стиля</a:t>
             </a:r>
           </a:p>
         </p:txBody>
       </p:sp>
-      <p:sp>
-        <p:nvSpPr>
-          <p:cNvPr id="2396" name="Rectangle 2395"/>
-          <p:cNvSpPr/>
+      <p:graphicFrame>
+        <p:nvGraphicFramePr>
+          <p:cNvPr id="2394" name="Chart 2393"/>
+          <p:cNvGraphicFramePr>
+            <a:graphicFrameLocks noGrp="1"/>
+          </p:cNvGraphicFramePr>
           <p:nvPr/>
-        </p:nvSpPr>
-        <p:spPr>
-          <a:xfrm>
-            <a:off x="274320" y="2412824"/>
-            <a:ext cx="8344814" cy="26282"/>
-          </a:xfrm>
-          <a:prstGeom prst="rect">
-            <a:avLst/>
-          </a:prstGeom>
-          <a:solidFill>
-            <a:srgbClr val="0077FF"/>
-          </a:solidFill>
-          <a:ln>
-            <a:noFill/>
-          </a:ln>
-        </p:spPr>
-        <p:style>
-          <a:lnRef idx="1">
-            <a:schemeClr val="accent1"/>
-          </a:lnRef>
-          <a:fillRef idx="3">
-            <a:schemeClr val="accent1"/>
-          </a:fillRef>
-          <a:effectRef idx="2">
-            <a:schemeClr val="accent1"/>
-          </a:effectRef>
-          <a:fontRef idx="minor">
-            <a:schemeClr val="lt1"/>
-          </a:fontRef>
-        </p:style>
-        <p:txBody>
-          <a:bodyPr rtlCol="0" anchor="ctr"/>
-          <a:lstStyle/>
-          <a:p>
-            <a:pPr algn="ctr"/>
-          </a:p>
-        </p:txBody>
-      </p:sp>
-      <p:sp>
-        <p:nvSpPr>
-          <p:cNvPr id="2397" name="Oval 2396"/>
-          <p:cNvSpPr/>
-          <p:nvPr/>
-        </p:nvSpPr>
-        <p:spPr>
-          <a:xfrm>
-            <a:off x="1568752" y="2329595"/>
-            <a:ext cx="192740" cy="192740"/>
-          </a:xfrm>
-          <a:prstGeom prst="ellipse">
-            <a:avLst/>
-          </a:prstGeom>
-          <a:solidFill>
-            <a:srgbClr val="0077FF"/>
-          </a:solidFill>
-          <a:ln>
-            <a:noFill/>
-          </a:ln>
-        </p:spPr>
-        <p:style>
-          <a:lnRef idx="1">
-            <a:schemeClr val="accent1"/>
-          </a:lnRef>
-          <a:fillRef idx="3">
-            <a:schemeClr val="accent1"/>
-          </a:fillRef>
-          <a:effectRef idx="2">
-            <a:schemeClr val="accent1"/>
-          </a:effectRef>
-          <a:fontRef idx="minor">
-            <a:schemeClr val="lt1"/>
-          </a:fontRef>
-        </p:style>
-        <p:txBody>
-          <a:bodyPr rtlCol="0" anchor="ctr"/>
-          <a:lstStyle/>
-          <a:p>
-            <a:pPr algn="ctr"/>
-          </a:p>
-        </p:txBody>
-      </p:sp>
-      <p:sp>
-        <p:nvSpPr>
-          <p:cNvPr id="2398" name="TextBox 2397"/>
-          <p:cNvSpPr txBox="1"/>
-          <p:nvPr/>
-        </p:nvSpPr>
-        <p:spPr>
-          <a:xfrm>
-            <a:off x="274320" y="2009822"/>
-            <a:ext cx="4172407" cy="332914"/>
-          </a:xfrm>
-          <a:prstGeom prst="rect">
-            <a:avLst/>
-          </a:prstGeom>
-          <a:noFill/>
-        </p:spPr>
-        <p:txBody>
-          <a:bodyPr wrap="square" lIns="12700" rIns="12700" tIns="12700" bIns="12700">
-            <a:spAutoFit/>
-          </a:bodyPr>
-          <a:lstStyle/>
-          <a:p>
-            <a:pPr algn="ctr">
-              <a:defRPr sz="1400" b="0">
-                <a:solidFill>
-                  <a:srgbClr val="000000"/>
-                </a:solidFill>
-                <a:latin typeface="Play"/>
-                <a:ea typeface="Play"/>
-                <a:cs typeface="Play"/>
-              </a:defRPr>
-            </a:pPr>
-            <a:r>
-              <a:rPr sz="1400" b="0">
-                <a:solidFill>
-                  <a:srgbClr val="000000"/>
-                </a:solidFill>
-                <a:latin typeface="Play"/>
-                <a:ea typeface="Play"/>
-                <a:cs typeface="Play"/>
-              </a:rPr>
-              <a:t>Подготовка</a:t>
-            </a:r>
-          </a:p>
-        </p:txBody>
-      </p:sp>
-      <p:sp>
-        <p:nvSpPr>
-          <p:cNvPr id="2399" name="Oval 2398"/>
-          <p:cNvSpPr/>
-          <p:nvPr/>
-        </p:nvSpPr>
-        <p:spPr>
-          <a:xfrm>
-            <a:off x="4350356" y="2329595"/>
-            <a:ext cx="192740" cy="192740"/>
-          </a:xfrm>
-          <a:prstGeom prst="ellipse">
-            <a:avLst/>
-          </a:prstGeom>
-          <a:solidFill>
-            <a:srgbClr val="0077FF"/>
-          </a:solidFill>
-          <a:ln>
-            <a:noFill/>
-          </a:ln>
-        </p:spPr>
-        <p:style>
-          <a:lnRef idx="1">
-            <a:schemeClr val="accent1"/>
-          </a:lnRef>
-          <a:fillRef idx="3">
-            <a:schemeClr val="accent1"/>
-          </a:fillRef>
-          <a:effectRef idx="2">
-            <a:schemeClr val="accent1"/>
-          </a:effectRef>
-          <a:fontRef idx="minor">
-            <a:schemeClr val="lt1"/>
-          </a:fontRef>
-        </p:style>
-        <p:txBody>
-          <a:bodyPr rtlCol="0" anchor="ctr"/>
-          <a:lstStyle/>
-          <a:p>
-            <a:pPr algn="ctr"/>
-          </a:p>
-        </p:txBody>
-      </p:sp>
-      <p:sp>
-        <p:nvSpPr>
-          <p:cNvPr id="2400" name="TextBox 2399"/>
-          <p:cNvSpPr txBox="1"/>
-          <p:nvPr/>
-        </p:nvSpPr>
-        <p:spPr>
-          <a:xfrm>
-            <a:off x="2360523" y="2605564"/>
-            <a:ext cx="4172407" cy="332914"/>
-          </a:xfrm>
-          <a:prstGeom prst="rect">
-            <a:avLst/>
-          </a:prstGeom>
-          <a:noFill/>
-        </p:spPr>
-        <p:txBody>
-          <a:bodyPr wrap="square" lIns="12700" rIns="12700" tIns="12700" bIns="12700">
-            <a:spAutoFit/>
-          </a:bodyPr>
-          <a:lstStyle/>
-          <a:p>
-            <a:pPr algn="ctr">
-              <a:defRPr sz="1400" b="0">
-                <a:solidFill>
-                  <a:srgbClr val="000000"/>
-                </a:solidFill>
-                <a:latin typeface="Play"/>
-                <a:ea typeface="Play"/>
-                <a:cs typeface="Play"/>
-              </a:defRPr>
-            </a:pPr>
-            <a:r>
-              <a:rPr sz="1400" b="0">
-                <a:solidFill>
-                  <a:srgbClr val="000000"/>
-                </a:solidFill>
-                <a:latin typeface="Play"/>
-                <a:ea typeface="Play"/>
-                <a:cs typeface="Play"/>
-              </a:rPr>
-              <a:t>Запуск</a:t>
-            </a:r>
-          </a:p>
-        </p:txBody>
-      </p:sp>
-      <p:sp>
-        <p:nvSpPr>
-          <p:cNvPr id="2401" name="Oval 2400"/>
-          <p:cNvSpPr/>
-          <p:nvPr/>
-        </p:nvSpPr>
-        <p:spPr>
-          <a:xfrm>
-            <a:off x="7131961" y="2329595"/>
-            <a:ext cx="192740" cy="192740"/>
-          </a:xfrm>
-          <a:prstGeom prst="ellipse">
-            <a:avLst/>
-          </a:prstGeom>
-          <a:solidFill>
-            <a:srgbClr val="0077FF"/>
-          </a:solidFill>
-          <a:ln>
-            <a:noFill/>
-          </a:ln>
-        </p:spPr>
-        <p:style>
-          <a:lnRef idx="1">
-            <a:schemeClr val="accent1"/>
-          </a:lnRef>
-          <a:fillRef idx="3">
-            <a:schemeClr val="accent1"/>
-          </a:fillRef>
-          <a:effectRef idx="2">
-            <a:schemeClr val="accent1"/>
-          </a:effectRef>
-          <a:fontRef idx="minor">
-            <a:schemeClr val="lt1"/>
-          </a:fontRef>
-        </p:style>
-        <p:txBody>
-          <a:bodyPr rtlCol="0" anchor="ctr"/>
-          <a:lstStyle/>
-          <a:p>
-            <a:pPr algn="ctr"/>
-          </a:p>
-        </p:txBody>
-      </p:sp>
-      <p:sp>
-        <p:nvSpPr>
-          <p:cNvPr id="2402" name="TextBox 2401"/>
-          <p:cNvSpPr txBox="1"/>
-          <p:nvPr/>
-        </p:nvSpPr>
-        <p:spPr>
-          <a:xfrm>
-            <a:off x="4446727" y="2009822"/>
-            <a:ext cx="4172407" cy="332914"/>
-          </a:xfrm>
-          <a:prstGeom prst="rect">
-            <a:avLst/>
-          </a:prstGeom>
-          <a:noFill/>
-        </p:spPr>
-        <p:txBody>
-          <a:bodyPr wrap="square" lIns="12700" rIns="12700" tIns="12700" bIns="12700">
-            <a:spAutoFit/>
-          </a:bodyPr>
-          <a:lstStyle/>
-          <a:p>
-            <a:pPr algn="ctr">
-              <a:defRPr sz="1400" b="0">
-                <a:solidFill>
-                  <a:srgbClr val="000000"/>
-                </a:solidFill>
-                <a:latin typeface="Play"/>
-                <a:ea typeface="Play"/>
-                <a:cs typeface="Play"/>
-              </a:defRPr>
-            </a:pPr>
-            <a:r>
-              <a:rPr sz="1400" b="0">
-                <a:solidFill>
-                  <a:srgbClr val="000000"/>
-                </a:solidFill>
-                <a:latin typeface="Play"/>
-                <a:ea typeface="Play"/>
-                <a:cs typeface="Play"/>
-              </a:rPr>
-              <a:t>Оценка</a:t>
-            </a:r>
-          </a:p>
-        </p:txBody>
-      </p:sp>
-      <p:sp>
-        <p:nvSpPr>
-          <p:cNvPr id="2403" name="body"/>
-          <p:cNvSpPr txBox="1"/>
-          <p:nvPr/>
-        </p:nvSpPr>
-        <p:spPr>
-          <a:xfrm>
-            <a:off x="274320" y="2885914"/>
-            <a:ext cx="8344814" cy="798374"/>
-          </a:xfrm>
-          <a:prstGeom prst="rect">
-            <a:avLst/>
-          </a:prstGeom>
-          <a:noFill/>
-        </p:spPr>
-        <p:txBody>
-          <a:bodyPr wrap="square" lIns="76200" rIns="76200" tIns="50800" bIns="50800">
-            <a:spAutoFit/>
-          </a:bodyPr>
-          <a:lstStyle/>
-          <a:p>
-            <a:pPr algn="l">
-              <a:spcAft>
-                <a:spcPts val="300"/>
-              </a:spcAft>
-              <a:defRPr sz="1200">
-                <a:solidFill>
-                  <a:srgbClr val="000000"/>
-                </a:solidFill>
-                <a:latin typeface="Play"/>
-                <a:ea typeface="Play"/>
-                <a:cs typeface="Play"/>
-              </a:defRPr>
-            </a:pPr>
-            <a:r>
-              <a:rPr sz="1200">
-                <a:solidFill>
-                  <a:srgbClr val="000000"/>
-                </a:solidFill>
-                <a:latin typeface="Play"/>
-                <a:ea typeface="Play"/>
-                <a:cs typeface="Play"/>
-              </a:rPr>
-              <a:t>• Пилот 6 недель на двух командах</a:t>
-            </a:r>
-          </a:p>
-          <a:p>
-            <a:pPr algn="l">
-              <a:spcAft>
-                <a:spcPts val="300"/>
-              </a:spcAft>
-              <a:defRPr sz="1200">
-                <a:solidFill>
-                  <a:srgbClr val="000000"/>
-                </a:solidFill>
-                <a:latin typeface="Play"/>
-                <a:ea typeface="Play"/>
-                <a:cs typeface="Play"/>
-              </a:defRPr>
-            </a:pPr>
-            <a:r>
-              <a:rPr sz="1200">
-                <a:solidFill>
-                  <a:srgbClr val="000000"/>
-                </a:solidFill>
-                <a:latin typeface="Play"/>
-                <a:ea typeface="Play"/>
-                <a:cs typeface="Play"/>
-              </a:rPr>
-              <a:t>• Собрано 68 презентаций</a:t>
-            </a:r>
-          </a:p>
-          <a:p>
-            <a:pPr algn="l">
-              <a:spcAft>
-                <a:spcPts val="300"/>
-              </a:spcAft>
-              <a:defRPr sz="1200">
-                <a:solidFill>
-                  <a:srgbClr val="000000"/>
-                </a:solidFill>
-                <a:latin typeface="Play"/>
-                <a:ea typeface="Play"/>
-                <a:cs typeface="Play"/>
-              </a:defRPr>
-            </a:pPr>
-            <a:r>
-              <a:rPr sz="1200">
-                <a:solidFill>
-                  <a:srgbClr val="000000"/>
-                </a:solidFill>
-                <a:latin typeface="Play"/>
-                <a:ea typeface="Play"/>
-                <a:cs typeface="Play"/>
-              </a:rPr>
-              <a:t>• Время сборки 4 мин, ожидание 1 день</a:t>
-            </a:r>
-          </a:p>
-          <a:p>
-            <a:pPr algn="l">
-              <a:spcAft>
-                <a:spcPts val="300"/>
-              </a:spcAft>
-              <a:defRPr sz="1200">
-                <a:solidFill>
-                  <a:srgbClr val="000000"/>
-                </a:solidFill>
-                <a:latin typeface="Play"/>
-                <a:ea typeface="Play"/>
-                <a:cs typeface="Play"/>
-              </a:defRPr>
-            </a:pPr>
-            <a:r>
-              <a:rPr sz="1200">
-                <a:solidFill>
-                  <a:srgbClr val="000000"/>
-                </a:solidFill>
-                <a:latin typeface="Play"/>
-                <a:ea typeface="Play"/>
-                <a:cs typeface="Play"/>
-              </a:rPr>
-              <a:t>• Нарушения стиля 2 из 68, исправлены автоматически</a:t>
-            </a:r>
-          </a:p>
-        </p:txBody>
-      </p:sp>
+        </p:nvGraphicFramePr>
+        <p:xfrm>
+          <a:off x="274320" y="2009822"/>
+          <a:ext cx="8344814" cy="2160270"/>
+        </p:xfrm>
+        <a:graphic>
+          <a:graphicData uri="http://schemas.openxmlformats.org/drawingml/2006/chart">
+            <c:chart xmlns:c="http://schemas.openxmlformats.org/drawingml/2006/chart" r:id="rId4"/>
+          </a:graphicData>
+        </a:graphic>
+      </p:graphicFrame>
     </p:spTree>
   </p:cSld>
   <p:clrMapOvr>
@@ -8376,21 +8132,273 @@
                 <a:ea typeface="Play"/>
                 <a:cs typeface="Play"/>
               </a:rPr>
-              <a:t>Что мы просим решить</a:t>
+              <a:t>Пилот: 6 недель, 2 команды</a:t>
             </a:r>
           </a:p>
         </p:txBody>
       </p:sp>
       <p:sp>
         <p:nvSpPr>
-          <p:cNvPr id="2435" name="lead"/>
-          <p:cNvSpPr txBox="1"/>
+          <p:cNvPr id="2435" name="Pentagon 2434"/>
+          <p:cNvSpPr/>
           <p:nvPr/>
         </p:nvSpPr>
         <p:spPr>
           <a:xfrm>
             <a:off x="274320" y="1414513"/>
-            <a:ext cx="6792986" cy="447970"/>
+            <a:ext cx="2011100" cy="661947"/>
+          </a:xfrm>
+          <a:prstGeom prst="homePlate">
+            <a:avLst/>
+          </a:prstGeom>
+          <a:solidFill>
+            <a:srgbClr val="0077FF"/>
+          </a:solidFill>
+          <a:ln>
+            <a:noFill/>
+          </a:ln>
+        </p:spPr>
+        <p:style>
+          <a:lnRef idx="1">
+            <a:schemeClr val="accent1"/>
+          </a:lnRef>
+          <a:fillRef idx="3">
+            <a:schemeClr val="accent1"/>
+          </a:fillRef>
+          <a:effectRef idx="2">
+            <a:schemeClr val="accent1"/>
+          </a:effectRef>
+          <a:fontRef idx="minor">
+            <a:schemeClr val="lt1"/>
+          </a:fontRef>
+        </p:style>
+        <p:txBody>
+          <a:bodyPr rtlCol="0" anchor="ctr" wrap="square" lIns="12700" rIns="12700" tIns="12700" bIns="12700"/>
+          <a:lstStyle/>
+          <a:p>
+            <a:pPr algn="ctr">
+              <a:defRPr sz="1336" b="0">
+                <a:solidFill>
+                  <a:srgbClr val="FFFFFF"/>
+                </a:solidFill>
+                <a:latin typeface="Play"/>
+                <a:ea typeface="Play"/>
+                <a:cs typeface="Play"/>
+              </a:defRPr>
+            </a:pPr>
+            <a:r>
+              <a:rPr sz="1336" b="0">
+                <a:solidFill>
+                  <a:srgbClr val="FFFFFF"/>
+                </a:solidFill>
+                <a:latin typeface="Play"/>
+                <a:ea typeface="Play"/>
+                <a:cs typeface="Play"/>
+              </a:rPr>
+              <a:t>Подготовка</a:t>
+            </a:r>
+          </a:p>
+        </p:txBody>
+      </p:sp>
+      <p:sp>
+        <p:nvSpPr>
+          <p:cNvPr id="2436" name="Chevron 2435"/>
+          <p:cNvSpPr/>
+          <p:nvPr/>
+        </p:nvSpPr>
+        <p:spPr>
+          <a:xfrm>
+            <a:off x="2385557" y="1414513"/>
+            <a:ext cx="2011100" cy="661947"/>
+          </a:xfrm>
+          <a:prstGeom prst="chevron">
+            <a:avLst/>
+          </a:prstGeom>
+          <a:solidFill>
+            <a:srgbClr val="0077FF"/>
+          </a:solidFill>
+          <a:ln>
+            <a:noFill/>
+          </a:ln>
+        </p:spPr>
+        <p:style>
+          <a:lnRef idx="1">
+            <a:schemeClr val="accent1"/>
+          </a:lnRef>
+          <a:fillRef idx="3">
+            <a:schemeClr val="accent1"/>
+          </a:fillRef>
+          <a:effectRef idx="2">
+            <a:schemeClr val="accent1"/>
+          </a:effectRef>
+          <a:fontRef idx="minor">
+            <a:schemeClr val="lt1"/>
+          </a:fontRef>
+        </p:style>
+        <p:txBody>
+          <a:bodyPr rtlCol="0" anchor="ctr" wrap="square" lIns="12700" rIns="12700" tIns="12700" bIns="12700"/>
+          <a:lstStyle/>
+          <a:p>
+            <a:pPr algn="ctr">
+              <a:defRPr sz="1336" b="0">
+                <a:solidFill>
+                  <a:srgbClr val="FFFFFF"/>
+                </a:solidFill>
+                <a:latin typeface="Play"/>
+                <a:ea typeface="Play"/>
+                <a:cs typeface="Play"/>
+              </a:defRPr>
+            </a:pPr>
+            <a:r>
+              <a:rPr sz="1336" b="0">
+                <a:solidFill>
+                  <a:srgbClr val="FFFFFF"/>
+                </a:solidFill>
+                <a:latin typeface="Play"/>
+                <a:ea typeface="Play"/>
+                <a:cs typeface="Play"/>
+              </a:rPr>
+              <a:t>Запуск</a:t>
+            </a:r>
+          </a:p>
+        </p:txBody>
+      </p:sp>
+      <p:sp>
+        <p:nvSpPr>
+          <p:cNvPr id="2437" name="Chevron 2436"/>
+          <p:cNvSpPr/>
+          <p:nvPr/>
+        </p:nvSpPr>
+        <p:spPr>
+          <a:xfrm>
+            <a:off x="4496795" y="1414513"/>
+            <a:ext cx="2011100" cy="661947"/>
+          </a:xfrm>
+          <a:prstGeom prst="chevron">
+            <a:avLst/>
+          </a:prstGeom>
+          <a:solidFill>
+            <a:srgbClr val="0077FF"/>
+          </a:solidFill>
+          <a:ln>
+            <a:noFill/>
+          </a:ln>
+        </p:spPr>
+        <p:style>
+          <a:lnRef idx="1">
+            <a:schemeClr val="accent1"/>
+          </a:lnRef>
+          <a:fillRef idx="3">
+            <a:schemeClr val="accent1"/>
+          </a:fillRef>
+          <a:effectRef idx="2">
+            <a:schemeClr val="accent1"/>
+          </a:effectRef>
+          <a:fontRef idx="minor">
+            <a:schemeClr val="lt1"/>
+          </a:fontRef>
+        </p:style>
+        <p:txBody>
+          <a:bodyPr rtlCol="0" anchor="ctr" wrap="square" lIns="12700" rIns="12700" tIns="12700" bIns="12700"/>
+          <a:lstStyle/>
+          <a:p>
+            <a:pPr algn="ctr">
+              <a:defRPr sz="1336" b="0">
+                <a:solidFill>
+                  <a:srgbClr val="FFFFFF"/>
+                </a:solidFill>
+                <a:latin typeface="Play"/>
+                <a:ea typeface="Play"/>
+                <a:cs typeface="Play"/>
+              </a:defRPr>
+            </a:pPr>
+            <a:r>
+              <a:rPr sz="1336" b="0">
+                <a:solidFill>
+                  <a:srgbClr val="FFFFFF"/>
+                </a:solidFill>
+                <a:latin typeface="Play"/>
+                <a:ea typeface="Play"/>
+                <a:cs typeface="Play"/>
+              </a:rPr>
+              <a:t>Аудит</a:t>
+            </a:r>
+          </a:p>
+        </p:txBody>
+      </p:sp>
+      <p:sp>
+        <p:nvSpPr>
+          <p:cNvPr id="2438" name="Chevron 2437"/>
+          <p:cNvSpPr/>
+          <p:nvPr/>
+        </p:nvSpPr>
+        <p:spPr>
+          <a:xfrm>
+            <a:off x="6608033" y="1414513"/>
+            <a:ext cx="2011100" cy="661947"/>
+          </a:xfrm>
+          <a:prstGeom prst="chevron">
+            <a:avLst/>
+          </a:prstGeom>
+          <a:solidFill>
+            <a:srgbClr val="0077FF"/>
+          </a:solidFill>
+          <a:ln>
+            <a:noFill/>
+          </a:ln>
+        </p:spPr>
+        <p:style>
+          <a:lnRef idx="1">
+            <a:schemeClr val="accent1"/>
+          </a:lnRef>
+          <a:fillRef idx="3">
+            <a:schemeClr val="accent1"/>
+          </a:fillRef>
+          <a:effectRef idx="2">
+            <a:schemeClr val="accent1"/>
+          </a:effectRef>
+          <a:fontRef idx="minor">
+            <a:schemeClr val="lt1"/>
+          </a:fontRef>
+        </p:style>
+        <p:txBody>
+          <a:bodyPr rtlCol="0" anchor="ctr" wrap="square" lIns="12700" rIns="12700" tIns="12700" bIns="12700"/>
+          <a:lstStyle/>
+          <a:p>
+            <a:pPr algn="ctr">
+              <a:defRPr sz="1336" b="0">
+                <a:solidFill>
+                  <a:srgbClr val="FFFFFF"/>
+                </a:solidFill>
+                <a:latin typeface="Play"/>
+                <a:ea typeface="Play"/>
+                <a:cs typeface="Play"/>
+              </a:defRPr>
+            </a:pPr>
+            <a:r>
+              <a:rPr sz="1336" b="0">
+                <a:solidFill>
+                  <a:srgbClr val="FFFFFF"/>
+                </a:solidFill>
+                <a:latin typeface="Play"/>
+                <a:ea typeface="Play"/>
+                <a:cs typeface="Play"/>
+              </a:rPr>
+              <a:t>Экспорт</a:t>
+            </a:r>
+          </a:p>
+        </p:txBody>
+      </p:sp>
+      <p:sp>
+        <p:nvSpPr>
+          <p:cNvPr id="2439" name="body"/>
+          <p:cNvSpPr txBox="1"/>
+          <p:nvPr/>
+        </p:nvSpPr>
+        <p:spPr>
+          <a:xfrm>
+            <a:off x="274320" y="2076461"/>
+            <a:ext cx="8344814" cy="655611"/>
           </a:xfrm>
           <a:prstGeom prst="rect">
             <a:avLst/>
@@ -8407,55 +8415,6 @@
               <a:spcAft>
                 <a:spcPts val="300"/>
               </a:spcAft>
-              <a:defRPr sz="1800">
-                <a:solidFill>
-                  <a:srgbClr val="000000"/>
-                </a:solidFill>
-                <a:latin typeface="Play"/>
-                <a:ea typeface="Play"/>
-                <a:cs typeface="Play"/>
-              </a:defRPr>
-            </a:pPr>
-            <a:r>
-              <a:rPr sz="1800">
-                <a:solidFill>
-                  <a:srgbClr val="000000"/>
-                </a:solidFill>
-                <a:latin typeface="Play"/>
-                <a:ea typeface="Play"/>
-                <a:cs typeface="Play"/>
-              </a:rPr>
-              <a:t>Решить о запуске сервиса на всю компанию</a:t>
-            </a:r>
-          </a:p>
-        </p:txBody>
-      </p:sp>
-      <p:sp>
-        <p:nvSpPr>
-          <p:cNvPr id="2436" name="body"/>
-          <p:cNvSpPr txBox="1"/>
-          <p:nvPr/>
-        </p:nvSpPr>
-        <p:spPr>
-          <a:xfrm>
-            <a:off x="274320" y="1941537"/>
-            <a:ext cx="6792986" cy="790535"/>
-          </a:xfrm>
-          <a:prstGeom prst="rect">
-            <a:avLst/>
-          </a:prstGeom>
-          <a:noFill/>
-        </p:spPr>
-        <p:txBody>
-          <a:bodyPr wrap="square" lIns="76200" rIns="76200" tIns="50800" bIns="50800">
-            <a:spAutoFit/>
-          </a:bodyPr>
-          <a:lstStyle/>
-          <a:p>
-            <a:pPr algn="l">
-              <a:spcAft>
-                <a:spcPts val="300"/>
-              </a:spcAft>
               <a:defRPr sz="1200">
                 <a:solidFill>
                   <a:srgbClr val="000000"/>
@@ -8474,7 +8433,7 @@
                 <a:ea typeface="Play"/>
                 <a:cs typeface="Play"/>
               </a:rPr>
-              <a:t>• Подтвердить бюджет и ресурсы для масштабирования</a:t>
+              <a:t>• 2 недели подготовки и обучения команд</a:t>
             </a:r>
           </a:p>
           <a:p>
@@ -8500,7 +8459,7 @@
                 <a:ea typeface="Play"/>
                 <a:cs typeface="Play"/>
               </a:rPr>
-              <a:t>• Определить ответственных за интеграцию с корпоративными системами</a:t>
+              <a:t>• Запуск пилота на 2 командах</a:t>
             </a:r>
           </a:p>
           <a:p>
@@ -8526,7 +8485,33 @@
                 <a:ea typeface="Play"/>
                 <a:cs typeface="Play"/>
               </a:rPr>
-              <a:t>• Утвердить сроки внедрения в Q4 2026</a:t>
+              <a:t>• Аудит качества проверяет все числа</a:t>
+            </a:r>
+          </a:p>
+          <a:p>
+            <a:pPr algn="l">
+              <a:spcAft>
+                <a:spcPts val="300"/>
+              </a:spcAft>
+              <a:defRPr sz="1200">
+                <a:solidFill>
+                  <a:srgbClr val="000000"/>
+                </a:solidFill>
+                <a:latin typeface="Play"/>
+                <a:ea typeface="Play"/>
+                <a:cs typeface="Play"/>
+              </a:defRPr>
+            </a:pPr>
+            <a:r>
+              <a:rPr sz="1200">
+                <a:solidFill>
+                  <a:srgbClr val="000000"/>
+                </a:solidFill>
+                <a:latin typeface="Play"/>
+                <a:ea typeface="Play"/>
+                <a:cs typeface="Play"/>
+              </a:rPr>
+              <a:t>• Экспорт готовых колод в pptx, pdf, html</a:t>
             </a:r>
           </a:p>
         </p:txBody>
@@ -8798,7 +8783,7 @@
                 <a:ea typeface="Play"/>
                 <a:cs typeface="Play"/>
               </a:rPr>
-              <a:t>Риски</a:t>
+              <a:t>Ресурсы и сроки</a:t>
             </a:r>
           </a:p>
         </p:txBody>
@@ -8812,7 +8797,7 @@
         <p:spPr>
           <a:xfrm>
             <a:off x="274320" y="1414513"/>
-            <a:ext cx="6792986" cy="1028386"/>
+            <a:ext cx="6792986" cy="969634"/>
           </a:xfrm>
           <a:prstGeom prst="rect">
             <a:avLst/>
@@ -8829,7 +8814,7 @@
               <a:spcAft>
                 <a:spcPts val="300"/>
               </a:spcAft>
-              <a:defRPr sz="2705">
+              <a:defRPr sz="2438">
                 <a:solidFill>
                   <a:srgbClr val="000000"/>
                 </a:solidFill>
@@ -8839,7 +8824,7 @@
               </a:defRPr>
             </a:pPr>
             <a:r>
-              <a:rPr sz="2705">
+              <a:rPr sz="2438">
                 <a:solidFill>
                   <a:srgbClr val="000000"/>
                 </a:solidFill>
@@ -8847,7 +8832,7 @@
                 <a:ea typeface="Play"/>
                 <a:cs typeface="Play"/>
               </a:rPr>
-              <a:t>Слабая модель может выдумать цифры, аудит проверяет каждое число</a:t>
+              <a:t>Сервис работает на 2 vCPU / 2 ГБ RAM</a:t>
             </a:r>
           </a:p>
         </p:txBody>
@@ -8860,8 +8845,8 @@
         </p:nvSpPr>
         <p:spPr>
           <a:xfrm>
-            <a:off x="274320" y="2614012"/>
-            <a:ext cx="6792986" cy="1652366"/>
+            <a:off x="274320" y="2555259"/>
+            <a:ext cx="6792986" cy="1711119"/>
           </a:xfrm>
           <a:prstGeom prst="rect">
             <a:avLst/>
@@ -8896,7 +8881,7 @@
                 <a:ea typeface="Play"/>
                 <a:cs typeface="Play"/>
               </a:rPr>
-              <a:t>• Неправильный шаблон может привести к плохому дизайну, сервис использует рабочую область</a:t>
+              <a:t>• Инференс за 6 недель стоит 1 400 руб</a:t>
             </a:r>
           </a:p>
           <a:p>
@@ -8922,7 +8907,7 @@
                 <a:ea typeface="Play"/>
                 <a:cs typeface="Play"/>
               </a:rPr>
-              <a:t>• Нагрузка выше 20 задач требует внешней очереди</a:t>
+              <a:t>• План: Q3 2026 подключить 4 команды, домен и HTTPS</a:t>
             </a:r>
           </a:p>
           <a:p>
@@ -8948,7 +8933,33 @@
                 <a:ea typeface="Play"/>
                 <a:cs typeface="Play"/>
               </a:rPr>
-              <a:t>• Зависимость от OpenAI‑совместимого протокола может ограничить масштаб</a:t>
+              <a:t>• Q4 2026 доступ для всей компании, интеграция с хранилищем</a:t>
+            </a:r>
+          </a:p>
+          <a:p>
+            <a:pPr algn="l">
+              <a:spcAft>
+                <a:spcPts val="300"/>
+              </a:spcAft>
+              <a:defRPr sz="1800">
+                <a:solidFill>
+                  <a:srgbClr val="000000"/>
+                </a:solidFill>
+                <a:latin typeface="Play"/>
+                <a:ea typeface="Play"/>
+                <a:cs typeface="Play"/>
+              </a:defRPr>
+            </a:pPr>
+            <a:r>
+              <a:rPr sz="1800">
+                <a:solidFill>
+                  <a:srgbClr val="000000"/>
+                </a:solidFill>
+                <a:latin typeface="Play"/>
+                <a:ea typeface="Play"/>
+                <a:cs typeface="Play"/>
+              </a:rPr>
+              <a:t>• Q1 2027 генерация иллюстраций под стиль шаблона</a:t>
             </a:r>
           </a:p>
         </p:txBody>
@@ -8973,19 +8984,23 @@
       <p:grpSpPr/>
       <p:sp>
         <p:nvSpPr>
-          <p:cNvPr id="662" name="Google Shape;662;p55"/>
+          <p:cNvPr id="1027" name="Google Shape;1027;p65"/>
           <p:cNvSpPr/>
           <p:nvPr/>
         </p:nvSpPr>
         <p:spPr>
           <a:xfrm>
-            <a:off x="8667705" y="4666977"/>
-            <a:ext cx="190499" cy="190475"/>
+            <a:off x="6064222" y="1209852"/>
+            <a:ext cx="2793985" cy="3014270"/>
           </a:xfrm>
-          <a:prstGeom prst="rect">
-            <a:avLst/>
+          <a:prstGeom prst="roundRect">
+            <a:avLst>
+              <a:gd fmla="val 3436" name="adj"/>
+            </a:avLst>
           </a:prstGeom>
-          <a:noFill/>
+          <a:solidFill>
+            <a:schemeClr val="lt2"/>
+          </a:solidFill>
           <a:ln>
             <a:noFill/>
           </a:ln>
@@ -9014,7 +9029,97 @@
       </p:sp>
       <p:sp>
         <p:nvSpPr>
-          <p:cNvPr id="663" name="Google Shape;663;p55"/>
+          <p:cNvPr id="1029" name="Google Shape;1029;p65"/>
+          <p:cNvSpPr/>
+          <p:nvPr/>
+        </p:nvSpPr>
+        <p:spPr>
+          <a:xfrm>
+            <a:off x="3174981" y="1209852"/>
+            <a:ext cx="2793985" cy="3014270"/>
+          </a:xfrm>
+          <a:prstGeom prst="roundRect">
+            <a:avLst>
+              <a:gd fmla="val 3436" name="adj"/>
+            </a:avLst>
+          </a:prstGeom>
+          <a:solidFill>
+            <a:schemeClr val="lt2"/>
+          </a:solidFill>
+          <a:ln>
+            <a:noFill/>
+          </a:ln>
+        </p:spPr>
+        <p:txBody>
+          <a:bodyPr anchorCtr="0" anchor="ctr" bIns="91425" lIns="91425" spcFirstLastPara="1" rIns="91425" wrap="square" tIns="91425">
+            <a:noAutofit/>
+          </a:bodyPr>
+          <a:lstStyle/>
+          <a:p>
+            <a:pPr indent="0" lvl="0" marL="0" rtl="0" algn="l">
+              <a:spcBef>
+                <a:spcPts val="0"/>
+              </a:spcBef>
+              <a:spcAft>
+                <a:spcPts val="0"/>
+              </a:spcAft>
+              <a:buNone/>
+            </a:pPr>
+            <a:r>
+              <a:t/>
+            </a:r>
+            <a:endParaRPr/>
+          </a:p>
+        </p:txBody>
+      </p:sp>
+      <p:sp>
+        <p:nvSpPr>
+          <p:cNvPr id="1031" name="Google Shape;1031;p65"/>
+          <p:cNvSpPr/>
+          <p:nvPr/>
+        </p:nvSpPr>
+        <p:spPr>
+          <a:xfrm>
+            <a:off x="285749" y="1209852"/>
+            <a:ext cx="2793985" cy="3014270"/>
+          </a:xfrm>
+          <a:prstGeom prst="roundRect">
+            <a:avLst>
+              <a:gd fmla="val 3436" name="adj"/>
+            </a:avLst>
+          </a:prstGeom>
+          <a:solidFill>
+            <a:schemeClr val="lt2"/>
+          </a:solidFill>
+          <a:ln>
+            <a:noFill/>
+          </a:ln>
+        </p:spPr>
+        <p:txBody>
+          <a:bodyPr anchorCtr="0" anchor="ctr" bIns="91425" lIns="91425" spcFirstLastPara="1" rIns="91425" wrap="square" tIns="91425">
+            <a:noAutofit/>
+          </a:bodyPr>
+          <a:lstStyle/>
+          <a:p>
+            <a:pPr indent="0" lvl="0" marL="0" rtl="0" algn="l">
+              <a:spcBef>
+                <a:spcPts val="0"/>
+              </a:spcBef>
+              <a:spcAft>
+                <a:spcPts val="0"/>
+              </a:spcAft>
+              <a:buNone/>
+            </a:pPr>
+            <a:r>
+              <a:t/>
+            </a:r>
+            <a:endParaRPr/>
+          </a:p>
+        </p:txBody>
+      </p:sp>
+      <p:sp>
+        <p:nvSpPr>
+          <p:cNvPr id="1032" name="Google Shape;1032;p65"/>
           <p:cNvSpPr/>
           <p:nvPr/>
         </p:nvSpPr>
@@ -9055,7 +9160,7 @@
       </p:sp>
       <p:sp>
         <p:nvSpPr>
-          <p:cNvPr id="664" name="Google Shape;664;p55"/>
+          <p:cNvPr id="1033" name="Google Shape;1033;p65"/>
           <p:cNvSpPr/>
           <p:nvPr/>
         </p:nvSpPr>
@@ -9096,23 +9201,19 @@
       </p:sp>
       <p:sp>
         <p:nvSpPr>
-          <p:cNvPr id="665" name="Google Shape;665;p55"/>
+          <p:cNvPr id="1034" name="Google Shape;1034;p65"/>
           <p:cNvSpPr/>
           <p:nvPr/>
         </p:nvSpPr>
         <p:spPr>
           <a:xfrm>
-            <a:off x="285749" y="1209852"/>
-            <a:ext cx="2071677" cy="3014270"/>
+            <a:off x="476248" y="1400327"/>
+            <a:ext cx="2412987" cy="1009519"/>
           </a:xfrm>
-          <a:prstGeom prst="roundRect">
-            <a:avLst>
-              <a:gd fmla="val 4634" name="adj"/>
-            </a:avLst>
+          <a:prstGeom prst="rect">
+            <a:avLst/>
           </a:prstGeom>
-          <a:solidFill>
-            <a:schemeClr val="lt2"/>
-          </a:solidFill>
+          <a:noFill/>
           <a:ln>
             <a:noFill/>
           </a:ln>
@@ -9141,13 +9242,13 @@
       </p:sp>
       <p:sp>
         <p:nvSpPr>
-          <p:cNvPr id="667" name="Google Shape;667;p55"/>
+          <p:cNvPr id="1035" name="Google Shape;1035;p65"/>
           <p:cNvSpPr/>
           <p:nvPr/>
         </p:nvSpPr>
         <p:spPr>
           <a:xfrm>
-            <a:off x="438148" y="1362233"/>
+            <a:off x="476248" y="1400328"/>
             <a:ext cx="76199" cy="76190"/>
           </a:xfrm>
           <a:prstGeom prst="roundRect">
@@ -9186,23 +9287,19 @@
       </p:sp>
       <p:sp>
         <p:nvSpPr>
-          <p:cNvPr id="670" name="Google Shape;670;p55"/>
+          <p:cNvPr id="1040" name="Google Shape;1040;p65"/>
           <p:cNvSpPr/>
           <p:nvPr/>
         </p:nvSpPr>
         <p:spPr>
           <a:xfrm>
-            <a:off x="2452675" y="1209852"/>
-            <a:ext cx="2071677" cy="3014270"/>
+            <a:off x="3365480" y="1400327"/>
+            <a:ext cx="2412987" cy="1009519"/>
           </a:xfrm>
-          <a:prstGeom prst="roundRect">
-            <a:avLst>
-              <a:gd fmla="val 4634" name="adj"/>
-            </a:avLst>
+          <a:prstGeom prst="rect">
+            <a:avLst/>
           </a:prstGeom>
-          <a:solidFill>
-            <a:schemeClr val="lt2"/>
-          </a:solidFill>
+          <a:noFill/>
           <a:ln>
             <a:noFill/>
           </a:ln>
@@ -9231,13 +9328,13 @@
       </p:sp>
       <p:sp>
         <p:nvSpPr>
-          <p:cNvPr id="672" name="Google Shape;672;p55"/>
+          <p:cNvPr id="1041" name="Google Shape;1041;p65"/>
           <p:cNvSpPr/>
           <p:nvPr/>
         </p:nvSpPr>
         <p:spPr>
           <a:xfrm>
-            <a:off x="2605074" y="1362233"/>
+            <a:off x="3365480" y="1400328"/>
             <a:ext cx="76199" cy="76190"/>
           </a:xfrm>
           <a:prstGeom prst="roundRect">
@@ -9276,23 +9373,19 @@
       </p:sp>
       <p:sp>
         <p:nvSpPr>
-          <p:cNvPr id="675" name="Google Shape;675;p55"/>
+          <p:cNvPr id="1045" name="Google Shape;1045;p65"/>
           <p:cNvSpPr/>
           <p:nvPr/>
         </p:nvSpPr>
         <p:spPr>
           <a:xfrm>
-            <a:off x="4619601" y="1209852"/>
-            <a:ext cx="2071677" cy="3014270"/>
+            <a:off x="6254721" y="1400327"/>
+            <a:ext cx="2412987" cy="1009519"/>
           </a:xfrm>
-          <a:prstGeom prst="roundRect">
-            <a:avLst>
-              <a:gd fmla="val 4634" name="adj"/>
-            </a:avLst>
+          <a:prstGeom prst="rect">
+            <a:avLst/>
           </a:prstGeom>
-          <a:solidFill>
-            <a:schemeClr val="lt2"/>
-          </a:solidFill>
+          <a:noFill/>
           <a:ln>
             <a:noFill/>
           </a:ln>
@@ -9321,13 +9414,13 @@
       </p:sp>
       <p:sp>
         <p:nvSpPr>
-          <p:cNvPr id="677" name="Google Shape;677;p55"/>
+          <p:cNvPr id="1046" name="Google Shape;1046;p65"/>
           <p:cNvSpPr/>
           <p:nvPr/>
         </p:nvSpPr>
         <p:spPr>
           <a:xfrm>
-            <a:off x="4772001" y="1362233"/>
+            <a:off x="6254721" y="1400328"/>
             <a:ext cx="76199" cy="76190"/>
           </a:xfrm>
           <a:prstGeom prst="roundRect">
@@ -9366,97 +9459,7 @@
       </p:sp>
       <p:sp>
         <p:nvSpPr>
-          <p:cNvPr id="680" name="Google Shape;680;p55"/>
-          <p:cNvSpPr/>
-          <p:nvPr/>
-        </p:nvSpPr>
-        <p:spPr>
-          <a:xfrm>
-            <a:off x="6786527" y="1209852"/>
-            <a:ext cx="2071677" cy="3014270"/>
-          </a:xfrm>
-          <a:prstGeom prst="roundRect">
-            <a:avLst>
-              <a:gd fmla="val 4634" name="adj"/>
-            </a:avLst>
-          </a:prstGeom>
-          <a:solidFill>
-            <a:schemeClr val="lt2"/>
-          </a:solidFill>
-          <a:ln>
-            <a:noFill/>
-          </a:ln>
-        </p:spPr>
-        <p:txBody>
-          <a:bodyPr anchorCtr="0" anchor="ctr" bIns="91425" lIns="91425" spcFirstLastPara="1" rIns="91425" wrap="square" tIns="91425">
-            <a:noAutofit/>
-          </a:bodyPr>
-          <a:lstStyle/>
-          <a:p>
-            <a:pPr indent="0" lvl="0" marL="0" rtl="0" algn="l">
-              <a:spcBef>
-                <a:spcPts val="0"/>
-              </a:spcBef>
-              <a:spcAft>
-                <a:spcPts val="0"/>
-              </a:spcAft>
-              <a:buNone/>
-            </a:pPr>
-            <a:r>
-              <a:t/>
-            </a:r>
-            <a:endParaRPr/>
-          </a:p>
-        </p:txBody>
-      </p:sp>
-      <p:sp>
-        <p:nvSpPr>
-          <p:cNvPr id="682" name="Google Shape;682;p55"/>
-          <p:cNvSpPr/>
-          <p:nvPr/>
-        </p:nvSpPr>
-        <p:spPr>
-          <a:xfrm>
-            <a:off x="6938927" y="1362233"/>
-            <a:ext cx="76199" cy="76190"/>
-          </a:xfrm>
-          <a:prstGeom prst="roundRect">
-            <a:avLst>
-              <a:gd fmla="val 31500" name="adj"/>
-            </a:avLst>
-          </a:prstGeom>
-          <a:solidFill>
-            <a:srgbClr val="0077FF"/>
-          </a:solidFill>
-          <a:ln>
-            <a:noFill/>
-          </a:ln>
-        </p:spPr>
-        <p:txBody>
-          <a:bodyPr anchorCtr="0" anchor="ctr" bIns="91425" lIns="91425" spcFirstLastPara="1" rIns="91425" wrap="square" tIns="91425">
-            <a:noAutofit/>
-          </a:bodyPr>
-          <a:lstStyle/>
-          <a:p>
-            <a:pPr indent="0" lvl="0" marL="0" rtl="0" algn="l">
-              <a:spcBef>
-                <a:spcPts val="0"/>
-              </a:spcBef>
-              <a:spcAft>
-                <a:spcPts val="0"/>
-              </a:spcAft>
-              <a:buNone/>
-            </a:pPr>
-            <a:r>
-              <a:t/>
-            </a:r>
-            <a:endParaRPr/>
-          </a:p>
-        </p:txBody>
-      </p:sp>
-      <p:sp>
-        <p:nvSpPr>
-          <p:cNvPr id="683" name="title"/>
+          <p:cNvPr id="1047" name="title"/>
           <p:cNvSpPr txBox="1"/>
           <p:nvPr/>
         </p:nvSpPr>
@@ -9498,21 +9501,21 @@
                 <a:ea typeface="Play"/>
                 <a:cs typeface="Play"/>
               </a:rPr>
-              <a:t>Преимущества для компании</a:t>
+              <a:t>Риски</a:t>
             </a:r>
           </a:p>
         </p:txBody>
       </p:sp>
       <p:sp>
         <p:nvSpPr>
-          <p:cNvPr id="684" name="lead"/>
+          <p:cNvPr id="1048" name="lead"/>
           <p:cNvSpPr txBox="1"/>
           <p:nvPr/>
         </p:nvSpPr>
         <p:spPr>
           <a:xfrm>
-            <a:off x="274320" y="1438431"/>
-            <a:ext cx="6792986" cy="949125"/>
+            <a:off x="274320" y="1476493"/>
+            <a:ext cx="6792986" cy="463192"/>
           </a:xfrm>
           <a:prstGeom prst="rect">
             <a:avLst/>
@@ -9529,7 +9532,7 @@
               <a:spcAft>
                 <a:spcPts val="300"/>
               </a:spcAft>
-              <a:defRPr sz="2438">
+              <a:defRPr sz="1600">
                 <a:solidFill>
                   <a:srgbClr val="000000"/>
                 </a:solidFill>
@@ -9539,7 +9542,7 @@
               </a:defRPr>
             </a:pPr>
             <a:r>
-              <a:rPr sz="2438">
+              <a:rPr sz="1600">
                 <a:solidFill>
                   <a:srgbClr val="000000"/>
                 </a:solidFill>
@@ -9547,21 +9550,21 @@
                 <a:ea typeface="Play"/>
                 <a:cs typeface="Play"/>
               </a:rPr>
-              <a:t>Сокращение времени создания презентаций до 4 мин</a:t>
+              <a:t>Модель может выдумать цифры, аудит проверяет источники</a:t>
             </a:r>
           </a:p>
         </p:txBody>
       </p:sp>
       <p:sp>
         <p:nvSpPr>
-          <p:cNvPr id="685" name="body"/>
+          <p:cNvPr id="1049" name="body"/>
           <p:cNvSpPr txBox="1"/>
           <p:nvPr/>
         </p:nvSpPr>
         <p:spPr>
           <a:xfrm>
-            <a:off x="274320" y="2547839"/>
-            <a:ext cx="6792986" cy="1561971"/>
+            <a:off x="274320" y="1956460"/>
+            <a:ext cx="6792986" cy="504189"/>
           </a:xfrm>
           <a:prstGeom prst="rect">
             <a:avLst/>
@@ -9578,7 +9581,7 @@
               <a:spcAft>
                 <a:spcPts val="300"/>
               </a:spcAft>
-              <a:defRPr sz="1600">
+              <a:defRPr sz="1200">
                 <a:solidFill>
                   <a:srgbClr val="000000"/>
                 </a:solidFill>
@@ -9588,7 +9591,7 @@
               </a:defRPr>
             </a:pPr>
             <a:r>
-              <a:rPr sz="1600">
+              <a:rPr sz="1200">
                 <a:solidFill>
                   <a:srgbClr val="000000"/>
                 </a:solidFill>
@@ -9596,7 +9599,7 @@
                 <a:ea typeface="Play"/>
                 <a:cs typeface="Play"/>
               </a:rPr>
-              <a:t>• Увеличение количества готовых колод за тот же период</a:t>
+              <a:t>• Плохой шаблон приводит к использованию рабочей области</a:t>
             </a:r>
           </a:p>
           <a:p>
@@ -9604,7 +9607,7 @@
               <a:spcAft>
                 <a:spcPts val="300"/>
               </a:spcAft>
-              <a:defRPr sz="1600">
+              <a:defRPr sz="1200">
                 <a:solidFill>
                   <a:srgbClr val="000000"/>
                 </a:solidFill>
@@ -9614,7 +9617,7 @@
               </a:defRPr>
             </a:pPr>
             <a:r>
-              <a:rPr sz="1600">
+              <a:rPr sz="1200">
                 <a:solidFill>
                   <a:srgbClr val="000000"/>
                 </a:solidFill>
@@ -9622,33 +9625,7 @@
                 <a:ea typeface="Play"/>
                 <a:cs typeface="Play"/>
               </a:rPr>
-              <a:t>• Снижение ошибок фирменного стиля до 3%</a:t>
-            </a:r>
-          </a:p>
-          <a:p>
-            <a:pPr algn="l">
-              <a:spcAft>
-                <a:spcPts val="300"/>
-              </a:spcAft>
-              <a:defRPr sz="1600">
-                <a:solidFill>
-                  <a:srgbClr val="000000"/>
-                </a:solidFill>
-                <a:latin typeface="Play"/>
-                <a:ea typeface="Play"/>
-                <a:cs typeface="Play"/>
-              </a:defRPr>
-            </a:pPr>
-            <a:r>
-              <a:rPr sz="1600">
-                <a:solidFill>
-                  <a:srgbClr val="000000"/>
-                </a:solidFill>
-                <a:latin typeface="Play"/>
-                <a:ea typeface="Play"/>
-                <a:cs typeface="Play"/>
-              </a:rPr>
-              <a:t>• Повышение эффективности дизайнеров, освобождение от рутинных задач</a:t>
+              <a:t>• Нагрузка выше 20 задач требует внешней очереди</a:t>
             </a:r>
           </a:p>
         </p:txBody>
@@ -9680,7 +9657,7 @@
         <p:spPr>
           <a:xfrm>
             <a:off x="445963" y="1555901"/>
-            <a:ext cx="4627118" cy="2988158"/>
+            <a:ext cx="4627118" cy="2811852"/>
           </a:xfrm>
           <a:prstGeom prst="roundRect">
             <a:avLst/>
@@ -9726,7 +9703,7 @@
         <p:spPr>
           <a:xfrm>
             <a:off x="572963" y="1682901"/>
-            <a:ext cx="4373118" cy="655320"/>
+            <a:ext cx="4373118" cy="1183640"/>
           </a:xfrm>
           <a:prstGeom prst="rect">
             <a:avLst/>
@@ -9761,7 +9738,7 @@
                 <a:ea typeface="Play"/>
                 <a:cs typeface="Play"/>
               </a:rPr>
-              <a:t>Итоги</a:t>
+              <a:t>Решение: запуск на всю компанию</a:t>
             </a:r>
           </a:p>
         </p:txBody>
@@ -9774,8 +9751,8 @@
         </p:nvSpPr>
         <p:spPr>
           <a:xfrm>
-            <a:off x="572963" y="2518244"/>
-            <a:ext cx="4373118" cy="771721"/>
+            <a:off x="572963" y="3046564"/>
+            <a:ext cx="4373118" cy="613739"/>
           </a:xfrm>
           <a:prstGeom prst="rect">
             <a:avLst/>
@@ -9792,7 +9769,7 @@
               <a:spcAft>
                 <a:spcPts val="300"/>
               </a:spcAft>
-              <a:defRPr sz="1800">
+              <a:defRPr sz="1400">
                 <a:solidFill>
                   <a:srgbClr val="000000"/>
                 </a:solidFill>
@@ -9802,7 +9779,7 @@
               </a:defRPr>
             </a:pPr>
             <a:r>
-              <a:rPr sz="1800">
+              <a:rPr sz="1400">
                 <a:solidFill>
                   <a:srgbClr val="000000"/>
                 </a:solidFill>
@@ -9810,7 +9787,7 @@
                 <a:ea typeface="Play"/>
                 <a:cs typeface="Play"/>
               </a:rPr>
-              <a:t>Сервис готов к масштабированию, требуется одобрение руководства</a:t>
+              <a:t>Попросить решение о запуске на всю компанию</a:t>
             </a:r>
           </a:p>
         </p:txBody>
@@ -9823,8 +9800,8 @@
         </p:nvSpPr>
         <p:spPr>
           <a:xfrm>
-            <a:off x="572963" y="3324860"/>
-            <a:ext cx="4373118" cy="1098550"/>
+            <a:off x="572963" y="3742914"/>
+            <a:ext cx="4373118" cy="680495"/>
           </a:xfrm>
           <a:prstGeom prst="rect">
             <a:avLst/>
@@ -9859,7 +9836,7 @@
                 <a:ea typeface="Play"/>
                 <a:cs typeface="Play"/>
               </a:rPr>
-              <a:t>• Ожидается экономия времени и повышение качества презентаций</a:t>
+              <a:t>• Ожидаем сокращения времени сборки до 4 мин</a:t>
             </a:r>
           </a:p>
           <a:p>
@@ -9885,33 +9862,7 @@
                 <a:ea typeface="Play"/>
                 <a:cs typeface="Play"/>
               </a:rPr>
-              <a:t>• Пилот подтвердил работоспособность и низкие затраты</a:t>
-            </a:r>
-          </a:p>
-          <a:p>
-            <a:pPr algn="l">
-              <a:spcAft>
-                <a:spcPts val="300"/>
-              </a:spcAft>
-              <a:defRPr sz="1200">
-                <a:solidFill>
-                  <a:srgbClr val="000000"/>
-                </a:solidFill>
-                <a:latin typeface="Play"/>
-                <a:ea typeface="Play"/>
-                <a:cs typeface="Play"/>
-              </a:defRPr>
-            </a:pPr>
-            <a:r>
-              <a:rPr sz="1200">
-                <a:solidFill>
-                  <a:srgbClr val="000000"/>
-                </a:solidFill>
-                <a:latin typeface="Play"/>
-                <a:ea typeface="Play"/>
-                <a:cs typeface="Play"/>
-              </a:rPr>
-              <a:t>• Риски минимизированы благодаря аудитам и резерву</a:t>
+              <a:t>• Планируем интеграцию с корпоративными системами</a:t>
             </a:r>
           </a:p>
         </p:txBody>

--- a/samples/VK_Tech_шаблон__focus.pptx
+++ b/samples/VK_Tech_шаблон__focus.pptx
@@ -279,7 +279,7 @@
               <c:strCache>
                 <c:ptCount val="1"/>
                 <c:pt idx="0">
-                  <c:v>Время, мин</c:v>
+                  <c:v>Время (мин)</c:v>
                 </c:pt>
               </c:strCache>
             </c:strRef>
@@ -300,10 +300,10 @@
               <c:strCache>
                 <c:ptCount val="2"/>
                 <c:pt idx="0">
-                  <c:v>До</c:v>
+                  <c:v>Текущее</c:v>
                 </c:pt>
                 <c:pt idx="1">
-                  <c:v>После</c:v>
+                  <c:v>Пилот</c:v>
                 </c:pt>
               </c:strCache>
             </c:strRef>
@@ -419,7 +419,7 @@
                   </a:defRPr>
                 </a:pPr>
                 <a:r>
-                  <a:t>Время, мин, мин</a:t>
+                  <a:t>Время (мин), мин</a:t>
                 </a:r>
               </a:p>
             </c:rich>
@@ -514,10 +514,10 @@
               <c:strCache>
                 <c:ptCount val="2"/>
                 <c:pt idx="0">
-                  <c:v>До</c:v>
+                  <c:v>Текущее</c:v>
                 </c:pt>
                 <c:pt idx="1">
-                  <c:v>После</c:v>
+                  <c:v>Пилот</c:v>
                 </c:pt>
               </c:strCache>
             </c:strRef>
@@ -539,7 +539,7 @@
           </c:val>
         </c:ser>
         <c:dLbls>
-          <c:numFmt formatCode="0&quot; кол-во&quot;" sourceLinked="0"/>
+          <c:numFmt formatCode="0&quot; колоды&quot;" sourceLinked="0"/>
           <c:txPr>
             <a:bodyPr wrap="none"/>
             <a:lstStyle/>
@@ -633,7 +633,429 @@
                   </a:defRPr>
                 </a:pPr>
                 <a:r>
-                  <a:t>Нарушения, кол-во</a:t>
+                  <a:t>Нарушения, колоды</a:t>
+                </a:r>
+              </a:p>
+            </c:rich>
+          </c:tx>
+          <c:layout/>
+          <c:overlay val="0"/>
+        </c:title>
+        <c:majorTickMark val="out"/>
+        <c:minorTickMark val="none"/>
+        <c:tickLblPos val="nextTo"/>
+        <c:txPr>
+          <a:bodyPr/>
+          <a:lstStyle/>
+          <a:p>
+            <a:pPr>
+              <a:defRPr sz="1100" b="0">
+                <a:solidFill>
+                  <a:srgbClr val="000000"/>
+                </a:solidFill>
+                <a:latin typeface="Play"/>
+                <a:ea typeface="Play"/>
+                <a:cs typeface="Play"/>
+              </a:defRPr>
+            </a:pPr>
+          </a:p>
+        </c:txPr>
+        <c:crossAx val="-2068027336"/>
+        <c:crosses val="autoZero"/>
+      </c:valAx>
+    </c:plotArea>
+    <c:dispBlanksAs val="gap"/>
+  </c:chart>
+  <c:txPr>
+    <a:bodyPr/>
+    <a:lstStyle/>
+    <a:p>
+      <a:pPr>
+        <a:defRPr sz="1200" b="0">
+          <a:solidFill>
+            <a:srgbClr val="000000"/>
+          </a:solidFill>
+          <a:latin typeface="Play"/>
+          <a:ea typeface="Play"/>
+          <a:cs typeface="Play"/>
+        </a:defRPr>
+      </a:pPr>
+      <a:endParaRPr lang="en-US"/>
+    </a:p>
+  </c:txPr>
+  <c:externalData r:id="rId1">
+    <c:autoUpdate val="0"/>
+  </c:externalData>
+</c:chartSpace>
+</file>
+
+<file path=ppt/charts/chart3.xml><?xml version="1.0" encoding="utf-8"?>
+<c:chartSpace xmlns:c="http://schemas.openxmlformats.org/drawingml/2006/chart" xmlns:a="http://schemas.openxmlformats.org/drawingml/2006/main" xmlns:r="http://schemas.openxmlformats.org/officeDocument/2006/relationships">
+  <c:date1904 val="0"/>
+  <c:chart>
+    <c:autoTitleDeleted val="1"/>
+    <c:plotArea>
+      <c:barChart>
+        <c:barDir val="col"/>
+        <c:grouping val="clustered"/>
+        <c:ser>
+          <c:idx val="0"/>
+          <c:order val="0"/>
+          <c:tx>
+            <c:strRef>
+              <c:f>Sheet1!$B$1</c:f>
+              <c:strCache>
+                <c:ptCount val="1"/>
+                <c:pt idx="0">
+                  <c:v>Запросы</c:v>
+                </c:pt>
+              </c:strCache>
+            </c:strRef>
+          </c:tx>
+          <c:spPr>
+            <a:solidFill>
+              <a:srgbClr val="0077FF"/>
+            </a:solidFill>
+            <a:ln>
+              <a:solidFill>
+                <a:srgbClr val="0077FF"/>
+              </a:solidFill>
+            </a:ln>
+          </c:spPr>
+          <c:cat>
+            <c:strRef>
+              <c:f>Sheet1!$A$2:$A$3</c:f>
+              <c:strCache>
+                <c:ptCount val="2"/>
+                <c:pt idx="0">
+                  <c:v>Текущее</c:v>
+                </c:pt>
+                <c:pt idx="1">
+                  <c:v>Пилот</c:v>
+                </c:pt>
+              </c:strCache>
+            </c:strRef>
+          </c:cat>
+          <c:val>
+            <c:numRef>
+              <c:f>Sheet1!$B$2:$B$3</c:f>
+              <c:numCache>
+                <c:formatCode>General</c:formatCode>
+                <c:ptCount val="2"/>
+                <c:pt idx="0">
+                  <c:v>11.0</c:v>
+                </c:pt>
+                <c:pt idx="1">
+                  <c:v>38.0</c:v>
+                </c:pt>
+              </c:numCache>
+            </c:numRef>
+          </c:val>
+        </c:ser>
+        <c:dLbls>
+          <c:numFmt formatCode="0&quot; запросов&quot;" sourceLinked="0"/>
+          <c:txPr>
+            <a:bodyPr wrap="none"/>
+            <a:lstStyle/>
+            <a:p>
+              <a:pPr>
+                <a:defRPr sz="1100" b="0">
+                  <a:solidFill>
+                    <a:srgbClr val="000000"/>
+                  </a:solidFill>
+                  <a:latin typeface="Play"/>
+                  <a:ea typeface="Play"/>
+                  <a:cs typeface="Play"/>
+                </a:defRPr>
+              </a:pPr>
+            </a:p>
+          </c:txPr>
+          <c:dLblPos val="outEnd"/>
+          <c:showLegendKey val="0"/>
+          <c:showVal val="1"/>
+          <c:showCatName val="0"/>
+          <c:showSerName val="0"/>
+          <c:showPercent val="0"/>
+          <c:showBubbleSize val="0"/>
+          <c:showLeaderLines val="1"/>
+        </c:dLbls>
+        <c:gapWidth val="60"/>
+        <c:axId val="-2068027336"/>
+        <c:axId val="-2113994440"/>
+      </c:barChart>
+      <c:catAx>
+        <c:axId val="-2068027336"/>
+        <c:scaling>
+          <c:orientation val="minMax"/>
+        </c:scaling>
+        <c:delete val="0"/>
+        <c:axPos val="b"/>
+        <c:majorTickMark val="out"/>
+        <c:minorTickMark val="none"/>
+        <c:tickLblPos val="nextTo"/>
+        <c:txPr>
+          <a:bodyPr/>
+          <a:lstStyle/>
+          <a:p>
+            <a:pPr>
+              <a:defRPr sz="1100" b="0">
+                <a:solidFill>
+                  <a:srgbClr val="000000"/>
+                </a:solidFill>
+                <a:latin typeface="Play"/>
+                <a:ea typeface="Play"/>
+                <a:cs typeface="Play"/>
+              </a:defRPr>
+            </a:pPr>
+          </a:p>
+        </c:txPr>
+        <c:crossAx val="-2113994440"/>
+        <c:crosses val="autoZero"/>
+        <c:auto val="1"/>
+        <c:lblAlgn val="ctr"/>
+        <c:lblOffset val="100"/>
+        <c:noMultiLvlLbl val="0"/>
+      </c:catAx>
+      <c:valAx>
+        <c:axId val="-2113994440"/>
+        <c:scaling/>
+        <c:delete val="0"/>
+        <c:axPos val="l"/>
+        <c:majorGridlines>
+          <c:spPr>
+            <a:ln w="9525">
+              <a:solidFill>
+                <a:srgbClr val="D1D1D1"/>
+              </a:solidFill>
+            </a:ln>
+          </c:spPr>
+        </c:majorGridlines>
+        <c:title>
+          <c:tx>
+            <c:rich>
+              <a:bodyPr rot="0" vert="horz"/>
+              <a:lstStyle/>
+              <a:p>
+                <a:pPr>
+                  <a:defRPr sz="1100" b="0">
+                    <a:solidFill>
+                      <a:srgbClr val="000000"/>
+                    </a:solidFill>
+                    <a:latin typeface="Play"/>
+                    <a:ea typeface="Play"/>
+                    <a:cs typeface="Play"/>
+                  </a:defRPr>
+                </a:pPr>
+                <a:r>
+                  <a:t>Запросы, запросов</a:t>
+                </a:r>
+              </a:p>
+            </c:rich>
+          </c:tx>
+          <c:layout/>
+          <c:overlay val="0"/>
+        </c:title>
+        <c:majorTickMark val="out"/>
+        <c:minorTickMark val="none"/>
+        <c:tickLblPos val="nextTo"/>
+        <c:txPr>
+          <a:bodyPr/>
+          <a:lstStyle/>
+          <a:p>
+            <a:pPr>
+              <a:defRPr sz="1100" b="0">
+                <a:solidFill>
+                  <a:srgbClr val="000000"/>
+                </a:solidFill>
+                <a:latin typeface="Play"/>
+                <a:ea typeface="Play"/>
+                <a:cs typeface="Play"/>
+              </a:defRPr>
+            </a:pPr>
+          </a:p>
+        </c:txPr>
+        <c:crossAx val="-2068027336"/>
+        <c:crosses val="autoZero"/>
+      </c:valAx>
+    </c:plotArea>
+    <c:dispBlanksAs val="gap"/>
+  </c:chart>
+  <c:txPr>
+    <a:bodyPr/>
+    <a:lstStyle/>
+    <a:p>
+      <a:pPr>
+        <a:defRPr sz="1200" b="0">
+          <a:solidFill>
+            <a:srgbClr val="000000"/>
+          </a:solidFill>
+          <a:latin typeface="Play"/>
+          <a:ea typeface="Play"/>
+          <a:cs typeface="Play"/>
+        </a:defRPr>
+      </a:pPr>
+      <a:endParaRPr lang="en-US"/>
+    </a:p>
+  </c:txPr>
+  <c:externalData r:id="rId1">
+    <c:autoUpdate val="0"/>
+  </c:externalData>
+</c:chartSpace>
+</file>
+
+<file path=ppt/charts/chart4.xml><?xml version="1.0" encoding="utf-8"?>
+<c:chartSpace xmlns:c="http://schemas.openxmlformats.org/drawingml/2006/chart" xmlns:a="http://schemas.openxmlformats.org/drawingml/2006/main" xmlns:r="http://schemas.openxmlformats.org/officeDocument/2006/relationships">
+  <c:date1904 val="0"/>
+  <c:chart>
+    <c:autoTitleDeleted val="1"/>
+    <c:plotArea>
+      <c:barChart>
+        <c:barDir val="col"/>
+        <c:grouping val="clustered"/>
+        <c:ser>
+          <c:idx val="0"/>
+          <c:order val="0"/>
+          <c:tx>
+            <c:strRef>
+              <c:f>Sheet1!$B$1</c:f>
+              <c:strCache>
+                <c:ptCount val="1"/>
+                <c:pt idx="0">
+                  <c:v>Стоимость (руб)</c:v>
+                </c:pt>
+              </c:strCache>
+            </c:strRef>
+          </c:tx>
+          <c:spPr>
+            <a:solidFill>
+              <a:srgbClr val="0077FF"/>
+            </a:solidFill>
+            <a:ln>
+              <a:solidFill>
+                <a:srgbClr val="0077FF"/>
+              </a:solidFill>
+            </a:ln>
+          </c:spPr>
+          <c:cat>
+            <c:strRef>
+              <c:f>Sheet1!$A$2:$A$2</c:f>
+              <c:strCache>
+                <c:ptCount val="1"/>
+                <c:pt idx="0">
+                  <c:v>Пилот</c:v>
+                </c:pt>
+              </c:strCache>
+            </c:strRef>
+          </c:cat>
+          <c:val>
+            <c:numRef>
+              <c:f>Sheet1!$B$2:$B$2</c:f>
+              <c:numCache>
+                <c:formatCode>General</c:formatCode>
+                <c:ptCount val="1"/>
+                <c:pt idx="0">
+                  <c:v>1400.0</c:v>
+                </c:pt>
+              </c:numCache>
+            </c:numRef>
+          </c:val>
+        </c:ser>
+        <c:dLbls>
+          <c:numFmt formatCode="0&quot; руб&quot;" sourceLinked="0"/>
+          <c:txPr>
+            <a:bodyPr wrap="none"/>
+            <a:lstStyle/>
+            <a:p>
+              <a:pPr>
+                <a:defRPr sz="1100" b="0">
+                  <a:solidFill>
+                    <a:srgbClr val="000000"/>
+                  </a:solidFill>
+                  <a:latin typeface="Play"/>
+                  <a:ea typeface="Play"/>
+                  <a:cs typeface="Play"/>
+                </a:defRPr>
+              </a:pPr>
+            </a:p>
+          </c:txPr>
+          <c:dLblPos val="outEnd"/>
+          <c:showLegendKey val="0"/>
+          <c:showVal val="1"/>
+          <c:showCatName val="0"/>
+          <c:showSerName val="0"/>
+          <c:showPercent val="0"/>
+          <c:showBubbleSize val="0"/>
+          <c:showLeaderLines val="1"/>
+        </c:dLbls>
+        <c:gapWidth val="60"/>
+        <c:axId val="-2068027336"/>
+        <c:axId val="-2113994440"/>
+      </c:barChart>
+      <c:catAx>
+        <c:axId val="-2068027336"/>
+        <c:scaling>
+          <c:orientation val="minMax"/>
+        </c:scaling>
+        <c:delete val="0"/>
+        <c:axPos val="b"/>
+        <c:majorTickMark val="out"/>
+        <c:minorTickMark val="none"/>
+        <c:tickLblPos val="nextTo"/>
+        <c:txPr>
+          <a:bodyPr/>
+          <a:lstStyle/>
+          <a:p>
+            <a:pPr>
+              <a:defRPr sz="1100" b="0">
+                <a:solidFill>
+                  <a:srgbClr val="000000"/>
+                </a:solidFill>
+                <a:latin typeface="Play"/>
+                <a:ea typeface="Play"/>
+                <a:cs typeface="Play"/>
+              </a:defRPr>
+            </a:pPr>
+          </a:p>
+        </c:txPr>
+        <c:crossAx val="-2113994440"/>
+        <c:crosses val="autoZero"/>
+        <c:auto val="1"/>
+        <c:lblAlgn val="ctr"/>
+        <c:lblOffset val="100"/>
+        <c:noMultiLvlLbl val="0"/>
+      </c:catAx>
+      <c:valAx>
+        <c:axId val="-2113994440"/>
+        <c:scaling/>
+        <c:delete val="0"/>
+        <c:axPos val="l"/>
+        <c:majorGridlines>
+          <c:spPr>
+            <a:ln w="9525">
+              <a:solidFill>
+                <a:srgbClr val="D1D1D1"/>
+              </a:solidFill>
+            </a:ln>
+          </c:spPr>
+        </c:majorGridlines>
+        <c:title>
+          <c:tx>
+            <c:rich>
+              <a:bodyPr rot="0" vert="horz"/>
+              <a:lstStyle/>
+              <a:p>
+                <a:pPr>
+                  <a:defRPr sz="1100" b="0">
+                    <a:solidFill>
+                      <a:srgbClr val="000000"/>
+                    </a:solidFill>
+                    <a:latin typeface="Play"/>
+                    <a:ea typeface="Play"/>
+                    <a:cs typeface="Play"/>
+                  </a:defRPr>
+                </a:pPr>
+                <a:r>
+                  <a:t>Стоимость (руб), руб</a:t>
                 </a:r>
               </a:p>
             </c:rich>
@@ -5684,60 +6106,14 @@
       <p:grpSpPr/>
       <p:sp>
         <p:nvSpPr>
-          <p:cNvPr id="2" name="Rounded Rectangle 1"/>
-          <p:cNvSpPr/>
+          <p:cNvPr id="2" name="title"/>
+          <p:cNvSpPr txBox="1"/>
           <p:nvPr/>
         </p:nvSpPr>
         <p:spPr>
           <a:xfrm>
-            <a:off x="2159000" y="1243485"/>
-            <a:ext cx="4542261" cy="949960"/>
-          </a:xfrm>
-          <a:prstGeom prst="roundRect">
-            <a:avLst/>
-          </a:prstGeom>
-          <a:solidFill>
-            <a:srgbClr val="111111">
-              <a:alpha val="85000"/>
-            </a:srgbClr>
-          </a:solidFill>
-          <a:ln>
-            <a:noFill/>
-          </a:ln>
-          <a:effectLst/>
-        </p:spPr>
-        <p:style>
-          <a:lnRef idx="1">
-            <a:schemeClr val="accent1"/>
-          </a:lnRef>
-          <a:fillRef idx="3">
-            <a:schemeClr val="accent1"/>
-          </a:fillRef>
-          <a:effectRef idx="2">
-            <a:schemeClr val="accent1"/>
-          </a:effectRef>
-          <a:fontRef idx="minor">
-            <a:schemeClr val="lt1"/>
-          </a:fontRef>
-        </p:style>
-        <p:txBody>
-          <a:bodyPr rtlCol="0" anchor="ctr"/>
-          <a:lstStyle/>
-          <a:p>
-            <a:pPr algn="ctr"/>
-          </a:p>
-        </p:txBody>
-      </p:sp>
-      <p:sp>
-        <p:nvSpPr>
-          <p:cNvPr id="3" name="title"/>
-          <p:cNvSpPr txBox="1"/>
-          <p:nvPr/>
-        </p:nvSpPr>
-        <p:spPr>
-          <a:xfrm>
-            <a:off x="2286000" y="1370485"/>
-            <a:ext cx="4288261" cy="721360"/>
+            <a:off x="2473726" y="1370485"/>
+            <a:ext cx="4288261" cy="800071"/>
           </a:xfrm>
           <a:prstGeom prst="rect">
             <a:avLst/>
@@ -5754,7 +6130,7 @@
               <a:spcAft>
                 <a:spcPts val="300"/>
               </a:spcAft>
-              <a:defRPr sz="1800">
+              <a:defRPr sz="1800" b="0">
                 <a:solidFill>
                   <a:srgbClr val="FFFFFF"/>
                 </a:solidFill>
@@ -5764,7 +6140,7 @@
               </a:defRPr>
             </a:pPr>
             <a:r>
-              <a:rPr sz="1800">
+              <a:rPr sz="1800" b="0">
                 <a:solidFill>
                   <a:srgbClr val="FFFFFF"/>
                 </a:solidFill>
@@ -5786,1873 +6162,6 @@
 </file>
 
 <file path=ppt/slides/slide56.xml><?xml version="1.0" encoding="utf-8"?>
-<p:sld xmlns:a="http://schemas.openxmlformats.org/drawingml/2006/main" xmlns:p="http://schemas.openxmlformats.org/presentationml/2006/main" xmlns:r="http://schemas.openxmlformats.org/officeDocument/2006/relationships">
-  <p:cSld>
-    <p:spTree>
-      <p:nvGrpSpPr>
-        <p:cNvPr id="1" name=""/>
-        <p:cNvGrpSpPr/>
-        <p:nvPr/>
-      </p:nvGrpSpPr>
-      <p:grpSpPr/>
-      <p:sp>
-        <p:nvSpPr>
-          <p:cNvPr id="1027" name="Google Shape;1027;p65"/>
-          <p:cNvSpPr/>
-          <p:nvPr/>
-        </p:nvSpPr>
-        <p:spPr>
-          <a:xfrm>
-            <a:off x="6064222" y="1209852"/>
-            <a:ext cx="2793985" cy="3014270"/>
-          </a:xfrm>
-          <a:prstGeom prst="roundRect">
-            <a:avLst>
-              <a:gd fmla="val 3436" name="adj"/>
-            </a:avLst>
-          </a:prstGeom>
-          <a:solidFill>
-            <a:schemeClr val="lt2"/>
-          </a:solidFill>
-          <a:ln>
-            <a:noFill/>
-          </a:ln>
-        </p:spPr>
-        <p:txBody>
-          <a:bodyPr anchorCtr="0" anchor="ctr" bIns="91425" lIns="91425" spcFirstLastPara="1" rIns="91425" wrap="square" tIns="91425">
-            <a:noAutofit/>
-          </a:bodyPr>
-          <a:lstStyle/>
-          <a:p>
-            <a:pPr indent="0" lvl="0" marL="0" rtl="0" algn="l">
-              <a:spcBef>
-                <a:spcPts val="0"/>
-              </a:spcBef>
-              <a:spcAft>
-                <a:spcPts val="0"/>
-              </a:spcAft>
-              <a:buNone/>
-            </a:pPr>
-            <a:r>
-              <a:t/>
-            </a:r>
-            <a:endParaRPr/>
-          </a:p>
-        </p:txBody>
-      </p:sp>
-      <p:sp>
-        <p:nvSpPr>
-          <p:cNvPr id="1029" name="Google Shape;1029;p65"/>
-          <p:cNvSpPr/>
-          <p:nvPr/>
-        </p:nvSpPr>
-        <p:spPr>
-          <a:xfrm>
-            <a:off x="3174981" y="1209852"/>
-            <a:ext cx="2793985" cy="3014270"/>
-          </a:xfrm>
-          <a:prstGeom prst="roundRect">
-            <a:avLst>
-              <a:gd fmla="val 3436" name="adj"/>
-            </a:avLst>
-          </a:prstGeom>
-          <a:solidFill>
-            <a:schemeClr val="lt2"/>
-          </a:solidFill>
-          <a:ln>
-            <a:noFill/>
-          </a:ln>
-        </p:spPr>
-        <p:txBody>
-          <a:bodyPr anchorCtr="0" anchor="ctr" bIns="91425" lIns="91425" spcFirstLastPara="1" rIns="91425" wrap="square" tIns="91425">
-            <a:noAutofit/>
-          </a:bodyPr>
-          <a:lstStyle/>
-          <a:p>
-            <a:pPr indent="0" lvl="0" marL="0" rtl="0" algn="l">
-              <a:spcBef>
-                <a:spcPts val="0"/>
-              </a:spcBef>
-              <a:spcAft>
-                <a:spcPts val="0"/>
-              </a:spcAft>
-              <a:buNone/>
-            </a:pPr>
-            <a:r>
-              <a:t/>
-            </a:r>
-            <a:endParaRPr/>
-          </a:p>
-        </p:txBody>
-      </p:sp>
-      <p:sp>
-        <p:nvSpPr>
-          <p:cNvPr id="1031" name="Google Shape;1031;p65"/>
-          <p:cNvSpPr/>
-          <p:nvPr/>
-        </p:nvSpPr>
-        <p:spPr>
-          <a:xfrm>
-            <a:off x="285749" y="1209852"/>
-            <a:ext cx="2793985" cy="3014270"/>
-          </a:xfrm>
-          <a:prstGeom prst="roundRect">
-            <a:avLst>
-              <a:gd fmla="val 3436" name="adj"/>
-            </a:avLst>
-          </a:prstGeom>
-          <a:solidFill>
-            <a:schemeClr val="lt2"/>
-          </a:solidFill>
-          <a:ln>
-            <a:noFill/>
-          </a:ln>
-        </p:spPr>
-        <p:txBody>
-          <a:bodyPr anchorCtr="0" anchor="ctr" bIns="91425" lIns="91425" spcFirstLastPara="1" rIns="91425" wrap="square" tIns="91425">
-            <a:noAutofit/>
-          </a:bodyPr>
-          <a:lstStyle/>
-          <a:p>
-            <a:pPr indent="0" lvl="0" marL="0" rtl="0" algn="l">
-              <a:spcBef>
-                <a:spcPts val="0"/>
-              </a:spcBef>
-              <a:spcAft>
-                <a:spcPts val="0"/>
-              </a:spcAft>
-              <a:buNone/>
-            </a:pPr>
-            <a:r>
-              <a:t/>
-            </a:r>
-            <a:endParaRPr/>
-          </a:p>
-        </p:txBody>
-      </p:sp>
-      <p:sp>
-        <p:nvSpPr>
-          <p:cNvPr id="1032" name="Google Shape;1032;p65"/>
-          <p:cNvSpPr/>
-          <p:nvPr/>
-        </p:nvSpPr>
-        <p:spPr>
-          <a:xfrm>
-            <a:off x="285748" y="286047"/>
-            <a:ext cx="8572456" cy="3938075"/>
-          </a:xfrm>
-          <a:prstGeom prst="rect">
-            <a:avLst/>
-          </a:prstGeom>
-          <a:noFill/>
-          <a:ln>
-            <a:noFill/>
-          </a:ln>
-        </p:spPr>
-        <p:txBody>
-          <a:bodyPr anchorCtr="0" anchor="ctr" bIns="91425" lIns="91425" spcFirstLastPara="1" rIns="91425" wrap="square" tIns="91425">
-            <a:noAutofit/>
-          </a:bodyPr>
-          <a:lstStyle/>
-          <a:p>
-            <a:pPr indent="0" lvl="0" marL="0" rtl="0" algn="l">
-              <a:spcBef>
-                <a:spcPts val="0"/>
-              </a:spcBef>
-              <a:spcAft>
-                <a:spcPts val="0"/>
-              </a:spcAft>
-              <a:buNone/>
-            </a:pPr>
-            <a:r>
-              <a:t/>
-            </a:r>
-            <a:endParaRPr/>
-          </a:p>
-        </p:txBody>
-      </p:sp>
-      <p:sp>
-        <p:nvSpPr>
-          <p:cNvPr id="1033" name="Google Shape;1033;p65"/>
-          <p:cNvSpPr/>
-          <p:nvPr/>
-        </p:nvSpPr>
-        <p:spPr>
-          <a:xfrm>
-            <a:off x="285748" y="1209852"/>
-            <a:ext cx="8572456" cy="3014270"/>
-          </a:xfrm>
-          <a:prstGeom prst="rect">
-            <a:avLst/>
-          </a:prstGeom>
-          <a:noFill/>
-          <a:ln>
-            <a:noFill/>
-          </a:ln>
-        </p:spPr>
-        <p:txBody>
-          <a:bodyPr anchorCtr="0" anchor="ctr" bIns="91425" lIns="91425" spcFirstLastPara="1" rIns="91425" wrap="square" tIns="91425">
-            <a:noAutofit/>
-          </a:bodyPr>
-          <a:lstStyle/>
-          <a:p>
-            <a:pPr indent="0" lvl="0" marL="0" rtl="0" algn="l">
-              <a:spcBef>
-                <a:spcPts val="0"/>
-              </a:spcBef>
-              <a:spcAft>
-                <a:spcPts val="0"/>
-              </a:spcAft>
-              <a:buNone/>
-            </a:pPr>
-            <a:r>
-              <a:t/>
-            </a:r>
-            <a:endParaRPr/>
-          </a:p>
-        </p:txBody>
-      </p:sp>
-      <p:sp>
-        <p:nvSpPr>
-          <p:cNvPr id="1034" name="Google Shape;1034;p65"/>
-          <p:cNvSpPr/>
-          <p:nvPr/>
-        </p:nvSpPr>
-        <p:spPr>
-          <a:xfrm>
-            <a:off x="476248" y="1400327"/>
-            <a:ext cx="2412987" cy="1009519"/>
-          </a:xfrm>
-          <a:prstGeom prst="rect">
-            <a:avLst/>
-          </a:prstGeom>
-          <a:noFill/>
-          <a:ln>
-            <a:noFill/>
-          </a:ln>
-        </p:spPr>
-        <p:txBody>
-          <a:bodyPr anchorCtr="0" anchor="ctr" bIns="91425" lIns="91425" spcFirstLastPara="1" rIns="91425" wrap="square" tIns="91425">
-            <a:noAutofit/>
-          </a:bodyPr>
-          <a:lstStyle/>
-          <a:p>
-            <a:pPr indent="0" lvl="0" marL="0" rtl="0" algn="l">
-              <a:spcBef>
-                <a:spcPts val="0"/>
-              </a:spcBef>
-              <a:spcAft>
-                <a:spcPts val="0"/>
-              </a:spcAft>
-              <a:buNone/>
-            </a:pPr>
-            <a:r>
-              <a:t/>
-            </a:r>
-            <a:endParaRPr/>
-          </a:p>
-        </p:txBody>
-      </p:sp>
-      <p:sp>
-        <p:nvSpPr>
-          <p:cNvPr id="1035" name="Google Shape;1035;p65"/>
-          <p:cNvSpPr/>
-          <p:nvPr/>
-        </p:nvSpPr>
-        <p:spPr>
-          <a:xfrm>
-            <a:off x="476248" y="1400328"/>
-            <a:ext cx="76199" cy="76190"/>
-          </a:xfrm>
-          <a:prstGeom prst="roundRect">
-            <a:avLst>
-              <a:gd fmla="val 31500" name="adj"/>
-            </a:avLst>
-          </a:prstGeom>
-          <a:solidFill>
-            <a:srgbClr val="0077FF"/>
-          </a:solidFill>
-          <a:ln>
-            <a:noFill/>
-          </a:ln>
-        </p:spPr>
-        <p:txBody>
-          <a:bodyPr anchorCtr="0" anchor="ctr" bIns="91425" lIns="91425" spcFirstLastPara="1" rIns="91425" wrap="square" tIns="91425">
-            <a:noAutofit/>
-          </a:bodyPr>
-          <a:lstStyle/>
-          <a:p>
-            <a:pPr indent="0" lvl="0" marL="0" rtl="0" algn="l">
-              <a:spcBef>
-                <a:spcPts val="0"/>
-              </a:spcBef>
-              <a:spcAft>
-                <a:spcPts val="0"/>
-              </a:spcAft>
-              <a:buNone/>
-            </a:pPr>
-            <a:r>
-              <a:t/>
-            </a:r>
-            <a:endParaRPr/>
-          </a:p>
-        </p:txBody>
-      </p:sp>
-      <p:sp>
-        <p:nvSpPr>
-          <p:cNvPr id="1040" name="Google Shape;1040;p65"/>
-          <p:cNvSpPr/>
-          <p:nvPr/>
-        </p:nvSpPr>
-        <p:spPr>
-          <a:xfrm>
-            <a:off x="3365480" y="1400327"/>
-            <a:ext cx="2412987" cy="1009519"/>
-          </a:xfrm>
-          <a:prstGeom prst="rect">
-            <a:avLst/>
-          </a:prstGeom>
-          <a:noFill/>
-          <a:ln>
-            <a:noFill/>
-          </a:ln>
-        </p:spPr>
-        <p:txBody>
-          <a:bodyPr anchorCtr="0" anchor="ctr" bIns="91425" lIns="91425" spcFirstLastPara="1" rIns="91425" wrap="square" tIns="91425">
-            <a:noAutofit/>
-          </a:bodyPr>
-          <a:lstStyle/>
-          <a:p>
-            <a:pPr indent="0" lvl="0" marL="0" rtl="0" algn="l">
-              <a:spcBef>
-                <a:spcPts val="0"/>
-              </a:spcBef>
-              <a:spcAft>
-                <a:spcPts val="0"/>
-              </a:spcAft>
-              <a:buNone/>
-            </a:pPr>
-            <a:r>
-              <a:t/>
-            </a:r>
-            <a:endParaRPr/>
-          </a:p>
-        </p:txBody>
-      </p:sp>
-      <p:sp>
-        <p:nvSpPr>
-          <p:cNvPr id="1041" name="Google Shape;1041;p65"/>
-          <p:cNvSpPr/>
-          <p:nvPr/>
-        </p:nvSpPr>
-        <p:spPr>
-          <a:xfrm>
-            <a:off x="3365480" y="1400328"/>
-            <a:ext cx="76199" cy="76190"/>
-          </a:xfrm>
-          <a:prstGeom prst="roundRect">
-            <a:avLst>
-              <a:gd fmla="val 31500" name="adj"/>
-            </a:avLst>
-          </a:prstGeom>
-          <a:solidFill>
-            <a:srgbClr val="0077FF"/>
-          </a:solidFill>
-          <a:ln>
-            <a:noFill/>
-          </a:ln>
-        </p:spPr>
-        <p:txBody>
-          <a:bodyPr anchorCtr="0" anchor="ctr" bIns="91425" lIns="91425" spcFirstLastPara="1" rIns="91425" wrap="square" tIns="91425">
-            <a:noAutofit/>
-          </a:bodyPr>
-          <a:lstStyle/>
-          <a:p>
-            <a:pPr indent="0" lvl="0" marL="0" rtl="0" algn="l">
-              <a:spcBef>
-                <a:spcPts val="0"/>
-              </a:spcBef>
-              <a:spcAft>
-                <a:spcPts val="0"/>
-              </a:spcAft>
-              <a:buNone/>
-            </a:pPr>
-            <a:r>
-              <a:t/>
-            </a:r>
-            <a:endParaRPr/>
-          </a:p>
-        </p:txBody>
-      </p:sp>
-      <p:sp>
-        <p:nvSpPr>
-          <p:cNvPr id="1045" name="Google Shape;1045;p65"/>
-          <p:cNvSpPr/>
-          <p:nvPr/>
-        </p:nvSpPr>
-        <p:spPr>
-          <a:xfrm>
-            <a:off x="6254721" y="1400327"/>
-            <a:ext cx="2412987" cy="1009519"/>
-          </a:xfrm>
-          <a:prstGeom prst="rect">
-            <a:avLst/>
-          </a:prstGeom>
-          <a:noFill/>
-          <a:ln>
-            <a:noFill/>
-          </a:ln>
-        </p:spPr>
-        <p:txBody>
-          <a:bodyPr anchorCtr="0" anchor="ctr" bIns="91425" lIns="91425" spcFirstLastPara="1" rIns="91425" wrap="square" tIns="91425">
-            <a:noAutofit/>
-          </a:bodyPr>
-          <a:lstStyle/>
-          <a:p>
-            <a:pPr indent="0" lvl="0" marL="0" rtl="0" algn="l">
-              <a:spcBef>
-                <a:spcPts val="0"/>
-              </a:spcBef>
-              <a:spcAft>
-                <a:spcPts val="0"/>
-              </a:spcAft>
-              <a:buNone/>
-            </a:pPr>
-            <a:r>
-              <a:t/>
-            </a:r>
-            <a:endParaRPr/>
-          </a:p>
-        </p:txBody>
-      </p:sp>
-      <p:sp>
-        <p:nvSpPr>
-          <p:cNvPr id="1046" name="Google Shape;1046;p65"/>
-          <p:cNvSpPr/>
-          <p:nvPr/>
-        </p:nvSpPr>
-        <p:spPr>
-          <a:xfrm>
-            <a:off x="6254721" y="1400328"/>
-            <a:ext cx="76199" cy="76190"/>
-          </a:xfrm>
-          <a:prstGeom prst="roundRect">
-            <a:avLst>
-              <a:gd fmla="val 31500" name="adj"/>
-            </a:avLst>
-          </a:prstGeom>
-          <a:solidFill>
-            <a:srgbClr val="0077FF"/>
-          </a:solidFill>
-          <a:ln>
-            <a:noFill/>
-          </a:ln>
-        </p:spPr>
-        <p:txBody>
-          <a:bodyPr anchorCtr="0" anchor="ctr" bIns="91425" lIns="91425" spcFirstLastPara="1" rIns="91425" wrap="square" tIns="91425">
-            <a:noAutofit/>
-          </a:bodyPr>
-          <a:lstStyle/>
-          <a:p>
-            <a:pPr indent="0" lvl="0" marL="0" rtl="0" algn="l">
-              <a:spcBef>
-                <a:spcPts val="0"/>
-              </a:spcBef>
-              <a:spcAft>
-                <a:spcPts val="0"/>
-              </a:spcAft>
-              <a:buNone/>
-            </a:pPr>
-            <a:r>
-              <a:t/>
-            </a:r>
-            <a:endParaRPr/>
-          </a:p>
-        </p:txBody>
-      </p:sp>
-      <p:sp>
-        <p:nvSpPr>
-          <p:cNvPr id="1047" name="title"/>
-          <p:cNvSpPr txBox="1"/>
-          <p:nvPr/>
-        </p:nvSpPr>
-        <p:spPr>
-          <a:xfrm>
-            <a:off x="274320" y="282943"/>
-            <a:ext cx="6792986" cy="617220"/>
-          </a:xfrm>
-          <a:prstGeom prst="rect">
-            <a:avLst/>
-          </a:prstGeom>
-          <a:noFill/>
-        </p:spPr>
-        <p:txBody>
-          <a:bodyPr wrap="square" lIns="76200" rIns="76200" tIns="50800" bIns="50800">
-            <a:spAutoFit/>
-          </a:bodyPr>
-          <a:lstStyle/>
-          <a:p>
-            <a:pPr algn="l">
-              <a:spcAft>
-                <a:spcPts val="300"/>
-              </a:spcAft>
-              <a:defRPr sz="2705">
-                <a:solidFill>
-                  <a:srgbClr val="000000"/>
-                </a:solidFill>
-                <a:latin typeface="Play"/>
-                <a:ea typeface="Play"/>
-                <a:cs typeface="Play"/>
-              </a:defRPr>
-            </a:pPr>
-            <a:r>
-              <a:rPr sz="2705">
-                <a:solidFill>
-                  <a:srgbClr val="000000"/>
-                </a:solidFill>
-                <a:latin typeface="Play"/>
-                <a:ea typeface="Play"/>
-                <a:cs typeface="Play"/>
-              </a:rPr>
-              <a:t>Сейчас: 42 колоды, 186 мин сборки</a:t>
-            </a:r>
-          </a:p>
-        </p:txBody>
-      </p:sp>
-      <p:sp>
-        <p:nvSpPr>
-          <p:cNvPr id="1048" name="lead"/>
-          <p:cNvSpPr txBox="1"/>
-          <p:nvPr/>
-        </p:nvSpPr>
-        <p:spPr>
-          <a:xfrm>
-            <a:off x="274320" y="1476493"/>
-            <a:ext cx="6792986" cy="479797"/>
-          </a:xfrm>
-          <a:prstGeom prst="rect">
-            <a:avLst/>
-          </a:prstGeom>
-          <a:noFill/>
-        </p:spPr>
-        <p:txBody>
-          <a:bodyPr wrap="square" lIns="76200" rIns="76200" tIns="50800" bIns="50800">
-            <a:spAutoFit/>
-          </a:bodyPr>
-          <a:lstStyle/>
-          <a:p>
-            <a:pPr algn="l">
-              <a:spcAft>
-                <a:spcPts val="300"/>
-              </a:spcAft>
-              <a:defRPr sz="1800">
-                <a:solidFill>
-                  <a:srgbClr val="000000"/>
-                </a:solidFill>
-                <a:latin typeface="Play"/>
-                <a:ea typeface="Play"/>
-                <a:cs typeface="Play"/>
-              </a:defRPr>
-            </a:pPr>
-            <a:r>
-              <a:rPr sz="1800">
-                <a:solidFill>
-                  <a:srgbClr val="000000"/>
-                </a:solidFill>
-                <a:latin typeface="Play"/>
-                <a:ea typeface="Play"/>
-                <a:cs typeface="Play"/>
-              </a:rPr>
-              <a:t>42 колоды, 186 мин сборки одной презентации</a:t>
-            </a:r>
-          </a:p>
-        </p:txBody>
-      </p:sp>
-      <p:sp>
-        <p:nvSpPr>
-          <p:cNvPr id="1049" name="body"/>
-          <p:cNvSpPr txBox="1"/>
-          <p:nvPr/>
-        </p:nvSpPr>
-        <p:spPr>
-          <a:xfrm>
-            <a:off x="274320" y="1956460"/>
-            <a:ext cx="6792986" cy="504189"/>
-          </a:xfrm>
-          <a:prstGeom prst="rect">
-            <a:avLst/>
-          </a:prstGeom>
-          <a:noFill/>
-        </p:spPr>
-        <p:txBody>
-          <a:bodyPr wrap="square" lIns="76200" rIns="76200" tIns="50800" bIns="50800">
-            <a:spAutoFit/>
-          </a:bodyPr>
-          <a:lstStyle/>
-          <a:p>
-            <a:pPr algn="l">
-              <a:spcAft>
-                <a:spcPts val="300"/>
-              </a:spcAft>
-              <a:defRPr sz="1200">
-                <a:solidFill>
-                  <a:srgbClr val="000000"/>
-                </a:solidFill>
-                <a:latin typeface="Play"/>
-                <a:ea typeface="Play"/>
-                <a:cs typeface="Play"/>
-              </a:defRPr>
-            </a:pPr>
-            <a:r>
-              <a:rPr sz="1200">
-                <a:solidFill>
-                  <a:srgbClr val="000000"/>
-                </a:solidFill>
-                <a:latin typeface="Play"/>
-                <a:ea typeface="Play"/>
-                <a:cs typeface="Play"/>
-              </a:rPr>
-              <a:t>• 74 мин правок после ревью дизайнера</a:t>
-            </a:r>
-          </a:p>
-          <a:p>
-            <a:pPr algn="l">
-              <a:spcAft>
-                <a:spcPts val="300"/>
-              </a:spcAft>
-              <a:defRPr sz="1200">
-                <a:solidFill>
-                  <a:srgbClr val="000000"/>
-                </a:solidFill>
-                <a:latin typeface="Play"/>
-                <a:ea typeface="Play"/>
-                <a:cs typeface="Play"/>
-              </a:defRPr>
-            </a:pPr>
-            <a:r>
-              <a:rPr sz="1200">
-                <a:solidFill>
-                  <a:srgbClr val="000000"/>
-                </a:solidFill>
-                <a:latin typeface="Play"/>
-                <a:ea typeface="Play"/>
-                <a:cs typeface="Play"/>
-              </a:rPr>
-              <a:t>• 19 из 42 колод нарушили фирменный стиль</a:t>
-            </a:r>
-          </a:p>
-        </p:txBody>
-      </p:sp>
-    </p:spTree>
-  </p:cSld>
-  <p:clrMapOvr>
-    <a:masterClrMapping/>
-  </p:clrMapOvr>
-</p:sld>
-</file>
-
-<file path=ppt/slides/slide57.xml><?xml version="1.0" encoding="utf-8"?>
-<p:sld xmlns:a="http://schemas.openxmlformats.org/drawingml/2006/main" xmlns:p="http://schemas.openxmlformats.org/presentationml/2006/main" xmlns:r="http://schemas.openxmlformats.org/officeDocument/2006/relationships">
-  <p:cSld>
-    <p:spTree>
-      <p:nvGrpSpPr>
-        <p:cNvPr id="1" name=""/>
-        <p:cNvGrpSpPr/>
-        <p:nvPr/>
-      </p:nvGrpSpPr>
-      <p:grpSpPr/>
-      <p:sp>
-        <p:nvSpPr>
-          <p:cNvPr id="532" name="Google Shape;532;p53"/>
-          <p:cNvSpPr/>
-          <p:nvPr/>
-        </p:nvSpPr>
-        <p:spPr>
-          <a:xfrm>
-            <a:off x="303214" y="1022533"/>
-            <a:ext cx="8451939" cy="1433588"/>
-          </a:xfrm>
-          <a:prstGeom prst="rect">
-            <a:avLst/>
-          </a:prstGeom>
-          <a:noFill/>
-          <a:ln>
-            <a:noFill/>
-          </a:ln>
-        </p:spPr>
-        <p:txBody>
-          <a:bodyPr anchorCtr="0" anchor="ctr" bIns="91425" lIns="91425" spcFirstLastPara="1" rIns="91425" wrap="square" tIns="91425">
-            <a:noAutofit/>
-          </a:bodyPr>
-          <a:lstStyle/>
-          <a:p>
-            <a:pPr indent="0" lvl="0" marL="0" rtl="0" algn="l">
-              <a:spcBef>
-                <a:spcPts val="0"/>
-              </a:spcBef>
-              <a:spcAft>
-                <a:spcPts val="0"/>
-              </a:spcAft>
-              <a:buNone/>
-            </a:pPr>
-            <a:r>
-              <a:t/>
-            </a:r>
-            <a:endParaRPr/>
-          </a:p>
-        </p:txBody>
-      </p:sp>
-      <p:sp>
-        <p:nvSpPr>
-          <p:cNvPr id="549" name="Google Shape;549;p53"/>
-          <p:cNvSpPr/>
-          <p:nvPr/>
-        </p:nvSpPr>
-        <p:spPr>
-          <a:xfrm>
-            <a:off x="7359897" y="1022533"/>
-            <a:ext cx="1395256" cy="1433588"/>
-          </a:xfrm>
-          <a:prstGeom prst="rect">
-            <a:avLst/>
-          </a:prstGeom>
-          <a:noFill/>
-          <a:ln>
-            <a:noFill/>
-          </a:ln>
-        </p:spPr>
-        <p:txBody>
-          <a:bodyPr anchorCtr="0" anchor="ctr" bIns="91425" lIns="91425" spcFirstLastPara="1" rIns="91425" wrap="square" tIns="91425">
-            <a:noAutofit/>
-          </a:bodyPr>
-          <a:lstStyle/>
-          <a:p>
-            <a:pPr indent="0" lvl="0" marL="0" rtl="0" algn="l">
-              <a:spcBef>
-                <a:spcPts val="0"/>
-              </a:spcBef>
-              <a:spcAft>
-                <a:spcPts val="0"/>
-              </a:spcAft>
-              <a:buNone/>
-            </a:pPr>
-            <a:r>
-              <a:t/>
-            </a:r>
-            <a:endParaRPr/>
-          </a:p>
-        </p:txBody>
-      </p:sp>
-      <p:sp>
-        <p:nvSpPr>
-          <p:cNvPr id="553" name="Google Shape;553;p53"/>
-          <p:cNvSpPr/>
-          <p:nvPr/>
-        </p:nvSpPr>
-        <p:spPr>
-          <a:xfrm>
-            <a:off x="276488" y="2955549"/>
-            <a:ext cx="8451939" cy="1433588"/>
-          </a:xfrm>
-          <a:prstGeom prst="rect">
-            <a:avLst/>
-          </a:prstGeom>
-          <a:noFill/>
-          <a:ln>
-            <a:noFill/>
-          </a:ln>
-        </p:spPr>
-        <p:txBody>
-          <a:bodyPr anchorCtr="0" anchor="ctr" bIns="91425" lIns="91425" spcFirstLastPara="1" rIns="91425" wrap="square" tIns="91425">
-            <a:noAutofit/>
-          </a:bodyPr>
-          <a:lstStyle/>
-          <a:p>
-            <a:pPr indent="0" lvl="0" marL="0" rtl="0" algn="l">
-              <a:spcBef>
-                <a:spcPts val="0"/>
-              </a:spcBef>
-              <a:spcAft>
-                <a:spcPts val="0"/>
-              </a:spcAft>
-              <a:buNone/>
-            </a:pPr>
-            <a:r>
-              <a:t/>
-            </a:r>
-            <a:endParaRPr/>
-          </a:p>
-        </p:txBody>
-      </p:sp>
-      <p:sp>
-        <p:nvSpPr>
-          <p:cNvPr id="554" name="Google Shape;554;p53"/>
-          <p:cNvSpPr/>
-          <p:nvPr/>
-        </p:nvSpPr>
-        <p:spPr>
-          <a:xfrm>
-            <a:off x="303214" y="2797849"/>
-            <a:ext cx="8451939" cy="1433588"/>
-          </a:xfrm>
-          <a:prstGeom prst="rect">
-            <a:avLst/>
-          </a:prstGeom>
-          <a:noFill/>
-          <a:ln>
-            <a:noFill/>
-          </a:ln>
-        </p:spPr>
-        <p:txBody>
-          <a:bodyPr anchorCtr="0" anchor="ctr" bIns="91425" lIns="91425" spcFirstLastPara="1" rIns="91425" wrap="square" tIns="91425">
-            <a:noAutofit/>
-          </a:bodyPr>
-          <a:lstStyle/>
-          <a:p>
-            <a:pPr indent="0" lvl="0" marL="0" rtl="0" algn="l">
-              <a:spcBef>
-                <a:spcPts val="0"/>
-              </a:spcBef>
-              <a:spcAft>
-                <a:spcPts val="0"/>
-              </a:spcAft>
-              <a:buNone/>
-            </a:pPr>
-            <a:r>
-              <a:t/>
-            </a:r>
-            <a:endParaRPr/>
-          </a:p>
-        </p:txBody>
-      </p:sp>
-      <p:sp>
-        <p:nvSpPr>
-          <p:cNvPr id="571" name="Google Shape;571;p53"/>
-          <p:cNvSpPr/>
-          <p:nvPr/>
-        </p:nvSpPr>
-        <p:spPr>
-          <a:xfrm>
-            <a:off x="7359897" y="2797849"/>
-            <a:ext cx="1395256" cy="1433588"/>
-          </a:xfrm>
-          <a:prstGeom prst="rect">
-            <a:avLst/>
-          </a:prstGeom>
-          <a:noFill/>
-          <a:ln>
-            <a:noFill/>
-          </a:ln>
-        </p:spPr>
-        <p:txBody>
-          <a:bodyPr anchorCtr="0" anchor="ctr" bIns="91425" lIns="91425" spcFirstLastPara="1" rIns="91425" wrap="square" tIns="91425">
-            <a:noAutofit/>
-          </a:bodyPr>
-          <a:lstStyle/>
-          <a:p>
-            <a:pPr indent="0" lvl="0" marL="0" rtl="0" algn="l">
-              <a:spcBef>
-                <a:spcPts val="0"/>
-              </a:spcBef>
-              <a:spcAft>
-                <a:spcPts val="0"/>
-              </a:spcAft>
-              <a:buNone/>
-            </a:pPr>
-            <a:r>
-              <a:t/>
-            </a:r>
-            <a:endParaRPr/>
-          </a:p>
-        </p:txBody>
-      </p:sp>
-      <p:sp>
-        <p:nvSpPr>
-          <p:cNvPr id="572" name="title"/>
-          <p:cNvSpPr txBox="1"/>
-          <p:nvPr/>
-        </p:nvSpPr>
-        <p:spPr>
-          <a:xfrm>
-            <a:off x="274320" y="282943"/>
-            <a:ext cx="6792986" cy="617220"/>
-          </a:xfrm>
-          <a:prstGeom prst="rect">
-            <a:avLst/>
-          </a:prstGeom>
-          <a:noFill/>
-        </p:spPr>
-        <p:txBody>
-          <a:bodyPr wrap="square" lIns="76200" rIns="76200" tIns="50800" bIns="50800">
-            <a:spAutoFit/>
-          </a:bodyPr>
-          <a:lstStyle/>
-          <a:p>
-            <a:pPr algn="l">
-              <a:spcAft>
-                <a:spcPts val="300"/>
-              </a:spcAft>
-              <a:defRPr sz="2705">
-                <a:solidFill>
-                  <a:srgbClr val="000000"/>
-                </a:solidFill>
-                <a:latin typeface="Play"/>
-                <a:ea typeface="Play"/>
-                <a:cs typeface="Play"/>
-              </a:defRPr>
-            </a:pPr>
-            <a:r>
-              <a:rPr sz="2705">
-                <a:solidFill>
-                  <a:srgbClr val="000000"/>
-                </a:solidFill>
-                <a:latin typeface="Play"/>
-                <a:ea typeface="Play"/>
-                <a:cs typeface="Play"/>
-              </a:rPr>
-              <a:t>Сервис: автоматическая вёрстка</a:t>
-            </a:r>
-          </a:p>
-        </p:txBody>
-      </p:sp>
-      <p:sp>
-        <p:nvSpPr>
-          <p:cNvPr id="573" name="lead"/>
-          <p:cNvSpPr txBox="1"/>
-          <p:nvPr/>
-        </p:nvSpPr>
-        <p:spPr>
-          <a:xfrm>
-            <a:off x="274320" y="1414513"/>
-            <a:ext cx="6792986" cy="991268"/>
-          </a:xfrm>
-          <a:prstGeom prst="rect">
-            <a:avLst/>
-          </a:prstGeom>
-          <a:noFill/>
-        </p:spPr>
-        <p:txBody>
-          <a:bodyPr wrap="square" lIns="76200" rIns="76200" tIns="50800" bIns="50800">
-            <a:spAutoFit/>
-          </a:bodyPr>
-          <a:lstStyle/>
-          <a:p>
-            <a:pPr algn="ctr">
-              <a:spcAft>
-                <a:spcPts val="300"/>
-              </a:spcAft>
-              <a:defRPr sz="2705">
-                <a:solidFill>
-                  <a:srgbClr val="000000"/>
-                </a:solidFill>
-                <a:latin typeface="Play"/>
-                <a:ea typeface="Play"/>
-                <a:cs typeface="Play"/>
-              </a:defRPr>
-            </a:pPr>
-            <a:r>
-              <a:rPr sz="2705">
-                <a:solidFill>
-                  <a:srgbClr val="000000"/>
-                </a:solidFill>
-                <a:latin typeface="Play"/>
-                <a:ea typeface="Play"/>
-                <a:cs typeface="Play"/>
-              </a:rPr>
-              <a:t>Принимает шаблон pptx и материалы</a:t>
-            </a:r>
-          </a:p>
-        </p:txBody>
-      </p:sp>
-      <p:sp>
-        <p:nvSpPr>
-          <p:cNvPr id="574" name="body"/>
-          <p:cNvSpPr txBox="1"/>
-          <p:nvPr/>
-        </p:nvSpPr>
-        <p:spPr>
-          <a:xfrm>
-            <a:off x="274320" y="2576894"/>
-            <a:ext cx="6792986" cy="1689484"/>
-          </a:xfrm>
-          <a:prstGeom prst="rect">
-            <a:avLst/>
-          </a:prstGeom>
-          <a:noFill/>
-        </p:spPr>
-        <p:txBody>
-          <a:bodyPr wrap="square" lIns="76200" rIns="76200" tIns="50800" bIns="50800">
-            <a:spAutoFit/>
-          </a:bodyPr>
-          <a:lstStyle/>
-          <a:p>
-            <a:pPr algn="l">
-              <a:spcAft>
-                <a:spcPts val="300"/>
-              </a:spcAft>
-              <a:defRPr sz="1800">
-                <a:solidFill>
-                  <a:srgbClr val="000000"/>
-                </a:solidFill>
-                <a:latin typeface="Play"/>
-                <a:ea typeface="Play"/>
-                <a:cs typeface="Play"/>
-              </a:defRPr>
-            </a:pPr>
-            <a:r>
-              <a:rPr sz="1800">
-                <a:solidFill>
-                  <a:srgbClr val="000000"/>
-                </a:solidFill>
-                <a:latin typeface="Play"/>
-                <a:ea typeface="Play"/>
-                <a:cs typeface="Play"/>
-              </a:rPr>
-              <a:t>• Автоматически формирует дизайн-систему и план колоды</a:t>
-            </a:r>
-          </a:p>
-          <a:p>
-            <a:pPr algn="l">
-              <a:spcAft>
-                <a:spcPts val="300"/>
-              </a:spcAft>
-              <a:defRPr sz="1800">
-                <a:solidFill>
-                  <a:srgbClr val="000000"/>
-                </a:solidFill>
-                <a:latin typeface="Play"/>
-                <a:ea typeface="Play"/>
-                <a:cs typeface="Play"/>
-              </a:defRPr>
-            </a:pPr>
-            <a:r>
-              <a:rPr sz="1800">
-                <a:solidFill>
-                  <a:srgbClr val="000000"/>
-                </a:solidFill>
-                <a:latin typeface="Play"/>
-                <a:ea typeface="Play"/>
-                <a:cs typeface="Play"/>
-              </a:rPr>
-              <a:t>• Экспортирует pptx, pdf, html, слайды остаются редактируемыми</a:t>
-            </a:r>
-          </a:p>
-        </p:txBody>
-      </p:sp>
-    </p:spTree>
-  </p:cSld>
-  <p:clrMapOvr>
-    <a:masterClrMapping/>
-  </p:clrMapOvr>
-</p:sld>
-</file>
-
-<file path=ppt/slides/slide58.xml><?xml version="1.0" encoding="utf-8"?>
-<p:sld xmlns:a="http://schemas.openxmlformats.org/drawingml/2006/main" xmlns:p="http://schemas.openxmlformats.org/presentationml/2006/main" xmlns:r="http://schemas.openxmlformats.org/officeDocument/2006/relationships">
-  <p:cSld>
-    <p:spTree>
-      <p:nvGrpSpPr>
-        <p:cNvPr id="1" name=""/>
-        <p:cNvGrpSpPr/>
-        <p:nvPr/>
-      </p:nvGrpSpPr>
-      <p:grpSpPr/>
-      <p:sp>
-        <p:nvSpPr>
-          <p:cNvPr id="1027" name="Google Shape;1027;p65"/>
-          <p:cNvSpPr/>
-          <p:nvPr/>
-        </p:nvSpPr>
-        <p:spPr>
-          <a:xfrm>
-            <a:off x="6064222" y="1209852"/>
-            <a:ext cx="2793985" cy="3014270"/>
-          </a:xfrm>
-          <a:prstGeom prst="roundRect">
-            <a:avLst>
-              <a:gd fmla="val 3436" name="adj"/>
-            </a:avLst>
-          </a:prstGeom>
-          <a:solidFill>
-            <a:schemeClr val="lt2"/>
-          </a:solidFill>
-          <a:ln>
-            <a:noFill/>
-          </a:ln>
-        </p:spPr>
-        <p:txBody>
-          <a:bodyPr anchorCtr="0" anchor="ctr" bIns="91425" lIns="91425" spcFirstLastPara="1" rIns="91425" wrap="square" tIns="91425">
-            <a:noAutofit/>
-          </a:bodyPr>
-          <a:lstStyle/>
-          <a:p>
-            <a:pPr indent="0" lvl="0" marL="0" rtl="0" algn="l">
-              <a:spcBef>
-                <a:spcPts val="0"/>
-              </a:spcBef>
-              <a:spcAft>
-                <a:spcPts val="0"/>
-              </a:spcAft>
-              <a:buNone/>
-            </a:pPr>
-            <a:r>
-              <a:t/>
-            </a:r>
-            <a:endParaRPr/>
-          </a:p>
-        </p:txBody>
-      </p:sp>
-      <p:sp>
-        <p:nvSpPr>
-          <p:cNvPr id="1029" name="Google Shape;1029;p65"/>
-          <p:cNvSpPr/>
-          <p:nvPr/>
-        </p:nvSpPr>
-        <p:spPr>
-          <a:xfrm>
-            <a:off x="3174981" y="1209852"/>
-            <a:ext cx="2793985" cy="3014270"/>
-          </a:xfrm>
-          <a:prstGeom prst="roundRect">
-            <a:avLst>
-              <a:gd fmla="val 3436" name="adj"/>
-            </a:avLst>
-          </a:prstGeom>
-          <a:solidFill>
-            <a:schemeClr val="lt2"/>
-          </a:solidFill>
-          <a:ln>
-            <a:noFill/>
-          </a:ln>
-        </p:spPr>
-        <p:txBody>
-          <a:bodyPr anchorCtr="0" anchor="ctr" bIns="91425" lIns="91425" spcFirstLastPara="1" rIns="91425" wrap="square" tIns="91425">
-            <a:noAutofit/>
-          </a:bodyPr>
-          <a:lstStyle/>
-          <a:p>
-            <a:pPr indent="0" lvl="0" marL="0" rtl="0" algn="l">
-              <a:spcBef>
-                <a:spcPts val="0"/>
-              </a:spcBef>
-              <a:spcAft>
-                <a:spcPts val="0"/>
-              </a:spcAft>
-              <a:buNone/>
-            </a:pPr>
-            <a:r>
-              <a:t/>
-            </a:r>
-            <a:endParaRPr/>
-          </a:p>
-        </p:txBody>
-      </p:sp>
-      <p:sp>
-        <p:nvSpPr>
-          <p:cNvPr id="1031" name="Google Shape;1031;p65"/>
-          <p:cNvSpPr/>
-          <p:nvPr/>
-        </p:nvSpPr>
-        <p:spPr>
-          <a:xfrm>
-            <a:off x="285749" y="1209852"/>
-            <a:ext cx="2793985" cy="3014270"/>
-          </a:xfrm>
-          <a:prstGeom prst="roundRect">
-            <a:avLst>
-              <a:gd fmla="val 3436" name="adj"/>
-            </a:avLst>
-          </a:prstGeom>
-          <a:solidFill>
-            <a:schemeClr val="lt2"/>
-          </a:solidFill>
-          <a:ln>
-            <a:noFill/>
-          </a:ln>
-        </p:spPr>
-        <p:txBody>
-          <a:bodyPr anchorCtr="0" anchor="ctr" bIns="91425" lIns="91425" spcFirstLastPara="1" rIns="91425" wrap="square" tIns="91425">
-            <a:noAutofit/>
-          </a:bodyPr>
-          <a:lstStyle/>
-          <a:p>
-            <a:pPr indent="0" lvl="0" marL="0" rtl="0" algn="l">
-              <a:spcBef>
-                <a:spcPts val="0"/>
-              </a:spcBef>
-              <a:spcAft>
-                <a:spcPts val="0"/>
-              </a:spcAft>
-              <a:buNone/>
-            </a:pPr>
-            <a:r>
-              <a:t/>
-            </a:r>
-            <a:endParaRPr/>
-          </a:p>
-        </p:txBody>
-      </p:sp>
-      <p:sp>
-        <p:nvSpPr>
-          <p:cNvPr id="1032" name="Google Shape;1032;p65"/>
-          <p:cNvSpPr/>
-          <p:nvPr/>
-        </p:nvSpPr>
-        <p:spPr>
-          <a:xfrm>
-            <a:off x="285748" y="286047"/>
-            <a:ext cx="8572456" cy="3938075"/>
-          </a:xfrm>
-          <a:prstGeom prst="rect">
-            <a:avLst/>
-          </a:prstGeom>
-          <a:noFill/>
-          <a:ln>
-            <a:noFill/>
-          </a:ln>
-        </p:spPr>
-        <p:txBody>
-          <a:bodyPr anchorCtr="0" anchor="ctr" bIns="91425" lIns="91425" spcFirstLastPara="1" rIns="91425" wrap="square" tIns="91425">
-            <a:noAutofit/>
-          </a:bodyPr>
-          <a:lstStyle/>
-          <a:p>
-            <a:pPr indent="0" lvl="0" marL="0" rtl="0" algn="l">
-              <a:spcBef>
-                <a:spcPts val="0"/>
-              </a:spcBef>
-              <a:spcAft>
-                <a:spcPts val="0"/>
-              </a:spcAft>
-              <a:buNone/>
-            </a:pPr>
-            <a:r>
-              <a:t/>
-            </a:r>
-            <a:endParaRPr/>
-          </a:p>
-        </p:txBody>
-      </p:sp>
-      <p:sp>
-        <p:nvSpPr>
-          <p:cNvPr id="1033" name="Google Shape;1033;p65"/>
-          <p:cNvSpPr/>
-          <p:nvPr/>
-        </p:nvSpPr>
-        <p:spPr>
-          <a:xfrm>
-            <a:off x="285748" y="1209852"/>
-            <a:ext cx="8572456" cy="3014270"/>
-          </a:xfrm>
-          <a:prstGeom prst="rect">
-            <a:avLst/>
-          </a:prstGeom>
-          <a:noFill/>
-          <a:ln>
-            <a:noFill/>
-          </a:ln>
-        </p:spPr>
-        <p:txBody>
-          <a:bodyPr anchorCtr="0" anchor="ctr" bIns="91425" lIns="91425" spcFirstLastPara="1" rIns="91425" wrap="square" tIns="91425">
-            <a:noAutofit/>
-          </a:bodyPr>
-          <a:lstStyle/>
-          <a:p>
-            <a:pPr indent="0" lvl="0" marL="0" rtl="0" algn="l">
-              <a:spcBef>
-                <a:spcPts val="0"/>
-              </a:spcBef>
-              <a:spcAft>
-                <a:spcPts val="0"/>
-              </a:spcAft>
-              <a:buNone/>
-            </a:pPr>
-            <a:r>
-              <a:t/>
-            </a:r>
-            <a:endParaRPr/>
-          </a:p>
-        </p:txBody>
-      </p:sp>
-      <p:sp>
-        <p:nvSpPr>
-          <p:cNvPr id="1034" name="Google Shape;1034;p65"/>
-          <p:cNvSpPr/>
-          <p:nvPr/>
-        </p:nvSpPr>
-        <p:spPr>
-          <a:xfrm>
-            <a:off x="476248" y="1400327"/>
-            <a:ext cx="2412987" cy="1009519"/>
-          </a:xfrm>
-          <a:prstGeom prst="rect">
-            <a:avLst/>
-          </a:prstGeom>
-          <a:noFill/>
-          <a:ln>
-            <a:noFill/>
-          </a:ln>
-        </p:spPr>
-        <p:txBody>
-          <a:bodyPr anchorCtr="0" anchor="ctr" bIns="91425" lIns="91425" spcFirstLastPara="1" rIns="91425" wrap="square" tIns="91425">
-            <a:noAutofit/>
-          </a:bodyPr>
-          <a:lstStyle/>
-          <a:p>
-            <a:pPr indent="0" lvl="0" marL="0" rtl="0" algn="l">
-              <a:spcBef>
-                <a:spcPts val="0"/>
-              </a:spcBef>
-              <a:spcAft>
-                <a:spcPts val="0"/>
-              </a:spcAft>
-              <a:buNone/>
-            </a:pPr>
-            <a:r>
-              <a:t/>
-            </a:r>
-            <a:endParaRPr/>
-          </a:p>
-        </p:txBody>
-      </p:sp>
-      <p:sp>
-        <p:nvSpPr>
-          <p:cNvPr id="1035" name="Google Shape;1035;p65"/>
-          <p:cNvSpPr/>
-          <p:nvPr/>
-        </p:nvSpPr>
-        <p:spPr>
-          <a:xfrm>
-            <a:off x="476248" y="1400328"/>
-            <a:ext cx="76199" cy="76190"/>
-          </a:xfrm>
-          <a:prstGeom prst="roundRect">
-            <a:avLst>
-              <a:gd fmla="val 31500" name="adj"/>
-            </a:avLst>
-          </a:prstGeom>
-          <a:solidFill>
-            <a:srgbClr val="0077FF"/>
-          </a:solidFill>
-          <a:ln>
-            <a:noFill/>
-          </a:ln>
-        </p:spPr>
-        <p:txBody>
-          <a:bodyPr anchorCtr="0" anchor="ctr" bIns="91425" lIns="91425" spcFirstLastPara="1" rIns="91425" wrap="square" tIns="91425">
-            <a:noAutofit/>
-          </a:bodyPr>
-          <a:lstStyle/>
-          <a:p>
-            <a:pPr indent="0" lvl="0" marL="0" rtl="0" algn="l">
-              <a:spcBef>
-                <a:spcPts val="0"/>
-              </a:spcBef>
-              <a:spcAft>
-                <a:spcPts val="0"/>
-              </a:spcAft>
-              <a:buNone/>
-            </a:pPr>
-            <a:r>
-              <a:t/>
-            </a:r>
-            <a:endParaRPr/>
-          </a:p>
-        </p:txBody>
-      </p:sp>
-      <p:sp>
-        <p:nvSpPr>
-          <p:cNvPr id="1040" name="Google Shape;1040;p65"/>
-          <p:cNvSpPr/>
-          <p:nvPr/>
-        </p:nvSpPr>
-        <p:spPr>
-          <a:xfrm>
-            <a:off x="3365480" y="1400327"/>
-            <a:ext cx="2412987" cy="1009519"/>
-          </a:xfrm>
-          <a:prstGeom prst="rect">
-            <a:avLst/>
-          </a:prstGeom>
-          <a:noFill/>
-          <a:ln>
-            <a:noFill/>
-          </a:ln>
-        </p:spPr>
-        <p:txBody>
-          <a:bodyPr anchorCtr="0" anchor="ctr" bIns="91425" lIns="91425" spcFirstLastPara="1" rIns="91425" wrap="square" tIns="91425">
-            <a:noAutofit/>
-          </a:bodyPr>
-          <a:lstStyle/>
-          <a:p>
-            <a:pPr indent="0" lvl="0" marL="0" rtl="0" algn="l">
-              <a:spcBef>
-                <a:spcPts val="0"/>
-              </a:spcBef>
-              <a:spcAft>
-                <a:spcPts val="0"/>
-              </a:spcAft>
-              <a:buNone/>
-            </a:pPr>
-            <a:r>
-              <a:t/>
-            </a:r>
-            <a:endParaRPr/>
-          </a:p>
-        </p:txBody>
-      </p:sp>
-      <p:sp>
-        <p:nvSpPr>
-          <p:cNvPr id="1041" name="Google Shape;1041;p65"/>
-          <p:cNvSpPr/>
-          <p:nvPr/>
-        </p:nvSpPr>
-        <p:spPr>
-          <a:xfrm>
-            <a:off x="3365480" y="1400328"/>
-            <a:ext cx="76199" cy="76190"/>
-          </a:xfrm>
-          <a:prstGeom prst="roundRect">
-            <a:avLst>
-              <a:gd fmla="val 31500" name="adj"/>
-            </a:avLst>
-          </a:prstGeom>
-          <a:solidFill>
-            <a:srgbClr val="0077FF"/>
-          </a:solidFill>
-          <a:ln>
-            <a:noFill/>
-          </a:ln>
-        </p:spPr>
-        <p:txBody>
-          <a:bodyPr anchorCtr="0" anchor="ctr" bIns="91425" lIns="91425" spcFirstLastPara="1" rIns="91425" wrap="square" tIns="91425">
-            <a:noAutofit/>
-          </a:bodyPr>
-          <a:lstStyle/>
-          <a:p>
-            <a:pPr indent="0" lvl="0" marL="0" rtl="0" algn="l">
-              <a:spcBef>
-                <a:spcPts val="0"/>
-              </a:spcBef>
-              <a:spcAft>
-                <a:spcPts val="0"/>
-              </a:spcAft>
-              <a:buNone/>
-            </a:pPr>
-            <a:r>
-              <a:t/>
-            </a:r>
-            <a:endParaRPr/>
-          </a:p>
-        </p:txBody>
-      </p:sp>
-      <p:sp>
-        <p:nvSpPr>
-          <p:cNvPr id="1045" name="Google Shape;1045;p65"/>
-          <p:cNvSpPr/>
-          <p:nvPr/>
-        </p:nvSpPr>
-        <p:spPr>
-          <a:xfrm>
-            <a:off x="6254721" y="1400327"/>
-            <a:ext cx="2412987" cy="1009519"/>
-          </a:xfrm>
-          <a:prstGeom prst="rect">
-            <a:avLst/>
-          </a:prstGeom>
-          <a:noFill/>
-          <a:ln>
-            <a:noFill/>
-          </a:ln>
-        </p:spPr>
-        <p:txBody>
-          <a:bodyPr anchorCtr="0" anchor="ctr" bIns="91425" lIns="91425" spcFirstLastPara="1" rIns="91425" wrap="square" tIns="91425">
-            <a:noAutofit/>
-          </a:bodyPr>
-          <a:lstStyle/>
-          <a:p>
-            <a:pPr indent="0" lvl="0" marL="0" rtl="0" algn="l">
-              <a:spcBef>
-                <a:spcPts val="0"/>
-              </a:spcBef>
-              <a:spcAft>
-                <a:spcPts val="0"/>
-              </a:spcAft>
-              <a:buNone/>
-            </a:pPr>
-            <a:r>
-              <a:t/>
-            </a:r>
-            <a:endParaRPr/>
-          </a:p>
-        </p:txBody>
-      </p:sp>
-      <p:sp>
-        <p:nvSpPr>
-          <p:cNvPr id="1046" name="Google Shape;1046;p65"/>
-          <p:cNvSpPr/>
-          <p:nvPr/>
-        </p:nvSpPr>
-        <p:spPr>
-          <a:xfrm>
-            <a:off x="6254721" y="1400328"/>
-            <a:ext cx="76199" cy="76190"/>
-          </a:xfrm>
-          <a:prstGeom prst="roundRect">
-            <a:avLst>
-              <a:gd fmla="val 31500" name="adj"/>
-            </a:avLst>
-          </a:prstGeom>
-          <a:solidFill>
-            <a:srgbClr val="0077FF"/>
-          </a:solidFill>
-          <a:ln>
-            <a:noFill/>
-          </a:ln>
-        </p:spPr>
-        <p:txBody>
-          <a:bodyPr anchorCtr="0" anchor="ctr" bIns="91425" lIns="91425" spcFirstLastPara="1" rIns="91425" wrap="square" tIns="91425">
-            <a:noAutofit/>
-          </a:bodyPr>
-          <a:lstStyle/>
-          <a:p>
-            <a:pPr indent="0" lvl="0" marL="0" rtl="0" algn="l">
-              <a:spcBef>
-                <a:spcPts val="0"/>
-              </a:spcBef>
-              <a:spcAft>
-                <a:spcPts val="0"/>
-              </a:spcAft>
-              <a:buNone/>
-            </a:pPr>
-            <a:r>
-              <a:t/>
-            </a:r>
-            <a:endParaRPr/>
-          </a:p>
-        </p:txBody>
-      </p:sp>
-      <p:sp>
-        <p:nvSpPr>
-          <p:cNvPr id="1047" name="title"/>
-          <p:cNvSpPr txBox="1"/>
-          <p:nvPr/>
-        </p:nvSpPr>
-        <p:spPr>
-          <a:xfrm>
-            <a:off x="274320" y="282943"/>
-            <a:ext cx="6792986" cy="617220"/>
-          </a:xfrm>
-          <a:prstGeom prst="rect">
-            <a:avLst/>
-          </a:prstGeom>
-          <a:noFill/>
-        </p:spPr>
-        <p:txBody>
-          <a:bodyPr wrap="square" lIns="76200" rIns="76200" tIns="50800" bIns="50800">
-            <a:spAutoFit/>
-          </a:bodyPr>
-          <a:lstStyle/>
-          <a:p>
-            <a:pPr algn="l">
-              <a:spcAft>
-                <a:spcPts val="300"/>
-              </a:spcAft>
-              <a:defRPr sz="2705">
-                <a:solidFill>
-                  <a:srgbClr val="000000"/>
-                </a:solidFill>
-                <a:latin typeface="Play"/>
-                <a:ea typeface="Play"/>
-                <a:cs typeface="Play"/>
-              </a:defRPr>
-            </a:pPr>
-            <a:r>
-              <a:rPr sz="2705">
-                <a:solidFill>
-                  <a:srgbClr val="000000"/>
-                </a:solidFill>
-                <a:latin typeface="Play"/>
-                <a:ea typeface="Play"/>
-                <a:cs typeface="Play"/>
-              </a:rPr>
-              <a:t>Пилот: 68 колод, 4 мин сборки</a:t>
-            </a:r>
-          </a:p>
-        </p:txBody>
-      </p:sp>
-      <p:sp>
-        <p:nvSpPr>
-          <p:cNvPr id="1048" name="lead"/>
-          <p:cNvSpPr txBox="1"/>
-          <p:nvPr/>
-        </p:nvSpPr>
-        <p:spPr>
-          <a:xfrm>
-            <a:off x="274320" y="1476493"/>
-            <a:ext cx="6792986" cy="361960"/>
-          </a:xfrm>
-          <a:prstGeom prst="rect">
-            <a:avLst/>
-          </a:prstGeom>
-          <a:noFill/>
-        </p:spPr>
-        <p:txBody>
-          <a:bodyPr wrap="square" lIns="76200" rIns="76200" tIns="50800" bIns="50800">
-            <a:spAutoFit/>
-          </a:bodyPr>
-          <a:lstStyle/>
-          <a:p>
-            <a:pPr algn="l">
-              <a:spcAft>
-                <a:spcPts val="300"/>
-              </a:spcAft>
-              <a:defRPr sz="1400">
-                <a:solidFill>
-                  <a:srgbClr val="000000"/>
-                </a:solidFill>
-                <a:latin typeface="Play"/>
-                <a:ea typeface="Play"/>
-                <a:cs typeface="Play"/>
-              </a:defRPr>
-            </a:pPr>
-            <a:r>
-              <a:rPr sz="1400">
-                <a:solidFill>
-                  <a:srgbClr val="000000"/>
-                </a:solidFill>
-                <a:latin typeface="Play"/>
-                <a:ea typeface="Play"/>
-                <a:cs typeface="Play"/>
-              </a:rPr>
-              <a:t>68 колод собраны за 6 недель</a:t>
-            </a:r>
-          </a:p>
-        </p:txBody>
-      </p:sp>
-      <p:sp>
-        <p:nvSpPr>
-          <p:cNvPr id="1049" name="body"/>
-          <p:cNvSpPr txBox="1"/>
-          <p:nvPr/>
-        </p:nvSpPr>
-        <p:spPr>
-          <a:xfrm>
-            <a:off x="274320" y="1897503"/>
-            <a:ext cx="6792986" cy="563146"/>
-          </a:xfrm>
-          <a:prstGeom prst="rect">
-            <a:avLst/>
-          </a:prstGeom>
-          <a:noFill/>
-        </p:spPr>
-        <p:txBody>
-          <a:bodyPr wrap="square" lIns="76200" rIns="76200" tIns="50800" bIns="50800">
-            <a:spAutoFit/>
-          </a:bodyPr>
-          <a:lstStyle/>
-          <a:p>
-            <a:pPr algn="l">
-              <a:spcAft>
-                <a:spcPts val="300"/>
-              </a:spcAft>
-              <a:defRPr sz="1200">
-                <a:solidFill>
-                  <a:srgbClr val="000000"/>
-                </a:solidFill>
-                <a:latin typeface="Play"/>
-                <a:ea typeface="Play"/>
-                <a:cs typeface="Play"/>
-              </a:defRPr>
-            </a:pPr>
-            <a:r>
-              <a:rPr sz="1200">
-                <a:solidFill>
-                  <a:srgbClr val="000000"/>
-                </a:solidFill>
-                <a:latin typeface="Play"/>
-                <a:ea typeface="Play"/>
-                <a:cs typeface="Play"/>
-              </a:rPr>
-              <a:t>• Среднее время сборки 4 мин вместо 186</a:t>
-            </a:r>
-          </a:p>
-          <a:p>
-            <a:pPr algn="l">
-              <a:spcAft>
-                <a:spcPts val="300"/>
-              </a:spcAft>
-              <a:defRPr sz="1200">
-                <a:solidFill>
-                  <a:srgbClr val="000000"/>
-                </a:solidFill>
-                <a:latin typeface="Play"/>
-                <a:ea typeface="Play"/>
-                <a:cs typeface="Play"/>
-              </a:defRPr>
-            </a:pPr>
-            <a:r>
-              <a:rPr sz="1200">
-                <a:solidFill>
-                  <a:srgbClr val="000000"/>
-                </a:solidFill>
-                <a:latin typeface="Play"/>
-                <a:ea typeface="Play"/>
-                <a:cs typeface="Play"/>
-              </a:rPr>
-              <a:t>• Время до первой версии сократилось с 6 дней до 1</a:t>
-            </a:r>
-          </a:p>
-        </p:txBody>
-      </p:sp>
-    </p:spTree>
-  </p:cSld>
-  <p:clrMapOvr>
-    <a:masterClrMapping/>
-  </p:clrMapOvr>
-</p:sld>
-</file>
-
-<file path=ppt/slides/slide59.xml><?xml version="1.0" encoding="utf-8"?>
-<p:sld xmlns:a="http://schemas.openxmlformats.org/drawingml/2006/main" xmlns:p="http://schemas.openxmlformats.org/presentationml/2006/main" xmlns:r="http://schemas.openxmlformats.org/officeDocument/2006/relationships">
-  <p:cSld>
-    <p:spTree>
-      <p:nvGrpSpPr>
-        <p:cNvPr id="1" name=""/>
-        <p:cNvGrpSpPr/>
-        <p:nvPr/>
-      </p:nvGrpSpPr>
-      <p:grpSpPr/>
-      <p:pic>
-        <p:nvPicPr>
-          <p:cNvPr descr=" " id="2249" name="Google Shape;2249;p83"/>
-          <p:cNvPicPr preferRelativeResize="0"/>
-          <p:nvPr/>
-        </p:nvPicPr>
-        <p:blipFill rotWithShape="1">
-          <a:blip r:embed="rId2">
-            <a:alphaModFix/>
-          </a:blip>
-          <a:srcRect b="0" l="0" r="0" t="0"/>
-          <a:stretch/>
-        </p:blipFill>
-        <p:spPr>
-          <a:xfrm>
-            <a:off x="285748" y="3576507"/>
-            <a:ext cx="2381238" cy="28571"/>
-          </a:xfrm>
-          <a:prstGeom prst="rect">
-            <a:avLst/>
-          </a:prstGeom>
-          <a:noFill/>
-          <a:ln>
-            <a:noFill/>
-          </a:ln>
-        </p:spPr>
-      </p:pic>
-      <p:pic>
-        <p:nvPicPr>
-          <p:cNvPr descr=" " id="2250" name="Google Shape;2250;p83"/>
-          <p:cNvPicPr preferRelativeResize="0"/>
-          <p:nvPr/>
-        </p:nvPicPr>
-        <p:blipFill rotWithShape="1">
-          <a:blip r:embed="rId3">
-            <a:alphaModFix/>
-          </a:blip>
-          <a:srcRect b="0" l="0" r="0" t="0"/>
-          <a:stretch/>
-        </p:blipFill>
-        <p:spPr>
-          <a:xfrm>
-            <a:off x="3143234" y="3576507"/>
-            <a:ext cx="3762355" cy="28571"/>
-          </a:xfrm>
-          <a:prstGeom prst="rect">
-            <a:avLst/>
-          </a:prstGeom>
-          <a:noFill/>
-          <a:ln>
-            <a:noFill/>
-          </a:ln>
-        </p:spPr>
-      </p:pic>
-      <p:sp>
-        <p:nvSpPr>
-          <p:cNvPr id="2251" name="title"/>
-          <p:cNvSpPr txBox="1"/>
-          <p:nvPr/>
-        </p:nvSpPr>
-        <p:spPr>
-          <a:xfrm>
-            <a:off x="274320" y="282943"/>
-            <a:ext cx="6792986" cy="617220"/>
-          </a:xfrm>
-          <a:prstGeom prst="rect">
-            <a:avLst/>
-          </a:prstGeom>
-          <a:noFill/>
-        </p:spPr>
-        <p:txBody>
-          <a:bodyPr wrap="square" lIns="76200" rIns="76200" tIns="50800" bIns="50800">
-            <a:spAutoFit/>
-          </a:bodyPr>
-          <a:lstStyle/>
-          <a:p>
-            <a:pPr algn="l">
-              <a:spcAft>
-                <a:spcPts val="300"/>
-              </a:spcAft>
-              <a:defRPr sz="2438">
-                <a:solidFill>
-                  <a:srgbClr val="000000"/>
-                </a:solidFill>
-                <a:latin typeface="Play"/>
-                <a:ea typeface="Play"/>
-                <a:cs typeface="Play"/>
-              </a:defRPr>
-            </a:pPr>
-            <a:r>
-              <a:rPr sz="2438">
-                <a:solidFill>
-                  <a:srgbClr val="000000"/>
-                </a:solidFill>
-                <a:latin typeface="Play"/>
-                <a:ea typeface="Play"/>
-                <a:cs typeface="Play"/>
-              </a:rPr>
-              <a:t>Время сборки</a:t>
-            </a:r>
-          </a:p>
-        </p:txBody>
-      </p:sp>
-      <p:graphicFrame>
-        <p:nvGraphicFramePr>
-          <p:cNvPr id="2252" name="Chart 2251"/>
-          <p:cNvGraphicFramePr>
-            <a:graphicFrameLocks noGrp="1"/>
-          </p:cNvGraphicFramePr>
-          <p:nvPr/>
-        </p:nvGraphicFramePr>
-        <p:xfrm>
-          <a:off x="274320" y="1414513"/>
-          <a:ext cx="7189469" cy="2161967"/>
-        </p:xfrm>
-        <a:graphic>
-          <a:graphicData uri="http://schemas.openxmlformats.org/drawingml/2006/chart">
-            <c:chart xmlns:c="http://schemas.openxmlformats.org/drawingml/2006/chart" r:id="rId4"/>
-          </a:graphicData>
-        </a:graphic>
-      </p:graphicFrame>
-    </p:spTree>
-  </p:cSld>
-  <p:clrMapOvr>
-    <a:masterClrMapping/>
-  </p:clrMapOvr>
-</p:sld>
-</file>
-
-<file path=ppt/slides/slide60.xml><?xml version="1.0" encoding="utf-8"?>
 <p:sld xmlns:a="http://schemas.openxmlformats.org/drawingml/2006/main" xmlns:p="http://schemas.openxmlformats.org/presentationml/2006/main" xmlns:r="http://schemas.openxmlformats.org/officeDocument/2006/relationships">
   <p:cSld>
     <p:spTree>
@@ -7853,9 +6362,1184 @@
           </a:p>
         </p:txBody>
       </p:sp>
-      <p:sp>
-        <p:nvSpPr>
-          <p:cNvPr id="2393" name="title"/>
+      <p:pic>
+        <p:nvPicPr>
+          <p:cNvPr descr=" " id="2394" name="Google Shape;2394;p88"/>
+          <p:cNvPicPr preferRelativeResize="0"/>
+          <p:nvPr/>
+        </p:nvPicPr>
+        <p:blipFill rotWithShape="1">
+          <a:blip r:embed="rId3">
+            <a:alphaModFix/>
+          </a:blip>
+          <a:srcRect b="0" l="0" r="0" t="0"/>
+          <a:stretch/>
+        </p:blipFill>
+        <p:spPr>
+          <a:xfrm>
+            <a:off x="1" y="3684300"/>
+            <a:ext cx="7238962" cy="70126"/>
+          </a:xfrm>
+          <a:prstGeom prst="rect">
+            <a:avLst/>
+          </a:prstGeom>
+          <a:noFill/>
+          <a:ln>
+            <a:noFill/>
+          </a:ln>
+        </p:spPr>
+      </p:pic>
+      <p:sp>
+        <p:nvSpPr>
+          <p:cNvPr id="2395" name="title"/>
+          <p:cNvSpPr txBox="1"/>
+          <p:nvPr/>
+        </p:nvSpPr>
+        <p:spPr>
+          <a:xfrm>
+            <a:off x="274320" y="282943"/>
+            <a:ext cx="6792986" cy="932027"/>
+          </a:xfrm>
+          <a:prstGeom prst="rect">
+            <a:avLst/>
+          </a:prstGeom>
+          <a:noFill/>
+        </p:spPr>
+        <p:txBody>
+          <a:bodyPr wrap="square" lIns="76200" rIns="76200" tIns="50800" bIns="50800">
+            <a:spAutoFit/>
+          </a:bodyPr>
+          <a:lstStyle/>
+          <a:p>
+            <a:pPr algn="l">
+              <a:spcAft>
+                <a:spcPts val="300"/>
+              </a:spcAft>
+              <a:defRPr sz="2438">
+                <a:solidFill>
+                  <a:srgbClr val="000000"/>
+                </a:solidFill>
+                <a:latin typeface="Play"/>
+                <a:ea typeface="Play"/>
+                <a:cs typeface="Play"/>
+              </a:defRPr>
+            </a:pPr>
+            <a:r>
+              <a:rPr sz="2438">
+                <a:solidFill>
+                  <a:srgbClr val="000000"/>
+                </a:solidFill>
+                <a:latin typeface="Play"/>
+                <a:ea typeface="Play"/>
+                <a:cs typeface="Play"/>
+              </a:rPr>
+              <a:t>Текущие трудности в создании презентаций</a:t>
+            </a:r>
+          </a:p>
+        </p:txBody>
+      </p:sp>
+      <p:sp>
+        <p:nvSpPr>
+          <p:cNvPr id="2396" name="lead"/>
+          <p:cNvSpPr txBox="1"/>
+          <p:nvPr/>
+        </p:nvSpPr>
+        <p:spPr>
+          <a:xfrm>
+            <a:off x="274320" y="2009822"/>
+            <a:ext cx="6792986" cy="619552"/>
+          </a:xfrm>
+          <a:prstGeom prst="rect">
+            <a:avLst/>
+          </a:prstGeom>
+          <a:noFill/>
+        </p:spPr>
+        <p:txBody>
+          <a:bodyPr wrap="square" lIns="76200" rIns="76200" tIns="50800" bIns="50800">
+            <a:spAutoFit/>
+          </a:bodyPr>
+          <a:lstStyle/>
+          <a:p>
+            <a:pPr algn="l">
+              <a:spcAft>
+                <a:spcPts val="300"/>
+              </a:spcAft>
+              <a:defRPr sz="1600">
+                <a:solidFill>
+                  <a:srgbClr val="000000"/>
+                </a:solidFill>
+                <a:latin typeface="Play"/>
+                <a:ea typeface="Play"/>
+                <a:cs typeface="Play"/>
+              </a:defRPr>
+            </a:pPr>
+            <a:r>
+              <a:rPr sz="1600">
+                <a:solidFill>
+                  <a:srgbClr val="000000"/>
+                </a:solidFill>
+                <a:latin typeface="Play"/>
+                <a:ea typeface="Play"/>
+                <a:cs typeface="Play"/>
+              </a:rPr>
+              <a:t>42 колоды за квартал, 12 слайдов каждая, 186 минут сборки</a:t>
+            </a:r>
+          </a:p>
+        </p:txBody>
+      </p:sp>
+      <p:sp>
+        <p:nvSpPr>
+          <p:cNvPr id="2397" name="body"/>
+          <p:cNvSpPr txBox="1"/>
+          <p:nvPr/>
+        </p:nvSpPr>
+        <p:spPr>
+          <a:xfrm>
+            <a:off x="274320" y="2729843"/>
+            <a:ext cx="6792986" cy="954445"/>
+          </a:xfrm>
+          <a:prstGeom prst="rect">
+            <a:avLst/>
+          </a:prstGeom>
+          <a:noFill/>
+        </p:spPr>
+        <p:txBody>
+          <a:bodyPr wrap="square" lIns="76200" rIns="76200" tIns="50800" bIns="50800">
+            <a:spAutoFit/>
+          </a:bodyPr>
+          <a:lstStyle/>
+          <a:p>
+            <a:pPr algn="l">
+              <a:spcAft>
+                <a:spcPts val="300"/>
+              </a:spcAft>
+              <a:defRPr sz="1200">
+                <a:solidFill>
+                  <a:srgbClr val="000000"/>
+                </a:solidFill>
+                <a:latin typeface="Play"/>
+                <a:ea typeface="Play"/>
+                <a:cs typeface="Play"/>
+              </a:defRPr>
+            </a:pPr>
+            <a:r>
+              <a:rPr sz="1200">
+                <a:solidFill>
+                  <a:srgbClr val="000000"/>
+                </a:solidFill>
+                <a:latin typeface="Play"/>
+                <a:ea typeface="Play"/>
+                <a:cs typeface="Play"/>
+              </a:rPr>
+              <a:t>• 74 минуты на правки после ревью дизайнера</a:t>
+            </a:r>
+          </a:p>
+          <a:p>
+            <a:pPr algn="l">
+              <a:spcAft>
+                <a:spcPts val="300"/>
+              </a:spcAft>
+              <a:defRPr sz="1200">
+                <a:solidFill>
+                  <a:srgbClr val="000000"/>
+                </a:solidFill>
+                <a:latin typeface="Play"/>
+                <a:ea typeface="Play"/>
+                <a:cs typeface="Play"/>
+              </a:defRPr>
+            </a:pPr>
+            <a:r>
+              <a:rPr sz="1200">
+                <a:solidFill>
+                  <a:srgbClr val="000000"/>
+                </a:solidFill>
+                <a:latin typeface="Play"/>
+                <a:ea typeface="Play"/>
+                <a:cs typeface="Play"/>
+              </a:rPr>
+              <a:t>• 19 из 42 колод нарушили фирменный стиль</a:t>
+            </a:r>
+          </a:p>
+          <a:p>
+            <a:pPr algn="l">
+              <a:spcAft>
+                <a:spcPts val="300"/>
+              </a:spcAft>
+              <a:defRPr sz="1200">
+                <a:solidFill>
+                  <a:srgbClr val="000000"/>
+                </a:solidFill>
+                <a:latin typeface="Play"/>
+                <a:ea typeface="Play"/>
+                <a:cs typeface="Play"/>
+              </a:defRPr>
+            </a:pPr>
+            <a:r>
+              <a:rPr sz="1200">
+                <a:solidFill>
+                  <a:srgbClr val="000000"/>
+                </a:solidFill>
+                <a:latin typeface="Play"/>
+                <a:ea typeface="Play"/>
+                <a:cs typeface="Play"/>
+              </a:rPr>
+              <a:t>• Дизайнеры 4 человека закрывают 11 запросов/неделю из 27</a:t>
+            </a:r>
+          </a:p>
+          <a:p>
+            <a:pPr algn="l">
+              <a:spcAft>
+                <a:spcPts val="300"/>
+              </a:spcAft>
+              <a:defRPr sz="1200">
+                <a:solidFill>
+                  <a:srgbClr val="000000"/>
+                </a:solidFill>
+                <a:latin typeface="Play"/>
+                <a:ea typeface="Play"/>
+                <a:cs typeface="Play"/>
+              </a:defRPr>
+            </a:pPr>
+            <a:r>
+              <a:rPr sz="1200">
+                <a:solidFill>
+                  <a:srgbClr val="000000"/>
+                </a:solidFill>
+                <a:latin typeface="Play"/>
+                <a:ea typeface="Play"/>
+                <a:cs typeface="Play"/>
+              </a:rPr>
+              <a:t>• Средний срок ожидания 6 рабочих дней</a:t>
+            </a:r>
+          </a:p>
+        </p:txBody>
+      </p:sp>
+    </p:spTree>
+  </p:cSld>
+  <p:clrMapOvr>
+    <a:masterClrMapping/>
+  </p:clrMapOvr>
+</p:sld>
+</file>
+
+<file path=ppt/slides/slide57.xml><?xml version="1.0" encoding="utf-8"?>
+<p:sld xmlns:a="http://schemas.openxmlformats.org/drawingml/2006/main" xmlns:p="http://schemas.openxmlformats.org/presentationml/2006/main" xmlns:r="http://schemas.openxmlformats.org/officeDocument/2006/relationships">
+  <p:cSld>
+    <p:spTree>
+      <p:nvGrpSpPr>
+        <p:cNvPr id="1" name=""/>
+        <p:cNvGrpSpPr/>
+        <p:nvPr/>
+      </p:nvGrpSpPr>
+      <p:grpSpPr/>
+      <p:sp>
+        <p:nvSpPr>
+          <p:cNvPr id="662" name="Google Shape;662;p55"/>
+          <p:cNvSpPr/>
+          <p:nvPr/>
+        </p:nvSpPr>
+        <p:spPr>
+          <a:xfrm>
+            <a:off x="8667705" y="4666977"/>
+            <a:ext cx="190499" cy="190475"/>
+          </a:xfrm>
+          <a:prstGeom prst="rect">
+            <a:avLst/>
+          </a:prstGeom>
+          <a:noFill/>
+          <a:ln>
+            <a:noFill/>
+          </a:ln>
+        </p:spPr>
+        <p:txBody>
+          <a:bodyPr anchorCtr="0" anchor="ctr" bIns="91425" lIns="91425" spcFirstLastPara="1" rIns="91425" wrap="square" tIns="91425">
+            <a:noAutofit/>
+          </a:bodyPr>
+          <a:lstStyle/>
+          <a:p>
+            <a:pPr indent="0" lvl="0" marL="0" rtl="0" algn="l">
+              <a:spcBef>
+                <a:spcPts val="0"/>
+              </a:spcBef>
+              <a:spcAft>
+                <a:spcPts val="0"/>
+              </a:spcAft>
+              <a:buNone/>
+            </a:pPr>
+            <a:r>
+              <a:t/>
+            </a:r>
+            <a:endParaRPr/>
+          </a:p>
+        </p:txBody>
+      </p:sp>
+      <p:sp>
+        <p:nvSpPr>
+          <p:cNvPr id="663" name="Google Shape;663;p55"/>
+          <p:cNvSpPr/>
+          <p:nvPr/>
+        </p:nvSpPr>
+        <p:spPr>
+          <a:xfrm>
+            <a:off x="285748" y="286047"/>
+            <a:ext cx="8572456" cy="3938075"/>
+          </a:xfrm>
+          <a:prstGeom prst="rect">
+            <a:avLst/>
+          </a:prstGeom>
+          <a:noFill/>
+          <a:ln>
+            <a:noFill/>
+          </a:ln>
+        </p:spPr>
+        <p:txBody>
+          <a:bodyPr anchorCtr="0" anchor="ctr" bIns="91425" lIns="91425" spcFirstLastPara="1" rIns="91425" wrap="square" tIns="91425">
+            <a:noAutofit/>
+          </a:bodyPr>
+          <a:lstStyle/>
+          <a:p>
+            <a:pPr indent="0" lvl="0" marL="0" rtl="0" algn="l">
+              <a:spcBef>
+                <a:spcPts val="0"/>
+              </a:spcBef>
+              <a:spcAft>
+                <a:spcPts val="0"/>
+              </a:spcAft>
+              <a:buNone/>
+            </a:pPr>
+            <a:r>
+              <a:t/>
+            </a:r>
+            <a:endParaRPr/>
+          </a:p>
+        </p:txBody>
+      </p:sp>
+      <p:sp>
+        <p:nvSpPr>
+          <p:cNvPr id="664" name="Google Shape;664;p55"/>
+          <p:cNvSpPr/>
+          <p:nvPr/>
+        </p:nvSpPr>
+        <p:spPr>
+          <a:xfrm>
+            <a:off x="285748" y="1209852"/>
+            <a:ext cx="8572456" cy="3014270"/>
+          </a:xfrm>
+          <a:prstGeom prst="rect">
+            <a:avLst/>
+          </a:prstGeom>
+          <a:noFill/>
+          <a:ln>
+            <a:noFill/>
+          </a:ln>
+        </p:spPr>
+        <p:txBody>
+          <a:bodyPr anchorCtr="0" anchor="ctr" bIns="91425" lIns="91425" spcFirstLastPara="1" rIns="91425" wrap="square" tIns="91425">
+            <a:noAutofit/>
+          </a:bodyPr>
+          <a:lstStyle/>
+          <a:p>
+            <a:pPr indent="0" lvl="0" marL="0" rtl="0" algn="l">
+              <a:spcBef>
+                <a:spcPts val="0"/>
+              </a:spcBef>
+              <a:spcAft>
+                <a:spcPts val="0"/>
+              </a:spcAft>
+              <a:buNone/>
+            </a:pPr>
+            <a:r>
+              <a:t/>
+            </a:r>
+            <a:endParaRPr/>
+          </a:p>
+        </p:txBody>
+      </p:sp>
+      <p:sp>
+        <p:nvSpPr>
+          <p:cNvPr id="665" name="Google Shape;665;p55"/>
+          <p:cNvSpPr/>
+          <p:nvPr/>
+        </p:nvSpPr>
+        <p:spPr>
+          <a:xfrm>
+            <a:off x="285749" y="1209852"/>
+            <a:ext cx="2071677" cy="3014270"/>
+          </a:xfrm>
+          <a:prstGeom prst="roundRect">
+            <a:avLst>
+              <a:gd fmla="val 4634" name="adj"/>
+            </a:avLst>
+          </a:prstGeom>
+          <a:solidFill>
+            <a:schemeClr val="lt2"/>
+          </a:solidFill>
+          <a:ln>
+            <a:noFill/>
+          </a:ln>
+        </p:spPr>
+        <p:txBody>
+          <a:bodyPr anchorCtr="0" anchor="ctr" bIns="91425" lIns="91425" spcFirstLastPara="1" rIns="91425" wrap="square" tIns="91425">
+            <a:noAutofit/>
+          </a:bodyPr>
+          <a:lstStyle/>
+          <a:p>
+            <a:pPr indent="0" lvl="0" marL="0" rtl="0" algn="l">
+              <a:spcBef>
+                <a:spcPts val="0"/>
+              </a:spcBef>
+              <a:spcAft>
+                <a:spcPts val="0"/>
+              </a:spcAft>
+              <a:buNone/>
+            </a:pPr>
+            <a:r>
+              <a:t/>
+            </a:r>
+            <a:endParaRPr/>
+          </a:p>
+        </p:txBody>
+      </p:sp>
+      <p:sp>
+        <p:nvSpPr>
+          <p:cNvPr id="667" name="Google Shape;667;p55"/>
+          <p:cNvSpPr/>
+          <p:nvPr/>
+        </p:nvSpPr>
+        <p:spPr>
+          <a:xfrm>
+            <a:off x="438148" y="1362233"/>
+            <a:ext cx="76199" cy="76190"/>
+          </a:xfrm>
+          <a:prstGeom prst="roundRect">
+            <a:avLst>
+              <a:gd fmla="val 31500" name="adj"/>
+            </a:avLst>
+          </a:prstGeom>
+          <a:solidFill>
+            <a:srgbClr val="0077FF"/>
+          </a:solidFill>
+          <a:ln>
+            <a:noFill/>
+          </a:ln>
+        </p:spPr>
+        <p:txBody>
+          <a:bodyPr anchorCtr="0" anchor="ctr" bIns="91425" lIns="91425" spcFirstLastPara="1" rIns="91425" wrap="square" tIns="91425">
+            <a:noAutofit/>
+          </a:bodyPr>
+          <a:lstStyle/>
+          <a:p>
+            <a:pPr indent="0" lvl="0" marL="0" rtl="0" algn="l">
+              <a:spcBef>
+                <a:spcPts val="0"/>
+              </a:spcBef>
+              <a:spcAft>
+                <a:spcPts val="0"/>
+              </a:spcAft>
+              <a:buNone/>
+            </a:pPr>
+            <a:r>
+              <a:t/>
+            </a:r>
+            <a:endParaRPr/>
+          </a:p>
+        </p:txBody>
+      </p:sp>
+      <p:sp>
+        <p:nvSpPr>
+          <p:cNvPr id="670" name="Google Shape;670;p55"/>
+          <p:cNvSpPr/>
+          <p:nvPr/>
+        </p:nvSpPr>
+        <p:spPr>
+          <a:xfrm>
+            <a:off x="2452675" y="1209852"/>
+            <a:ext cx="2071677" cy="3014270"/>
+          </a:xfrm>
+          <a:prstGeom prst="roundRect">
+            <a:avLst>
+              <a:gd fmla="val 4634" name="adj"/>
+            </a:avLst>
+          </a:prstGeom>
+          <a:solidFill>
+            <a:schemeClr val="lt2"/>
+          </a:solidFill>
+          <a:ln>
+            <a:noFill/>
+          </a:ln>
+        </p:spPr>
+        <p:txBody>
+          <a:bodyPr anchorCtr="0" anchor="ctr" bIns="91425" lIns="91425" spcFirstLastPara="1" rIns="91425" wrap="square" tIns="91425">
+            <a:noAutofit/>
+          </a:bodyPr>
+          <a:lstStyle/>
+          <a:p>
+            <a:pPr indent="0" lvl="0" marL="0" rtl="0" algn="l">
+              <a:spcBef>
+                <a:spcPts val="0"/>
+              </a:spcBef>
+              <a:spcAft>
+                <a:spcPts val="0"/>
+              </a:spcAft>
+              <a:buNone/>
+            </a:pPr>
+            <a:r>
+              <a:t/>
+            </a:r>
+            <a:endParaRPr/>
+          </a:p>
+        </p:txBody>
+      </p:sp>
+      <p:sp>
+        <p:nvSpPr>
+          <p:cNvPr id="672" name="Google Shape;672;p55"/>
+          <p:cNvSpPr/>
+          <p:nvPr/>
+        </p:nvSpPr>
+        <p:spPr>
+          <a:xfrm>
+            <a:off x="2605074" y="1362233"/>
+            <a:ext cx="76199" cy="76190"/>
+          </a:xfrm>
+          <a:prstGeom prst="roundRect">
+            <a:avLst>
+              <a:gd fmla="val 31500" name="adj"/>
+            </a:avLst>
+          </a:prstGeom>
+          <a:solidFill>
+            <a:srgbClr val="0077FF"/>
+          </a:solidFill>
+          <a:ln>
+            <a:noFill/>
+          </a:ln>
+        </p:spPr>
+        <p:txBody>
+          <a:bodyPr anchorCtr="0" anchor="ctr" bIns="91425" lIns="91425" spcFirstLastPara="1" rIns="91425" wrap="square" tIns="91425">
+            <a:noAutofit/>
+          </a:bodyPr>
+          <a:lstStyle/>
+          <a:p>
+            <a:pPr indent="0" lvl="0" marL="0" rtl="0" algn="l">
+              <a:spcBef>
+                <a:spcPts val="0"/>
+              </a:spcBef>
+              <a:spcAft>
+                <a:spcPts val="0"/>
+              </a:spcAft>
+              <a:buNone/>
+            </a:pPr>
+            <a:r>
+              <a:t/>
+            </a:r>
+            <a:endParaRPr/>
+          </a:p>
+        </p:txBody>
+      </p:sp>
+      <p:sp>
+        <p:nvSpPr>
+          <p:cNvPr id="675" name="Google Shape;675;p55"/>
+          <p:cNvSpPr/>
+          <p:nvPr/>
+        </p:nvSpPr>
+        <p:spPr>
+          <a:xfrm>
+            <a:off x="4619601" y="1209852"/>
+            <a:ext cx="2071677" cy="3014270"/>
+          </a:xfrm>
+          <a:prstGeom prst="roundRect">
+            <a:avLst>
+              <a:gd fmla="val 4634" name="adj"/>
+            </a:avLst>
+          </a:prstGeom>
+          <a:solidFill>
+            <a:schemeClr val="lt2"/>
+          </a:solidFill>
+          <a:ln>
+            <a:noFill/>
+          </a:ln>
+        </p:spPr>
+        <p:txBody>
+          <a:bodyPr anchorCtr="0" anchor="ctr" bIns="91425" lIns="91425" spcFirstLastPara="1" rIns="91425" wrap="square" tIns="91425">
+            <a:noAutofit/>
+          </a:bodyPr>
+          <a:lstStyle/>
+          <a:p>
+            <a:pPr indent="0" lvl="0" marL="0" rtl="0" algn="l">
+              <a:spcBef>
+                <a:spcPts val="0"/>
+              </a:spcBef>
+              <a:spcAft>
+                <a:spcPts val="0"/>
+              </a:spcAft>
+              <a:buNone/>
+            </a:pPr>
+            <a:r>
+              <a:t/>
+            </a:r>
+            <a:endParaRPr/>
+          </a:p>
+        </p:txBody>
+      </p:sp>
+      <p:sp>
+        <p:nvSpPr>
+          <p:cNvPr id="677" name="Google Shape;677;p55"/>
+          <p:cNvSpPr/>
+          <p:nvPr/>
+        </p:nvSpPr>
+        <p:spPr>
+          <a:xfrm>
+            <a:off x="4772001" y="1362233"/>
+            <a:ext cx="76199" cy="76190"/>
+          </a:xfrm>
+          <a:prstGeom prst="roundRect">
+            <a:avLst>
+              <a:gd fmla="val 31500" name="adj"/>
+            </a:avLst>
+          </a:prstGeom>
+          <a:solidFill>
+            <a:srgbClr val="0077FF"/>
+          </a:solidFill>
+          <a:ln>
+            <a:noFill/>
+          </a:ln>
+        </p:spPr>
+        <p:txBody>
+          <a:bodyPr anchorCtr="0" anchor="ctr" bIns="91425" lIns="91425" spcFirstLastPara="1" rIns="91425" wrap="square" tIns="91425">
+            <a:noAutofit/>
+          </a:bodyPr>
+          <a:lstStyle/>
+          <a:p>
+            <a:pPr indent="0" lvl="0" marL="0" rtl="0" algn="l">
+              <a:spcBef>
+                <a:spcPts val="0"/>
+              </a:spcBef>
+              <a:spcAft>
+                <a:spcPts val="0"/>
+              </a:spcAft>
+              <a:buNone/>
+            </a:pPr>
+            <a:r>
+              <a:t/>
+            </a:r>
+            <a:endParaRPr/>
+          </a:p>
+        </p:txBody>
+      </p:sp>
+      <p:sp>
+        <p:nvSpPr>
+          <p:cNvPr id="680" name="Google Shape;680;p55"/>
+          <p:cNvSpPr/>
+          <p:nvPr/>
+        </p:nvSpPr>
+        <p:spPr>
+          <a:xfrm>
+            <a:off x="6786527" y="1209852"/>
+            <a:ext cx="2071677" cy="3014270"/>
+          </a:xfrm>
+          <a:prstGeom prst="roundRect">
+            <a:avLst>
+              <a:gd fmla="val 4634" name="adj"/>
+            </a:avLst>
+          </a:prstGeom>
+          <a:solidFill>
+            <a:schemeClr val="lt2"/>
+          </a:solidFill>
+          <a:ln>
+            <a:noFill/>
+          </a:ln>
+        </p:spPr>
+        <p:txBody>
+          <a:bodyPr anchorCtr="0" anchor="ctr" bIns="91425" lIns="91425" spcFirstLastPara="1" rIns="91425" wrap="square" tIns="91425">
+            <a:noAutofit/>
+          </a:bodyPr>
+          <a:lstStyle/>
+          <a:p>
+            <a:pPr indent="0" lvl="0" marL="0" rtl="0" algn="l">
+              <a:spcBef>
+                <a:spcPts val="0"/>
+              </a:spcBef>
+              <a:spcAft>
+                <a:spcPts val="0"/>
+              </a:spcAft>
+              <a:buNone/>
+            </a:pPr>
+            <a:r>
+              <a:t/>
+            </a:r>
+            <a:endParaRPr/>
+          </a:p>
+        </p:txBody>
+      </p:sp>
+      <p:sp>
+        <p:nvSpPr>
+          <p:cNvPr id="682" name="Google Shape;682;p55"/>
+          <p:cNvSpPr/>
+          <p:nvPr/>
+        </p:nvSpPr>
+        <p:spPr>
+          <a:xfrm>
+            <a:off x="6938927" y="1362233"/>
+            <a:ext cx="76199" cy="76190"/>
+          </a:xfrm>
+          <a:prstGeom prst="roundRect">
+            <a:avLst>
+              <a:gd fmla="val 31500" name="adj"/>
+            </a:avLst>
+          </a:prstGeom>
+          <a:solidFill>
+            <a:srgbClr val="0077FF"/>
+          </a:solidFill>
+          <a:ln>
+            <a:noFill/>
+          </a:ln>
+        </p:spPr>
+        <p:txBody>
+          <a:bodyPr anchorCtr="0" anchor="ctr" bIns="91425" lIns="91425" spcFirstLastPara="1" rIns="91425" wrap="square" tIns="91425">
+            <a:noAutofit/>
+          </a:bodyPr>
+          <a:lstStyle/>
+          <a:p>
+            <a:pPr indent="0" lvl="0" marL="0" rtl="0" algn="l">
+              <a:spcBef>
+                <a:spcPts val="0"/>
+              </a:spcBef>
+              <a:spcAft>
+                <a:spcPts val="0"/>
+              </a:spcAft>
+              <a:buNone/>
+            </a:pPr>
+            <a:r>
+              <a:t/>
+            </a:r>
+            <a:endParaRPr/>
+          </a:p>
+        </p:txBody>
+      </p:sp>
+      <p:sp>
+        <p:nvSpPr>
+          <p:cNvPr id="683" name="title"/>
+          <p:cNvSpPr txBox="1"/>
+          <p:nvPr/>
+        </p:nvSpPr>
+        <p:spPr>
+          <a:xfrm>
+            <a:off x="274320" y="282943"/>
+            <a:ext cx="6792986" cy="932027"/>
+          </a:xfrm>
+          <a:prstGeom prst="rect">
+            <a:avLst/>
+          </a:prstGeom>
+          <a:noFill/>
+        </p:spPr>
+        <p:txBody>
+          <a:bodyPr wrap="square" lIns="76200" rIns="76200" tIns="50800" bIns="50800">
+            <a:spAutoFit/>
+          </a:bodyPr>
+          <a:lstStyle/>
+          <a:p>
+            <a:pPr algn="l">
+              <a:spcAft>
+                <a:spcPts val="300"/>
+              </a:spcAft>
+              <a:defRPr sz="2438">
+                <a:solidFill>
+                  <a:srgbClr val="000000"/>
+                </a:solidFill>
+                <a:latin typeface="Play"/>
+                <a:ea typeface="Play"/>
+                <a:cs typeface="Play"/>
+              </a:defRPr>
+            </a:pPr>
+            <a:r>
+              <a:rPr sz="2438">
+                <a:solidFill>
+                  <a:srgbClr val="000000"/>
+                </a:solidFill>
+                <a:latin typeface="Play"/>
+                <a:ea typeface="Play"/>
+                <a:cs typeface="Play"/>
+              </a:rPr>
+              <a:t>Возможность ускорить и стандартизировать процесс</a:t>
+            </a:r>
+          </a:p>
+        </p:txBody>
+      </p:sp>
+      <p:sp>
+        <p:nvSpPr>
+          <p:cNvPr id="684" name="lead"/>
+          <p:cNvSpPr txBox="1"/>
+          <p:nvPr/>
+        </p:nvSpPr>
+        <p:spPr>
+          <a:xfrm>
+            <a:off x="274320" y="1590781"/>
+            <a:ext cx="6792986" cy="856469"/>
+          </a:xfrm>
+          <a:prstGeom prst="rect">
+            <a:avLst/>
+          </a:prstGeom>
+          <a:noFill/>
+        </p:spPr>
+        <p:txBody>
+          <a:bodyPr wrap="square" lIns="76200" rIns="76200" tIns="50800" bIns="50800">
+            <a:spAutoFit/>
+          </a:bodyPr>
+          <a:lstStyle/>
+          <a:p>
+            <a:pPr algn="l">
+              <a:spcAft>
+                <a:spcPts val="300"/>
+              </a:spcAft>
+              <a:defRPr sz="2705">
+                <a:solidFill>
+                  <a:srgbClr val="000000"/>
+                </a:solidFill>
+                <a:latin typeface="Play"/>
+                <a:ea typeface="Play"/>
+                <a:cs typeface="Play"/>
+              </a:defRPr>
+            </a:pPr>
+            <a:r>
+              <a:rPr sz="2705">
+                <a:solidFill>
+                  <a:srgbClr val="000000"/>
+                </a:solidFill>
+                <a:latin typeface="Play"/>
+                <a:ea typeface="Play"/>
+                <a:cs typeface="Play"/>
+              </a:rPr>
+              <a:t>Сократить время сборки до 4 минут</a:t>
+            </a:r>
+          </a:p>
+        </p:txBody>
+      </p:sp>
+      <p:sp>
+        <p:nvSpPr>
+          <p:cNvPr id="685" name="body"/>
+          <p:cNvSpPr txBox="1"/>
+          <p:nvPr/>
+        </p:nvSpPr>
+        <p:spPr>
+          <a:xfrm>
+            <a:off x="274320" y="2598393"/>
+            <a:ext cx="6792986" cy="1511417"/>
+          </a:xfrm>
+          <a:prstGeom prst="rect">
+            <a:avLst/>
+          </a:prstGeom>
+          <a:noFill/>
+        </p:spPr>
+        <p:txBody>
+          <a:bodyPr wrap="square" lIns="76200" rIns="76200" tIns="50800" bIns="50800">
+            <a:spAutoFit/>
+          </a:bodyPr>
+          <a:lstStyle/>
+          <a:p>
+            <a:pPr algn="l">
+              <a:spcAft>
+                <a:spcPts val="300"/>
+              </a:spcAft>
+              <a:defRPr sz="1800">
+                <a:solidFill>
+                  <a:srgbClr val="000000"/>
+                </a:solidFill>
+                <a:latin typeface="Play"/>
+                <a:ea typeface="Play"/>
+                <a:cs typeface="Play"/>
+              </a:defRPr>
+            </a:pPr>
+            <a:r>
+              <a:rPr sz="1800">
+                <a:solidFill>
+                  <a:srgbClr val="000000"/>
+                </a:solidFill>
+                <a:latin typeface="Play"/>
+                <a:ea typeface="Play"/>
+                <a:cs typeface="Play"/>
+              </a:rPr>
+              <a:t>• Снизить время до первой версии с 6 дней до 1 дня</a:t>
+            </a:r>
+          </a:p>
+          <a:p>
+            <a:pPr algn="l">
+              <a:spcAft>
+                <a:spcPts val="300"/>
+              </a:spcAft>
+              <a:defRPr sz="1800">
+                <a:solidFill>
+                  <a:srgbClr val="000000"/>
+                </a:solidFill>
+                <a:latin typeface="Play"/>
+                <a:ea typeface="Play"/>
+                <a:cs typeface="Play"/>
+              </a:defRPr>
+            </a:pPr>
+            <a:r>
+              <a:rPr sz="1800">
+                <a:solidFill>
+                  <a:srgbClr val="000000"/>
+                </a:solidFill>
+                <a:latin typeface="Play"/>
+                <a:ea typeface="Play"/>
+                <a:cs typeface="Play"/>
+              </a:rPr>
+              <a:t>• Снизить нарушения фирменного стиля до 3 %</a:t>
+            </a:r>
+          </a:p>
+          <a:p>
+            <a:pPr algn="l">
+              <a:spcAft>
+                <a:spcPts val="300"/>
+              </a:spcAft>
+              <a:defRPr sz="1800">
+                <a:solidFill>
+                  <a:srgbClr val="000000"/>
+                </a:solidFill>
+                <a:latin typeface="Play"/>
+                <a:ea typeface="Play"/>
+                <a:cs typeface="Play"/>
+              </a:defRPr>
+            </a:pPr>
+            <a:r>
+              <a:rPr sz="1800">
+                <a:solidFill>
+                  <a:srgbClr val="000000"/>
+                </a:solidFill>
+                <a:latin typeface="Play"/>
+                <a:ea typeface="Play"/>
+                <a:cs typeface="Play"/>
+              </a:rPr>
+              <a:t>• Освободить дизайнеров от рутинных задач</a:t>
+            </a:r>
+          </a:p>
+        </p:txBody>
+      </p:sp>
+    </p:spTree>
+  </p:cSld>
+  <p:clrMapOvr>
+    <a:masterClrMapping/>
+  </p:clrMapOvr>
+</p:sld>
+</file>
+
+<file path=ppt/slides/slide58.xml><?xml version="1.0" encoding="utf-8"?>
+<p:sld xmlns:a="http://schemas.openxmlformats.org/drawingml/2006/main" xmlns:p="http://schemas.openxmlformats.org/presentationml/2006/main" xmlns:r="http://schemas.openxmlformats.org/officeDocument/2006/relationships">
+  <p:cSld>
+    <p:spTree>
+      <p:nvGrpSpPr>
+        <p:cNvPr id="1" name=""/>
+        <p:cNvGrpSpPr/>
+        <p:nvPr/>
+      </p:nvGrpSpPr>
+      <p:grpSpPr/>
+      <p:sp>
+        <p:nvSpPr>
+          <p:cNvPr id="532" name="Google Shape;532;p53"/>
+          <p:cNvSpPr/>
+          <p:nvPr/>
+        </p:nvSpPr>
+        <p:spPr>
+          <a:xfrm>
+            <a:off x="303214" y="1022533"/>
+            <a:ext cx="8451939" cy="1433588"/>
+          </a:xfrm>
+          <a:prstGeom prst="rect">
+            <a:avLst/>
+          </a:prstGeom>
+          <a:noFill/>
+          <a:ln>
+            <a:noFill/>
+          </a:ln>
+        </p:spPr>
+        <p:txBody>
+          <a:bodyPr anchorCtr="0" anchor="ctr" bIns="91425" lIns="91425" spcFirstLastPara="1" rIns="91425" wrap="square" tIns="91425">
+            <a:noAutofit/>
+          </a:bodyPr>
+          <a:lstStyle/>
+          <a:p>
+            <a:pPr indent="0" lvl="0" marL="0" rtl="0" algn="l">
+              <a:spcBef>
+                <a:spcPts val="0"/>
+              </a:spcBef>
+              <a:spcAft>
+                <a:spcPts val="0"/>
+              </a:spcAft>
+              <a:buNone/>
+            </a:pPr>
+            <a:r>
+              <a:t/>
+            </a:r>
+            <a:endParaRPr/>
+          </a:p>
+        </p:txBody>
+      </p:sp>
+      <p:sp>
+        <p:nvSpPr>
+          <p:cNvPr id="549" name="Google Shape;549;p53"/>
+          <p:cNvSpPr/>
+          <p:nvPr/>
+        </p:nvSpPr>
+        <p:spPr>
+          <a:xfrm>
+            <a:off x="7359897" y="1022533"/>
+            <a:ext cx="1395256" cy="1433588"/>
+          </a:xfrm>
+          <a:prstGeom prst="rect">
+            <a:avLst/>
+          </a:prstGeom>
+          <a:noFill/>
+          <a:ln>
+            <a:noFill/>
+          </a:ln>
+        </p:spPr>
+        <p:txBody>
+          <a:bodyPr anchorCtr="0" anchor="ctr" bIns="91425" lIns="91425" spcFirstLastPara="1" rIns="91425" wrap="square" tIns="91425">
+            <a:noAutofit/>
+          </a:bodyPr>
+          <a:lstStyle/>
+          <a:p>
+            <a:pPr indent="0" lvl="0" marL="0" rtl="0" algn="l">
+              <a:spcBef>
+                <a:spcPts val="0"/>
+              </a:spcBef>
+              <a:spcAft>
+                <a:spcPts val="0"/>
+              </a:spcAft>
+              <a:buNone/>
+            </a:pPr>
+            <a:r>
+              <a:t/>
+            </a:r>
+            <a:endParaRPr/>
+          </a:p>
+        </p:txBody>
+      </p:sp>
+      <p:sp>
+        <p:nvSpPr>
+          <p:cNvPr id="553" name="Google Shape;553;p53"/>
+          <p:cNvSpPr/>
+          <p:nvPr/>
+        </p:nvSpPr>
+        <p:spPr>
+          <a:xfrm>
+            <a:off x="276488" y="2955549"/>
+            <a:ext cx="8451939" cy="1433588"/>
+          </a:xfrm>
+          <a:prstGeom prst="rect">
+            <a:avLst/>
+          </a:prstGeom>
+          <a:noFill/>
+          <a:ln>
+            <a:noFill/>
+          </a:ln>
+        </p:spPr>
+        <p:txBody>
+          <a:bodyPr anchorCtr="0" anchor="ctr" bIns="91425" lIns="91425" spcFirstLastPara="1" rIns="91425" wrap="square" tIns="91425">
+            <a:noAutofit/>
+          </a:bodyPr>
+          <a:lstStyle/>
+          <a:p>
+            <a:pPr indent="0" lvl="0" marL="0" rtl="0" algn="l">
+              <a:spcBef>
+                <a:spcPts val="0"/>
+              </a:spcBef>
+              <a:spcAft>
+                <a:spcPts val="0"/>
+              </a:spcAft>
+              <a:buNone/>
+            </a:pPr>
+            <a:r>
+              <a:t/>
+            </a:r>
+            <a:endParaRPr/>
+          </a:p>
+        </p:txBody>
+      </p:sp>
+      <p:sp>
+        <p:nvSpPr>
+          <p:cNvPr id="554" name="Google Shape;554;p53"/>
+          <p:cNvSpPr/>
+          <p:nvPr/>
+        </p:nvSpPr>
+        <p:spPr>
+          <a:xfrm>
+            <a:off x="303214" y="2797849"/>
+            <a:ext cx="8451939" cy="1433588"/>
+          </a:xfrm>
+          <a:prstGeom prst="rect">
+            <a:avLst/>
+          </a:prstGeom>
+          <a:noFill/>
+          <a:ln>
+            <a:noFill/>
+          </a:ln>
+        </p:spPr>
+        <p:txBody>
+          <a:bodyPr anchorCtr="0" anchor="ctr" bIns="91425" lIns="91425" spcFirstLastPara="1" rIns="91425" wrap="square" tIns="91425">
+            <a:noAutofit/>
+          </a:bodyPr>
+          <a:lstStyle/>
+          <a:p>
+            <a:pPr indent="0" lvl="0" marL="0" rtl="0" algn="l">
+              <a:spcBef>
+                <a:spcPts val="0"/>
+              </a:spcBef>
+              <a:spcAft>
+                <a:spcPts val="0"/>
+              </a:spcAft>
+              <a:buNone/>
+            </a:pPr>
+            <a:r>
+              <a:t/>
+            </a:r>
+            <a:endParaRPr/>
+          </a:p>
+        </p:txBody>
+      </p:sp>
+      <p:sp>
+        <p:nvSpPr>
+          <p:cNvPr id="571" name="Google Shape;571;p53"/>
+          <p:cNvSpPr/>
+          <p:nvPr/>
+        </p:nvSpPr>
+        <p:spPr>
+          <a:xfrm>
+            <a:off x="7359897" y="2797849"/>
+            <a:ext cx="1395256" cy="1433588"/>
+          </a:xfrm>
+          <a:prstGeom prst="rect">
+            <a:avLst/>
+          </a:prstGeom>
+          <a:noFill/>
+          <a:ln>
+            <a:noFill/>
+          </a:ln>
+        </p:spPr>
+        <p:txBody>
+          <a:bodyPr anchorCtr="0" anchor="ctr" bIns="91425" lIns="91425" spcFirstLastPara="1" rIns="91425" wrap="square" tIns="91425">
+            <a:noAutofit/>
+          </a:bodyPr>
+          <a:lstStyle/>
+          <a:p>
+            <a:pPr indent="0" lvl="0" marL="0" rtl="0" algn="l">
+              <a:spcBef>
+                <a:spcPts val="0"/>
+              </a:spcBef>
+              <a:spcAft>
+                <a:spcPts val="0"/>
+              </a:spcAft>
+              <a:buNone/>
+            </a:pPr>
+            <a:r>
+              <a:t/>
+            </a:r>
+            <a:endParaRPr/>
+          </a:p>
+        </p:txBody>
+      </p:sp>
+      <p:sp>
+        <p:nvSpPr>
+          <p:cNvPr id="572" name="title"/>
           <p:cNvSpPr txBox="1"/>
           <p:nvPr/>
         </p:nvSpPr>
@@ -7879,6 +7563,223 @@
               <a:spcAft>
                 <a:spcPts val="300"/>
               </a:spcAft>
+              <a:defRPr sz="2705">
+                <a:solidFill>
+                  <a:srgbClr val="000000"/>
+                </a:solidFill>
+                <a:latin typeface="Play"/>
+                <a:ea typeface="Play"/>
+                <a:cs typeface="Play"/>
+              </a:defRPr>
+            </a:pPr>
+            <a:r>
+              <a:rPr sz="2705">
+                <a:solidFill>
+                  <a:srgbClr val="000000"/>
+                </a:solidFill>
+                <a:latin typeface="Play"/>
+                <a:ea typeface="Play"/>
+                <a:cs typeface="Play"/>
+              </a:rPr>
+              <a:t>Как работает сервис</a:t>
+            </a:r>
+          </a:p>
+        </p:txBody>
+      </p:sp>
+      <p:sp>
+        <p:nvSpPr>
+          <p:cNvPr id="573" name="lead"/>
+          <p:cNvSpPr txBox="1"/>
+          <p:nvPr/>
+        </p:nvSpPr>
+        <p:spPr>
+          <a:xfrm>
+            <a:off x="274320" y="1414513"/>
+            <a:ext cx="6792986" cy="969634"/>
+          </a:xfrm>
+          <a:prstGeom prst="rect">
+            <a:avLst/>
+          </a:prstGeom>
+          <a:noFill/>
+        </p:spPr>
+        <p:txBody>
+          <a:bodyPr wrap="square" lIns="76200" rIns="76200" tIns="50800" bIns="50800">
+            <a:spAutoFit/>
+          </a:bodyPr>
+          <a:lstStyle/>
+          <a:p>
+            <a:pPr algn="ctr">
+              <a:spcAft>
+                <a:spcPts val="300"/>
+              </a:spcAft>
+              <a:defRPr sz="2705">
+                <a:solidFill>
+                  <a:srgbClr val="000000"/>
+                </a:solidFill>
+                <a:latin typeface="Play"/>
+                <a:ea typeface="Play"/>
+                <a:cs typeface="Play"/>
+              </a:defRPr>
+            </a:pPr>
+            <a:r>
+              <a:rPr sz="2705">
+                <a:solidFill>
+                  <a:srgbClr val="000000"/>
+                </a:solidFill>
+                <a:latin typeface="Play"/>
+                <a:ea typeface="Play"/>
+                <a:cs typeface="Play"/>
+              </a:rPr>
+              <a:t>Принимает шаблон pptx и материалы</a:t>
+            </a:r>
+          </a:p>
+        </p:txBody>
+      </p:sp>
+      <p:sp>
+        <p:nvSpPr>
+          <p:cNvPr id="574" name="body"/>
+          <p:cNvSpPr txBox="1"/>
+          <p:nvPr/>
+        </p:nvSpPr>
+        <p:spPr>
+          <a:xfrm>
+            <a:off x="274320" y="2555259"/>
+            <a:ext cx="6792986" cy="1711119"/>
+          </a:xfrm>
+          <a:prstGeom prst="rect">
+            <a:avLst/>
+          </a:prstGeom>
+          <a:noFill/>
+        </p:spPr>
+        <p:txBody>
+          <a:bodyPr wrap="square" lIns="76200" rIns="76200" tIns="50800" bIns="50800">
+            <a:spAutoFit/>
+          </a:bodyPr>
+          <a:lstStyle/>
+          <a:p>
+            <a:pPr algn="l">
+              <a:spcAft>
+                <a:spcPts val="300"/>
+              </a:spcAft>
+              <a:defRPr sz="1800">
+                <a:solidFill>
+                  <a:srgbClr val="000000"/>
+                </a:solidFill>
+                <a:latin typeface="Play"/>
+                <a:ea typeface="Play"/>
+                <a:cs typeface="Play"/>
+              </a:defRPr>
+            </a:pPr>
+            <a:r>
+              <a:rPr sz="1800">
+                <a:solidFill>
+                  <a:srgbClr val="000000"/>
+                </a:solidFill>
+                <a:latin typeface="Play"/>
+                <a:ea typeface="Play"/>
+                <a:cs typeface="Play"/>
+              </a:rPr>
+              <a:t>• Автоматически формирует план колоды по дизайн-системе</a:t>
+            </a:r>
+          </a:p>
+          <a:p>
+            <a:pPr algn="l">
+              <a:spcAft>
+                <a:spcPts val="300"/>
+              </a:spcAft>
+              <a:defRPr sz="1800">
+                <a:solidFill>
+                  <a:srgbClr val="000000"/>
+                </a:solidFill>
+                <a:latin typeface="Play"/>
+                <a:ea typeface="Play"/>
+                <a:cs typeface="Play"/>
+              </a:defRPr>
+            </a:pPr>
+            <a:r>
+              <a:rPr sz="1800">
+                <a:solidFill>
+                  <a:srgbClr val="000000"/>
+                </a:solidFill>
+                <a:latin typeface="Play"/>
+                <a:ea typeface="Play"/>
+                <a:cs typeface="Play"/>
+              </a:rPr>
+              <a:t>• Вёрстка и аудит качества до выдачи</a:t>
+            </a:r>
+          </a:p>
+          <a:p>
+            <a:pPr algn="l">
+              <a:spcAft>
+                <a:spcPts val="300"/>
+              </a:spcAft>
+              <a:defRPr sz="1800">
+                <a:solidFill>
+                  <a:srgbClr val="000000"/>
+                </a:solidFill>
+                <a:latin typeface="Play"/>
+                <a:ea typeface="Play"/>
+                <a:cs typeface="Play"/>
+              </a:defRPr>
+            </a:pPr>
+            <a:r>
+              <a:rPr sz="1800">
+                <a:solidFill>
+                  <a:srgbClr val="000000"/>
+                </a:solidFill>
+                <a:latin typeface="Play"/>
+                <a:ea typeface="Play"/>
+                <a:cs typeface="Play"/>
+              </a:rPr>
+              <a:t>• Экспорт в pptx, pdf, html, слайды редактируемы</a:t>
+            </a:r>
+          </a:p>
+        </p:txBody>
+      </p:sp>
+    </p:spTree>
+  </p:cSld>
+  <p:clrMapOvr>
+    <a:masterClrMapping/>
+  </p:clrMapOvr>
+</p:sld>
+</file>
+
+<file path=ppt/slides/slide59.xml><?xml version="1.0" encoding="utf-8"?>
+<p:sld xmlns:a="http://schemas.openxmlformats.org/drawingml/2006/main" xmlns:p="http://schemas.openxmlformats.org/presentationml/2006/main" xmlns:r="http://schemas.openxmlformats.org/officeDocument/2006/relationships">
+  <p:cSld>
+    <p:spTree>
+      <p:nvGrpSpPr>
+        <p:cNvPr id="1" name=""/>
+        <p:cNvGrpSpPr/>
+        <p:nvPr/>
+      </p:nvGrpSpPr>
+      <p:grpSpPr/>
+      <p:sp>
+        <p:nvSpPr>
+          <p:cNvPr id="2" name="title"/>
+          <p:cNvSpPr txBox="1"/>
+          <p:nvPr/>
+        </p:nvSpPr>
+        <p:spPr>
+          <a:xfrm>
+            <a:off x="274320" y="282943"/>
+            <a:ext cx="6792986" cy="932027"/>
+          </a:xfrm>
+          <a:prstGeom prst="rect">
+            <a:avLst/>
+          </a:prstGeom>
+          <a:noFill/>
+        </p:spPr>
+        <p:txBody>
+          <a:bodyPr wrap="square" lIns="76200" rIns="76200" tIns="50800" bIns="50800">
+            <a:spAutoFit/>
+          </a:bodyPr>
+          <a:lstStyle/>
+          <a:p>
+            <a:pPr algn="l">
+              <a:spcAft>
+                <a:spcPts val="300"/>
+              </a:spcAft>
               <a:defRPr sz="2438">
                 <a:solidFill>
                   <a:srgbClr val="000000"/>
@@ -7897,7 +7798,670 @@
                 <a:ea typeface="Play"/>
                 <a:cs typeface="Play"/>
               </a:rPr>
-              <a:t>Нарушения фирменного стиля</a:t>
+              <a:t>Сокращение времени сборки: 186 → 4 минуты</a:t>
+            </a:r>
+          </a:p>
+        </p:txBody>
+      </p:sp>
+      <p:graphicFrame>
+        <p:nvGraphicFramePr>
+          <p:cNvPr id="3" name="Chart 2"/>
+          <p:cNvGraphicFramePr>
+            <a:graphicFrameLocks noGrp="1"/>
+          </p:cNvGraphicFramePr>
+          <p:nvPr/>
+        </p:nvGraphicFramePr>
+        <p:xfrm>
+          <a:off x="274320" y="1664127"/>
+          <a:ext cx="7189469" cy="2160270"/>
+        </p:xfrm>
+        <a:graphic>
+          <a:graphicData uri="http://schemas.openxmlformats.org/drawingml/2006/chart">
+            <c:chart xmlns:c="http://schemas.openxmlformats.org/drawingml/2006/chart" r:id="rId4"/>
+          </a:graphicData>
+        </a:graphic>
+      </p:graphicFrame>
+    </p:spTree>
+  </p:cSld>
+  <p:clrMapOvr>
+    <a:masterClrMapping/>
+  </p:clrMapOvr>
+</p:sld>
+</file>
+
+<file path=ppt/slides/slide60.xml><?xml version="1.0" encoding="utf-8"?>
+<p:sld xmlns:a="http://schemas.openxmlformats.org/drawingml/2006/main" xmlns:p="http://schemas.openxmlformats.org/presentationml/2006/main" xmlns:r="http://schemas.openxmlformats.org/officeDocument/2006/relationships">
+  <p:cSld>
+    <p:spTree>
+      <p:nvGrpSpPr>
+        <p:cNvPr id="1" name=""/>
+        <p:cNvGrpSpPr/>
+        <p:nvPr/>
+      </p:nvGrpSpPr>
+      <p:grpSpPr/>
+      <p:sp>
+        <p:nvSpPr>
+          <p:cNvPr id="2" name="title"/>
+          <p:cNvSpPr txBox="1"/>
+          <p:nvPr/>
+        </p:nvSpPr>
+        <p:spPr>
+          <a:xfrm>
+            <a:off x="274320" y="282943"/>
+            <a:ext cx="6792986" cy="932027"/>
+          </a:xfrm>
+          <a:prstGeom prst="rect">
+            <a:avLst/>
+          </a:prstGeom>
+          <a:noFill/>
+        </p:spPr>
+        <p:txBody>
+          <a:bodyPr wrap="square" lIns="76200" rIns="76200" tIns="50800" bIns="50800">
+            <a:spAutoFit/>
+          </a:bodyPr>
+          <a:lstStyle/>
+          <a:p>
+            <a:pPr algn="l">
+              <a:spcAft>
+                <a:spcPts val="300"/>
+              </a:spcAft>
+              <a:defRPr sz="2438">
+                <a:solidFill>
+                  <a:srgbClr val="000000"/>
+                </a:solidFill>
+                <a:latin typeface="Play"/>
+                <a:ea typeface="Play"/>
+                <a:cs typeface="Play"/>
+              </a:defRPr>
+            </a:pPr>
+            <a:r>
+              <a:rPr sz="2438">
+                <a:solidFill>
+                  <a:srgbClr val="000000"/>
+                </a:solidFill>
+                <a:latin typeface="Play"/>
+                <a:ea typeface="Play"/>
+                <a:cs typeface="Play"/>
+              </a:rPr>
+              <a:t>Снижение нарушений фирменного стиля: 19/42 → 2/68</a:t>
+            </a:r>
+          </a:p>
+        </p:txBody>
+      </p:sp>
+      <p:graphicFrame>
+        <p:nvGraphicFramePr>
+          <p:cNvPr id="3" name="Chart 2"/>
+          <p:cNvGraphicFramePr>
+            <a:graphicFrameLocks noGrp="1"/>
+          </p:cNvGraphicFramePr>
+          <p:nvPr/>
+        </p:nvGraphicFramePr>
+        <p:xfrm>
+          <a:off x="274320" y="1729321"/>
+          <a:ext cx="8344814" cy="2160270"/>
+        </p:xfrm>
+        <a:graphic>
+          <a:graphicData uri="http://schemas.openxmlformats.org/drawingml/2006/chart">
+            <c:chart xmlns:c="http://schemas.openxmlformats.org/drawingml/2006/chart" r:id="rId3"/>
+          </a:graphicData>
+        </a:graphic>
+      </p:graphicFrame>
+    </p:spTree>
+  </p:cSld>
+  <p:clrMapOvr>
+    <a:masterClrMapping/>
+  </p:clrMapOvr>
+</p:sld>
+</file>
+
+<file path=ppt/slides/slide61.xml><?xml version="1.0" encoding="utf-8"?>
+<p:sld xmlns:a="http://schemas.openxmlformats.org/drawingml/2006/main" xmlns:p="http://schemas.openxmlformats.org/presentationml/2006/main" xmlns:r="http://schemas.openxmlformats.org/officeDocument/2006/relationships">
+  <p:cSld>
+    <p:spTree>
+      <p:nvGrpSpPr>
+        <p:cNvPr id="1" name=""/>
+        <p:cNvGrpSpPr/>
+        <p:nvPr/>
+      </p:nvGrpSpPr>
+      <p:grpSpPr/>
+      <p:sp>
+        <p:nvSpPr>
+          <p:cNvPr id="1032" name="Google Shape;1032;p65"/>
+          <p:cNvSpPr/>
+          <p:nvPr/>
+        </p:nvSpPr>
+        <p:spPr>
+          <a:xfrm>
+            <a:off x="285748" y="286047"/>
+            <a:ext cx="8572456" cy="3938075"/>
+          </a:xfrm>
+          <a:prstGeom prst="rect">
+            <a:avLst/>
+          </a:prstGeom>
+          <a:noFill/>
+          <a:ln>
+            <a:noFill/>
+          </a:ln>
+        </p:spPr>
+        <p:txBody>
+          <a:bodyPr anchorCtr="0" anchor="ctr" bIns="91425" lIns="91425" spcFirstLastPara="1" rIns="91425" wrap="square" tIns="91425">
+            <a:noAutofit/>
+          </a:bodyPr>
+          <a:lstStyle/>
+          <a:p>
+            <a:pPr indent="0" lvl="0" marL="0" rtl="0" algn="l">
+              <a:spcBef>
+                <a:spcPts val="0"/>
+              </a:spcBef>
+              <a:spcAft>
+                <a:spcPts val="0"/>
+              </a:spcAft>
+              <a:buNone/>
+            </a:pPr>
+            <a:r>
+              <a:t/>
+            </a:r>
+            <a:endParaRPr/>
+          </a:p>
+        </p:txBody>
+      </p:sp>
+      <p:sp>
+        <p:nvSpPr>
+          <p:cNvPr id="1033" name="Google Shape;1033;p65"/>
+          <p:cNvSpPr/>
+          <p:nvPr/>
+        </p:nvSpPr>
+        <p:spPr>
+          <a:xfrm>
+            <a:off x="285748" y="1209852"/>
+            <a:ext cx="8572456" cy="3014270"/>
+          </a:xfrm>
+          <a:prstGeom prst="rect">
+            <a:avLst/>
+          </a:prstGeom>
+          <a:noFill/>
+          <a:ln>
+            <a:noFill/>
+          </a:ln>
+        </p:spPr>
+        <p:txBody>
+          <a:bodyPr anchorCtr="0" anchor="ctr" bIns="91425" lIns="91425" spcFirstLastPara="1" rIns="91425" wrap="square" tIns="91425">
+            <a:noAutofit/>
+          </a:bodyPr>
+          <a:lstStyle/>
+          <a:p>
+            <a:pPr indent="0" lvl="0" marL="0" rtl="0" algn="l">
+              <a:spcBef>
+                <a:spcPts val="0"/>
+              </a:spcBef>
+              <a:spcAft>
+                <a:spcPts val="0"/>
+              </a:spcAft>
+              <a:buNone/>
+            </a:pPr>
+            <a:r>
+              <a:t/>
+            </a:r>
+            <a:endParaRPr/>
+          </a:p>
+        </p:txBody>
+      </p:sp>
+      <p:sp>
+        <p:nvSpPr>
+          <p:cNvPr id="1035" name="Google Shape;1035;p65"/>
+          <p:cNvSpPr/>
+          <p:nvPr/>
+        </p:nvSpPr>
+        <p:spPr>
+          <a:xfrm>
+            <a:off x="476248" y="1400328"/>
+            <a:ext cx="76199" cy="76190"/>
+          </a:xfrm>
+          <a:prstGeom prst="roundRect">
+            <a:avLst>
+              <a:gd fmla="val 31500" name="adj"/>
+            </a:avLst>
+          </a:prstGeom>
+          <a:solidFill>
+            <a:srgbClr val="0077FF"/>
+          </a:solidFill>
+          <a:ln>
+            <a:noFill/>
+          </a:ln>
+        </p:spPr>
+        <p:txBody>
+          <a:bodyPr anchorCtr="0" anchor="ctr" bIns="91425" lIns="91425" spcFirstLastPara="1" rIns="91425" wrap="square" tIns="91425">
+            <a:noAutofit/>
+          </a:bodyPr>
+          <a:lstStyle/>
+          <a:p>
+            <a:pPr indent="0" lvl="0" marL="0" rtl="0" algn="l">
+              <a:spcBef>
+                <a:spcPts val="0"/>
+              </a:spcBef>
+              <a:spcAft>
+                <a:spcPts val="0"/>
+              </a:spcAft>
+              <a:buNone/>
+            </a:pPr>
+            <a:r>
+              <a:t/>
+            </a:r>
+            <a:endParaRPr/>
+          </a:p>
+        </p:txBody>
+      </p:sp>
+      <p:sp>
+        <p:nvSpPr>
+          <p:cNvPr id="1041" name="Google Shape;1041;p65"/>
+          <p:cNvSpPr/>
+          <p:nvPr/>
+        </p:nvSpPr>
+        <p:spPr>
+          <a:xfrm>
+            <a:off x="3365480" y="1400328"/>
+            <a:ext cx="76199" cy="76190"/>
+          </a:xfrm>
+          <a:prstGeom prst="roundRect">
+            <a:avLst>
+              <a:gd fmla="val 31500" name="adj"/>
+            </a:avLst>
+          </a:prstGeom>
+          <a:solidFill>
+            <a:srgbClr val="0077FF"/>
+          </a:solidFill>
+          <a:ln>
+            <a:noFill/>
+          </a:ln>
+        </p:spPr>
+        <p:txBody>
+          <a:bodyPr anchorCtr="0" anchor="ctr" bIns="91425" lIns="91425" spcFirstLastPara="1" rIns="91425" wrap="square" tIns="91425">
+            <a:noAutofit/>
+          </a:bodyPr>
+          <a:lstStyle/>
+          <a:p>
+            <a:pPr indent="0" lvl="0" marL="0" rtl="0" algn="l">
+              <a:spcBef>
+                <a:spcPts val="0"/>
+              </a:spcBef>
+              <a:spcAft>
+                <a:spcPts val="0"/>
+              </a:spcAft>
+              <a:buNone/>
+            </a:pPr>
+            <a:r>
+              <a:t/>
+            </a:r>
+            <a:endParaRPr/>
+          </a:p>
+        </p:txBody>
+      </p:sp>
+      <p:sp>
+        <p:nvSpPr>
+          <p:cNvPr id="1046" name="Google Shape;1046;p65"/>
+          <p:cNvSpPr/>
+          <p:nvPr/>
+        </p:nvSpPr>
+        <p:spPr>
+          <a:xfrm>
+            <a:off x="6254721" y="1400328"/>
+            <a:ext cx="76199" cy="76190"/>
+          </a:xfrm>
+          <a:prstGeom prst="roundRect">
+            <a:avLst>
+              <a:gd fmla="val 31500" name="adj"/>
+            </a:avLst>
+          </a:prstGeom>
+          <a:solidFill>
+            <a:srgbClr val="0077FF"/>
+          </a:solidFill>
+          <a:ln>
+            <a:noFill/>
+          </a:ln>
+        </p:spPr>
+        <p:txBody>
+          <a:bodyPr anchorCtr="0" anchor="ctr" bIns="91425" lIns="91425" spcFirstLastPara="1" rIns="91425" wrap="square" tIns="91425">
+            <a:noAutofit/>
+          </a:bodyPr>
+          <a:lstStyle/>
+          <a:p>
+            <a:pPr indent="0" lvl="0" marL="0" rtl="0" algn="l">
+              <a:spcBef>
+                <a:spcPts val="0"/>
+              </a:spcBef>
+              <a:spcAft>
+                <a:spcPts val="0"/>
+              </a:spcAft>
+              <a:buNone/>
+            </a:pPr>
+            <a:r>
+              <a:t/>
+            </a:r>
+            <a:endParaRPr/>
+          </a:p>
+        </p:txBody>
+      </p:sp>
+      <p:sp>
+        <p:nvSpPr>
+          <p:cNvPr id="1047" name="title"/>
+          <p:cNvSpPr txBox="1"/>
+          <p:nvPr/>
+        </p:nvSpPr>
+        <p:spPr>
+          <a:xfrm>
+            <a:off x="274320" y="282943"/>
+            <a:ext cx="6792986" cy="932027"/>
+          </a:xfrm>
+          <a:prstGeom prst="rect">
+            <a:avLst/>
+          </a:prstGeom>
+          <a:noFill/>
+        </p:spPr>
+        <p:txBody>
+          <a:bodyPr wrap="square" lIns="76200" rIns="76200" tIns="50800" bIns="50800">
+            <a:spAutoFit/>
+          </a:bodyPr>
+          <a:lstStyle/>
+          <a:p>
+            <a:pPr algn="l">
+              <a:spcAft>
+                <a:spcPts val="300"/>
+              </a:spcAft>
+              <a:defRPr sz="2438">
+                <a:solidFill>
+                  <a:srgbClr val="000000"/>
+                </a:solidFill>
+                <a:latin typeface="Play"/>
+                <a:ea typeface="Play"/>
+                <a:cs typeface="Play"/>
+              </a:defRPr>
+            </a:pPr>
+            <a:r>
+              <a:rPr sz="2438">
+                <a:solidFill>
+                  <a:srgbClr val="000000"/>
+                </a:solidFill>
+                <a:latin typeface="Play"/>
+                <a:ea typeface="Play"/>
+                <a:cs typeface="Play"/>
+              </a:rPr>
+              <a:t>Увеличение объёма работы дизайнеров: 11/нед → 38/6н</a:t>
+            </a:r>
+          </a:p>
+        </p:txBody>
+      </p:sp>
+      <p:graphicFrame>
+        <p:nvGraphicFramePr>
+          <p:cNvPr id="1048" name="Chart 1047"/>
+          <p:cNvGraphicFramePr>
+            <a:graphicFrameLocks noGrp="1"/>
+          </p:cNvGraphicFramePr>
+          <p:nvPr/>
+        </p:nvGraphicFramePr>
+        <p:xfrm>
+          <a:off x="274320" y="1628895"/>
+          <a:ext cx="8344814" cy="2160270"/>
+        </p:xfrm>
+        <a:graphic>
+          <a:graphicData uri="http://schemas.openxmlformats.org/drawingml/2006/chart">
+            <c:chart xmlns:c="http://schemas.openxmlformats.org/drawingml/2006/chart" r:id="rId4"/>
+          </a:graphicData>
+        </a:graphic>
+      </p:graphicFrame>
+    </p:spTree>
+  </p:cSld>
+  <p:clrMapOvr>
+    <a:masterClrMapping/>
+  </p:clrMapOvr>
+</p:sld>
+</file>
+
+<file path=ppt/slides/slide62.xml><?xml version="1.0" encoding="utf-8"?>
+<p:sld xmlns:a="http://schemas.openxmlformats.org/drawingml/2006/main" xmlns:p="http://schemas.openxmlformats.org/presentationml/2006/main" xmlns:r="http://schemas.openxmlformats.org/officeDocument/2006/relationships">
+  <p:cSld>
+    <p:spTree>
+      <p:nvGrpSpPr>
+        <p:cNvPr id="1" name=""/>
+        <p:cNvGrpSpPr/>
+        <p:nvPr/>
+      </p:nvGrpSpPr>
+      <p:grpSpPr/>
+      <p:pic>
+        <p:nvPicPr>
+          <p:cNvPr descr=" " id="2385" name="Google Shape;2385;p88"/>
+          <p:cNvPicPr preferRelativeResize="0"/>
+          <p:nvPr/>
+        </p:nvPicPr>
+        <p:blipFill rotWithShape="1">
+          <a:blip r:embed="rId2">
+            <a:alphaModFix/>
+          </a:blip>
+          <a:srcRect b="0" l="0" r="0" t="0"/>
+          <a:stretch/>
+        </p:blipFill>
+        <p:spPr>
+          <a:xfrm>
+            <a:off x="388142" y="2000324"/>
+            <a:ext cx="8755811" cy="9524"/>
+          </a:xfrm>
+          <a:prstGeom prst="rect">
+            <a:avLst/>
+          </a:prstGeom>
+          <a:noFill/>
+          <a:ln>
+            <a:noFill/>
+          </a:ln>
+        </p:spPr>
+      </p:pic>
+      <p:sp>
+        <p:nvSpPr>
+          <p:cNvPr id="2386" name="Google Shape;2386;p88"/>
+          <p:cNvSpPr/>
+          <p:nvPr/>
+        </p:nvSpPr>
+        <p:spPr>
+          <a:xfrm>
+            <a:off x="319086" y="1286042"/>
+            <a:ext cx="1690679" cy="1128566"/>
+          </a:xfrm>
+          <a:prstGeom prst="rect">
+            <a:avLst/>
+          </a:prstGeom>
+          <a:noFill/>
+          <a:ln>
+            <a:noFill/>
+          </a:ln>
+        </p:spPr>
+        <p:txBody>
+          <a:bodyPr anchorCtr="0" anchor="ctr" bIns="91425" lIns="91425" spcFirstLastPara="1" rIns="91425" wrap="square" tIns="91425">
+            <a:noAutofit/>
+          </a:bodyPr>
+          <a:lstStyle/>
+          <a:p>
+            <a:pPr indent="0" lvl="0" marL="0" rtl="0" algn="l">
+              <a:spcBef>
+                <a:spcPts val="0"/>
+              </a:spcBef>
+              <a:spcAft>
+                <a:spcPts val="0"/>
+              </a:spcAft>
+              <a:buNone/>
+            </a:pPr>
+            <a:r>
+              <a:t/>
+            </a:r>
+            <a:endParaRPr/>
+          </a:p>
+        </p:txBody>
+      </p:sp>
+      <p:sp>
+        <p:nvSpPr>
+          <p:cNvPr id="2388" name="Google Shape;2388;p88"/>
+          <p:cNvSpPr/>
+          <p:nvPr/>
+        </p:nvSpPr>
+        <p:spPr>
+          <a:xfrm>
+            <a:off x="2600312" y="1286042"/>
+            <a:ext cx="1690679" cy="1128566"/>
+          </a:xfrm>
+          <a:prstGeom prst="rect">
+            <a:avLst/>
+          </a:prstGeom>
+          <a:noFill/>
+          <a:ln>
+            <a:noFill/>
+          </a:ln>
+        </p:spPr>
+        <p:txBody>
+          <a:bodyPr anchorCtr="0" anchor="ctr" bIns="91425" lIns="91425" spcFirstLastPara="1" rIns="91425" wrap="square" tIns="91425">
+            <a:noAutofit/>
+          </a:bodyPr>
+          <a:lstStyle/>
+          <a:p>
+            <a:pPr indent="0" lvl="0" marL="0" rtl="0" algn="l">
+              <a:spcBef>
+                <a:spcPts val="0"/>
+              </a:spcBef>
+              <a:spcAft>
+                <a:spcPts val="0"/>
+              </a:spcAft>
+              <a:buNone/>
+            </a:pPr>
+            <a:r>
+              <a:t/>
+            </a:r>
+            <a:endParaRPr/>
+          </a:p>
+        </p:txBody>
+      </p:sp>
+      <p:sp>
+        <p:nvSpPr>
+          <p:cNvPr id="2390" name="Google Shape;2390;p88"/>
+          <p:cNvSpPr/>
+          <p:nvPr/>
+        </p:nvSpPr>
+        <p:spPr>
+          <a:xfrm>
+            <a:off x="4881537" y="1286042"/>
+            <a:ext cx="1690679" cy="1128566"/>
+          </a:xfrm>
+          <a:prstGeom prst="rect">
+            <a:avLst/>
+          </a:prstGeom>
+          <a:noFill/>
+          <a:ln>
+            <a:noFill/>
+          </a:ln>
+        </p:spPr>
+        <p:txBody>
+          <a:bodyPr anchorCtr="0" anchor="ctr" bIns="91425" lIns="91425" spcFirstLastPara="1" rIns="91425" wrap="square" tIns="91425">
+            <a:noAutofit/>
+          </a:bodyPr>
+          <a:lstStyle/>
+          <a:p>
+            <a:pPr indent="0" lvl="0" marL="0" rtl="0" algn="l">
+              <a:spcBef>
+                <a:spcPts val="0"/>
+              </a:spcBef>
+              <a:spcAft>
+                <a:spcPts val="0"/>
+              </a:spcAft>
+              <a:buNone/>
+            </a:pPr>
+            <a:r>
+              <a:t/>
+            </a:r>
+            <a:endParaRPr/>
+          </a:p>
+        </p:txBody>
+      </p:sp>
+      <p:sp>
+        <p:nvSpPr>
+          <p:cNvPr id="2392" name="Google Shape;2392;p88"/>
+          <p:cNvSpPr/>
+          <p:nvPr/>
+        </p:nvSpPr>
+        <p:spPr>
+          <a:xfrm>
+            <a:off x="7162763" y="1286042"/>
+            <a:ext cx="1690679" cy="1128566"/>
+          </a:xfrm>
+          <a:prstGeom prst="rect">
+            <a:avLst/>
+          </a:prstGeom>
+          <a:noFill/>
+          <a:ln>
+            <a:noFill/>
+          </a:ln>
+        </p:spPr>
+        <p:txBody>
+          <a:bodyPr anchorCtr="0" anchor="ctr" bIns="91425" lIns="91425" spcFirstLastPara="1" rIns="91425" wrap="square" tIns="91425">
+            <a:noAutofit/>
+          </a:bodyPr>
+          <a:lstStyle/>
+          <a:p>
+            <a:pPr indent="0" lvl="0" marL="0" rtl="0" algn="l">
+              <a:spcBef>
+                <a:spcPts val="0"/>
+              </a:spcBef>
+              <a:spcAft>
+                <a:spcPts val="0"/>
+              </a:spcAft>
+              <a:buNone/>
+            </a:pPr>
+            <a:r>
+              <a:t/>
+            </a:r>
+            <a:endParaRPr/>
+          </a:p>
+        </p:txBody>
+      </p:sp>
+      <p:sp>
+        <p:nvSpPr>
+          <p:cNvPr id="2393" name="title"/>
+          <p:cNvSpPr txBox="1"/>
+          <p:nvPr/>
+        </p:nvSpPr>
+        <p:spPr>
+          <a:xfrm>
+            <a:off x="274320" y="282943"/>
+            <a:ext cx="6792986" cy="932027"/>
+          </a:xfrm>
+          <a:prstGeom prst="rect">
+            <a:avLst/>
+          </a:prstGeom>
+          <a:noFill/>
+        </p:spPr>
+        <p:txBody>
+          <a:bodyPr wrap="square" lIns="76200" rIns="76200" tIns="50800" bIns="50800">
+            <a:spAutoFit/>
+          </a:bodyPr>
+          <a:lstStyle/>
+          <a:p>
+            <a:pPr algn="l">
+              <a:spcAft>
+                <a:spcPts val="300"/>
+              </a:spcAft>
+              <a:defRPr sz="2438">
+                <a:solidFill>
+                  <a:srgbClr val="000000"/>
+                </a:solidFill>
+                <a:latin typeface="Play"/>
+                <a:ea typeface="Play"/>
+                <a:cs typeface="Play"/>
+              </a:defRPr>
+            </a:pPr>
+            <a:r>
+              <a:rPr sz="2438">
+                <a:solidFill>
+                  <a:srgbClr val="000000"/>
+                </a:solidFill>
+                <a:latin typeface="Play"/>
+                <a:ea typeface="Play"/>
+                <a:cs typeface="Play"/>
+              </a:rPr>
+              <a:t>Стоимость пилота: 1 400 руб за 6 недель</a:t>
             </a:r>
           </a:p>
         </p:txBody>
@@ -7928,1050 +8492,6 @@
 </p:sld>
 </file>
 
-<file path=ppt/slides/slide61.xml><?xml version="1.0" encoding="utf-8"?>
-<p:sld xmlns:a="http://schemas.openxmlformats.org/drawingml/2006/main" xmlns:p="http://schemas.openxmlformats.org/presentationml/2006/main" xmlns:r="http://schemas.openxmlformats.org/officeDocument/2006/relationships">
-  <p:cSld>
-    <p:spTree>
-      <p:nvGrpSpPr>
-        <p:cNvPr id="1" name=""/>
-        <p:cNvGrpSpPr/>
-        <p:nvPr/>
-      </p:nvGrpSpPr>
-      <p:grpSpPr/>
-      <p:pic>
-        <p:nvPicPr>
-          <p:cNvPr descr=" " id="2428" name="Google Shape;2428;p89"/>
-          <p:cNvPicPr preferRelativeResize="0"/>
-          <p:nvPr/>
-        </p:nvPicPr>
-        <p:blipFill rotWithShape="1">
-          <a:blip r:embed="rId2">
-            <a:alphaModFix/>
-          </a:blip>
-          <a:srcRect b="0" l="0" r="0" t="0"/>
-          <a:stretch/>
-        </p:blipFill>
-        <p:spPr>
-          <a:xfrm>
-            <a:off x="0" y="2732082"/>
-            <a:ext cx="8515008" cy="92615"/>
-          </a:xfrm>
-          <a:prstGeom prst="rect">
-            <a:avLst/>
-          </a:prstGeom>
-          <a:noFill/>
-          <a:ln>
-            <a:noFill/>
-          </a:ln>
-        </p:spPr>
-      </p:pic>
-      <p:sp>
-        <p:nvSpPr>
-          <p:cNvPr id="2429" name="Google Shape;2429;p89"/>
-          <p:cNvSpPr/>
-          <p:nvPr/>
-        </p:nvSpPr>
-        <p:spPr>
-          <a:xfrm>
-            <a:off x="553415" y="1828897"/>
-            <a:ext cx="2232516" cy="1490254"/>
-          </a:xfrm>
-          <a:prstGeom prst="rect">
-            <a:avLst/>
-          </a:prstGeom>
-          <a:noFill/>
-          <a:ln>
-            <a:noFill/>
-          </a:ln>
-        </p:spPr>
-        <p:txBody>
-          <a:bodyPr anchorCtr="0" anchor="ctr" bIns="91425" lIns="91425" spcFirstLastPara="1" rIns="91425" wrap="square" tIns="91425">
-            <a:noAutofit/>
-          </a:bodyPr>
-          <a:lstStyle/>
-          <a:p>
-            <a:pPr indent="0" lvl="0" marL="0" rtl="0" algn="l">
-              <a:spcBef>
-                <a:spcPts val="0"/>
-              </a:spcBef>
-              <a:spcAft>
-                <a:spcPts val="0"/>
-              </a:spcAft>
-              <a:buNone/>
-            </a:pPr>
-            <a:r>
-              <a:t/>
-            </a:r>
-            <a:endParaRPr/>
-          </a:p>
-        </p:txBody>
-      </p:sp>
-      <p:sp>
-        <p:nvSpPr>
-          <p:cNvPr id="2431" name="Google Shape;2431;p89"/>
-          <p:cNvSpPr/>
-          <p:nvPr/>
-        </p:nvSpPr>
-        <p:spPr>
-          <a:xfrm>
-            <a:off x="3565736" y="1828897"/>
-            <a:ext cx="2232516" cy="1490254"/>
-          </a:xfrm>
-          <a:prstGeom prst="rect">
-            <a:avLst/>
-          </a:prstGeom>
-          <a:noFill/>
-          <a:ln>
-            <a:noFill/>
-          </a:ln>
-        </p:spPr>
-        <p:txBody>
-          <a:bodyPr anchorCtr="0" anchor="ctr" bIns="91425" lIns="91425" spcFirstLastPara="1" rIns="91425" wrap="square" tIns="91425">
-            <a:noAutofit/>
-          </a:bodyPr>
-          <a:lstStyle/>
-          <a:p>
-            <a:pPr indent="0" lvl="0" marL="0" rtl="0" algn="l">
-              <a:spcBef>
-                <a:spcPts val="0"/>
-              </a:spcBef>
-              <a:spcAft>
-                <a:spcPts val="0"/>
-              </a:spcAft>
-              <a:buNone/>
-            </a:pPr>
-            <a:r>
-              <a:t/>
-            </a:r>
-            <a:endParaRPr/>
-          </a:p>
-        </p:txBody>
-      </p:sp>
-      <p:sp>
-        <p:nvSpPr>
-          <p:cNvPr id="2433" name="Google Shape;2433;p89"/>
-          <p:cNvSpPr/>
-          <p:nvPr/>
-        </p:nvSpPr>
-        <p:spPr>
-          <a:xfrm>
-            <a:off x="6578067" y="1828897"/>
-            <a:ext cx="2232516" cy="1490254"/>
-          </a:xfrm>
-          <a:prstGeom prst="rect">
-            <a:avLst/>
-          </a:prstGeom>
-          <a:noFill/>
-          <a:ln>
-            <a:noFill/>
-          </a:ln>
-        </p:spPr>
-        <p:txBody>
-          <a:bodyPr anchorCtr="0" anchor="ctr" bIns="91425" lIns="91425" spcFirstLastPara="1" rIns="91425" wrap="square" tIns="91425">
-            <a:noAutofit/>
-          </a:bodyPr>
-          <a:lstStyle/>
-          <a:p>
-            <a:pPr indent="0" lvl="0" marL="0" rtl="0" algn="l">
-              <a:spcBef>
-                <a:spcPts val="0"/>
-              </a:spcBef>
-              <a:spcAft>
-                <a:spcPts val="0"/>
-              </a:spcAft>
-              <a:buNone/>
-            </a:pPr>
-            <a:r>
-              <a:t/>
-            </a:r>
-            <a:endParaRPr/>
-          </a:p>
-        </p:txBody>
-      </p:sp>
-      <p:sp>
-        <p:nvSpPr>
-          <p:cNvPr id="2434" name="title"/>
-          <p:cNvSpPr txBox="1"/>
-          <p:nvPr/>
-        </p:nvSpPr>
-        <p:spPr>
-          <a:xfrm>
-            <a:off x="274320" y="282943"/>
-            <a:ext cx="6792986" cy="617220"/>
-          </a:xfrm>
-          <a:prstGeom prst="rect">
-            <a:avLst/>
-          </a:prstGeom>
-          <a:noFill/>
-        </p:spPr>
-        <p:txBody>
-          <a:bodyPr wrap="square" lIns="76200" rIns="76200" tIns="50800" bIns="50800">
-            <a:spAutoFit/>
-          </a:bodyPr>
-          <a:lstStyle/>
-          <a:p>
-            <a:pPr algn="l">
-              <a:spcAft>
-                <a:spcPts val="300"/>
-              </a:spcAft>
-              <a:defRPr sz="2705">
-                <a:solidFill>
-                  <a:srgbClr val="000000"/>
-                </a:solidFill>
-                <a:latin typeface="Play"/>
-                <a:ea typeface="Play"/>
-                <a:cs typeface="Play"/>
-              </a:defRPr>
-            </a:pPr>
-            <a:r>
-              <a:rPr sz="2705">
-                <a:solidFill>
-                  <a:srgbClr val="000000"/>
-                </a:solidFill>
-                <a:latin typeface="Play"/>
-                <a:ea typeface="Play"/>
-                <a:cs typeface="Play"/>
-              </a:rPr>
-              <a:t>Пилот: 6 недель, 2 команды</a:t>
-            </a:r>
-          </a:p>
-        </p:txBody>
-      </p:sp>
-      <p:sp>
-        <p:nvSpPr>
-          <p:cNvPr id="2435" name="Pentagon 2434"/>
-          <p:cNvSpPr/>
-          <p:nvPr/>
-        </p:nvSpPr>
-        <p:spPr>
-          <a:xfrm>
-            <a:off x="274320" y="1414513"/>
-            <a:ext cx="2011100" cy="661947"/>
-          </a:xfrm>
-          <a:prstGeom prst="homePlate">
-            <a:avLst/>
-          </a:prstGeom>
-          <a:solidFill>
-            <a:srgbClr val="0077FF"/>
-          </a:solidFill>
-          <a:ln>
-            <a:noFill/>
-          </a:ln>
-        </p:spPr>
-        <p:style>
-          <a:lnRef idx="1">
-            <a:schemeClr val="accent1"/>
-          </a:lnRef>
-          <a:fillRef idx="3">
-            <a:schemeClr val="accent1"/>
-          </a:fillRef>
-          <a:effectRef idx="2">
-            <a:schemeClr val="accent1"/>
-          </a:effectRef>
-          <a:fontRef idx="minor">
-            <a:schemeClr val="lt1"/>
-          </a:fontRef>
-        </p:style>
-        <p:txBody>
-          <a:bodyPr rtlCol="0" anchor="ctr" wrap="square" lIns="12700" rIns="12700" tIns="12700" bIns="12700"/>
-          <a:lstStyle/>
-          <a:p>
-            <a:pPr algn="ctr">
-              <a:defRPr sz="1336" b="0">
-                <a:solidFill>
-                  <a:srgbClr val="FFFFFF"/>
-                </a:solidFill>
-                <a:latin typeface="Play"/>
-                <a:ea typeface="Play"/>
-                <a:cs typeface="Play"/>
-              </a:defRPr>
-            </a:pPr>
-            <a:r>
-              <a:rPr sz="1336" b="0">
-                <a:solidFill>
-                  <a:srgbClr val="FFFFFF"/>
-                </a:solidFill>
-                <a:latin typeface="Play"/>
-                <a:ea typeface="Play"/>
-                <a:cs typeface="Play"/>
-              </a:rPr>
-              <a:t>Подготовка</a:t>
-            </a:r>
-          </a:p>
-        </p:txBody>
-      </p:sp>
-      <p:sp>
-        <p:nvSpPr>
-          <p:cNvPr id="2436" name="Chevron 2435"/>
-          <p:cNvSpPr/>
-          <p:nvPr/>
-        </p:nvSpPr>
-        <p:spPr>
-          <a:xfrm>
-            <a:off x="2385557" y="1414513"/>
-            <a:ext cx="2011100" cy="661947"/>
-          </a:xfrm>
-          <a:prstGeom prst="chevron">
-            <a:avLst/>
-          </a:prstGeom>
-          <a:solidFill>
-            <a:srgbClr val="0077FF"/>
-          </a:solidFill>
-          <a:ln>
-            <a:noFill/>
-          </a:ln>
-        </p:spPr>
-        <p:style>
-          <a:lnRef idx="1">
-            <a:schemeClr val="accent1"/>
-          </a:lnRef>
-          <a:fillRef idx="3">
-            <a:schemeClr val="accent1"/>
-          </a:fillRef>
-          <a:effectRef idx="2">
-            <a:schemeClr val="accent1"/>
-          </a:effectRef>
-          <a:fontRef idx="minor">
-            <a:schemeClr val="lt1"/>
-          </a:fontRef>
-        </p:style>
-        <p:txBody>
-          <a:bodyPr rtlCol="0" anchor="ctr" wrap="square" lIns="12700" rIns="12700" tIns="12700" bIns="12700"/>
-          <a:lstStyle/>
-          <a:p>
-            <a:pPr algn="ctr">
-              <a:defRPr sz="1336" b="0">
-                <a:solidFill>
-                  <a:srgbClr val="FFFFFF"/>
-                </a:solidFill>
-                <a:latin typeface="Play"/>
-                <a:ea typeface="Play"/>
-                <a:cs typeface="Play"/>
-              </a:defRPr>
-            </a:pPr>
-            <a:r>
-              <a:rPr sz="1336" b="0">
-                <a:solidFill>
-                  <a:srgbClr val="FFFFFF"/>
-                </a:solidFill>
-                <a:latin typeface="Play"/>
-                <a:ea typeface="Play"/>
-                <a:cs typeface="Play"/>
-              </a:rPr>
-              <a:t>Запуск</a:t>
-            </a:r>
-          </a:p>
-        </p:txBody>
-      </p:sp>
-      <p:sp>
-        <p:nvSpPr>
-          <p:cNvPr id="2437" name="Chevron 2436"/>
-          <p:cNvSpPr/>
-          <p:nvPr/>
-        </p:nvSpPr>
-        <p:spPr>
-          <a:xfrm>
-            <a:off x="4496795" y="1414513"/>
-            <a:ext cx="2011100" cy="661947"/>
-          </a:xfrm>
-          <a:prstGeom prst="chevron">
-            <a:avLst/>
-          </a:prstGeom>
-          <a:solidFill>
-            <a:srgbClr val="0077FF"/>
-          </a:solidFill>
-          <a:ln>
-            <a:noFill/>
-          </a:ln>
-        </p:spPr>
-        <p:style>
-          <a:lnRef idx="1">
-            <a:schemeClr val="accent1"/>
-          </a:lnRef>
-          <a:fillRef idx="3">
-            <a:schemeClr val="accent1"/>
-          </a:fillRef>
-          <a:effectRef idx="2">
-            <a:schemeClr val="accent1"/>
-          </a:effectRef>
-          <a:fontRef idx="minor">
-            <a:schemeClr val="lt1"/>
-          </a:fontRef>
-        </p:style>
-        <p:txBody>
-          <a:bodyPr rtlCol="0" anchor="ctr" wrap="square" lIns="12700" rIns="12700" tIns="12700" bIns="12700"/>
-          <a:lstStyle/>
-          <a:p>
-            <a:pPr algn="ctr">
-              <a:defRPr sz="1336" b="0">
-                <a:solidFill>
-                  <a:srgbClr val="FFFFFF"/>
-                </a:solidFill>
-                <a:latin typeface="Play"/>
-                <a:ea typeface="Play"/>
-                <a:cs typeface="Play"/>
-              </a:defRPr>
-            </a:pPr>
-            <a:r>
-              <a:rPr sz="1336" b="0">
-                <a:solidFill>
-                  <a:srgbClr val="FFFFFF"/>
-                </a:solidFill>
-                <a:latin typeface="Play"/>
-                <a:ea typeface="Play"/>
-                <a:cs typeface="Play"/>
-              </a:rPr>
-              <a:t>Аудит</a:t>
-            </a:r>
-          </a:p>
-        </p:txBody>
-      </p:sp>
-      <p:sp>
-        <p:nvSpPr>
-          <p:cNvPr id="2438" name="Chevron 2437"/>
-          <p:cNvSpPr/>
-          <p:nvPr/>
-        </p:nvSpPr>
-        <p:spPr>
-          <a:xfrm>
-            <a:off x="6608033" y="1414513"/>
-            <a:ext cx="2011100" cy="661947"/>
-          </a:xfrm>
-          <a:prstGeom prst="chevron">
-            <a:avLst/>
-          </a:prstGeom>
-          <a:solidFill>
-            <a:srgbClr val="0077FF"/>
-          </a:solidFill>
-          <a:ln>
-            <a:noFill/>
-          </a:ln>
-        </p:spPr>
-        <p:style>
-          <a:lnRef idx="1">
-            <a:schemeClr val="accent1"/>
-          </a:lnRef>
-          <a:fillRef idx="3">
-            <a:schemeClr val="accent1"/>
-          </a:fillRef>
-          <a:effectRef idx="2">
-            <a:schemeClr val="accent1"/>
-          </a:effectRef>
-          <a:fontRef idx="minor">
-            <a:schemeClr val="lt1"/>
-          </a:fontRef>
-        </p:style>
-        <p:txBody>
-          <a:bodyPr rtlCol="0" anchor="ctr" wrap="square" lIns="12700" rIns="12700" tIns="12700" bIns="12700"/>
-          <a:lstStyle/>
-          <a:p>
-            <a:pPr algn="ctr">
-              <a:defRPr sz="1336" b="0">
-                <a:solidFill>
-                  <a:srgbClr val="FFFFFF"/>
-                </a:solidFill>
-                <a:latin typeface="Play"/>
-                <a:ea typeface="Play"/>
-                <a:cs typeface="Play"/>
-              </a:defRPr>
-            </a:pPr>
-            <a:r>
-              <a:rPr sz="1336" b="0">
-                <a:solidFill>
-                  <a:srgbClr val="FFFFFF"/>
-                </a:solidFill>
-                <a:latin typeface="Play"/>
-                <a:ea typeface="Play"/>
-                <a:cs typeface="Play"/>
-              </a:rPr>
-              <a:t>Экспорт</a:t>
-            </a:r>
-          </a:p>
-        </p:txBody>
-      </p:sp>
-      <p:sp>
-        <p:nvSpPr>
-          <p:cNvPr id="2439" name="body"/>
-          <p:cNvSpPr txBox="1"/>
-          <p:nvPr/>
-        </p:nvSpPr>
-        <p:spPr>
-          <a:xfrm>
-            <a:off x="274320" y="2076461"/>
-            <a:ext cx="8344814" cy="655611"/>
-          </a:xfrm>
-          <a:prstGeom prst="rect">
-            <a:avLst/>
-          </a:prstGeom>
-          <a:noFill/>
-        </p:spPr>
-        <p:txBody>
-          <a:bodyPr wrap="square" lIns="76200" rIns="76200" tIns="50800" bIns="50800">
-            <a:spAutoFit/>
-          </a:bodyPr>
-          <a:lstStyle/>
-          <a:p>
-            <a:pPr algn="l">
-              <a:spcAft>
-                <a:spcPts val="300"/>
-              </a:spcAft>
-              <a:defRPr sz="1200">
-                <a:solidFill>
-                  <a:srgbClr val="000000"/>
-                </a:solidFill>
-                <a:latin typeface="Play"/>
-                <a:ea typeface="Play"/>
-                <a:cs typeface="Play"/>
-              </a:defRPr>
-            </a:pPr>
-            <a:r>
-              <a:rPr sz="1200">
-                <a:solidFill>
-                  <a:srgbClr val="000000"/>
-                </a:solidFill>
-                <a:latin typeface="Play"/>
-                <a:ea typeface="Play"/>
-                <a:cs typeface="Play"/>
-              </a:rPr>
-              <a:t>• 2 недели подготовки и обучения команд</a:t>
-            </a:r>
-          </a:p>
-          <a:p>
-            <a:pPr algn="l">
-              <a:spcAft>
-                <a:spcPts val="300"/>
-              </a:spcAft>
-              <a:defRPr sz="1200">
-                <a:solidFill>
-                  <a:srgbClr val="000000"/>
-                </a:solidFill>
-                <a:latin typeface="Play"/>
-                <a:ea typeface="Play"/>
-                <a:cs typeface="Play"/>
-              </a:defRPr>
-            </a:pPr>
-            <a:r>
-              <a:rPr sz="1200">
-                <a:solidFill>
-                  <a:srgbClr val="000000"/>
-                </a:solidFill>
-                <a:latin typeface="Play"/>
-                <a:ea typeface="Play"/>
-                <a:cs typeface="Play"/>
-              </a:rPr>
-              <a:t>• Запуск пилота на 2 командах</a:t>
-            </a:r>
-          </a:p>
-          <a:p>
-            <a:pPr algn="l">
-              <a:spcAft>
-                <a:spcPts val="300"/>
-              </a:spcAft>
-              <a:defRPr sz="1200">
-                <a:solidFill>
-                  <a:srgbClr val="000000"/>
-                </a:solidFill>
-                <a:latin typeface="Play"/>
-                <a:ea typeface="Play"/>
-                <a:cs typeface="Play"/>
-              </a:defRPr>
-            </a:pPr>
-            <a:r>
-              <a:rPr sz="1200">
-                <a:solidFill>
-                  <a:srgbClr val="000000"/>
-                </a:solidFill>
-                <a:latin typeface="Play"/>
-                <a:ea typeface="Play"/>
-                <a:cs typeface="Play"/>
-              </a:rPr>
-              <a:t>• Аудит качества проверяет все числа</a:t>
-            </a:r>
-          </a:p>
-          <a:p>
-            <a:pPr algn="l">
-              <a:spcAft>
-                <a:spcPts val="300"/>
-              </a:spcAft>
-              <a:defRPr sz="1200">
-                <a:solidFill>
-                  <a:srgbClr val="000000"/>
-                </a:solidFill>
-                <a:latin typeface="Play"/>
-                <a:ea typeface="Play"/>
-                <a:cs typeface="Play"/>
-              </a:defRPr>
-            </a:pPr>
-            <a:r>
-              <a:rPr sz="1200">
-                <a:solidFill>
-                  <a:srgbClr val="000000"/>
-                </a:solidFill>
-                <a:latin typeface="Play"/>
-                <a:ea typeface="Play"/>
-                <a:cs typeface="Play"/>
-              </a:rPr>
-              <a:t>• Экспорт готовых колод в pptx, pdf, html</a:t>
-            </a:r>
-          </a:p>
-        </p:txBody>
-      </p:sp>
-    </p:spTree>
-  </p:cSld>
-  <p:clrMapOvr>
-    <a:masterClrMapping/>
-  </p:clrMapOvr>
-</p:sld>
-</file>
-
-<file path=ppt/slides/slide62.xml><?xml version="1.0" encoding="utf-8"?>
-<p:sld xmlns:a="http://schemas.openxmlformats.org/drawingml/2006/main" xmlns:p="http://schemas.openxmlformats.org/presentationml/2006/main" xmlns:r="http://schemas.openxmlformats.org/officeDocument/2006/relationships">
-  <p:cSld>
-    <p:spTree>
-      <p:nvGrpSpPr>
-        <p:cNvPr id="1" name=""/>
-        <p:cNvGrpSpPr/>
-        <p:nvPr/>
-      </p:nvGrpSpPr>
-      <p:grpSpPr/>
-      <p:sp>
-        <p:nvSpPr>
-          <p:cNvPr id="532" name="Google Shape;532;p53"/>
-          <p:cNvSpPr/>
-          <p:nvPr/>
-        </p:nvSpPr>
-        <p:spPr>
-          <a:xfrm>
-            <a:off x="303214" y="1022533"/>
-            <a:ext cx="8451939" cy="1433588"/>
-          </a:xfrm>
-          <a:prstGeom prst="rect">
-            <a:avLst/>
-          </a:prstGeom>
-          <a:noFill/>
-          <a:ln>
-            <a:noFill/>
-          </a:ln>
-        </p:spPr>
-        <p:txBody>
-          <a:bodyPr anchorCtr="0" anchor="ctr" bIns="91425" lIns="91425" spcFirstLastPara="1" rIns="91425" wrap="square" tIns="91425">
-            <a:noAutofit/>
-          </a:bodyPr>
-          <a:lstStyle/>
-          <a:p>
-            <a:pPr indent="0" lvl="0" marL="0" rtl="0" algn="l">
-              <a:spcBef>
-                <a:spcPts val="0"/>
-              </a:spcBef>
-              <a:spcAft>
-                <a:spcPts val="0"/>
-              </a:spcAft>
-              <a:buNone/>
-            </a:pPr>
-            <a:r>
-              <a:t/>
-            </a:r>
-            <a:endParaRPr/>
-          </a:p>
-        </p:txBody>
-      </p:sp>
-      <p:sp>
-        <p:nvSpPr>
-          <p:cNvPr id="549" name="Google Shape;549;p53"/>
-          <p:cNvSpPr/>
-          <p:nvPr/>
-        </p:nvSpPr>
-        <p:spPr>
-          <a:xfrm>
-            <a:off x="7359897" y="1022533"/>
-            <a:ext cx="1395256" cy="1433588"/>
-          </a:xfrm>
-          <a:prstGeom prst="rect">
-            <a:avLst/>
-          </a:prstGeom>
-          <a:noFill/>
-          <a:ln>
-            <a:noFill/>
-          </a:ln>
-        </p:spPr>
-        <p:txBody>
-          <a:bodyPr anchorCtr="0" anchor="ctr" bIns="91425" lIns="91425" spcFirstLastPara="1" rIns="91425" wrap="square" tIns="91425">
-            <a:noAutofit/>
-          </a:bodyPr>
-          <a:lstStyle/>
-          <a:p>
-            <a:pPr indent="0" lvl="0" marL="0" rtl="0" algn="l">
-              <a:spcBef>
-                <a:spcPts val="0"/>
-              </a:spcBef>
-              <a:spcAft>
-                <a:spcPts val="0"/>
-              </a:spcAft>
-              <a:buNone/>
-            </a:pPr>
-            <a:r>
-              <a:t/>
-            </a:r>
-            <a:endParaRPr/>
-          </a:p>
-        </p:txBody>
-      </p:sp>
-      <p:sp>
-        <p:nvSpPr>
-          <p:cNvPr id="553" name="Google Shape;553;p53"/>
-          <p:cNvSpPr/>
-          <p:nvPr/>
-        </p:nvSpPr>
-        <p:spPr>
-          <a:xfrm>
-            <a:off x="276488" y="2955549"/>
-            <a:ext cx="8451939" cy="1433588"/>
-          </a:xfrm>
-          <a:prstGeom prst="rect">
-            <a:avLst/>
-          </a:prstGeom>
-          <a:noFill/>
-          <a:ln>
-            <a:noFill/>
-          </a:ln>
-        </p:spPr>
-        <p:txBody>
-          <a:bodyPr anchorCtr="0" anchor="ctr" bIns="91425" lIns="91425" spcFirstLastPara="1" rIns="91425" wrap="square" tIns="91425">
-            <a:noAutofit/>
-          </a:bodyPr>
-          <a:lstStyle/>
-          <a:p>
-            <a:pPr indent="0" lvl="0" marL="0" rtl="0" algn="l">
-              <a:spcBef>
-                <a:spcPts val="0"/>
-              </a:spcBef>
-              <a:spcAft>
-                <a:spcPts val="0"/>
-              </a:spcAft>
-              <a:buNone/>
-            </a:pPr>
-            <a:r>
-              <a:t/>
-            </a:r>
-            <a:endParaRPr/>
-          </a:p>
-        </p:txBody>
-      </p:sp>
-      <p:sp>
-        <p:nvSpPr>
-          <p:cNvPr id="554" name="Google Shape;554;p53"/>
-          <p:cNvSpPr/>
-          <p:nvPr/>
-        </p:nvSpPr>
-        <p:spPr>
-          <a:xfrm>
-            <a:off x="303214" y="2797849"/>
-            <a:ext cx="8451939" cy="1433588"/>
-          </a:xfrm>
-          <a:prstGeom prst="rect">
-            <a:avLst/>
-          </a:prstGeom>
-          <a:noFill/>
-          <a:ln>
-            <a:noFill/>
-          </a:ln>
-        </p:spPr>
-        <p:txBody>
-          <a:bodyPr anchorCtr="0" anchor="ctr" bIns="91425" lIns="91425" spcFirstLastPara="1" rIns="91425" wrap="square" tIns="91425">
-            <a:noAutofit/>
-          </a:bodyPr>
-          <a:lstStyle/>
-          <a:p>
-            <a:pPr indent="0" lvl="0" marL="0" rtl="0" algn="l">
-              <a:spcBef>
-                <a:spcPts val="0"/>
-              </a:spcBef>
-              <a:spcAft>
-                <a:spcPts val="0"/>
-              </a:spcAft>
-              <a:buNone/>
-            </a:pPr>
-            <a:r>
-              <a:t/>
-            </a:r>
-            <a:endParaRPr/>
-          </a:p>
-        </p:txBody>
-      </p:sp>
-      <p:sp>
-        <p:nvSpPr>
-          <p:cNvPr id="571" name="Google Shape;571;p53"/>
-          <p:cNvSpPr/>
-          <p:nvPr/>
-        </p:nvSpPr>
-        <p:spPr>
-          <a:xfrm>
-            <a:off x="7359897" y="2797849"/>
-            <a:ext cx="1395256" cy="1433588"/>
-          </a:xfrm>
-          <a:prstGeom prst="rect">
-            <a:avLst/>
-          </a:prstGeom>
-          <a:noFill/>
-          <a:ln>
-            <a:noFill/>
-          </a:ln>
-        </p:spPr>
-        <p:txBody>
-          <a:bodyPr anchorCtr="0" anchor="ctr" bIns="91425" lIns="91425" spcFirstLastPara="1" rIns="91425" wrap="square" tIns="91425">
-            <a:noAutofit/>
-          </a:bodyPr>
-          <a:lstStyle/>
-          <a:p>
-            <a:pPr indent="0" lvl="0" marL="0" rtl="0" algn="l">
-              <a:spcBef>
-                <a:spcPts val="0"/>
-              </a:spcBef>
-              <a:spcAft>
-                <a:spcPts val="0"/>
-              </a:spcAft>
-              <a:buNone/>
-            </a:pPr>
-            <a:r>
-              <a:t/>
-            </a:r>
-            <a:endParaRPr/>
-          </a:p>
-        </p:txBody>
-      </p:sp>
-      <p:sp>
-        <p:nvSpPr>
-          <p:cNvPr id="572" name="title"/>
-          <p:cNvSpPr txBox="1"/>
-          <p:nvPr/>
-        </p:nvSpPr>
-        <p:spPr>
-          <a:xfrm>
-            <a:off x="274320" y="282943"/>
-            <a:ext cx="6792986" cy="617220"/>
-          </a:xfrm>
-          <a:prstGeom prst="rect">
-            <a:avLst/>
-          </a:prstGeom>
-          <a:noFill/>
-        </p:spPr>
-        <p:txBody>
-          <a:bodyPr wrap="square" lIns="76200" rIns="76200" tIns="50800" bIns="50800">
-            <a:spAutoFit/>
-          </a:bodyPr>
-          <a:lstStyle/>
-          <a:p>
-            <a:pPr algn="l">
-              <a:spcAft>
-                <a:spcPts val="300"/>
-              </a:spcAft>
-              <a:defRPr sz="2705">
-                <a:solidFill>
-                  <a:srgbClr val="000000"/>
-                </a:solidFill>
-                <a:latin typeface="Play"/>
-                <a:ea typeface="Play"/>
-                <a:cs typeface="Play"/>
-              </a:defRPr>
-            </a:pPr>
-            <a:r>
-              <a:rPr sz="2705">
-                <a:solidFill>
-                  <a:srgbClr val="000000"/>
-                </a:solidFill>
-                <a:latin typeface="Play"/>
-                <a:ea typeface="Play"/>
-                <a:cs typeface="Play"/>
-              </a:rPr>
-              <a:t>Ресурсы и сроки</a:t>
-            </a:r>
-          </a:p>
-        </p:txBody>
-      </p:sp>
-      <p:sp>
-        <p:nvSpPr>
-          <p:cNvPr id="573" name="lead"/>
-          <p:cNvSpPr txBox="1"/>
-          <p:nvPr/>
-        </p:nvSpPr>
-        <p:spPr>
-          <a:xfrm>
-            <a:off x="274320" y="1414513"/>
-            <a:ext cx="6792986" cy="969634"/>
-          </a:xfrm>
-          <a:prstGeom prst="rect">
-            <a:avLst/>
-          </a:prstGeom>
-          <a:noFill/>
-        </p:spPr>
-        <p:txBody>
-          <a:bodyPr wrap="square" lIns="76200" rIns="76200" tIns="50800" bIns="50800">
-            <a:spAutoFit/>
-          </a:bodyPr>
-          <a:lstStyle/>
-          <a:p>
-            <a:pPr algn="ctr">
-              <a:spcAft>
-                <a:spcPts val="300"/>
-              </a:spcAft>
-              <a:defRPr sz="2438">
-                <a:solidFill>
-                  <a:srgbClr val="000000"/>
-                </a:solidFill>
-                <a:latin typeface="Play"/>
-                <a:ea typeface="Play"/>
-                <a:cs typeface="Play"/>
-              </a:defRPr>
-            </a:pPr>
-            <a:r>
-              <a:rPr sz="2438">
-                <a:solidFill>
-                  <a:srgbClr val="000000"/>
-                </a:solidFill>
-                <a:latin typeface="Play"/>
-                <a:ea typeface="Play"/>
-                <a:cs typeface="Play"/>
-              </a:rPr>
-              <a:t>Сервис работает на 2 vCPU / 2 ГБ RAM</a:t>
-            </a:r>
-          </a:p>
-        </p:txBody>
-      </p:sp>
-      <p:sp>
-        <p:nvSpPr>
-          <p:cNvPr id="574" name="body"/>
-          <p:cNvSpPr txBox="1"/>
-          <p:nvPr/>
-        </p:nvSpPr>
-        <p:spPr>
-          <a:xfrm>
-            <a:off x="274320" y="2555259"/>
-            <a:ext cx="6792986" cy="1711119"/>
-          </a:xfrm>
-          <a:prstGeom prst="rect">
-            <a:avLst/>
-          </a:prstGeom>
-          <a:noFill/>
-        </p:spPr>
-        <p:txBody>
-          <a:bodyPr wrap="square" lIns="76200" rIns="76200" tIns="50800" bIns="50800">
-            <a:spAutoFit/>
-          </a:bodyPr>
-          <a:lstStyle/>
-          <a:p>
-            <a:pPr algn="l">
-              <a:spcAft>
-                <a:spcPts val="300"/>
-              </a:spcAft>
-              <a:defRPr sz="1800">
-                <a:solidFill>
-                  <a:srgbClr val="000000"/>
-                </a:solidFill>
-                <a:latin typeface="Play"/>
-                <a:ea typeface="Play"/>
-                <a:cs typeface="Play"/>
-              </a:defRPr>
-            </a:pPr>
-            <a:r>
-              <a:rPr sz="1800">
-                <a:solidFill>
-                  <a:srgbClr val="000000"/>
-                </a:solidFill>
-                <a:latin typeface="Play"/>
-                <a:ea typeface="Play"/>
-                <a:cs typeface="Play"/>
-              </a:rPr>
-              <a:t>• Инференс за 6 недель стоит 1 400 руб</a:t>
-            </a:r>
-          </a:p>
-          <a:p>
-            <a:pPr algn="l">
-              <a:spcAft>
-                <a:spcPts val="300"/>
-              </a:spcAft>
-              <a:defRPr sz="1800">
-                <a:solidFill>
-                  <a:srgbClr val="000000"/>
-                </a:solidFill>
-                <a:latin typeface="Play"/>
-                <a:ea typeface="Play"/>
-                <a:cs typeface="Play"/>
-              </a:defRPr>
-            </a:pPr>
-            <a:r>
-              <a:rPr sz="1800">
-                <a:solidFill>
-                  <a:srgbClr val="000000"/>
-                </a:solidFill>
-                <a:latin typeface="Play"/>
-                <a:ea typeface="Play"/>
-                <a:cs typeface="Play"/>
-              </a:rPr>
-              <a:t>• План: Q3 2026 подключить 4 команды, домен и HTTPS</a:t>
-            </a:r>
-          </a:p>
-          <a:p>
-            <a:pPr algn="l">
-              <a:spcAft>
-                <a:spcPts val="300"/>
-              </a:spcAft>
-              <a:defRPr sz="1800">
-                <a:solidFill>
-                  <a:srgbClr val="000000"/>
-                </a:solidFill>
-                <a:latin typeface="Play"/>
-                <a:ea typeface="Play"/>
-                <a:cs typeface="Play"/>
-              </a:defRPr>
-            </a:pPr>
-            <a:r>
-              <a:rPr sz="1800">
-                <a:solidFill>
-                  <a:srgbClr val="000000"/>
-                </a:solidFill>
-                <a:latin typeface="Play"/>
-                <a:ea typeface="Play"/>
-                <a:cs typeface="Play"/>
-              </a:rPr>
-              <a:t>• Q4 2026 доступ для всей компании, интеграция с хранилищем</a:t>
-            </a:r>
-          </a:p>
-          <a:p>
-            <a:pPr algn="l">
-              <a:spcAft>
-                <a:spcPts val="300"/>
-              </a:spcAft>
-              <a:defRPr sz="1800">
-                <a:solidFill>
-                  <a:srgbClr val="000000"/>
-                </a:solidFill>
-                <a:latin typeface="Play"/>
-                <a:ea typeface="Play"/>
-                <a:cs typeface="Play"/>
-              </a:defRPr>
-            </a:pPr>
-            <a:r>
-              <a:rPr sz="1800">
-                <a:solidFill>
-                  <a:srgbClr val="000000"/>
-                </a:solidFill>
-                <a:latin typeface="Play"/>
-                <a:ea typeface="Play"/>
-                <a:cs typeface="Play"/>
-              </a:rPr>
-              <a:t>• Q1 2027 генерация иллюстраций под стиль шаблона</a:t>
-            </a:r>
-          </a:p>
-        </p:txBody>
-      </p:sp>
-    </p:spTree>
-  </p:cSld>
-  <p:clrMapOvr>
-    <a:masterClrMapping/>
-  </p:clrMapOvr>
-</p:sld>
-</file>
-
 <file path=ppt/slides/slide63.xml><?xml version="1.0" encoding="utf-8"?>
 <p:sld xmlns:a="http://schemas.openxmlformats.org/drawingml/2006/main" xmlns:p="http://schemas.openxmlformats.org/presentationml/2006/main" xmlns:r="http://schemas.openxmlformats.org/officeDocument/2006/relationships">
   <p:cSld>
@@ -9501,7 +9021,7 @@
                 <a:ea typeface="Play"/>
                 <a:cs typeface="Play"/>
               </a:rPr>
-              <a:t>Риски</a:t>
+              <a:t>Ключевые риски и меры</a:t>
             </a:r>
           </a:p>
         </p:txBody>
@@ -9515,7 +9035,7 @@
         <p:spPr>
           <a:xfrm>
             <a:off x="274320" y="1476493"/>
-            <a:ext cx="6792986" cy="463192"/>
+            <a:ext cx="6792986" cy="443739"/>
           </a:xfrm>
           <a:prstGeom prst="rect">
             <a:avLst/>
@@ -9532,7 +9052,7 @@
               <a:spcAft>
                 <a:spcPts val="300"/>
               </a:spcAft>
-              <a:defRPr sz="1600">
+              <a:defRPr sz="1800">
                 <a:solidFill>
                   <a:srgbClr val="000000"/>
                 </a:solidFill>
@@ -9542,7 +9062,7 @@
               </a:defRPr>
             </a:pPr>
             <a:r>
-              <a:rPr sz="1600">
+              <a:rPr sz="1800">
                 <a:solidFill>
                   <a:srgbClr val="000000"/>
                 </a:solidFill>
@@ -9550,7 +9070,7 @@
                 <a:ea typeface="Play"/>
                 <a:cs typeface="Play"/>
               </a:rPr>
-              <a:t>Модель может выдумать цифры, аудит проверяет источники</a:t>
+              <a:t>Модель может выдумать цифры – аудит проверяет</a:t>
             </a:r>
           </a:p>
         </p:txBody>
@@ -9599,7 +9119,7 @@
                 <a:ea typeface="Play"/>
                 <a:cs typeface="Play"/>
               </a:rPr>
-              <a:t>• Плохой шаблон приводит к использованию рабочей области</a:t>
+              <a:t>• Плохой шаблон – сервис использует рабочую область</a:t>
             </a:r>
           </a:p>
           <a:p>
@@ -9625,7 +9145,7 @@
                 <a:ea typeface="Play"/>
                 <a:cs typeface="Play"/>
               </a:rPr>
-              <a:t>• Нагрузка выше 20 задач требует внешней очереди</a:t>
+              <a:t>• Нагрузка &gt;20 задач – нужна внешняя очередь</a:t>
             </a:r>
           </a:p>
         </p:txBody>
@@ -9656,8 +9176,8 @@
         </p:nvSpPr>
         <p:spPr>
           <a:xfrm>
-            <a:off x="445963" y="1555901"/>
-            <a:ext cx="4627118" cy="2811852"/>
+            <a:off x="1543608" y="159030"/>
+            <a:ext cx="7202525" cy="4133046"/>
           </a:xfrm>
           <a:prstGeom prst="roundRect">
             <a:avLst/>
@@ -9702,8 +9222,8 @@
         </p:nvSpPr>
         <p:spPr>
           <a:xfrm>
-            <a:off x="572963" y="1682901"/>
-            <a:ext cx="4373118" cy="1183640"/>
+            <a:off x="1670608" y="286030"/>
+            <a:ext cx="6948525" cy="1183640"/>
           </a:xfrm>
           <a:prstGeom prst="rect">
             <a:avLst/>
@@ -9738,7 +9258,7 @@
                 <a:ea typeface="Play"/>
                 <a:cs typeface="Play"/>
               </a:rPr>
-              <a:t>Решение: запуск на всю компанию</a:t>
+              <a:t>Решение: запуск сервиса на всю компанию</a:t>
             </a:r>
           </a:p>
         </p:txBody>
@@ -9751,8 +9271,8 @@
         </p:nvSpPr>
         <p:spPr>
           <a:xfrm>
-            <a:off x="572963" y="3046564"/>
-            <a:ext cx="4373118" cy="613739"/>
+            <a:off x="1670608" y="1649692"/>
+            <a:ext cx="6948525" cy="1442333"/>
           </a:xfrm>
           <a:prstGeom prst="rect">
             <a:avLst/>
@@ -9769,7 +9289,7 @@
               <a:spcAft>
                 <a:spcPts val="300"/>
               </a:spcAft>
-              <a:defRPr sz="1400">
+              <a:defRPr sz="2705">
                 <a:solidFill>
                   <a:srgbClr val="000000"/>
                 </a:solidFill>
@@ -9779,7 +9299,7 @@
               </a:defRPr>
             </a:pPr>
             <a:r>
-              <a:rPr sz="1400">
+              <a:rPr sz="2705">
                 <a:solidFill>
                   <a:srgbClr val="000000"/>
                 </a:solidFill>
@@ -9787,7 +9307,7 @@
                 <a:ea typeface="Play"/>
                 <a:cs typeface="Play"/>
               </a:rPr>
-              <a:t>Попросить решение о запуске на всю компанию</a:t>
+              <a:t>Q3 2026 подключить 4 команды, Q4 2026 доступ для всей компании, Q1 2027 генерация иллюстраций</a:t>
             </a:r>
           </a:p>
         </p:txBody>
@@ -9800,8 +9320,8 @@
         </p:nvSpPr>
         <p:spPr>
           <a:xfrm>
-            <a:off x="572963" y="3742914"/>
-            <a:ext cx="4373118" cy="680495"/>
+            <a:off x="1670608" y="3258448"/>
+            <a:ext cx="6948525" cy="1164961"/>
           </a:xfrm>
           <a:prstGeom prst="rect">
             <a:avLst/>
@@ -9818,7 +9338,7 @@
               <a:spcAft>
                 <a:spcPts val="300"/>
               </a:spcAft>
-              <a:defRPr sz="1200">
+              <a:defRPr sz="2438">
                 <a:solidFill>
                   <a:srgbClr val="000000"/>
                 </a:solidFill>
@@ -9828,7 +9348,7 @@
               </a:defRPr>
             </a:pPr>
             <a:r>
-              <a:rPr sz="1200">
+              <a:rPr sz="2438">
                 <a:solidFill>
                   <a:srgbClr val="000000"/>
                 </a:solidFill>
@@ -9836,7 +9356,7 @@
                 <a:ea typeface="Play"/>
                 <a:cs typeface="Play"/>
               </a:rPr>
-              <a:t>• Ожидаем сокращения времени сборки до 4 мин</a:t>
+              <a:t>• Требуем одобрение запуска и ресурсы</a:t>
             </a:r>
           </a:p>
           <a:p>
@@ -9844,7 +9364,7 @@
               <a:spcAft>
                 <a:spcPts val="300"/>
               </a:spcAft>
-              <a:defRPr sz="1200">
+              <a:defRPr sz="2438">
                 <a:solidFill>
                   <a:srgbClr val="000000"/>
                 </a:solidFill>
@@ -9854,7 +9374,7 @@
               </a:defRPr>
             </a:pPr>
             <a:r>
-              <a:rPr sz="1200">
+              <a:rPr sz="2438">
                 <a:solidFill>
                   <a:srgbClr val="000000"/>
                 </a:solidFill>
@@ -9862,7 +9382,7 @@
                 <a:ea typeface="Play"/>
                 <a:cs typeface="Play"/>
               </a:rPr>
-              <a:t>• Планируем интеграцию с корпоративными системами</a:t>
+              <a:t>• Ожидаем ускорение и стандартизацию</a:t>
             </a:r>
           </a:p>
         </p:txBody>

--- a/samples/VK_Tech_шаблон__focus.pptx
+++ b/samples/VK_Tech_шаблон__focus.pptx
@@ -279,7 +279,7 @@
               <c:strCache>
                 <c:ptCount val="1"/>
                 <c:pt idx="0">
-                  <c:v>Время (мин)</c:v>
+                  <c:v>До</c:v>
                 </c:pt>
               </c:strCache>
             </c:strRef>
@@ -296,36 +296,114 @@
           </c:spPr>
           <c:cat>
             <c:strRef>
-              <c:f>Sheet1!$A$2:$A$3</c:f>
+              <c:f>Sheet1!$A$2:$A$5</c:f>
               <c:strCache>
-                <c:ptCount val="2"/>
+                <c:ptCount val="4"/>
                 <c:pt idx="0">
-                  <c:v>Текущее</c:v>
+                  <c:v>Время на колоду (мин)</c:v>
                 </c:pt>
                 <c:pt idx="1">
-                  <c:v>Пилот</c:v>
+                  <c:v>Время до первой версии (дн)</c:v>
+                </c:pt>
+                <c:pt idx="2">
+                  <c:v>Нарушения стиля</c:v>
+                </c:pt>
+                <c:pt idx="3">
+                  <c:v>Запросы закрыты/нед</c:v>
                 </c:pt>
               </c:strCache>
             </c:strRef>
           </c:cat>
           <c:val>
             <c:numRef>
-              <c:f>Sheet1!$B$2:$B$3</c:f>
+              <c:f>Sheet1!$B$2:$B$5</c:f>
               <c:numCache>
                 <c:formatCode>General</c:formatCode>
-                <c:ptCount val="2"/>
+                <c:ptCount val="4"/>
                 <c:pt idx="0">
                   <c:v>186.0</c:v>
                 </c:pt>
                 <c:pt idx="1">
+                  <c:v>6.0</c:v>
+                </c:pt>
+                <c:pt idx="2">
+                  <c:v>19.0</c:v>
+                </c:pt>
+                <c:pt idx="3">
+                  <c:v>11.0</c:v>
+                </c:pt>
+              </c:numCache>
+            </c:numRef>
+          </c:val>
+        </c:ser>
+        <c:ser>
+          <c:idx val="1"/>
+          <c:order val="1"/>
+          <c:tx>
+            <c:strRef>
+              <c:f>Sheet1!$C$1</c:f>
+              <c:strCache>
+                <c:ptCount val="1"/>
+                <c:pt idx="0">
+                  <c:v>После</c:v>
+                </c:pt>
+              </c:strCache>
+            </c:strRef>
+          </c:tx>
+          <c:spPr>
+            <a:solidFill>
+              <a:srgbClr val="FFD91D"/>
+            </a:solidFill>
+            <a:ln>
+              <a:solidFill>
+                <a:srgbClr val="FFD91D"/>
+              </a:solidFill>
+            </a:ln>
+          </c:spPr>
+          <c:cat>
+            <c:strRef>
+              <c:f>Sheet1!$A$2:$A$5</c:f>
+              <c:strCache>
+                <c:ptCount val="4"/>
+                <c:pt idx="0">
+                  <c:v>Время на колоду (мин)</c:v>
+                </c:pt>
+                <c:pt idx="1">
+                  <c:v>Время до первой версии (дн)</c:v>
+                </c:pt>
+                <c:pt idx="2">
+                  <c:v>Нарушения стиля</c:v>
+                </c:pt>
+                <c:pt idx="3">
+                  <c:v>Запросы закрыты/нед</c:v>
+                </c:pt>
+              </c:strCache>
+            </c:strRef>
+          </c:cat>
+          <c:val>
+            <c:numRef>
+              <c:f>Sheet1!$C$2:$C$5</c:f>
+              <c:numCache>
+                <c:formatCode>General</c:formatCode>
+                <c:ptCount val="4"/>
+                <c:pt idx="0">
                   <c:v>4.0</c:v>
+                </c:pt>
+                <c:pt idx="1">
+                  <c:v>1.0</c:v>
+                </c:pt>
+                <c:pt idx="2">
+                  <c:v>2.0</c:v>
+                </c:pt>
+                <c:pt idx="3">
+                  <c:v>38.0</c:v>
                 </c:pt>
               </c:numCache>
             </c:numRef>
           </c:val>
         </c:ser>
         <c:dLbls>
-          <c:numFmt formatCode="0&quot; мин&quot;" sourceLinked="0"/>
+          <c:numFmt formatCode="0" sourceLinked="0"/>
           <c:txPr>
             <a:bodyPr wrap="none"/>
             <a:lstStyle/>
@@ -402,31 +480,6 @@
             </a:ln>
           </c:spPr>
         </c:majorGridlines>
-        <c:title>
-          <c:tx>
-            <c:rich>
-              <a:bodyPr rot="0" vert="horz"/>
-              <a:lstStyle/>
-              <a:p>
-                <a:pPr>
-                  <a:defRPr sz="1100" b="0">
-                    <a:solidFill>
-                      <a:srgbClr val="000000"/>
-                    </a:solidFill>
-                    <a:latin typeface="Play"/>
-                    <a:ea typeface="Play"/>
-                    <a:cs typeface="Play"/>
-                  </a:defRPr>
-                </a:pPr>
-                <a:r>
-                  <a:t>Время (мин), мин</a:t>
-                </a:r>
-              </a:p>
-            </c:rich>
-          </c:tx>
-          <c:layout/>
-          <c:overlay val="0"/>
-        </c:title>
         <c:majorTickMark val="out"/>
         <c:minorTickMark val="none"/>
         <c:tickLblPos val="nextTo"/>
@@ -450,642 +503,10 @@
         <c:crosses val="autoZero"/>
       </c:valAx>
     </c:plotArea>
-    <c:dispBlanksAs val="gap"/>
-  </c:chart>
-  <c:txPr>
-    <a:bodyPr/>
-    <a:lstStyle/>
-    <a:p>
-      <a:pPr>
-        <a:defRPr sz="1200" b="0">
-          <a:solidFill>
-            <a:srgbClr val="000000"/>
-          </a:solidFill>
-          <a:latin typeface="Play"/>
-          <a:ea typeface="Play"/>
-          <a:cs typeface="Play"/>
-        </a:defRPr>
-      </a:pPr>
-      <a:endParaRPr lang="en-US"/>
-    </a:p>
-  </c:txPr>
-  <c:externalData r:id="rId1">
-    <c:autoUpdate val="0"/>
-  </c:externalData>
-</c:chartSpace>
-</file>
-
-<file path=ppt/charts/chart2.xml><?xml version="1.0" encoding="utf-8"?>
-<c:chartSpace xmlns:c="http://schemas.openxmlformats.org/drawingml/2006/chart" xmlns:a="http://schemas.openxmlformats.org/drawingml/2006/main" xmlns:r="http://schemas.openxmlformats.org/officeDocument/2006/relationships">
-  <c:date1904 val="0"/>
-  <c:chart>
-    <c:autoTitleDeleted val="1"/>
-    <c:plotArea>
-      <c:barChart>
-        <c:barDir val="col"/>
-        <c:grouping val="clustered"/>
-        <c:ser>
-          <c:idx val="0"/>
-          <c:order val="0"/>
-          <c:tx>
-            <c:strRef>
-              <c:f>Sheet1!$B$1</c:f>
-              <c:strCache>
-                <c:ptCount val="1"/>
-                <c:pt idx="0">
-                  <c:v>Нарушения</c:v>
-                </c:pt>
-              </c:strCache>
-            </c:strRef>
-          </c:tx>
-          <c:spPr>
-            <a:solidFill>
-              <a:srgbClr val="0077FF"/>
-            </a:solidFill>
-            <a:ln>
-              <a:solidFill>
-                <a:srgbClr val="0077FF"/>
-              </a:solidFill>
-            </a:ln>
-          </c:spPr>
-          <c:cat>
-            <c:strRef>
-              <c:f>Sheet1!$A$2:$A$3</c:f>
-              <c:strCache>
-                <c:ptCount val="2"/>
-                <c:pt idx="0">
-                  <c:v>Текущее</c:v>
-                </c:pt>
-                <c:pt idx="1">
-                  <c:v>Пилот</c:v>
-                </c:pt>
-              </c:strCache>
-            </c:strRef>
-          </c:cat>
-          <c:val>
-            <c:numRef>
-              <c:f>Sheet1!$B$2:$B$3</c:f>
-              <c:numCache>
-                <c:formatCode>General</c:formatCode>
-                <c:ptCount val="2"/>
-                <c:pt idx="0">
-                  <c:v>19.0</c:v>
-                </c:pt>
-                <c:pt idx="1">
-                  <c:v>2.0</c:v>
-                </c:pt>
-              </c:numCache>
-            </c:numRef>
-          </c:val>
-        </c:ser>
-        <c:dLbls>
-          <c:numFmt formatCode="0&quot; колоды&quot;" sourceLinked="0"/>
-          <c:txPr>
-            <a:bodyPr wrap="none"/>
-            <a:lstStyle/>
-            <a:p>
-              <a:pPr>
-                <a:defRPr sz="1100" b="0">
-                  <a:solidFill>
-                    <a:srgbClr val="000000"/>
-                  </a:solidFill>
-                  <a:latin typeface="Play"/>
-                  <a:ea typeface="Play"/>
-                  <a:cs typeface="Play"/>
-                </a:defRPr>
-              </a:pPr>
-            </a:p>
-          </c:txPr>
-          <c:dLblPos val="outEnd"/>
-          <c:showLegendKey val="0"/>
-          <c:showVal val="1"/>
-          <c:showCatName val="0"/>
-          <c:showSerName val="0"/>
-          <c:showPercent val="0"/>
-          <c:showBubbleSize val="0"/>
-          <c:showLeaderLines val="1"/>
-        </c:dLbls>
-        <c:gapWidth val="60"/>
-        <c:axId val="-2068027336"/>
-        <c:axId val="-2113994440"/>
-      </c:barChart>
-      <c:catAx>
-        <c:axId val="-2068027336"/>
-        <c:scaling>
-          <c:orientation val="minMax"/>
-        </c:scaling>
-        <c:delete val="0"/>
-        <c:axPos val="b"/>
-        <c:majorTickMark val="out"/>
-        <c:minorTickMark val="none"/>
-        <c:tickLblPos val="nextTo"/>
-        <c:txPr>
-          <a:bodyPr/>
-          <a:lstStyle/>
-          <a:p>
-            <a:pPr>
-              <a:defRPr sz="1100" b="0">
-                <a:solidFill>
-                  <a:srgbClr val="000000"/>
-                </a:solidFill>
-                <a:latin typeface="Play"/>
-                <a:ea typeface="Play"/>
-                <a:cs typeface="Play"/>
-              </a:defRPr>
-            </a:pPr>
-          </a:p>
-        </c:txPr>
-        <c:crossAx val="-2113994440"/>
-        <c:crosses val="autoZero"/>
-        <c:auto val="1"/>
-        <c:lblAlgn val="ctr"/>
-        <c:lblOffset val="100"/>
-        <c:noMultiLvlLbl val="0"/>
-      </c:catAx>
-      <c:valAx>
-        <c:axId val="-2113994440"/>
-        <c:scaling/>
-        <c:delete val="0"/>
-        <c:axPos val="l"/>
-        <c:majorGridlines>
-          <c:spPr>
-            <a:ln w="9525">
-              <a:solidFill>
-                <a:srgbClr val="D1D1D1"/>
-              </a:solidFill>
-            </a:ln>
-          </c:spPr>
-        </c:majorGridlines>
-        <c:title>
-          <c:tx>
-            <c:rich>
-              <a:bodyPr rot="0" vert="horz"/>
-              <a:lstStyle/>
-              <a:p>
-                <a:pPr>
-                  <a:defRPr sz="1100" b="0">
-                    <a:solidFill>
-                      <a:srgbClr val="000000"/>
-                    </a:solidFill>
-                    <a:latin typeface="Play"/>
-                    <a:ea typeface="Play"/>
-                    <a:cs typeface="Play"/>
-                  </a:defRPr>
-                </a:pPr>
-                <a:r>
-                  <a:t>Нарушения, колоды</a:t>
-                </a:r>
-              </a:p>
-            </c:rich>
-          </c:tx>
-          <c:layout/>
-          <c:overlay val="0"/>
-        </c:title>
-        <c:majorTickMark val="out"/>
-        <c:minorTickMark val="none"/>
-        <c:tickLblPos val="nextTo"/>
-        <c:txPr>
-          <a:bodyPr/>
-          <a:lstStyle/>
-          <a:p>
-            <a:pPr>
-              <a:defRPr sz="1100" b="0">
-                <a:solidFill>
-                  <a:srgbClr val="000000"/>
-                </a:solidFill>
-                <a:latin typeface="Play"/>
-                <a:ea typeface="Play"/>
-                <a:cs typeface="Play"/>
-              </a:defRPr>
-            </a:pPr>
-          </a:p>
-        </c:txPr>
-        <c:crossAx val="-2068027336"/>
-        <c:crosses val="autoZero"/>
-      </c:valAx>
-    </c:plotArea>
-    <c:dispBlanksAs val="gap"/>
-  </c:chart>
-  <c:txPr>
-    <a:bodyPr/>
-    <a:lstStyle/>
-    <a:p>
-      <a:pPr>
-        <a:defRPr sz="1200" b="0">
-          <a:solidFill>
-            <a:srgbClr val="000000"/>
-          </a:solidFill>
-          <a:latin typeface="Play"/>
-          <a:ea typeface="Play"/>
-          <a:cs typeface="Play"/>
-        </a:defRPr>
-      </a:pPr>
-      <a:endParaRPr lang="en-US"/>
-    </a:p>
-  </c:txPr>
-  <c:externalData r:id="rId1">
-    <c:autoUpdate val="0"/>
-  </c:externalData>
-</c:chartSpace>
-</file>
-
-<file path=ppt/charts/chart3.xml><?xml version="1.0" encoding="utf-8"?>
-<c:chartSpace xmlns:c="http://schemas.openxmlformats.org/drawingml/2006/chart" xmlns:a="http://schemas.openxmlformats.org/drawingml/2006/main" xmlns:r="http://schemas.openxmlformats.org/officeDocument/2006/relationships">
-  <c:date1904 val="0"/>
-  <c:chart>
-    <c:autoTitleDeleted val="1"/>
-    <c:plotArea>
-      <c:barChart>
-        <c:barDir val="col"/>
-        <c:grouping val="clustered"/>
-        <c:ser>
-          <c:idx val="0"/>
-          <c:order val="0"/>
-          <c:tx>
-            <c:strRef>
-              <c:f>Sheet1!$B$1</c:f>
-              <c:strCache>
-                <c:ptCount val="1"/>
-                <c:pt idx="0">
-                  <c:v>Запросы</c:v>
-                </c:pt>
-              </c:strCache>
-            </c:strRef>
-          </c:tx>
-          <c:spPr>
-            <a:solidFill>
-              <a:srgbClr val="0077FF"/>
-            </a:solidFill>
-            <a:ln>
-              <a:solidFill>
-                <a:srgbClr val="0077FF"/>
-              </a:solidFill>
-            </a:ln>
-          </c:spPr>
-          <c:cat>
-            <c:strRef>
-              <c:f>Sheet1!$A$2:$A$3</c:f>
-              <c:strCache>
-                <c:ptCount val="2"/>
-                <c:pt idx="0">
-                  <c:v>Текущее</c:v>
-                </c:pt>
-                <c:pt idx="1">
-                  <c:v>Пилот</c:v>
-                </c:pt>
-              </c:strCache>
-            </c:strRef>
-          </c:cat>
-          <c:val>
-            <c:numRef>
-              <c:f>Sheet1!$B$2:$B$3</c:f>
-              <c:numCache>
-                <c:formatCode>General</c:formatCode>
-                <c:ptCount val="2"/>
-                <c:pt idx="0">
-                  <c:v>11.0</c:v>
-                </c:pt>
-                <c:pt idx="1">
-                  <c:v>38.0</c:v>
-                </c:pt>
-              </c:numCache>
-            </c:numRef>
-          </c:val>
-        </c:ser>
-        <c:dLbls>
-          <c:numFmt formatCode="0&quot; запросов&quot;" sourceLinked="0"/>
-          <c:txPr>
-            <a:bodyPr wrap="none"/>
-            <a:lstStyle/>
-            <a:p>
-              <a:pPr>
-                <a:defRPr sz="1100" b="0">
-                  <a:solidFill>
-                    <a:srgbClr val="000000"/>
-                  </a:solidFill>
-                  <a:latin typeface="Play"/>
-                  <a:ea typeface="Play"/>
-                  <a:cs typeface="Play"/>
-                </a:defRPr>
-              </a:pPr>
-            </a:p>
-          </c:txPr>
-          <c:dLblPos val="outEnd"/>
-          <c:showLegendKey val="0"/>
-          <c:showVal val="1"/>
-          <c:showCatName val="0"/>
-          <c:showSerName val="0"/>
-          <c:showPercent val="0"/>
-          <c:showBubbleSize val="0"/>
-          <c:showLeaderLines val="1"/>
-        </c:dLbls>
-        <c:gapWidth val="60"/>
-        <c:axId val="-2068027336"/>
-        <c:axId val="-2113994440"/>
-      </c:barChart>
-      <c:catAx>
-        <c:axId val="-2068027336"/>
-        <c:scaling>
-          <c:orientation val="minMax"/>
-        </c:scaling>
-        <c:delete val="0"/>
-        <c:axPos val="b"/>
-        <c:majorTickMark val="out"/>
-        <c:minorTickMark val="none"/>
-        <c:tickLblPos val="nextTo"/>
-        <c:txPr>
-          <a:bodyPr/>
-          <a:lstStyle/>
-          <a:p>
-            <a:pPr>
-              <a:defRPr sz="1100" b="0">
-                <a:solidFill>
-                  <a:srgbClr val="000000"/>
-                </a:solidFill>
-                <a:latin typeface="Play"/>
-                <a:ea typeface="Play"/>
-                <a:cs typeface="Play"/>
-              </a:defRPr>
-            </a:pPr>
-          </a:p>
-        </c:txPr>
-        <c:crossAx val="-2113994440"/>
-        <c:crosses val="autoZero"/>
-        <c:auto val="1"/>
-        <c:lblAlgn val="ctr"/>
-        <c:lblOffset val="100"/>
-        <c:noMultiLvlLbl val="0"/>
-      </c:catAx>
-      <c:valAx>
-        <c:axId val="-2113994440"/>
-        <c:scaling/>
-        <c:delete val="0"/>
-        <c:axPos val="l"/>
-        <c:majorGridlines>
-          <c:spPr>
-            <a:ln w="9525">
-              <a:solidFill>
-                <a:srgbClr val="D1D1D1"/>
-              </a:solidFill>
-            </a:ln>
-          </c:spPr>
-        </c:majorGridlines>
-        <c:title>
-          <c:tx>
-            <c:rich>
-              <a:bodyPr rot="0" vert="horz"/>
-              <a:lstStyle/>
-              <a:p>
-                <a:pPr>
-                  <a:defRPr sz="1100" b="0">
-                    <a:solidFill>
-                      <a:srgbClr val="000000"/>
-                    </a:solidFill>
-                    <a:latin typeface="Play"/>
-                    <a:ea typeface="Play"/>
-                    <a:cs typeface="Play"/>
-                  </a:defRPr>
-                </a:pPr>
-                <a:r>
-                  <a:t>Запросы, запросов</a:t>
-                </a:r>
-              </a:p>
-            </c:rich>
-          </c:tx>
-          <c:layout/>
-          <c:overlay val="0"/>
-        </c:title>
-        <c:majorTickMark val="out"/>
-        <c:minorTickMark val="none"/>
-        <c:tickLblPos val="nextTo"/>
-        <c:txPr>
-          <a:bodyPr/>
-          <a:lstStyle/>
-          <a:p>
-            <a:pPr>
-              <a:defRPr sz="1100" b="0">
-                <a:solidFill>
-                  <a:srgbClr val="000000"/>
-                </a:solidFill>
-                <a:latin typeface="Play"/>
-                <a:ea typeface="Play"/>
-                <a:cs typeface="Play"/>
-              </a:defRPr>
-            </a:pPr>
-          </a:p>
-        </c:txPr>
-        <c:crossAx val="-2068027336"/>
-        <c:crosses val="autoZero"/>
-      </c:valAx>
-    </c:plotArea>
-    <c:dispBlanksAs val="gap"/>
-  </c:chart>
-  <c:txPr>
-    <a:bodyPr/>
-    <a:lstStyle/>
-    <a:p>
-      <a:pPr>
-        <a:defRPr sz="1200" b="0">
-          <a:solidFill>
-            <a:srgbClr val="000000"/>
-          </a:solidFill>
-          <a:latin typeface="Play"/>
-          <a:ea typeface="Play"/>
-          <a:cs typeface="Play"/>
-        </a:defRPr>
-      </a:pPr>
-      <a:endParaRPr lang="en-US"/>
-    </a:p>
-  </c:txPr>
-  <c:externalData r:id="rId1">
-    <c:autoUpdate val="0"/>
-  </c:externalData>
-</c:chartSpace>
-</file>
-
-<file path=ppt/charts/chart4.xml><?xml version="1.0" encoding="utf-8"?>
-<c:chartSpace xmlns:c="http://schemas.openxmlformats.org/drawingml/2006/chart" xmlns:a="http://schemas.openxmlformats.org/drawingml/2006/main" xmlns:r="http://schemas.openxmlformats.org/officeDocument/2006/relationships">
-  <c:date1904 val="0"/>
-  <c:chart>
-    <c:autoTitleDeleted val="1"/>
-    <c:plotArea>
-      <c:barChart>
-        <c:barDir val="col"/>
-        <c:grouping val="clustered"/>
-        <c:ser>
-          <c:idx val="0"/>
-          <c:order val="0"/>
-          <c:tx>
-            <c:strRef>
-              <c:f>Sheet1!$B$1</c:f>
-              <c:strCache>
-                <c:ptCount val="1"/>
-                <c:pt idx="0">
-                  <c:v>Стоимость (руб)</c:v>
-                </c:pt>
-              </c:strCache>
-            </c:strRef>
-          </c:tx>
-          <c:spPr>
-            <a:solidFill>
-              <a:srgbClr val="0077FF"/>
-            </a:solidFill>
-            <a:ln>
-              <a:solidFill>
-                <a:srgbClr val="0077FF"/>
-              </a:solidFill>
-            </a:ln>
-          </c:spPr>
-          <c:cat>
-            <c:strRef>
-              <c:f>Sheet1!$A$2:$A$2</c:f>
-              <c:strCache>
-                <c:ptCount val="1"/>
-                <c:pt idx="0">
-                  <c:v>Пилот</c:v>
-                </c:pt>
-              </c:strCache>
-            </c:strRef>
-          </c:cat>
-          <c:val>
-            <c:numRef>
-              <c:f>Sheet1!$B$2:$B$2</c:f>
-              <c:numCache>
-                <c:formatCode>General</c:formatCode>
-                <c:ptCount val="1"/>
-                <c:pt idx="0">
-                  <c:v>1400.0</c:v>
-                </c:pt>
-              </c:numCache>
-            </c:numRef>
-          </c:val>
-        </c:ser>
-        <c:dLbls>
-          <c:numFmt formatCode="0&quot; руб&quot;" sourceLinked="0"/>
-          <c:txPr>
-            <a:bodyPr wrap="none"/>
-            <a:lstStyle/>
-            <a:p>
-              <a:pPr>
-                <a:defRPr sz="1100" b="0">
-                  <a:solidFill>
-                    <a:srgbClr val="000000"/>
-                  </a:solidFill>
-                  <a:latin typeface="Play"/>
-                  <a:ea typeface="Play"/>
-                  <a:cs typeface="Play"/>
-                </a:defRPr>
-              </a:pPr>
-            </a:p>
-          </c:txPr>
-          <c:dLblPos val="outEnd"/>
-          <c:showLegendKey val="0"/>
-          <c:showVal val="1"/>
-          <c:showCatName val="0"/>
-          <c:showSerName val="0"/>
-          <c:showPercent val="0"/>
-          <c:showBubbleSize val="0"/>
-          <c:showLeaderLines val="1"/>
-        </c:dLbls>
-        <c:gapWidth val="60"/>
-        <c:axId val="-2068027336"/>
-        <c:axId val="-2113994440"/>
-      </c:barChart>
-      <c:catAx>
-        <c:axId val="-2068027336"/>
-        <c:scaling>
-          <c:orientation val="minMax"/>
-        </c:scaling>
-        <c:delete val="0"/>
-        <c:axPos val="b"/>
-        <c:majorTickMark val="out"/>
-        <c:minorTickMark val="none"/>
-        <c:tickLblPos val="nextTo"/>
-        <c:txPr>
-          <a:bodyPr/>
-          <a:lstStyle/>
-          <a:p>
-            <a:pPr>
-              <a:defRPr sz="1100" b="0">
-                <a:solidFill>
-                  <a:srgbClr val="000000"/>
-                </a:solidFill>
-                <a:latin typeface="Play"/>
-                <a:ea typeface="Play"/>
-                <a:cs typeface="Play"/>
-              </a:defRPr>
-            </a:pPr>
-          </a:p>
-        </c:txPr>
-        <c:crossAx val="-2113994440"/>
-        <c:crosses val="autoZero"/>
-        <c:auto val="1"/>
-        <c:lblAlgn val="ctr"/>
-        <c:lblOffset val="100"/>
-        <c:noMultiLvlLbl val="0"/>
-      </c:catAx>
-      <c:valAx>
-        <c:axId val="-2113994440"/>
-        <c:scaling/>
-        <c:delete val="0"/>
-        <c:axPos val="l"/>
-        <c:majorGridlines>
-          <c:spPr>
-            <a:ln w="9525">
-              <a:solidFill>
-                <a:srgbClr val="D1D1D1"/>
-              </a:solidFill>
-            </a:ln>
-          </c:spPr>
-        </c:majorGridlines>
-        <c:title>
-          <c:tx>
-            <c:rich>
-              <a:bodyPr rot="0" vert="horz"/>
-              <a:lstStyle/>
-              <a:p>
-                <a:pPr>
-                  <a:defRPr sz="1100" b="0">
-                    <a:solidFill>
-                      <a:srgbClr val="000000"/>
-                    </a:solidFill>
-                    <a:latin typeface="Play"/>
-                    <a:ea typeface="Play"/>
-                    <a:cs typeface="Play"/>
-                  </a:defRPr>
-                </a:pPr>
-                <a:r>
-                  <a:t>Стоимость (руб), руб</a:t>
-                </a:r>
-              </a:p>
-            </c:rich>
-          </c:tx>
-          <c:layout/>
-          <c:overlay val="0"/>
-        </c:title>
-        <c:majorTickMark val="out"/>
-        <c:minorTickMark val="none"/>
-        <c:tickLblPos val="nextTo"/>
-        <c:txPr>
-          <a:bodyPr/>
-          <a:lstStyle/>
-          <a:p>
-            <a:pPr>
-              <a:defRPr sz="1100" b="0">
-                <a:solidFill>
-                  <a:srgbClr val="000000"/>
-                </a:solidFill>
-                <a:latin typeface="Play"/>
-                <a:ea typeface="Play"/>
-                <a:cs typeface="Play"/>
-              </a:defRPr>
-            </a:pPr>
-          </a:p>
-        </c:txPr>
-        <c:crossAx val="-2068027336"/>
-        <c:crosses val="autoZero"/>
-      </c:valAx>
-    </c:plotArea>
+    <c:legend>
+      <c:legendPos val="b"/>
+      <c:overlay val="0"/>
+    </c:legend>
     <c:dispBlanksAs val="gap"/>
   </c:chart>
   <c:txPr>
@@ -6148,7 +5569,7 @@
                 <a:ea typeface="Play"/>
                 <a:cs typeface="Play"/>
               </a:rPr>
-              <a:t>Защита инициативы: сервис автоматической вёрстки презентаций</a:t>
+              <a:t>Автоматическая вёрстка презентаций: пилот и масштаб</a:t>
             </a:r>
           </a:p>
         </p:txBody>
@@ -6433,7 +5854,7 @@
                 <a:ea typeface="Play"/>
                 <a:cs typeface="Play"/>
               </a:rPr>
-              <a:t>Текущие трудности в создании презентаций</a:t>
+              <a:t>Текущие трудности в сборке презентаций</a:t>
             </a:r>
           </a:p>
         </p:txBody>
@@ -6447,7 +5868,7 @@
         <p:spPr>
           <a:xfrm>
             <a:off x="274320" y="2009822"/>
-            <a:ext cx="6792986" cy="619552"/>
+            <a:ext cx="6792986" cy="638873"/>
           </a:xfrm>
           <a:prstGeom prst="rect">
             <a:avLst/>
@@ -6464,7 +5885,7 @@
               <a:spcAft>
                 <a:spcPts val="300"/>
               </a:spcAft>
-              <a:defRPr sz="1600">
+              <a:defRPr sz="1800">
                 <a:solidFill>
                   <a:srgbClr val="000000"/>
                 </a:solidFill>
@@ -6474,7 +5895,7 @@
               </a:defRPr>
             </a:pPr>
             <a:r>
-              <a:rPr sz="1600">
+              <a:rPr sz="1800">
                 <a:solidFill>
                   <a:srgbClr val="000000"/>
                 </a:solidFill>
@@ -6482,7 +5903,7 @@
                 <a:ea typeface="Play"/>
                 <a:cs typeface="Play"/>
               </a:rPr>
-              <a:t>42 колоды за квартал, 12 слайдов каждая, 186 минут сборки</a:t>
+              <a:t>42 колоды, 186 мин на одну 12-слайдовую презентацию</a:t>
             </a:r>
           </a:p>
         </p:txBody>
@@ -6495,8 +5916,8 @@
         </p:nvSpPr>
         <p:spPr>
           <a:xfrm>
-            <a:off x="274320" y="2729843"/>
-            <a:ext cx="6792986" cy="954445"/>
+            <a:off x="274320" y="2749163"/>
+            <a:ext cx="6792986" cy="935125"/>
           </a:xfrm>
           <a:prstGeom prst="rect">
             <a:avLst/>
@@ -6531,7 +5952,7 @@
                 <a:ea typeface="Play"/>
                 <a:cs typeface="Play"/>
               </a:rPr>
-              <a:t>• 74 минуты на правки после ревью дизайнера</a:t>
+              <a:t>• 74 мин на правки после ревью</a:t>
             </a:r>
           </a:p>
           <a:p>
@@ -6557,7 +5978,7 @@
                 <a:ea typeface="Play"/>
                 <a:cs typeface="Play"/>
               </a:rPr>
-              <a:t>• 19 из 42 колод нарушили фирменный стиль</a:t>
+              <a:t>• 19 колод нарушили фирменный стиль</a:t>
             </a:r>
           </a:p>
           <a:p>
@@ -6583,7 +6004,7 @@
                 <a:ea typeface="Play"/>
                 <a:cs typeface="Play"/>
               </a:rPr>
-              <a:t>• Дизайнеры 4 человека закрывают 11 запросов/неделю из 27</a:t>
+              <a:t>• Дизайн-отдел закрывает 11 запросов/неделю из 27</a:t>
             </a:r>
           </a:p>
           <a:p>
@@ -7159,7 +6580,7 @@
                 <a:ea typeface="Play"/>
                 <a:cs typeface="Play"/>
               </a:rPr>
-              <a:t>Возможность ускорить и стандартизировать процесс</a:t>
+              <a:t>Предлагаемый сервис автоматической вёрстки</a:t>
             </a:r>
           </a:p>
         </p:txBody>
@@ -7173,7 +6594,7 @@
         <p:spPr>
           <a:xfrm>
             <a:off x="274320" y="1590781"/>
-            <a:ext cx="6792986" cy="856469"/>
+            <a:ext cx="6792986" cy="1085981"/>
           </a:xfrm>
           <a:prstGeom prst="rect">
             <a:avLst/>
@@ -7208,7 +6629,7 @@
                 <a:ea typeface="Play"/>
                 <a:cs typeface="Play"/>
               </a:rPr>
-              <a:t>Сократить время сборки до 4 минут</a:t>
+              <a:t>Принимает шаблон pptx и материалы, автоматически строит дизайн-систему</a:t>
             </a:r>
           </a:p>
         </p:txBody>
@@ -7221,8 +6642,8 @@
         </p:nvSpPr>
         <p:spPr>
           <a:xfrm>
-            <a:off x="274320" y="2598393"/>
-            <a:ext cx="6792986" cy="1511417"/>
+            <a:off x="274320" y="2827904"/>
+            <a:ext cx="6792986" cy="1281905"/>
           </a:xfrm>
           <a:prstGeom prst="rect">
             <a:avLst/>
@@ -7239,7 +6660,7 @@
               <a:spcAft>
                 <a:spcPts val="300"/>
               </a:spcAft>
-              <a:defRPr sz="1800">
+              <a:defRPr sz="1600">
                 <a:solidFill>
                   <a:srgbClr val="000000"/>
                 </a:solidFill>
@@ -7249,7 +6670,7 @@
               </a:defRPr>
             </a:pPr>
             <a:r>
-              <a:rPr sz="1800">
+              <a:rPr sz="1600">
                 <a:solidFill>
                   <a:srgbClr val="000000"/>
                 </a:solidFill>
@@ -7257,7 +6678,7 @@
                 <a:ea typeface="Play"/>
                 <a:cs typeface="Play"/>
               </a:rPr>
-              <a:t>• Снизить время до первой версии с 6 дней до 1 дня</a:t>
+              <a:t>• Генерирует план колоды и вёрстку по ролям страниц</a:t>
             </a:r>
           </a:p>
           <a:p>
@@ -7265,7 +6686,7 @@
               <a:spcAft>
                 <a:spcPts val="300"/>
               </a:spcAft>
-              <a:defRPr sz="1800">
+              <a:defRPr sz="1600">
                 <a:solidFill>
                   <a:srgbClr val="000000"/>
                 </a:solidFill>
@@ -7275,7 +6696,7 @@
               </a:defRPr>
             </a:pPr>
             <a:r>
-              <a:rPr sz="1800">
+              <a:rPr sz="1600">
                 <a:solidFill>
                   <a:srgbClr val="000000"/>
                 </a:solidFill>
@@ -7283,7 +6704,7 @@
                 <a:ea typeface="Play"/>
                 <a:cs typeface="Play"/>
               </a:rPr>
-              <a:t>• Снизить нарушения фирменного стиля до 3 %</a:t>
+              <a:t>• Аудит качества проверяет стиль и данные до выдачи</a:t>
             </a:r>
           </a:p>
           <a:p>
@@ -7291,7 +6712,7 @@
               <a:spcAft>
                 <a:spcPts val="300"/>
               </a:spcAft>
-              <a:defRPr sz="1800">
+              <a:defRPr sz="1600">
                 <a:solidFill>
                   <a:srgbClr val="000000"/>
                 </a:solidFill>
@@ -7301,7 +6722,7 @@
               </a:defRPr>
             </a:pPr>
             <a:r>
-              <a:rPr sz="1800">
+              <a:rPr sz="1600">
                 <a:solidFill>
                   <a:srgbClr val="000000"/>
                 </a:solidFill>
@@ -7309,7 +6730,7 @@
                 <a:ea typeface="Play"/>
                 <a:cs typeface="Play"/>
               </a:rPr>
-              <a:t>• Освободить дизайнеров от рутинных задач</a:t>
+              <a:t>• Экспорт в pptx, pdf, html, слайды остаются редактируемыми</a:t>
             </a:r>
           </a:p>
         </p:txBody>
@@ -7375,47 +6796,6 @@
       </p:sp>
       <p:sp>
         <p:nvSpPr>
-          <p:cNvPr id="549" name="Google Shape;549;p53"/>
-          <p:cNvSpPr/>
-          <p:nvPr/>
-        </p:nvSpPr>
-        <p:spPr>
-          <a:xfrm>
-            <a:off x="7359897" y="1022533"/>
-            <a:ext cx="1395256" cy="1433588"/>
-          </a:xfrm>
-          <a:prstGeom prst="rect">
-            <a:avLst/>
-          </a:prstGeom>
-          <a:noFill/>
-          <a:ln>
-            <a:noFill/>
-          </a:ln>
-        </p:spPr>
-        <p:txBody>
-          <a:bodyPr anchorCtr="0" anchor="ctr" bIns="91425" lIns="91425" spcFirstLastPara="1" rIns="91425" wrap="square" tIns="91425">
-            <a:noAutofit/>
-          </a:bodyPr>
-          <a:lstStyle/>
-          <a:p>
-            <a:pPr indent="0" lvl="0" marL="0" rtl="0" algn="l">
-              <a:spcBef>
-                <a:spcPts val="0"/>
-              </a:spcBef>
-              <a:spcAft>
-                <a:spcPts val="0"/>
-              </a:spcAft>
-              <a:buNone/>
-            </a:pPr>
-            <a:r>
-              <a:t/>
-            </a:r>
-            <a:endParaRPr/>
-          </a:p>
-        </p:txBody>
-      </p:sp>
-      <p:sp>
-        <p:nvSpPr>
           <p:cNvPr id="553" name="Google Shape;553;p53"/>
           <p:cNvSpPr/>
           <p:nvPr/>
@@ -7498,48 +6878,7 @@
       </p:sp>
       <p:sp>
         <p:nvSpPr>
-          <p:cNvPr id="571" name="Google Shape;571;p53"/>
-          <p:cNvSpPr/>
-          <p:nvPr/>
-        </p:nvSpPr>
-        <p:spPr>
-          <a:xfrm>
-            <a:off x="7359897" y="2797849"/>
-            <a:ext cx="1395256" cy="1433588"/>
-          </a:xfrm>
-          <a:prstGeom prst="rect">
-            <a:avLst/>
-          </a:prstGeom>
-          <a:noFill/>
-          <a:ln>
-            <a:noFill/>
-          </a:ln>
-        </p:spPr>
-        <p:txBody>
-          <a:bodyPr anchorCtr="0" anchor="ctr" bIns="91425" lIns="91425" spcFirstLastPara="1" rIns="91425" wrap="square" tIns="91425">
-            <a:noAutofit/>
-          </a:bodyPr>
-          <a:lstStyle/>
-          <a:p>
-            <a:pPr indent="0" lvl="0" marL="0" rtl="0" algn="l">
-              <a:spcBef>
-                <a:spcPts val="0"/>
-              </a:spcBef>
-              <a:spcAft>
-                <a:spcPts val="0"/>
-              </a:spcAft>
-              <a:buNone/>
-            </a:pPr>
-            <a:r>
-              <a:t/>
-            </a:r>
-            <a:endParaRPr/>
-          </a:p>
-        </p:txBody>
-      </p:sp>
-      <p:sp>
-        <p:nvSpPr>
-          <p:cNvPr id="572" name="title"/>
+          <p:cNvPr id="555" name="title"/>
           <p:cNvSpPr txBox="1"/>
           <p:nvPr/>
         </p:nvSpPr>
@@ -7563,7 +6902,7 @@
               <a:spcAft>
                 <a:spcPts val="300"/>
               </a:spcAft>
-              <a:defRPr sz="2705">
+              <a:defRPr sz="2438">
                 <a:solidFill>
                   <a:srgbClr val="000000"/>
                 </a:solidFill>
@@ -7573,7 +6912,7 @@
               </a:defRPr>
             </a:pPr>
             <a:r>
-              <a:rPr sz="2705">
+              <a:rPr sz="2438">
                 <a:solidFill>
                   <a:srgbClr val="000000"/>
                 </a:solidFill>
@@ -7581,161 +6920,29 @@
                 <a:ea typeface="Play"/>
                 <a:cs typeface="Play"/>
               </a:rPr>
-              <a:t>Как работает сервис</a:t>
+              <a:t>Результаты пилота за 6 недель</a:t>
             </a:r>
           </a:p>
         </p:txBody>
       </p:sp>
-      <p:sp>
-        <p:nvSpPr>
-          <p:cNvPr id="573" name="lead"/>
-          <p:cNvSpPr txBox="1"/>
+      <p:graphicFrame>
+        <p:nvGraphicFramePr>
+          <p:cNvPr id="556" name="Chart 555"/>
+          <p:cNvGraphicFramePr>
+            <a:graphicFrameLocks noGrp="1"/>
+          </p:cNvGraphicFramePr>
           <p:nvPr/>
-        </p:nvSpPr>
-        <p:spPr>
-          <a:xfrm>
-            <a:off x="274320" y="1414513"/>
-            <a:ext cx="6792986" cy="969634"/>
-          </a:xfrm>
-          <a:prstGeom prst="rect">
-            <a:avLst/>
-          </a:prstGeom>
-          <a:noFill/>
-        </p:spPr>
-        <p:txBody>
-          <a:bodyPr wrap="square" lIns="76200" rIns="76200" tIns="50800" bIns="50800">
-            <a:spAutoFit/>
-          </a:bodyPr>
-          <a:lstStyle/>
-          <a:p>
-            <a:pPr algn="ctr">
-              <a:spcAft>
-                <a:spcPts val="300"/>
-              </a:spcAft>
-              <a:defRPr sz="2705">
-                <a:solidFill>
-                  <a:srgbClr val="000000"/>
-                </a:solidFill>
-                <a:latin typeface="Play"/>
-                <a:ea typeface="Play"/>
-                <a:cs typeface="Play"/>
-              </a:defRPr>
-            </a:pPr>
-            <a:r>
-              <a:rPr sz="2705">
-                <a:solidFill>
-                  <a:srgbClr val="000000"/>
-                </a:solidFill>
-                <a:latin typeface="Play"/>
-                <a:ea typeface="Play"/>
-                <a:cs typeface="Play"/>
-              </a:rPr>
-              <a:t>Принимает шаблон pptx и материалы</a:t>
-            </a:r>
-          </a:p>
-        </p:txBody>
-      </p:sp>
-      <p:sp>
-        <p:nvSpPr>
-          <p:cNvPr id="574" name="body"/>
-          <p:cNvSpPr txBox="1"/>
-          <p:nvPr/>
-        </p:nvSpPr>
-        <p:spPr>
-          <a:xfrm>
-            <a:off x="274320" y="2555259"/>
-            <a:ext cx="6792986" cy="1711119"/>
-          </a:xfrm>
-          <a:prstGeom prst="rect">
-            <a:avLst/>
-          </a:prstGeom>
-          <a:noFill/>
-        </p:spPr>
-        <p:txBody>
-          <a:bodyPr wrap="square" lIns="76200" rIns="76200" tIns="50800" bIns="50800">
-            <a:spAutoFit/>
-          </a:bodyPr>
-          <a:lstStyle/>
-          <a:p>
-            <a:pPr algn="l">
-              <a:spcAft>
-                <a:spcPts val="300"/>
-              </a:spcAft>
-              <a:defRPr sz="1800">
-                <a:solidFill>
-                  <a:srgbClr val="000000"/>
-                </a:solidFill>
-                <a:latin typeface="Play"/>
-                <a:ea typeface="Play"/>
-                <a:cs typeface="Play"/>
-              </a:defRPr>
-            </a:pPr>
-            <a:r>
-              <a:rPr sz="1800">
-                <a:solidFill>
-                  <a:srgbClr val="000000"/>
-                </a:solidFill>
-                <a:latin typeface="Play"/>
-                <a:ea typeface="Play"/>
-                <a:cs typeface="Play"/>
-              </a:rPr>
-              <a:t>• Автоматически формирует план колоды по дизайн-системе</a:t>
-            </a:r>
-          </a:p>
-          <a:p>
-            <a:pPr algn="l">
-              <a:spcAft>
-                <a:spcPts val="300"/>
-              </a:spcAft>
-              <a:defRPr sz="1800">
-                <a:solidFill>
-                  <a:srgbClr val="000000"/>
-                </a:solidFill>
-                <a:latin typeface="Play"/>
-                <a:ea typeface="Play"/>
-                <a:cs typeface="Play"/>
-              </a:defRPr>
-            </a:pPr>
-            <a:r>
-              <a:rPr sz="1800">
-                <a:solidFill>
-                  <a:srgbClr val="000000"/>
-                </a:solidFill>
-                <a:latin typeface="Play"/>
-                <a:ea typeface="Play"/>
-                <a:cs typeface="Play"/>
-              </a:rPr>
-              <a:t>• Вёрстка и аудит качества до выдачи</a:t>
-            </a:r>
-          </a:p>
-          <a:p>
-            <a:pPr algn="l">
-              <a:spcAft>
-                <a:spcPts val="300"/>
-              </a:spcAft>
-              <a:defRPr sz="1800">
-                <a:solidFill>
-                  <a:srgbClr val="000000"/>
-                </a:solidFill>
-                <a:latin typeface="Play"/>
-                <a:ea typeface="Play"/>
-                <a:cs typeface="Play"/>
-              </a:defRPr>
-            </a:pPr>
-            <a:r>
-              <a:rPr sz="1800">
-                <a:solidFill>
-                  <a:srgbClr val="000000"/>
-                </a:solidFill>
-                <a:latin typeface="Play"/>
-                <a:ea typeface="Play"/>
-                <a:cs typeface="Play"/>
-              </a:rPr>
-              <a:t>• Экспорт в pptx, pdf, html, слайды редактируемы</a:t>
-            </a:r>
-          </a:p>
-        </p:txBody>
-      </p:sp>
+        </p:nvGraphicFramePr>
+        <p:xfrm>
+          <a:off x="274320" y="1414513"/>
+          <a:ext cx="8344814" cy="2851865"/>
+        </p:xfrm>
+        <a:graphic>
+          <a:graphicData uri="http://schemas.openxmlformats.org/drawingml/2006/chart">
+            <c:chart xmlns:c="http://schemas.openxmlformats.org/drawingml/2006/chart" r:id="rId2"/>
+          </a:graphicData>
+        </a:graphic>
+      </p:graphicFrame>
     </p:spTree>
   </p:cSld>
   <p:clrMapOvr>
@@ -7754,16 +6961,70 @@
         <p:nvPr/>
       </p:nvGrpSpPr>
       <p:grpSpPr/>
-      <p:sp>
-        <p:nvSpPr>
-          <p:cNvPr id="2" name="title"/>
+      <p:pic>
+        <p:nvPicPr>
+          <p:cNvPr descr=" " id="2249" name="Google Shape;2249;p83"/>
+          <p:cNvPicPr preferRelativeResize="0"/>
+          <p:nvPr/>
+        </p:nvPicPr>
+        <p:blipFill rotWithShape="1">
+          <a:blip r:embed="rId2">
+            <a:alphaModFix/>
+          </a:blip>
+          <a:srcRect b="0" l="0" r="0" t="0"/>
+          <a:stretch/>
+        </p:blipFill>
+        <p:spPr>
+          <a:xfrm>
+            <a:off x="285748" y="3576507"/>
+            <a:ext cx="2381238" cy="28571"/>
+          </a:xfrm>
+          <a:prstGeom prst="rect">
+            <a:avLst/>
+          </a:prstGeom>
+          <a:noFill/>
+          <a:ln>
+            <a:noFill/>
+          </a:ln>
+        </p:spPr>
+      </p:pic>
+      <p:pic>
+        <p:nvPicPr>
+          <p:cNvPr descr=" " id="2250" name="Google Shape;2250;p83"/>
+          <p:cNvPicPr preferRelativeResize="0"/>
+          <p:nvPr/>
+        </p:nvPicPr>
+        <p:blipFill rotWithShape="1">
+          <a:blip r:embed="rId3">
+            <a:alphaModFix/>
+          </a:blip>
+          <a:srcRect b="0" l="0" r="0" t="0"/>
+          <a:stretch/>
+        </p:blipFill>
+        <p:spPr>
+          <a:xfrm>
+            <a:off x="3143234" y="3576507"/>
+            <a:ext cx="3762355" cy="28571"/>
+          </a:xfrm>
+          <a:prstGeom prst="rect">
+            <a:avLst/>
+          </a:prstGeom>
+          <a:noFill/>
+          <a:ln>
+            <a:noFill/>
+          </a:ln>
+        </p:spPr>
+      </p:pic>
+      <p:sp>
+        <p:nvSpPr>
+          <p:cNvPr id="2251" name="title"/>
           <p:cNvSpPr txBox="1"/>
           <p:nvPr/>
         </p:nvSpPr>
         <p:spPr>
           <a:xfrm>
             <a:off x="274320" y="282943"/>
-            <a:ext cx="6792986" cy="932027"/>
+            <a:ext cx="6792986" cy="617220"/>
           </a:xfrm>
           <a:prstGeom prst="rect">
             <a:avLst/>
@@ -7780,7 +7041,7 @@
               <a:spcAft>
                 <a:spcPts val="300"/>
               </a:spcAft>
-              <a:defRPr sz="2438">
+              <a:defRPr sz="2705">
                 <a:solidFill>
                   <a:srgbClr val="000000"/>
                 </a:solidFill>
@@ -7790,7 +7051,7 @@
               </a:defRPr>
             </a:pPr>
             <a:r>
-              <a:rPr sz="2438">
+              <a:rPr sz="2705">
                 <a:solidFill>
                   <a:srgbClr val="000000"/>
                 </a:solidFill>
@@ -7798,29 +7059,187 @@
                 <a:ea typeface="Play"/>
                 <a:cs typeface="Play"/>
               </a:rPr>
-              <a:t>Сокращение времени сборки: 186 → 4 минуты</a:t>
+              <a:t>Ожидаемый эффект</a:t>
             </a:r>
           </a:p>
         </p:txBody>
       </p:sp>
-      <p:graphicFrame>
-        <p:nvGraphicFramePr>
-          <p:cNvPr id="3" name="Chart 2"/>
-          <p:cNvGraphicFramePr>
-            <a:graphicFrameLocks noGrp="1"/>
-          </p:cNvGraphicFramePr>
+      <p:sp>
+        <p:nvSpPr>
+          <p:cNvPr id="2252" name="lead"/>
+          <p:cNvSpPr txBox="1"/>
           <p:nvPr/>
-        </p:nvGraphicFramePr>
-        <p:xfrm>
-          <a:off x="274320" y="1664127"/>
-          <a:ext cx="7189469" cy="2160270"/>
-        </p:xfrm>
-        <a:graphic>
-          <a:graphicData uri="http://schemas.openxmlformats.org/drawingml/2006/chart">
-            <c:chart xmlns:c="http://schemas.openxmlformats.org/drawingml/2006/chart" r:id="rId4"/>
-          </a:graphicData>
-        </a:graphic>
-      </p:graphicFrame>
+        </p:nvSpPr>
+        <p:spPr>
+          <a:xfrm>
+            <a:off x="274320" y="1414513"/>
+            <a:ext cx="6792986" cy="735068"/>
+          </a:xfrm>
+          <a:prstGeom prst="rect">
+            <a:avLst/>
+          </a:prstGeom>
+          <a:noFill/>
+        </p:spPr>
+        <p:txBody>
+          <a:bodyPr wrap="square" lIns="76200" rIns="76200" tIns="50800" bIns="50800">
+            <a:spAutoFit/>
+          </a:bodyPr>
+          <a:lstStyle/>
+          <a:p>
+            <a:pPr algn="l">
+              <a:spcAft>
+                <a:spcPts val="300"/>
+              </a:spcAft>
+              <a:defRPr sz="1800" b="1">
+                <a:solidFill>
+                  <a:srgbClr val="000000"/>
+                </a:solidFill>
+                <a:latin typeface="Play"/>
+                <a:ea typeface="Play"/>
+                <a:cs typeface="Play"/>
+              </a:defRPr>
+            </a:pPr>
+            <a:r>
+              <a:rPr sz="1800" b="1">
+                <a:solidFill>
+                  <a:srgbClr val="000000"/>
+                </a:solidFill>
+                <a:latin typeface="Play"/>
+                <a:ea typeface="Play"/>
+                <a:cs typeface="Play"/>
+              </a:rPr>
+              <a:t>Сокращение времени сборки с 186 до 4 минут</a:t>
+            </a:r>
+          </a:p>
+        </p:txBody>
+      </p:sp>
+      <p:sp>
+        <p:nvSpPr>
+          <p:cNvPr id="2253" name="body"/>
+          <p:cNvSpPr txBox="1"/>
+          <p:nvPr/>
+        </p:nvSpPr>
+        <p:spPr>
+          <a:xfrm>
+            <a:off x="274320" y="2279300"/>
+            <a:ext cx="6792986" cy="1297180"/>
+          </a:xfrm>
+          <a:prstGeom prst="rect">
+            <a:avLst/>
+          </a:prstGeom>
+          <a:noFill/>
+        </p:spPr>
+        <p:txBody>
+          <a:bodyPr wrap="square" lIns="76200" rIns="76200" tIns="50800" bIns="50800">
+            <a:spAutoFit/>
+          </a:bodyPr>
+          <a:lstStyle/>
+          <a:p>
+            <a:pPr algn="l">
+              <a:spcAft>
+                <a:spcPts val="300"/>
+              </a:spcAft>
+              <a:defRPr sz="1800" b="1">
+                <a:solidFill>
+                  <a:srgbClr val="000000"/>
+                </a:solidFill>
+                <a:latin typeface="Play"/>
+                <a:ea typeface="Play"/>
+                <a:cs typeface="Play"/>
+              </a:defRPr>
+            </a:pPr>
+            <a:r>
+              <a:rPr sz="1800" b="1">
+                <a:solidFill>
+                  <a:srgbClr val="000000"/>
+                </a:solidFill>
+                <a:latin typeface="Play"/>
+                <a:ea typeface="Play"/>
+                <a:cs typeface="Play"/>
+              </a:rPr>
+              <a:t>• Сокращение времени до первой версии с 6 до 1 дня</a:t>
+            </a:r>
+          </a:p>
+          <a:p>
+            <a:pPr algn="l">
+              <a:spcAft>
+                <a:spcPts val="300"/>
+              </a:spcAft>
+              <a:defRPr sz="1800" b="1">
+                <a:solidFill>
+                  <a:srgbClr val="000000"/>
+                </a:solidFill>
+                <a:latin typeface="Play"/>
+                <a:ea typeface="Play"/>
+                <a:cs typeface="Play"/>
+              </a:defRPr>
+            </a:pPr>
+            <a:r>
+              <a:rPr sz="1800" b="1">
+                <a:solidFill>
+                  <a:srgbClr val="000000"/>
+                </a:solidFill>
+                <a:latin typeface="Play"/>
+                <a:ea typeface="Play"/>
+                <a:cs typeface="Play"/>
+              </a:rPr>
+              <a:t>• Снижение нарушений стиля до 2 из 68 колод</a:t>
+            </a:r>
+          </a:p>
+          <a:p>
+            <a:pPr algn="l">
+              <a:spcAft>
+                <a:spcPts val="300"/>
+              </a:spcAft>
+              <a:defRPr sz="1800" b="1">
+                <a:solidFill>
+                  <a:srgbClr val="000000"/>
+                </a:solidFill>
+                <a:latin typeface="Play"/>
+                <a:ea typeface="Play"/>
+                <a:cs typeface="Play"/>
+              </a:defRPr>
+            </a:pPr>
+            <a:r>
+              <a:rPr sz="1800" b="1">
+                <a:solidFill>
+                  <a:srgbClr val="000000"/>
+                </a:solidFill>
+                <a:latin typeface="Play"/>
+                <a:ea typeface="Play"/>
+                <a:cs typeface="Play"/>
+              </a:rPr>
+              <a:t>• Увеличение объёма закрытых запросов до 38/нед</a:t>
+            </a:r>
+          </a:p>
+          <a:p>
+            <a:pPr algn="l">
+              <a:spcAft>
+                <a:spcPts val="300"/>
+              </a:spcAft>
+              <a:defRPr sz="1800" b="1">
+                <a:solidFill>
+                  <a:srgbClr val="000000"/>
+                </a:solidFill>
+                <a:latin typeface="Play"/>
+                <a:ea typeface="Play"/>
+                <a:cs typeface="Play"/>
+              </a:defRPr>
+            </a:pPr>
+            <a:r>
+              <a:rPr sz="1800" b="1">
+                <a:solidFill>
+                  <a:srgbClr val="000000"/>
+                </a:solidFill>
+                <a:latin typeface="Play"/>
+                <a:ea typeface="Play"/>
+                <a:cs typeface="Play"/>
+              </a:rPr>
+              <a:t>• Стоимость инференса за пилот – 1400 руб</a:t>
+            </a:r>
+          </a:p>
+        </p:txBody>
+      </p:sp>
     </p:spTree>
   </p:cSld>
   <p:clrMapOvr>
@@ -7839,16 +7258,166 @@
         <p:nvPr/>
       </p:nvGrpSpPr>
       <p:grpSpPr/>
-      <p:sp>
-        <p:nvSpPr>
-          <p:cNvPr id="2" name="title"/>
+      <p:pic>
+        <p:nvPicPr>
+          <p:cNvPr descr=" " id="2428" name="Google Shape;2428;p89"/>
+          <p:cNvPicPr preferRelativeResize="0"/>
+          <p:nvPr/>
+        </p:nvPicPr>
+        <p:blipFill rotWithShape="1">
+          <a:blip r:embed="rId2">
+            <a:alphaModFix/>
+          </a:blip>
+          <a:srcRect b="0" l="0" r="0" t="0"/>
+          <a:stretch/>
+        </p:blipFill>
+        <p:spPr>
+          <a:xfrm>
+            <a:off x="0" y="2732082"/>
+            <a:ext cx="8515008" cy="92615"/>
+          </a:xfrm>
+          <a:prstGeom prst="rect">
+            <a:avLst/>
+          </a:prstGeom>
+          <a:noFill/>
+          <a:ln>
+            <a:noFill/>
+          </a:ln>
+        </p:spPr>
+      </p:pic>
+      <p:sp>
+        <p:nvSpPr>
+          <p:cNvPr id="2429" name="Google Shape;2429;p89"/>
+          <p:cNvSpPr/>
+          <p:nvPr/>
+        </p:nvSpPr>
+        <p:spPr>
+          <a:xfrm>
+            <a:off x="553415" y="1828897"/>
+            <a:ext cx="2232516" cy="1490254"/>
+          </a:xfrm>
+          <a:prstGeom prst="rect">
+            <a:avLst/>
+          </a:prstGeom>
+          <a:noFill/>
+          <a:ln>
+            <a:noFill/>
+          </a:ln>
+        </p:spPr>
+        <p:txBody>
+          <a:bodyPr anchorCtr="0" anchor="ctr" bIns="91425" lIns="91425" spcFirstLastPara="1" rIns="91425" wrap="square" tIns="91425">
+            <a:noAutofit/>
+          </a:bodyPr>
+          <a:lstStyle/>
+          <a:p>
+            <a:pPr indent="0" lvl="0" marL="0" rtl="0" algn="l">
+              <a:spcBef>
+                <a:spcPts val="0"/>
+              </a:spcBef>
+              <a:spcAft>
+                <a:spcPts val="0"/>
+              </a:spcAft>
+              <a:buNone/>
+            </a:pPr>
+            <a:r>
+              <a:t/>
+            </a:r>
+            <a:endParaRPr/>
+          </a:p>
+        </p:txBody>
+      </p:sp>
+      <p:sp>
+        <p:nvSpPr>
+          <p:cNvPr id="2431" name="Google Shape;2431;p89"/>
+          <p:cNvSpPr/>
+          <p:nvPr/>
+        </p:nvSpPr>
+        <p:spPr>
+          <a:xfrm>
+            <a:off x="3565736" y="1828897"/>
+            <a:ext cx="2232516" cy="1490254"/>
+          </a:xfrm>
+          <a:prstGeom prst="rect">
+            <a:avLst/>
+          </a:prstGeom>
+          <a:noFill/>
+          <a:ln>
+            <a:noFill/>
+          </a:ln>
+        </p:spPr>
+        <p:txBody>
+          <a:bodyPr anchorCtr="0" anchor="ctr" bIns="91425" lIns="91425" spcFirstLastPara="1" rIns="91425" wrap="square" tIns="91425">
+            <a:noAutofit/>
+          </a:bodyPr>
+          <a:lstStyle/>
+          <a:p>
+            <a:pPr indent="0" lvl="0" marL="0" rtl="0" algn="l">
+              <a:spcBef>
+                <a:spcPts val="0"/>
+              </a:spcBef>
+              <a:spcAft>
+                <a:spcPts val="0"/>
+              </a:spcAft>
+              <a:buNone/>
+            </a:pPr>
+            <a:r>
+              <a:t/>
+            </a:r>
+            <a:endParaRPr/>
+          </a:p>
+        </p:txBody>
+      </p:sp>
+      <p:sp>
+        <p:nvSpPr>
+          <p:cNvPr id="2433" name="Google Shape;2433;p89"/>
+          <p:cNvSpPr/>
+          <p:nvPr/>
+        </p:nvSpPr>
+        <p:spPr>
+          <a:xfrm>
+            <a:off x="6578067" y="1828897"/>
+            <a:ext cx="2232516" cy="1490254"/>
+          </a:xfrm>
+          <a:prstGeom prst="rect">
+            <a:avLst/>
+          </a:prstGeom>
+          <a:noFill/>
+          <a:ln>
+            <a:noFill/>
+          </a:ln>
+        </p:spPr>
+        <p:txBody>
+          <a:bodyPr anchorCtr="0" anchor="ctr" bIns="91425" lIns="91425" spcFirstLastPara="1" rIns="91425" wrap="square" tIns="91425">
+            <a:noAutofit/>
+          </a:bodyPr>
+          <a:lstStyle/>
+          <a:p>
+            <a:pPr indent="0" lvl="0" marL="0" rtl="0" algn="l">
+              <a:spcBef>
+                <a:spcPts val="0"/>
+              </a:spcBef>
+              <a:spcAft>
+                <a:spcPts val="0"/>
+              </a:spcAft>
+              <a:buNone/>
+            </a:pPr>
+            <a:r>
+              <a:t/>
+            </a:r>
+            <a:endParaRPr/>
+          </a:p>
+        </p:txBody>
+      </p:sp>
+      <p:sp>
+        <p:nvSpPr>
+          <p:cNvPr id="2434" name="title"/>
           <p:cNvSpPr txBox="1"/>
           <p:nvPr/>
         </p:nvSpPr>
         <p:spPr>
           <a:xfrm>
             <a:off x="274320" y="282943"/>
-            <a:ext cx="6792986" cy="932027"/>
+            <a:ext cx="6792986" cy="617220"/>
           </a:xfrm>
           <a:prstGeom prst="rect">
             <a:avLst/>
@@ -7865,7 +7434,7 @@
               <a:spcAft>
                 <a:spcPts val="300"/>
               </a:spcAft>
-              <a:defRPr sz="2438">
+              <a:defRPr sz="2705">
                 <a:solidFill>
                   <a:srgbClr val="000000"/>
                 </a:solidFill>
@@ -7875,7 +7444,7 @@
               </a:defRPr>
             </a:pPr>
             <a:r>
-              <a:rPr sz="2438">
+              <a:rPr sz="2705">
                 <a:solidFill>
                   <a:srgbClr val="000000"/>
                 </a:solidFill>
@@ -7883,29 +7452,187 @@
                 <a:ea typeface="Play"/>
                 <a:cs typeface="Play"/>
               </a:rPr>
-              <a:t>Снижение нарушений фирменного стиля: 19/42 → 2/68</a:t>
+              <a:t>Ресурсы и сроки</a:t>
             </a:r>
           </a:p>
         </p:txBody>
       </p:sp>
-      <p:graphicFrame>
-        <p:nvGraphicFramePr>
-          <p:cNvPr id="3" name="Chart 2"/>
-          <p:cNvGraphicFramePr>
-            <a:graphicFrameLocks noGrp="1"/>
-          </p:cNvGraphicFramePr>
+      <p:sp>
+        <p:nvSpPr>
+          <p:cNvPr id="2435" name="lead"/>
+          <p:cNvSpPr txBox="1"/>
           <p:nvPr/>
-        </p:nvGraphicFramePr>
-        <p:xfrm>
-          <a:off x="274320" y="1729321"/>
-          <a:ext cx="8344814" cy="2160270"/>
-        </p:xfrm>
-        <a:graphic>
-          <a:graphicData uri="http://schemas.openxmlformats.org/drawingml/2006/chart">
-            <c:chart xmlns:c="http://schemas.openxmlformats.org/drawingml/2006/chart" r:id="rId3"/>
-          </a:graphicData>
-        </a:graphic>
-      </p:graphicFrame>
+        </p:nvSpPr>
+        <p:spPr>
+          <a:xfrm>
+            <a:off x="274320" y="1414513"/>
+            <a:ext cx="6792986" cy="447970"/>
+          </a:xfrm>
+          <a:prstGeom prst="rect">
+            <a:avLst/>
+          </a:prstGeom>
+          <a:noFill/>
+        </p:spPr>
+        <p:txBody>
+          <a:bodyPr wrap="square" lIns="76200" rIns="76200" tIns="50800" bIns="50800">
+            <a:spAutoFit/>
+          </a:bodyPr>
+          <a:lstStyle/>
+          <a:p>
+            <a:pPr algn="l">
+              <a:spcAft>
+                <a:spcPts val="300"/>
+              </a:spcAft>
+              <a:defRPr sz="1800">
+                <a:solidFill>
+                  <a:srgbClr val="000000"/>
+                </a:solidFill>
+                <a:latin typeface="Play"/>
+                <a:ea typeface="Play"/>
+                <a:cs typeface="Play"/>
+              </a:defRPr>
+            </a:pPr>
+            <a:r>
+              <a:rPr sz="1800">
+                <a:solidFill>
+                  <a:srgbClr val="000000"/>
+                </a:solidFill>
+                <a:latin typeface="Play"/>
+                <a:ea typeface="Play"/>
+                <a:cs typeface="Play"/>
+              </a:rPr>
+              <a:t>Сервис работает на 2 vCPU / 2 ГБ RAM</a:t>
+            </a:r>
+          </a:p>
+        </p:txBody>
+      </p:sp>
+      <p:sp>
+        <p:nvSpPr>
+          <p:cNvPr id="2436" name="body"/>
+          <p:cNvSpPr txBox="1"/>
+          <p:nvPr/>
+        </p:nvSpPr>
+        <p:spPr>
+          <a:xfrm>
+            <a:off x="274320" y="1862483"/>
+            <a:ext cx="6792986" cy="869588"/>
+          </a:xfrm>
+          <a:prstGeom prst="rect">
+            <a:avLst/>
+          </a:prstGeom>
+          <a:noFill/>
+        </p:spPr>
+        <p:txBody>
+          <a:bodyPr wrap="square" lIns="76200" rIns="76200" tIns="50800" bIns="50800">
+            <a:spAutoFit/>
+          </a:bodyPr>
+          <a:lstStyle/>
+          <a:p>
+            <a:pPr algn="l">
+              <a:spcAft>
+                <a:spcPts val="300"/>
+              </a:spcAft>
+              <a:defRPr sz="1200">
+                <a:solidFill>
+                  <a:srgbClr val="000000"/>
+                </a:solidFill>
+                <a:latin typeface="Play"/>
+                <a:ea typeface="Play"/>
+                <a:cs typeface="Play"/>
+              </a:defRPr>
+            </a:pPr>
+            <a:r>
+              <a:rPr sz="1200">
+                <a:solidFill>
+                  <a:srgbClr val="000000"/>
+                </a:solidFill>
+                <a:latin typeface="Play"/>
+                <a:ea typeface="Play"/>
+                <a:cs typeface="Play"/>
+              </a:rPr>
+              <a:t>• Модель gpt-oss-20b через OpenAI-совместимый протокол</a:t>
+            </a:r>
+          </a:p>
+          <a:p>
+            <a:pPr algn="l">
+              <a:spcAft>
+                <a:spcPts val="300"/>
+              </a:spcAft>
+              <a:defRPr sz="1200">
+                <a:solidFill>
+                  <a:srgbClr val="000000"/>
+                </a:solidFill>
+                <a:latin typeface="Play"/>
+                <a:ea typeface="Play"/>
+                <a:cs typeface="Play"/>
+              </a:defRPr>
+            </a:pPr>
+            <a:r>
+              <a:rPr sz="1200">
+                <a:solidFill>
+                  <a:srgbClr val="000000"/>
+                </a:solidFill>
+                <a:latin typeface="Play"/>
+                <a:ea typeface="Play"/>
+                <a:cs typeface="Play"/>
+              </a:rPr>
+              <a:t>• План: Q3 2026 – подключение 4 команд, домен и HTTPS</a:t>
+            </a:r>
+          </a:p>
+          <a:p>
+            <a:pPr algn="l">
+              <a:spcAft>
+                <a:spcPts val="300"/>
+              </a:spcAft>
+              <a:defRPr sz="1200">
+                <a:solidFill>
+                  <a:srgbClr val="000000"/>
+                </a:solidFill>
+                <a:latin typeface="Play"/>
+                <a:ea typeface="Play"/>
+                <a:cs typeface="Play"/>
+              </a:defRPr>
+            </a:pPr>
+            <a:r>
+              <a:rPr sz="1200">
+                <a:solidFill>
+                  <a:srgbClr val="000000"/>
+                </a:solidFill>
+                <a:latin typeface="Play"/>
+                <a:ea typeface="Play"/>
+                <a:cs typeface="Play"/>
+              </a:rPr>
+              <a:t>• Q4 2026 – доступ для всей компании, интеграция с хранилищем</a:t>
+            </a:r>
+          </a:p>
+          <a:p>
+            <a:pPr algn="l">
+              <a:spcAft>
+                <a:spcPts val="300"/>
+              </a:spcAft>
+              <a:defRPr sz="1200">
+                <a:solidFill>
+                  <a:srgbClr val="000000"/>
+                </a:solidFill>
+                <a:latin typeface="Play"/>
+                <a:ea typeface="Play"/>
+                <a:cs typeface="Play"/>
+              </a:defRPr>
+            </a:pPr>
+            <a:r>
+              <a:rPr sz="1200">
+                <a:solidFill>
+                  <a:srgbClr val="000000"/>
+                </a:solidFill>
+                <a:latin typeface="Play"/>
+                <a:ea typeface="Play"/>
+                <a:cs typeface="Play"/>
+              </a:rPr>
+              <a:t>• Q1 2027 – генерация иллюстраций под стиль шаблона</a:t>
+            </a:r>
+          </a:p>
+        </p:txBody>
+      </p:sp>
     </p:spTree>
   </p:cSld>
   <p:clrMapOvr>
@@ -7924,6 +7651,141 @@
         <p:nvPr/>
       </p:nvGrpSpPr>
       <p:grpSpPr/>
+      <p:sp>
+        <p:nvSpPr>
+          <p:cNvPr id="1027" name="Google Shape;1027;p65"/>
+          <p:cNvSpPr/>
+          <p:nvPr/>
+        </p:nvSpPr>
+        <p:spPr>
+          <a:xfrm>
+            <a:off x="6064222" y="1209852"/>
+            <a:ext cx="2793985" cy="3014270"/>
+          </a:xfrm>
+          <a:prstGeom prst="roundRect">
+            <a:avLst>
+              <a:gd fmla="val 3436" name="adj"/>
+            </a:avLst>
+          </a:prstGeom>
+          <a:solidFill>
+            <a:schemeClr val="lt2"/>
+          </a:solidFill>
+          <a:ln>
+            <a:noFill/>
+          </a:ln>
+        </p:spPr>
+        <p:txBody>
+          <a:bodyPr anchorCtr="0" anchor="ctr" bIns="91425" lIns="91425" spcFirstLastPara="1" rIns="91425" wrap="square" tIns="91425">
+            <a:noAutofit/>
+          </a:bodyPr>
+          <a:lstStyle/>
+          <a:p>
+            <a:pPr indent="0" lvl="0" marL="0" rtl="0" algn="l">
+              <a:spcBef>
+                <a:spcPts val="0"/>
+              </a:spcBef>
+              <a:spcAft>
+                <a:spcPts val="0"/>
+              </a:spcAft>
+              <a:buNone/>
+            </a:pPr>
+            <a:r>
+              <a:t/>
+            </a:r>
+            <a:endParaRPr/>
+          </a:p>
+        </p:txBody>
+      </p:sp>
+      <p:sp>
+        <p:nvSpPr>
+          <p:cNvPr id="1029" name="Google Shape;1029;p65"/>
+          <p:cNvSpPr/>
+          <p:nvPr/>
+        </p:nvSpPr>
+        <p:spPr>
+          <a:xfrm>
+            <a:off x="3174981" y="1209852"/>
+            <a:ext cx="2793985" cy="3014270"/>
+          </a:xfrm>
+          <a:prstGeom prst="roundRect">
+            <a:avLst>
+              <a:gd fmla="val 3436" name="adj"/>
+            </a:avLst>
+          </a:prstGeom>
+          <a:solidFill>
+            <a:schemeClr val="lt2"/>
+          </a:solidFill>
+          <a:ln>
+            <a:noFill/>
+          </a:ln>
+        </p:spPr>
+        <p:txBody>
+          <a:bodyPr anchorCtr="0" anchor="ctr" bIns="91425" lIns="91425" spcFirstLastPara="1" rIns="91425" wrap="square" tIns="91425">
+            <a:noAutofit/>
+          </a:bodyPr>
+          <a:lstStyle/>
+          <a:p>
+            <a:pPr indent="0" lvl="0" marL="0" rtl="0" algn="l">
+              <a:spcBef>
+                <a:spcPts val="0"/>
+              </a:spcBef>
+              <a:spcAft>
+                <a:spcPts val="0"/>
+              </a:spcAft>
+              <a:buNone/>
+            </a:pPr>
+            <a:r>
+              <a:t/>
+            </a:r>
+            <a:endParaRPr/>
+          </a:p>
+        </p:txBody>
+      </p:sp>
+      <p:sp>
+        <p:nvSpPr>
+          <p:cNvPr id="1031" name="Google Shape;1031;p65"/>
+          <p:cNvSpPr/>
+          <p:nvPr/>
+        </p:nvSpPr>
+        <p:spPr>
+          <a:xfrm>
+            <a:off x="285749" y="1209852"/>
+            <a:ext cx="2793985" cy="3014270"/>
+          </a:xfrm>
+          <a:prstGeom prst="roundRect">
+            <a:avLst>
+              <a:gd fmla="val 3436" name="adj"/>
+            </a:avLst>
+          </a:prstGeom>
+          <a:solidFill>
+            <a:schemeClr val="lt2"/>
+          </a:solidFill>
+          <a:ln>
+            <a:noFill/>
+          </a:ln>
+        </p:spPr>
+        <p:txBody>
+          <a:bodyPr anchorCtr="0" anchor="ctr" bIns="91425" lIns="91425" spcFirstLastPara="1" rIns="91425" wrap="square" tIns="91425">
+            <a:noAutofit/>
+          </a:bodyPr>
+          <a:lstStyle/>
+          <a:p>
+            <a:pPr indent="0" lvl="0" marL="0" rtl="0" algn="l">
+              <a:spcBef>
+                <a:spcPts val="0"/>
+              </a:spcBef>
+              <a:spcAft>
+                <a:spcPts val="0"/>
+              </a:spcAft>
+              <a:buNone/>
+            </a:pPr>
+            <a:r>
+              <a:t/>
+            </a:r>
+            <a:endParaRPr/>
+          </a:p>
+        </p:txBody>
+      </p:sp>
       <p:sp>
         <p:nvSpPr>
           <p:cNvPr id="1032" name="Google Shape;1032;p65"/>
@@ -7975,6 +7837,47 @@
           <a:xfrm>
             <a:off x="285748" y="1209852"/>
             <a:ext cx="8572456" cy="3014270"/>
+          </a:xfrm>
+          <a:prstGeom prst="rect">
+            <a:avLst/>
+          </a:prstGeom>
+          <a:noFill/>
+          <a:ln>
+            <a:noFill/>
+          </a:ln>
+        </p:spPr>
+        <p:txBody>
+          <a:bodyPr anchorCtr="0" anchor="ctr" bIns="91425" lIns="91425" spcFirstLastPara="1" rIns="91425" wrap="square" tIns="91425">
+            <a:noAutofit/>
+          </a:bodyPr>
+          <a:lstStyle/>
+          <a:p>
+            <a:pPr indent="0" lvl="0" marL="0" rtl="0" algn="l">
+              <a:spcBef>
+                <a:spcPts val="0"/>
+              </a:spcBef>
+              <a:spcAft>
+                <a:spcPts val="0"/>
+              </a:spcAft>
+              <a:buNone/>
+            </a:pPr>
+            <a:r>
+              <a:t/>
+            </a:r>
+            <a:endParaRPr/>
+          </a:p>
+        </p:txBody>
+      </p:sp>
+      <p:sp>
+        <p:nvSpPr>
+          <p:cNvPr id="1034" name="Google Shape;1034;p65"/>
+          <p:cNvSpPr/>
+          <p:nvPr/>
+        </p:nvSpPr>
+        <p:spPr>
+          <a:xfrm>
+            <a:off x="476248" y="1400327"/>
+            <a:ext cx="2412987" cy="1009519"/>
           </a:xfrm>
           <a:prstGeom prst="rect">
             <a:avLst/>
@@ -8053,6 +7956,47 @@
       </p:sp>
       <p:sp>
         <p:nvSpPr>
+          <p:cNvPr id="1040" name="Google Shape;1040;p65"/>
+          <p:cNvSpPr/>
+          <p:nvPr/>
+        </p:nvSpPr>
+        <p:spPr>
+          <a:xfrm>
+            <a:off x="3365480" y="1400327"/>
+            <a:ext cx="2412987" cy="1009519"/>
+          </a:xfrm>
+          <a:prstGeom prst="rect">
+            <a:avLst/>
+          </a:prstGeom>
+          <a:noFill/>
+          <a:ln>
+            <a:noFill/>
+          </a:ln>
+        </p:spPr>
+        <p:txBody>
+          <a:bodyPr anchorCtr="0" anchor="ctr" bIns="91425" lIns="91425" spcFirstLastPara="1" rIns="91425" wrap="square" tIns="91425">
+            <a:noAutofit/>
+          </a:bodyPr>
+          <a:lstStyle/>
+          <a:p>
+            <a:pPr indent="0" lvl="0" marL="0" rtl="0" algn="l">
+              <a:spcBef>
+                <a:spcPts val="0"/>
+              </a:spcBef>
+              <a:spcAft>
+                <a:spcPts val="0"/>
+              </a:spcAft>
+              <a:buNone/>
+            </a:pPr>
+            <a:r>
+              <a:t/>
+            </a:r>
+            <a:endParaRPr/>
+          </a:p>
+        </p:txBody>
+      </p:sp>
+      <p:sp>
+        <p:nvSpPr>
           <p:cNvPr id="1041" name="Google Shape;1041;p65"/>
           <p:cNvSpPr/>
           <p:nvPr/>
@@ -8098,6 +8042,47 @@
       </p:sp>
       <p:sp>
         <p:nvSpPr>
+          <p:cNvPr id="1045" name="Google Shape;1045;p65"/>
+          <p:cNvSpPr/>
+          <p:nvPr/>
+        </p:nvSpPr>
+        <p:spPr>
+          <a:xfrm>
+            <a:off x="6254721" y="1400327"/>
+            <a:ext cx="2412987" cy="1009519"/>
+          </a:xfrm>
+          <a:prstGeom prst="rect">
+            <a:avLst/>
+          </a:prstGeom>
+          <a:noFill/>
+          <a:ln>
+            <a:noFill/>
+          </a:ln>
+        </p:spPr>
+        <p:txBody>
+          <a:bodyPr anchorCtr="0" anchor="ctr" bIns="91425" lIns="91425" spcFirstLastPara="1" rIns="91425" wrap="square" tIns="91425">
+            <a:noAutofit/>
+          </a:bodyPr>
+          <a:lstStyle/>
+          <a:p>
+            <a:pPr indent="0" lvl="0" marL="0" rtl="0" algn="l">
+              <a:spcBef>
+                <a:spcPts val="0"/>
+              </a:spcBef>
+              <a:spcAft>
+                <a:spcPts val="0"/>
+              </a:spcAft>
+              <a:buNone/>
+            </a:pPr>
+            <a:r>
+              <a:t/>
+            </a:r>
+            <a:endParaRPr/>
+          </a:p>
+        </p:txBody>
+      </p:sp>
+      <p:sp>
+        <p:nvSpPr>
           <p:cNvPr id="1046" name="Google Shape;1046;p65"/>
           <p:cNvSpPr/>
           <p:nvPr/>
@@ -8150,7 +8135,7 @@
         <p:spPr>
           <a:xfrm>
             <a:off x="274320" y="282943"/>
-            <a:ext cx="6792986" cy="932027"/>
+            <a:ext cx="6792986" cy="617220"/>
           </a:xfrm>
           <a:prstGeom prst="rect">
             <a:avLst/>
@@ -8167,7 +8152,7 @@
               <a:spcAft>
                 <a:spcPts val="300"/>
               </a:spcAft>
-              <a:defRPr sz="2438">
+              <a:defRPr sz="2705">
                 <a:solidFill>
                   <a:srgbClr val="000000"/>
                 </a:solidFill>
@@ -8177,7 +8162,7 @@
               </a:defRPr>
             </a:pPr>
             <a:r>
-              <a:rPr sz="2438">
+              <a:rPr sz="2705">
                 <a:solidFill>
                   <a:srgbClr val="000000"/>
                 </a:solidFill>
@@ -8185,29 +8170,135 @@
                 <a:ea typeface="Play"/>
                 <a:cs typeface="Play"/>
               </a:rPr>
-              <a:t>Увеличение объёма работы дизайнеров: 11/нед → 38/6н</a:t>
+              <a:t>Риски</a:t>
             </a:r>
           </a:p>
         </p:txBody>
       </p:sp>
-      <p:graphicFrame>
-        <p:nvGraphicFramePr>
-          <p:cNvPr id="1048" name="Chart 1047"/>
-          <p:cNvGraphicFramePr>
-            <a:graphicFrameLocks noGrp="1"/>
-          </p:cNvGraphicFramePr>
+      <p:sp>
+        <p:nvSpPr>
+          <p:cNvPr id="1048" name="lead"/>
+          <p:cNvSpPr txBox="1"/>
           <p:nvPr/>
-        </p:nvGraphicFramePr>
-        <p:xfrm>
-          <a:off x="274320" y="1628895"/>
-          <a:ext cx="8344814" cy="2160270"/>
-        </p:xfrm>
-        <a:graphic>
-          <a:graphicData uri="http://schemas.openxmlformats.org/drawingml/2006/chart">
-            <c:chart xmlns:c="http://schemas.openxmlformats.org/drawingml/2006/chart" r:id="rId4"/>
-          </a:graphicData>
-        </a:graphic>
-      </p:graphicFrame>
+        </p:nvSpPr>
+        <p:spPr>
+          <a:xfrm>
+            <a:off x="274320" y="1476493"/>
+            <a:ext cx="6792986" cy="421298"/>
+          </a:xfrm>
+          <a:prstGeom prst="rect">
+            <a:avLst/>
+          </a:prstGeom>
+          <a:noFill/>
+        </p:spPr>
+        <p:txBody>
+          <a:bodyPr wrap="square" lIns="76200" rIns="76200" tIns="50800" bIns="50800">
+            <a:spAutoFit/>
+          </a:bodyPr>
+          <a:lstStyle/>
+          <a:p>
+            <a:pPr algn="l">
+              <a:spcAft>
+                <a:spcPts val="300"/>
+              </a:spcAft>
+              <a:defRPr sz="1400">
+                <a:solidFill>
+                  <a:srgbClr val="000000"/>
+                </a:solidFill>
+                <a:latin typeface="Play"/>
+                <a:ea typeface="Play"/>
+                <a:cs typeface="Play"/>
+              </a:defRPr>
+            </a:pPr>
+            <a:r>
+              <a:rPr sz="1400">
+                <a:solidFill>
+                  <a:srgbClr val="000000"/>
+                </a:solidFill>
+                <a:latin typeface="Play"/>
+                <a:ea typeface="Play"/>
+                <a:cs typeface="Play"/>
+              </a:rPr>
+              <a:t>Слабая модель может выдумать неверные цифры – аудит проверяет</a:t>
+            </a:r>
+          </a:p>
+        </p:txBody>
+      </p:sp>
+      <p:sp>
+        <p:nvSpPr>
+          <p:cNvPr id="1049" name="body"/>
+          <p:cNvSpPr txBox="1"/>
+          <p:nvPr/>
+        </p:nvSpPr>
+        <p:spPr>
+          <a:xfrm>
+            <a:off x="274320" y="1956841"/>
+            <a:ext cx="6792986" cy="503809"/>
+          </a:xfrm>
+          <a:prstGeom prst="rect">
+            <a:avLst/>
+          </a:prstGeom>
+          <a:noFill/>
+        </p:spPr>
+        <p:txBody>
+          <a:bodyPr wrap="square" lIns="76200" rIns="76200" tIns="50800" bIns="50800">
+            <a:spAutoFit/>
+          </a:bodyPr>
+          <a:lstStyle/>
+          <a:p>
+            <a:pPr algn="l">
+              <a:spcAft>
+                <a:spcPts val="300"/>
+              </a:spcAft>
+              <a:defRPr sz="1200">
+                <a:solidFill>
+                  <a:srgbClr val="000000"/>
+                </a:solidFill>
+                <a:latin typeface="Play"/>
+                <a:ea typeface="Play"/>
+                <a:cs typeface="Play"/>
+              </a:defRPr>
+            </a:pPr>
+            <a:r>
+              <a:rPr sz="1200">
+                <a:solidFill>
+                  <a:srgbClr val="000000"/>
+                </a:solidFill>
+                <a:latin typeface="Play"/>
+                <a:ea typeface="Play"/>
+                <a:cs typeface="Play"/>
+              </a:rPr>
+              <a:t>• Плохой шаблон приводит к использованию рабочей области вместо готовых страниц</a:t>
+            </a:r>
+          </a:p>
+          <a:p>
+            <a:pPr algn="l">
+              <a:spcAft>
+                <a:spcPts val="300"/>
+              </a:spcAft>
+              <a:defRPr sz="1200">
+                <a:solidFill>
+                  <a:srgbClr val="000000"/>
+                </a:solidFill>
+                <a:latin typeface="Play"/>
+                <a:ea typeface="Play"/>
+                <a:cs typeface="Play"/>
+              </a:defRPr>
+            </a:pPr>
+            <a:r>
+              <a:rPr sz="1200">
+                <a:solidFill>
+                  <a:srgbClr val="000000"/>
+                </a:solidFill>
+                <a:latin typeface="Play"/>
+                <a:ea typeface="Play"/>
+                <a:cs typeface="Play"/>
+              </a:rPr>
+              <a:t>• Нагрузка выше 20 одновременных задач требует внешней очереди</a:t>
+            </a:r>
+          </a:p>
+        </p:txBody>
+      </p:sp>
     </p:spTree>
   </p:cSld>
   <p:clrMapOvr>
@@ -8226,43 +8317,16 @@
         <p:nvPr/>
       </p:nvGrpSpPr>
       <p:grpSpPr/>
-      <p:pic>
-        <p:nvPicPr>
-          <p:cNvPr descr=" " id="2385" name="Google Shape;2385;p88"/>
-          <p:cNvPicPr preferRelativeResize="0"/>
+      <p:sp>
+        <p:nvSpPr>
+          <p:cNvPr id="662" name="Google Shape;662;p55"/>
+          <p:cNvSpPr/>
           <p:nvPr/>
-        </p:nvPicPr>
-        <p:blipFill rotWithShape="1">
-          <a:blip r:embed="rId2">
-            <a:alphaModFix/>
-          </a:blip>
-          <a:srcRect b="0" l="0" r="0" t="0"/>
-          <a:stretch/>
-        </p:blipFill>
+        </p:nvSpPr>
         <p:spPr>
           <a:xfrm>
-            <a:off x="388142" y="2000324"/>
-            <a:ext cx="8755811" cy="9524"/>
-          </a:xfrm>
-          <a:prstGeom prst="rect">
-            <a:avLst/>
-          </a:prstGeom>
-          <a:noFill/>
-          <a:ln>
-            <a:noFill/>
-          </a:ln>
-        </p:spPr>
-      </p:pic>
-      <p:sp>
-        <p:nvSpPr>
-          <p:cNvPr id="2386" name="Google Shape;2386;p88"/>
-          <p:cNvSpPr/>
-          <p:nvPr/>
-        </p:nvSpPr>
-        <p:spPr>
-          <a:xfrm>
-            <a:off x="319086" y="1286042"/>
-            <a:ext cx="1690679" cy="1128566"/>
+            <a:off x="8667705" y="4666977"/>
+            <a:ext cx="190499" cy="190475"/>
           </a:xfrm>
           <a:prstGeom prst="rect">
             <a:avLst/>
@@ -8296,14 +8360,14 @@
       </p:sp>
       <p:sp>
         <p:nvSpPr>
-          <p:cNvPr id="2388" name="Google Shape;2388;p88"/>
+          <p:cNvPr id="663" name="Google Shape;663;p55"/>
           <p:cNvSpPr/>
           <p:nvPr/>
         </p:nvSpPr>
         <p:spPr>
           <a:xfrm>
-            <a:off x="2600312" y="1286042"/>
-            <a:ext cx="1690679" cy="1128566"/>
+            <a:off x="285748" y="286047"/>
+            <a:ext cx="8572456" cy="3938075"/>
           </a:xfrm>
           <a:prstGeom prst="rect">
             <a:avLst/>
@@ -8337,14 +8401,14 @@
       </p:sp>
       <p:sp>
         <p:nvSpPr>
-          <p:cNvPr id="2390" name="Google Shape;2390;p88"/>
+          <p:cNvPr id="664" name="Google Shape;664;p55"/>
           <p:cNvSpPr/>
           <p:nvPr/>
         </p:nvSpPr>
         <p:spPr>
           <a:xfrm>
-            <a:off x="4881537" y="1286042"/>
-            <a:ext cx="1690679" cy="1128566"/>
+            <a:off x="285748" y="1209852"/>
+            <a:ext cx="8572456" cy="3014270"/>
           </a:xfrm>
           <a:prstGeom prst="rect">
             <a:avLst/>
@@ -8378,19 +8442,23 @@
       </p:sp>
       <p:sp>
         <p:nvSpPr>
-          <p:cNvPr id="2392" name="Google Shape;2392;p88"/>
+          <p:cNvPr id="665" name="Google Shape;665;p55"/>
           <p:cNvSpPr/>
           <p:nvPr/>
         </p:nvSpPr>
         <p:spPr>
           <a:xfrm>
-            <a:off x="7162763" y="1286042"/>
-            <a:ext cx="1690679" cy="1128566"/>
+            <a:off x="285749" y="1209852"/>
+            <a:ext cx="2071677" cy="3014270"/>
           </a:xfrm>
-          <a:prstGeom prst="rect">
-            <a:avLst/>
+          <a:prstGeom prst="roundRect">
+            <a:avLst>
+              <a:gd fmla="val 4634" name="adj"/>
+            </a:avLst>
           </a:prstGeom>
-          <a:noFill/>
+          <a:solidFill>
+            <a:schemeClr val="lt2"/>
+          </a:solidFill>
           <a:ln>
             <a:noFill/>
           </a:ln>
@@ -8419,14 +8487,329 @@
       </p:sp>
       <p:sp>
         <p:nvSpPr>
-          <p:cNvPr id="2393" name="title"/>
+          <p:cNvPr id="667" name="Google Shape;667;p55"/>
+          <p:cNvSpPr/>
+          <p:nvPr/>
+        </p:nvSpPr>
+        <p:spPr>
+          <a:xfrm>
+            <a:off x="438148" y="1362233"/>
+            <a:ext cx="76199" cy="76190"/>
+          </a:xfrm>
+          <a:prstGeom prst="roundRect">
+            <a:avLst>
+              <a:gd fmla="val 31500" name="adj"/>
+            </a:avLst>
+          </a:prstGeom>
+          <a:solidFill>
+            <a:srgbClr val="0077FF"/>
+          </a:solidFill>
+          <a:ln>
+            <a:noFill/>
+          </a:ln>
+        </p:spPr>
+        <p:txBody>
+          <a:bodyPr anchorCtr="0" anchor="ctr" bIns="91425" lIns="91425" spcFirstLastPara="1" rIns="91425" wrap="square" tIns="91425">
+            <a:noAutofit/>
+          </a:bodyPr>
+          <a:lstStyle/>
+          <a:p>
+            <a:pPr indent="0" lvl="0" marL="0" rtl="0" algn="l">
+              <a:spcBef>
+                <a:spcPts val="0"/>
+              </a:spcBef>
+              <a:spcAft>
+                <a:spcPts val="0"/>
+              </a:spcAft>
+              <a:buNone/>
+            </a:pPr>
+            <a:r>
+              <a:t/>
+            </a:r>
+            <a:endParaRPr/>
+          </a:p>
+        </p:txBody>
+      </p:sp>
+      <p:sp>
+        <p:nvSpPr>
+          <p:cNvPr id="670" name="Google Shape;670;p55"/>
+          <p:cNvSpPr/>
+          <p:nvPr/>
+        </p:nvSpPr>
+        <p:spPr>
+          <a:xfrm>
+            <a:off x="2452675" y="1209852"/>
+            <a:ext cx="2071677" cy="3014270"/>
+          </a:xfrm>
+          <a:prstGeom prst="roundRect">
+            <a:avLst>
+              <a:gd fmla="val 4634" name="adj"/>
+            </a:avLst>
+          </a:prstGeom>
+          <a:solidFill>
+            <a:schemeClr val="lt2"/>
+          </a:solidFill>
+          <a:ln>
+            <a:noFill/>
+          </a:ln>
+        </p:spPr>
+        <p:txBody>
+          <a:bodyPr anchorCtr="0" anchor="ctr" bIns="91425" lIns="91425" spcFirstLastPara="1" rIns="91425" wrap="square" tIns="91425">
+            <a:noAutofit/>
+          </a:bodyPr>
+          <a:lstStyle/>
+          <a:p>
+            <a:pPr indent="0" lvl="0" marL="0" rtl="0" algn="l">
+              <a:spcBef>
+                <a:spcPts val="0"/>
+              </a:spcBef>
+              <a:spcAft>
+                <a:spcPts val="0"/>
+              </a:spcAft>
+              <a:buNone/>
+            </a:pPr>
+            <a:r>
+              <a:t/>
+            </a:r>
+            <a:endParaRPr/>
+          </a:p>
+        </p:txBody>
+      </p:sp>
+      <p:sp>
+        <p:nvSpPr>
+          <p:cNvPr id="672" name="Google Shape;672;p55"/>
+          <p:cNvSpPr/>
+          <p:nvPr/>
+        </p:nvSpPr>
+        <p:spPr>
+          <a:xfrm>
+            <a:off x="2605074" y="1362233"/>
+            <a:ext cx="76199" cy="76190"/>
+          </a:xfrm>
+          <a:prstGeom prst="roundRect">
+            <a:avLst>
+              <a:gd fmla="val 31500" name="adj"/>
+            </a:avLst>
+          </a:prstGeom>
+          <a:solidFill>
+            <a:srgbClr val="0077FF"/>
+          </a:solidFill>
+          <a:ln>
+            <a:noFill/>
+          </a:ln>
+        </p:spPr>
+        <p:txBody>
+          <a:bodyPr anchorCtr="0" anchor="ctr" bIns="91425" lIns="91425" spcFirstLastPara="1" rIns="91425" wrap="square" tIns="91425">
+            <a:noAutofit/>
+          </a:bodyPr>
+          <a:lstStyle/>
+          <a:p>
+            <a:pPr indent="0" lvl="0" marL="0" rtl="0" algn="l">
+              <a:spcBef>
+                <a:spcPts val="0"/>
+              </a:spcBef>
+              <a:spcAft>
+                <a:spcPts val="0"/>
+              </a:spcAft>
+              <a:buNone/>
+            </a:pPr>
+            <a:r>
+              <a:t/>
+            </a:r>
+            <a:endParaRPr/>
+          </a:p>
+        </p:txBody>
+      </p:sp>
+      <p:sp>
+        <p:nvSpPr>
+          <p:cNvPr id="675" name="Google Shape;675;p55"/>
+          <p:cNvSpPr/>
+          <p:nvPr/>
+        </p:nvSpPr>
+        <p:spPr>
+          <a:xfrm>
+            <a:off x="4619601" y="1209852"/>
+            <a:ext cx="2071677" cy="3014270"/>
+          </a:xfrm>
+          <a:prstGeom prst="roundRect">
+            <a:avLst>
+              <a:gd fmla="val 4634" name="adj"/>
+            </a:avLst>
+          </a:prstGeom>
+          <a:solidFill>
+            <a:schemeClr val="lt2"/>
+          </a:solidFill>
+          <a:ln>
+            <a:noFill/>
+          </a:ln>
+        </p:spPr>
+        <p:txBody>
+          <a:bodyPr anchorCtr="0" anchor="ctr" bIns="91425" lIns="91425" spcFirstLastPara="1" rIns="91425" wrap="square" tIns="91425">
+            <a:noAutofit/>
+          </a:bodyPr>
+          <a:lstStyle/>
+          <a:p>
+            <a:pPr indent="0" lvl="0" marL="0" rtl="0" algn="l">
+              <a:spcBef>
+                <a:spcPts val="0"/>
+              </a:spcBef>
+              <a:spcAft>
+                <a:spcPts val="0"/>
+              </a:spcAft>
+              <a:buNone/>
+            </a:pPr>
+            <a:r>
+              <a:t/>
+            </a:r>
+            <a:endParaRPr/>
+          </a:p>
+        </p:txBody>
+      </p:sp>
+      <p:sp>
+        <p:nvSpPr>
+          <p:cNvPr id="677" name="Google Shape;677;p55"/>
+          <p:cNvSpPr/>
+          <p:nvPr/>
+        </p:nvSpPr>
+        <p:spPr>
+          <a:xfrm>
+            <a:off x="4772001" y="1362233"/>
+            <a:ext cx="76199" cy="76190"/>
+          </a:xfrm>
+          <a:prstGeom prst="roundRect">
+            <a:avLst>
+              <a:gd fmla="val 31500" name="adj"/>
+            </a:avLst>
+          </a:prstGeom>
+          <a:solidFill>
+            <a:srgbClr val="0077FF"/>
+          </a:solidFill>
+          <a:ln>
+            <a:noFill/>
+          </a:ln>
+        </p:spPr>
+        <p:txBody>
+          <a:bodyPr anchorCtr="0" anchor="ctr" bIns="91425" lIns="91425" spcFirstLastPara="1" rIns="91425" wrap="square" tIns="91425">
+            <a:noAutofit/>
+          </a:bodyPr>
+          <a:lstStyle/>
+          <a:p>
+            <a:pPr indent="0" lvl="0" marL="0" rtl="0" algn="l">
+              <a:spcBef>
+                <a:spcPts val="0"/>
+              </a:spcBef>
+              <a:spcAft>
+                <a:spcPts val="0"/>
+              </a:spcAft>
+              <a:buNone/>
+            </a:pPr>
+            <a:r>
+              <a:t/>
+            </a:r>
+            <a:endParaRPr/>
+          </a:p>
+        </p:txBody>
+      </p:sp>
+      <p:sp>
+        <p:nvSpPr>
+          <p:cNvPr id="680" name="Google Shape;680;p55"/>
+          <p:cNvSpPr/>
+          <p:nvPr/>
+        </p:nvSpPr>
+        <p:spPr>
+          <a:xfrm>
+            <a:off x="6786527" y="1209852"/>
+            <a:ext cx="2071677" cy="3014270"/>
+          </a:xfrm>
+          <a:prstGeom prst="roundRect">
+            <a:avLst>
+              <a:gd fmla="val 4634" name="adj"/>
+            </a:avLst>
+          </a:prstGeom>
+          <a:solidFill>
+            <a:schemeClr val="lt2"/>
+          </a:solidFill>
+          <a:ln>
+            <a:noFill/>
+          </a:ln>
+        </p:spPr>
+        <p:txBody>
+          <a:bodyPr anchorCtr="0" anchor="ctr" bIns="91425" lIns="91425" spcFirstLastPara="1" rIns="91425" wrap="square" tIns="91425">
+            <a:noAutofit/>
+          </a:bodyPr>
+          <a:lstStyle/>
+          <a:p>
+            <a:pPr indent="0" lvl="0" marL="0" rtl="0" algn="l">
+              <a:spcBef>
+                <a:spcPts val="0"/>
+              </a:spcBef>
+              <a:spcAft>
+                <a:spcPts val="0"/>
+              </a:spcAft>
+              <a:buNone/>
+            </a:pPr>
+            <a:r>
+              <a:t/>
+            </a:r>
+            <a:endParaRPr/>
+          </a:p>
+        </p:txBody>
+      </p:sp>
+      <p:sp>
+        <p:nvSpPr>
+          <p:cNvPr id="682" name="Google Shape;682;p55"/>
+          <p:cNvSpPr/>
+          <p:nvPr/>
+        </p:nvSpPr>
+        <p:spPr>
+          <a:xfrm>
+            <a:off x="6938927" y="1362233"/>
+            <a:ext cx="76199" cy="76190"/>
+          </a:xfrm>
+          <a:prstGeom prst="roundRect">
+            <a:avLst>
+              <a:gd fmla="val 31500" name="adj"/>
+            </a:avLst>
+          </a:prstGeom>
+          <a:solidFill>
+            <a:srgbClr val="0077FF"/>
+          </a:solidFill>
+          <a:ln>
+            <a:noFill/>
+          </a:ln>
+        </p:spPr>
+        <p:txBody>
+          <a:bodyPr anchorCtr="0" anchor="ctr" bIns="91425" lIns="91425" spcFirstLastPara="1" rIns="91425" wrap="square" tIns="91425">
+            <a:noAutofit/>
+          </a:bodyPr>
+          <a:lstStyle/>
+          <a:p>
+            <a:pPr indent="0" lvl="0" marL="0" rtl="0" algn="l">
+              <a:spcBef>
+                <a:spcPts val="0"/>
+              </a:spcBef>
+              <a:spcAft>
+                <a:spcPts val="0"/>
+              </a:spcAft>
+              <a:buNone/>
+            </a:pPr>
+            <a:r>
+              <a:t/>
+            </a:r>
+            <a:endParaRPr/>
+          </a:p>
+        </p:txBody>
+      </p:sp>
+      <p:sp>
+        <p:nvSpPr>
+          <p:cNvPr id="683" name="title"/>
           <p:cNvSpPr txBox="1"/>
           <p:nvPr/>
         </p:nvSpPr>
         <p:spPr>
           <a:xfrm>
             <a:off x="274320" y="282943"/>
-            <a:ext cx="6792986" cy="932027"/>
+            <a:ext cx="6792986" cy="617220"/>
           </a:xfrm>
           <a:prstGeom prst="rect">
             <a:avLst/>
@@ -8443,7 +8826,7 @@
               <a:spcAft>
                 <a:spcPts val="300"/>
               </a:spcAft>
-              <a:defRPr sz="2438">
+              <a:defRPr sz="2705">
                 <a:solidFill>
                   <a:srgbClr val="000000"/>
                 </a:solidFill>
@@ -8453,7 +8836,7 @@
               </a:defRPr>
             </a:pPr>
             <a:r>
-              <a:rPr sz="2438">
+              <a:rPr sz="2705">
                 <a:solidFill>
                   <a:srgbClr val="000000"/>
                 </a:solidFill>
@@ -8461,29 +8844,161 @@
                 <a:ea typeface="Play"/>
                 <a:cs typeface="Play"/>
               </a:rPr>
-              <a:t>Стоимость пилота: 1 400 руб за 6 недель</a:t>
+              <a:t>План пилота</a:t>
             </a:r>
           </a:p>
         </p:txBody>
       </p:sp>
-      <p:graphicFrame>
-        <p:nvGraphicFramePr>
-          <p:cNvPr id="2394" name="Chart 2393"/>
-          <p:cNvGraphicFramePr>
-            <a:graphicFrameLocks noGrp="1"/>
-          </p:cNvGraphicFramePr>
+      <p:sp>
+        <p:nvSpPr>
+          <p:cNvPr id="684" name="lead"/>
+          <p:cNvSpPr txBox="1"/>
           <p:nvPr/>
-        </p:nvGraphicFramePr>
-        <p:xfrm>
-          <a:off x="274320" y="2009822"/>
-          <a:ext cx="8344814" cy="2160270"/>
-        </p:xfrm>
-        <a:graphic>
-          <a:graphicData uri="http://schemas.openxmlformats.org/drawingml/2006/chart">
-            <c:chart xmlns:c="http://schemas.openxmlformats.org/drawingml/2006/chart" r:id="rId4"/>
-          </a:graphicData>
-        </a:graphic>
-      </p:graphicFrame>
+        </p:nvSpPr>
+        <p:spPr>
+          <a:xfrm>
+            <a:off x="274320" y="1438431"/>
+            <a:ext cx="6792986" cy="934260"/>
+          </a:xfrm>
+          <a:prstGeom prst="rect">
+            <a:avLst/>
+          </a:prstGeom>
+          <a:noFill/>
+        </p:spPr>
+        <p:txBody>
+          <a:bodyPr wrap="square" lIns="76200" rIns="76200" tIns="50800" bIns="50800">
+            <a:spAutoFit/>
+          </a:bodyPr>
+          <a:lstStyle/>
+          <a:p>
+            <a:pPr algn="l">
+              <a:spcAft>
+                <a:spcPts val="300"/>
+              </a:spcAft>
+              <a:defRPr sz="2705">
+                <a:solidFill>
+                  <a:srgbClr val="000000"/>
+                </a:solidFill>
+                <a:latin typeface="Play"/>
+                <a:ea typeface="Play"/>
+                <a:cs typeface="Play"/>
+              </a:defRPr>
+            </a:pPr>
+            <a:r>
+              <a:rPr sz="2705">
+                <a:solidFill>
+                  <a:srgbClr val="000000"/>
+                </a:solidFill>
+                <a:latin typeface="Play"/>
+                <a:ea typeface="Play"/>
+                <a:cs typeface="Play"/>
+              </a:rPr>
+              <a:t>Подключить ещё 4 команды в Q3 2026</a:t>
+            </a:r>
+          </a:p>
+        </p:txBody>
+      </p:sp>
+      <p:sp>
+        <p:nvSpPr>
+          <p:cNvPr id="685" name="body"/>
+          <p:cNvSpPr txBox="1"/>
+          <p:nvPr/>
+        </p:nvSpPr>
+        <p:spPr>
+          <a:xfrm>
+            <a:off x="274320" y="2532974"/>
+            <a:ext cx="6792986" cy="1576835"/>
+          </a:xfrm>
+          <a:prstGeom prst="rect">
+            <a:avLst/>
+          </a:prstGeom>
+          <a:noFill/>
+        </p:spPr>
+        <p:txBody>
+          <a:bodyPr wrap="square" lIns="76200" rIns="76200" tIns="50800" bIns="50800">
+            <a:spAutoFit/>
+          </a:bodyPr>
+          <a:lstStyle/>
+          <a:p>
+            <a:pPr algn="l">
+              <a:spcAft>
+                <a:spcPts val="300"/>
+              </a:spcAft>
+              <a:defRPr sz="1800">
+                <a:solidFill>
+                  <a:srgbClr val="000000"/>
+                </a:solidFill>
+                <a:latin typeface="Play"/>
+                <a:ea typeface="Play"/>
+                <a:cs typeface="Play"/>
+              </a:defRPr>
+            </a:pPr>
+            <a:r>
+              <a:rPr sz="1800">
+                <a:solidFill>
+                  <a:srgbClr val="000000"/>
+                </a:solidFill>
+                <a:latin typeface="Play"/>
+                <a:ea typeface="Play"/>
+                <a:cs typeface="Play"/>
+              </a:rPr>
+              <a:t>• Настроить домен и HTTPS</a:t>
+            </a:r>
+          </a:p>
+          <a:p>
+            <a:pPr algn="l">
+              <a:spcAft>
+                <a:spcPts val="300"/>
+              </a:spcAft>
+              <a:defRPr sz="1800">
+                <a:solidFill>
+                  <a:srgbClr val="000000"/>
+                </a:solidFill>
+                <a:latin typeface="Play"/>
+                <a:ea typeface="Play"/>
+                <a:cs typeface="Play"/>
+              </a:defRPr>
+            </a:pPr>
+            <a:r>
+              <a:rPr sz="1800">
+                <a:solidFill>
+                  <a:srgbClr val="000000"/>
+                </a:solidFill>
+                <a:latin typeface="Play"/>
+                <a:ea typeface="Play"/>
+                <a:cs typeface="Play"/>
+              </a:rPr>
+              <a:t>• Интегрировать с корпоративным хранилищем документов</a:t>
+            </a:r>
+          </a:p>
+          <a:p>
+            <a:pPr algn="l">
+              <a:spcAft>
+                <a:spcPts val="300"/>
+              </a:spcAft>
+              <a:defRPr sz="1800">
+                <a:solidFill>
+                  <a:srgbClr val="000000"/>
+                </a:solidFill>
+                <a:latin typeface="Play"/>
+                <a:ea typeface="Play"/>
+                <a:cs typeface="Play"/>
+              </a:defRPr>
+            </a:pPr>
+            <a:r>
+              <a:rPr sz="1800">
+                <a:solidFill>
+                  <a:srgbClr val="000000"/>
+                </a:solidFill>
+                <a:latin typeface="Play"/>
+                <a:ea typeface="Play"/>
+                <a:cs typeface="Play"/>
+              </a:rPr>
+              <a:t>• В Q1 2027 добавить генерацию иллюстраций</a:t>
+            </a:r>
+          </a:p>
+        </p:txBody>
+      </p:sp>
     </p:spTree>
   </p:cSld>
   <p:clrMapOvr>
@@ -9021,7 +9536,7 @@
                 <a:ea typeface="Play"/>
                 <a:cs typeface="Play"/>
               </a:rPr>
-              <a:t>Ключевые риски и меры</a:t>
+              <a:t>Что мы просим решить</a:t>
             </a:r>
           </a:p>
         </p:txBody>
@@ -9035,7 +9550,7 @@
         <p:spPr>
           <a:xfrm>
             <a:off x="274320" y="1476493"/>
-            <a:ext cx="6792986" cy="443739"/>
+            <a:ext cx="6792986" cy="380990"/>
           </a:xfrm>
           <a:prstGeom prst="rect">
             <a:avLst/>
@@ -9052,7 +9567,7 @@
               <a:spcAft>
                 <a:spcPts val="300"/>
               </a:spcAft>
-              <a:defRPr sz="1800">
+              <a:defRPr sz="1600">
                 <a:solidFill>
                   <a:srgbClr val="000000"/>
                 </a:solidFill>
@@ -9062,7 +9577,7 @@
               </a:defRPr>
             </a:pPr>
             <a:r>
-              <a:rPr sz="1800">
+              <a:rPr sz="1600">
                 <a:solidFill>
                   <a:srgbClr val="000000"/>
                 </a:solidFill>
@@ -9070,7 +9585,7 @@
                 <a:ea typeface="Play"/>
                 <a:cs typeface="Play"/>
               </a:rPr>
-              <a:t>Модель может выдумать цифры – аудит проверяет</a:t>
+              <a:t>Одобрить запуск сервиса на всю компанию</a:t>
             </a:r>
           </a:p>
         </p:txBody>
@@ -9083,8 +9598,8 @@
         </p:nvSpPr>
         <p:spPr>
           <a:xfrm>
-            <a:off x="274320" y="1956460"/>
-            <a:ext cx="6792986" cy="504189"/>
+            <a:off x="274320" y="1916532"/>
+            <a:ext cx="6792986" cy="544117"/>
           </a:xfrm>
           <a:prstGeom prst="rect">
             <a:avLst/>
@@ -9119,7 +9634,7 @@
                 <a:ea typeface="Play"/>
                 <a:cs typeface="Play"/>
               </a:rPr>
-              <a:t>• Плохой шаблон – сервис использует рабочую область</a:t>
+              <a:t>• Предоставить ресурсы для масштабирования (серверы, лицензии)</a:t>
             </a:r>
           </a:p>
           <a:p>
@@ -9145,7 +9660,7 @@
                 <a:ea typeface="Play"/>
                 <a:cs typeface="Play"/>
               </a:rPr>
-              <a:t>• Нагрузка &gt;20 задач – нужна внешняя очередь</a:t>
+              <a:t>• Согласовать сроки и ответственных за интеграцию</a:t>
             </a:r>
           </a:p>
         </p:txBody>
@@ -9177,7 +9692,7 @@
         <p:spPr>
           <a:xfrm>
             <a:off x="1543608" y="159030"/>
-            <a:ext cx="7202525" cy="4133046"/>
+            <a:ext cx="7202525" cy="4013336"/>
           </a:xfrm>
           <a:prstGeom prst="roundRect">
             <a:avLst/>
@@ -9223,7 +9738,7 @@
         <p:spPr>
           <a:xfrm>
             <a:off x="1670608" y="286030"/>
-            <a:ext cx="6948525" cy="1183640"/>
+            <a:ext cx="6948525" cy="655320"/>
           </a:xfrm>
           <a:prstGeom prst="rect">
             <a:avLst/>
@@ -9258,7 +9773,7 @@
                 <a:ea typeface="Play"/>
                 <a:cs typeface="Play"/>
               </a:rPr>
-              <a:t>Решение: запуск сервиса на всю компанию</a:t>
+              <a:t>Вывод</a:t>
             </a:r>
           </a:p>
         </p:txBody>
@@ -9271,8 +9786,8 @@
         </p:nvSpPr>
         <p:spPr>
           <a:xfrm>
-            <a:off x="1670608" y="1649692"/>
-            <a:ext cx="6948525" cy="1442333"/>
+            <a:off x="1670608" y="1337310"/>
+            <a:ext cx="6948525" cy="1529750"/>
           </a:xfrm>
           <a:prstGeom prst="rect">
             <a:avLst/>
@@ -9307,7 +9822,7 @@
                 <a:ea typeface="Play"/>
                 <a:cs typeface="Play"/>
               </a:rPr>
-              <a:t>Q3 2026 подключить 4 команды, Q4 2026 доступ для всей компании, Q1 2027 генерация иллюстраций</a:t>
+              <a:t>Автоматизация вёрстки повышает скорость, качество и экономит ресурсы</a:t>
             </a:r>
           </a:p>
         </p:txBody>
@@ -9320,8 +9835,8 @@
         </p:nvSpPr>
         <p:spPr>
           <a:xfrm>
-            <a:off x="1670608" y="3258448"/>
-            <a:ext cx="6948525" cy="1164961"/>
+            <a:off x="1670608" y="3052226"/>
+            <a:ext cx="6948525" cy="1371183"/>
           </a:xfrm>
           <a:prstGeom prst="rect">
             <a:avLst/>
@@ -9338,7 +9853,7 @@
               <a:spcAft>
                 <a:spcPts val="300"/>
               </a:spcAft>
-              <a:defRPr sz="2438">
+              <a:defRPr sz="1800">
                 <a:solidFill>
                   <a:srgbClr val="000000"/>
                 </a:solidFill>
@@ -9348,7 +9863,7 @@
               </a:defRPr>
             </a:pPr>
             <a:r>
-              <a:rPr sz="2438">
+              <a:rPr sz="1800">
                 <a:solidFill>
                   <a:srgbClr val="000000"/>
                 </a:solidFill>
@@ -9356,7 +9871,7 @@
                 <a:ea typeface="Play"/>
                 <a:cs typeface="Play"/>
               </a:rPr>
-              <a:t>• Требуем одобрение запуска и ресурсы</a:t>
+              <a:t>• Пилот показал значительный рост эффективности</a:t>
             </a:r>
           </a:p>
           <a:p>
@@ -9364,7 +9879,7 @@
               <a:spcAft>
                 <a:spcPts val="300"/>
               </a:spcAft>
-              <a:defRPr sz="2438">
+              <a:defRPr sz="1800">
                 <a:solidFill>
                   <a:srgbClr val="000000"/>
                 </a:solidFill>
@@ -9374,7 +9889,7 @@
               </a:defRPr>
             </a:pPr>
             <a:r>
-              <a:rPr sz="2438">
+              <a:rPr sz="1800">
                 <a:solidFill>
                   <a:srgbClr val="000000"/>
                 </a:solidFill>
@@ -9382,7 +9897,7 @@
                 <a:ea typeface="Play"/>
                 <a:cs typeface="Play"/>
               </a:rPr>
-              <a:t>• Ожидаем ускорение и стандартизацию</a:t>
+              <a:t>• Запуск на всю компанию – стратегический шаг к цифровой трансформации</a:t>
             </a:r>
           </a:p>
         </p:txBody>

--- a/samples/VK_Tech_шаблон__focus.pptx
+++ b/samples/VK_Tech_шаблон__focus.pptx
@@ -19,6 +19,8 @@
     <p:sldId id="317" r:id="rId69"/>
     <p:sldId id="318" r:id="rId70"/>
     <p:sldId id="319" r:id="rId71"/>
+    <p:sldId id="320" r:id="rId72"/>
+    <p:sldId id="321" r:id="rId73"/>
   </p:sldIdLst>
   <p:sldSz cy="5143500" cx="9144000"/>
   <p:notesSz cx="6858000" cy="9144000"/>
@@ -279,7 +281,7 @@
               <c:strCache>
                 <c:ptCount val="1"/>
                 <c:pt idx="0">
-                  <c:v>До</c:v>
+                  <c:v>Кол-во</c:v>
                 </c:pt>
               </c:strCache>
             </c:strRef>
@@ -296,114 +298,36 @@
           </c:spPr>
           <c:cat>
             <c:strRef>
-              <c:f>Sheet1!$A$2:$A$5</c:f>
+              <c:f>Sheet1!$A$2:$A$3</c:f>
               <c:strCache>
-                <c:ptCount val="4"/>
+                <c:ptCount val="2"/>
                 <c:pt idx="0">
-                  <c:v>Время на колоду (мин)</c:v>
+                  <c:v>Запросы</c:v>
                 </c:pt>
                 <c:pt idx="1">
-                  <c:v>Время до первой версии (дн)</c:v>
-                </c:pt>
-                <c:pt idx="2">
-                  <c:v>Нарушения стиля</c:v>
-                </c:pt>
-                <c:pt idx="3">
-                  <c:v>Запросы закрыты/нед</c:v>
+                  <c:v>Закрыто</c:v>
                 </c:pt>
               </c:strCache>
             </c:strRef>
           </c:cat>
           <c:val>
             <c:numRef>
-              <c:f>Sheet1!$B$2:$B$5</c:f>
+              <c:f>Sheet1!$B$2:$B$3</c:f>
               <c:numCache>
                 <c:formatCode>General</c:formatCode>
-                <c:ptCount val="4"/>
+                <c:ptCount val="2"/>
                 <c:pt idx="0">
-                  <c:v>186.0</c:v>
+                  <c:v>27.0</c:v>
                 </c:pt>
                 <c:pt idx="1">
-                  <c:v>6.0</c:v>
-                </c:pt>
-                <c:pt idx="2">
-                  <c:v>19.0</c:v>
-                </c:pt>
-                <c:pt idx="3">
                   <c:v>11.0</c:v>
                 </c:pt>
               </c:numCache>
             </c:numRef>
           </c:val>
         </c:ser>
-        <c:ser>
-          <c:idx val="1"/>
-          <c:order val="1"/>
-          <c:tx>
-            <c:strRef>
-              <c:f>Sheet1!$C$1</c:f>
-              <c:strCache>
-                <c:ptCount val="1"/>
-                <c:pt idx="0">
-                  <c:v>После</c:v>
-                </c:pt>
-              </c:strCache>
-            </c:strRef>
-          </c:tx>
-          <c:spPr>
-            <a:solidFill>
-              <a:srgbClr val="FFD91D"/>
-            </a:solidFill>
-            <a:ln>
-              <a:solidFill>
-                <a:srgbClr val="FFD91D"/>
-              </a:solidFill>
-            </a:ln>
-          </c:spPr>
-          <c:cat>
-            <c:strRef>
-              <c:f>Sheet1!$A$2:$A$5</c:f>
-              <c:strCache>
-                <c:ptCount val="4"/>
-                <c:pt idx="0">
-                  <c:v>Время на колоду (мин)</c:v>
-                </c:pt>
-                <c:pt idx="1">
-                  <c:v>Время до первой версии (дн)</c:v>
-                </c:pt>
-                <c:pt idx="2">
-                  <c:v>Нарушения стиля</c:v>
-                </c:pt>
-                <c:pt idx="3">
-                  <c:v>Запросы закрыты/нед</c:v>
-                </c:pt>
-              </c:strCache>
-            </c:strRef>
-          </c:cat>
-          <c:val>
-            <c:numRef>
-              <c:f>Sheet1!$C$2:$C$5</c:f>
-              <c:numCache>
-                <c:formatCode>General</c:formatCode>
-                <c:ptCount val="4"/>
-                <c:pt idx="0">
-                  <c:v>4.0</c:v>
-                </c:pt>
-                <c:pt idx="1">
-                  <c:v>1.0</c:v>
-                </c:pt>
-                <c:pt idx="2">
-                  <c:v>2.0</c:v>
-                </c:pt>
-                <c:pt idx="3">
-                  <c:v>38.0</c:v>
-                </c:pt>
-              </c:numCache>
-            </c:numRef>
-          </c:val>
-        </c:ser>
         <c:dLbls>
-          <c:numFmt formatCode="0" sourceLinked="0"/>
+          <c:numFmt formatCode="0&quot; запросов&quot;" sourceLinked="0"/>
           <c:txPr>
             <a:bodyPr wrap="none"/>
             <a:lstStyle/>
@@ -480,6 +404,31 @@
             </a:ln>
           </c:spPr>
         </c:majorGridlines>
+        <c:title>
+          <c:tx>
+            <c:rich>
+              <a:bodyPr rot="0" vert="horz"/>
+              <a:lstStyle/>
+              <a:p>
+                <a:pPr>
+                  <a:defRPr sz="1100" b="0">
+                    <a:solidFill>
+                      <a:srgbClr val="000000"/>
+                    </a:solidFill>
+                    <a:latin typeface="Play"/>
+                    <a:ea typeface="Play"/>
+                    <a:cs typeface="Play"/>
+                  </a:defRPr>
+                </a:pPr>
+                <a:r>
+                  <a:t>Кол-во, запросов</a:t>
+                </a:r>
+              </a:p>
+            </c:rich>
+          </c:tx>
+          <c:layout/>
+          <c:overlay val="0"/>
+        </c:title>
         <c:majorTickMark val="out"/>
         <c:minorTickMark val="none"/>
         <c:tickLblPos val="nextTo"/>
@@ -503,10 +452,648 @@
         <c:crosses val="autoZero"/>
       </c:valAx>
     </c:plotArea>
-    <c:legend>
-      <c:legendPos val="b"/>
-      <c:overlay val="0"/>
-    </c:legend>
+    <c:dispBlanksAs val="gap"/>
+  </c:chart>
+  <c:txPr>
+    <a:bodyPr/>
+    <a:lstStyle/>
+    <a:p>
+      <a:pPr>
+        <a:defRPr sz="1200" b="0">
+          <a:solidFill>
+            <a:srgbClr val="000000"/>
+          </a:solidFill>
+          <a:latin typeface="Play"/>
+          <a:ea typeface="Play"/>
+          <a:cs typeface="Play"/>
+        </a:defRPr>
+      </a:pPr>
+      <a:endParaRPr lang="en-US"/>
+    </a:p>
+  </c:txPr>
+  <c:externalData r:id="rId1">
+    <c:autoUpdate val="0"/>
+  </c:externalData>
+</c:chartSpace>
+</file>
+
+<file path=ppt/charts/chart2.xml><?xml version="1.0" encoding="utf-8"?>
+<c:chartSpace xmlns:c="http://schemas.openxmlformats.org/drawingml/2006/chart" xmlns:a="http://schemas.openxmlformats.org/drawingml/2006/main" xmlns:r="http://schemas.openxmlformats.org/officeDocument/2006/relationships">
+  <c:date1904 val="0"/>
+  <c:chart>
+    <c:autoTitleDeleted val="1"/>
+    <c:plotArea>
+      <c:barChart>
+        <c:barDir val="col"/>
+        <c:grouping val="clustered"/>
+        <c:ser>
+          <c:idx val="0"/>
+          <c:order val="0"/>
+          <c:tx>
+            <c:strRef>
+              <c:f>Sheet1!$B$1</c:f>
+              <c:strCache>
+                <c:ptCount val="1"/>
+                <c:pt idx="0">
+                  <c:v>Время</c:v>
+                </c:pt>
+              </c:strCache>
+            </c:strRef>
+          </c:tx>
+          <c:spPr>
+            <a:solidFill>
+              <a:srgbClr val="0077FF"/>
+            </a:solidFill>
+            <a:ln>
+              <a:solidFill>
+                <a:srgbClr val="0077FF"/>
+              </a:solidFill>
+            </a:ln>
+          </c:spPr>
+          <c:cat>
+            <c:strRef>
+              <c:f>Sheet1!$A$2:$A$3</c:f>
+              <c:strCache>
+                <c:ptCount val="2"/>
+                <c:pt idx="0">
+                  <c:v>Сейчас</c:v>
+                </c:pt>
+                <c:pt idx="1">
+                  <c:v>Сервис</c:v>
+                </c:pt>
+              </c:strCache>
+            </c:strRef>
+          </c:cat>
+          <c:val>
+            <c:numRef>
+              <c:f>Sheet1!$B$2:$B$3</c:f>
+              <c:numCache>
+                <c:formatCode>General</c:formatCode>
+                <c:ptCount val="2"/>
+                <c:pt idx="0">
+                  <c:v>186.0</c:v>
+                </c:pt>
+                <c:pt idx="1">
+                  <c:v>4.0</c:v>
+                </c:pt>
+              </c:numCache>
+            </c:numRef>
+          </c:val>
+        </c:ser>
+        <c:dLbls>
+          <c:numFmt formatCode="0&quot; мин&quot;" sourceLinked="0"/>
+          <c:txPr>
+            <a:bodyPr wrap="none"/>
+            <a:lstStyle/>
+            <a:p>
+              <a:pPr>
+                <a:defRPr sz="1100" b="0">
+                  <a:solidFill>
+                    <a:srgbClr val="000000"/>
+                  </a:solidFill>
+                  <a:latin typeface="Play"/>
+                  <a:ea typeface="Play"/>
+                  <a:cs typeface="Play"/>
+                </a:defRPr>
+              </a:pPr>
+            </a:p>
+          </c:txPr>
+          <c:dLblPos val="outEnd"/>
+          <c:showLegendKey val="0"/>
+          <c:showVal val="1"/>
+          <c:showCatName val="0"/>
+          <c:showSerName val="0"/>
+          <c:showPercent val="0"/>
+          <c:showBubbleSize val="0"/>
+          <c:showLeaderLines val="1"/>
+        </c:dLbls>
+        <c:gapWidth val="60"/>
+        <c:axId val="-2068027336"/>
+        <c:axId val="-2113994440"/>
+      </c:barChart>
+      <c:catAx>
+        <c:axId val="-2068027336"/>
+        <c:scaling>
+          <c:orientation val="minMax"/>
+        </c:scaling>
+        <c:delete val="0"/>
+        <c:axPos val="b"/>
+        <c:majorTickMark val="out"/>
+        <c:minorTickMark val="none"/>
+        <c:tickLblPos val="nextTo"/>
+        <c:txPr>
+          <a:bodyPr/>
+          <a:lstStyle/>
+          <a:p>
+            <a:pPr>
+              <a:defRPr sz="1100" b="0">
+                <a:solidFill>
+                  <a:srgbClr val="000000"/>
+                </a:solidFill>
+                <a:latin typeface="Play"/>
+                <a:ea typeface="Play"/>
+                <a:cs typeface="Play"/>
+              </a:defRPr>
+            </a:pPr>
+          </a:p>
+        </c:txPr>
+        <c:crossAx val="-2113994440"/>
+        <c:crosses val="autoZero"/>
+        <c:auto val="1"/>
+        <c:lblAlgn val="ctr"/>
+        <c:lblOffset val="100"/>
+        <c:noMultiLvlLbl val="0"/>
+      </c:catAx>
+      <c:valAx>
+        <c:axId val="-2113994440"/>
+        <c:scaling/>
+        <c:delete val="0"/>
+        <c:axPos val="l"/>
+        <c:majorGridlines>
+          <c:spPr>
+            <a:ln w="9525">
+              <a:solidFill>
+                <a:srgbClr val="D1D1D1"/>
+              </a:solidFill>
+            </a:ln>
+          </c:spPr>
+        </c:majorGridlines>
+        <c:title>
+          <c:tx>
+            <c:rich>
+              <a:bodyPr rot="0" vert="horz"/>
+              <a:lstStyle/>
+              <a:p>
+                <a:pPr>
+                  <a:defRPr sz="1100" b="0">
+                    <a:solidFill>
+                      <a:srgbClr val="000000"/>
+                    </a:solidFill>
+                    <a:latin typeface="Play"/>
+                    <a:ea typeface="Play"/>
+                    <a:cs typeface="Play"/>
+                  </a:defRPr>
+                </a:pPr>
+                <a:r>
+                  <a:t>Время, мин</a:t>
+                </a:r>
+              </a:p>
+            </c:rich>
+          </c:tx>
+          <c:layout/>
+          <c:overlay val="0"/>
+        </c:title>
+        <c:majorTickMark val="out"/>
+        <c:minorTickMark val="none"/>
+        <c:tickLblPos val="nextTo"/>
+        <c:txPr>
+          <a:bodyPr/>
+          <a:lstStyle/>
+          <a:p>
+            <a:pPr>
+              <a:defRPr sz="1100" b="0">
+                <a:solidFill>
+                  <a:srgbClr val="000000"/>
+                </a:solidFill>
+                <a:latin typeface="Play"/>
+                <a:ea typeface="Play"/>
+                <a:cs typeface="Play"/>
+              </a:defRPr>
+            </a:pPr>
+          </a:p>
+        </c:txPr>
+        <c:crossAx val="-2068027336"/>
+        <c:crosses val="autoZero"/>
+      </c:valAx>
+    </c:plotArea>
+    <c:dispBlanksAs val="gap"/>
+  </c:chart>
+  <c:txPr>
+    <a:bodyPr/>
+    <a:lstStyle/>
+    <a:p>
+      <a:pPr>
+        <a:defRPr sz="1200" b="0">
+          <a:solidFill>
+            <a:srgbClr val="000000"/>
+          </a:solidFill>
+          <a:latin typeface="Play"/>
+          <a:ea typeface="Play"/>
+          <a:cs typeface="Play"/>
+        </a:defRPr>
+      </a:pPr>
+      <a:endParaRPr lang="en-US"/>
+    </a:p>
+  </c:txPr>
+  <c:externalData r:id="rId1">
+    <c:autoUpdate val="0"/>
+  </c:externalData>
+</c:chartSpace>
+</file>
+
+<file path=ppt/charts/chart3.xml><?xml version="1.0" encoding="utf-8"?>
+<c:chartSpace xmlns:c="http://schemas.openxmlformats.org/drawingml/2006/chart" xmlns:a="http://schemas.openxmlformats.org/drawingml/2006/main" xmlns:r="http://schemas.openxmlformats.org/officeDocument/2006/relationships">
+  <c:date1904 val="0"/>
+  <c:chart>
+    <c:autoTitleDeleted val="1"/>
+    <c:plotArea>
+      <c:barChart>
+        <c:barDir val="col"/>
+        <c:grouping val="clustered"/>
+        <c:ser>
+          <c:idx val="0"/>
+          <c:order val="0"/>
+          <c:tx>
+            <c:strRef>
+              <c:f>Sheet1!$B$1</c:f>
+              <c:strCache>
+                <c:ptCount val="1"/>
+                <c:pt idx="0">
+                  <c:v>Нарушения</c:v>
+                </c:pt>
+              </c:strCache>
+            </c:strRef>
+          </c:tx>
+          <c:spPr>
+            <a:solidFill>
+              <a:srgbClr val="0077FF"/>
+            </a:solidFill>
+            <a:ln>
+              <a:solidFill>
+                <a:srgbClr val="0077FF"/>
+              </a:solidFill>
+            </a:ln>
+          </c:spPr>
+          <c:cat>
+            <c:strRef>
+              <c:f>Sheet1!$A$2:$A$3</c:f>
+              <c:strCache>
+                <c:ptCount val="2"/>
+                <c:pt idx="0">
+                  <c:v>Сейчас</c:v>
+                </c:pt>
+                <c:pt idx="1">
+                  <c:v>Сервис</c:v>
+                </c:pt>
+              </c:strCache>
+            </c:strRef>
+          </c:cat>
+          <c:val>
+            <c:numRef>
+              <c:f>Sheet1!$B$2:$B$3</c:f>
+              <c:numCache>
+                <c:formatCode>General</c:formatCode>
+                <c:ptCount val="2"/>
+                <c:pt idx="0">
+                  <c:v>19.0</c:v>
+                </c:pt>
+                <c:pt idx="1">
+                  <c:v>2.0</c:v>
+                </c:pt>
+              </c:numCache>
+            </c:numRef>
+          </c:val>
+        </c:ser>
+        <c:dLbls>
+          <c:numFmt formatCode="0&quot; колод&quot;" sourceLinked="0"/>
+          <c:txPr>
+            <a:bodyPr wrap="none"/>
+            <a:lstStyle/>
+            <a:p>
+              <a:pPr>
+                <a:defRPr sz="1100" b="0">
+                  <a:solidFill>
+                    <a:srgbClr val="000000"/>
+                  </a:solidFill>
+                  <a:latin typeface="Play"/>
+                  <a:ea typeface="Play"/>
+                  <a:cs typeface="Play"/>
+                </a:defRPr>
+              </a:pPr>
+            </a:p>
+          </c:txPr>
+          <c:dLblPos val="outEnd"/>
+          <c:showLegendKey val="0"/>
+          <c:showVal val="1"/>
+          <c:showCatName val="0"/>
+          <c:showSerName val="0"/>
+          <c:showPercent val="0"/>
+          <c:showBubbleSize val="0"/>
+          <c:showLeaderLines val="1"/>
+        </c:dLbls>
+        <c:gapWidth val="60"/>
+        <c:axId val="-2068027336"/>
+        <c:axId val="-2113994440"/>
+      </c:barChart>
+      <c:catAx>
+        <c:axId val="-2068027336"/>
+        <c:scaling>
+          <c:orientation val="minMax"/>
+        </c:scaling>
+        <c:delete val="0"/>
+        <c:axPos val="b"/>
+        <c:majorTickMark val="out"/>
+        <c:minorTickMark val="none"/>
+        <c:tickLblPos val="nextTo"/>
+        <c:txPr>
+          <a:bodyPr/>
+          <a:lstStyle/>
+          <a:p>
+            <a:pPr>
+              <a:defRPr sz="1100" b="0">
+                <a:solidFill>
+                  <a:srgbClr val="000000"/>
+                </a:solidFill>
+                <a:latin typeface="Play"/>
+                <a:ea typeface="Play"/>
+                <a:cs typeface="Play"/>
+              </a:defRPr>
+            </a:pPr>
+          </a:p>
+        </c:txPr>
+        <c:crossAx val="-2113994440"/>
+        <c:crosses val="autoZero"/>
+        <c:auto val="1"/>
+        <c:lblAlgn val="ctr"/>
+        <c:lblOffset val="100"/>
+        <c:noMultiLvlLbl val="0"/>
+      </c:catAx>
+      <c:valAx>
+        <c:axId val="-2113994440"/>
+        <c:scaling/>
+        <c:delete val="0"/>
+        <c:axPos val="l"/>
+        <c:majorGridlines>
+          <c:spPr>
+            <a:ln w="9525">
+              <a:solidFill>
+                <a:srgbClr val="D1D1D1"/>
+              </a:solidFill>
+            </a:ln>
+          </c:spPr>
+        </c:majorGridlines>
+        <c:title>
+          <c:tx>
+            <c:rich>
+              <a:bodyPr rot="0" vert="horz"/>
+              <a:lstStyle/>
+              <a:p>
+                <a:pPr>
+                  <a:defRPr sz="1100" b="0">
+                    <a:solidFill>
+                      <a:srgbClr val="000000"/>
+                    </a:solidFill>
+                    <a:latin typeface="Play"/>
+                    <a:ea typeface="Play"/>
+                    <a:cs typeface="Play"/>
+                  </a:defRPr>
+                </a:pPr>
+                <a:r>
+                  <a:t>Нарушения, колод</a:t>
+                </a:r>
+              </a:p>
+            </c:rich>
+          </c:tx>
+          <c:layout/>
+          <c:overlay val="0"/>
+        </c:title>
+        <c:majorTickMark val="out"/>
+        <c:minorTickMark val="none"/>
+        <c:tickLblPos val="nextTo"/>
+        <c:txPr>
+          <a:bodyPr/>
+          <a:lstStyle/>
+          <a:p>
+            <a:pPr>
+              <a:defRPr sz="1100" b="0">
+                <a:solidFill>
+                  <a:srgbClr val="000000"/>
+                </a:solidFill>
+                <a:latin typeface="Play"/>
+                <a:ea typeface="Play"/>
+                <a:cs typeface="Play"/>
+              </a:defRPr>
+            </a:pPr>
+          </a:p>
+        </c:txPr>
+        <c:crossAx val="-2068027336"/>
+        <c:crosses val="autoZero"/>
+      </c:valAx>
+    </c:plotArea>
+    <c:dispBlanksAs val="gap"/>
+  </c:chart>
+  <c:txPr>
+    <a:bodyPr/>
+    <a:lstStyle/>
+    <a:p>
+      <a:pPr>
+        <a:defRPr sz="1200" b="0">
+          <a:solidFill>
+            <a:srgbClr val="000000"/>
+          </a:solidFill>
+          <a:latin typeface="Play"/>
+          <a:ea typeface="Play"/>
+          <a:cs typeface="Play"/>
+        </a:defRPr>
+      </a:pPr>
+      <a:endParaRPr lang="en-US"/>
+    </a:p>
+  </c:txPr>
+  <c:externalData r:id="rId1">
+    <c:autoUpdate val="0"/>
+  </c:externalData>
+</c:chartSpace>
+</file>
+
+<file path=ppt/charts/chart4.xml><?xml version="1.0" encoding="utf-8"?>
+<c:chartSpace xmlns:c="http://schemas.openxmlformats.org/drawingml/2006/chart" xmlns:a="http://schemas.openxmlformats.org/drawingml/2006/main" xmlns:r="http://schemas.openxmlformats.org/officeDocument/2006/relationships">
+  <c:date1904 val="0"/>
+  <c:chart>
+    <c:autoTitleDeleted val="1"/>
+    <c:plotArea>
+      <c:barChart>
+        <c:barDir val="col"/>
+        <c:grouping val="clustered"/>
+        <c:ser>
+          <c:idx val="0"/>
+          <c:order val="0"/>
+          <c:tx>
+            <c:strRef>
+              <c:f>Sheet1!$B$1</c:f>
+              <c:strCache>
+                <c:ptCount val="1"/>
+                <c:pt idx="0">
+                  <c:v>Запросы</c:v>
+                </c:pt>
+              </c:strCache>
+            </c:strRef>
+          </c:tx>
+          <c:spPr>
+            <a:solidFill>
+              <a:srgbClr val="0077FF"/>
+            </a:solidFill>
+            <a:ln>
+              <a:solidFill>
+                <a:srgbClr val="0077FF"/>
+              </a:solidFill>
+            </a:ln>
+          </c:spPr>
+          <c:cat>
+            <c:strRef>
+              <c:f>Sheet1!$A$2:$A$3</c:f>
+              <c:strCache>
+                <c:ptCount val="2"/>
+                <c:pt idx="0">
+                  <c:v>Сейчас</c:v>
+                </c:pt>
+                <c:pt idx="1">
+                  <c:v>Сервис</c:v>
+                </c:pt>
+              </c:strCache>
+            </c:strRef>
+          </c:cat>
+          <c:val>
+            <c:numRef>
+              <c:f>Sheet1!$B$2:$B$3</c:f>
+              <c:numCache>
+                <c:formatCode>General</c:formatCode>
+                <c:ptCount val="2"/>
+                <c:pt idx="0">
+                  <c:v>11.0</c:v>
+                </c:pt>
+                <c:pt idx="1">
+                  <c:v>38.0</c:v>
+                </c:pt>
+              </c:numCache>
+            </c:numRef>
+          </c:val>
+        </c:ser>
+        <c:dLbls>
+          <c:numFmt formatCode="0&quot; запросов&quot;" sourceLinked="0"/>
+          <c:txPr>
+            <a:bodyPr wrap="none"/>
+            <a:lstStyle/>
+            <a:p>
+              <a:pPr>
+                <a:defRPr sz="1100" b="0">
+                  <a:solidFill>
+                    <a:srgbClr val="000000"/>
+                  </a:solidFill>
+                  <a:latin typeface="Play"/>
+                  <a:ea typeface="Play"/>
+                  <a:cs typeface="Play"/>
+                </a:defRPr>
+              </a:pPr>
+            </a:p>
+          </c:txPr>
+          <c:dLblPos val="outEnd"/>
+          <c:showLegendKey val="0"/>
+          <c:showVal val="1"/>
+          <c:showCatName val="0"/>
+          <c:showSerName val="0"/>
+          <c:showPercent val="0"/>
+          <c:showBubbleSize val="0"/>
+          <c:showLeaderLines val="1"/>
+        </c:dLbls>
+        <c:gapWidth val="60"/>
+        <c:axId val="-2068027336"/>
+        <c:axId val="-2113994440"/>
+      </c:barChart>
+      <c:catAx>
+        <c:axId val="-2068027336"/>
+        <c:scaling>
+          <c:orientation val="minMax"/>
+        </c:scaling>
+        <c:delete val="0"/>
+        <c:axPos val="b"/>
+        <c:majorTickMark val="out"/>
+        <c:minorTickMark val="none"/>
+        <c:tickLblPos val="nextTo"/>
+        <c:txPr>
+          <a:bodyPr/>
+          <a:lstStyle/>
+          <a:p>
+            <a:pPr>
+              <a:defRPr sz="1100" b="0">
+                <a:solidFill>
+                  <a:srgbClr val="000000"/>
+                </a:solidFill>
+                <a:latin typeface="Play"/>
+                <a:ea typeface="Play"/>
+                <a:cs typeface="Play"/>
+              </a:defRPr>
+            </a:pPr>
+          </a:p>
+        </c:txPr>
+        <c:crossAx val="-2113994440"/>
+        <c:crosses val="autoZero"/>
+        <c:auto val="1"/>
+        <c:lblAlgn val="ctr"/>
+        <c:lblOffset val="100"/>
+        <c:noMultiLvlLbl val="0"/>
+      </c:catAx>
+      <c:valAx>
+        <c:axId val="-2113994440"/>
+        <c:scaling/>
+        <c:delete val="0"/>
+        <c:axPos val="l"/>
+        <c:majorGridlines>
+          <c:spPr>
+            <a:ln w="9525">
+              <a:solidFill>
+                <a:srgbClr val="D1D1D1"/>
+              </a:solidFill>
+            </a:ln>
+          </c:spPr>
+        </c:majorGridlines>
+        <c:title>
+          <c:tx>
+            <c:rich>
+              <a:bodyPr rot="0" vert="horz"/>
+              <a:lstStyle/>
+              <a:p>
+                <a:pPr>
+                  <a:defRPr sz="1100" b="0">
+                    <a:solidFill>
+                      <a:srgbClr val="000000"/>
+                    </a:solidFill>
+                    <a:latin typeface="Play"/>
+                    <a:ea typeface="Play"/>
+                    <a:cs typeface="Play"/>
+                  </a:defRPr>
+                </a:pPr>
+                <a:r>
+                  <a:t>Запросы, запросов</a:t>
+                </a:r>
+              </a:p>
+            </c:rich>
+          </c:tx>
+          <c:layout/>
+          <c:overlay val="0"/>
+        </c:title>
+        <c:majorTickMark val="out"/>
+        <c:minorTickMark val="none"/>
+        <c:tickLblPos val="nextTo"/>
+        <c:txPr>
+          <a:bodyPr/>
+          <a:lstStyle/>
+          <a:p>
+            <a:pPr>
+              <a:defRPr sz="1100" b="0">
+                <a:solidFill>
+                  <a:srgbClr val="000000"/>
+                </a:solidFill>
+                <a:latin typeface="Play"/>
+                <a:ea typeface="Play"/>
+                <a:cs typeface="Play"/>
+              </a:defRPr>
+            </a:pPr>
+          </a:p>
+        </c:txPr>
+        <c:crossAx val="-2068027336"/>
+        <c:crosses val="autoZero"/>
+      </c:valAx>
+    </c:plotArea>
     <c:dispBlanksAs val="gap"/>
   </c:chart>
   <c:txPr>
@@ -2360,6 +2947,138 @@
 </p:notes>
 </file>
 
+<file path=ppt/notesSlides/notesSlide65.xml><?xml version="1.0" encoding="utf-8"?>
+<p:notes xmlns:a="http://schemas.openxmlformats.org/drawingml/2006/main" xmlns:p="http://schemas.openxmlformats.org/presentationml/2006/main" xmlns:r="http://schemas.openxmlformats.org/officeDocument/2006/relationships">
+  <p:cSld>
+    <p:spTree>
+      <p:nvGrpSpPr>
+        <p:cNvPr id="1" name=""/>
+        <p:cNvGrpSpPr/>
+        <p:nvPr/>
+      </p:nvGrpSpPr>
+      <p:grpSpPr>
+        <a:xfrm>
+          <a:off x="0" y="0"/>
+          <a:ext cx="0" cy="0"/>
+          <a:chOff x="0" y="0"/>
+          <a:chExt cx="0" cy="0"/>
+        </a:xfrm>
+      </p:grpSpPr>
+      <p:sp>
+        <p:nvSpPr>
+          <p:cNvPr id="2" name="Slide Image Placeholder 1"/>
+          <p:cNvSpPr>
+            <a:spLocks noGrp="1"/>
+          </p:cNvSpPr>
+          <p:nvPr>
+            <p:ph type="sldImg" idx="3"/>
+          </p:nvPr>
+        </p:nvSpPr>
+        <p:spPr/>
+      </p:sp>
+      <p:sp>
+        <p:nvSpPr>
+          <p:cNvPr id="3" name="Notes Placeholder 2"/>
+          <p:cNvSpPr>
+            <a:spLocks noGrp="1"/>
+          </p:cNvSpPr>
+          <p:nvPr>
+            <p:ph type="body" idx="1"/>
+          </p:nvPr>
+        </p:nvSpPr>
+        <p:spPr/>
+        <p:txBody>
+          <a:bodyPr/>
+          <a:lstStyle/>
+          <a:p/>
+        </p:txBody>
+      </p:sp>
+      <p:sp>
+        <p:nvSpPr>
+          <p:cNvPr id="4" name="Slide Number Placeholder 3"/>
+          <p:cNvSpPr>
+            <a:spLocks noGrp="1"/>
+          </p:cNvSpPr>
+          <p:nvPr>
+            <p:ph type="sldNum" idx="12"/>
+          </p:nvPr>
+        </p:nvSpPr>
+        <p:spPr/>
+      </p:sp>
+    </p:spTree>
+  </p:cSld>
+  <p:clrMapOvr>
+    <a:masterClrMapping/>
+  </p:clrMapOvr>
+</p:notes>
+</file>
+
+<file path=ppt/notesSlides/notesSlide66.xml><?xml version="1.0" encoding="utf-8"?>
+<p:notes xmlns:a="http://schemas.openxmlformats.org/drawingml/2006/main" xmlns:p="http://schemas.openxmlformats.org/presentationml/2006/main" xmlns:r="http://schemas.openxmlformats.org/officeDocument/2006/relationships">
+  <p:cSld>
+    <p:spTree>
+      <p:nvGrpSpPr>
+        <p:cNvPr id="1" name=""/>
+        <p:cNvGrpSpPr/>
+        <p:nvPr/>
+      </p:nvGrpSpPr>
+      <p:grpSpPr>
+        <a:xfrm>
+          <a:off x="0" y="0"/>
+          <a:ext cx="0" cy="0"/>
+          <a:chOff x="0" y="0"/>
+          <a:chExt cx="0" cy="0"/>
+        </a:xfrm>
+      </p:grpSpPr>
+      <p:sp>
+        <p:nvSpPr>
+          <p:cNvPr id="2" name="Slide Image Placeholder 1"/>
+          <p:cNvSpPr>
+            <a:spLocks noGrp="1"/>
+          </p:cNvSpPr>
+          <p:nvPr>
+            <p:ph type="sldImg" idx="3"/>
+          </p:nvPr>
+        </p:nvSpPr>
+        <p:spPr/>
+      </p:sp>
+      <p:sp>
+        <p:nvSpPr>
+          <p:cNvPr id="3" name="Notes Placeholder 2"/>
+          <p:cNvSpPr>
+            <a:spLocks noGrp="1"/>
+          </p:cNvSpPr>
+          <p:nvPr>
+            <p:ph type="body" idx="1"/>
+          </p:nvPr>
+        </p:nvSpPr>
+        <p:spPr/>
+        <p:txBody>
+          <a:bodyPr/>
+          <a:lstStyle/>
+          <a:p/>
+        </p:txBody>
+      </p:sp>
+      <p:sp>
+        <p:nvSpPr>
+          <p:cNvPr id="4" name="Slide Number Placeholder 3"/>
+          <p:cNvSpPr>
+            <a:spLocks noGrp="1"/>
+          </p:cNvSpPr>
+          <p:nvPr>
+            <p:ph type="sldNum" idx="12"/>
+          </p:nvPr>
+        </p:nvSpPr>
+        <p:spPr/>
+      </p:sp>
+    </p:spTree>
+  </p:cSld>
+  <p:clrMapOvr>
+    <a:masterClrMapping/>
+  </p:clrMapOvr>
+</p:notes>
+</file>
+
 <file path=ppt/slideLayouts/slideLayout1.xml><?xml version="1.0" encoding="utf-8"?>
 <p:sldLayout xmlns:a="http://schemas.openxmlformats.org/drawingml/2006/main" xmlns:r="http://schemas.openxmlformats.org/officeDocument/2006/relationships" xmlns:mc="http://schemas.openxmlformats.org/markup-compatibility/2006" xmlns:mv="urn:schemas-microsoft-com:mac:vml" xmlns:p="http://schemas.openxmlformats.org/presentationml/2006/main" xmlns:c="http://schemas.openxmlformats.org/drawingml/2006/chart" xmlns:dgm="http://schemas.openxmlformats.org/drawingml/2006/diagram" xmlns:o="urn:schemas-microsoft-com:office:office" xmlns:v="urn:schemas-microsoft-com:vml" xmlns:pvml="urn:schemas-microsoft-com:office:powerpoint" xmlns:com="http://schemas.openxmlformats.org/drawingml/2006/compatibility" xmlns:p14="http://schemas.microsoft.com/office/powerpoint/2010/main" xmlns:p15="http://schemas.microsoft.com/office/powerpoint/2012/main" xmlns:ahyp="http://schemas.microsoft.com/office/drawing/2018/hyperlinkcolor" matchingName="1_Титульный слайд">
   <p:cSld name="1_Титульный слайд">
@@ -5569,7 +6288,7 @@
                 <a:ea typeface="Play"/>
                 <a:cs typeface="Play"/>
               </a:rPr>
-              <a:t>Автоматическая вёрстка презентаций: пилот и масштаб</a:t>
+              <a:t>Автоматическая вёрстка презентаций: инициатива запуска</a:t>
             </a:r>
           </a:p>
         </p:txBody>
@@ -5592,227 +6311,9 @@
         <p:nvPr/>
       </p:nvGrpSpPr>
       <p:grpSpPr/>
-      <p:pic>
-        <p:nvPicPr>
-          <p:cNvPr descr=" " id="2385" name="Google Shape;2385;p88"/>
-          <p:cNvPicPr preferRelativeResize="0"/>
-          <p:nvPr/>
-        </p:nvPicPr>
-        <p:blipFill rotWithShape="1">
-          <a:blip r:embed="rId2">
-            <a:alphaModFix/>
-          </a:blip>
-          <a:srcRect b="0" l="0" r="0" t="0"/>
-          <a:stretch/>
-        </p:blipFill>
-        <p:spPr>
-          <a:xfrm>
-            <a:off x="388142" y="2000324"/>
-            <a:ext cx="8755811" cy="9524"/>
-          </a:xfrm>
-          <a:prstGeom prst="rect">
-            <a:avLst/>
-          </a:prstGeom>
-          <a:noFill/>
-          <a:ln>
-            <a:noFill/>
-          </a:ln>
-        </p:spPr>
-      </p:pic>
       <p:sp>
         <p:nvSpPr>
-          <p:cNvPr id="2386" name="Google Shape;2386;p88"/>
-          <p:cNvSpPr/>
-          <p:nvPr/>
-        </p:nvSpPr>
-        <p:spPr>
-          <a:xfrm>
-            <a:off x="319086" y="1286042"/>
-            <a:ext cx="1690679" cy="1128566"/>
-          </a:xfrm>
-          <a:prstGeom prst="rect">
-            <a:avLst/>
-          </a:prstGeom>
-          <a:noFill/>
-          <a:ln>
-            <a:noFill/>
-          </a:ln>
-        </p:spPr>
-        <p:txBody>
-          <a:bodyPr anchorCtr="0" anchor="ctr" bIns="91425" lIns="91425" spcFirstLastPara="1" rIns="91425" wrap="square" tIns="91425">
-            <a:noAutofit/>
-          </a:bodyPr>
-          <a:lstStyle/>
-          <a:p>
-            <a:pPr indent="0" lvl="0" marL="0" rtl="0" algn="l">
-              <a:spcBef>
-                <a:spcPts val="0"/>
-              </a:spcBef>
-              <a:spcAft>
-                <a:spcPts val="0"/>
-              </a:spcAft>
-              <a:buNone/>
-            </a:pPr>
-            <a:r>
-              <a:t/>
-            </a:r>
-            <a:endParaRPr/>
-          </a:p>
-        </p:txBody>
-      </p:sp>
-      <p:sp>
-        <p:nvSpPr>
-          <p:cNvPr id="2388" name="Google Shape;2388;p88"/>
-          <p:cNvSpPr/>
-          <p:nvPr/>
-        </p:nvSpPr>
-        <p:spPr>
-          <a:xfrm>
-            <a:off x="2600312" y="1286042"/>
-            <a:ext cx="1690679" cy="1128566"/>
-          </a:xfrm>
-          <a:prstGeom prst="rect">
-            <a:avLst/>
-          </a:prstGeom>
-          <a:noFill/>
-          <a:ln>
-            <a:noFill/>
-          </a:ln>
-        </p:spPr>
-        <p:txBody>
-          <a:bodyPr anchorCtr="0" anchor="ctr" bIns="91425" lIns="91425" spcFirstLastPara="1" rIns="91425" wrap="square" tIns="91425">
-            <a:noAutofit/>
-          </a:bodyPr>
-          <a:lstStyle/>
-          <a:p>
-            <a:pPr indent="0" lvl="0" marL="0" rtl="0" algn="l">
-              <a:spcBef>
-                <a:spcPts val="0"/>
-              </a:spcBef>
-              <a:spcAft>
-                <a:spcPts val="0"/>
-              </a:spcAft>
-              <a:buNone/>
-            </a:pPr>
-            <a:r>
-              <a:t/>
-            </a:r>
-            <a:endParaRPr/>
-          </a:p>
-        </p:txBody>
-      </p:sp>
-      <p:sp>
-        <p:nvSpPr>
-          <p:cNvPr id="2390" name="Google Shape;2390;p88"/>
-          <p:cNvSpPr/>
-          <p:nvPr/>
-        </p:nvSpPr>
-        <p:spPr>
-          <a:xfrm>
-            <a:off x="4881537" y="1286042"/>
-            <a:ext cx="1690679" cy="1128566"/>
-          </a:xfrm>
-          <a:prstGeom prst="rect">
-            <a:avLst/>
-          </a:prstGeom>
-          <a:noFill/>
-          <a:ln>
-            <a:noFill/>
-          </a:ln>
-        </p:spPr>
-        <p:txBody>
-          <a:bodyPr anchorCtr="0" anchor="ctr" bIns="91425" lIns="91425" spcFirstLastPara="1" rIns="91425" wrap="square" tIns="91425">
-            <a:noAutofit/>
-          </a:bodyPr>
-          <a:lstStyle/>
-          <a:p>
-            <a:pPr indent="0" lvl="0" marL="0" rtl="0" algn="l">
-              <a:spcBef>
-                <a:spcPts val="0"/>
-              </a:spcBef>
-              <a:spcAft>
-                <a:spcPts val="0"/>
-              </a:spcAft>
-              <a:buNone/>
-            </a:pPr>
-            <a:r>
-              <a:t/>
-            </a:r>
-            <a:endParaRPr/>
-          </a:p>
-        </p:txBody>
-      </p:sp>
-      <p:sp>
-        <p:nvSpPr>
-          <p:cNvPr id="2392" name="Google Shape;2392;p88"/>
-          <p:cNvSpPr/>
-          <p:nvPr/>
-        </p:nvSpPr>
-        <p:spPr>
-          <a:xfrm>
-            <a:off x="7162763" y="1286042"/>
-            <a:ext cx="1690679" cy="1128566"/>
-          </a:xfrm>
-          <a:prstGeom prst="rect">
-            <a:avLst/>
-          </a:prstGeom>
-          <a:noFill/>
-          <a:ln>
-            <a:noFill/>
-          </a:ln>
-        </p:spPr>
-        <p:txBody>
-          <a:bodyPr anchorCtr="0" anchor="ctr" bIns="91425" lIns="91425" spcFirstLastPara="1" rIns="91425" wrap="square" tIns="91425">
-            <a:noAutofit/>
-          </a:bodyPr>
-          <a:lstStyle/>
-          <a:p>
-            <a:pPr indent="0" lvl="0" marL="0" rtl="0" algn="l">
-              <a:spcBef>
-                <a:spcPts val="0"/>
-              </a:spcBef>
-              <a:spcAft>
-                <a:spcPts val="0"/>
-              </a:spcAft>
-              <a:buNone/>
-            </a:pPr>
-            <a:r>
-              <a:t/>
-            </a:r>
-            <a:endParaRPr/>
-          </a:p>
-        </p:txBody>
-      </p:sp>
-      <p:pic>
-        <p:nvPicPr>
-          <p:cNvPr descr=" " id="2394" name="Google Shape;2394;p88"/>
-          <p:cNvPicPr preferRelativeResize="0"/>
-          <p:nvPr/>
-        </p:nvPicPr>
-        <p:blipFill rotWithShape="1">
-          <a:blip r:embed="rId3">
-            <a:alphaModFix/>
-          </a:blip>
-          <a:srcRect b="0" l="0" r="0" t="0"/>
-          <a:stretch/>
-        </p:blipFill>
-        <p:spPr>
-          <a:xfrm>
-            <a:off x="1" y="3684300"/>
-            <a:ext cx="7238962" cy="70126"/>
-          </a:xfrm>
-          <a:prstGeom prst="rect">
-            <a:avLst/>
-          </a:prstGeom>
-          <a:noFill/>
-          <a:ln>
-            <a:noFill/>
-          </a:ln>
-        </p:spPr>
-      </p:pic>
-      <p:sp>
-        <p:nvSpPr>
-          <p:cNvPr id="2395" name="title"/>
+          <p:cNvPr id="2" name="title"/>
           <p:cNvSpPr txBox="1"/>
           <p:nvPr/>
         </p:nvSpPr>
@@ -5854,21 +6355,143 @@
                 <a:ea typeface="Play"/>
                 <a:cs typeface="Play"/>
               </a:rPr>
-              <a:t>Текущие трудности в сборке презентаций</a:t>
+              <a:t>Контекст и возможность: ручная сборка 42 колод</a:t>
             </a:r>
           </a:p>
         </p:txBody>
       </p:sp>
       <p:sp>
         <p:nvSpPr>
-          <p:cNvPr id="2396" name="lead"/>
+          <p:cNvPr id="3" name="stat_0:bar"/>
+          <p:cNvSpPr/>
+          <p:nvPr/>
+        </p:nvSpPr>
+        <p:spPr>
+          <a:xfrm>
+            <a:off x="274320" y="1468146"/>
+            <a:ext cx="50800" cy="833628"/>
+          </a:xfrm>
+          <a:prstGeom prst="rect">
+            <a:avLst/>
+          </a:prstGeom>
+          <a:solidFill>
+            <a:srgbClr val="0077FF"/>
+          </a:solidFill>
+          <a:ln>
+            <a:noFill/>
+          </a:ln>
+          <a:effectLst/>
+        </p:spPr>
+        <p:style>
+          <a:lnRef idx="1">
+            <a:schemeClr val="accent1"/>
+          </a:lnRef>
+          <a:fillRef idx="3">
+            <a:schemeClr val="accent1"/>
+          </a:fillRef>
+          <a:effectRef idx="2">
+            <a:schemeClr val="accent1"/>
+          </a:effectRef>
+          <a:fontRef idx="minor">
+            <a:schemeClr val="lt1"/>
+          </a:fontRef>
+        </p:style>
+        <p:txBody>
+          <a:bodyPr rtlCol="0" anchor="ctr"/>
+          <a:lstStyle/>
+          <a:p>
+            <a:pPr algn="ctr"/>
+          </a:p>
+        </p:txBody>
+      </p:sp>
+      <p:sp>
+        <p:nvSpPr>
+          <p:cNvPr id="4" name="stat_0"/>
           <p:cNvSpPr txBox="1"/>
           <p:nvPr/>
         </p:nvSpPr>
         <p:spPr>
           <a:xfrm>
-            <a:off x="274320" y="2009822"/>
-            <a:ext cx="6792986" cy="638873"/>
+            <a:off x="452119" y="1394994"/>
+            <a:ext cx="8167014" cy="906780"/>
+          </a:xfrm>
+          <a:prstGeom prst="rect">
+            <a:avLst/>
+          </a:prstGeom>
+          <a:noFill/>
+        </p:spPr>
+        <p:txBody>
+          <a:bodyPr wrap="square" lIns="76200" rIns="76200" tIns="0" bIns="0">
+            <a:spAutoFit/>
+          </a:bodyPr>
+          <a:lstStyle/>
+          <a:p>
+            <a:pPr>
+              <a:lnSpc>
+                <a:spcPct val="100000"/>
+              </a:lnSpc>
+              <a:spcAft>
+                <a:spcPts val="200"/>
+              </a:spcAft>
+              <a:defRPr sz="3200" b="1">
+                <a:solidFill>
+                  <a:srgbClr val="0077FF"/>
+                </a:solidFill>
+                <a:latin typeface="Play"/>
+                <a:ea typeface="Play"/>
+                <a:cs typeface="Play"/>
+              </a:defRPr>
+            </a:pPr>
+            <a:r>
+              <a:rPr sz="3200" b="1">
+                <a:solidFill>
+                  <a:srgbClr val="0077FF"/>
+                </a:solidFill>
+                <a:latin typeface="Play"/>
+                <a:ea typeface="Play"/>
+                <a:cs typeface="Play"/>
+              </a:rPr>
+              <a:t>186 мин</a:t>
+            </a:r>
+          </a:p>
+          <a:p>
+            <a:pPr>
+              <a:spcAft>
+                <a:spcPts val="300"/>
+              </a:spcAft>
+              <a:defRPr sz="1800" b="0">
+                <a:solidFill>
+                  <a:srgbClr val="000000"/>
+                </a:solidFill>
+                <a:latin typeface="Play"/>
+                <a:ea typeface="Play"/>
+                <a:cs typeface="Play"/>
+              </a:defRPr>
+            </a:pPr>
+            <a:r>
+              <a:rPr sz="1800" b="0">
+                <a:solidFill>
+                  <a:srgbClr val="000000"/>
+                </a:solidFill>
+                <a:latin typeface="Play"/>
+                <a:ea typeface="Play"/>
+                <a:cs typeface="Play"/>
+              </a:rPr>
+              <a:t>42 колоды за квартал: 186 мин на сборку 12-слайдной презентации</a:t>
+            </a:r>
+          </a:p>
+        </p:txBody>
+      </p:sp>
+      <p:sp>
+        <p:nvSpPr>
+          <p:cNvPr id="5" name="body"/>
+          <p:cNvSpPr txBox="1"/>
+          <p:nvPr/>
+        </p:nvSpPr>
+        <p:spPr>
+          <a:xfrm>
+            <a:off x="274320" y="3151475"/>
+            <a:ext cx="8344814" cy="1271934"/>
           </a:xfrm>
           <a:prstGeom prst="rect">
             <a:avLst/>
@@ -5885,7 +6508,7 @@
               <a:spcAft>
                 <a:spcPts val="300"/>
               </a:spcAft>
-              <a:defRPr sz="1800">
+              <a:defRPr sz="1600">
                 <a:solidFill>
                   <a:srgbClr val="000000"/>
                 </a:solidFill>
@@ -5895,7 +6518,7 @@
               </a:defRPr>
             </a:pPr>
             <a:r>
-              <a:rPr sz="1800">
+              <a:rPr sz="1600">
                 <a:solidFill>
                   <a:srgbClr val="000000"/>
                 </a:solidFill>
@@ -5903,21 +6526,117 @@
                 <a:ea typeface="Play"/>
                 <a:cs typeface="Play"/>
               </a:rPr>
-              <a:t>42 колоды, 186 мин на одну 12-слайдовую презентацию</a:t>
+              <a:t>• 74 мин на правки после ревью дизайнера</a:t>
+            </a:r>
+          </a:p>
+          <a:p>
+            <a:pPr algn="l">
+              <a:spcAft>
+                <a:spcPts val="300"/>
+              </a:spcAft>
+              <a:defRPr sz="1600">
+                <a:solidFill>
+                  <a:srgbClr val="000000"/>
+                </a:solidFill>
+                <a:latin typeface="Play"/>
+                <a:ea typeface="Play"/>
+                <a:cs typeface="Play"/>
+              </a:defRPr>
+            </a:pPr>
+            <a:r>
+              <a:rPr sz="1600">
+                <a:solidFill>
+                  <a:srgbClr val="000000"/>
+                </a:solidFill>
+                <a:latin typeface="Play"/>
+                <a:ea typeface="Play"/>
+                <a:cs typeface="Play"/>
+              </a:rPr>
+              <a:t>• 19 колод нарушили фирменный стиль (неправильные гарнитуры, цвета)</a:t>
+            </a:r>
+          </a:p>
+          <a:p>
+            <a:pPr algn="l">
+              <a:spcAft>
+                <a:spcPts val="300"/>
+              </a:spcAft>
+              <a:defRPr sz="1600">
+                <a:solidFill>
+                  <a:srgbClr val="000000"/>
+                </a:solidFill>
+                <a:latin typeface="Play"/>
+                <a:ea typeface="Play"/>
+                <a:cs typeface="Play"/>
+              </a:defRPr>
+            </a:pPr>
+            <a:r>
+              <a:rPr sz="1600">
+                <a:solidFill>
+                  <a:srgbClr val="000000"/>
+                </a:solidFill>
+                <a:latin typeface="Play"/>
+                <a:ea typeface="Play"/>
+                <a:cs typeface="Play"/>
+              </a:rPr>
+              <a:t>• Дизайнеры закрывают 11 запросов из 27 в неделю</a:t>
+            </a:r>
+          </a:p>
+          <a:p>
+            <a:pPr algn="l">
+              <a:spcAft>
+                <a:spcPts val="300"/>
+              </a:spcAft>
+              <a:defRPr sz="1600">
+                <a:solidFill>
+                  <a:srgbClr val="000000"/>
+                </a:solidFill>
+                <a:latin typeface="Play"/>
+                <a:ea typeface="Play"/>
+                <a:cs typeface="Play"/>
+              </a:defRPr>
+            </a:pPr>
+            <a:r>
+              <a:rPr sz="1600">
+                <a:solidFill>
+                  <a:srgbClr val="000000"/>
+                </a:solidFill>
+                <a:latin typeface="Play"/>
+                <a:ea typeface="Play"/>
+                <a:cs typeface="Play"/>
+              </a:rPr>
+              <a:t>• Средний срок ожидания в очереди – 6 рабочих дней</a:t>
             </a:r>
           </a:p>
         </p:txBody>
       </p:sp>
+    </p:spTree>
+  </p:cSld>
+  <p:clrMapOvr>
+    <a:masterClrMapping/>
+  </p:clrMapOvr>
+</p:sld>
+</file>
+
+<file path=ppt/slides/slide57.xml><?xml version="1.0" encoding="utf-8"?>
+<p:sld xmlns:a="http://schemas.openxmlformats.org/drawingml/2006/main" xmlns:p="http://schemas.openxmlformats.org/presentationml/2006/main" xmlns:r="http://schemas.openxmlformats.org/officeDocument/2006/relationships">
+  <p:cSld>
+    <p:spTree>
+      <p:nvGrpSpPr>
+        <p:cNvPr id="1" name=""/>
+        <p:cNvGrpSpPr/>
+        <p:nvPr/>
+      </p:nvGrpSpPr>
+      <p:grpSpPr/>
       <p:sp>
         <p:nvSpPr>
-          <p:cNvPr id="2397" name="body"/>
+          <p:cNvPr id="2" name="title"/>
           <p:cNvSpPr txBox="1"/>
           <p:nvPr/>
         </p:nvSpPr>
         <p:spPr>
           <a:xfrm>
-            <a:off x="274320" y="2749163"/>
-            <a:ext cx="6792986" cy="935125"/>
+            <a:off x="274320" y="282943"/>
+            <a:ext cx="6792986" cy="932027"/>
           </a:xfrm>
           <a:prstGeom prst="rect">
             <a:avLst/>
@@ -5934,7 +6653,7 @@
               <a:spcAft>
                 <a:spcPts val="300"/>
               </a:spcAft>
-              <a:defRPr sz="1200">
+              <a:defRPr sz="2438">
                 <a:solidFill>
                   <a:srgbClr val="000000"/>
                 </a:solidFill>
@@ -5944,7 +6663,7 @@
               </a:defRPr>
             </a:pPr>
             <a:r>
-              <a:rPr sz="1200">
+              <a:rPr sz="2438">
                 <a:solidFill>
                   <a:srgbClr val="000000"/>
                 </a:solidFill>
@@ -5952,89 +6671,29 @@
                 <a:ea typeface="Play"/>
                 <a:cs typeface="Play"/>
               </a:rPr>
-              <a:t>• 74 мин на правки после ревью</a:t>
-            </a:r>
-          </a:p>
-          <a:p>
-            <a:pPr algn="l">
-              <a:spcAft>
-                <a:spcPts val="300"/>
-              </a:spcAft>
-              <a:defRPr sz="1200">
-                <a:solidFill>
-                  <a:srgbClr val="000000"/>
-                </a:solidFill>
-                <a:latin typeface="Play"/>
-                <a:ea typeface="Play"/>
-                <a:cs typeface="Play"/>
-              </a:defRPr>
-            </a:pPr>
-            <a:r>
-              <a:rPr sz="1200">
-                <a:solidFill>
-                  <a:srgbClr val="000000"/>
-                </a:solidFill>
-                <a:latin typeface="Play"/>
-                <a:ea typeface="Play"/>
-                <a:cs typeface="Play"/>
-              </a:rPr>
-              <a:t>• 19 колод нарушили фирменный стиль</a:t>
-            </a:r>
-          </a:p>
-          <a:p>
-            <a:pPr algn="l">
-              <a:spcAft>
-                <a:spcPts val="300"/>
-              </a:spcAft>
-              <a:defRPr sz="1200">
-                <a:solidFill>
-                  <a:srgbClr val="000000"/>
-                </a:solidFill>
-                <a:latin typeface="Play"/>
-                <a:ea typeface="Play"/>
-                <a:cs typeface="Play"/>
-              </a:defRPr>
-            </a:pPr>
-            <a:r>
-              <a:rPr sz="1200">
-                <a:solidFill>
-                  <a:srgbClr val="000000"/>
-                </a:solidFill>
-                <a:latin typeface="Play"/>
-                <a:ea typeface="Play"/>
-                <a:cs typeface="Play"/>
-              </a:rPr>
-              <a:t>• Дизайн-отдел закрывает 11 запросов/неделю из 27</a:t>
-            </a:r>
-          </a:p>
-          <a:p>
-            <a:pPr algn="l">
-              <a:spcAft>
-                <a:spcPts val="300"/>
-              </a:spcAft>
-              <a:defRPr sz="1200">
-                <a:solidFill>
-                  <a:srgbClr val="000000"/>
-                </a:solidFill>
-                <a:latin typeface="Play"/>
-                <a:ea typeface="Play"/>
-                <a:cs typeface="Play"/>
-              </a:defRPr>
-            </a:pPr>
-            <a:r>
-              <a:rPr sz="1200">
-                <a:solidFill>
-                  <a:srgbClr val="000000"/>
-                </a:solidFill>
-                <a:latin typeface="Play"/>
-                <a:ea typeface="Play"/>
-                <a:cs typeface="Play"/>
-              </a:rPr>
-              <a:t>• Средний срок ожидания 6 рабочих дней</a:t>
+              <a:t>Нагрузка дизайнеров: 27 запросов, 11 закрыто</a:t>
             </a:r>
           </a:p>
         </p:txBody>
       </p:sp>
+      <p:graphicFrame>
+        <p:nvGraphicFramePr>
+          <p:cNvPr id="3" name="Chart 2"/>
+          <p:cNvGraphicFramePr>
+            <a:graphicFrameLocks noGrp="1"/>
+          </p:cNvGraphicFramePr>
+          <p:nvPr/>
+        </p:nvGraphicFramePr>
+        <p:xfrm>
+          <a:off x="274320" y="1394994"/>
+          <a:ext cx="8344814" cy="3028415"/>
+        </p:xfrm>
+        <a:graphic>
+          <a:graphicData uri="http://schemas.openxmlformats.org/drawingml/2006/chart">
+            <c:chart xmlns:c="http://schemas.openxmlformats.org/drawingml/2006/chart" r:id="rId2"/>
+          </a:graphicData>
+        </a:graphic>
+      </p:graphicFrame>
     </p:spTree>
   </p:cSld>
   <p:clrMapOvr>
@@ -6043,7 +6702,7 @@
 </p:sld>
 </file>
 
-<file path=ppt/slides/slide57.xml><?xml version="1.0" encoding="utf-8"?>
+<file path=ppt/slides/slide58.xml><?xml version="1.0" encoding="utf-8"?>
 <p:sld xmlns:a="http://schemas.openxmlformats.org/drawingml/2006/main" xmlns:p="http://schemas.openxmlformats.org/presentationml/2006/main" xmlns:r="http://schemas.openxmlformats.org/officeDocument/2006/relationships">
   <p:cSld>
     <p:spTree>
@@ -6580,7 +7239,7 @@
                 <a:ea typeface="Play"/>
                 <a:cs typeface="Play"/>
               </a:rPr>
-              <a:t>Предлагаемый сервис автоматической вёрстки</a:t>
+              <a:t>Предложение: сервис принимает шаблон и материалы</a:t>
             </a:r>
           </a:p>
         </p:txBody>
@@ -6594,7 +7253,7 @@
         <p:spPr>
           <a:xfrm>
             <a:off x="274320" y="1590781"/>
-            <a:ext cx="6792986" cy="1085981"/>
+            <a:ext cx="6792986" cy="1016178"/>
           </a:xfrm>
           <a:prstGeom prst="rect">
             <a:avLst/>
@@ -6629,7 +7288,7 @@
                 <a:ea typeface="Play"/>
                 <a:cs typeface="Play"/>
               </a:rPr>
-              <a:t>Принимает шаблон pptx и материалы, автоматически строит дизайн-систему</a:t>
+              <a:t>Сервис принимает pptx шаблон и материалы (документы, таблицы, заметки)</a:t>
             </a:r>
           </a:p>
         </p:txBody>
@@ -6642,8 +7301,8 @@
         </p:nvSpPr>
         <p:spPr>
           <a:xfrm>
-            <a:off x="274320" y="2827904"/>
-            <a:ext cx="6792986" cy="1281905"/>
+            <a:off x="274320" y="2758101"/>
+            <a:ext cx="6792986" cy="1351708"/>
           </a:xfrm>
           <a:prstGeom prst="rect">
             <a:avLst/>
@@ -6678,7 +7337,7 @@
                 <a:ea typeface="Play"/>
                 <a:cs typeface="Play"/>
               </a:rPr>
-              <a:t>• Генерирует план колоды и вёрстку по ролям страниц</a:t>
+              <a:t>• Автоматически преобразует шаблон в дизайн-систему (гарнитуры, шкала, палитра)</a:t>
             </a:r>
           </a:p>
           <a:p>
@@ -6704,7 +7363,7 @@
                 <a:ea typeface="Play"/>
                 <a:cs typeface="Play"/>
               </a:rPr>
-              <a:t>• Аудит качества проверяет стиль и данные до выдачи</a:t>
+              <a:t>• Генерирует план колоды и вёрстку по ролям страниц</a:t>
             </a:r>
           </a:p>
           <a:p>
@@ -6730,219 +7389,11 @@
                 <a:ea typeface="Play"/>
                 <a:cs typeface="Play"/>
               </a:rPr>
-              <a:t>• Экспорт в pptx, pdf, html, слайды остаются редактируемыми</a:t>
+              <a:t>• Экспорт в pptx, pdf, html с редактируемыми слайдами</a:t>
             </a:r>
           </a:p>
         </p:txBody>
       </p:sp>
-    </p:spTree>
-  </p:cSld>
-  <p:clrMapOvr>
-    <a:masterClrMapping/>
-  </p:clrMapOvr>
-</p:sld>
-</file>
-
-<file path=ppt/slides/slide58.xml><?xml version="1.0" encoding="utf-8"?>
-<p:sld xmlns:a="http://schemas.openxmlformats.org/drawingml/2006/main" xmlns:p="http://schemas.openxmlformats.org/presentationml/2006/main" xmlns:r="http://schemas.openxmlformats.org/officeDocument/2006/relationships">
-  <p:cSld>
-    <p:spTree>
-      <p:nvGrpSpPr>
-        <p:cNvPr id="1" name=""/>
-        <p:cNvGrpSpPr/>
-        <p:nvPr/>
-      </p:nvGrpSpPr>
-      <p:grpSpPr/>
-      <p:sp>
-        <p:nvSpPr>
-          <p:cNvPr id="532" name="Google Shape;532;p53"/>
-          <p:cNvSpPr/>
-          <p:nvPr/>
-        </p:nvSpPr>
-        <p:spPr>
-          <a:xfrm>
-            <a:off x="303214" y="1022533"/>
-            <a:ext cx="8451939" cy="1433588"/>
-          </a:xfrm>
-          <a:prstGeom prst="rect">
-            <a:avLst/>
-          </a:prstGeom>
-          <a:noFill/>
-          <a:ln>
-            <a:noFill/>
-          </a:ln>
-        </p:spPr>
-        <p:txBody>
-          <a:bodyPr anchorCtr="0" anchor="ctr" bIns="91425" lIns="91425" spcFirstLastPara="1" rIns="91425" wrap="square" tIns="91425">
-            <a:noAutofit/>
-          </a:bodyPr>
-          <a:lstStyle/>
-          <a:p>
-            <a:pPr indent="0" lvl="0" marL="0" rtl="0" algn="l">
-              <a:spcBef>
-                <a:spcPts val="0"/>
-              </a:spcBef>
-              <a:spcAft>
-                <a:spcPts val="0"/>
-              </a:spcAft>
-              <a:buNone/>
-            </a:pPr>
-            <a:r>
-              <a:t/>
-            </a:r>
-            <a:endParaRPr/>
-          </a:p>
-        </p:txBody>
-      </p:sp>
-      <p:sp>
-        <p:nvSpPr>
-          <p:cNvPr id="553" name="Google Shape;553;p53"/>
-          <p:cNvSpPr/>
-          <p:nvPr/>
-        </p:nvSpPr>
-        <p:spPr>
-          <a:xfrm>
-            <a:off x="276488" y="2955549"/>
-            <a:ext cx="8451939" cy="1433588"/>
-          </a:xfrm>
-          <a:prstGeom prst="rect">
-            <a:avLst/>
-          </a:prstGeom>
-          <a:noFill/>
-          <a:ln>
-            <a:noFill/>
-          </a:ln>
-        </p:spPr>
-        <p:txBody>
-          <a:bodyPr anchorCtr="0" anchor="ctr" bIns="91425" lIns="91425" spcFirstLastPara="1" rIns="91425" wrap="square" tIns="91425">
-            <a:noAutofit/>
-          </a:bodyPr>
-          <a:lstStyle/>
-          <a:p>
-            <a:pPr indent="0" lvl="0" marL="0" rtl="0" algn="l">
-              <a:spcBef>
-                <a:spcPts val="0"/>
-              </a:spcBef>
-              <a:spcAft>
-                <a:spcPts val="0"/>
-              </a:spcAft>
-              <a:buNone/>
-            </a:pPr>
-            <a:r>
-              <a:t/>
-            </a:r>
-            <a:endParaRPr/>
-          </a:p>
-        </p:txBody>
-      </p:sp>
-      <p:sp>
-        <p:nvSpPr>
-          <p:cNvPr id="554" name="Google Shape;554;p53"/>
-          <p:cNvSpPr/>
-          <p:nvPr/>
-        </p:nvSpPr>
-        <p:spPr>
-          <a:xfrm>
-            <a:off x="303214" y="2797849"/>
-            <a:ext cx="8451939" cy="1433588"/>
-          </a:xfrm>
-          <a:prstGeom prst="rect">
-            <a:avLst/>
-          </a:prstGeom>
-          <a:noFill/>
-          <a:ln>
-            <a:noFill/>
-          </a:ln>
-        </p:spPr>
-        <p:txBody>
-          <a:bodyPr anchorCtr="0" anchor="ctr" bIns="91425" lIns="91425" spcFirstLastPara="1" rIns="91425" wrap="square" tIns="91425">
-            <a:noAutofit/>
-          </a:bodyPr>
-          <a:lstStyle/>
-          <a:p>
-            <a:pPr indent="0" lvl="0" marL="0" rtl="0" algn="l">
-              <a:spcBef>
-                <a:spcPts val="0"/>
-              </a:spcBef>
-              <a:spcAft>
-                <a:spcPts val="0"/>
-              </a:spcAft>
-              <a:buNone/>
-            </a:pPr>
-            <a:r>
-              <a:t/>
-            </a:r>
-            <a:endParaRPr/>
-          </a:p>
-        </p:txBody>
-      </p:sp>
-      <p:sp>
-        <p:nvSpPr>
-          <p:cNvPr id="555" name="title"/>
-          <p:cNvSpPr txBox="1"/>
-          <p:nvPr/>
-        </p:nvSpPr>
-        <p:spPr>
-          <a:xfrm>
-            <a:off x="274320" y="282943"/>
-            <a:ext cx="6792986" cy="617220"/>
-          </a:xfrm>
-          <a:prstGeom prst="rect">
-            <a:avLst/>
-          </a:prstGeom>
-          <a:noFill/>
-        </p:spPr>
-        <p:txBody>
-          <a:bodyPr wrap="square" lIns="76200" rIns="76200" tIns="50800" bIns="50800">
-            <a:spAutoFit/>
-          </a:bodyPr>
-          <a:lstStyle/>
-          <a:p>
-            <a:pPr algn="l">
-              <a:spcAft>
-                <a:spcPts val="300"/>
-              </a:spcAft>
-              <a:defRPr sz="2438">
-                <a:solidFill>
-                  <a:srgbClr val="000000"/>
-                </a:solidFill>
-                <a:latin typeface="Play"/>
-                <a:ea typeface="Play"/>
-                <a:cs typeface="Play"/>
-              </a:defRPr>
-            </a:pPr>
-            <a:r>
-              <a:rPr sz="2438">
-                <a:solidFill>
-                  <a:srgbClr val="000000"/>
-                </a:solidFill>
-                <a:latin typeface="Play"/>
-                <a:ea typeface="Play"/>
-                <a:cs typeface="Play"/>
-              </a:rPr>
-              <a:t>Результаты пилота за 6 недель</a:t>
-            </a:r>
-          </a:p>
-        </p:txBody>
-      </p:sp>
-      <p:graphicFrame>
-        <p:nvGraphicFramePr>
-          <p:cNvPr id="556" name="Chart 555"/>
-          <p:cNvGraphicFramePr>
-            <a:graphicFrameLocks noGrp="1"/>
-          </p:cNvGraphicFramePr>
-          <p:nvPr/>
-        </p:nvGraphicFramePr>
-        <p:xfrm>
-          <a:off x="274320" y="1414513"/>
-          <a:ext cx="8344814" cy="2851865"/>
-        </p:xfrm>
-        <a:graphic>
-          <a:graphicData uri="http://schemas.openxmlformats.org/drawingml/2006/chart">
-            <c:chart xmlns:c="http://schemas.openxmlformats.org/drawingml/2006/chart" r:id="rId2"/>
-          </a:graphicData>
-        </a:graphic>
-      </p:graphicFrame>
     </p:spTree>
   </p:cSld>
   <p:clrMapOvr>
@@ -7024,7 +7475,7 @@
         <p:spPr>
           <a:xfrm>
             <a:off x="274320" y="282943"/>
-            <a:ext cx="6792986" cy="617220"/>
+            <a:ext cx="6792986" cy="932027"/>
           </a:xfrm>
           <a:prstGeom prst="rect">
             <a:avLst/>
@@ -7041,7 +7492,7 @@
               <a:spcAft>
                 <a:spcPts val="300"/>
               </a:spcAft>
-              <a:defRPr sz="2705">
+              <a:defRPr sz="2438">
                 <a:solidFill>
                   <a:srgbClr val="000000"/>
                 </a:solidFill>
@@ -7051,7 +7502,7 @@
               </a:defRPr>
             </a:pPr>
             <a:r>
-              <a:rPr sz="2705">
+              <a:rPr sz="2438">
                 <a:solidFill>
                   <a:srgbClr val="000000"/>
                 </a:solidFill>
@@ -7059,7 +7510,7 @@
                 <a:ea typeface="Play"/>
                 <a:cs typeface="Play"/>
               </a:rPr>
-              <a:t>Ожидаемый эффект</a:t>
+              <a:t>Предложение: аудит и автоматические правки</a:t>
             </a:r>
           </a:p>
         </p:txBody>
@@ -7072,8 +7523,8 @@
         </p:nvSpPr>
         <p:spPr>
           <a:xfrm>
-            <a:off x="274320" y="1414513"/>
-            <a:ext cx="6792986" cy="735068"/>
+            <a:off x="274320" y="1664127"/>
+            <a:ext cx="6792986" cy="650200"/>
           </a:xfrm>
           <a:prstGeom prst="rect">
             <a:avLst/>
@@ -7090,7 +7541,7 @@
               <a:spcAft>
                 <a:spcPts val="300"/>
               </a:spcAft>
-              <a:defRPr sz="1800" b="1">
+              <a:defRPr sz="2705" b="1">
                 <a:solidFill>
                   <a:srgbClr val="000000"/>
                 </a:solidFill>
@@ -7100,7 +7551,7 @@
               </a:defRPr>
             </a:pPr>
             <a:r>
-              <a:rPr sz="1800" b="1">
+              <a:rPr sz="2705" b="1">
                 <a:solidFill>
                   <a:srgbClr val="000000"/>
                 </a:solidFill>
@@ -7108,7 +7559,7 @@
                 <a:ea typeface="Play"/>
                 <a:cs typeface="Play"/>
               </a:rPr>
-              <a:t>Сокращение времени сборки с 186 до 4 минут</a:t>
+              <a:t>Аудит качества до выдачи результата</a:t>
             </a:r>
           </a:p>
         </p:txBody>
@@ -7121,8 +7572,8 @@
         </p:nvSpPr>
         <p:spPr>
           <a:xfrm>
-            <a:off x="274320" y="2279300"/>
-            <a:ext cx="6792986" cy="1297180"/>
+            <a:off x="274320" y="2429069"/>
+            <a:ext cx="6792986" cy="1147411"/>
           </a:xfrm>
           <a:prstGeom prst="rect">
             <a:avLst/>
@@ -7157,7 +7608,7 @@
                 <a:ea typeface="Play"/>
                 <a:cs typeface="Play"/>
               </a:rPr>
-              <a:t>• Сокращение времени до первой версии с 6 до 1 дня</a:t>
+              <a:t>• Автоматические правки нарушений фирменного стиля</a:t>
             </a:r>
           </a:p>
           <a:p>
@@ -7183,7 +7634,7 @@
                 <a:ea typeface="Play"/>
                 <a:cs typeface="Play"/>
               </a:rPr>
-              <a:t>• Снижение нарушений стиля до 2 из 68 колод</a:t>
+              <a:t>• Слайды остаются редактируемыми, без картинок</a:t>
             </a:r>
           </a:p>
           <a:p>
@@ -7209,33 +7660,7 @@
                 <a:ea typeface="Play"/>
                 <a:cs typeface="Play"/>
               </a:rPr>
-              <a:t>• Увеличение объёма закрытых запросов до 38/нед</a:t>
-            </a:r>
-          </a:p>
-          <a:p>
-            <a:pPr algn="l">
-              <a:spcAft>
-                <a:spcPts val="300"/>
-              </a:spcAft>
-              <a:defRPr sz="1800" b="1">
-                <a:solidFill>
-                  <a:srgbClr val="000000"/>
-                </a:solidFill>
-                <a:latin typeface="Play"/>
-                <a:ea typeface="Play"/>
-                <a:cs typeface="Play"/>
-              </a:defRPr>
-            </a:pPr>
-            <a:r>
-              <a:rPr sz="1800" b="1">
-                <a:solidFill>
-                  <a:srgbClr val="000000"/>
-                </a:solidFill>
-                <a:latin typeface="Play"/>
-                <a:ea typeface="Play"/>
-                <a:cs typeface="Play"/>
-              </a:rPr>
-              <a:t>• Стоимость инференса за пилот – 1400 руб</a:t>
+              <a:t>• Поддержка OpenAI-совместимых моделей (gpt-oss-20b)</a:t>
             </a:r>
           </a:p>
         </p:txBody>
@@ -7258,166 +7683,16 @@
         <p:nvPr/>
       </p:nvGrpSpPr>
       <p:grpSpPr/>
-      <p:pic>
-        <p:nvPicPr>
-          <p:cNvPr descr=" " id="2428" name="Google Shape;2428;p89"/>
-          <p:cNvPicPr preferRelativeResize="0"/>
-          <p:nvPr/>
-        </p:nvPicPr>
-        <p:blipFill rotWithShape="1">
-          <a:blip r:embed="rId2">
-            <a:alphaModFix/>
-          </a:blip>
-          <a:srcRect b="0" l="0" r="0" t="0"/>
-          <a:stretch/>
-        </p:blipFill>
-        <p:spPr>
-          <a:xfrm>
-            <a:off x="0" y="2732082"/>
-            <a:ext cx="8515008" cy="92615"/>
-          </a:xfrm>
-          <a:prstGeom prst="rect">
-            <a:avLst/>
-          </a:prstGeom>
-          <a:noFill/>
-          <a:ln>
-            <a:noFill/>
-          </a:ln>
-        </p:spPr>
-      </p:pic>
       <p:sp>
         <p:nvSpPr>
-          <p:cNvPr id="2429" name="Google Shape;2429;p89"/>
-          <p:cNvSpPr/>
-          <p:nvPr/>
-        </p:nvSpPr>
-        <p:spPr>
-          <a:xfrm>
-            <a:off x="553415" y="1828897"/>
-            <a:ext cx="2232516" cy="1490254"/>
-          </a:xfrm>
-          <a:prstGeom prst="rect">
-            <a:avLst/>
-          </a:prstGeom>
-          <a:noFill/>
-          <a:ln>
-            <a:noFill/>
-          </a:ln>
-        </p:spPr>
-        <p:txBody>
-          <a:bodyPr anchorCtr="0" anchor="ctr" bIns="91425" lIns="91425" spcFirstLastPara="1" rIns="91425" wrap="square" tIns="91425">
-            <a:noAutofit/>
-          </a:bodyPr>
-          <a:lstStyle/>
-          <a:p>
-            <a:pPr indent="0" lvl="0" marL="0" rtl="0" algn="l">
-              <a:spcBef>
-                <a:spcPts val="0"/>
-              </a:spcBef>
-              <a:spcAft>
-                <a:spcPts val="0"/>
-              </a:spcAft>
-              <a:buNone/>
-            </a:pPr>
-            <a:r>
-              <a:t/>
-            </a:r>
-            <a:endParaRPr/>
-          </a:p>
-        </p:txBody>
-      </p:sp>
-      <p:sp>
-        <p:nvSpPr>
-          <p:cNvPr id="2431" name="Google Shape;2431;p89"/>
-          <p:cNvSpPr/>
-          <p:nvPr/>
-        </p:nvSpPr>
-        <p:spPr>
-          <a:xfrm>
-            <a:off x="3565736" y="1828897"/>
-            <a:ext cx="2232516" cy="1490254"/>
-          </a:xfrm>
-          <a:prstGeom prst="rect">
-            <a:avLst/>
-          </a:prstGeom>
-          <a:noFill/>
-          <a:ln>
-            <a:noFill/>
-          </a:ln>
-        </p:spPr>
-        <p:txBody>
-          <a:bodyPr anchorCtr="0" anchor="ctr" bIns="91425" lIns="91425" spcFirstLastPara="1" rIns="91425" wrap="square" tIns="91425">
-            <a:noAutofit/>
-          </a:bodyPr>
-          <a:lstStyle/>
-          <a:p>
-            <a:pPr indent="0" lvl="0" marL="0" rtl="0" algn="l">
-              <a:spcBef>
-                <a:spcPts val="0"/>
-              </a:spcBef>
-              <a:spcAft>
-                <a:spcPts val="0"/>
-              </a:spcAft>
-              <a:buNone/>
-            </a:pPr>
-            <a:r>
-              <a:t/>
-            </a:r>
-            <a:endParaRPr/>
-          </a:p>
-        </p:txBody>
-      </p:sp>
-      <p:sp>
-        <p:nvSpPr>
-          <p:cNvPr id="2433" name="Google Shape;2433;p89"/>
-          <p:cNvSpPr/>
-          <p:nvPr/>
-        </p:nvSpPr>
-        <p:spPr>
-          <a:xfrm>
-            <a:off x="6578067" y="1828897"/>
-            <a:ext cx="2232516" cy="1490254"/>
-          </a:xfrm>
-          <a:prstGeom prst="rect">
-            <a:avLst/>
-          </a:prstGeom>
-          <a:noFill/>
-          <a:ln>
-            <a:noFill/>
-          </a:ln>
-        </p:spPr>
-        <p:txBody>
-          <a:bodyPr anchorCtr="0" anchor="ctr" bIns="91425" lIns="91425" spcFirstLastPara="1" rIns="91425" wrap="square" tIns="91425">
-            <a:noAutofit/>
-          </a:bodyPr>
-          <a:lstStyle/>
-          <a:p>
-            <a:pPr indent="0" lvl="0" marL="0" rtl="0" algn="l">
-              <a:spcBef>
-                <a:spcPts val="0"/>
-              </a:spcBef>
-              <a:spcAft>
-                <a:spcPts val="0"/>
-              </a:spcAft>
-              <a:buNone/>
-            </a:pPr>
-            <a:r>
-              <a:t/>
-            </a:r>
-            <a:endParaRPr/>
-          </a:p>
-        </p:txBody>
-      </p:sp>
-      <p:sp>
-        <p:nvSpPr>
-          <p:cNvPr id="2434" name="title"/>
+          <p:cNvPr id="2" name="title"/>
           <p:cNvSpPr txBox="1"/>
           <p:nvPr/>
         </p:nvSpPr>
         <p:spPr>
           <a:xfrm>
             <a:off x="274320" y="282943"/>
-            <a:ext cx="6792986" cy="617220"/>
+            <a:ext cx="6792986" cy="932027"/>
           </a:xfrm>
           <a:prstGeom prst="rect">
             <a:avLst/>
@@ -7434,7 +7709,7 @@
               <a:spcAft>
                 <a:spcPts val="300"/>
               </a:spcAft>
-              <a:defRPr sz="2705">
+              <a:defRPr sz="2438">
                 <a:solidFill>
                   <a:srgbClr val="000000"/>
                 </a:solidFill>
@@ -7444,7 +7719,7 @@
               </a:defRPr>
             </a:pPr>
             <a:r>
-              <a:rPr sz="2705">
+              <a:rPr sz="2438">
                 <a:solidFill>
                   <a:srgbClr val="000000"/>
                 </a:solidFill>
@@ -7452,187 +7727,29 @@
                 <a:ea typeface="Play"/>
                 <a:cs typeface="Play"/>
               </a:rPr>
-              <a:t>Ресурсы и сроки</a:t>
+              <a:t>Ожидаемый эффект: сокращение времени сборки</a:t>
             </a:r>
           </a:p>
         </p:txBody>
       </p:sp>
-      <p:sp>
-        <p:nvSpPr>
-          <p:cNvPr id="2435" name="lead"/>
-          <p:cNvSpPr txBox="1"/>
+      <p:graphicFrame>
+        <p:nvGraphicFramePr>
+          <p:cNvPr id="3" name="Chart 2"/>
+          <p:cNvGraphicFramePr>
+            <a:graphicFrameLocks noGrp="1"/>
+          </p:cNvGraphicFramePr>
           <p:nvPr/>
-        </p:nvSpPr>
-        <p:spPr>
-          <a:xfrm>
-            <a:off x="274320" y="1414513"/>
-            <a:ext cx="6792986" cy="447970"/>
-          </a:xfrm>
-          <a:prstGeom prst="rect">
-            <a:avLst/>
-          </a:prstGeom>
-          <a:noFill/>
-        </p:spPr>
-        <p:txBody>
-          <a:bodyPr wrap="square" lIns="76200" rIns="76200" tIns="50800" bIns="50800">
-            <a:spAutoFit/>
-          </a:bodyPr>
-          <a:lstStyle/>
-          <a:p>
-            <a:pPr algn="l">
-              <a:spcAft>
-                <a:spcPts val="300"/>
-              </a:spcAft>
-              <a:defRPr sz="1800">
-                <a:solidFill>
-                  <a:srgbClr val="000000"/>
-                </a:solidFill>
-                <a:latin typeface="Play"/>
-                <a:ea typeface="Play"/>
-                <a:cs typeface="Play"/>
-              </a:defRPr>
-            </a:pPr>
-            <a:r>
-              <a:rPr sz="1800">
-                <a:solidFill>
-                  <a:srgbClr val="000000"/>
-                </a:solidFill>
-                <a:latin typeface="Play"/>
-                <a:ea typeface="Play"/>
-                <a:cs typeface="Play"/>
-              </a:rPr>
-              <a:t>Сервис работает на 2 vCPU / 2 ГБ RAM</a:t>
-            </a:r>
-          </a:p>
-        </p:txBody>
-      </p:sp>
-      <p:sp>
-        <p:nvSpPr>
-          <p:cNvPr id="2436" name="body"/>
-          <p:cNvSpPr txBox="1"/>
-          <p:nvPr/>
-        </p:nvSpPr>
-        <p:spPr>
-          <a:xfrm>
-            <a:off x="274320" y="1862483"/>
-            <a:ext cx="6792986" cy="869588"/>
-          </a:xfrm>
-          <a:prstGeom prst="rect">
-            <a:avLst/>
-          </a:prstGeom>
-          <a:noFill/>
-        </p:spPr>
-        <p:txBody>
-          <a:bodyPr wrap="square" lIns="76200" rIns="76200" tIns="50800" bIns="50800">
-            <a:spAutoFit/>
-          </a:bodyPr>
-          <a:lstStyle/>
-          <a:p>
-            <a:pPr algn="l">
-              <a:spcAft>
-                <a:spcPts val="300"/>
-              </a:spcAft>
-              <a:defRPr sz="1200">
-                <a:solidFill>
-                  <a:srgbClr val="000000"/>
-                </a:solidFill>
-                <a:latin typeface="Play"/>
-                <a:ea typeface="Play"/>
-                <a:cs typeface="Play"/>
-              </a:defRPr>
-            </a:pPr>
-            <a:r>
-              <a:rPr sz="1200">
-                <a:solidFill>
-                  <a:srgbClr val="000000"/>
-                </a:solidFill>
-                <a:latin typeface="Play"/>
-                <a:ea typeface="Play"/>
-                <a:cs typeface="Play"/>
-              </a:rPr>
-              <a:t>• Модель gpt-oss-20b через OpenAI-совместимый протокол</a:t>
-            </a:r>
-          </a:p>
-          <a:p>
-            <a:pPr algn="l">
-              <a:spcAft>
-                <a:spcPts val="300"/>
-              </a:spcAft>
-              <a:defRPr sz="1200">
-                <a:solidFill>
-                  <a:srgbClr val="000000"/>
-                </a:solidFill>
-                <a:latin typeface="Play"/>
-                <a:ea typeface="Play"/>
-                <a:cs typeface="Play"/>
-              </a:defRPr>
-            </a:pPr>
-            <a:r>
-              <a:rPr sz="1200">
-                <a:solidFill>
-                  <a:srgbClr val="000000"/>
-                </a:solidFill>
-                <a:latin typeface="Play"/>
-                <a:ea typeface="Play"/>
-                <a:cs typeface="Play"/>
-              </a:rPr>
-              <a:t>• План: Q3 2026 – подключение 4 команд, домен и HTTPS</a:t>
-            </a:r>
-          </a:p>
-          <a:p>
-            <a:pPr algn="l">
-              <a:spcAft>
-                <a:spcPts val="300"/>
-              </a:spcAft>
-              <a:defRPr sz="1200">
-                <a:solidFill>
-                  <a:srgbClr val="000000"/>
-                </a:solidFill>
-                <a:latin typeface="Play"/>
-                <a:ea typeface="Play"/>
-                <a:cs typeface="Play"/>
-              </a:defRPr>
-            </a:pPr>
-            <a:r>
-              <a:rPr sz="1200">
-                <a:solidFill>
-                  <a:srgbClr val="000000"/>
-                </a:solidFill>
-                <a:latin typeface="Play"/>
-                <a:ea typeface="Play"/>
-                <a:cs typeface="Play"/>
-              </a:rPr>
-              <a:t>• Q4 2026 – доступ для всей компании, интеграция с хранилищем</a:t>
-            </a:r>
-          </a:p>
-          <a:p>
-            <a:pPr algn="l">
-              <a:spcAft>
-                <a:spcPts val="300"/>
-              </a:spcAft>
-              <a:defRPr sz="1200">
-                <a:solidFill>
-                  <a:srgbClr val="000000"/>
-                </a:solidFill>
-                <a:latin typeface="Play"/>
-                <a:ea typeface="Play"/>
-                <a:cs typeface="Play"/>
-              </a:defRPr>
-            </a:pPr>
-            <a:r>
-              <a:rPr sz="1200">
-                <a:solidFill>
-                  <a:srgbClr val="000000"/>
-                </a:solidFill>
-                <a:latin typeface="Play"/>
-                <a:ea typeface="Play"/>
-                <a:cs typeface="Play"/>
-              </a:rPr>
-              <a:t>• Q1 2027 – генерация иллюстраций под стиль шаблона</a:t>
-            </a:r>
-          </a:p>
-        </p:txBody>
-      </p:sp>
+        </p:nvGraphicFramePr>
+        <p:xfrm>
+          <a:off x="274320" y="1394994"/>
+          <a:ext cx="8344814" cy="3028415"/>
+        </p:xfrm>
+        <a:graphic>
+          <a:graphicData uri="http://schemas.openxmlformats.org/drawingml/2006/chart">
+            <c:chart xmlns:c="http://schemas.openxmlformats.org/drawingml/2006/chart" r:id="rId3"/>
+          </a:graphicData>
+        </a:graphic>
+      </p:graphicFrame>
     </p:spTree>
   </p:cSld>
   <p:clrMapOvr>
@@ -7651,141 +7768,6 @@
         <p:nvPr/>
       </p:nvGrpSpPr>
       <p:grpSpPr/>
-      <p:sp>
-        <p:nvSpPr>
-          <p:cNvPr id="1027" name="Google Shape;1027;p65"/>
-          <p:cNvSpPr/>
-          <p:nvPr/>
-        </p:nvSpPr>
-        <p:spPr>
-          <a:xfrm>
-            <a:off x="6064222" y="1209852"/>
-            <a:ext cx="2793985" cy="3014270"/>
-          </a:xfrm>
-          <a:prstGeom prst="roundRect">
-            <a:avLst>
-              <a:gd fmla="val 3436" name="adj"/>
-            </a:avLst>
-          </a:prstGeom>
-          <a:solidFill>
-            <a:schemeClr val="lt2"/>
-          </a:solidFill>
-          <a:ln>
-            <a:noFill/>
-          </a:ln>
-        </p:spPr>
-        <p:txBody>
-          <a:bodyPr anchorCtr="0" anchor="ctr" bIns="91425" lIns="91425" spcFirstLastPara="1" rIns="91425" wrap="square" tIns="91425">
-            <a:noAutofit/>
-          </a:bodyPr>
-          <a:lstStyle/>
-          <a:p>
-            <a:pPr indent="0" lvl="0" marL="0" rtl="0" algn="l">
-              <a:spcBef>
-                <a:spcPts val="0"/>
-              </a:spcBef>
-              <a:spcAft>
-                <a:spcPts val="0"/>
-              </a:spcAft>
-              <a:buNone/>
-            </a:pPr>
-            <a:r>
-              <a:t/>
-            </a:r>
-            <a:endParaRPr/>
-          </a:p>
-        </p:txBody>
-      </p:sp>
-      <p:sp>
-        <p:nvSpPr>
-          <p:cNvPr id="1029" name="Google Shape;1029;p65"/>
-          <p:cNvSpPr/>
-          <p:nvPr/>
-        </p:nvSpPr>
-        <p:spPr>
-          <a:xfrm>
-            <a:off x="3174981" y="1209852"/>
-            <a:ext cx="2793985" cy="3014270"/>
-          </a:xfrm>
-          <a:prstGeom prst="roundRect">
-            <a:avLst>
-              <a:gd fmla="val 3436" name="adj"/>
-            </a:avLst>
-          </a:prstGeom>
-          <a:solidFill>
-            <a:schemeClr val="lt2"/>
-          </a:solidFill>
-          <a:ln>
-            <a:noFill/>
-          </a:ln>
-        </p:spPr>
-        <p:txBody>
-          <a:bodyPr anchorCtr="0" anchor="ctr" bIns="91425" lIns="91425" spcFirstLastPara="1" rIns="91425" wrap="square" tIns="91425">
-            <a:noAutofit/>
-          </a:bodyPr>
-          <a:lstStyle/>
-          <a:p>
-            <a:pPr indent="0" lvl="0" marL="0" rtl="0" algn="l">
-              <a:spcBef>
-                <a:spcPts val="0"/>
-              </a:spcBef>
-              <a:spcAft>
-                <a:spcPts val="0"/>
-              </a:spcAft>
-              <a:buNone/>
-            </a:pPr>
-            <a:r>
-              <a:t/>
-            </a:r>
-            <a:endParaRPr/>
-          </a:p>
-        </p:txBody>
-      </p:sp>
-      <p:sp>
-        <p:nvSpPr>
-          <p:cNvPr id="1031" name="Google Shape;1031;p65"/>
-          <p:cNvSpPr/>
-          <p:nvPr/>
-        </p:nvSpPr>
-        <p:spPr>
-          <a:xfrm>
-            <a:off x="285749" y="1209852"/>
-            <a:ext cx="2793985" cy="3014270"/>
-          </a:xfrm>
-          <a:prstGeom prst="roundRect">
-            <a:avLst>
-              <a:gd fmla="val 3436" name="adj"/>
-            </a:avLst>
-          </a:prstGeom>
-          <a:solidFill>
-            <a:schemeClr val="lt2"/>
-          </a:solidFill>
-          <a:ln>
-            <a:noFill/>
-          </a:ln>
-        </p:spPr>
-        <p:txBody>
-          <a:bodyPr anchorCtr="0" anchor="ctr" bIns="91425" lIns="91425" spcFirstLastPara="1" rIns="91425" wrap="square" tIns="91425">
-            <a:noAutofit/>
-          </a:bodyPr>
-          <a:lstStyle/>
-          <a:p>
-            <a:pPr indent="0" lvl="0" marL="0" rtl="0" algn="l">
-              <a:spcBef>
-                <a:spcPts val="0"/>
-              </a:spcBef>
-              <a:spcAft>
-                <a:spcPts val="0"/>
-              </a:spcAft>
-              <a:buNone/>
-            </a:pPr>
-            <a:r>
-              <a:t/>
-            </a:r>
-            <a:endParaRPr/>
-          </a:p>
-        </p:txBody>
-      </p:sp>
       <p:sp>
         <p:nvSpPr>
           <p:cNvPr id="1032" name="Google Shape;1032;p65"/>
@@ -7870,14 +7852,184 @@
       </p:sp>
       <p:sp>
         <p:nvSpPr>
-          <p:cNvPr id="1034" name="Google Shape;1034;p65"/>
+          <p:cNvPr id="1034" name="title"/>
+          <p:cNvSpPr txBox="1"/>
+          <p:nvPr/>
+        </p:nvSpPr>
+        <p:spPr>
+          <a:xfrm>
+            <a:off x="274320" y="282943"/>
+            <a:ext cx="6792986" cy="932027"/>
+          </a:xfrm>
+          <a:prstGeom prst="rect">
+            <a:avLst/>
+          </a:prstGeom>
+          <a:noFill/>
+        </p:spPr>
+        <p:txBody>
+          <a:bodyPr wrap="square" lIns="76200" rIns="76200" tIns="50800" bIns="50800">
+            <a:spAutoFit/>
+          </a:bodyPr>
+          <a:lstStyle/>
+          <a:p>
+            <a:pPr algn="l">
+              <a:spcAft>
+                <a:spcPts val="300"/>
+              </a:spcAft>
+              <a:defRPr sz="2438">
+                <a:solidFill>
+                  <a:srgbClr val="000000"/>
+                </a:solidFill>
+                <a:latin typeface="Play"/>
+                <a:ea typeface="Play"/>
+                <a:cs typeface="Play"/>
+              </a:defRPr>
+            </a:pPr>
+            <a:r>
+              <a:rPr sz="2438">
+                <a:solidFill>
+                  <a:srgbClr val="000000"/>
+                </a:solidFill>
+                <a:latin typeface="Play"/>
+                <a:ea typeface="Play"/>
+                <a:cs typeface="Play"/>
+              </a:rPr>
+              <a:t>Ожидаемый эффект: снижение нарушений фирменного стиля</a:t>
+            </a:r>
+          </a:p>
+        </p:txBody>
+      </p:sp>
+      <p:graphicFrame>
+        <p:nvGraphicFramePr>
+          <p:cNvPr id="1035" name="Chart 1034"/>
+          <p:cNvGraphicFramePr>
+            <a:graphicFrameLocks noGrp="1"/>
+          </p:cNvGraphicFramePr>
+          <p:nvPr/>
+        </p:nvGraphicFramePr>
+        <p:xfrm>
+          <a:off x="274320" y="1394994"/>
+          <a:ext cx="8344814" cy="3028415"/>
+        </p:xfrm>
+        <a:graphic>
+          <a:graphicData uri="http://schemas.openxmlformats.org/drawingml/2006/chart">
+            <c:chart xmlns:c="http://schemas.openxmlformats.org/drawingml/2006/chart" r:id="rId4"/>
+          </a:graphicData>
+        </a:graphic>
+      </p:graphicFrame>
+    </p:spTree>
+  </p:cSld>
+  <p:clrMapOvr>
+    <a:masterClrMapping/>
+  </p:clrMapOvr>
+</p:sld>
+</file>
+
+<file path=ppt/slides/slide62.xml><?xml version="1.0" encoding="utf-8"?>
+<p:sld xmlns:a="http://schemas.openxmlformats.org/drawingml/2006/main" xmlns:p="http://schemas.openxmlformats.org/presentationml/2006/main" xmlns:r="http://schemas.openxmlformats.org/officeDocument/2006/relationships">
+  <p:cSld>
+    <p:spTree>
+      <p:nvGrpSpPr>
+        <p:cNvPr id="1" name=""/>
+        <p:cNvGrpSpPr/>
+        <p:nvPr/>
+      </p:nvGrpSpPr>
+      <p:grpSpPr/>
+      <p:sp>
+        <p:nvSpPr>
+          <p:cNvPr id="2" name="title"/>
+          <p:cNvSpPr txBox="1"/>
+          <p:nvPr/>
+        </p:nvSpPr>
+        <p:spPr>
+          <a:xfrm>
+            <a:off x="274320" y="282943"/>
+            <a:ext cx="6792986" cy="932027"/>
+          </a:xfrm>
+          <a:prstGeom prst="rect">
+            <a:avLst/>
+          </a:prstGeom>
+          <a:noFill/>
+        </p:spPr>
+        <p:txBody>
+          <a:bodyPr wrap="square" lIns="76200" rIns="76200" tIns="50800" bIns="50800">
+            <a:spAutoFit/>
+          </a:bodyPr>
+          <a:lstStyle/>
+          <a:p>
+            <a:pPr algn="l">
+              <a:spcAft>
+                <a:spcPts val="300"/>
+              </a:spcAft>
+              <a:defRPr sz="2438">
+                <a:solidFill>
+                  <a:srgbClr val="000000"/>
+                </a:solidFill>
+                <a:latin typeface="Play"/>
+                <a:ea typeface="Play"/>
+                <a:cs typeface="Play"/>
+              </a:defRPr>
+            </a:pPr>
+            <a:r>
+              <a:rPr sz="2438">
+                <a:solidFill>
+                  <a:srgbClr val="000000"/>
+                </a:solidFill>
+                <a:latin typeface="Play"/>
+                <a:ea typeface="Play"/>
+                <a:cs typeface="Play"/>
+              </a:rPr>
+              <a:t>Ожидаемый эффект: рост закрытых запросов</a:t>
+            </a:r>
+          </a:p>
+        </p:txBody>
+      </p:sp>
+      <p:graphicFrame>
+        <p:nvGraphicFramePr>
+          <p:cNvPr id="3" name="Chart 2"/>
+          <p:cNvGraphicFramePr>
+            <a:graphicFrameLocks noGrp="1"/>
+          </p:cNvGraphicFramePr>
+          <p:nvPr/>
+        </p:nvGraphicFramePr>
+        <p:xfrm>
+          <a:off x="274320" y="1394994"/>
+          <a:ext cx="8344814" cy="3028415"/>
+        </p:xfrm>
+        <a:graphic>
+          <a:graphicData uri="http://schemas.openxmlformats.org/drawingml/2006/chart">
+            <c:chart xmlns:c="http://schemas.openxmlformats.org/drawingml/2006/chart" r:id="rId4"/>
+          </a:graphicData>
+        </a:graphic>
+      </p:graphicFrame>
+    </p:spTree>
+  </p:cSld>
+  <p:clrMapOvr>
+    <a:masterClrMapping/>
+  </p:clrMapOvr>
+</p:sld>
+</file>
+
+<file path=ppt/slides/slide63.xml><?xml version="1.0" encoding="utf-8"?>
+<p:sld xmlns:a="http://schemas.openxmlformats.org/drawingml/2006/main" xmlns:p="http://schemas.openxmlformats.org/presentationml/2006/main" xmlns:r="http://schemas.openxmlformats.org/officeDocument/2006/relationships">
+  <p:cSld>
+    <p:spTree>
+      <p:nvGrpSpPr>
+        <p:cNvPr id="1" name=""/>
+        <p:cNvGrpSpPr/>
+        <p:nvPr/>
+      </p:nvGrpSpPr>
+      <p:grpSpPr/>
+      <p:sp>
+        <p:nvSpPr>
+          <p:cNvPr id="532" name="Google Shape;532;p53"/>
           <p:cNvSpPr/>
           <p:nvPr/>
         </p:nvSpPr>
         <p:spPr>
           <a:xfrm>
-            <a:off x="476248" y="1400327"/>
-            <a:ext cx="2412987" cy="1009519"/>
+            <a:off x="303214" y="1022533"/>
+            <a:ext cx="8451939" cy="1433588"/>
           </a:xfrm>
           <a:prstGeom prst="rect">
             <a:avLst/>
@@ -7911,59 +8063,14 @@
       </p:sp>
       <p:sp>
         <p:nvSpPr>
-          <p:cNvPr id="1035" name="Google Shape;1035;p65"/>
+          <p:cNvPr id="553" name="Google Shape;553;p53"/>
           <p:cNvSpPr/>
           <p:nvPr/>
         </p:nvSpPr>
         <p:spPr>
           <a:xfrm>
-            <a:off x="476248" y="1400328"/>
-            <a:ext cx="76199" cy="76190"/>
-          </a:xfrm>
-          <a:prstGeom prst="roundRect">
-            <a:avLst>
-              <a:gd fmla="val 31500" name="adj"/>
-            </a:avLst>
-          </a:prstGeom>
-          <a:solidFill>
-            <a:srgbClr val="0077FF"/>
-          </a:solidFill>
-          <a:ln>
-            <a:noFill/>
-          </a:ln>
-        </p:spPr>
-        <p:txBody>
-          <a:bodyPr anchorCtr="0" anchor="ctr" bIns="91425" lIns="91425" spcFirstLastPara="1" rIns="91425" wrap="square" tIns="91425">
-            <a:noAutofit/>
-          </a:bodyPr>
-          <a:lstStyle/>
-          <a:p>
-            <a:pPr indent="0" lvl="0" marL="0" rtl="0" algn="l">
-              <a:spcBef>
-                <a:spcPts val="0"/>
-              </a:spcBef>
-              <a:spcAft>
-                <a:spcPts val="0"/>
-              </a:spcAft>
-              <a:buNone/>
-            </a:pPr>
-            <a:r>
-              <a:t/>
-            </a:r>
-            <a:endParaRPr/>
-          </a:p>
-        </p:txBody>
-      </p:sp>
-      <p:sp>
-        <p:nvSpPr>
-          <p:cNvPr id="1040" name="Google Shape;1040;p65"/>
-          <p:cNvSpPr/>
-          <p:nvPr/>
-        </p:nvSpPr>
-        <p:spPr>
-          <a:xfrm>
-            <a:off x="3365480" y="1400327"/>
-            <a:ext cx="2412987" cy="1009519"/>
+            <a:off x="276488" y="2955549"/>
+            <a:ext cx="8451939" cy="1433588"/>
           </a:xfrm>
           <a:prstGeom prst="rect">
             <a:avLst/>
@@ -7997,59 +8104,14 @@
       </p:sp>
       <p:sp>
         <p:nvSpPr>
-          <p:cNvPr id="1041" name="Google Shape;1041;p65"/>
+          <p:cNvPr id="554" name="Google Shape;554;p53"/>
           <p:cNvSpPr/>
           <p:nvPr/>
         </p:nvSpPr>
         <p:spPr>
           <a:xfrm>
-            <a:off x="3365480" y="1400328"/>
-            <a:ext cx="76199" cy="76190"/>
-          </a:xfrm>
-          <a:prstGeom prst="roundRect">
-            <a:avLst>
-              <a:gd fmla="val 31500" name="adj"/>
-            </a:avLst>
-          </a:prstGeom>
-          <a:solidFill>
-            <a:srgbClr val="0077FF"/>
-          </a:solidFill>
-          <a:ln>
-            <a:noFill/>
-          </a:ln>
-        </p:spPr>
-        <p:txBody>
-          <a:bodyPr anchorCtr="0" anchor="ctr" bIns="91425" lIns="91425" spcFirstLastPara="1" rIns="91425" wrap="square" tIns="91425">
-            <a:noAutofit/>
-          </a:bodyPr>
-          <a:lstStyle/>
-          <a:p>
-            <a:pPr indent="0" lvl="0" marL="0" rtl="0" algn="l">
-              <a:spcBef>
-                <a:spcPts val="0"/>
-              </a:spcBef>
-              <a:spcAft>
-                <a:spcPts val="0"/>
-              </a:spcAft>
-              <a:buNone/>
-            </a:pPr>
-            <a:r>
-              <a:t/>
-            </a:r>
-            <a:endParaRPr/>
-          </a:p>
-        </p:txBody>
-      </p:sp>
-      <p:sp>
-        <p:nvSpPr>
-          <p:cNvPr id="1045" name="Google Shape;1045;p65"/>
-          <p:cNvSpPr/>
-          <p:nvPr/>
-        </p:nvSpPr>
-        <p:spPr>
-          <a:xfrm>
-            <a:off x="6254721" y="1400327"/>
-            <a:ext cx="2412987" cy="1009519"/>
+            <a:off x="303214" y="2797849"/>
+            <a:ext cx="8451939" cy="1433588"/>
           </a:xfrm>
           <a:prstGeom prst="rect">
             <a:avLst/>
@@ -8083,52 +8145,7 @@
       </p:sp>
       <p:sp>
         <p:nvSpPr>
-          <p:cNvPr id="1046" name="Google Shape;1046;p65"/>
-          <p:cNvSpPr/>
-          <p:nvPr/>
-        </p:nvSpPr>
-        <p:spPr>
-          <a:xfrm>
-            <a:off x="6254721" y="1400328"/>
-            <a:ext cx="76199" cy="76190"/>
-          </a:xfrm>
-          <a:prstGeom prst="roundRect">
-            <a:avLst>
-              <a:gd fmla="val 31500" name="adj"/>
-            </a:avLst>
-          </a:prstGeom>
-          <a:solidFill>
-            <a:srgbClr val="0077FF"/>
-          </a:solidFill>
-          <a:ln>
-            <a:noFill/>
-          </a:ln>
-        </p:spPr>
-        <p:txBody>
-          <a:bodyPr anchorCtr="0" anchor="ctr" bIns="91425" lIns="91425" spcFirstLastPara="1" rIns="91425" wrap="square" tIns="91425">
-            <a:noAutofit/>
-          </a:bodyPr>
-          <a:lstStyle/>
-          <a:p>
-            <a:pPr indent="0" lvl="0" marL="0" rtl="0" algn="l">
-              <a:spcBef>
-                <a:spcPts val="0"/>
-              </a:spcBef>
-              <a:spcAft>
-                <a:spcPts val="0"/>
-              </a:spcAft>
-              <a:buNone/>
-            </a:pPr>
-            <a:r>
-              <a:t/>
-            </a:r>
-            <a:endParaRPr/>
-          </a:p>
-        </p:txBody>
-      </p:sp>
-      <p:sp>
-        <p:nvSpPr>
-          <p:cNvPr id="1047" name="title"/>
+          <p:cNvPr id="555" name="title"/>
           <p:cNvSpPr txBox="1"/>
           <p:nvPr/>
         </p:nvSpPr>
@@ -8152,7 +8169,7 @@
               <a:spcAft>
                 <a:spcPts val="300"/>
               </a:spcAft>
-              <a:defRPr sz="2705">
+              <a:defRPr sz="2438">
                 <a:solidFill>
                   <a:srgbClr val="000000"/>
                 </a:solidFill>
@@ -8162,7 +8179,7 @@
               </a:defRPr>
             </a:pPr>
             <a:r>
-              <a:rPr sz="2705">
+              <a:rPr sz="2438">
                 <a:solidFill>
                   <a:srgbClr val="000000"/>
                 </a:solidFill>
@@ -8170,21 +8187,143 @@
                 <a:ea typeface="Play"/>
                 <a:cs typeface="Play"/>
               </a:rPr>
-              <a:t>Риски</a:t>
+              <a:t>Что потребуется: ресурсы и сроки</a:t>
             </a:r>
           </a:p>
         </p:txBody>
       </p:sp>
       <p:sp>
         <p:nvSpPr>
-          <p:cNvPr id="1048" name="lead"/>
+          <p:cNvPr id="556" name="stat_0:bar"/>
+          <p:cNvSpPr/>
+          <p:nvPr/>
+        </p:nvSpPr>
+        <p:spPr>
+          <a:xfrm>
+            <a:off x="274320" y="1410462"/>
+            <a:ext cx="50800" cy="833628"/>
+          </a:xfrm>
+          <a:prstGeom prst="rect">
+            <a:avLst/>
+          </a:prstGeom>
+          <a:solidFill>
+            <a:srgbClr val="0077FF"/>
+          </a:solidFill>
+          <a:ln>
+            <a:noFill/>
+          </a:ln>
+          <a:effectLst/>
+        </p:spPr>
+        <p:style>
+          <a:lnRef idx="1">
+            <a:schemeClr val="accent1"/>
+          </a:lnRef>
+          <a:fillRef idx="3">
+            <a:schemeClr val="accent1"/>
+          </a:fillRef>
+          <a:effectRef idx="2">
+            <a:schemeClr val="accent1"/>
+          </a:effectRef>
+          <a:fontRef idx="minor">
+            <a:schemeClr val="lt1"/>
+          </a:fontRef>
+        </p:style>
+        <p:txBody>
+          <a:bodyPr rtlCol="0" anchor="ctr"/>
+          <a:lstStyle/>
+          <a:p>
+            <a:pPr algn="ctr"/>
+          </a:p>
+        </p:txBody>
+      </p:sp>
+      <p:sp>
+        <p:nvSpPr>
+          <p:cNvPr id="557" name="stat_0"/>
           <p:cNvSpPr txBox="1"/>
           <p:nvPr/>
         </p:nvSpPr>
         <p:spPr>
           <a:xfrm>
-            <a:off x="274320" y="1476493"/>
-            <a:ext cx="6792986" cy="421298"/>
+            <a:off x="452119" y="1337310"/>
+            <a:ext cx="8167014" cy="906780"/>
+          </a:xfrm>
+          <a:prstGeom prst="rect">
+            <a:avLst/>
+          </a:prstGeom>
+          <a:noFill/>
+        </p:spPr>
+        <p:txBody>
+          <a:bodyPr wrap="square" lIns="76200" rIns="76200" tIns="0" bIns="0">
+            <a:spAutoFit/>
+          </a:bodyPr>
+          <a:lstStyle/>
+          <a:p>
+            <a:pPr>
+              <a:lnSpc>
+                <a:spcPct val="100000"/>
+              </a:lnSpc>
+              <a:spcAft>
+                <a:spcPts val="200"/>
+              </a:spcAft>
+              <a:defRPr sz="3200" b="1">
+                <a:solidFill>
+                  <a:srgbClr val="0077FF"/>
+                </a:solidFill>
+                <a:latin typeface="Play"/>
+                <a:ea typeface="Play"/>
+                <a:cs typeface="Play"/>
+              </a:defRPr>
+            </a:pPr>
+            <a:r>
+              <a:rPr sz="3200" b="1">
+                <a:solidFill>
+                  <a:srgbClr val="0077FF"/>
+                </a:solidFill>
+                <a:latin typeface="Play"/>
+                <a:ea typeface="Play"/>
+                <a:cs typeface="Play"/>
+              </a:rPr>
+              <a:t>2 vCPU</a:t>
+            </a:r>
+          </a:p>
+          <a:p>
+            <a:pPr>
+              <a:spcAft>
+                <a:spcPts val="300"/>
+              </a:spcAft>
+              <a:defRPr sz="1800" b="0">
+                <a:solidFill>
+                  <a:srgbClr val="000000"/>
+                </a:solidFill>
+                <a:latin typeface="Play"/>
+                <a:ea typeface="Play"/>
+                <a:cs typeface="Play"/>
+              </a:defRPr>
+            </a:pPr>
+            <a:r>
+              <a:rPr sz="1800" b="0">
+                <a:solidFill>
+                  <a:srgbClr val="000000"/>
+                </a:solidFill>
+                <a:latin typeface="Play"/>
+                <a:ea typeface="Play"/>
+                <a:cs typeface="Play"/>
+              </a:rPr>
+              <a:t>Сервис работает на машине 2 vCPU / 2 ГБ RAM</a:t>
+            </a:r>
+          </a:p>
+        </p:txBody>
+      </p:sp>
+      <p:sp>
+        <p:nvSpPr>
+          <p:cNvPr id="558" name="body"/>
+          <p:cNvSpPr txBox="1"/>
+          <p:nvPr/>
+        </p:nvSpPr>
+        <p:spPr>
+          <a:xfrm>
+            <a:off x="274320" y="3127247"/>
+            <a:ext cx="8344814" cy="1296162"/>
           </a:xfrm>
           <a:prstGeom prst="rect">
             <a:avLst/>
@@ -8201,729 +8340,6 @@
               <a:spcAft>
                 <a:spcPts val="300"/>
               </a:spcAft>
-              <a:defRPr sz="1400">
-                <a:solidFill>
-                  <a:srgbClr val="000000"/>
-                </a:solidFill>
-                <a:latin typeface="Play"/>
-                <a:ea typeface="Play"/>
-                <a:cs typeface="Play"/>
-              </a:defRPr>
-            </a:pPr>
-            <a:r>
-              <a:rPr sz="1400">
-                <a:solidFill>
-                  <a:srgbClr val="000000"/>
-                </a:solidFill>
-                <a:latin typeface="Play"/>
-                <a:ea typeface="Play"/>
-                <a:cs typeface="Play"/>
-              </a:rPr>
-              <a:t>Слабая модель может выдумать неверные цифры – аудит проверяет</a:t>
-            </a:r>
-          </a:p>
-        </p:txBody>
-      </p:sp>
-      <p:sp>
-        <p:nvSpPr>
-          <p:cNvPr id="1049" name="body"/>
-          <p:cNvSpPr txBox="1"/>
-          <p:nvPr/>
-        </p:nvSpPr>
-        <p:spPr>
-          <a:xfrm>
-            <a:off x="274320" y="1956841"/>
-            <a:ext cx="6792986" cy="503809"/>
-          </a:xfrm>
-          <a:prstGeom prst="rect">
-            <a:avLst/>
-          </a:prstGeom>
-          <a:noFill/>
-        </p:spPr>
-        <p:txBody>
-          <a:bodyPr wrap="square" lIns="76200" rIns="76200" tIns="50800" bIns="50800">
-            <a:spAutoFit/>
-          </a:bodyPr>
-          <a:lstStyle/>
-          <a:p>
-            <a:pPr algn="l">
-              <a:spcAft>
-                <a:spcPts val="300"/>
-              </a:spcAft>
-              <a:defRPr sz="1200">
-                <a:solidFill>
-                  <a:srgbClr val="000000"/>
-                </a:solidFill>
-                <a:latin typeface="Play"/>
-                <a:ea typeface="Play"/>
-                <a:cs typeface="Play"/>
-              </a:defRPr>
-            </a:pPr>
-            <a:r>
-              <a:rPr sz="1200">
-                <a:solidFill>
-                  <a:srgbClr val="000000"/>
-                </a:solidFill>
-                <a:latin typeface="Play"/>
-                <a:ea typeface="Play"/>
-                <a:cs typeface="Play"/>
-              </a:rPr>
-              <a:t>• Плохой шаблон приводит к использованию рабочей области вместо готовых страниц</a:t>
-            </a:r>
-          </a:p>
-          <a:p>
-            <a:pPr algn="l">
-              <a:spcAft>
-                <a:spcPts val="300"/>
-              </a:spcAft>
-              <a:defRPr sz="1200">
-                <a:solidFill>
-                  <a:srgbClr val="000000"/>
-                </a:solidFill>
-                <a:latin typeface="Play"/>
-                <a:ea typeface="Play"/>
-                <a:cs typeface="Play"/>
-              </a:defRPr>
-            </a:pPr>
-            <a:r>
-              <a:rPr sz="1200">
-                <a:solidFill>
-                  <a:srgbClr val="000000"/>
-                </a:solidFill>
-                <a:latin typeface="Play"/>
-                <a:ea typeface="Play"/>
-                <a:cs typeface="Play"/>
-              </a:rPr>
-              <a:t>• Нагрузка выше 20 одновременных задач требует внешней очереди</a:t>
-            </a:r>
-          </a:p>
-        </p:txBody>
-      </p:sp>
-    </p:spTree>
-  </p:cSld>
-  <p:clrMapOvr>
-    <a:masterClrMapping/>
-  </p:clrMapOvr>
-</p:sld>
-</file>
-
-<file path=ppt/slides/slide62.xml><?xml version="1.0" encoding="utf-8"?>
-<p:sld xmlns:a="http://schemas.openxmlformats.org/drawingml/2006/main" xmlns:p="http://schemas.openxmlformats.org/presentationml/2006/main" xmlns:r="http://schemas.openxmlformats.org/officeDocument/2006/relationships">
-  <p:cSld>
-    <p:spTree>
-      <p:nvGrpSpPr>
-        <p:cNvPr id="1" name=""/>
-        <p:cNvGrpSpPr/>
-        <p:nvPr/>
-      </p:nvGrpSpPr>
-      <p:grpSpPr/>
-      <p:sp>
-        <p:nvSpPr>
-          <p:cNvPr id="662" name="Google Shape;662;p55"/>
-          <p:cNvSpPr/>
-          <p:nvPr/>
-        </p:nvSpPr>
-        <p:spPr>
-          <a:xfrm>
-            <a:off x="8667705" y="4666977"/>
-            <a:ext cx="190499" cy="190475"/>
-          </a:xfrm>
-          <a:prstGeom prst="rect">
-            <a:avLst/>
-          </a:prstGeom>
-          <a:noFill/>
-          <a:ln>
-            <a:noFill/>
-          </a:ln>
-        </p:spPr>
-        <p:txBody>
-          <a:bodyPr anchorCtr="0" anchor="ctr" bIns="91425" lIns="91425" spcFirstLastPara="1" rIns="91425" wrap="square" tIns="91425">
-            <a:noAutofit/>
-          </a:bodyPr>
-          <a:lstStyle/>
-          <a:p>
-            <a:pPr indent="0" lvl="0" marL="0" rtl="0" algn="l">
-              <a:spcBef>
-                <a:spcPts val="0"/>
-              </a:spcBef>
-              <a:spcAft>
-                <a:spcPts val="0"/>
-              </a:spcAft>
-              <a:buNone/>
-            </a:pPr>
-            <a:r>
-              <a:t/>
-            </a:r>
-            <a:endParaRPr/>
-          </a:p>
-        </p:txBody>
-      </p:sp>
-      <p:sp>
-        <p:nvSpPr>
-          <p:cNvPr id="663" name="Google Shape;663;p55"/>
-          <p:cNvSpPr/>
-          <p:nvPr/>
-        </p:nvSpPr>
-        <p:spPr>
-          <a:xfrm>
-            <a:off x="285748" y="286047"/>
-            <a:ext cx="8572456" cy="3938075"/>
-          </a:xfrm>
-          <a:prstGeom prst="rect">
-            <a:avLst/>
-          </a:prstGeom>
-          <a:noFill/>
-          <a:ln>
-            <a:noFill/>
-          </a:ln>
-        </p:spPr>
-        <p:txBody>
-          <a:bodyPr anchorCtr="0" anchor="ctr" bIns="91425" lIns="91425" spcFirstLastPara="1" rIns="91425" wrap="square" tIns="91425">
-            <a:noAutofit/>
-          </a:bodyPr>
-          <a:lstStyle/>
-          <a:p>
-            <a:pPr indent="0" lvl="0" marL="0" rtl="0" algn="l">
-              <a:spcBef>
-                <a:spcPts val="0"/>
-              </a:spcBef>
-              <a:spcAft>
-                <a:spcPts val="0"/>
-              </a:spcAft>
-              <a:buNone/>
-            </a:pPr>
-            <a:r>
-              <a:t/>
-            </a:r>
-            <a:endParaRPr/>
-          </a:p>
-        </p:txBody>
-      </p:sp>
-      <p:sp>
-        <p:nvSpPr>
-          <p:cNvPr id="664" name="Google Shape;664;p55"/>
-          <p:cNvSpPr/>
-          <p:nvPr/>
-        </p:nvSpPr>
-        <p:spPr>
-          <a:xfrm>
-            <a:off x="285748" y="1209852"/>
-            <a:ext cx="8572456" cy="3014270"/>
-          </a:xfrm>
-          <a:prstGeom prst="rect">
-            <a:avLst/>
-          </a:prstGeom>
-          <a:noFill/>
-          <a:ln>
-            <a:noFill/>
-          </a:ln>
-        </p:spPr>
-        <p:txBody>
-          <a:bodyPr anchorCtr="0" anchor="ctr" bIns="91425" lIns="91425" spcFirstLastPara="1" rIns="91425" wrap="square" tIns="91425">
-            <a:noAutofit/>
-          </a:bodyPr>
-          <a:lstStyle/>
-          <a:p>
-            <a:pPr indent="0" lvl="0" marL="0" rtl="0" algn="l">
-              <a:spcBef>
-                <a:spcPts val="0"/>
-              </a:spcBef>
-              <a:spcAft>
-                <a:spcPts val="0"/>
-              </a:spcAft>
-              <a:buNone/>
-            </a:pPr>
-            <a:r>
-              <a:t/>
-            </a:r>
-            <a:endParaRPr/>
-          </a:p>
-        </p:txBody>
-      </p:sp>
-      <p:sp>
-        <p:nvSpPr>
-          <p:cNvPr id="665" name="Google Shape;665;p55"/>
-          <p:cNvSpPr/>
-          <p:nvPr/>
-        </p:nvSpPr>
-        <p:spPr>
-          <a:xfrm>
-            <a:off x="285749" y="1209852"/>
-            <a:ext cx="2071677" cy="3014270"/>
-          </a:xfrm>
-          <a:prstGeom prst="roundRect">
-            <a:avLst>
-              <a:gd fmla="val 4634" name="adj"/>
-            </a:avLst>
-          </a:prstGeom>
-          <a:solidFill>
-            <a:schemeClr val="lt2"/>
-          </a:solidFill>
-          <a:ln>
-            <a:noFill/>
-          </a:ln>
-        </p:spPr>
-        <p:txBody>
-          <a:bodyPr anchorCtr="0" anchor="ctr" bIns="91425" lIns="91425" spcFirstLastPara="1" rIns="91425" wrap="square" tIns="91425">
-            <a:noAutofit/>
-          </a:bodyPr>
-          <a:lstStyle/>
-          <a:p>
-            <a:pPr indent="0" lvl="0" marL="0" rtl="0" algn="l">
-              <a:spcBef>
-                <a:spcPts val="0"/>
-              </a:spcBef>
-              <a:spcAft>
-                <a:spcPts val="0"/>
-              </a:spcAft>
-              <a:buNone/>
-            </a:pPr>
-            <a:r>
-              <a:t/>
-            </a:r>
-            <a:endParaRPr/>
-          </a:p>
-        </p:txBody>
-      </p:sp>
-      <p:sp>
-        <p:nvSpPr>
-          <p:cNvPr id="667" name="Google Shape;667;p55"/>
-          <p:cNvSpPr/>
-          <p:nvPr/>
-        </p:nvSpPr>
-        <p:spPr>
-          <a:xfrm>
-            <a:off x="438148" y="1362233"/>
-            <a:ext cx="76199" cy="76190"/>
-          </a:xfrm>
-          <a:prstGeom prst="roundRect">
-            <a:avLst>
-              <a:gd fmla="val 31500" name="adj"/>
-            </a:avLst>
-          </a:prstGeom>
-          <a:solidFill>
-            <a:srgbClr val="0077FF"/>
-          </a:solidFill>
-          <a:ln>
-            <a:noFill/>
-          </a:ln>
-        </p:spPr>
-        <p:txBody>
-          <a:bodyPr anchorCtr="0" anchor="ctr" bIns="91425" lIns="91425" spcFirstLastPara="1" rIns="91425" wrap="square" tIns="91425">
-            <a:noAutofit/>
-          </a:bodyPr>
-          <a:lstStyle/>
-          <a:p>
-            <a:pPr indent="0" lvl="0" marL="0" rtl="0" algn="l">
-              <a:spcBef>
-                <a:spcPts val="0"/>
-              </a:spcBef>
-              <a:spcAft>
-                <a:spcPts val="0"/>
-              </a:spcAft>
-              <a:buNone/>
-            </a:pPr>
-            <a:r>
-              <a:t/>
-            </a:r>
-            <a:endParaRPr/>
-          </a:p>
-        </p:txBody>
-      </p:sp>
-      <p:sp>
-        <p:nvSpPr>
-          <p:cNvPr id="670" name="Google Shape;670;p55"/>
-          <p:cNvSpPr/>
-          <p:nvPr/>
-        </p:nvSpPr>
-        <p:spPr>
-          <a:xfrm>
-            <a:off x="2452675" y="1209852"/>
-            <a:ext cx="2071677" cy="3014270"/>
-          </a:xfrm>
-          <a:prstGeom prst="roundRect">
-            <a:avLst>
-              <a:gd fmla="val 4634" name="adj"/>
-            </a:avLst>
-          </a:prstGeom>
-          <a:solidFill>
-            <a:schemeClr val="lt2"/>
-          </a:solidFill>
-          <a:ln>
-            <a:noFill/>
-          </a:ln>
-        </p:spPr>
-        <p:txBody>
-          <a:bodyPr anchorCtr="0" anchor="ctr" bIns="91425" lIns="91425" spcFirstLastPara="1" rIns="91425" wrap="square" tIns="91425">
-            <a:noAutofit/>
-          </a:bodyPr>
-          <a:lstStyle/>
-          <a:p>
-            <a:pPr indent="0" lvl="0" marL="0" rtl="0" algn="l">
-              <a:spcBef>
-                <a:spcPts val="0"/>
-              </a:spcBef>
-              <a:spcAft>
-                <a:spcPts val="0"/>
-              </a:spcAft>
-              <a:buNone/>
-            </a:pPr>
-            <a:r>
-              <a:t/>
-            </a:r>
-            <a:endParaRPr/>
-          </a:p>
-        </p:txBody>
-      </p:sp>
-      <p:sp>
-        <p:nvSpPr>
-          <p:cNvPr id="672" name="Google Shape;672;p55"/>
-          <p:cNvSpPr/>
-          <p:nvPr/>
-        </p:nvSpPr>
-        <p:spPr>
-          <a:xfrm>
-            <a:off x="2605074" y="1362233"/>
-            <a:ext cx="76199" cy="76190"/>
-          </a:xfrm>
-          <a:prstGeom prst="roundRect">
-            <a:avLst>
-              <a:gd fmla="val 31500" name="adj"/>
-            </a:avLst>
-          </a:prstGeom>
-          <a:solidFill>
-            <a:srgbClr val="0077FF"/>
-          </a:solidFill>
-          <a:ln>
-            <a:noFill/>
-          </a:ln>
-        </p:spPr>
-        <p:txBody>
-          <a:bodyPr anchorCtr="0" anchor="ctr" bIns="91425" lIns="91425" spcFirstLastPara="1" rIns="91425" wrap="square" tIns="91425">
-            <a:noAutofit/>
-          </a:bodyPr>
-          <a:lstStyle/>
-          <a:p>
-            <a:pPr indent="0" lvl="0" marL="0" rtl="0" algn="l">
-              <a:spcBef>
-                <a:spcPts val="0"/>
-              </a:spcBef>
-              <a:spcAft>
-                <a:spcPts val="0"/>
-              </a:spcAft>
-              <a:buNone/>
-            </a:pPr>
-            <a:r>
-              <a:t/>
-            </a:r>
-            <a:endParaRPr/>
-          </a:p>
-        </p:txBody>
-      </p:sp>
-      <p:sp>
-        <p:nvSpPr>
-          <p:cNvPr id="675" name="Google Shape;675;p55"/>
-          <p:cNvSpPr/>
-          <p:nvPr/>
-        </p:nvSpPr>
-        <p:spPr>
-          <a:xfrm>
-            <a:off x="4619601" y="1209852"/>
-            <a:ext cx="2071677" cy="3014270"/>
-          </a:xfrm>
-          <a:prstGeom prst="roundRect">
-            <a:avLst>
-              <a:gd fmla="val 4634" name="adj"/>
-            </a:avLst>
-          </a:prstGeom>
-          <a:solidFill>
-            <a:schemeClr val="lt2"/>
-          </a:solidFill>
-          <a:ln>
-            <a:noFill/>
-          </a:ln>
-        </p:spPr>
-        <p:txBody>
-          <a:bodyPr anchorCtr="0" anchor="ctr" bIns="91425" lIns="91425" spcFirstLastPara="1" rIns="91425" wrap="square" tIns="91425">
-            <a:noAutofit/>
-          </a:bodyPr>
-          <a:lstStyle/>
-          <a:p>
-            <a:pPr indent="0" lvl="0" marL="0" rtl="0" algn="l">
-              <a:spcBef>
-                <a:spcPts val="0"/>
-              </a:spcBef>
-              <a:spcAft>
-                <a:spcPts val="0"/>
-              </a:spcAft>
-              <a:buNone/>
-            </a:pPr>
-            <a:r>
-              <a:t/>
-            </a:r>
-            <a:endParaRPr/>
-          </a:p>
-        </p:txBody>
-      </p:sp>
-      <p:sp>
-        <p:nvSpPr>
-          <p:cNvPr id="677" name="Google Shape;677;p55"/>
-          <p:cNvSpPr/>
-          <p:nvPr/>
-        </p:nvSpPr>
-        <p:spPr>
-          <a:xfrm>
-            <a:off x="4772001" y="1362233"/>
-            <a:ext cx="76199" cy="76190"/>
-          </a:xfrm>
-          <a:prstGeom prst="roundRect">
-            <a:avLst>
-              <a:gd fmla="val 31500" name="adj"/>
-            </a:avLst>
-          </a:prstGeom>
-          <a:solidFill>
-            <a:srgbClr val="0077FF"/>
-          </a:solidFill>
-          <a:ln>
-            <a:noFill/>
-          </a:ln>
-        </p:spPr>
-        <p:txBody>
-          <a:bodyPr anchorCtr="0" anchor="ctr" bIns="91425" lIns="91425" spcFirstLastPara="1" rIns="91425" wrap="square" tIns="91425">
-            <a:noAutofit/>
-          </a:bodyPr>
-          <a:lstStyle/>
-          <a:p>
-            <a:pPr indent="0" lvl="0" marL="0" rtl="0" algn="l">
-              <a:spcBef>
-                <a:spcPts val="0"/>
-              </a:spcBef>
-              <a:spcAft>
-                <a:spcPts val="0"/>
-              </a:spcAft>
-              <a:buNone/>
-            </a:pPr>
-            <a:r>
-              <a:t/>
-            </a:r>
-            <a:endParaRPr/>
-          </a:p>
-        </p:txBody>
-      </p:sp>
-      <p:sp>
-        <p:nvSpPr>
-          <p:cNvPr id="680" name="Google Shape;680;p55"/>
-          <p:cNvSpPr/>
-          <p:nvPr/>
-        </p:nvSpPr>
-        <p:spPr>
-          <a:xfrm>
-            <a:off x="6786527" y="1209852"/>
-            <a:ext cx="2071677" cy="3014270"/>
-          </a:xfrm>
-          <a:prstGeom prst="roundRect">
-            <a:avLst>
-              <a:gd fmla="val 4634" name="adj"/>
-            </a:avLst>
-          </a:prstGeom>
-          <a:solidFill>
-            <a:schemeClr val="lt2"/>
-          </a:solidFill>
-          <a:ln>
-            <a:noFill/>
-          </a:ln>
-        </p:spPr>
-        <p:txBody>
-          <a:bodyPr anchorCtr="0" anchor="ctr" bIns="91425" lIns="91425" spcFirstLastPara="1" rIns="91425" wrap="square" tIns="91425">
-            <a:noAutofit/>
-          </a:bodyPr>
-          <a:lstStyle/>
-          <a:p>
-            <a:pPr indent="0" lvl="0" marL="0" rtl="0" algn="l">
-              <a:spcBef>
-                <a:spcPts val="0"/>
-              </a:spcBef>
-              <a:spcAft>
-                <a:spcPts val="0"/>
-              </a:spcAft>
-              <a:buNone/>
-            </a:pPr>
-            <a:r>
-              <a:t/>
-            </a:r>
-            <a:endParaRPr/>
-          </a:p>
-        </p:txBody>
-      </p:sp>
-      <p:sp>
-        <p:nvSpPr>
-          <p:cNvPr id="682" name="Google Shape;682;p55"/>
-          <p:cNvSpPr/>
-          <p:nvPr/>
-        </p:nvSpPr>
-        <p:spPr>
-          <a:xfrm>
-            <a:off x="6938927" y="1362233"/>
-            <a:ext cx="76199" cy="76190"/>
-          </a:xfrm>
-          <a:prstGeom prst="roundRect">
-            <a:avLst>
-              <a:gd fmla="val 31500" name="adj"/>
-            </a:avLst>
-          </a:prstGeom>
-          <a:solidFill>
-            <a:srgbClr val="0077FF"/>
-          </a:solidFill>
-          <a:ln>
-            <a:noFill/>
-          </a:ln>
-        </p:spPr>
-        <p:txBody>
-          <a:bodyPr anchorCtr="0" anchor="ctr" bIns="91425" lIns="91425" spcFirstLastPara="1" rIns="91425" wrap="square" tIns="91425">
-            <a:noAutofit/>
-          </a:bodyPr>
-          <a:lstStyle/>
-          <a:p>
-            <a:pPr indent="0" lvl="0" marL="0" rtl="0" algn="l">
-              <a:spcBef>
-                <a:spcPts val="0"/>
-              </a:spcBef>
-              <a:spcAft>
-                <a:spcPts val="0"/>
-              </a:spcAft>
-              <a:buNone/>
-            </a:pPr>
-            <a:r>
-              <a:t/>
-            </a:r>
-            <a:endParaRPr/>
-          </a:p>
-        </p:txBody>
-      </p:sp>
-      <p:sp>
-        <p:nvSpPr>
-          <p:cNvPr id="683" name="title"/>
-          <p:cNvSpPr txBox="1"/>
-          <p:nvPr/>
-        </p:nvSpPr>
-        <p:spPr>
-          <a:xfrm>
-            <a:off x="274320" y="282943"/>
-            <a:ext cx="6792986" cy="617220"/>
-          </a:xfrm>
-          <a:prstGeom prst="rect">
-            <a:avLst/>
-          </a:prstGeom>
-          <a:noFill/>
-        </p:spPr>
-        <p:txBody>
-          <a:bodyPr wrap="square" lIns="76200" rIns="76200" tIns="50800" bIns="50800">
-            <a:spAutoFit/>
-          </a:bodyPr>
-          <a:lstStyle/>
-          <a:p>
-            <a:pPr algn="l">
-              <a:spcAft>
-                <a:spcPts val="300"/>
-              </a:spcAft>
-              <a:defRPr sz="2705">
-                <a:solidFill>
-                  <a:srgbClr val="000000"/>
-                </a:solidFill>
-                <a:latin typeface="Play"/>
-                <a:ea typeface="Play"/>
-                <a:cs typeface="Play"/>
-              </a:defRPr>
-            </a:pPr>
-            <a:r>
-              <a:rPr sz="2705">
-                <a:solidFill>
-                  <a:srgbClr val="000000"/>
-                </a:solidFill>
-                <a:latin typeface="Play"/>
-                <a:ea typeface="Play"/>
-                <a:cs typeface="Play"/>
-              </a:rPr>
-              <a:t>План пилота</a:t>
-            </a:r>
-          </a:p>
-        </p:txBody>
-      </p:sp>
-      <p:sp>
-        <p:nvSpPr>
-          <p:cNvPr id="684" name="lead"/>
-          <p:cNvSpPr txBox="1"/>
-          <p:nvPr/>
-        </p:nvSpPr>
-        <p:spPr>
-          <a:xfrm>
-            <a:off x="274320" y="1438431"/>
-            <a:ext cx="6792986" cy="934260"/>
-          </a:xfrm>
-          <a:prstGeom prst="rect">
-            <a:avLst/>
-          </a:prstGeom>
-          <a:noFill/>
-        </p:spPr>
-        <p:txBody>
-          <a:bodyPr wrap="square" lIns="76200" rIns="76200" tIns="50800" bIns="50800">
-            <a:spAutoFit/>
-          </a:bodyPr>
-          <a:lstStyle/>
-          <a:p>
-            <a:pPr algn="l">
-              <a:spcAft>
-                <a:spcPts val="300"/>
-              </a:spcAft>
-              <a:defRPr sz="2705">
-                <a:solidFill>
-                  <a:srgbClr val="000000"/>
-                </a:solidFill>
-                <a:latin typeface="Play"/>
-                <a:ea typeface="Play"/>
-                <a:cs typeface="Play"/>
-              </a:defRPr>
-            </a:pPr>
-            <a:r>
-              <a:rPr sz="2705">
-                <a:solidFill>
-                  <a:srgbClr val="000000"/>
-                </a:solidFill>
-                <a:latin typeface="Play"/>
-                <a:ea typeface="Play"/>
-                <a:cs typeface="Play"/>
-              </a:rPr>
-              <a:t>Подключить ещё 4 команды в Q3 2026</a:t>
-            </a:r>
-          </a:p>
-        </p:txBody>
-      </p:sp>
-      <p:sp>
-        <p:nvSpPr>
-          <p:cNvPr id="685" name="body"/>
-          <p:cNvSpPr txBox="1"/>
-          <p:nvPr/>
-        </p:nvSpPr>
-        <p:spPr>
-          <a:xfrm>
-            <a:off x="274320" y="2532974"/>
-            <a:ext cx="6792986" cy="1576835"/>
-          </a:xfrm>
-          <a:prstGeom prst="rect">
-            <a:avLst/>
-          </a:prstGeom>
-          <a:noFill/>
-        </p:spPr>
-        <p:txBody>
-          <a:bodyPr wrap="square" lIns="76200" rIns="76200" tIns="50800" bIns="50800">
-            <a:spAutoFit/>
-          </a:bodyPr>
-          <a:lstStyle/>
-          <a:p>
-            <a:pPr algn="l">
-              <a:spcAft>
-                <a:spcPts val="300"/>
-              </a:spcAft>
               <a:defRPr sz="1800">
                 <a:solidFill>
                   <a:srgbClr val="000000"/>
@@ -8942,7 +8358,7 @@
                 <a:ea typeface="Play"/>
                 <a:cs typeface="Play"/>
               </a:rPr>
-              <a:t>• Настроить домен и HTTPS</a:t>
+              <a:t>• Стоимость инференса за 6 недель – 1 400 руб</a:t>
             </a:r>
           </a:p>
           <a:p>
@@ -8968,7 +8384,7 @@
                 <a:ea typeface="Play"/>
                 <a:cs typeface="Play"/>
               </a:rPr>
-              <a:t>• Интегрировать с корпоративным хранилищем документов</a:t>
+              <a:t>• Подключение 4 команд в Q3 2026</a:t>
             </a:r>
           </a:p>
           <a:p>
@@ -8994,673 +8410,7 @@
                 <a:ea typeface="Play"/>
                 <a:cs typeface="Play"/>
               </a:rPr>
-              <a:t>• В Q1 2027 добавить генерацию иллюстраций</a:t>
-            </a:r>
-          </a:p>
-        </p:txBody>
-      </p:sp>
-    </p:spTree>
-  </p:cSld>
-  <p:clrMapOvr>
-    <a:masterClrMapping/>
-  </p:clrMapOvr>
-</p:sld>
-</file>
-
-<file path=ppt/slides/slide63.xml><?xml version="1.0" encoding="utf-8"?>
-<p:sld xmlns:a="http://schemas.openxmlformats.org/drawingml/2006/main" xmlns:p="http://schemas.openxmlformats.org/presentationml/2006/main" xmlns:r="http://schemas.openxmlformats.org/officeDocument/2006/relationships">
-  <p:cSld>
-    <p:spTree>
-      <p:nvGrpSpPr>
-        <p:cNvPr id="1" name=""/>
-        <p:cNvGrpSpPr/>
-        <p:nvPr/>
-      </p:nvGrpSpPr>
-      <p:grpSpPr/>
-      <p:sp>
-        <p:nvSpPr>
-          <p:cNvPr id="1027" name="Google Shape;1027;p65"/>
-          <p:cNvSpPr/>
-          <p:nvPr/>
-        </p:nvSpPr>
-        <p:spPr>
-          <a:xfrm>
-            <a:off x="6064222" y="1209852"/>
-            <a:ext cx="2793985" cy="3014270"/>
-          </a:xfrm>
-          <a:prstGeom prst="roundRect">
-            <a:avLst>
-              <a:gd fmla="val 3436" name="adj"/>
-            </a:avLst>
-          </a:prstGeom>
-          <a:solidFill>
-            <a:schemeClr val="lt2"/>
-          </a:solidFill>
-          <a:ln>
-            <a:noFill/>
-          </a:ln>
-        </p:spPr>
-        <p:txBody>
-          <a:bodyPr anchorCtr="0" anchor="ctr" bIns="91425" lIns="91425" spcFirstLastPara="1" rIns="91425" wrap="square" tIns="91425">
-            <a:noAutofit/>
-          </a:bodyPr>
-          <a:lstStyle/>
-          <a:p>
-            <a:pPr indent="0" lvl="0" marL="0" rtl="0" algn="l">
-              <a:spcBef>
-                <a:spcPts val="0"/>
-              </a:spcBef>
-              <a:spcAft>
-                <a:spcPts val="0"/>
-              </a:spcAft>
-              <a:buNone/>
-            </a:pPr>
-            <a:r>
-              <a:t/>
-            </a:r>
-            <a:endParaRPr/>
-          </a:p>
-        </p:txBody>
-      </p:sp>
-      <p:sp>
-        <p:nvSpPr>
-          <p:cNvPr id="1029" name="Google Shape;1029;p65"/>
-          <p:cNvSpPr/>
-          <p:nvPr/>
-        </p:nvSpPr>
-        <p:spPr>
-          <a:xfrm>
-            <a:off x="3174981" y="1209852"/>
-            <a:ext cx="2793985" cy="3014270"/>
-          </a:xfrm>
-          <a:prstGeom prst="roundRect">
-            <a:avLst>
-              <a:gd fmla="val 3436" name="adj"/>
-            </a:avLst>
-          </a:prstGeom>
-          <a:solidFill>
-            <a:schemeClr val="lt2"/>
-          </a:solidFill>
-          <a:ln>
-            <a:noFill/>
-          </a:ln>
-        </p:spPr>
-        <p:txBody>
-          <a:bodyPr anchorCtr="0" anchor="ctr" bIns="91425" lIns="91425" spcFirstLastPara="1" rIns="91425" wrap="square" tIns="91425">
-            <a:noAutofit/>
-          </a:bodyPr>
-          <a:lstStyle/>
-          <a:p>
-            <a:pPr indent="0" lvl="0" marL="0" rtl="0" algn="l">
-              <a:spcBef>
-                <a:spcPts val="0"/>
-              </a:spcBef>
-              <a:spcAft>
-                <a:spcPts val="0"/>
-              </a:spcAft>
-              <a:buNone/>
-            </a:pPr>
-            <a:r>
-              <a:t/>
-            </a:r>
-            <a:endParaRPr/>
-          </a:p>
-        </p:txBody>
-      </p:sp>
-      <p:sp>
-        <p:nvSpPr>
-          <p:cNvPr id="1031" name="Google Shape;1031;p65"/>
-          <p:cNvSpPr/>
-          <p:nvPr/>
-        </p:nvSpPr>
-        <p:spPr>
-          <a:xfrm>
-            <a:off x="285749" y="1209852"/>
-            <a:ext cx="2793985" cy="3014270"/>
-          </a:xfrm>
-          <a:prstGeom prst="roundRect">
-            <a:avLst>
-              <a:gd fmla="val 3436" name="adj"/>
-            </a:avLst>
-          </a:prstGeom>
-          <a:solidFill>
-            <a:schemeClr val="lt2"/>
-          </a:solidFill>
-          <a:ln>
-            <a:noFill/>
-          </a:ln>
-        </p:spPr>
-        <p:txBody>
-          <a:bodyPr anchorCtr="0" anchor="ctr" bIns="91425" lIns="91425" spcFirstLastPara="1" rIns="91425" wrap="square" tIns="91425">
-            <a:noAutofit/>
-          </a:bodyPr>
-          <a:lstStyle/>
-          <a:p>
-            <a:pPr indent="0" lvl="0" marL="0" rtl="0" algn="l">
-              <a:spcBef>
-                <a:spcPts val="0"/>
-              </a:spcBef>
-              <a:spcAft>
-                <a:spcPts val="0"/>
-              </a:spcAft>
-              <a:buNone/>
-            </a:pPr>
-            <a:r>
-              <a:t/>
-            </a:r>
-            <a:endParaRPr/>
-          </a:p>
-        </p:txBody>
-      </p:sp>
-      <p:sp>
-        <p:nvSpPr>
-          <p:cNvPr id="1032" name="Google Shape;1032;p65"/>
-          <p:cNvSpPr/>
-          <p:nvPr/>
-        </p:nvSpPr>
-        <p:spPr>
-          <a:xfrm>
-            <a:off x="285748" y="286047"/>
-            <a:ext cx="8572456" cy="3938075"/>
-          </a:xfrm>
-          <a:prstGeom prst="rect">
-            <a:avLst/>
-          </a:prstGeom>
-          <a:noFill/>
-          <a:ln>
-            <a:noFill/>
-          </a:ln>
-        </p:spPr>
-        <p:txBody>
-          <a:bodyPr anchorCtr="0" anchor="ctr" bIns="91425" lIns="91425" spcFirstLastPara="1" rIns="91425" wrap="square" tIns="91425">
-            <a:noAutofit/>
-          </a:bodyPr>
-          <a:lstStyle/>
-          <a:p>
-            <a:pPr indent="0" lvl="0" marL="0" rtl="0" algn="l">
-              <a:spcBef>
-                <a:spcPts val="0"/>
-              </a:spcBef>
-              <a:spcAft>
-                <a:spcPts val="0"/>
-              </a:spcAft>
-              <a:buNone/>
-            </a:pPr>
-            <a:r>
-              <a:t/>
-            </a:r>
-            <a:endParaRPr/>
-          </a:p>
-        </p:txBody>
-      </p:sp>
-      <p:sp>
-        <p:nvSpPr>
-          <p:cNvPr id="1033" name="Google Shape;1033;p65"/>
-          <p:cNvSpPr/>
-          <p:nvPr/>
-        </p:nvSpPr>
-        <p:spPr>
-          <a:xfrm>
-            <a:off x="285748" y="1209852"/>
-            <a:ext cx="8572456" cy="3014270"/>
-          </a:xfrm>
-          <a:prstGeom prst="rect">
-            <a:avLst/>
-          </a:prstGeom>
-          <a:noFill/>
-          <a:ln>
-            <a:noFill/>
-          </a:ln>
-        </p:spPr>
-        <p:txBody>
-          <a:bodyPr anchorCtr="0" anchor="ctr" bIns="91425" lIns="91425" spcFirstLastPara="1" rIns="91425" wrap="square" tIns="91425">
-            <a:noAutofit/>
-          </a:bodyPr>
-          <a:lstStyle/>
-          <a:p>
-            <a:pPr indent="0" lvl="0" marL="0" rtl="0" algn="l">
-              <a:spcBef>
-                <a:spcPts val="0"/>
-              </a:spcBef>
-              <a:spcAft>
-                <a:spcPts val="0"/>
-              </a:spcAft>
-              <a:buNone/>
-            </a:pPr>
-            <a:r>
-              <a:t/>
-            </a:r>
-            <a:endParaRPr/>
-          </a:p>
-        </p:txBody>
-      </p:sp>
-      <p:sp>
-        <p:nvSpPr>
-          <p:cNvPr id="1034" name="Google Shape;1034;p65"/>
-          <p:cNvSpPr/>
-          <p:nvPr/>
-        </p:nvSpPr>
-        <p:spPr>
-          <a:xfrm>
-            <a:off x="476248" y="1400327"/>
-            <a:ext cx="2412987" cy="1009519"/>
-          </a:xfrm>
-          <a:prstGeom prst="rect">
-            <a:avLst/>
-          </a:prstGeom>
-          <a:noFill/>
-          <a:ln>
-            <a:noFill/>
-          </a:ln>
-        </p:spPr>
-        <p:txBody>
-          <a:bodyPr anchorCtr="0" anchor="ctr" bIns="91425" lIns="91425" spcFirstLastPara="1" rIns="91425" wrap="square" tIns="91425">
-            <a:noAutofit/>
-          </a:bodyPr>
-          <a:lstStyle/>
-          <a:p>
-            <a:pPr indent="0" lvl="0" marL="0" rtl="0" algn="l">
-              <a:spcBef>
-                <a:spcPts val="0"/>
-              </a:spcBef>
-              <a:spcAft>
-                <a:spcPts val="0"/>
-              </a:spcAft>
-              <a:buNone/>
-            </a:pPr>
-            <a:r>
-              <a:t/>
-            </a:r>
-            <a:endParaRPr/>
-          </a:p>
-        </p:txBody>
-      </p:sp>
-      <p:sp>
-        <p:nvSpPr>
-          <p:cNvPr id="1035" name="Google Shape;1035;p65"/>
-          <p:cNvSpPr/>
-          <p:nvPr/>
-        </p:nvSpPr>
-        <p:spPr>
-          <a:xfrm>
-            <a:off x="476248" y="1400328"/>
-            <a:ext cx="76199" cy="76190"/>
-          </a:xfrm>
-          <a:prstGeom prst="roundRect">
-            <a:avLst>
-              <a:gd fmla="val 31500" name="adj"/>
-            </a:avLst>
-          </a:prstGeom>
-          <a:solidFill>
-            <a:srgbClr val="0077FF"/>
-          </a:solidFill>
-          <a:ln>
-            <a:noFill/>
-          </a:ln>
-        </p:spPr>
-        <p:txBody>
-          <a:bodyPr anchorCtr="0" anchor="ctr" bIns="91425" lIns="91425" spcFirstLastPara="1" rIns="91425" wrap="square" tIns="91425">
-            <a:noAutofit/>
-          </a:bodyPr>
-          <a:lstStyle/>
-          <a:p>
-            <a:pPr indent="0" lvl="0" marL="0" rtl="0" algn="l">
-              <a:spcBef>
-                <a:spcPts val="0"/>
-              </a:spcBef>
-              <a:spcAft>
-                <a:spcPts val="0"/>
-              </a:spcAft>
-              <a:buNone/>
-            </a:pPr>
-            <a:r>
-              <a:t/>
-            </a:r>
-            <a:endParaRPr/>
-          </a:p>
-        </p:txBody>
-      </p:sp>
-      <p:sp>
-        <p:nvSpPr>
-          <p:cNvPr id="1040" name="Google Shape;1040;p65"/>
-          <p:cNvSpPr/>
-          <p:nvPr/>
-        </p:nvSpPr>
-        <p:spPr>
-          <a:xfrm>
-            <a:off x="3365480" y="1400327"/>
-            <a:ext cx="2412987" cy="1009519"/>
-          </a:xfrm>
-          <a:prstGeom prst="rect">
-            <a:avLst/>
-          </a:prstGeom>
-          <a:noFill/>
-          <a:ln>
-            <a:noFill/>
-          </a:ln>
-        </p:spPr>
-        <p:txBody>
-          <a:bodyPr anchorCtr="0" anchor="ctr" bIns="91425" lIns="91425" spcFirstLastPara="1" rIns="91425" wrap="square" tIns="91425">
-            <a:noAutofit/>
-          </a:bodyPr>
-          <a:lstStyle/>
-          <a:p>
-            <a:pPr indent="0" lvl="0" marL="0" rtl="0" algn="l">
-              <a:spcBef>
-                <a:spcPts val="0"/>
-              </a:spcBef>
-              <a:spcAft>
-                <a:spcPts val="0"/>
-              </a:spcAft>
-              <a:buNone/>
-            </a:pPr>
-            <a:r>
-              <a:t/>
-            </a:r>
-            <a:endParaRPr/>
-          </a:p>
-        </p:txBody>
-      </p:sp>
-      <p:sp>
-        <p:nvSpPr>
-          <p:cNvPr id="1041" name="Google Shape;1041;p65"/>
-          <p:cNvSpPr/>
-          <p:nvPr/>
-        </p:nvSpPr>
-        <p:spPr>
-          <a:xfrm>
-            <a:off x="3365480" y="1400328"/>
-            <a:ext cx="76199" cy="76190"/>
-          </a:xfrm>
-          <a:prstGeom prst="roundRect">
-            <a:avLst>
-              <a:gd fmla="val 31500" name="adj"/>
-            </a:avLst>
-          </a:prstGeom>
-          <a:solidFill>
-            <a:srgbClr val="0077FF"/>
-          </a:solidFill>
-          <a:ln>
-            <a:noFill/>
-          </a:ln>
-        </p:spPr>
-        <p:txBody>
-          <a:bodyPr anchorCtr="0" anchor="ctr" bIns="91425" lIns="91425" spcFirstLastPara="1" rIns="91425" wrap="square" tIns="91425">
-            <a:noAutofit/>
-          </a:bodyPr>
-          <a:lstStyle/>
-          <a:p>
-            <a:pPr indent="0" lvl="0" marL="0" rtl="0" algn="l">
-              <a:spcBef>
-                <a:spcPts val="0"/>
-              </a:spcBef>
-              <a:spcAft>
-                <a:spcPts val="0"/>
-              </a:spcAft>
-              <a:buNone/>
-            </a:pPr>
-            <a:r>
-              <a:t/>
-            </a:r>
-            <a:endParaRPr/>
-          </a:p>
-        </p:txBody>
-      </p:sp>
-      <p:sp>
-        <p:nvSpPr>
-          <p:cNvPr id="1045" name="Google Shape;1045;p65"/>
-          <p:cNvSpPr/>
-          <p:nvPr/>
-        </p:nvSpPr>
-        <p:spPr>
-          <a:xfrm>
-            <a:off x="6254721" y="1400327"/>
-            <a:ext cx="2412987" cy="1009519"/>
-          </a:xfrm>
-          <a:prstGeom prst="rect">
-            <a:avLst/>
-          </a:prstGeom>
-          <a:noFill/>
-          <a:ln>
-            <a:noFill/>
-          </a:ln>
-        </p:spPr>
-        <p:txBody>
-          <a:bodyPr anchorCtr="0" anchor="ctr" bIns="91425" lIns="91425" spcFirstLastPara="1" rIns="91425" wrap="square" tIns="91425">
-            <a:noAutofit/>
-          </a:bodyPr>
-          <a:lstStyle/>
-          <a:p>
-            <a:pPr indent="0" lvl="0" marL="0" rtl="0" algn="l">
-              <a:spcBef>
-                <a:spcPts val="0"/>
-              </a:spcBef>
-              <a:spcAft>
-                <a:spcPts val="0"/>
-              </a:spcAft>
-              <a:buNone/>
-            </a:pPr>
-            <a:r>
-              <a:t/>
-            </a:r>
-            <a:endParaRPr/>
-          </a:p>
-        </p:txBody>
-      </p:sp>
-      <p:sp>
-        <p:nvSpPr>
-          <p:cNvPr id="1046" name="Google Shape;1046;p65"/>
-          <p:cNvSpPr/>
-          <p:nvPr/>
-        </p:nvSpPr>
-        <p:spPr>
-          <a:xfrm>
-            <a:off x="6254721" y="1400328"/>
-            <a:ext cx="76199" cy="76190"/>
-          </a:xfrm>
-          <a:prstGeom prst="roundRect">
-            <a:avLst>
-              <a:gd fmla="val 31500" name="adj"/>
-            </a:avLst>
-          </a:prstGeom>
-          <a:solidFill>
-            <a:srgbClr val="0077FF"/>
-          </a:solidFill>
-          <a:ln>
-            <a:noFill/>
-          </a:ln>
-        </p:spPr>
-        <p:txBody>
-          <a:bodyPr anchorCtr="0" anchor="ctr" bIns="91425" lIns="91425" spcFirstLastPara="1" rIns="91425" wrap="square" tIns="91425">
-            <a:noAutofit/>
-          </a:bodyPr>
-          <a:lstStyle/>
-          <a:p>
-            <a:pPr indent="0" lvl="0" marL="0" rtl="0" algn="l">
-              <a:spcBef>
-                <a:spcPts val="0"/>
-              </a:spcBef>
-              <a:spcAft>
-                <a:spcPts val="0"/>
-              </a:spcAft>
-              <a:buNone/>
-            </a:pPr>
-            <a:r>
-              <a:t/>
-            </a:r>
-            <a:endParaRPr/>
-          </a:p>
-        </p:txBody>
-      </p:sp>
-      <p:sp>
-        <p:nvSpPr>
-          <p:cNvPr id="1047" name="title"/>
-          <p:cNvSpPr txBox="1"/>
-          <p:nvPr/>
-        </p:nvSpPr>
-        <p:spPr>
-          <a:xfrm>
-            <a:off x="274320" y="282943"/>
-            <a:ext cx="6792986" cy="617220"/>
-          </a:xfrm>
-          <a:prstGeom prst="rect">
-            <a:avLst/>
-          </a:prstGeom>
-          <a:noFill/>
-        </p:spPr>
-        <p:txBody>
-          <a:bodyPr wrap="square" lIns="76200" rIns="76200" tIns="50800" bIns="50800">
-            <a:spAutoFit/>
-          </a:bodyPr>
-          <a:lstStyle/>
-          <a:p>
-            <a:pPr algn="l">
-              <a:spcAft>
-                <a:spcPts val="300"/>
-              </a:spcAft>
-              <a:defRPr sz="2705">
-                <a:solidFill>
-                  <a:srgbClr val="000000"/>
-                </a:solidFill>
-                <a:latin typeface="Play"/>
-                <a:ea typeface="Play"/>
-                <a:cs typeface="Play"/>
-              </a:defRPr>
-            </a:pPr>
-            <a:r>
-              <a:rPr sz="2705">
-                <a:solidFill>
-                  <a:srgbClr val="000000"/>
-                </a:solidFill>
-                <a:latin typeface="Play"/>
-                <a:ea typeface="Play"/>
-                <a:cs typeface="Play"/>
-              </a:rPr>
-              <a:t>Что мы просим решить</a:t>
-            </a:r>
-          </a:p>
-        </p:txBody>
-      </p:sp>
-      <p:sp>
-        <p:nvSpPr>
-          <p:cNvPr id="1048" name="lead"/>
-          <p:cNvSpPr txBox="1"/>
-          <p:nvPr/>
-        </p:nvSpPr>
-        <p:spPr>
-          <a:xfrm>
-            <a:off x="274320" y="1476493"/>
-            <a:ext cx="6792986" cy="380990"/>
-          </a:xfrm>
-          <a:prstGeom prst="rect">
-            <a:avLst/>
-          </a:prstGeom>
-          <a:noFill/>
-        </p:spPr>
-        <p:txBody>
-          <a:bodyPr wrap="square" lIns="76200" rIns="76200" tIns="50800" bIns="50800">
-            <a:spAutoFit/>
-          </a:bodyPr>
-          <a:lstStyle/>
-          <a:p>
-            <a:pPr algn="l">
-              <a:spcAft>
-                <a:spcPts val="300"/>
-              </a:spcAft>
-              <a:defRPr sz="1600">
-                <a:solidFill>
-                  <a:srgbClr val="000000"/>
-                </a:solidFill>
-                <a:latin typeface="Play"/>
-                <a:ea typeface="Play"/>
-                <a:cs typeface="Play"/>
-              </a:defRPr>
-            </a:pPr>
-            <a:r>
-              <a:rPr sz="1600">
-                <a:solidFill>
-                  <a:srgbClr val="000000"/>
-                </a:solidFill>
-                <a:latin typeface="Play"/>
-                <a:ea typeface="Play"/>
-                <a:cs typeface="Play"/>
-              </a:rPr>
-              <a:t>Одобрить запуск сервиса на всю компанию</a:t>
-            </a:r>
-          </a:p>
-        </p:txBody>
-      </p:sp>
-      <p:sp>
-        <p:nvSpPr>
-          <p:cNvPr id="1049" name="body"/>
-          <p:cNvSpPr txBox="1"/>
-          <p:nvPr/>
-        </p:nvSpPr>
-        <p:spPr>
-          <a:xfrm>
-            <a:off x="274320" y="1916532"/>
-            <a:ext cx="6792986" cy="544117"/>
-          </a:xfrm>
-          <a:prstGeom prst="rect">
-            <a:avLst/>
-          </a:prstGeom>
-          <a:noFill/>
-        </p:spPr>
-        <p:txBody>
-          <a:bodyPr wrap="square" lIns="76200" rIns="76200" tIns="50800" bIns="50800">
-            <a:spAutoFit/>
-          </a:bodyPr>
-          <a:lstStyle/>
-          <a:p>
-            <a:pPr algn="l">
-              <a:spcAft>
-                <a:spcPts val="300"/>
-              </a:spcAft>
-              <a:defRPr sz="1200">
-                <a:solidFill>
-                  <a:srgbClr val="000000"/>
-                </a:solidFill>
-                <a:latin typeface="Play"/>
-                <a:ea typeface="Play"/>
-                <a:cs typeface="Play"/>
-              </a:defRPr>
-            </a:pPr>
-            <a:r>
-              <a:rPr sz="1200">
-                <a:solidFill>
-                  <a:srgbClr val="000000"/>
-                </a:solidFill>
-                <a:latin typeface="Play"/>
-                <a:ea typeface="Play"/>
-                <a:cs typeface="Play"/>
-              </a:rPr>
-              <a:t>• Предоставить ресурсы для масштабирования (серверы, лицензии)</a:t>
-            </a:r>
-          </a:p>
-          <a:p>
-            <a:pPr algn="l">
-              <a:spcAft>
-                <a:spcPts val="300"/>
-              </a:spcAft>
-              <a:defRPr sz="1200">
-                <a:solidFill>
-                  <a:srgbClr val="000000"/>
-                </a:solidFill>
-                <a:latin typeface="Play"/>
-                <a:ea typeface="Play"/>
-                <a:cs typeface="Play"/>
-              </a:defRPr>
-            </a:pPr>
-            <a:r>
-              <a:rPr sz="1200">
-                <a:solidFill>
-                  <a:srgbClr val="000000"/>
-                </a:solidFill>
-                <a:latin typeface="Play"/>
-                <a:ea typeface="Play"/>
-                <a:cs typeface="Play"/>
-              </a:rPr>
-              <a:t>• Согласовать сроки и ответственных за интеграцию</a:t>
+              <a:t>• Запуск для всей компании в Q4 2026</a:t>
             </a:r>
           </a:p>
         </p:txBody>
@@ -9685,6 +8435,992 @@
       <p:grpSpPr/>
       <p:sp>
         <p:nvSpPr>
+          <p:cNvPr id="2" name="title"/>
+          <p:cNvSpPr txBox="1"/>
+          <p:nvPr/>
+        </p:nvSpPr>
+        <p:spPr>
+          <a:xfrm>
+            <a:off x="274320" y="282943"/>
+            <a:ext cx="6792986" cy="617220"/>
+          </a:xfrm>
+          <a:prstGeom prst="rect">
+            <a:avLst/>
+          </a:prstGeom>
+          <a:noFill/>
+        </p:spPr>
+        <p:txBody>
+          <a:bodyPr wrap="square" lIns="76200" rIns="76200" tIns="50800" bIns="50800">
+            <a:spAutoFit/>
+          </a:bodyPr>
+          <a:lstStyle/>
+          <a:p>
+            <a:pPr algn="l">
+              <a:spcAft>
+                <a:spcPts val="300"/>
+              </a:spcAft>
+              <a:defRPr sz="2438">
+                <a:solidFill>
+                  <a:srgbClr val="000000"/>
+                </a:solidFill>
+                <a:latin typeface="Play"/>
+                <a:ea typeface="Play"/>
+                <a:cs typeface="Play"/>
+              </a:defRPr>
+            </a:pPr>
+            <a:r>
+              <a:rPr sz="2438">
+                <a:solidFill>
+                  <a:srgbClr val="000000"/>
+                </a:solidFill>
+                <a:latin typeface="Play"/>
+                <a:ea typeface="Play"/>
+                <a:cs typeface="Play"/>
+              </a:rPr>
+              <a:t>План пилота: 6 недель, 2 команды</a:t>
+            </a:r>
+          </a:p>
+        </p:txBody>
+      </p:sp>
+      <p:sp>
+        <p:nvSpPr>
+          <p:cNvPr id="3" name="Pentagon 2"/>
+          <p:cNvSpPr/>
+          <p:nvPr/>
+        </p:nvSpPr>
+        <p:spPr>
+          <a:xfrm>
+            <a:off x="274320" y="1373314"/>
+            <a:ext cx="8344814" cy="442341"/>
+          </a:xfrm>
+          <a:prstGeom prst="homePlate">
+            <a:avLst/>
+          </a:prstGeom>
+          <a:solidFill>
+            <a:srgbClr val="0077FF"/>
+          </a:solidFill>
+          <a:ln>
+            <a:noFill/>
+          </a:ln>
+        </p:spPr>
+        <p:style>
+          <a:lnRef idx="1">
+            <a:schemeClr val="accent1"/>
+          </a:lnRef>
+          <a:fillRef idx="3">
+            <a:schemeClr val="accent1"/>
+          </a:fillRef>
+          <a:effectRef idx="2">
+            <a:schemeClr val="accent1"/>
+          </a:effectRef>
+          <a:fontRef idx="minor">
+            <a:schemeClr val="lt1"/>
+          </a:fontRef>
+        </p:style>
+        <p:txBody>
+          <a:bodyPr rtlCol="0" anchor="ctr" wrap="square" lIns="12700" rIns="12700" tIns="12700" bIns="12700"/>
+          <a:lstStyle/>
+          <a:p>
+            <a:pPr algn="ctr">
+              <a:defRPr sz="1400" b="0">
+                <a:solidFill>
+                  <a:srgbClr val="FFFFFF"/>
+                </a:solidFill>
+                <a:latin typeface="Play"/>
+                <a:ea typeface="Play"/>
+                <a:cs typeface="Play"/>
+              </a:defRPr>
+            </a:pPr>
+            <a:r>
+              <a:rPr sz="1400" b="0">
+                <a:solidFill>
+                  <a:srgbClr val="FFFFFF"/>
+                </a:solidFill>
+                <a:latin typeface="Play"/>
+                <a:ea typeface="Play"/>
+                <a:cs typeface="Play"/>
+              </a:rPr>
+              <a:t>Неделя 1</a:t>
+            </a:r>
+          </a:p>
+        </p:txBody>
+      </p:sp>
+      <p:sp>
+        <p:nvSpPr>
+          <p:cNvPr id="4" name="Chevron 3"/>
+          <p:cNvSpPr/>
+          <p:nvPr/>
+        </p:nvSpPr>
+        <p:spPr>
+          <a:xfrm>
+            <a:off x="274320" y="1887664"/>
+            <a:ext cx="8344814" cy="442341"/>
+          </a:xfrm>
+          <a:prstGeom prst="chevron">
+            <a:avLst/>
+          </a:prstGeom>
+          <a:solidFill>
+            <a:srgbClr val="0077FF"/>
+          </a:solidFill>
+          <a:ln>
+            <a:noFill/>
+          </a:ln>
+        </p:spPr>
+        <p:style>
+          <a:lnRef idx="1">
+            <a:schemeClr val="accent1"/>
+          </a:lnRef>
+          <a:fillRef idx="3">
+            <a:schemeClr val="accent1"/>
+          </a:fillRef>
+          <a:effectRef idx="2">
+            <a:schemeClr val="accent1"/>
+          </a:effectRef>
+          <a:fontRef idx="minor">
+            <a:schemeClr val="lt1"/>
+          </a:fontRef>
+        </p:style>
+        <p:txBody>
+          <a:bodyPr rtlCol="0" anchor="ctr" wrap="square" lIns="12700" rIns="12700" tIns="12700" bIns="12700"/>
+          <a:lstStyle/>
+          <a:p>
+            <a:pPr algn="ctr">
+              <a:defRPr sz="1400" b="0">
+                <a:solidFill>
+                  <a:srgbClr val="FFFFFF"/>
+                </a:solidFill>
+                <a:latin typeface="Play"/>
+                <a:ea typeface="Play"/>
+                <a:cs typeface="Play"/>
+              </a:defRPr>
+            </a:pPr>
+            <a:r>
+              <a:rPr sz="1400" b="0">
+                <a:solidFill>
+                  <a:srgbClr val="FFFFFF"/>
+                </a:solidFill>
+                <a:latin typeface="Play"/>
+                <a:ea typeface="Play"/>
+                <a:cs typeface="Play"/>
+              </a:rPr>
+              <a:t>Неделя 2</a:t>
+            </a:r>
+          </a:p>
+        </p:txBody>
+      </p:sp>
+      <p:sp>
+        <p:nvSpPr>
+          <p:cNvPr id="5" name="Chevron 4"/>
+          <p:cNvSpPr/>
+          <p:nvPr/>
+        </p:nvSpPr>
+        <p:spPr>
+          <a:xfrm>
+            <a:off x="274320" y="2402014"/>
+            <a:ext cx="8344814" cy="442341"/>
+          </a:xfrm>
+          <a:prstGeom prst="chevron">
+            <a:avLst/>
+          </a:prstGeom>
+          <a:solidFill>
+            <a:srgbClr val="0077FF"/>
+          </a:solidFill>
+          <a:ln>
+            <a:noFill/>
+          </a:ln>
+        </p:spPr>
+        <p:style>
+          <a:lnRef idx="1">
+            <a:schemeClr val="accent1"/>
+          </a:lnRef>
+          <a:fillRef idx="3">
+            <a:schemeClr val="accent1"/>
+          </a:fillRef>
+          <a:effectRef idx="2">
+            <a:schemeClr val="accent1"/>
+          </a:effectRef>
+          <a:fontRef idx="minor">
+            <a:schemeClr val="lt1"/>
+          </a:fontRef>
+        </p:style>
+        <p:txBody>
+          <a:bodyPr rtlCol="0" anchor="ctr" wrap="square" lIns="12700" rIns="12700" tIns="12700" bIns="12700"/>
+          <a:lstStyle/>
+          <a:p>
+            <a:pPr algn="ctr">
+              <a:defRPr sz="1400" b="0">
+                <a:solidFill>
+                  <a:srgbClr val="FFFFFF"/>
+                </a:solidFill>
+                <a:latin typeface="Play"/>
+                <a:ea typeface="Play"/>
+                <a:cs typeface="Play"/>
+              </a:defRPr>
+            </a:pPr>
+            <a:r>
+              <a:rPr sz="1400" b="0">
+                <a:solidFill>
+                  <a:srgbClr val="FFFFFF"/>
+                </a:solidFill>
+                <a:latin typeface="Play"/>
+                <a:ea typeface="Play"/>
+                <a:cs typeface="Play"/>
+              </a:rPr>
+              <a:t>Неделя 3</a:t>
+            </a:r>
+          </a:p>
+        </p:txBody>
+      </p:sp>
+      <p:sp>
+        <p:nvSpPr>
+          <p:cNvPr id="6" name="Chevron 5"/>
+          <p:cNvSpPr/>
+          <p:nvPr/>
+        </p:nvSpPr>
+        <p:spPr>
+          <a:xfrm>
+            <a:off x="274320" y="2916364"/>
+            <a:ext cx="8344814" cy="442341"/>
+          </a:xfrm>
+          <a:prstGeom prst="chevron">
+            <a:avLst/>
+          </a:prstGeom>
+          <a:solidFill>
+            <a:srgbClr val="0077FF"/>
+          </a:solidFill>
+          <a:ln>
+            <a:noFill/>
+          </a:ln>
+        </p:spPr>
+        <p:style>
+          <a:lnRef idx="1">
+            <a:schemeClr val="accent1"/>
+          </a:lnRef>
+          <a:fillRef idx="3">
+            <a:schemeClr val="accent1"/>
+          </a:fillRef>
+          <a:effectRef idx="2">
+            <a:schemeClr val="accent1"/>
+          </a:effectRef>
+          <a:fontRef idx="minor">
+            <a:schemeClr val="lt1"/>
+          </a:fontRef>
+        </p:style>
+        <p:txBody>
+          <a:bodyPr rtlCol="0" anchor="ctr" wrap="square" lIns="12700" rIns="12700" tIns="12700" bIns="12700"/>
+          <a:lstStyle/>
+          <a:p>
+            <a:pPr algn="ctr">
+              <a:defRPr sz="1400" b="0">
+                <a:solidFill>
+                  <a:srgbClr val="FFFFFF"/>
+                </a:solidFill>
+                <a:latin typeface="Play"/>
+                <a:ea typeface="Play"/>
+                <a:cs typeface="Play"/>
+              </a:defRPr>
+            </a:pPr>
+            <a:r>
+              <a:rPr sz="1400" b="0">
+                <a:solidFill>
+                  <a:srgbClr val="FFFFFF"/>
+                </a:solidFill>
+                <a:latin typeface="Play"/>
+                <a:ea typeface="Play"/>
+                <a:cs typeface="Play"/>
+              </a:rPr>
+              <a:t>Неделя 4</a:t>
+            </a:r>
+          </a:p>
+        </p:txBody>
+      </p:sp>
+      <p:sp>
+        <p:nvSpPr>
+          <p:cNvPr id="7" name="Chevron 6"/>
+          <p:cNvSpPr/>
+          <p:nvPr/>
+        </p:nvSpPr>
+        <p:spPr>
+          <a:xfrm>
+            <a:off x="274320" y="3430714"/>
+            <a:ext cx="8344814" cy="442341"/>
+          </a:xfrm>
+          <a:prstGeom prst="chevron">
+            <a:avLst/>
+          </a:prstGeom>
+          <a:solidFill>
+            <a:srgbClr val="0077FF"/>
+          </a:solidFill>
+          <a:ln>
+            <a:noFill/>
+          </a:ln>
+        </p:spPr>
+        <p:style>
+          <a:lnRef idx="1">
+            <a:schemeClr val="accent1"/>
+          </a:lnRef>
+          <a:fillRef idx="3">
+            <a:schemeClr val="accent1"/>
+          </a:fillRef>
+          <a:effectRef idx="2">
+            <a:schemeClr val="accent1"/>
+          </a:effectRef>
+          <a:fontRef idx="minor">
+            <a:schemeClr val="lt1"/>
+          </a:fontRef>
+        </p:style>
+        <p:txBody>
+          <a:bodyPr rtlCol="0" anchor="ctr" wrap="square" lIns="12700" rIns="12700" tIns="12700" bIns="12700"/>
+          <a:lstStyle/>
+          <a:p>
+            <a:pPr algn="ctr">
+              <a:defRPr sz="1400" b="0">
+                <a:solidFill>
+                  <a:srgbClr val="FFFFFF"/>
+                </a:solidFill>
+                <a:latin typeface="Play"/>
+                <a:ea typeface="Play"/>
+                <a:cs typeface="Play"/>
+              </a:defRPr>
+            </a:pPr>
+            <a:r>
+              <a:rPr sz="1400" b="0">
+                <a:solidFill>
+                  <a:srgbClr val="FFFFFF"/>
+                </a:solidFill>
+                <a:latin typeface="Play"/>
+                <a:ea typeface="Play"/>
+                <a:cs typeface="Play"/>
+              </a:rPr>
+              <a:t>Неделя 5</a:t>
+            </a:r>
+          </a:p>
+        </p:txBody>
+      </p:sp>
+      <p:sp>
+        <p:nvSpPr>
+          <p:cNvPr id="8" name="Chevron 7"/>
+          <p:cNvSpPr/>
+          <p:nvPr/>
+        </p:nvSpPr>
+        <p:spPr>
+          <a:xfrm>
+            <a:off x="274320" y="3945064"/>
+            <a:ext cx="8344814" cy="442341"/>
+          </a:xfrm>
+          <a:prstGeom prst="chevron">
+            <a:avLst/>
+          </a:prstGeom>
+          <a:solidFill>
+            <a:srgbClr val="0077FF"/>
+          </a:solidFill>
+          <a:ln>
+            <a:noFill/>
+          </a:ln>
+        </p:spPr>
+        <p:style>
+          <a:lnRef idx="1">
+            <a:schemeClr val="accent1"/>
+          </a:lnRef>
+          <a:fillRef idx="3">
+            <a:schemeClr val="accent1"/>
+          </a:fillRef>
+          <a:effectRef idx="2">
+            <a:schemeClr val="accent1"/>
+          </a:effectRef>
+          <a:fontRef idx="minor">
+            <a:schemeClr val="lt1"/>
+          </a:fontRef>
+        </p:style>
+        <p:txBody>
+          <a:bodyPr rtlCol="0" anchor="ctr" wrap="square" lIns="12700" rIns="12700" tIns="12700" bIns="12700"/>
+          <a:lstStyle/>
+          <a:p>
+            <a:pPr algn="ctr">
+              <a:defRPr sz="1400" b="0">
+                <a:solidFill>
+                  <a:srgbClr val="FFFFFF"/>
+                </a:solidFill>
+                <a:latin typeface="Play"/>
+                <a:ea typeface="Play"/>
+                <a:cs typeface="Play"/>
+              </a:defRPr>
+            </a:pPr>
+            <a:r>
+              <a:rPr sz="1400" b="0">
+                <a:solidFill>
+                  <a:srgbClr val="FFFFFF"/>
+                </a:solidFill>
+                <a:latin typeface="Play"/>
+                <a:ea typeface="Play"/>
+                <a:cs typeface="Play"/>
+              </a:rPr>
+              <a:t>Неделя 6</a:t>
+            </a:r>
+          </a:p>
+        </p:txBody>
+      </p:sp>
+    </p:spTree>
+  </p:cSld>
+  <p:clrMapOvr>
+    <a:masterClrMapping/>
+  </p:clrMapOvr>
+</p:sld>
+</file>
+
+<file path=ppt/slides/slide65.xml><?xml version="1.0" encoding="utf-8"?>
+<p:sld xmlns:a="http://schemas.openxmlformats.org/drawingml/2006/main" xmlns:p="http://schemas.openxmlformats.org/presentationml/2006/main" xmlns:r="http://schemas.openxmlformats.org/officeDocument/2006/relationships">
+  <p:cSld>
+    <p:spTree>
+      <p:nvGrpSpPr>
+        <p:cNvPr id="1" name=""/>
+        <p:cNvGrpSpPr/>
+        <p:nvPr/>
+      </p:nvGrpSpPr>
+      <p:grpSpPr/>
+      <p:sp>
+        <p:nvSpPr>
+          <p:cNvPr id="1056" name="Google Shape;1056;p66"/>
+          <p:cNvSpPr/>
+          <p:nvPr/>
+        </p:nvSpPr>
+        <p:spPr>
+          <a:xfrm>
+            <a:off x="285748" y="276524"/>
+            <a:ext cx="8572456" cy="685711"/>
+          </a:xfrm>
+          <a:prstGeom prst="rect">
+            <a:avLst/>
+          </a:prstGeom>
+          <a:noFill/>
+          <a:ln>
+            <a:noFill/>
+          </a:ln>
+        </p:spPr>
+        <p:txBody>
+          <a:bodyPr anchorCtr="0" anchor="ctr" bIns="91425" lIns="91425" spcFirstLastPara="1" rIns="91425" wrap="square" tIns="91425">
+            <a:noAutofit/>
+          </a:bodyPr>
+          <a:lstStyle/>
+          <a:p>
+            <a:pPr indent="0" lvl="0" marL="0" rtl="0" algn="l">
+              <a:spcBef>
+                <a:spcPts val="0"/>
+              </a:spcBef>
+              <a:spcAft>
+                <a:spcPts val="0"/>
+              </a:spcAft>
+              <a:buNone/>
+            </a:pPr>
+            <a:r>
+              <a:t/>
+            </a:r>
+            <a:endParaRPr/>
+          </a:p>
+        </p:txBody>
+      </p:sp>
+      <p:sp>
+        <p:nvSpPr>
+          <p:cNvPr id="1057" name="Google Shape;1057;p66"/>
+          <p:cNvSpPr/>
+          <p:nvPr/>
+        </p:nvSpPr>
+        <p:spPr>
+          <a:xfrm>
+            <a:off x="3838239" y="276524"/>
+            <a:ext cx="4948861" cy="1025866"/>
+          </a:xfrm>
+          <a:prstGeom prst="roundRect">
+            <a:avLst>
+              <a:gd fmla="val 10361" name="adj"/>
+            </a:avLst>
+          </a:prstGeom>
+          <a:solidFill>
+            <a:schemeClr val="lt2"/>
+          </a:solidFill>
+          <a:ln>
+            <a:noFill/>
+          </a:ln>
+        </p:spPr>
+        <p:txBody>
+          <a:bodyPr anchorCtr="0" anchor="ctr" bIns="91425" lIns="91425" spcFirstLastPara="1" rIns="91425" wrap="square" tIns="91425">
+            <a:noAutofit/>
+          </a:bodyPr>
+          <a:lstStyle/>
+          <a:p>
+            <a:pPr indent="0" lvl="0" marL="0" rtl="0" algn="l">
+              <a:spcBef>
+                <a:spcPts val="0"/>
+              </a:spcBef>
+              <a:spcAft>
+                <a:spcPts val="0"/>
+              </a:spcAft>
+              <a:buNone/>
+            </a:pPr>
+            <a:r>
+              <a:t/>
+            </a:r>
+            <a:endParaRPr/>
+          </a:p>
+        </p:txBody>
+      </p:sp>
+      <p:sp>
+        <p:nvSpPr>
+          <p:cNvPr id="1058" name="Google Shape;1058;p66"/>
+          <p:cNvSpPr/>
+          <p:nvPr/>
+        </p:nvSpPr>
+        <p:spPr>
+          <a:xfrm>
+            <a:off x="4048160" y="486417"/>
+            <a:ext cx="4529021" cy="128571"/>
+          </a:xfrm>
+          <a:prstGeom prst="rect">
+            <a:avLst/>
+          </a:prstGeom>
+          <a:noFill/>
+          <a:ln>
+            <a:noFill/>
+          </a:ln>
+        </p:spPr>
+        <p:txBody>
+          <a:bodyPr anchorCtr="0" anchor="ctr" bIns="91425" lIns="91425" spcFirstLastPara="1" rIns="91425" wrap="square" tIns="91425">
+            <a:noAutofit/>
+          </a:bodyPr>
+          <a:lstStyle/>
+          <a:p>
+            <a:pPr indent="0" lvl="0" marL="0" rtl="0" algn="l">
+              <a:spcBef>
+                <a:spcPts val="0"/>
+              </a:spcBef>
+              <a:spcAft>
+                <a:spcPts val="0"/>
+              </a:spcAft>
+              <a:buNone/>
+            </a:pPr>
+            <a:r>
+              <a:t/>
+            </a:r>
+            <a:endParaRPr/>
+          </a:p>
+        </p:txBody>
+      </p:sp>
+      <p:sp>
+        <p:nvSpPr>
+          <p:cNvPr id="1059" name="title"/>
+          <p:cNvSpPr txBox="1"/>
+          <p:nvPr/>
+        </p:nvSpPr>
+        <p:spPr>
+          <a:xfrm>
+            <a:off x="274320" y="282943"/>
+            <a:ext cx="3412266" cy="932027"/>
+          </a:xfrm>
+          <a:prstGeom prst="rect">
+            <a:avLst/>
+          </a:prstGeom>
+          <a:noFill/>
+        </p:spPr>
+        <p:txBody>
+          <a:bodyPr wrap="square" lIns="76200" rIns="76200" tIns="50800" bIns="50800">
+            <a:spAutoFit/>
+          </a:bodyPr>
+          <a:lstStyle/>
+          <a:p>
+            <a:pPr algn="l">
+              <a:spcAft>
+                <a:spcPts val="300"/>
+              </a:spcAft>
+              <a:defRPr sz="2438">
+                <a:solidFill>
+                  <a:srgbClr val="000000"/>
+                </a:solidFill>
+                <a:latin typeface="Play"/>
+                <a:ea typeface="Play"/>
+                <a:cs typeface="Play"/>
+              </a:defRPr>
+            </a:pPr>
+            <a:r>
+              <a:rPr sz="2438">
+                <a:solidFill>
+                  <a:srgbClr val="000000"/>
+                </a:solidFill>
+                <a:latin typeface="Play"/>
+                <a:ea typeface="Play"/>
+                <a:cs typeface="Play"/>
+              </a:rPr>
+              <a:t>Результаты пилота: эффективность</a:t>
+            </a:r>
+          </a:p>
+        </p:txBody>
+      </p:sp>
+      <p:graphicFrame>
+        <p:nvGraphicFramePr>
+          <p:cNvPr id="1060" name="Table 1059"/>
+          <p:cNvGraphicFramePr>
+            <a:graphicFrameLocks noGrp="1"/>
+          </p:cNvGraphicFramePr>
+          <p:nvPr/>
+        </p:nvGraphicFramePr>
+        <p:xfrm>
+          <a:off x="274320" y="1394994"/>
+          <a:ext cx="8344814" cy="3028415"/>
+        </p:xfrm>
+        <a:graphic>
+          <a:graphicData uri="http://schemas.openxmlformats.org/drawingml/2006/table">
+            <a:tbl>
+              <a:tblPr firstRow="1" bandRow="1">
+                <a:tableStyleId>{5C22544A-7EE6-4342-B048-85BDC9FD1C3A}</a:tableStyleId>
+              </a:tblPr>
+              <a:tblGrid>
+                <a:gridCol w="2781604"/>
+                <a:gridCol w="2781604"/>
+                <a:gridCol w="2781606"/>
+              </a:tblGrid>
+              <a:tr h="757103">
+                <a:tc>
+                  <a:txBody>
+                    <a:bodyPr/>
+                    <a:lstStyle/>
+                    <a:p>
+                      <a:pPr>
+                        <a:defRPr sz="1300" b="1">
+                          <a:solidFill>
+                            <a:srgbClr val="FFFFFF"/>
+                          </a:solidFill>
+                          <a:latin typeface="Play"/>
+                          <a:ea typeface="Play"/>
+                          <a:cs typeface="Play"/>
+                        </a:defRPr>
+                      </a:pPr>
+                      <a:r>
+                        <a:t>Показатель</a:t>
+                      </a:r>
+                    </a:p>
+                  </a:txBody>
+                  <a:tcPr>
+                    <a:solidFill>
+                      <a:srgbClr val="0077FF"/>
+                    </a:solidFill>
+                  </a:tcPr>
+                </a:tc>
+                <a:tc>
+                  <a:txBody>
+                    <a:bodyPr/>
+                    <a:lstStyle/>
+                    <a:p>
+                      <a:pPr>
+                        <a:defRPr sz="1300" b="1">
+                          <a:solidFill>
+                            <a:srgbClr val="FFFFFF"/>
+                          </a:solidFill>
+                          <a:latin typeface="Play"/>
+                          <a:ea typeface="Play"/>
+                          <a:cs typeface="Play"/>
+                        </a:defRPr>
+                      </a:pPr>
+                      <a:r>
+                        <a:t>Сейчас</a:t>
+                      </a:r>
+                    </a:p>
+                  </a:txBody>
+                  <a:tcPr>
+                    <a:solidFill>
+                      <a:srgbClr val="0077FF"/>
+                    </a:solidFill>
+                  </a:tcPr>
+                </a:tc>
+                <a:tc>
+                  <a:txBody>
+                    <a:bodyPr/>
+                    <a:lstStyle/>
+                    <a:p>
+                      <a:pPr>
+                        <a:defRPr sz="1300" b="1">
+                          <a:solidFill>
+                            <a:srgbClr val="FFFFFF"/>
+                          </a:solidFill>
+                          <a:latin typeface="Play"/>
+                          <a:ea typeface="Play"/>
+                          <a:cs typeface="Play"/>
+                        </a:defRPr>
+                      </a:pPr>
+                      <a:r>
+                        <a:t>Сервис</a:t>
+                      </a:r>
+                    </a:p>
+                  </a:txBody>
+                  <a:tcPr>
+                    <a:solidFill>
+                      <a:srgbClr val="0077FF"/>
+                    </a:solidFill>
+                  </a:tcPr>
+                </a:tc>
+              </a:tr>
+              <a:tr h="757103">
+                <a:tc>
+                  <a:txBody>
+                    <a:bodyPr/>
+                    <a:lstStyle/>
+                    <a:p>
+                      <a:pPr>
+                        <a:defRPr sz="1300" b="0">
+                          <a:solidFill>
+                            <a:srgbClr val="000000"/>
+                          </a:solidFill>
+                          <a:latin typeface="Play"/>
+                          <a:ea typeface="Play"/>
+                          <a:cs typeface="Play"/>
+                        </a:defRPr>
+                      </a:pPr>
+                      <a:r>
+                        <a:t>Время, мин</a:t>
+                      </a:r>
+                    </a:p>
+                  </a:txBody>
+                  <a:tcPr>
+                    <a:solidFill>
+                      <a:srgbClr val="FFFFFF"/>
+                    </a:solidFill>
+                  </a:tcPr>
+                </a:tc>
+                <a:tc>
+                  <a:txBody>
+                    <a:bodyPr/>
+                    <a:lstStyle/>
+                    <a:p>
+                      <a:pPr>
+                        <a:defRPr sz="1300" b="0">
+                          <a:solidFill>
+                            <a:srgbClr val="000000"/>
+                          </a:solidFill>
+                          <a:latin typeface="Play"/>
+                          <a:ea typeface="Play"/>
+                          <a:cs typeface="Play"/>
+                        </a:defRPr>
+                      </a:pPr>
+                      <a:r>
+                        <a:t>186</a:t>
+                      </a:r>
+                    </a:p>
+                  </a:txBody>
+                  <a:tcPr>
+                    <a:solidFill>
+                      <a:srgbClr val="FFFFFF"/>
+                    </a:solidFill>
+                  </a:tcPr>
+                </a:tc>
+                <a:tc>
+                  <a:txBody>
+                    <a:bodyPr/>
+                    <a:lstStyle/>
+                    <a:p>
+                      <a:pPr>
+                        <a:defRPr sz="1300" b="0">
+                          <a:solidFill>
+                            <a:srgbClr val="000000"/>
+                          </a:solidFill>
+                          <a:latin typeface="Play"/>
+                          <a:ea typeface="Play"/>
+                          <a:cs typeface="Play"/>
+                        </a:defRPr>
+                      </a:pPr>
+                      <a:r>
+                        <a:t>4</a:t>
+                      </a:r>
+                    </a:p>
+                  </a:txBody>
+                  <a:tcPr>
+                    <a:solidFill>
+                      <a:srgbClr val="FFFFFF"/>
+                    </a:solidFill>
+                  </a:tcPr>
+                </a:tc>
+              </a:tr>
+              <a:tr h="757103">
+                <a:tc>
+                  <a:txBody>
+                    <a:bodyPr/>
+                    <a:lstStyle/>
+                    <a:p>
+                      <a:pPr>
+                        <a:defRPr sz="1300" b="0">
+                          <a:solidFill>
+                            <a:srgbClr val="000000"/>
+                          </a:solidFill>
+                          <a:latin typeface="Play"/>
+                          <a:ea typeface="Play"/>
+                          <a:cs typeface="Play"/>
+                        </a:defRPr>
+                      </a:pPr>
+                      <a:r>
+                        <a:t>Нарушения колод</a:t>
+                      </a:r>
+                    </a:p>
+                  </a:txBody>
+                  <a:tcPr>
+                    <a:solidFill>
+                      <a:srgbClr val="FFFFFF"/>
+                    </a:solidFill>
+                  </a:tcPr>
+                </a:tc>
+                <a:tc>
+                  <a:txBody>
+                    <a:bodyPr/>
+                    <a:lstStyle/>
+                    <a:p>
+                      <a:pPr>
+                        <a:defRPr sz="1300" b="0">
+                          <a:solidFill>
+                            <a:srgbClr val="000000"/>
+                          </a:solidFill>
+                          <a:latin typeface="Play"/>
+                          <a:ea typeface="Play"/>
+                          <a:cs typeface="Play"/>
+                        </a:defRPr>
+                      </a:pPr>
+                      <a:r>
+                        <a:t>19</a:t>
+                      </a:r>
+                    </a:p>
+                  </a:txBody>
+                  <a:tcPr>
+                    <a:solidFill>
+                      <a:srgbClr val="FFFFFF"/>
+                    </a:solidFill>
+                  </a:tcPr>
+                </a:tc>
+                <a:tc>
+                  <a:txBody>
+                    <a:bodyPr/>
+                    <a:lstStyle/>
+                    <a:p>
+                      <a:pPr>
+                        <a:defRPr sz="1300" b="0">
+                          <a:solidFill>
+                            <a:srgbClr val="000000"/>
+                          </a:solidFill>
+                          <a:latin typeface="Play"/>
+                          <a:ea typeface="Play"/>
+                          <a:cs typeface="Play"/>
+                        </a:defRPr>
+                      </a:pPr>
+                      <a:r>
+                        <a:t>2</a:t>
+                      </a:r>
+                    </a:p>
+                  </a:txBody>
+                  <a:tcPr>
+                    <a:solidFill>
+                      <a:srgbClr val="FFFFFF"/>
+                    </a:solidFill>
+                  </a:tcPr>
+                </a:tc>
+              </a:tr>
+              <a:tr h="757106">
+                <a:tc>
+                  <a:txBody>
+                    <a:bodyPr/>
+                    <a:lstStyle/>
+                    <a:p>
+                      <a:pPr>
+                        <a:defRPr sz="1300" b="0">
+                          <a:solidFill>
+                            <a:srgbClr val="000000"/>
+                          </a:solidFill>
+                          <a:latin typeface="Play"/>
+                          <a:ea typeface="Play"/>
+                          <a:cs typeface="Play"/>
+                        </a:defRPr>
+                      </a:pPr>
+                      <a:r>
+                        <a:t>Запросы, кол-во</a:t>
+                      </a:r>
+                    </a:p>
+                  </a:txBody>
+                  <a:tcPr>
+                    <a:solidFill>
+                      <a:srgbClr val="FFFFFF"/>
+                    </a:solidFill>
+                  </a:tcPr>
+                </a:tc>
+                <a:tc>
+                  <a:txBody>
+                    <a:bodyPr/>
+                    <a:lstStyle/>
+                    <a:p>
+                      <a:pPr>
+                        <a:defRPr sz="1300" b="0">
+                          <a:solidFill>
+                            <a:srgbClr val="000000"/>
+                          </a:solidFill>
+                          <a:latin typeface="Play"/>
+                          <a:ea typeface="Play"/>
+                          <a:cs typeface="Play"/>
+                        </a:defRPr>
+                      </a:pPr>
+                      <a:r>
+                        <a:t>11</a:t>
+                      </a:r>
+                    </a:p>
+                  </a:txBody>
+                  <a:tcPr>
+                    <a:solidFill>
+                      <a:srgbClr val="FFFFFF"/>
+                    </a:solidFill>
+                  </a:tcPr>
+                </a:tc>
+                <a:tc>
+                  <a:txBody>
+                    <a:bodyPr/>
+                    <a:lstStyle/>
+                    <a:p>
+                      <a:pPr>
+                        <a:defRPr sz="1300" b="0">
+                          <a:solidFill>
+                            <a:srgbClr val="000000"/>
+                          </a:solidFill>
+                          <a:latin typeface="Play"/>
+                          <a:ea typeface="Play"/>
+                          <a:cs typeface="Play"/>
+                        </a:defRPr>
+                      </a:pPr>
+                      <a:r>
+                        <a:t>38</a:t>
+                      </a:r>
+                    </a:p>
+                  </a:txBody>
+                  <a:tcPr>
+                    <a:solidFill>
+                      <a:srgbClr val="FFFFFF"/>
+                    </a:solidFill>
+                  </a:tcPr>
+                </a:tc>
+              </a:tr>
+            </a:tbl>
+          </a:graphicData>
+        </a:graphic>
+      </p:graphicFrame>
+    </p:spTree>
+  </p:cSld>
+  <p:clrMapOvr>
+    <a:masterClrMapping/>
+  </p:clrMapOvr>
+</p:sld>
+</file>
+
+<file path=ppt/slides/slide66.xml><?xml version="1.0" encoding="utf-8"?>
+<p:sld xmlns:a="http://schemas.openxmlformats.org/drawingml/2006/main" xmlns:p="http://schemas.openxmlformats.org/presentationml/2006/main" xmlns:r="http://schemas.openxmlformats.org/officeDocument/2006/relationships">
+  <p:cSld>
+    <p:spTree>
+      <p:nvGrpSpPr>
+        <p:cNvPr id="1" name=""/>
+        <p:cNvGrpSpPr/>
+        <p:nvPr/>
+      </p:nvGrpSpPr>
+      <p:grpSpPr/>
+      <p:sp>
+        <p:nvSpPr>
           <p:cNvPr id="2" name="Rounded Rectangle 1"/>
           <p:cNvSpPr/>
           <p:nvPr/>
@@ -9692,7 +9428,7 @@
         <p:spPr>
           <a:xfrm>
             <a:off x="1543608" y="159030"/>
-            <a:ext cx="7202525" cy="4013336"/>
+            <a:ext cx="7202525" cy="4133046"/>
           </a:xfrm>
           <a:prstGeom prst="roundRect">
             <a:avLst/>
@@ -9738,7 +9474,7 @@
         <p:spPr>
           <a:xfrm>
             <a:off x="1670608" y="286030"/>
-            <a:ext cx="6948525" cy="655320"/>
+            <a:ext cx="6948525" cy="1183640"/>
           </a:xfrm>
           <a:prstGeom prst="rect">
             <a:avLst/>
@@ -9773,7 +9509,7 @@
                 <a:ea typeface="Play"/>
                 <a:cs typeface="Play"/>
               </a:rPr>
-              <a:t>Вывод</a:t>
+              <a:t>Что мы просим решить: запуск на всю компанию</a:t>
             </a:r>
           </a:p>
         </p:txBody>
@@ -9786,8 +9522,8 @@
         </p:nvSpPr>
         <p:spPr>
           <a:xfrm>
-            <a:off x="1670608" y="1337310"/>
-            <a:ext cx="6948525" cy="1529750"/>
+            <a:off x="1670608" y="1649692"/>
+            <a:ext cx="6948525" cy="1442333"/>
           </a:xfrm>
           <a:prstGeom prst="rect">
             <a:avLst/>
@@ -9804,7 +9540,7 @@
               <a:spcAft>
                 <a:spcPts val="300"/>
               </a:spcAft>
-              <a:defRPr sz="2705">
+              <a:defRPr sz="3200">
                 <a:solidFill>
                   <a:srgbClr val="000000"/>
                 </a:solidFill>
@@ -9814,7 +9550,7 @@
               </a:defRPr>
             </a:pPr>
             <a:r>
-              <a:rPr sz="2705">
+              <a:rPr sz="3200">
                 <a:solidFill>
                   <a:srgbClr val="000000"/>
                 </a:solidFill>
@@ -9822,7 +9558,7 @@
                 <a:ea typeface="Play"/>
                 <a:cs typeface="Play"/>
               </a:rPr>
-              <a:t>Автоматизация вёрстки повышает скорость, качество и экономит ресурсы</a:t>
+              <a:t>Решение о запуске сервиса на всю компанию</a:t>
             </a:r>
           </a:p>
         </p:txBody>
@@ -9835,8 +9571,8 @@
         </p:nvSpPr>
         <p:spPr>
           <a:xfrm>
-            <a:off x="1670608" y="3052226"/>
-            <a:ext cx="6948525" cy="1371183"/>
+            <a:off x="1670608" y="3258448"/>
+            <a:ext cx="6948525" cy="1164961"/>
           </a:xfrm>
           <a:prstGeom prst="rect">
             <a:avLst/>
@@ -9853,7 +9589,7 @@
               <a:spcAft>
                 <a:spcPts val="300"/>
               </a:spcAft>
-              <a:defRPr sz="1800">
+              <a:defRPr sz="2438">
                 <a:solidFill>
                   <a:srgbClr val="000000"/>
                 </a:solidFill>
@@ -9863,7 +9599,7 @@
               </a:defRPr>
             </a:pPr>
             <a:r>
-              <a:rPr sz="1800">
+              <a:rPr sz="2438">
                 <a:solidFill>
                   <a:srgbClr val="000000"/>
                 </a:solidFill>
@@ -9871,33 +9607,7 @@
                 <a:ea typeface="Play"/>
                 <a:cs typeface="Play"/>
               </a:rPr>
-              <a:t>• Пилот показал значительный рост эффективности</a:t>
-            </a:r>
-          </a:p>
-          <a:p>
-            <a:pPr algn="l">
-              <a:spcAft>
-                <a:spcPts val="300"/>
-              </a:spcAft>
-              <a:defRPr sz="1800">
-                <a:solidFill>
-                  <a:srgbClr val="000000"/>
-                </a:solidFill>
-                <a:latin typeface="Play"/>
-                <a:ea typeface="Play"/>
-                <a:cs typeface="Play"/>
-              </a:defRPr>
-            </a:pPr>
-            <a:r>
-              <a:rPr sz="1800">
-                <a:solidFill>
-                  <a:srgbClr val="000000"/>
-                </a:solidFill>
-                <a:latin typeface="Play"/>
-                <a:ea typeface="Play"/>
-                <a:cs typeface="Play"/>
-              </a:rPr>
-              <a:t>• Запуск на всю компанию – стратегический шаг к цифровой трансформации</a:t>
+              <a:t>Поддержка интеграции с корпоративным хранилищем документов</a:t>
             </a:r>
           </a:p>
         </p:txBody>

--- a/samples/VK_Tech_шаблон__focus.pptx
+++ b/samples/VK_Tech_шаблон__focus.pptx
@@ -281,220 +281,6 @@
               <c:strCache>
                 <c:ptCount val="1"/>
                 <c:pt idx="0">
-                  <c:v>Кол-во</c:v>
-                </c:pt>
-              </c:strCache>
-            </c:strRef>
-          </c:tx>
-          <c:spPr>
-            <a:solidFill>
-              <a:srgbClr val="0077FF"/>
-            </a:solidFill>
-            <a:ln>
-              <a:solidFill>
-                <a:srgbClr val="0077FF"/>
-              </a:solidFill>
-            </a:ln>
-          </c:spPr>
-          <c:cat>
-            <c:strRef>
-              <c:f>Sheet1!$A$2:$A$3</c:f>
-              <c:strCache>
-                <c:ptCount val="2"/>
-                <c:pt idx="0">
-                  <c:v>Запросы</c:v>
-                </c:pt>
-                <c:pt idx="1">
-                  <c:v>Закрыто</c:v>
-                </c:pt>
-              </c:strCache>
-            </c:strRef>
-          </c:cat>
-          <c:val>
-            <c:numRef>
-              <c:f>Sheet1!$B$2:$B$3</c:f>
-              <c:numCache>
-                <c:formatCode>General</c:formatCode>
-                <c:ptCount val="2"/>
-                <c:pt idx="0">
-                  <c:v>27.0</c:v>
-                </c:pt>
-                <c:pt idx="1">
-                  <c:v>11.0</c:v>
-                </c:pt>
-              </c:numCache>
-            </c:numRef>
-          </c:val>
-        </c:ser>
-        <c:dLbls>
-          <c:numFmt formatCode="0&quot; запросов&quot;" sourceLinked="0"/>
-          <c:txPr>
-            <a:bodyPr wrap="none"/>
-            <a:lstStyle/>
-            <a:p>
-              <a:pPr>
-                <a:defRPr sz="1100" b="0">
-                  <a:solidFill>
-                    <a:srgbClr val="000000"/>
-                  </a:solidFill>
-                  <a:latin typeface="Play"/>
-                  <a:ea typeface="Play"/>
-                  <a:cs typeface="Play"/>
-                </a:defRPr>
-              </a:pPr>
-            </a:p>
-          </c:txPr>
-          <c:dLblPos val="outEnd"/>
-          <c:showLegendKey val="0"/>
-          <c:showVal val="1"/>
-          <c:showCatName val="0"/>
-          <c:showSerName val="0"/>
-          <c:showPercent val="0"/>
-          <c:showBubbleSize val="0"/>
-          <c:showLeaderLines val="1"/>
-        </c:dLbls>
-        <c:gapWidth val="60"/>
-        <c:axId val="-2068027336"/>
-        <c:axId val="-2113994440"/>
-      </c:barChart>
-      <c:catAx>
-        <c:axId val="-2068027336"/>
-        <c:scaling>
-          <c:orientation val="minMax"/>
-        </c:scaling>
-        <c:delete val="0"/>
-        <c:axPos val="b"/>
-        <c:majorTickMark val="out"/>
-        <c:minorTickMark val="none"/>
-        <c:tickLblPos val="nextTo"/>
-        <c:txPr>
-          <a:bodyPr/>
-          <a:lstStyle/>
-          <a:p>
-            <a:pPr>
-              <a:defRPr sz="1100" b="0">
-                <a:solidFill>
-                  <a:srgbClr val="000000"/>
-                </a:solidFill>
-                <a:latin typeface="Play"/>
-                <a:ea typeface="Play"/>
-                <a:cs typeface="Play"/>
-              </a:defRPr>
-            </a:pPr>
-          </a:p>
-        </c:txPr>
-        <c:crossAx val="-2113994440"/>
-        <c:crosses val="autoZero"/>
-        <c:auto val="1"/>
-        <c:lblAlgn val="ctr"/>
-        <c:lblOffset val="100"/>
-        <c:noMultiLvlLbl val="0"/>
-      </c:catAx>
-      <c:valAx>
-        <c:axId val="-2113994440"/>
-        <c:scaling/>
-        <c:delete val="0"/>
-        <c:axPos val="l"/>
-        <c:majorGridlines>
-          <c:spPr>
-            <a:ln w="9525">
-              <a:solidFill>
-                <a:srgbClr val="D1D1D1"/>
-              </a:solidFill>
-            </a:ln>
-          </c:spPr>
-        </c:majorGridlines>
-        <c:title>
-          <c:tx>
-            <c:rich>
-              <a:bodyPr rot="0" vert="horz"/>
-              <a:lstStyle/>
-              <a:p>
-                <a:pPr>
-                  <a:defRPr sz="1100" b="0">
-                    <a:solidFill>
-                      <a:srgbClr val="000000"/>
-                    </a:solidFill>
-                    <a:latin typeface="Play"/>
-                    <a:ea typeface="Play"/>
-                    <a:cs typeface="Play"/>
-                  </a:defRPr>
-                </a:pPr>
-                <a:r>
-                  <a:t>Кол-во, запросов</a:t>
-                </a:r>
-              </a:p>
-            </c:rich>
-          </c:tx>
-          <c:layout/>
-          <c:overlay val="0"/>
-        </c:title>
-        <c:majorTickMark val="out"/>
-        <c:minorTickMark val="none"/>
-        <c:tickLblPos val="nextTo"/>
-        <c:txPr>
-          <a:bodyPr/>
-          <a:lstStyle/>
-          <a:p>
-            <a:pPr>
-              <a:defRPr sz="1100" b="0">
-                <a:solidFill>
-                  <a:srgbClr val="000000"/>
-                </a:solidFill>
-                <a:latin typeface="Play"/>
-                <a:ea typeface="Play"/>
-                <a:cs typeface="Play"/>
-              </a:defRPr>
-            </a:pPr>
-          </a:p>
-        </c:txPr>
-        <c:crossAx val="-2068027336"/>
-        <c:crosses val="autoZero"/>
-      </c:valAx>
-    </c:plotArea>
-    <c:dispBlanksAs val="gap"/>
-  </c:chart>
-  <c:txPr>
-    <a:bodyPr/>
-    <a:lstStyle/>
-    <a:p>
-      <a:pPr>
-        <a:defRPr sz="1200" b="0">
-          <a:solidFill>
-            <a:srgbClr val="000000"/>
-          </a:solidFill>
-          <a:latin typeface="Play"/>
-          <a:ea typeface="Play"/>
-          <a:cs typeface="Play"/>
-        </a:defRPr>
-      </a:pPr>
-      <a:endParaRPr lang="en-US"/>
-    </a:p>
-  </c:txPr>
-  <c:externalData r:id="rId1">
-    <c:autoUpdate val="0"/>
-  </c:externalData>
-</c:chartSpace>
-</file>
-
-<file path=ppt/charts/chart2.xml><?xml version="1.0" encoding="utf-8"?>
-<c:chartSpace xmlns:c="http://schemas.openxmlformats.org/drawingml/2006/chart" xmlns:a="http://schemas.openxmlformats.org/drawingml/2006/main" xmlns:r="http://schemas.openxmlformats.org/officeDocument/2006/relationships">
-  <c:date1904 val="0"/>
-  <c:chart>
-    <c:autoTitleDeleted val="1"/>
-    <c:plotArea>
-      <c:barChart>
-        <c:barDir val="col"/>
-        <c:grouping val="clustered"/>
-        <c:ser>
-          <c:idx val="0"/>
-          <c:order val="0"/>
-          <c:tx>
-            <c:strRef>
-              <c:f>Sheet1!$B$1</c:f>
-              <c:strCache>
-                <c:ptCount val="1"/>
-                <c:pt idx="0">
                   <c:v>Время</c:v>
                 </c:pt>
               </c:strCache>
@@ -516,7 +302,7 @@
               <c:strCache>
                 <c:ptCount val="2"/>
                 <c:pt idx="0">
-                  <c:v>Сейчас</c:v>
+                  <c:v>Ручная</c:v>
                 </c:pt>
                 <c:pt idx="1">
                   <c:v>Сервис</c:v>
@@ -636,6 +422,220 @@
                 </a:pPr>
                 <a:r>
                   <a:t>Время, мин</a:t>
+                </a:r>
+              </a:p>
+            </c:rich>
+          </c:tx>
+          <c:layout/>
+          <c:overlay val="0"/>
+        </c:title>
+        <c:majorTickMark val="out"/>
+        <c:minorTickMark val="none"/>
+        <c:tickLblPos val="nextTo"/>
+        <c:txPr>
+          <a:bodyPr/>
+          <a:lstStyle/>
+          <a:p>
+            <a:pPr>
+              <a:defRPr sz="1100" b="0">
+                <a:solidFill>
+                  <a:srgbClr val="000000"/>
+                </a:solidFill>
+                <a:latin typeface="Play"/>
+                <a:ea typeface="Play"/>
+                <a:cs typeface="Play"/>
+              </a:defRPr>
+            </a:pPr>
+          </a:p>
+        </c:txPr>
+        <c:crossAx val="-2068027336"/>
+        <c:crosses val="autoZero"/>
+      </c:valAx>
+    </c:plotArea>
+    <c:dispBlanksAs val="gap"/>
+  </c:chart>
+  <c:txPr>
+    <a:bodyPr/>
+    <a:lstStyle/>
+    <a:p>
+      <a:pPr>
+        <a:defRPr sz="1200" b="0">
+          <a:solidFill>
+            <a:srgbClr val="000000"/>
+          </a:solidFill>
+          <a:latin typeface="Play"/>
+          <a:ea typeface="Play"/>
+          <a:cs typeface="Play"/>
+        </a:defRPr>
+      </a:pPr>
+      <a:endParaRPr lang="en-US"/>
+    </a:p>
+  </c:txPr>
+  <c:externalData r:id="rId1">
+    <c:autoUpdate val="0"/>
+  </c:externalData>
+</c:chartSpace>
+</file>
+
+<file path=ppt/charts/chart2.xml><?xml version="1.0" encoding="utf-8"?>
+<c:chartSpace xmlns:c="http://schemas.openxmlformats.org/drawingml/2006/chart" xmlns:a="http://schemas.openxmlformats.org/drawingml/2006/main" xmlns:r="http://schemas.openxmlformats.org/officeDocument/2006/relationships">
+  <c:date1904 val="0"/>
+  <c:chart>
+    <c:autoTitleDeleted val="1"/>
+    <c:plotArea>
+      <c:barChart>
+        <c:barDir val="col"/>
+        <c:grouping val="clustered"/>
+        <c:ser>
+          <c:idx val="0"/>
+          <c:order val="0"/>
+          <c:tx>
+            <c:strRef>
+              <c:f>Sheet1!$B$1</c:f>
+              <c:strCache>
+                <c:ptCount val="1"/>
+                <c:pt idx="0">
+                  <c:v>Срок</c:v>
+                </c:pt>
+              </c:strCache>
+            </c:strRef>
+          </c:tx>
+          <c:spPr>
+            <a:solidFill>
+              <a:srgbClr val="0077FF"/>
+            </a:solidFill>
+            <a:ln>
+              <a:solidFill>
+                <a:srgbClr val="0077FF"/>
+              </a:solidFill>
+            </a:ln>
+          </c:spPr>
+          <c:cat>
+            <c:strRef>
+              <c:f>Sheet1!$A$2:$A$3</c:f>
+              <c:strCache>
+                <c:ptCount val="2"/>
+                <c:pt idx="0">
+                  <c:v>6 дней</c:v>
+                </c:pt>
+                <c:pt idx="1">
+                  <c:v>1 день</c:v>
+                </c:pt>
+              </c:strCache>
+            </c:strRef>
+          </c:cat>
+          <c:val>
+            <c:numRef>
+              <c:f>Sheet1!$B$2:$B$3</c:f>
+              <c:numCache>
+                <c:formatCode>General</c:formatCode>
+                <c:ptCount val="2"/>
+                <c:pt idx="0">
+                  <c:v>6.0</c:v>
+                </c:pt>
+                <c:pt idx="1">
+                  <c:v>1.0</c:v>
+                </c:pt>
+              </c:numCache>
+            </c:numRef>
+          </c:val>
+        </c:ser>
+        <c:dLbls>
+          <c:numFmt formatCode="0&quot; дней&quot;" sourceLinked="0"/>
+          <c:txPr>
+            <a:bodyPr wrap="none"/>
+            <a:lstStyle/>
+            <a:p>
+              <a:pPr>
+                <a:defRPr sz="1100" b="0">
+                  <a:solidFill>
+                    <a:srgbClr val="000000"/>
+                  </a:solidFill>
+                  <a:latin typeface="Play"/>
+                  <a:ea typeface="Play"/>
+                  <a:cs typeface="Play"/>
+                </a:defRPr>
+              </a:pPr>
+            </a:p>
+          </c:txPr>
+          <c:dLblPos val="outEnd"/>
+          <c:showLegendKey val="0"/>
+          <c:showVal val="1"/>
+          <c:showCatName val="0"/>
+          <c:showSerName val="0"/>
+          <c:showPercent val="0"/>
+          <c:showBubbleSize val="0"/>
+          <c:showLeaderLines val="1"/>
+        </c:dLbls>
+        <c:gapWidth val="60"/>
+        <c:axId val="-2068027336"/>
+        <c:axId val="-2113994440"/>
+      </c:barChart>
+      <c:catAx>
+        <c:axId val="-2068027336"/>
+        <c:scaling>
+          <c:orientation val="minMax"/>
+        </c:scaling>
+        <c:delete val="0"/>
+        <c:axPos val="b"/>
+        <c:majorTickMark val="out"/>
+        <c:minorTickMark val="none"/>
+        <c:tickLblPos val="nextTo"/>
+        <c:txPr>
+          <a:bodyPr/>
+          <a:lstStyle/>
+          <a:p>
+            <a:pPr>
+              <a:defRPr sz="1100" b="0">
+                <a:solidFill>
+                  <a:srgbClr val="000000"/>
+                </a:solidFill>
+                <a:latin typeface="Play"/>
+                <a:ea typeface="Play"/>
+                <a:cs typeface="Play"/>
+              </a:defRPr>
+            </a:pPr>
+          </a:p>
+        </c:txPr>
+        <c:crossAx val="-2113994440"/>
+        <c:crosses val="autoZero"/>
+        <c:auto val="1"/>
+        <c:lblAlgn val="ctr"/>
+        <c:lblOffset val="100"/>
+        <c:noMultiLvlLbl val="0"/>
+      </c:catAx>
+      <c:valAx>
+        <c:axId val="-2113994440"/>
+        <c:scaling/>
+        <c:delete val="0"/>
+        <c:axPos val="l"/>
+        <c:majorGridlines>
+          <c:spPr>
+            <a:ln w="9525">
+              <a:solidFill>
+                <a:srgbClr val="D1D1D1"/>
+              </a:solidFill>
+            </a:ln>
+          </c:spPr>
+        </c:majorGridlines>
+        <c:title>
+          <c:tx>
+            <c:rich>
+              <a:bodyPr rot="0" vert="horz"/>
+              <a:lstStyle/>
+              <a:p>
+                <a:pPr>
+                  <a:defRPr sz="1100" b="0">
+                    <a:solidFill>
+                      <a:srgbClr val="000000"/>
+                    </a:solidFill>
+                    <a:latin typeface="Play"/>
+                    <a:ea typeface="Play"/>
+                    <a:cs typeface="Play"/>
+                  </a:defRPr>
+                </a:pPr>
+                <a:r>
+                  <a:t>Срок, дней</a:t>
                 </a:r>
               </a:p>
             </c:rich>
@@ -730,7 +730,7 @@
               <c:strCache>
                 <c:ptCount val="2"/>
                 <c:pt idx="0">
-                  <c:v>Сейчас</c:v>
+                  <c:v>Ручная</c:v>
                 </c:pt>
                 <c:pt idx="1">
                   <c:v>Сервис</c:v>
@@ -850,220 +850,6 @@
                 </a:pPr>
                 <a:r>
                   <a:t>Нарушения, колод</a:t>
-                </a:r>
-              </a:p>
-            </c:rich>
-          </c:tx>
-          <c:layout/>
-          <c:overlay val="0"/>
-        </c:title>
-        <c:majorTickMark val="out"/>
-        <c:minorTickMark val="none"/>
-        <c:tickLblPos val="nextTo"/>
-        <c:txPr>
-          <a:bodyPr/>
-          <a:lstStyle/>
-          <a:p>
-            <a:pPr>
-              <a:defRPr sz="1100" b="0">
-                <a:solidFill>
-                  <a:srgbClr val="000000"/>
-                </a:solidFill>
-                <a:latin typeface="Play"/>
-                <a:ea typeface="Play"/>
-                <a:cs typeface="Play"/>
-              </a:defRPr>
-            </a:pPr>
-          </a:p>
-        </c:txPr>
-        <c:crossAx val="-2068027336"/>
-        <c:crosses val="autoZero"/>
-      </c:valAx>
-    </c:plotArea>
-    <c:dispBlanksAs val="gap"/>
-  </c:chart>
-  <c:txPr>
-    <a:bodyPr/>
-    <a:lstStyle/>
-    <a:p>
-      <a:pPr>
-        <a:defRPr sz="1200" b="0">
-          <a:solidFill>
-            <a:srgbClr val="000000"/>
-          </a:solidFill>
-          <a:latin typeface="Play"/>
-          <a:ea typeface="Play"/>
-          <a:cs typeface="Play"/>
-        </a:defRPr>
-      </a:pPr>
-      <a:endParaRPr lang="en-US"/>
-    </a:p>
-  </c:txPr>
-  <c:externalData r:id="rId1">
-    <c:autoUpdate val="0"/>
-  </c:externalData>
-</c:chartSpace>
-</file>
-
-<file path=ppt/charts/chart4.xml><?xml version="1.0" encoding="utf-8"?>
-<c:chartSpace xmlns:c="http://schemas.openxmlformats.org/drawingml/2006/chart" xmlns:a="http://schemas.openxmlformats.org/drawingml/2006/main" xmlns:r="http://schemas.openxmlformats.org/officeDocument/2006/relationships">
-  <c:date1904 val="0"/>
-  <c:chart>
-    <c:autoTitleDeleted val="1"/>
-    <c:plotArea>
-      <c:barChart>
-        <c:barDir val="col"/>
-        <c:grouping val="clustered"/>
-        <c:ser>
-          <c:idx val="0"/>
-          <c:order val="0"/>
-          <c:tx>
-            <c:strRef>
-              <c:f>Sheet1!$B$1</c:f>
-              <c:strCache>
-                <c:ptCount val="1"/>
-                <c:pt idx="0">
-                  <c:v>Запросы</c:v>
-                </c:pt>
-              </c:strCache>
-            </c:strRef>
-          </c:tx>
-          <c:spPr>
-            <a:solidFill>
-              <a:srgbClr val="0077FF"/>
-            </a:solidFill>
-            <a:ln>
-              <a:solidFill>
-                <a:srgbClr val="0077FF"/>
-              </a:solidFill>
-            </a:ln>
-          </c:spPr>
-          <c:cat>
-            <c:strRef>
-              <c:f>Sheet1!$A$2:$A$3</c:f>
-              <c:strCache>
-                <c:ptCount val="2"/>
-                <c:pt idx="0">
-                  <c:v>Сейчас</c:v>
-                </c:pt>
-                <c:pt idx="1">
-                  <c:v>Сервис</c:v>
-                </c:pt>
-              </c:strCache>
-            </c:strRef>
-          </c:cat>
-          <c:val>
-            <c:numRef>
-              <c:f>Sheet1!$B$2:$B$3</c:f>
-              <c:numCache>
-                <c:formatCode>General</c:formatCode>
-                <c:ptCount val="2"/>
-                <c:pt idx="0">
-                  <c:v>11.0</c:v>
-                </c:pt>
-                <c:pt idx="1">
-                  <c:v>38.0</c:v>
-                </c:pt>
-              </c:numCache>
-            </c:numRef>
-          </c:val>
-        </c:ser>
-        <c:dLbls>
-          <c:numFmt formatCode="0&quot; запросов&quot;" sourceLinked="0"/>
-          <c:txPr>
-            <a:bodyPr wrap="none"/>
-            <a:lstStyle/>
-            <a:p>
-              <a:pPr>
-                <a:defRPr sz="1100" b="0">
-                  <a:solidFill>
-                    <a:srgbClr val="000000"/>
-                  </a:solidFill>
-                  <a:latin typeface="Play"/>
-                  <a:ea typeface="Play"/>
-                  <a:cs typeface="Play"/>
-                </a:defRPr>
-              </a:pPr>
-            </a:p>
-          </c:txPr>
-          <c:dLblPos val="outEnd"/>
-          <c:showLegendKey val="0"/>
-          <c:showVal val="1"/>
-          <c:showCatName val="0"/>
-          <c:showSerName val="0"/>
-          <c:showPercent val="0"/>
-          <c:showBubbleSize val="0"/>
-          <c:showLeaderLines val="1"/>
-        </c:dLbls>
-        <c:gapWidth val="60"/>
-        <c:axId val="-2068027336"/>
-        <c:axId val="-2113994440"/>
-      </c:barChart>
-      <c:catAx>
-        <c:axId val="-2068027336"/>
-        <c:scaling>
-          <c:orientation val="minMax"/>
-        </c:scaling>
-        <c:delete val="0"/>
-        <c:axPos val="b"/>
-        <c:majorTickMark val="out"/>
-        <c:minorTickMark val="none"/>
-        <c:tickLblPos val="nextTo"/>
-        <c:txPr>
-          <a:bodyPr/>
-          <a:lstStyle/>
-          <a:p>
-            <a:pPr>
-              <a:defRPr sz="1100" b="0">
-                <a:solidFill>
-                  <a:srgbClr val="000000"/>
-                </a:solidFill>
-                <a:latin typeface="Play"/>
-                <a:ea typeface="Play"/>
-                <a:cs typeface="Play"/>
-              </a:defRPr>
-            </a:pPr>
-          </a:p>
-        </c:txPr>
-        <c:crossAx val="-2113994440"/>
-        <c:crosses val="autoZero"/>
-        <c:auto val="1"/>
-        <c:lblAlgn val="ctr"/>
-        <c:lblOffset val="100"/>
-        <c:noMultiLvlLbl val="0"/>
-      </c:catAx>
-      <c:valAx>
-        <c:axId val="-2113994440"/>
-        <c:scaling/>
-        <c:delete val="0"/>
-        <c:axPos val="l"/>
-        <c:majorGridlines>
-          <c:spPr>
-            <a:ln w="9525">
-              <a:solidFill>
-                <a:srgbClr val="D1D1D1"/>
-              </a:solidFill>
-            </a:ln>
-          </c:spPr>
-        </c:majorGridlines>
-        <c:title>
-          <c:tx>
-            <c:rich>
-              <a:bodyPr rot="0" vert="horz"/>
-              <a:lstStyle/>
-              <a:p>
-                <a:pPr>
-                  <a:defRPr sz="1100" b="0">
-                    <a:solidFill>
-                      <a:srgbClr val="000000"/>
-                    </a:solidFill>
-                    <a:latin typeface="Play"/>
-                    <a:ea typeface="Play"/>
-                    <a:cs typeface="Play"/>
-                  </a:defRPr>
-                </a:pPr>
-                <a:r>
-                  <a:t>Запросы, запросов</a:t>
                 </a:r>
               </a:p>
             </c:rich>
@@ -6253,7 +6039,7 @@
         <p:spPr>
           <a:xfrm>
             <a:off x="2473726" y="1370485"/>
-            <a:ext cx="4288261" cy="800071"/>
+            <a:ext cx="4288261" cy="1887982"/>
           </a:xfrm>
           <a:prstGeom prst="rect">
             <a:avLst/>
@@ -6270,7 +6056,7 @@
               <a:spcAft>
                 <a:spcPts val="300"/>
               </a:spcAft>
-              <a:defRPr sz="1800" b="0">
+              <a:defRPr sz="2705" b="0">
                 <a:solidFill>
                   <a:srgbClr val="FFFFFF"/>
                 </a:solidFill>
@@ -6280,7 +6066,7 @@
               </a:defRPr>
             </a:pPr>
             <a:r>
-              <a:rPr sz="1800" b="0">
+              <a:rPr sz="2705" b="0">
                 <a:solidFill>
                   <a:srgbClr val="FFFFFF"/>
                 </a:solidFill>
@@ -6288,7 +6074,7 @@
                 <a:ea typeface="Play"/>
                 <a:cs typeface="Play"/>
               </a:rPr>
-              <a:t>Автоматическая вёрстка презентаций: инициатива запуска</a:t>
+              <a:t>Автоматическая вёрстка презентаций Защита инициативы перед руководством</a:t>
             </a:r>
           </a:p>
         </p:txBody>
@@ -6355,7 +6141,7 @@
                 <a:ea typeface="Play"/>
                 <a:cs typeface="Play"/>
               </a:rPr>
-              <a:t>Контекст и возможность: ручная сборка 42 колод</a:t>
+              <a:t>Сейчас: ручная сборка занимает 186 мин</a:t>
             </a:r>
           </a:p>
         </p:txBody>
@@ -6477,7 +6263,7 @@
                 <a:ea typeface="Play"/>
                 <a:cs typeface="Play"/>
               </a:rPr>
-              <a:t>42 колоды за квартал: 186 мин на сборку 12-слайдной презентации</a:t>
+              <a:t>42 колоды, 12 слайдов, 186 мин сборки</a:t>
             </a:r>
           </a:p>
         </p:txBody>
@@ -6508,7 +6294,7 @@
               <a:spcAft>
                 <a:spcPts val="300"/>
               </a:spcAft>
-              <a:defRPr sz="1600">
+              <a:defRPr sz="1800">
                 <a:solidFill>
                   <a:srgbClr val="000000"/>
                 </a:solidFill>
@@ -6518,7 +6304,7 @@
               </a:defRPr>
             </a:pPr>
             <a:r>
-              <a:rPr sz="1600">
+              <a:rPr sz="1800">
                 <a:solidFill>
                   <a:srgbClr val="000000"/>
                 </a:solidFill>
@@ -6526,7 +6312,7 @@
                 <a:ea typeface="Play"/>
                 <a:cs typeface="Play"/>
               </a:rPr>
-              <a:t>• 74 мин на правки после ревью дизайнера</a:t>
+              <a:t>• 74 мин правки после ревью</a:t>
             </a:r>
           </a:p>
           <a:p>
@@ -6534,7 +6320,7 @@
               <a:spcAft>
                 <a:spcPts val="300"/>
               </a:spcAft>
-              <a:defRPr sz="1600">
+              <a:defRPr sz="1800">
                 <a:solidFill>
                   <a:srgbClr val="000000"/>
                 </a:solidFill>
@@ -6544,7 +6330,7 @@
               </a:defRPr>
             </a:pPr>
             <a:r>
-              <a:rPr sz="1600">
+              <a:rPr sz="1800">
                 <a:solidFill>
                   <a:srgbClr val="000000"/>
                 </a:solidFill>
@@ -6552,59 +6338,7 @@
                 <a:ea typeface="Play"/>
                 <a:cs typeface="Play"/>
               </a:rPr>
-              <a:t>• 19 колод нарушили фирменный стиль (неправильные гарнитуры, цвета)</a:t>
-            </a:r>
-          </a:p>
-          <a:p>
-            <a:pPr algn="l">
-              <a:spcAft>
-                <a:spcPts val="300"/>
-              </a:spcAft>
-              <a:defRPr sz="1600">
-                <a:solidFill>
-                  <a:srgbClr val="000000"/>
-                </a:solidFill>
-                <a:latin typeface="Play"/>
-                <a:ea typeface="Play"/>
-                <a:cs typeface="Play"/>
-              </a:defRPr>
-            </a:pPr>
-            <a:r>
-              <a:rPr sz="1600">
-                <a:solidFill>
-                  <a:srgbClr val="000000"/>
-                </a:solidFill>
-                <a:latin typeface="Play"/>
-                <a:ea typeface="Play"/>
-                <a:cs typeface="Play"/>
-              </a:rPr>
-              <a:t>• Дизайнеры закрывают 11 запросов из 27 в неделю</a:t>
-            </a:r>
-          </a:p>
-          <a:p>
-            <a:pPr algn="l">
-              <a:spcAft>
-                <a:spcPts val="300"/>
-              </a:spcAft>
-              <a:defRPr sz="1600">
-                <a:solidFill>
-                  <a:srgbClr val="000000"/>
-                </a:solidFill>
-                <a:latin typeface="Play"/>
-                <a:ea typeface="Play"/>
-                <a:cs typeface="Play"/>
-              </a:defRPr>
-            </a:pPr>
-            <a:r>
-              <a:rPr sz="1600">
-                <a:solidFill>
-                  <a:srgbClr val="000000"/>
-                </a:solidFill>
-                <a:latin typeface="Play"/>
-                <a:ea typeface="Play"/>
-                <a:cs typeface="Play"/>
-              </a:rPr>
-              <a:t>• Средний срок ожидания в очереди – 6 рабочих дней</a:t>
+              <a:t>• 19 колод нарушили фирменный стиль</a:t>
             </a:r>
           </a:p>
         </p:txBody>
@@ -6629,7 +6363,130 @@
       <p:grpSpPr/>
       <p:sp>
         <p:nvSpPr>
-          <p:cNvPr id="2" name="title"/>
+          <p:cNvPr id="532" name="Google Shape;532;p53"/>
+          <p:cNvSpPr/>
+          <p:nvPr/>
+        </p:nvSpPr>
+        <p:spPr>
+          <a:xfrm>
+            <a:off x="303214" y="1022533"/>
+            <a:ext cx="8451939" cy="1433588"/>
+          </a:xfrm>
+          <a:prstGeom prst="rect">
+            <a:avLst/>
+          </a:prstGeom>
+          <a:noFill/>
+          <a:ln>
+            <a:noFill/>
+          </a:ln>
+        </p:spPr>
+        <p:txBody>
+          <a:bodyPr anchorCtr="0" anchor="ctr" bIns="91425" lIns="91425" spcFirstLastPara="1" rIns="91425" wrap="square" tIns="91425">
+            <a:noAutofit/>
+          </a:bodyPr>
+          <a:lstStyle/>
+          <a:p>
+            <a:pPr indent="0" lvl="0" marL="0" rtl="0" algn="l">
+              <a:spcBef>
+                <a:spcPts val="0"/>
+              </a:spcBef>
+              <a:spcAft>
+                <a:spcPts val="0"/>
+              </a:spcAft>
+              <a:buNone/>
+            </a:pPr>
+            <a:r>
+              <a:t/>
+            </a:r>
+            <a:endParaRPr/>
+          </a:p>
+        </p:txBody>
+      </p:sp>
+      <p:sp>
+        <p:nvSpPr>
+          <p:cNvPr id="553" name="Google Shape;553;p53"/>
+          <p:cNvSpPr/>
+          <p:nvPr/>
+        </p:nvSpPr>
+        <p:spPr>
+          <a:xfrm>
+            <a:off x="276488" y="2955549"/>
+            <a:ext cx="8451939" cy="1433588"/>
+          </a:xfrm>
+          <a:prstGeom prst="rect">
+            <a:avLst/>
+          </a:prstGeom>
+          <a:noFill/>
+          <a:ln>
+            <a:noFill/>
+          </a:ln>
+        </p:spPr>
+        <p:txBody>
+          <a:bodyPr anchorCtr="0" anchor="ctr" bIns="91425" lIns="91425" spcFirstLastPara="1" rIns="91425" wrap="square" tIns="91425">
+            <a:noAutofit/>
+          </a:bodyPr>
+          <a:lstStyle/>
+          <a:p>
+            <a:pPr indent="0" lvl="0" marL="0" rtl="0" algn="l">
+              <a:spcBef>
+                <a:spcPts val="0"/>
+              </a:spcBef>
+              <a:spcAft>
+                <a:spcPts val="0"/>
+              </a:spcAft>
+              <a:buNone/>
+            </a:pPr>
+            <a:r>
+              <a:t/>
+            </a:r>
+            <a:endParaRPr/>
+          </a:p>
+        </p:txBody>
+      </p:sp>
+      <p:sp>
+        <p:nvSpPr>
+          <p:cNvPr id="554" name="Google Shape;554;p53"/>
+          <p:cNvSpPr/>
+          <p:nvPr/>
+        </p:nvSpPr>
+        <p:spPr>
+          <a:xfrm>
+            <a:off x="303214" y="2797849"/>
+            <a:ext cx="8451939" cy="1433588"/>
+          </a:xfrm>
+          <a:prstGeom prst="rect">
+            <a:avLst/>
+          </a:prstGeom>
+          <a:noFill/>
+          <a:ln>
+            <a:noFill/>
+          </a:ln>
+        </p:spPr>
+        <p:txBody>
+          <a:bodyPr anchorCtr="0" anchor="ctr" bIns="91425" lIns="91425" spcFirstLastPara="1" rIns="91425" wrap="square" tIns="91425">
+            <a:noAutofit/>
+          </a:bodyPr>
+          <a:lstStyle/>
+          <a:p>
+            <a:pPr indent="0" lvl="0" marL="0" rtl="0" algn="l">
+              <a:spcBef>
+                <a:spcPts val="0"/>
+              </a:spcBef>
+              <a:spcAft>
+                <a:spcPts val="0"/>
+              </a:spcAft>
+              <a:buNone/>
+            </a:pPr>
+            <a:r>
+              <a:t/>
+            </a:r>
+            <a:endParaRPr/>
+          </a:p>
+        </p:txBody>
+      </p:sp>
+      <p:sp>
+        <p:nvSpPr>
+          <p:cNvPr id="555" name="title"/>
           <p:cNvSpPr txBox="1"/>
           <p:nvPr/>
         </p:nvSpPr>
@@ -6671,29 +6528,208 @@
                 <a:ea typeface="Play"/>
                 <a:cs typeface="Play"/>
               </a:rPr>
-              <a:t>Нагрузка дизайнеров: 27 запросов, 11 закрыто</a:t>
+              <a:t>Дизайнеры ждут 6 дней, закрывают 11 запросов</a:t>
             </a:r>
           </a:p>
         </p:txBody>
       </p:sp>
-      <p:graphicFrame>
-        <p:nvGraphicFramePr>
-          <p:cNvPr id="3" name="Chart 2"/>
-          <p:cNvGraphicFramePr>
-            <a:graphicFrameLocks noGrp="1"/>
-          </p:cNvGraphicFramePr>
+      <p:sp>
+        <p:nvSpPr>
+          <p:cNvPr id="556" name="stat_0:bar"/>
+          <p:cNvSpPr/>
           <p:nvPr/>
-        </p:nvGraphicFramePr>
-        <p:xfrm>
-          <a:off x="274320" y="1394994"/>
-          <a:ext cx="8344814" cy="3028415"/>
-        </p:xfrm>
-        <a:graphic>
-          <a:graphicData uri="http://schemas.openxmlformats.org/drawingml/2006/chart">
-            <c:chart xmlns:c="http://schemas.openxmlformats.org/drawingml/2006/chart" r:id="rId2"/>
-          </a:graphicData>
-        </a:graphic>
-      </p:graphicFrame>
+        </p:nvSpPr>
+        <p:spPr>
+          <a:xfrm>
+            <a:off x="274320" y="1468146"/>
+            <a:ext cx="50800" cy="833628"/>
+          </a:xfrm>
+          <a:prstGeom prst="rect">
+            <a:avLst/>
+          </a:prstGeom>
+          <a:solidFill>
+            <a:srgbClr val="0077FF"/>
+          </a:solidFill>
+          <a:ln>
+            <a:noFill/>
+          </a:ln>
+          <a:effectLst/>
+        </p:spPr>
+        <p:style>
+          <a:lnRef idx="1">
+            <a:schemeClr val="accent1"/>
+          </a:lnRef>
+          <a:fillRef idx="3">
+            <a:schemeClr val="accent1"/>
+          </a:fillRef>
+          <a:effectRef idx="2">
+            <a:schemeClr val="accent1"/>
+          </a:effectRef>
+          <a:fontRef idx="minor">
+            <a:schemeClr val="lt1"/>
+          </a:fontRef>
+        </p:style>
+        <p:txBody>
+          <a:bodyPr rtlCol="0" anchor="ctr"/>
+          <a:lstStyle/>
+          <a:p>
+            <a:pPr algn="ctr"/>
+          </a:p>
+        </p:txBody>
+      </p:sp>
+      <p:sp>
+        <p:nvSpPr>
+          <p:cNvPr id="557" name="stat_0"/>
+          <p:cNvSpPr txBox="1"/>
+          <p:nvPr/>
+        </p:nvSpPr>
+        <p:spPr>
+          <a:xfrm>
+            <a:off x="452119" y="1394994"/>
+            <a:ext cx="8167014" cy="906780"/>
+          </a:xfrm>
+          <a:prstGeom prst="rect">
+            <a:avLst/>
+          </a:prstGeom>
+          <a:noFill/>
+        </p:spPr>
+        <p:txBody>
+          <a:bodyPr wrap="square" lIns="76200" rIns="76200" tIns="0" bIns="0">
+            <a:spAutoFit/>
+          </a:bodyPr>
+          <a:lstStyle/>
+          <a:p>
+            <a:pPr>
+              <a:lnSpc>
+                <a:spcPct val="100000"/>
+              </a:lnSpc>
+              <a:spcAft>
+                <a:spcPts val="200"/>
+              </a:spcAft>
+              <a:defRPr sz="3200" b="1">
+                <a:solidFill>
+                  <a:srgbClr val="0077FF"/>
+                </a:solidFill>
+                <a:latin typeface="Play"/>
+                <a:ea typeface="Play"/>
+                <a:cs typeface="Play"/>
+              </a:defRPr>
+            </a:pPr>
+            <a:r>
+              <a:rPr sz="3200" b="1">
+                <a:solidFill>
+                  <a:srgbClr val="0077FF"/>
+                </a:solidFill>
+                <a:latin typeface="Play"/>
+                <a:ea typeface="Play"/>
+                <a:cs typeface="Play"/>
+              </a:rPr>
+              <a:t>11</a:t>
+            </a:r>
+          </a:p>
+          <a:p>
+            <a:pPr>
+              <a:spcAft>
+                <a:spcPts val="300"/>
+              </a:spcAft>
+              <a:defRPr sz="1800" b="0">
+                <a:solidFill>
+                  <a:srgbClr val="000000"/>
+                </a:solidFill>
+                <a:latin typeface="Play"/>
+                <a:ea typeface="Play"/>
+                <a:cs typeface="Play"/>
+              </a:defRPr>
+            </a:pPr>
+            <a:r>
+              <a:rPr sz="1800" b="0">
+                <a:solidFill>
+                  <a:srgbClr val="000000"/>
+                </a:solidFill>
+                <a:latin typeface="Play"/>
+                <a:ea typeface="Play"/>
+                <a:cs typeface="Play"/>
+              </a:rPr>
+              <a:t>4 дизайнера закрывают 11 запросов/неделю</a:t>
+            </a:r>
+          </a:p>
+        </p:txBody>
+      </p:sp>
+      <p:sp>
+        <p:nvSpPr>
+          <p:cNvPr id="558" name="body"/>
+          <p:cNvSpPr txBox="1"/>
+          <p:nvPr/>
+        </p:nvSpPr>
+        <p:spPr>
+          <a:xfrm>
+            <a:off x="274320" y="3151475"/>
+            <a:ext cx="8344814" cy="1271934"/>
+          </a:xfrm>
+          <a:prstGeom prst="rect">
+            <a:avLst/>
+          </a:prstGeom>
+          <a:noFill/>
+        </p:spPr>
+        <p:txBody>
+          <a:bodyPr wrap="square" lIns="76200" rIns="76200" tIns="50800" bIns="50800">
+            <a:spAutoFit/>
+          </a:bodyPr>
+          <a:lstStyle/>
+          <a:p>
+            <a:pPr algn="l">
+              <a:spcAft>
+                <a:spcPts val="300"/>
+              </a:spcAft>
+              <a:defRPr sz="1800">
+                <a:solidFill>
+                  <a:srgbClr val="000000"/>
+                </a:solidFill>
+                <a:latin typeface="Play"/>
+                <a:ea typeface="Play"/>
+                <a:cs typeface="Play"/>
+              </a:defRPr>
+            </a:pPr>
+            <a:r>
+              <a:rPr sz="1800">
+                <a:solidFill>
+                  <a:srgbClr val="000000"/>
+                </a:solidFill>
+                <a:latin typeface="Play"/>
+                <a:ea typeface="Play"/>
+                <a:cs typeface="Play"/>
+              </a:rPr>
+              <a:t>• 27 запросов поступает</a:t>
+            </a:r>
+          </a:p>
+          <a:p>
+            <a:pPr algn="l">
+              <a:spcAft>
+                <a:spcPts val="300"/>
+              </a:spcAft>
+              <a:defRPr sz="1800">
+                <a:solidFill>
+                  <a:srgbClr val="000000"/>
+                </a:solidFill>
+                <a:latin typeface="Play"/>
+                <a:ea typeface="Play"/>
+                <a:cs typeface="Play"/>
+              </a:defRPr>
+            </a:pPr>
+            <a:r>
+              <a:rPr sz="1800">
+                <a:solidFill>
+                  <a:srgbClr val="000000"/>
+                </a:solidFill>
+                <a:latin typeface="Play"/>
+                <a:ea typeface="Play"/>
+                <a:cs typeface="Play"/>
+              </a:rPr>
+              <a:t>• Средний срок ожидания 6 рабочих дней</a:t>
+            </a:r>
+          </a:p>
+        </p:txBody>
+      </p:sp>
     </p:spTree>
   </p:cSld>
   <p:clrMapOvr>
@@ -6714,19 +6750,23 @@
       <p:grpSpPr/>
       <p:sp>
         <p:nvSpPr>
-          <p:cNvPr id="662" name="Google Shape;662;p55"/>
+          <p:cNvPr id="1027" name="Google Shape;1027;p65"/>
           <p:cNvSpPr/>
           <p:nvPr/>
         </p:nvSpPr>
         <p:spPr>
           <a:xfrm>
-            <a:off x="8667705" y="4666977"/>
-            <a:ext cx="190499" cy="190475"/>
+            <a:off x="6064222" y="1209852"/>
+            <a:ext cx="2793985" cy="3014270"/>
           </a:xfrm>
-          <a:prstGeom prst="rect">
-            <a:avLst/>
+          <a:prstGeom prst="roundRect">
+            <a:avLst>
+              <a:gd fmla="val 3436" name="adj"/>
+            </a:avLst>
           </a:prstGeom>
-          <a:noFill/>
+          <a:solidFill>
+            <a:schemeClr val="lt2"/>
+          </a:solidFill>
           <a:ln>
             <a:noFill/>
           </a:ln>
@@ -6755,7 +6795,97 @@
       </p:sp>
       <p:sp>
         <p:nvSpPr>
-          <p:cNvPr id="663" name="Google Shape;663;p55"/>
+          <p:cNvPr id="1029" name="Google Shape;1029;p65"/>
+          <p:cNvSpPr/>
+          <p:nvPr/>
+        </p:nvSpPr>
+        <p:spPr>
+          <a:xfrm>
+            <a:off x="3174981" y="1209852"/>
+            <a:ext cx="2793985" cy="3014270"/>
+          </a:xfrm>
+          <a:prstGeom prst="roundRect">
+            <a:avLst>
+              <a:gd fmla="val 3436" name="adj"/>
+            </a:avLst>
+          </a:prstGeom>
+          <a:solidFill>
+            <a:schemeClr val="lt2"/>
+          </a:solidFill>
+          <a:ln>
+            <a:noFill/>
+          </a:ln>
+        </p:spPr>
+        <p:txBody>
+          <a:bodyPr anchorCtr="0" anchor="ctr" bIns="91425" lIns="91425" spcFirstLastPara="1" rIns="91425" wrap="square" tIns="91425">
+            <a:noAutofit/>
+          </a:bodyPr>
+          <a:lstStyle/>
+          <a:p>
+            <a:pPr indent="0" lvl="0" marL="0" rtl="0" algn="l">
+              <a:spcBef>
+                <a:spcPts val="0"/>
+              </a:spcBef>
+              <a:spcAft>
+                <a:spcPts val="0"/>
+              </a:spcAft>
+              <a:buNone/>
+            </a:pPr>
+            <a:r>
+              <a:t/>
+            </a:r>
+            <a:endParaRPr/>
+          </a:p>
+        </p:txBody>
+      </p:sp>
+      <p:sp>
+        <p:nvSpPr>
+          <p:cNvPr id="1031" name="Google Shape;1031;p65"/>
+          <p:cNvSpPr/>
+          <p:nvPr/>
+        </p:nvSpPr>
+        <p:spPr>
+          <a:xfrm>
+            <a:off x="285749" y="1209852"/>
+            <a:ext cx="2793985" cy="3014270"/>
+          </a:xfrm>
+          <a:prstGeom prst="roundRect">
+            <a:avLst>
+              <a:gd fmla="val 3436" name="adj"/>
+            </a:avLst>
+          </a:prstGeom>
+          <a:solidFill>
+            <a:schemeClr val="lt2"/>
+          </a:solidFill>
+          <a:ln>
+            <a:noFill/>
+          </a:ln>
+        </p:spPr>
+        <p:txBody>
+          <a:bodyPr anchorCtr="0" anchor="ctr" bIns="91425" lIns="91425" spcFirstLastPara="1" rIns="91425" wrap="square" tIns="91425">
+            <a:noAutofit/>
+          </a:bodyPr>
+          <a:lstStyle/>
+          <a:p>
+            <a:pPr indent="0" lvl="0" marL="0" rtl="0" algn="l">
+              <a:spcBef>
+                <a:spcPts val="0"/>
+              </a:spcBef>
+              <a:spcAft>
+                <a:spcPts val="0"/>
+              </a:spcAft>
+              <a:buNone/>
+            </a:pPr>
+            <a:r>
+              <a:t/>
+            </a:r>
+            <a:endParaRPr/>
+          </a:p>
+        </p:txBody>
+      </p:sp>
+      <p:sp>
+        <p:nvSpPr>
+          <p:cNvPr id="1032" name="Google Shape;1032;p65"/>
           <p:cNvSpPr/>
           <p:nvPr/>
         </p:nvSpPr>
@@ -6796,7 +6926,7 @@
       </p:sp>
       <p:sp>
         <p:nvSpPr>
-          <p:cNvPr id="664" name="Google Shape;664;p55"/>
+          <p:cNvPr id="1033" name="Google Shape;1033;p65"/>
           <p:cNvSpPr/>
           <p:nvPr/>
         </p:nvSpPr>
@@ -6837,58 +6967,13 @@
       </p:sp>
       <p:sp>
         <p:nvSpPr>
-          <p:cNvPr id="665" name="Google Shape;665;p55"/>
+          <p:cNvPr id="1035" name="Google Shape;1035;p65"/>
           <p:cNvSpPr/>
           <p:nvPr/>
         </p:nvSpPr>
         <p:spPr>
           <a:xfrm>
-            <a:off x="285749" y="1209852"/>
-            <a:ext cx="2071677" cy="3014270"/>
-          </a:xfrm>
-          <a:prstGeom prst="roundRect">
-            <a:avLst>
-              <a:gd fmla="val 4634" name="adj"/>
-            </a:avLst>
-          </a:prstGeom>
-          <a:solidFill>
-            <a:schemeClr val="lt2"/>
-          </a:solidFill>
-          <a:ln>
-            <a:noFill/>
-          </a:ln>
-        </p:spPr>
-        <p:txBody>
-          <a:bodyPr anchorCtr="0" anchor="ctr" bIns="91425" lIns="91425" spcFirstLastPara="1" rIns="91425" wrap="square" tIns="91425">
-            <a:noAutofit/>
-          </a:bodyPr>
-          <a:lstStyle/>
-          <a:p>
-            <a:pPr indent="0" lvl="0" marL="0" rtl="0" algn="l">
-              <a:spcBef>
-                <a:spcPts val="0"/>
-              </a:spcBef>
-              <a:spcAft>
-                <a:spcPts val="0"/>
-              </a:spcAft>
-              <a:buNone/>
-            </a:pPr>
-            <a:r>
-              <a:t/>
-            </a:r>
-            <a:endParaRPr/>
-          </a:p>
-        </p:txBody>
-      </p:sp>
-      <p:sp>
-        <p:nvSpPr>
-          <p:cNvPr id="667" name="Google Shape;667;p55"/>
-          <p:cNvSpPr/>
-          <p:nvPr/>
-        </p:nvSpPr>
-        <p:spPr>
-          <a:xfrm>
-            <a:off x="438148" y="1362233"/>
+            <a:off x="476248" y="1400328"/>
             <a:ext cx="76199" cy="76190"/>
           </a:xfrm>
           <a:prstGeom prst="roundRect">
@@ -6927,58 +7012,13 @@
       </p:sp>
       <p:sp>
         <p:nvSpPr>
-          <p:cNvPr id="670" name="Google Shape;670;p55"/>
+          <p:cNvPr id="1041" name="Google Shape;1041;p65"/>
           <p:cNvSpPr/>
           <p:nvPr/>
         </p:nvSpPr>
         <p:spPr>
           <a:xfrm>
-            <a:off x="2452675" y="1209852"/>
-            <a:ext cx="2071677" cy="3014270"/>
-          </a:xfrm>
-          <a:prstGeom prst="roundRect">
-            <a:avLst>
-              <a:gd fmla="val 4634" name="adj"/>
-            </a:avLst>
-          </a:prstGeom>
-          <a:solidFill>
-            <a:schemeClr val="lt2"/>
-          </a:solidFill>
-          <a:ln>
-            <a:noFill/>
-          </a:ln>
-        </p:spPr>
-        <p:txBody>
-          <a:bodyPr anchorCtr="0" anchor="ctr" bIns="91425" lIns="91425" spcFirstLastPara="1" rIns="91425" wrap="square" tIns="91425">
-            <a:noAutofit/>
-          </a:bodyPr>
-          <a:lstStyle/>
-          <a:p>
-            <a:pPr indent="0" lvl="0" marL="0" rtl="0" algn="l">
-              <a:spcBef>
-                <a:spcPts val="0"/>
-              </a:spcBef>
-              <a:spcAft>
-                <a:spcPts val="0"/>
-              </a:spcAft>
-              <a:buNone/>
-            </a:pPr>
-            <a:r>
-              <a:t/>
-            </a:r>
-            <a:endParaRPr/>
-          </a:p>
-        </p:txBody>
-      </p:sp>
-      <p:sp>
-        <p:nvSpPr>
-          <p:cNvPr id="672" name="Google Shape;672;p55"/>
-          <p:cNvSpPr/>
-          <p:nvPr/>
-        </p:nvSpPr>
-        <p:spPr>
-          <a:xfrm>
-            <a:off x="2605074" y="1362233"/>
+            <a:off x="3365480" y="1400328"/>
             <a:ext cx="76199" cy="76190"/>
           </a:xfrm>
           <a:prstGeom prst="roundRect">
@@ -7017,23 +7057,19 @@
       </p:sp>
       <p:sp>
         <p:nvSpPr>
-          <p:cNvPr id="675" name="Google Shape;675;p55"/>
+          <p:cNvPr id="1045" name="Google Shape;1045;p65"/>
           <p:cNvSpPr/>
           <p:nvPr/>
         </p:nvSpPr>
         <p:spPr>
           <a:xfrm>
-            <a:off x="4619601" y="1209852"/>
-            <a:ext cx="2071677" cy="3014270"/>
+            <a:off x="6254721" y="1400327"/>
+            <a:ext cx="2412987" cy="1009519"/>
           </a:xfrm>
-          <a:prstGeom prst="roundRect">
-            <a:avLst>
-              <a:gd fmla="val 4634" name="adj"/>
-            </a:avLst>
+          <a:prstGeom prst="rect">
+            <a:avLst/>
           </a:prstGeom>
-          <a:solidFill>
-            <a:schemeClr val="lt2"/>
-          </a:solidFill>
+          <a:noFill/>
           <a:ln>
             <a:noFill/>
           </a:ln>
@@ -7062,13 +7098,13 @@
       </p:sp>
       <p:sp>
         <p:nvSpPr>
-          <p:cNvPr id="677" name="Google Shape;677;p55"/>
+          <p:cNvPr id="1046" name="Google Shape;1046;p65"/>
           <p:cNvSpPr/>
           <p:nvPr/>
         </p:nvSpPr>
         <p:spPr>
           <a:xfrm>
-            <a:off x="4772001" y="1362233"/>
+            <a:off x="6254721" y="1400328"/>
             <a:ext cx="76199" cy="76190"/>
           </a:xfrm>
           <a:prstGeom prst="roundRect">
@@ -7107,97 +7143,7 @@
       </p:sp>
       <p:sp>
         <p:nvSpPr>
-          <p:cNvPr id="680" name="Google Shape;680;p55"/>
-          <p:cNvSpPr/>
-          <p:nvPr/>
-        </p:nvSpPr>
-        <p:spPr>
-          <a:xfrm>
-            <a:off x="6786527" y="1209852"/>
-            <a:ext cx="2071677" cy="3014270"/>
-          </a:xfrm>
-          <a:prstGeom prst="roundRect">
-            <a:avLst>
-              <a:gd fmla="val 4634" name="adj"/>
-            </a:avLst>
-          </a:prstGeom>
-          <a:solidFill>
-            <a:schemeClr val="lt2"/>
-          </a:solidFill>
-          <a:ln>
-            <a:noFill/>
-          </a:ln>
-        </p:spPr>
-        <p:txBody>
-          <a:bodyPr anchorCtr="0" anchor="ctr" bIns="91425" lIns="91425" spcFirstLastPara="1" rIns="91425" wrap="square" tIns="91425">
-            <a:noAutofit/>
-          </a:bodyPr>
-          <a:lstStyle/>
-          <a:p>
-            <a:pPr indent="0" lvl="0" marL="0" rtl="0" algn="l">
-              <a:spcBef>
-                <a:spcPts val="0"/>
-              </a:spcBef>
-              <a:spcAft>
-                <a:spcPts val="0"/>
-              </a:spcAft>
-              <a:buNone/>
-            </a:pPr>
-            <a:r>
-              <a:t/>
-            </a:r>
-            <a:endParaRPr/>
-          </a:p>
-        </p:txBody>
-      </p:sp>
-      <p:sp>
-        <p:nvSpPr>
-          <p:cNvPr id="682" name="Google Shape;682;p55"/>
-          <p:cNvSpPr/>
-          <p:nvPr/>
-        </p:nvSpPr>
-        <p:spPr>
-          <a:xfrm>
-            <a:off x="6938927" y="1362233"/>
-            <a:ext cx="76199" cy="76190"/>
-          </a:xfrm>
-          <a:prstGeom prst="roundRect">
-            <a:avLst>
-              <a:gd fmla="val 31500" name="adj"/>
-            </a:avLst>
-          </a:prstGeom>
-          <a:solidFill>
-            <a:srgbClr val="0077FF"/>
-          </a:solidFill>
-          <a:ln>
-            <a:noFill/>
-          </a:ln>
-        </p:spPr>
-        <p:txBody>
-          <a:bodyPr anchorCtr="0" anchor="ctr" bIns="91425" lIns="91425" spcFirstLastPara="1" rIns="91425" wrap="square" tIns="91425">
-            <a:noAutofit/>
-          </a:bodyPr>
-          <a:lstStyle/>
-          <a:p>
-            <a:pPr indent="0" lvl="0" marL="0" rtl="0" algn="l">
-              <a:spcBef>
-                <a:spcPts val="0"/>
-              </a:spcBef>
-              <a:spcAft>
-                <a:spcPts val="0"/>
-              </a:spcAft>
-              <a:buNone/>
-            </a:pPr>
-            <a:r>
-              <a:t/>
-            </a:r>
-            <a:endParaRPr/>
-          </a:p>
-        </p:txBody>
-      </p:sp>
-      <p:sp>
-        <p:nvSpPr>
-          <p:cNvPr id="683" name="title"/>
+          <p:cNvPr id="1047" name="title"/>
           <p:cNvSpPr txBox="1"/>
           <p:nvPr/>
         </p:nvSpPr>
@@ -7239,21 +7185,21 @@
                 <a:ea typeface="Play"/>
                 <a:cs typeface="Play"/>
               </a:rPr>
-              <a:t>Предложение: сервис принимает шаблон и материалы</a:t>
+              <a:t>Сервис автоматической вёрстки: ускоряет сборку и устраняет ошибки</a:t>
             </a:r>
           </a:p>
         </p:txBody>
       </p:sp>
       <p:sp>
         <p:nvSpPr>
-          <p:cNvPr id="684" name="lead"/>
+          <p:cNvPr id="1048" name="lead"/>
           <p:cNvSpPr txBox="1"/>
           <p:nvPr/>
         </p:nvSpPr>
         <p:spPr>
           <a:xfrm>
-            <a:off x="274320" y="1590781"/>
-            <a:ext cx="6792986" cy="1016178"/>
+            <a:off x="274320" y="1628895"/>
+            <a:ext cx="6792986" cy="1189221"/>
           </a:xfrm>
           <a:prstGeom prst="rect">
             <a:avLst/>
@@ -7270,7 +7216,7 @@
               <a:spcAft>
                 <a:spcPts val="300"/>
               </a:spcAft>
-              <a:defRPr sz="2705">
+              <a:defRPr sz="3200">
                 <a:solidFill>
                   <a:srgbClr val="000000"/>
                 </a:solidFill>
@@ -7280,7 +7226,7 @@
               </a:defRPr>
             </a:pPr>
             <a:r>
-              <a:rPr sz="2705">
+              <a:rPr sz="3200">
                 <a:solidFill>
                   <a:srgbClr val="000000"/>
                 </a:solidFill>
@@ -7288,21 +7234,21 @@
                 <a:ea typeface="Play"/>
                 <a:cs typeface="Play"/>
               </a:rPr>
-              <a:t>Сервис принимает pptx шаблон и материалы (документы, таблицы, заметки)</a:t>
+              <a:t>Принимает шаблон pptx и материалы</a:t>
             </a:r>
           </a:p>
         </p:txBody>
       </p:sp>
       <p:sp>
         <p:nvSpPr>
-          <p:cNvPr id="685" name="body"/>
+          <p:cNvPr id="1049" name="body"/>
           <p:cNvSpPr txBox="1"/>
           <p:nvPr/>
         </p:nvSpPr>
         <p:spPr>
           <a:xfrm>
-            <a:off x="274320" y="2758101"/>
-            <a:ext cx="6792986" cy="1351708"/>
+            <a:off x="274320" y="2985787"/>
+            <a:ext cx="6792986" cy="1437622"/>
           </a:xfrm>
           <a:prstGeom prst="rect">
             <a:avLst/>
@@ -7319,7 +7265,7 @@
               <a:spcAft>
                 <a:spcPts val="300"/>
               </a:spcAft>
-              <a:defRPr sz="1600">
+              <a:defRPr sz="1800">
                 <a:solidFill>
                   <a:srgbClr val="000000"/>
                 </a:solidFill>
@@ -7329,7 +7275,7 @@
               </a:defRPr>
             </a:pPr>
             <a:r>
-              <a:rPr sz="1600">
+              <a:rPr sz="1800">
                 <a:solidFill>
                   <a:srgbClr val="000000"/>
                 </a:solidFill>
@@ -7337,7 +7283,7 @@
                 <a:ea typeface="Play"/>
                 <a:cs typeface="Play"/>
               </a:rPr>
-              <a:t>• Автоматически преобразует шаблон в дизайн-систему (гарнитуры, шкала, палитра)</a:t>
+              <a:t>• Генерирует план колоды и вёрстку по дизайн-системе</a:t>
             </a:r>
           </a:p>
           <a:p>
@@ -7345,7 +7291,7 @@
               <a:spcAft>
                 <a:spcPts val="300"/>
               </a:spcAft>
-              <a:defRPr sz="1600">
+              <a:defRPr sz="1800">
                 <a:solidFill>
                   <a:srgbClr val="000000"/>
                 </a:solidFill>
@@ -7355,7 +7301,7 @@
               </a:defRPr>
             </a:pPr>
             <a:r>
-              <a:rPr sz="1600">
+              <a:rPr sz="1800">
                 <a:solidFill>
                   <a:srgbClr val="000000"/>
                 </a:solidFill>
@@ -7363,33 +7309,7 @@
                 <a:ea typeface="Play"/>
                 <a:cs typeface="Play"/>
               </a:rPr>
-              <a:t>• Генерирует план колоды и вёрстку по ролям страниц</a:t>
-            </a:r>
-          </a:p>
-          <a:p>
-            <a:pPr algn="l">
-              <a:spcAft>
-                <a:spcPts val="300"/>
-              </a:spcAft>
-              <a:defRPr sz="1600">
-                <a:solidFill>
-                  <a:srgbClr val="000000"/>
-                </a:solidFill>
-                <a:latin typeface="Play"/>
-                <a:ea typeface="Play"/>
-                <a:cs typeface="Play"/>
-              </a:defRPr>
-            </a:pPr>
-            <a:r>
-              <a:rPr sz="1600">
-                <a:solidFill>
-                  <a:srgbClr val="000000"/>
-                </a:solidFill>
-                <a:latin typeface="Play"/>
-                <a:ea typeface="Play"/>
-                <a:cs typeface="Play"/>
-              </a:rPr>
-              <a:t>• Экспорт в pptx, pdf, html с редактируемыми слайдами</a:t>
+              <a:t>• Экспорт в pptx, pdf, html</a:t>
             </a:r>
           </a:p>
         </p:txBody>
@@ -7412,70 +7332,16 @@
         <p:nvPr/>
       </p:nvGrpSpPr>
       <p:grpSpPr/>
-      <p:pic>
-        <p:nvPicPr>
-          <p:cNvPr descr=" " id="2249" name="Google Shape;2249;p83"/>
-          <p:cNvPicPr preferRelativeResize="0"/>
-          <p:nvPr/>
-        </p:nvPicPr>
-        <p:blipFill rotWithShape="1">
-          <a:blip r:embed="rId2">
-            <a:alphaModFix/>
-          </a:blip>
-          <a:srcRect b="0" l="0" r="0" t="0"/>
-          <a:stretch/>
-        </p:blipFill>
-        <p:spPr>
-          <a:xfrm>
-            <a:off x="285748" y="3576507"/>
-            <a:ext cx="2381238" cy="28571"/>
-          </a:xfrm>
-          <a:prstGeom prst="rect">
-            <a:avLst/>
-          </a:prstGeom>
-          <a:noFill/>
-          <a:ln>
-            <a:noFill/>
-          </a:ln>
-        </p:spPr>
-      </p:pic>
-      <p:pic>
-        <p:nvPicPr>
-          <p:cNvPr descr=" " id="2250" name="Google Shape;2250;p83"/>
-          <p:cNvPicPr preferRelativeResize="0"/>
-          <p:nvPr/>
-        </p:nvPicPr>
-        <p:blipFill rotWithShape="1">
-          <a:blip r:embed="rId3">
-            <a:alphaModFix/>
-          </a:blip>
-          <a:srcRect b="0" l="0" r="0" t="0"/>
-          <a:stretch/>
-        </p:blipFill>
-        <p:spPr>
-          <a:xfrm>
-            <a:off x="3143234" y="3576507"/>
-            <a:ext cx="3762355" cy="28571"/>
-          </a:xfrm>
-          <a:prstGeom prst="rect">
-            <a:avLst/>
-          </a:prstGeom>
-          <a:noFill/>
-          <a:ln>
-            <a:noFill/>
-          </a:ln>
-        </p:spPr>
-      </p:pic>
-      <p:sp>
-        <p:nvSpPr>
-          <p:cNvPr id="2251" name="title"/>
+      <p:sp>
+        <p:nvSpPr>
+          <p:cNvPr id="2" name="title"/>
           <p:cNvSpPr txBox="1"/>
           <p:nvPr/>
         </p:nvSpPr>
         <p:spPr>
           <a:xfrm>
             <a:off x="274320" y="282943"/>
-            <a:ext cx="6792986" cy="932027"/>
+            <a:ext cx="6792986" cy="617220"/>
           </a:xfrm>
           <a:prstGeom prst="rect">
             <a:avLst/>
@@ -7510,161 +7376,29 @@
                 <a:ea typeface="Play"/>
                 <a:cs typeface="Play"/>
               </a:rPr>
-              <a:t>Предложение: аудит и автоматические правки</a:t>
+              <a:t>Сборка колоды за 4 мин вместо 186</a:t>
             </a:r>
           </a:p>
         </p:txBody>
       </p:sp>
-      <p:sp>
-        <p:nvSpPr>
-          <p:cNvPr id="2252" name="lead"/>
-          <p:cNvSpPr txBox="1"/>
+      <p:graphicFrame>
+        <p:nvGraphicFramePr>
+          <p:cNvPr id="3" name="Chart 2"/>
+          <p:cNvGraphicFramePr>
+            <a:graphicFrameLocks noGrp="1"/>
+          </p:cNvGraphicFramePr>
           <p:nvPr/>
-        </p:nvSpPr>
-        <p:spPr>
-          <a:xfrm>
-            <a:off x="274320" y="1664127"/>
-            <a:ext cx="6792986" cy="650200"/>
-          </a:xfrm>
-          <a:prstGeom prst="rect">
-            <a:avLst/>
-          </a:prstGeom>
-          <a:noFill/>
-        </p:spPr>
-        <p:txBody>
-          <a:bodyPr wrap="square" lIns="76200" rIns="76200" tIns="50800" bIns="50800">
-            <a:spAutoFit/>
-          </a:bodyPr>
-          <a:lstStyle/>
-          <a:p>
-            <a:pPr algn="l">
-              <a:spcAft>
-                <a:spcPts val="300"/>
-              </a:spcAft>
-              <a:defRPr sz="2705" b="1">
-                <a:solidFill>
-                  <a:srgbClr val="000000"/>
-                </a:solidFill>
-                <a:latin typeface="Play"/>
-                <a:ea typeface="Play"/>
-                <a:cs typeface="Play"/>
-              </a:defRPr>
-            </a:pPr>
-            <a:r>
-              <a:rPr sz="2705" b="1">
-                <a:solidFill>
-                  <a:srgbClr val="000000"/>
-                </a:solidFill>
-                <a:latin typeface="Play"/>
-                <a:ea typeface="Play"/>
-                <a:cs typeface="Play"/>
-              </a:rPr>
-              <a:t>Аудит качества до выдачи результата</a:t>
-            </a:r>
-          </a:p>
-        </p:txBody>
-      </p:sp>
-      <p:sp>
-        <p:nvSpPr>
-          <p:cNvPr id="2253" name="body"/>
-          <p:cNvSpPr txBox="1"/>
-          <p:nvPr/>
-        </p:nvSpPr>
-        <p:spPr>
-          <a:xfrm>
-            <a:off x="274320" y="2429069"/>
-            <a:ext cx="6792986" cy="1147411"/>
-          </a:xfrm>
-          <a:prstGeom prst="rect">
-            <a:avLst/>
-          </a:prstGeom>
-          <a:noFill/>
-        </p:spPr>
-        <p:txBody>
-          <a:bodyPr wrap="square" lIns="76200" rIns="76200" tIns="50800" bIns="50800">
-            <a:spAutoFit/>
-          </a:bodyPr>
-          <a:lstStyle/>
-          <a:p>
-            <a:pPr algn="l">
-              <a:spcAft>
-                <a:spcPts val="300"/>
-              </a:spcAft>
-              <a:defRPr sz="1800" b="1">
-                <a:solidFill>
-                  <a:srgbClr val="000000"/>
-                </a:solidFill>
-                <a:latin typeface="Play"/>
-                <a:ea typeface="Play"/>
-                <a:cs typeface="Play"/>
-              </a:defRPr>
-            </a:pPr>
-            <a:r>
-              <a:rPr sz="1800" b="1">
-                <a:solidFill>
-                  <a:srgbClr val="000000"/>
-                </a:solidFill>
-                <a:latin typeface="Play"/>
-                <a:ea typeface="Play"/>
-                <a:cs typeface="Play"/>
-              </a:rPr>
-              <a:t>• Автоматические правки нарушений фирменного стиля</a:t>
-            </a:r>
-          </a:p>
-          <a:p>
-            <a:pPr algn="l">
-              <a:spcAft>
-                <a:spcPts val="300"/>
-              </a:spcAft>
-              <a:defRPr sz="1800" b="1">
-                <a:solidFill>
-                  <a:srgbClr val="000000"/>
-                </a:solidFill>
-                <a:latin typeface="Play"/>
-                <a:ea typeface="Play"/>
-                <a:cs typeface="Play"/>
-              </a:defRPr>
-            </a:pPr>
-            <a:r>
-              <a:rPr sz="1800" b="1">
-                <a:solidFill>
-                  <a:srgbClr val="000000"/>
-                </a:solidFill>
-                <a:latin typeface="Play"/>
-                <a:ea typeface="Play"/>
-                <a:cs typeface="Play"/>
-              </a:rPr>
-              <a:t>• Слайды остаются редактируемыми, без картинок</a:t>
-            </a:r>
-          </a:p>
-          <a:p>
-            <a:pPr algn="l">
-              <a:spcAft>
-                <a:spcPts val="300"/>
-              </a:spcAft>
-              <a:defRPr sz="1800" b="1">
-                <a:solidFill>
-                  <a:srgbClr val="000000"/>
-                </a:solidFill>
-                <a:latin typeface="Play"/>
-                <a:ea typeface="Play"/>
-                <a:cs typeface="Play"/>
-              </a:defRPr>
-            </a:pPr>
-            <a:r>
-              <a:rPr sz="1800" b="1">
-                <a:solidFill>
-                  <a:srgbClr val="000000"/>
-                </a:solidFill>
-                <a:latin typeface="Play"/>
-                <a:ea typeface="Play"/>
-                <a:cs typeface="Play"/>
-              </a:rPr>
-              <a:t>• Поддержка OpenAI-совместимых моделей (gpt-oss-20b)</a:t>
-            </a:r>
-          </a:p>
-        </p:txBody>
-      </p:sp>
+        </p:nvGraphicFramePr>
+        <p:xfrm>
+          <a:off x="274320" y="1337310"/>
+          <a:ext cx="8344814" cy="3086100"/>
+        </p:xfrm>
+        <a:graphic>
+          <a:graphicData uri="http://schemas.openxmlformats.org/drawingml/2006/chart">
+            <c:chart xmlns:c="http://schemas.openxmlformats.org/drawingml/2006/chart" r:id="rId4"/>
+          </a:graphicData>
+        </a:graphic>
+      </p:graphicFrame>
     </p:spTree>
   </p:cSld>
   <p:clrMapOvr>
@@ -7727,7 +7461,7 @@
                 <a:ea typeface="Play"/>
                 <a:cs typeface="Play"/>
               </a:rPr>
-              <a:t>Ожидаемый эффект: сокращение времени сборки</a:t>
+              <a:t>Время до первой версии 1 день вместо 6</a:t>
             </a:r>
           </a:p>
         </p:txBody>
@@ -7770,96 +7504,14 @@
       <p:grpSpPr/>
       <p:sp>
         <p:nvSpPr>
-          <p:cNvPr id="1032" name="Google Shape;1032;p65"/>
-          <p:cNvSpPr/>
-          <p:nvPr/>
-        </p:nvSpPr>
-        <p:spPr>
-          <a:xfrm>
-            <a:off x="285748" y="286047"/>
-            <a:ext cx="8572456" cy="3938075"/>
-          </a:xfrm>
-          <a:prstGeom prst="rect">
-            <a:avLst/>
-          </a:prstGeom>
-          <a:noFill/>
-          <a:ln>
-            <a:noFill/>
-          </a:ln>
-        </p:spPr>
-        <p:txBody>
-          <a:bodyPr anchorCtr="0" anchor="ctr" bIns="91425" lIns="91425" spcFirstLastPara="1" rIns="91425" wrap="square" tIns="91425">
-            <a:noAutofit/>
-          </a:bodyPr>
-          <a:lstStyle/>
-          <a:p>
-            <a:pPr indent="0" lvl="0" marL="0" rtl="0" algn="l">
-              <a:spcBef>
-                <a:spcPts val="0"/>
-              </a:spcBef>
-              <a:spcAft>
-                <a:spcPts val="0"/>
-              </a:spcAft>
-              <a:buNone/>
-            </a:pPr>
-            <a:r>
-              <a:t/>
-            </a:r>
-            <a:endParaRPr/>
-          </a:p>
-        </p:txBody>
-      </p:sp>
-      <p:sp>
-        <p:nvSpPr>
-          <p:cNvPr id="1033" name="Google Shape;1033;p65"/>
-          <p:cNvSpPr/>
-          <p:nvPr/>
-        </p:nvSpPr>
-        <p:spPr>
-          <a:xfrm>
-            <a:off x="285748" y="1209852"/>
-            <a:ext cx="8572456" cy="3014270"/>
-          </a:xfrm>
-          <a:prstGeom prst="rect">
-            <a:avLst/>
-          </a:prstGeom>
-          <a:noFill/>
-          <a:ln>
-            <a:noFill/>
-          </a:ln>
-        </p:spPr>
-        <p:txBody>
-          <a:bodyPr anchorCtr="0" anchor="ctr" bIns="91425" lIns="91425" spcFirstLastPara="1" rIns="91425" wrap="square" tIns="91425">
-            <a:noAutofit/>
-          </a:bodyPr>
-          <a:lstStyle/>
-          <a:p>
-            <a:pPr indent="0" lvl="0" marL="0" rtl="0" algn="l">
-              <a:spcBef>
-                <a:spcPts val="0"/>
-              </a:spcBef>
-              <a:spcAft>
-                <a:spcPts val="0"/>
-              </a:spcAft>
-              <a:buNone/>
-            </a:pPr>
-            <a:r>
-              <a:t/>
-            </a:r>
-            <a:endParaRPr/>
-          </a:p>
-        </p:txBody>
-      </p:sp>
-      <p:sp>
-        <p:nvSpPr>
-          <p:cNvPr id="1034" name="title"/>
+          <p:cNvPr id="2" name="title"/>
           <p:cNvSpPr txBox="1"/>
           <p:nvPr/>
         </p:nvSpPr>
         <p:spPr>
           <a:xfrm>
             <a:off x="274320" y="282943"/>
-            <a:ext cx="6792986" cy="932027"/>
+            <a:ext cx="6792986" cy="617220"/>
           </a:xfrm>
           <a:prstGeom prst="rect">
             <a:avLst/>
@@ -7894,22 +7546,22 @@
                 <a:ea typeface="Play"/>
                 <a:cs typeface="Play"/>
               </a:rPr>
-              <a:t>Ожидаемый эффект: снижение нарушений фирменного стиля</a:t>
+              <a:t>Нарушения стиля 2/68 вместо 19/42</a:t>
             </a:r>
           </a:p>
         </p:txBody>
       </p:sp>
       <p:graphicFrame>
         <p:nvGraphicFramePr>
-          <p:cNvPr id="1035" name="Chart 1034"/>
+          <p:cNvPr id="3" name="Chart 2"/>
           <p:cNvGraphicFramePr>
             <a:graphicFrameLocks noGrp="1"/>
           </p:cNvGraphicFramePr>
           <p:nvPr/>
         </p:nvGraphicFramePr>
         <p:xfrm>
-          <a:off x="274320" y="1394994"/>
-          <a:ext cx="8344814" cy="3028415"/>
+          <a:off x="274320" y="1337310"/>
+          <a:ext cx="8344814" cy="3086100"/>
         </p:xfrm>
         <a:graphic>
           <a:graphicData uri="http://schemas.openxmlformats.org/drawingml/2006/chart">
@@ -7937,91 +7589,6 @@
       <p:grpSpPr/>
       <p:sp>
         <p:nvSpPr>
-          <p:cNvPr id="2" name="title"/>
-          <p:cNvSpPr txBox="1"/>
-          <p:nvPr/>
-        </p:nvSpPr>
-        <p:spPr>
-          <a:xfrm>
-            <a:off x="274320" y="282943"/>
-            <a:ext cx="6792986" cy="932027"/>
-          </a:xfrm>
-          <a:prstGeom prst="rect">
-            <a:avLst/>
-          </a:prstGeom>
-          <a:noFill/>
-        </p:spPr>
-        <p:txBody>
-          <a:bodyPr wrap="square" lIns="76200" rIns="76200" tIns="50800" bIns="50800">
-            <a:spAutoFit/>
-          </a:bodyPr>
-          <a:lstStyle/>
-          <a:p>
-            <a:pPr algn="l">
-              <a:spcAft>
-                <a:spcPts val="300"/>
-              </a:spcAft>
-              <a:defRPr sz="2438">
-                <a:solidFill>
-                  <a:srgbClr val="000000"/>
-                </a:solidFill>
-                <a:latin typeface="Play"/>
-                <a:ea typeface="Play"/>
-                <a:cs typeface="Play"/>
-              </a:defRPr>
-            </a:pPr>
-            <a:r>
-              <a:rPr sz="2438">
-                <a:solidFill>
-                  <a:srgbClr val="000000"/>
-                </a:solidFill>
-                <a:latin typeface="Play"/>
-                <a:ea typeface="Play"/>
-                <a:cs typeface="Play"/>
-              </a:rPr>
-              <a:t>Ожидаемый эффект: рост закрытых запросов</a:t>
-            </a:r>
-          </a:p>
-        </p:txBody>
-      </p:sp>
-      <p:graphicFrame>
-        <p:nvGraphicFramePr>
-          <p:cNvPr id="3" name="Chart 2"/>
-          <p:cNvGraphicFramePr>
-            <a:graphicFrameLocks noGrp="1"/>
-          </p:cNvGraphicFramePr>
-          <p:nvPr/>
-        </p:nvGraphicFramePr>
-        <p:xfrm>
-          <a:off x="274320" y="1394994"/>
-          <a:ext cx="8344814" cy="3028415"/>
-        </p:xfrm>
-        <a:graphic>
-          <a:graphicData uri="http://schemas.openxmlformats.org/drawingml/2006/chart">
-            <c:chart xmlns:c="http://schemas.openxmlformats.org/drawingml/2006/chart" r:id="rId4"/>
-          </a:graphicData>
-        </a:graphic>
-      </p:graphicFrame>
-    </p:spTree>
-  </p:cSld>
-  <p:clrMapOvr>
-    <a:masterClrMapping/>
-  </p:clrMapOvr>
-</p:sld>
-</file>
-
-<file path=ppt/slides/slide63.xml><?xml version="1.0" encoding="utf-8"?>
-<p:sld xmlns:a="http://schemas.openxmlformats.org/drawingml/2006/main" xmlns:p="http://schemas.openxmlformats.org/presentationml/2006/main" xmlns:r="http://schemas.openxmlformats.org/officeDocument/2006/relationships">
-  <p:cSld>
-    <p:spTree>
-      <p:nvGrpSpPr>
-        <p:cNvPr id="1" name=""/>
-        <p:cNvGrpSpPr/>
-        <p:nvPr/>
-      </p:nvGrpSpPr>
-      <p:grpSpPr/>
-      <p:sp>
-        <p:nvSpPr>
           <p:cNvPr id="532" name="Google Shape;532;p53"/>
           <p:cNvSpPr/>
           <p:nvPr/>
@@ -8152,7 +7719,7 @@
         <p:spPr>
           <a:xfrm>
             <a:off x="274320" y="282943"/>
-            <a:ext cx="6792986" cy="617220"/>
+            <a:ext cx="6792986" cy="932027"/>
           </a:xfrm>
           <a:prstGeom prst="rect">
             <a:avLst/>
@@ -8187,7 +7754,7 @@
                 <a:ea typeface="Play"/>
                 <a:cs typeface="Play"/>
               </a:rPr>
-              <a:t>Что потребуется: ресурсы и сроки</a:t>
+              <a:t>Ресурсы: 1 машина 2 vCPU/2 GB RAM, 1400 руб инференса</a:t>
             </a:r>
           </a:p>
         </p:txBody>
@@ -8200,7 +7767,7 @@
         </p:nvSpPr>
         <p:spPr>
           <a:xfrm>
-            <a:off x="274320" y="1410462"/>
+            <a:off x="274320" y="1468146"/>
             <a:ext cx="50800" cy="833628"/>
           </a:xfrm>
           <a:prstGeom prst="rect">
@@ -8244,7 +7811,7 @@
         </p:nvSpPr>
         <p:spPr>
           <a:xfrm>
-            <a:off x="452119" y="1337310"/>
+            <a:off x="452119" y="1394994"/>
             <a:ext cx="8167014" cy="906780"/>
           </a:xfrm>
           <a:prstGeom prst="rect">
@@ -8309,7 +7876,7 @@
                 <a:ea typeface="Play"/>
                 <a:cs typeface="Play"/>
               </a:rPr>
-              <a:t>Сервис работает на машине 2 vCPU / 2 ГБ RAM</a:t>
+              <a:t>1 машина 2 vCPU / 2 GB RAM</a:t>
             </a:r>
           </a:p>
         </p:txBody>
@@ -8322,8 +7889,8 @@
         </p:nvSpPr>
         <p:spPr>
           <a:xfrm>
-            <a:off x="274320" y="3127247"/>
-            <a:ext cx="8344814" cy="1296162"/>
+            <a:off x="274320" y="3151475"/>
+            <a:ext cx="8344814" cy="1271934"/>
           </a:xfrm>
           <a:prstGeom prst="rect">
             <a:avLst/>
@@ -8358,7 +7925,7 @@
                 <a:ea typeface="Play"/>
                 <a:cs typeface="Play"/>
               </a:rPr>
-              <a:t>• Стоимость инференса за 6 недель – 1 400 руб</a:t>
+              <a:t>• Инференс 6 недель 1400 руб</a:t>
             </a:r>
           </a:p>
           <a:p>
@@ -8384,33 +7951,7 @@
                 <a:ea typeface="Play"/>
                 <a:cs typeface="Play"/>
               </a:rPr>
-              <a:t>• Подключение 4 команд в Q3 2026</a:t>
-            </a:r>
-          </a:p>
-          <a:p>
-            <a:pPr algn="l">
-              <a:spcAft>
-                <a:spcPts val="300"/>
-              </a:spcAft>
-              <a:defRPr sz="1800">
-                <a:solidFill>
-                  <a:srgbClr val="000000"/>
-                </a:solidFill>
-                <a:latin typeface="Play"/>
-                <a:ea typeface="Play"/>
-                <a:cs typeface="Play"/>
-              </a:defRPr>
-            </a:pPr>
-            <a:r>
-              <a:rPr sz="1800">
-                <a:solidFill>
-                  <a:srgbClr val="000000"/>
-                </a:solidFill>
-                <a:latin typeface="Play"/>
-                <a:ea typeface="Play"/>
-                <a:cs typeface="Play"/>
-              </a:rPr>
-              <a:t>• Запуск для всей компании в Q4 2026</a:t>
+              <a:t>• Модель gpt-oss-20b</a:t>
             </a:r>
           </a:p>
         </p:txBody>
@@ -8423,7 +7964,7 @@
 </p:sld>
 </file>
 
-<file path=ppt/slides/slide64.xml><?xml version="1.0" encoding="utf-8"?>
+<file path=ppt/slides/slide63.xml><?xml version="1.0" encoding="utf-8"?>
 <p:sld xmlns:a="http://schemas.openxmlformats.org/drawingml/2006/main" xmlns:p="http://schemas.openxmlformats.org/presentationml/2006/main" xmlns:r="http://schemas.openxmlformats.org/officeDocument/2006/relationships">
   <p:cSld>
     <p:spTree>
@@ -8435,7 +7976,130 @@
       <p:grpSpPr/>
       <p:sp>
         <p:nvSpPr>
-          <p:cNvPr id="2" name="title"/>
+          <p:cNvPr id="662" name="Google Shape;662;p55"/>
+          <p:cNvSpPr/>
+          <p:nvPr/>
+        </p:nvSpPr>
+        <p:spPr>
+          <a:xfrm>
+            <a:off x="8667705" y="4666977"/>
+            <a:ext cx="190499" cy="190475"/>
+          </a:xfrm>
+          <a:prstGeom prst="rect">
+            <a:avLst/>
+          </a:prstGeom>
+          <a:noFill/>
+          <a:ln>
+            <a:noFill/>
+          </a:ln>
+        </p:spPr>
+        <p:txBody>
+          <a:bodyPr anchorCtr="0" anchor="ctr" bIns="91425" lIns="91425" spcFirstLastPara="1" rIns="91425" wrap="square" tIns="91425">
+            <a:noAutofit/>
+          </a:bodyPr>
+          <a:lstStyle/>
+          <a:p>
+            <a:pPr indent="0" lvl="0" marL="0" rtl="0" algn="l">
+              <a:spcBef>
+                <a:spcPts val="0"/>
+              </a:spcBef>
+              <a:spcAft>
+                <a:spcPts val="0"/>
+              </a:spcAft>
+              <a:buNone/>
+            </a:pPr>
+            <a:r>
+              <a:t/>
+            </a:r>
+            <a:endParaRPr/>
+          </a:p>
+        </p:txBody>
+      </p:sp>
+      <p:sp>
+        <p:nvSpPr>
+          <p:cNvPr id="663" name="Google Shape;663;p55"/>
+          <p:cNvSpPr/>
+          <p:nvPr/>
+        </p:nvSpPr>
+        <p:spPr>
+          <a:xfrm>
+            <a:off x="285748" y="286047"/>
+            <a:ext cx="8572456" cy="3938075"/>
+          </a:xfrm>
+          <a:prstGeom prst="rect">
+            <a:avLst/>
+          </a:prstGeom>
+          <a:noFill/>
+          <a:ln>
+            <a:noFill/>
+          </a:ln>
+        </p:spPr>
+        <p:txBody>
+          <a:bodyPr anchorCtr="0" anchor="ctr" bIns="91425" lIns="91425" spcFirstLastPara="1" rIns="91425" wrap="square" tIns="91425">
+            <a:noAutofit/>
+          </a:bodyPr>
+          <a:lstStyle/>
+          <a:p>
+            <a:pPr indent="0" lvl="0" marL="0" rtl="0" algn="l">
+              <a:spcBef>
+                <a:spcPts val="0"/>
+              </a:spcBef>
+              <a:spcAft>
+                <a:spcPts val="0"/>
+              </a:spcAft>
+              <a:buNone/>
+            </a:pPr>
+            <a:r>
+              <a:t/>
+            </a:r>
+            <a:endParaRPr/>
+          </a:p>
+        </p:txBody>
+      </p:sp>
+      <p:sp>
+        <p:nvSpPr>
+          <p:cNvPr id="664" name="Google Shape;664;p55"/>
+          <p:cNvSpPr/>
+          <p:nvPr/>
+        </p:nvSpPr>
+        <p:spPr>
+          <a:xfrm>
+            <a:off x="285748" y="1209852"/>
+            <a:ext cx="8572456" cy="3014270"/>
+          </a:xfrm>
+          <a:prstGeom prst="rect">
+            <a:avLst/>
+          </a:prstGeom>
+          <a:noFill/>
+          <a:ln>
+            <a:noFill/>
+          </a:ln>
+        </p:spPr>
+        <p:txBody>
+          <a:bodyPr anchorCtr="0" anchor="ctr" bIns="91425" lIns="91425" spcFirstLastPara="1" rIns="91425" wrap="square" tIns="91425">
+            <a:noAutofit/>
+          </a:bodyPr>
+          <a:lstStyle/>
+          <a:p>
+            <a:pPr indent="0" lvl="0" marL="0" rtl="0" algn="l">
+              <a:spcBef>
+                <a:spcPts val="0"/>
+              </a:spcBef>
+              <a:spcAft>
+                <a:spcPts val="0"/>
+              </a:spcAft>
+              <a:buNone/>
+            </a:pPr>
+            <a:r>
+              <a:t/>
+            </a:r>
+            <a:endParaRPr/>
+          </a:p>
+        </p:txBody>
+      </p:sp>
+      <p:sp>
+        <p:nvSpPr>
+          <p:cNvPr id="665" name="title"/>
           <p:cNvSpPr txBox="1"/>
           <p:nvPr/>
         </p:nvSpPr>
@@ -8477,23 +8141,23 @@
                 <a:ea typeface="Play"/>
                 <a:cs typeface="Play"/>
               </a:rPr>
-              <a:t>План пилота: 6 недель, 2 команды</a:t>
+              <a:t>Пилот 6 недель, 68 презентаций</a:t>
             </a:r>
           </a:p>
         </p:txBody>
       </p:sp>
       <p:sp>
         <p:nvSpPr>
-          <p:cNvPr id="3" name="Pentagon 2"/>
+          <p:cNvPr id="666" name="Rectangle 665"/>
           <p:cNvSpPr/>
           <p:nvPr/>
         </p:nvSpPr>
         <p:spPr>
           <a:xfrm>
-            <a:off x="274320" y="1373314"/>
-            <a:ext cx="8344814" cy="442341"/>
+            <a:off x="274320" y="2756916"/>
+            <a:ext cx="8344814" cy="92583"/>
           </a:xfrm>
-          <a:prstGeom prst="homePlate">
+          <a:prstGeom prst="rect">
             <a:avLst/>
           </a:prstGeom>
           <a:solidFill>
@@ -8518,45 +8182,25 @@
           </a:fontRef>
         </p:style>
         <p:txBody>
-          <a:bodyPr rtlCol="0" anchor="ctr" wrap="square" lIns="12700" rIns="12700" tIns="12700" bIns="12700"/>
+          <a:bodyPr rtlCol="0" anchor="ctr"/>
           <a:lstStyle/>
           <a:p>
-            <a:pPr algn="ctr">
-              <a:defRPr sz="1400" b="0">
-                <a:solidFill>
-                  <a:srgbClr val="FFFFFF"/>
-                </a:solidFill>
-                <a:latin typeface="Play"/>
-                <a:ea typeface="Play"/>
-                <a:cs typeface="Play"/>
-              </a:defRPr>
-            </a:pPr>
-            <a:r>
-              <a:rPr sz="1400" b="0">
-                <a:solidFill>
-                  <a:srgbClr val="FFFFFF"/>
-                </a:solidFill>
-                <a:latin typeface="Play"/>
-                <a:ea typeface="Play"/>
-                <a:cs typeface="Play"/>
-              </a:rPr>
-              <a:t>Неделя 1</a:t>
-            </a:r>
+            <a:pPr algn="ctr"/>
           </a:p>
         </p:txBody>
       </p:sp>
       <p:sp>
         <p:nvSpPr>
-          <p:cNvPr id="4" name="Chevron 3"/>
+          <p:cNvPr id="667" name="Oval 666"/>
           <p:cNvSpPr/>
           <p:nvPr/>
         </p:nvSpPr>
         <p:spPr>
           <a:xfrm>
-            <a:off x="274320" y="1887664"/>
-            <a:ext cx="8344814" cy="442341"/>
+            <a:off x="1325651" y="2463736"/>
+            <a:ext cx="678942" cy="678942"/>
           </a:xfrm>
-          <a:prstGeom prst="chevron">
+          <a:prstGeom prst="ellipse">
             <a:avLst/>
           </a:prstGeom>
           <a:solidFill>
@@ -8581,13 +8225,39 @@
           </a:fontRef>
         </p:style>
         <p:txBody>
-          <a:bodyPr rtlCol="0" anchor="ctr" wrap="square" lIns="12700" rIns="12700" tIns="12700" bIns="12700"/>
+          <a:bodyPr rtlCol="0" anchor="ctr"/>
+          <a:lstStyle/>
+          <a:p>
+            <a:pPr algn="ctr"/>
+          </a:p>
+        </p:txBody>
+      </p:sp>
+      <p:sp>
+        <p:nvSpPr>
+          <p:cNvPr id="668" name="TextBox 667"/>
+          <p:cNvSpPr txBox="1"/>
+          <p:nvPr/>
+        </p:nvSpPr>
+        <p:spPr>
+          <a:xfrm>
+            <a:off x="274320" y="1337310"/>
+            <a:ext cx="4172407" cy="1172718"/>
+          </a:xfrm>
+          <a:prstGeom prst="rect">
+            <a:avLst/>
+          </a:prstGeom>
+          <a:noFill/>
+        </p:spPr>
+        <p:txBody>
+          <a:bodyPr wrap="square" lIns="12700" rIns="12700" tIns="12700" bIns="12700">
+            <a:spAutoFit/>
+          </a:bodyPr>
           <a:lstStyle/>
           <a:p>
             <a:pPr algn="ctr">
               <a:defRPr sz="1400" b="0">
                 <a:solidFill>
-                  <a:srgbClr val="FFFFFF"/>
+                  <a:srgbClr val="000000"/>
                 </a:solidFill>
                 <a:latin typeface="Play"/>
                 <a:ea typeface="Play"/>
@@ -8597,29 +8267,29 @@
             <a:r>
               <a:rPr sz="1400" b="0">
                 <a:solidFill>
-                  <a:srgbClr val="FFFFFF"/>
+                  <a:srgbClr val="000000"/>
                 </a:solidFill>
                 <a:latin typeface="Play"/>
                 <a:ea typeface="Play"/>
                 <a:cs typeface="Play"/>
               </a:rPr>
-              <a:t>Неделя 2</a:t>
+              <a:t>Начало пилота</a:t>
             </a:r>
           </a:p>
         </p:txBody>
       </p:sp>
       <p:sp>
         <p:nvSpPr>
-          <p:cNvPr id="5" name="Chevron 4"/>
+          <p:cNvPr id="669" name="Oval 668"/>
           <p:cNvSpPr/>
           <p:nvPr/>
         </p:nvSpPr>
         <p:spPr>
           <a:xfrm>
-            <a:off x="274320" y="2402014"/>
-            <a:ext cx="8344814" cy="442341"/>
+            <a:off x="4107256" y="2463736"/>
+            <a:ext cx="678942" cy="678942"/>
           </a:xfrm>
-          <a:prstGeom prst="chevron">
+          <a:prstGeom prst="ellipse">
             <a:avLst/>
           </a:prstGeom>
           <a:solidFill>
@@ -8644,13 +8314,39 @@
           </a:fontRef>
         </p:style>
         <p:txBody>
-          <a:bodyPr rtlCol="0" anchor="ctr" wrap="square" lIns="12700" rIns="12700" tIns="12700" bIns="12700"/>
+          <a:bodyPr rtlCol="0" anchor="ctr"/>
+          <a:lstStyle/>
+          <a:p>
+            <a:pPr algn="ctr"/>
+          </a:p>
+        </p:txBody>
+      </p:sp>
+      <p:sp>
+        <p:nvSpPr>
+          <p:cNvPr id="670" name="TextBox 669"/>
+          <p:cNvSpPr txBox="1"/>
+          <p:nvPr/>
+        </p:nvSpPr>
+        <p:spPr>
+          <a:xfrm>
+            <a:off x="2360523" y="3435858"/>
+            <a:ext cx="4172407" cy="1172718"/>
+          </a:xfrm>
+          <a:prstGeom prst="rect">
+            <a:avLst/>
+          </a:prstGeom>
+          <a:noFill/>
+        </p:spPr>
+        <p:txBody>
+          <a:bodyPr wrap="square" lIns="12700" rIns="12700" tIns="12700" bIns="12700">
+            <a:spAutoFit/>
+          </a:bodyPr>
           <a:lstStyle/>
           <a:p>
             <a:pPr algn="ctr">
               <a:defRPr sz="1400" b="0">
                 <a:solidFill>
-                  <a:srgbClr val="FFFFFF"/>
+                  <a:srgbClr val="000000"/>
                 </a:solidFill>
                 <a:latin typeface="Play"/>
                 <a:ea typeface="Play"/>
@@ -8660,29 +8356,29 @@
             <a:r>
               <a:rPr sz="1400" b="0">
                 <a:solidFill>
-                  <a:srgbClr val="FFFFFF"/>
+                  <a:srgbClr val="000000"/>
                 </a:solidFill>
                 <a:latin typeface="Play"/>
                 <a:ea typeface="Play"/>
                 <a:cs typeface="Play"/>
               </a:rPr>
-              <a:t>Неделя 3</a:t>
+              <a:t>Конец пилота</a:t>
             </a:r>
           </a:p>
         </p:txBody>
       </p:sp>
       <p:sp>
         <p:nvSpPr>
-          <p:cNvPr id="6" name="Chevron 5"/>
+          <p:cNvPr id="671" name="Oval 670"/>
           <p:cNvSpPr/>
           <p:nvPr/>
         </p:nvSpPr>
         <p:spPr>
           <a:xfrm>
-            <a:off x="274320" y="2916364"/>
-            <a:ext cx="8344814" cy="442341"/>
+            <a:off x="6888860" y="2463736"/>
+            <a:ext cx="678942" cy="678942"/>
           </a:xfrm>
-          <a:prstGeom prst="chevron">
+          <a:prstGeom prst="ellipse">
             <a:avLst/>
           </a:prstGeom>
           <a:solidFill>
@@ -8707,13 +8403,39 @@
           </a:fontRef>
         </p:style>
         <p:txBody>
-          <a:bodyPr rtlCol="0" anchor="ctr" wrap="square" lIns="12700" rIns="12700" tIns="12700" bIns="12700"/>
+          <a:bodyPr rtlCol="0" anchor="ctr"/>
+          <a:lstStyle/>
+          <a:p>
+            <a:pPr algn="ctr"/>
+          </a:p>
+        </p:txBody>
+      </p:sp>
+      <p:sp>
+        <p:nvSpPr>
+          <p:cNvPr id="672" name="TextBox 671"/>
+          <p:cNvSpPr txBox="1"/>
+          <p:nvPr/>
+        </p:nvSpPr>
+        <p:spPr>
+          <a:xfrm>
+            <a:off x="4446727" y="1337310"/>
+            <a:ext cx="4172407" cy="1172718"/>
+          </a:xfrm>
+          <a:prstGeom prst="rect">
+            <a:avLst/>
+          </a:prstGeom>
+          <a:noFill/>
+        </p:spPr>
+        <p:txBody>
+          <a:bodyPr wrap="square" lIns="12700" rIns="12700" tIns="12700" bIns="12700">
+            <a:spAutoFit/>
+          </a:bodyPr>
           <a:lstStyle/>
           <a:p>
             <a:pPr algn="ctr">
               <a:defRPr sz="1400" b="0">
                 <a:solidFill>
-                  <a:srgbClr val="FFFFFF"/>
+                  <a:srgbClr val="000000"/>
                 </a:solidFill>
                 <a:latin typeface="Play"/>
                 <a:ea typeface="Play"/>
@@ -8723,29 +8445,96 @@
             <a:r>
               <a:rPr sz="1400" b="0">
                 <a:solidFill>
-                  <a:srgbClr val="FFFFFF"/>
+                  <a:srgbClr val="000000"/>
                 </a:solidFill>
                 <a:latin typeface="Play"/>
                 <a:ea typeface="Play"/>
                 <a:cs typeface="Play"/>
               </a:rPr>
-              <a:t>Неделя 4</a:t>
+              <a:t>Обзор результатов</a:t>
             </a:r>
           </a:p>
         </p:txBody>
       </p:sp>
-      <p:sp>
-        <p:nvSpPr>
-          <p:cNvPr id="7" name="Chevron 6"/>
+    </p:spTree>
+  </p:cSld>
+  <p:clrMapOvr>
+    <a:masterClrMapping/>
+  </p:clrMapOvr>
+</p:sld>
+</file>
+
+<file path=ppt/slides/slide64.xml><?xml version="1.0" encoding="utf-8"?>
+<p:sld xmlns:a="http://schemas.openxmlformats.org/drawingml/2006/main" xmlns:p="http://schemas.openxmlformats.org/presentationml/2006/main" xmlns:r="http://schemas.openxmlformats.org/officeDocument/2006/relationships">
+  <p:cSld>
+    <p:spTree>
+      <p:nvGrpSpPr>
+        <p:cNvPr id="1" name=""/>
+        <p:cNvGrpSpPr/>
+        <p:nvPr/>
+      </p:nvGrpSpPr>
+      <p:grpSpPr/>
+      <p:sp>
+        <p:nvSpPr>
+          <p:cNvPr id="2" name="title"/>
+          <p:cNvSpPr txBox="1"/>
+          <p:nvPr/>
+        </p:nvSpPr>
+        <p:spPr>
+          <a:xfrm>
+            <a:off x="274320" y="282943"/>
+            <a:ext cx="6792986" cy="617220"/>
+          </a:xfrm>
+          <a:prstGeom prst="rect">
+            <a:avLst/>
+          </a:prstGeom>
+          <a:noFill/>
+        </p:spPr>
+        <p:txBody>
+          <a:bodyPr wrap="square" lIns="76200" rIns="76200" tIns="50800" bIns="50800">
+            <a:spAutoFit/>
+          </a:bodyPr>
+          <a:lstStyle/>
+          <a:p>
+            <a:pPr algn="l">
+              <a:spcAft>
+                <a:spcPts val="300"/>
+              </a:spcAft>
+              <a:defRPr sz="2438">
+                <a:solidFill>
+                  <a:srgbClr val="000000"/>
+                </a:solidFill>
+                <a:latin typeface="Play"/>
+                <a:ea typeface="Play"/>
+                <a:cs typeface="Play"/>
+              </a:defRPr>
+            </a:pPr>
+            <a:r>
+              <a:rPr sz="2438">
+                <a:solidFill>
+                  <a:srgbClr val="000000"/>
+                </a:solidFill>
+                <a:latin typeface="Play"/>
+                <a:ea typeface="Play"/>
+                <a:cs typeface="Play"/>
+              </a:rPr>
+              <a:t>Расширение: Q3 2026 – Q1 2027</a:t>
+            </a:r>
+          </a:p>
+        </p:txBody>
+      </p:sp>
+      <p:sp>
+        <p:nvSpPr>
+          <p:cNvPr id="3" name="Rectangle 2"/>
           <p:cNvSpPr/>
           <p:nvPr/>
         </p:nvSpPr>
         <p:spPr>
           <a:xfrm>
-            <a:off x="274320" y="3430714"/>
-            <a:ext cx="8344814" cy="442341"/>
+            <a:off x="274320" y="2756916"/>
+            <a:ext cx="8344814" cy="92583"/>
           </a:xfrm>
-          <a:prstGeom prst="chevron">
+          <a:prstGeom prst="rect">
             <a:avLst/>
           </a:prstGeom>
           <a:solidFill>
@@ -8770,45 +8559,25 @@
           </a:fontRef>
         </p:style>
         <p:txBody>
-          <a:bodyPr rtlCol="0" anchor="ctr" wrap="square" lIns="12700" rIns="12700" tIns="12700" bIns="12700"/>
+          <a:bodyPr rtlCol="0" anchor="ctr"/>
           <a:lstStyle/>
           <a:p>
-            <a:pPr algn="ctr">
-              <a:defRPr sz="1400" b="0">
-                <a:solidFill>
-                  <a:srgbClr val="FFFFFF"/>
-                </a:solidFill>
-                <a:latin typeface="Play"/>
-                <a:ea typeface="Play"/>
-                <a:cs typeface="Play"/>
-              </a:defRPr>
-            </a:pPr>
-            <a:r>
-              <a:rPr sz="1400" b="0">
-                <a:solidFill>
-                  <a:srgbClr val="FFFFFF"/>
-                </a:solidFill>
-                <a:latin typeface="Play"/>
-                <a:ea typeface="Play"/>
-                <a:cs typeface="Play"/>
-              </a:rPr>
-              <a:t>Неделя 5</a:t>
-            </a:r>
+            <a:pPr algn="ctr"/>
           </a:p>
         </p:txBody>
       </p:sp>
       <p:sp>
         <p:nvSpPr>
-          <p:cNvPr id="8" name="Chevron 7"/>
+          <p:cNvPr id="4" name="Oval 3"/>
           <p:cNvSpPr/>
           <p:nvPr/>
         </p:nvSpPr>
         <p:spPr>
           <a:xfrm>
-            <a:off x="274320" y="3945064"/>
-            <a:ext cx="8344814" cy="442341"/>
+            <a:off x="1325651" y="2463736"/>
+            <a:ext cx="678942" cy="678942"/>
           </a:xfrm>
-          <a:prstGeom prst="chevron">
+          <a:prstGeom prst="ellipse">
             <a:avLst/>
           </a:prstGeom>
           <a:solidFill>
@@ -8833,13 +8602,39 @@
           </a:fontRef>
         </p:style>
         <p:txBody>
-          <a:bodyPr rtlCol="0" anchor="ctr" wrap="square" lIns="12700" rIns="12700" tIns="12700" bIns="12700"/>
+          <a:bodyPr rtlCol="0" anchor="ctr"/>
+          <a:lstStyle/>
+          <a:p>
+            <a:pPr algn="ctr"/>
+          </a:p>
+        </p:txBody>
+      </p:sp>
+      <p:sp>
+        <p:nvSpPr>
+          <p:cNvPr id="5" name="TextBox 4"/>
+          <p:cNvSpPr txBox="1"/>
+          <p:nvPr/>
+        </p:nvSpPr>
+        <p:spPr>
+          <a:xfrm>
+            <a:off x="274320" y="1337310"/>
+            <a:ext cx="4172407" cy="1172718"/>
+          </a:xfrm>
+          <a:prstGeom prst="rect">
+            <a:avLst/>
+          </a:prstGeom>
+          <a:noFill/>
+        </p:spPr>
+        <p:txBody>
+          <a:bodyPr wrap="square" lIns="12700" rIns="12700" tIns="12700" bIns="12700">
+            <a:spAutoFit/>
+          </a:bodyPr>
           <a:lstStyle/>
           <a:p>
             <a:pPr algn="ctr">
               <a:defRPr sz="1400" b="0">
                 <a:solidFill>
-                  <a:srgbClr val="FFFFFF"/>
+                  <a:srgbClr val="000000"/>
                 </a:solidFill>
                 <a:latin typeface="Play"/>
                 <a:ea typeface="Play"/>
@@ -8849,13 +8644,191 @@
             <a:r>
               <a:rPr sz="1400" b="0">
                 <a:solidFill>
-                  <a:srgbClr val="FFFFFF"/>
+                  <a:srgbClr val="000000"/>
                 </a:solidFill>
                 <a:latin typeface="Play"/>
                 <a:ea typeface="Play"/>
                 <a:cs typeface="Play"/>
               </a:rPr>
-              <a:t>Неделя 6</a:t>
+              <a:t>Q3 2026: подключение 4 команд</a:t>
+            </a:r>
+          </a:p>
+        </p:txBody>
+      </p:sp>
+      <p:sp>
+        <p:nvSpPr>
+          <p:cNvPr id="6" name="Oval 5"/>
+          <p:cNvSpPr/>
+          <p:nvPr/>
+        </p:nvSpPr>
+        <p:spPr>
+          <a:xfrm>
+            <a:off x="4107256" y="2463736"/>
+            <a:ext cx="678942" cy="678942"/>
+          </a:xfrm>
+          <a:prstGeom prst="ellipse">
+            <a:avLst/>
+          </a:prstGeom>
+          <a:solidFill>
+            <a:srgbClr val="0077FF"/>
+          </a:solidFill>
+          <a:ln>
+            <a:noFill/>
+          </a:ln>
+        </p:spPr>
+        <p:style>
+          <a:lnRef idx="1">
+            <a:schemeClr val="accent1"/>
+          </a:lnRef>
+          <a:fillRef idx="3">
+            <a:schemeClr val="accent1"/>
+          </a:fillRef>
+          <a:effectRef idx="2">
+            <a:schemeClr val="accent1"/>
+          </a:effectRef>
+          <a:fontRef idx="minor">
+            <a:schemeClr val="lt1"/>
+          </a:fontRef>
+        </p:style>
+        <p:txBody>
+          <a:bodyPr rtlCol="0" anchor="ctr"/>
+          <a:lstStyle/>
+          <a:p>
+            <a:pPr algn="ctr"/>
+          </a:p>
+        </p:txBody>
+      </p:sp>
+      <p:sp>
+        <p:nvSpPr>
+          <p:cNvPr id="7" name="TextBox 6"/>
+          <p:cNvSpPr txBox="1"/>
+          <p:nvPr/>
+        </p:nvSpPr>
+        <p:spPr>
+          <a:xfrm>
+            <a:off x="2360523" y="3435858"/>
+            <a:ext cx="4172407" cy="1172718"/>
+          </a:xfrm>
+          <a:prstGeom prst="rect">
+            <a:avLst/>
+          </a:prstGeom>
+          <a:noFill/>
+        </p:spPr>
+        <p:txBody>
+          <a:bodyPr wrap="square" lIns="12700" rIns="12700" tIns="12700" bIns="12700">
+            <a:spAutoFit/>
+          </a:bodyPr>
+          <a:lstStyle/>
+          <a:p>
+            <a:pPr algn="ctr">
+              <a:defRPr sz="1400" b="0">
+                <a:solidFill>
+                  <a:srgbClr val="000000"/>
+                </a:solidFill>
+                <a:latin typeface="Play"/>
+                <a:ea typeface="Play"/>
+                <a:cs typeface="Play"/>
+              </a:defRPr>
+            </a:pPr>
+            <a:r>
+              <a:rPr sz="1400" b="0">
+                <a:solidFill>
+                  <a:srgbClr val="000000"/>
+                </a:solidFill>
+                <a:latin typeface="Play"/>
+                <a:ea typeface="Play"/>
+                <a:cs typeface="Play"/>
+              </a:rPr>
+              <a:t>Q4 2026: доступ для всей компании</a:t>
+            </a:r>
+          </a:p>
+        </p:txBody>
+      </p:sp>
+      <p:sp>
+        <p:nvSpPr>
+          <p:cNvPr id="8" name="Oval 7"/>
+          <p:cNvSpPr/>
+          <p:nvPr/>
+        </p:nvSpPr>
+        <p:spPr>
+          <a:xfrm>
+            <a:off x="6888860" y="2463736"/>
+            <a:ext cx="678942" cy="678942"/>
+          </a:xfrm>
+          <a:prstGeom prst="ellipse">
+            <a:avLst/>
+          </a:prstGeom>
+          <a:solidFill>
+            <a:srgbClr val="0077FF"/>
+          </a:solidFill>
+          <a:ln>
+            <a:noFill/>
+          </a:ln>
+        </p:spPr>
+        <p:style>
+          <a:lnRef idx="1">
+            <a:schemeClr val="accent1"/>
+          </a:lnRef>
+          <a:fillRef idx="3">
+            <a:schemeClr val="accent1"/>
+          </a:fillRef>
+          <a:effectRef idx="2">
+            <a:schemeClr val="accent1"/>
+          </a:effectRef>
+          <a:fontRef idx="minor">
+            <a:schemeClr val="lt1"/>
+          </a:fontRef>
+        </p:style>
+        <p:txBody>
+          <a:bodyPr rtlCol="0" anchor="ctr"/>
+          <a:lstStyle/>
+          <a:p>
+            <a:pPr algn="ctr"/>
+          </a:p>
+        </p:txBody>
+      </p:sp>
+      <p:sp>
+        <p:nvSpPr>
+          <p:cNvPr id="9" name="TextBox 8"/>
+          <p:cNvSpPr txBox="1"/>
+          <p:nvPr/>
+        </p:nvSpPr>
+        <p:spPr>
+          <a:xfrm>
+            <a:off x="4446727" y="1337310"/>
+            <a:ext cx="4172407" cy="1172718"/>
+          </a:xfrm>
+          <a:prstGeom prst="rect">
+            <a:avLst/>
+          </a:prstGeom>
+          <a:noFill/>
+        </p:spPr>
+        <p:txBody>
+          <a:bodyPr wrap="square" lIns="12700" rIns="12700" tIns="12700" bIns="12700">
+            <a:spAutoFit/>
+          </a:bodyPr>
+          <a:lstStyle/>
+          <a:p>
+            <a:pPr algn="ctr">
+              <a:defRPr sz="1400" b="0">
+                <a:solidFill>
+                  <a:srgbClr val="000000"/>
+                </a:solidFill>
+                <a:latin typeface="Play"/>
+                <a:ea typeface="Play"/>
+                <a:cs typeface="Play"/>
+              </a:defRPr>
+            </a:pPr>
+            <a:r>
+              <a:rPr sz="1400" b="0">
+                <a:solidFill>
+                  <a:srgbClr val="000000"/>
+                </a:solidFill>
+                <a:latin typeface="Play"/>
+                <a:ea typeface="Play"/>
+                <a:cs typeface="Play"/>
+              </a:rPr>
+              <a:t>Q1 2027: генерация иллюстраций</a:t>
             </a:r>
           </a:p>
         </p:txBody>
@@ -9049,358 +9022,821 @@
                 <a:ea typeface="Play"/>
                 <a:cs typeface="Play"/>
               </a:rPr>
-              <a:t>Результаты пилота: эффективность</a:t>
+              <a:t>Запрос запуска на всю компанию</a:t>
             </a:r>
           </a:p>
         </p:txBody>
       </p:sp>
-      <p:graphicFrame>
-        <p:nvGraphicFramePr>
-          <p:cNvPr id="1060" name="Table 1059"/>
-          <p:cNvGraphicFramePr>
-            <a:graphicFrameLocks noGrp="1"/>
-          </p:cNvGraphicFramePr>
+      <p:sp>
+        <p:nvSpPr>
+          <p:cNvPr id="1060" name="lead"/>
+          <p:cNvSpPr txBox="1"/>
           <p:nvPr/>
-        </p:nvGraphicFramePr>
-        <p:xfrm>
-          <a:off x="274320" y="1394994"/>
-          <a:ext cx="8344814" cy="3028415"/>
-        </p:xfrm>
-        <a:graphic>
-          <a:graphicData uri="http://schemas.openxmlformats.org/drawingml/2006/table">
-            <a:tbl>
-              <a:tblPr firstRow="1" bandRow="1">
-                <a:tableStyleId>{5C22544A-7EE6-4342-B048-85BDC9FD1C3A}</a:tableStyleId>
-              </a:tblPr>
-              <a:tblGrid>
-                <a:gridCol w="2781604"/>
-                <a:gridCol w="2781604"/>
-                <a:gridCol w="2781606"/>
-              </a:tblGrid>
-              <a:tr h="757103">
-                <a:tc>
-                  <a:txBody>
-                    <a:bodyPr/>
-                    <a:lstStyle/>
-                    <a:p>
-                      <a:pPr>
-                        <a:defRPr sz="1300" b="1">
-                          <a:solidFill>
-                            <a:srgbClr val="FFFFFF"/>
-                          </a:solidFill>
-                          <a:latin typeface="Play"/>
-                          <a:ea typeface="Play"/>
-                          <a:cs typeface="Play"/>
-                        </a:defRPr>
-                      </a:pPr>
-                      <a:r>
-                        <a:t>Показатель</a:t>
-                      </a:r>
-                    </a:p>
-                  </a:txBody>
-                  <a:tcPr>
-                    <a:solidFill>
-                      <a:srgbClr val="0077FF"/>
-                    </a:solidFill>
-                  </a:tcPr>
-                </a:tc>
-                <a:tc>
-                  <a:txBody>
-                    <a:bodyPr/>
-                    <a:lstStyle/>
-                    <a:p>
-                      <a:pPr>
-                        <a:defRPr sz="1300" b="1">
-                          <a:solidFill>
-                            <a:srgbClr val="FFFFFF"/>
-                          </a:solidFill>
-                          <a:latin typeface="Play"/>
-                          <a:ea typeface="Play"/>
-                          <a:cs typeface="Play"/>
-                        </a:defRPr>
-                      </a:pPr>
-                      <a:r>
-                        <a:t>Сейчас</a:t>
-                      </a:r>
-                    </a:p>
-                  </a:txBody>
-                  <a:tcPr>
-                    <a:solidFill>
-                      <a:srgbClr val="0077FF"/>
-                    </a:solidFill>
-                  </a:tcPr>
-                </a:tc>
-                <a:tc>
-                  <a:txBody>
-                    <a:bodyPr/>
-                    <a:lstStyle/>
-                    <a:p>
-                      <a:pPr>
-                        <a:defRPr sz="1300" b="1">
-                          <a:solidFill>
-                            <a:srgbClr val="FFFFFF"/>
-                          </a:solidFill>
-                          <a:latin typeface="Play"/>
-                          <a:ea typeface="Play"/>
-                          <a:cs typeface="Play"/>
-                        </a:defRPr>
-                      </a:pPr>
-                      <a:r>
-                        <a:t>Сервис</a:t>
-                      </a:r>
-                    </a:p>
-                  </a:txBody>
-                  <a:tcPr>
-                    <a:solidFill>
-                      <a:srgbClr val="0077FF"/>
-                    </a:solidFill>
-                  </a:tcPr>
-                </a:tc>
-              </a:tr>
-              <a:tr h="757103">
-                <a:tc>
-                  <a:txBody>
-                    <a:bodyPr/>
-                    <a:lstStyle/>
-                    <a:p>
-                      <a:pPr>
-                        <a:defRPr sz="1300" b="0">
-                          <a:solidFill>
-                            <a:srgbClr val="000000"/>
-                          </a:solidFill>
-                          <a:latin typeface="Play"/>
-                          <a:ea typeface="Play"/>
-                          <a:cs typeface="Play"/>
-                        </a:defRPr>
-                      </a:pPr>
-                      <a:r>
-                        <a:t>Время, мин</a:t>
-                      </a:r>
-                    </a:p>
-                  </a:txBody>
-                  <a:tcPr>
-                    <a:solidFill>
-                      <a:srgbClr val="FFFFFF"/>
-                    </a:solidFill>
-                  </a:tcPr>
-                </a:tc>
-                <a:tc>
-                  <a:txBody>
-                    <a:bodyPr/>
-                    <a:lstStyle/>
-                    <a:p>
-                      <a:pPr>
-                        <a:defRPr sz="1300" b="0">
-                          <a:solidFill>
-                            <a:srgbClr val="000000"/>
-                          </a:solidFill>
-                          <a:latin typeface="Play"/>
-                          <a:ea typeface="Play"/>
-                          <a:cs typeface="Play"/>
-                        </a:defRPr>
-                      </a:pPr>
-                      <a:r>
-                        <a:t>186</a:t>
-                      </a:r>
-                    </a:p>
-                  </a:txBody>
-                  <a:tcPr>
-                    <a:solidFill>
-                      <a:srgbClr val="FFFFFF"/>
-                    </a:solidFill>
-                  </a:tcPr>
-                </a:tc>
-                <a:tc>
-                  <a:txBody>
-                    <a:bodyPr/>
-                    <a:lstStyle/>
-                    <a:p>
-                      <a:pPr>
-                        <a:defRPr sz="1300" b="0">
-                          <a:solidFill>
-                            <a:srgbClr val="000000"/>
-                          </a:solidFill>
-                          <a:latin typeface="Play"/>
-                          <a:ea typeface="Play"/>
-                          <a:cs typeface="Play"/>
-                        </a:defRPr>
-                      </a:pPr>
-                      <a:r>
-                        <a:t>4</a:t>
-                      </a:r>
-                    </a:p>
-                  </a:txBody>
-                  <a:tcPr>
-                    <a:solidFill>
-                      <a:srgbClr val="FFFFFF"/>
-                    </a:solidFill>
-                  </a:tcPr>
-                </a:tc>
-              </a:tr>
-              <a:tr h="757103">
-                <a:tc>
-                  <a:txBody>
-                    <a:bodyPr/>
-                    <a:lstStyle/>
-                    <a:p>
-                      <a:pPr>
-                        <a:defRPr sz="1300" b="0">
-                          <a:solidFill>
-                            <a:srgbClr val="000000"/>
-                          </a:solidFill>
-                          <a:latin typeface="Play"/>
-                          <a:ea typeface="Play"/>
-                          <a:cs typeface="Play"/>
-                        </a:defRPr>
-                      </a:pPr>
-                      <a:r>
-                        <a:t>Нарушения колод</a:t>
-                      </a:r>
-                    </a:p>
-                  </a:txBody>
-                  <a:tcPr>
-                    <a:solidFill>
-                      <a:srgbClr val="FFFFFF"/>
-                    </a:solidFill>
-                  </a:tcPr>
-                </a:tc>
-                <a:tc>
-                  <a:txBody>
-                    <a:bodyPr/>
-                    <a:lstStyle/>
-                    <a:p>
-                      <a:pPr>
-                        <a:defRPr sz="1300" b="0">
-                          <a:solidFill>
-                            <a:srgbClr val="000000"/>
-                          </a:solidFill>
-                          <a:latin typeface="Play"/>
-                          <a:ea typeface="Play"/>
-                          <a:cs typeface="Play"/>
-                        </a:defRPr>
-                      </a:pPr>
-                      <a:r>
-                        <a:t>19</a:t>
-                      </a:r>
-                    </a:p>
-                  </a:txBody>
-                  <a:tcPr>
-                    <a:solidFill>
-                      <a:srgbClr val="FFFFFF"/>
-                    </a:solidFill>
-                  </a:tcPr>
-                </a:tc>
-                <a:tc>
-                  <a:txBody>
-                    <a:bodyPr/>
-                    <a:lstStyle/>
-                    <a:p>
-                      <a:pPr>
-                        <a:defRPr sz="1300" b="0">
-                          <a:solidFill>
-                            <a:srgbClr val="000000"/>
-                          </a:solidFill>
-                          <a:latin typeface="Play"/>
-                          <a:ea typeface="Play"/>
-                          <a:cs typeface="Play"/>
-                        </a:defRPr>
-                      </a:pPr>
-                      <a:r>
-                        <a:t>2</a:t>
-                      </a:r>
-                    </a:p>
-                  </a:txBody>
-                  <a:tcPr>
-                    <a:solidFill>
-                      <a:srgbClr val="FFFFFF"/>
-                    </a:solidFill>
-                  </a:tcPr>
-                </a:tc>
-              </a:tr>
-              <a:tr h="757106">
-                <a:tc>
-                  <a:txBody>
-                    <a:bodyPr/>
-                    <a:lstStyle/>
-                    <a:p>
-                      <a:pPr>
-                        <a:defRPr sz="1300" b="0">
-                          <a:solidFill>
-                            <a:srgbClr val="000000"/>
-                          </a:solidFill>
-                          <a:latin typeface="Play"/>
-                          <a:ea typeface="Play"/>
-                          <a:cs typeface="Play"/>
-                        </a:defRPr>
-                      </a:pPr>
-                      <a:r>
-                        <a:t>Запросы, кол-во</a:t>
-                      </a:r>
-                    </a:p>
-                  </a:txBody>
-                  <a:tcPr>
-                    <a:solidFill>
-                      <a:srgbClr val="FFFFFF"/>
-                    </a:solidFill>
-                  </a:tcPr>
-                </a:tc>
-                <a:tc>
-                  <a:txBody>
-                    <a:bodyPr/>
-                    <a:lstStyle/>
-                    <a:p>
-                      <a:pPr>
-                        <a:defRPr sz="1300" b="0">
-                          <a:solidFill>
-                            <a:srgbClr val="000000"/>
-                          </a:solidFill>
-                          <a:latin typeface="Play"/>
-                          <a:ea typeface="Play"/>
-                          <a:cs typeface="Play"/>
-                        </a:defRPr>
-                      </a:pPr>
-                      <a:r>
-                        <a:t>11</a:t>
-                      </a:r>
-                    </a:p>
-                  </a:txBody>
-                  <a:tcPr>
-                    <a:solidFill>
-                      <a:srgbClr val="FFFFFF"/>
-                    </a:solidFill>
-                  </a:tcPr>
-                </a:tc>
-                <a:tc>
-                  <a:txBody>
-                    <a:bodyPr/>
-                    <a:lstStyle/>
-                    <a:p>
-                      <a:pPr>
-                        <a:defRPr sz="1300" b="0">
-                          <a:solidFill>
-                            <a:srgbClr val="000000"/>
-                          </a:solidFill>
-                          <a:latin typeface="Play"/>
-                          <a:ea typeface="Play"/>
-                          <a:cs typeface="Play"/>
-                        </a:defRPr>
-                      </a:pPr>
-                      <a:r>
-                        <a:t>38</a:t>
-                      </a:r>
-                    </a:p>
-                  </a:txBody>
-                  <a:tcPr>
-                    <a:solidFill>
-                      <a:srgbClr val="FFFFFF"/>
-                    </a:solidFill>
-                  </a:tcPr>
-                </a:tc>
-              </a:tr>
-            </a:tbl>
-          </a:graphicData>
-        </a:graphic>
-      </p:graphicFrame>
+        </p:nvSpPr>
+        <p:spPr>
+          <a:xfrm>
+            <a:off x="274320" y="1652697"/>
+            <a:ext cx="4196657" cy="1158240"/>
+          </a:xfrm>
+          <a:prstGeom prst="rect">
+            <a:avLst/>
+          </a:prstGeom>
+          <a:noFill/>
+        </p:spPr>
+        <p:txBody>
+          <a:bodyPr wrap="square" lIns="76200" rIns="76200" tIns="50800" bIns="50800">
+            <a:spAutoFit/>
+          </a:bodyPr>
+          <a:lstStyle/>
+          <a:p>
+            <a:pPr algn="l">
+              <a:spcAft>
+                <a:spcPts val="300"/>
+              </a:spcAft>
+              <a:defRPr sz="3200">
+                <a:solidFill>
+                  <a:srgbClr val="000000"/>
+                </a:solidFill>
+                <a:latin typeface="Play"/>
+                <a:ea typeface="Play"/>
+                <a:cs typeface="Play"/>
+              </a:defRPr>
+            </a:pPr>
+            <a:r>
+              <a:rPr sz="3200">
+                <a:solidFill>
+                  <a:srgbClr val="000000"/>
+                </a:solidFill>
+                <a:latin typeface="Play"/>
+                <a:ea typeface="Play"/>
+                <a:cs typeface="Play"/>
+              </a:rPr>
+              <a:t>Попросить одобрение запуска</a:t>
+            </a:r>
+          </a:p>
+        </p:txBody>
+      </p:sp>
+      <p:sp>
+        <p:nvSpPr>
+          <p:cNvPr id="1061" name="body"/>
+          <p:cNvSpPr txBox="1"/>
+          <p:nvPr/>
+        </p:nvSpPr>
+        <p:spPr>
+          <a:xfrm>
+            <a:off x="274320" y="3469746"/>
+            <a:ext cx="4196657" cy="695960"/>
+          </a:xfrm>
+          <a:prstGeom prst="rect">
+            <a:avLst/>
+          </a:prstGeom>
+          <a:noFill/>
+        </p:spPr>
+        <p:txBody>
+          <a:bodyPr wrap="square" lIns="76200" rIns="76200" tIns="50800" bIns="50800">
+            <a:spAutoFit/>
+          </a:bodyPr>
+          <a:lstStyle/>
+          <a:p>
+            <a:pPr algn="l">
+              <a:spcAft>
+                <a:spcPts val="300"/>
+              </a:spcAft>
+              <a:defRPr sz="1800">
+                <a:solidFill>
+                  <a:srgbClr val="000000"/>
+                </a:solidFill>
+                <a:latin typeface="Play"/>
+                <a:ea typeface="Play"/>
+                <a:cs typeface="Play"/>
+              </a:defRPr>
+            </a:pPr>
+            <a:r>
+              <a:rPr sz="1800">
+                <a:solidFill>
+                  <a:srgbClr val="000000"/>
+                </a:solidFill>
+                <a:latin typeface="Play"/>
+                <a:ea typeface="Play"/>
+                <a:cs typeface="Play"/>
+              </a:rPr>
+              <a:t>Предложить интеграцию с хранилищем документов</a:t>
+            </a:r>
+          </a:p>
+        </p:txBody>
+      </p:sp>
+      <p:grpSp>
+        <p:nvGrpSpPr>
+          <p:cNvPr id="2" name="illustration:builtin-launch"/>
+          <p:cNvGrpSpPr/>
+          <p:nvPr/>
+        </p:nvGrpSpPr>
+        <p:grpSpPr>
+          <a:xfrm>
+            <a:off x="5461956" y="1688942"/>
+            <a:ext cx="2537363" cy="2440517"/>
+            <a:chOff x="5461956" y="1688942"/>
+            <a:chExt cx="2537363" cy="2440517"/>
+          </a:xfrm>
+        </p:grpSpPr>
+        <p:sp>
+          <p:nvSpPr>
+            <p:cNvPr id="1062" name="Oval 1061"/>
+            <p:cNvSpPr/>
+            <p:nvPr/>
+          </p:nvSpPr>
+          <p:spPr>
+            <a:xfrm>
+              <a:off x="5461956" y="1688942"/>
+              <a:ext cx="2440517" cy="2440517"/>
+            </a:xfrm>
+            <a:prstGeom prst="ellipse">
+              <a:avLst/>
+            </a:prstGeom>
+            <a:solidFill>
+              <a:srgbClr val="D6E9FF"/>
+            </a:solidFill>
+            <a:ln>
+              <a:noFill/>
+            </a:ln>
+            <a:effectLst/>
+          </p:spPr>
+          <p:style>
+            <a:lnRef idx="1">
+              <a:schemeClr val="accent1"/>
+            </a:lnRef>
+            <a:fillRef idx="3">
+              <a:schemeClr val="accent1"/>
+            </a:fillRef>
+            <a:effectRef idx="2">
+              <a:schemeClr val="accent1"/>
+            </a:effectRef>
+            <a:fontRef idx="minor">
+              <a:schemeClr val="lt1"/>
+            </a:fontRef>
+          </p:style>
+          <p:txBody>
+            <a:bodyPr rtlCol="0" anchor="ctr"/>
+            <a:lstStyle/>
+            <a:p>
+              <a:pPr algn="ctr"/>
+            </a:p>
+          </p:txBody>
+        </p:sp>
+        <p:sp>
+          <p:nvSpPr>
+            <p:cNvPr id="3" name="Freeform 2"/>
+            <p:cNvSpPr/>
+            <p:nvPr/>
+          </p:nvSpPr>
+          <p:spPr>
+            <a:xfrm>
+              <a:off x="6199380" y="1805157"/>
+              <a:ext cx="965670" cy="1336474"/>
+            </a:xfrm>
+            <a:custGeom>
+              <a:avLst/>
+              <a:gdLst/>
+              <a:ahLst/>
+              <a:cxnLst/>
+              <a:rect l="l" t="t" r="r" b="b"/>
+              <a:pathLst>
+                <a:path w="965670" h="1336474">
+                  <a:moveTo>
+                    <a:pt x="482835" y="0"/>
+                  </a:moveTo>
+                  <a:lnTo>
+                    <a:pt x="597288" y="93379"/>
+                  </a:lnTo>
+                  <a:lnTo>
+                    <a:pt x="696516" y="198495"/>
+                  </a:lnTo>
+                  <a:lnTo>
+                    <a:pt x="780404" y="314304"/>
+                  </a:lnTo>
+                  <a:lnTo>
+                    <a:pt x="848835" y="439758"/>
+                  </a:lnTo>
+                  <a:lnTo>
+                    <a:pt x="901694" y="573812"/>
+                  </a:lnTo>
+                  <a:lnTo>
+                    <a:pt x="938863" y="715420"/>
+                  </a:lnTo>
+                  <a:lnTo>
+                    <a:pt x="960227" y="863536"/>
+                  </a:lnTo>
+                  <a:lnTo>
+                    <a:pt x="965670" y="1017115"/>
+                  </a:lnTo>
+                  <a:lnTo>
+                    <a:pt x="955075" y="1175109"/>
+                  </a:lnTo>
+                  <a:lnTo>
+                    <a:pt x="928326" y="1336474"/>
+                  </a:lnTo>
+                  <a:lnTo>
+                    <a:pt x="37344" y="1336474"/>
+                  </a:lnTo>
+                  <a:lnTo>
+                    <a:pt x="10595" y="1175109"/>
+                  </a:lnTo>
+                  <a:lnTo>
+                    <a:pt x="0" y="1017115"/>
+                  </a:lnTo>
+                  <a:lnTo>
+                    <a:pt x="5443" y="863536"/>
+                  </a:lnTo>
+                  <a:lnTo>
+                    <a:pt x="26807" y="715420"/>
+                  </a:lnTo>
+                  <a:lnTo>
+                    <a:pt x="63976" y="573812"/>
+                  </a:lnTo>
+                  <a:lnTo>
+                    <a:pt x="116835" y="439758"/>
+                  </a:lnTo>
+                  <a:lnTo>
+                    <a:pt x="185266" y="314304"/>
+                  </a:lnTo>
+                  <a:lnTo>
+                    <a:pt x="269154" y="198495"/>
+                  </a:lnTo>
+                  <a:lnTo>
+                    <a:pt x="368382" y="93379"/>
+                  </a:lnTo>
+                  <a:lnTo>
+                    <a:pt x="482835" y="0"/>
+                  </a:lnTo>
+                  <a:close/>
+                </a:path>
+              </a:pathLst>
+            </a:custGeom>
+            <a:solidFill>
+              <a:srgbClr val="0077FF"/>
+            </a:solidFill>
+            <a:ln>
+              <a:noFill/>
+            </a:ln>
+            <a:effectLst/>
+          </p:spPr>
+          <p:style>
+            <a:lnRef idx="1">
+              <a:schemeClr val="accent1"/>
+            </a:lnRef>
+            <a:fillRef idx="3">
+              <a:schemeClr val="accent1"/>
+            </a:fillRef>
+            <a:effectRef idx="2">
+              <a:schemeClr val="accent1"/>
+            </a:effectRef>
+            <a:fontRef idx="minor">
+              <a:schemeClr val="lt1"/>
+            </a:fontRef>
+          </p:style>
+          <p:txBody>
+            <a:bodyPr rtlCol="0" anchor="ctr"/>
+            <a:lstStyle/>
+            <a:p>
+              <a:pPr algn="ctr"/>
+            </a:p>
+          </p:txBody>
+        </p:sp>
+        <p:sp>
+          <p:nvSpPr>
+            <p:cNvPr id="1063" name="Oval 1062"/>
+            <p:cNvSpPr/>
+            <p:nvPr/>
+          </p:nvSpPr>
+          <p:spPr>
+            <a:xfrm>
+              <a:off x="6449785" y="2308756"/>
+              <a:ext cx="464860" cy="464860"/>
+            </a:xfrm>
+            <a:prstGeom prst="ellipse">
+              <a:avLst/>
+            </a:prstGeom>
+            <a:solidFill>
+              <a:srgbClr val="FFFFFF"/>
+            </a:solidFill>
+            <a:ln>
+              <a:noFill/>
+            </a:ln>
+            <a:effectLst/>
+          </p:spPr>
+          <p:style>
+            <a:lnRef idx="1">
+              <a:schemeClr val="accent1"/>
+            </a:lnRef>
+            <a:fillRef idx="3">
+              <a:schemeClr val="accent1"/>
+            </a:fillRef>
+            <a:effectRef idx="2">
+              <a:schemeClr val="accent1"/>
+            </a:effectRef>
+            <a:fontRef idx="minor">
+              <a:schemeClr val="lt1"/>
+            </a:fontRef>
+          </p:style>
+          <p:txBody>
+            <a:bodyPr rtlCol="0" anchor="ctr"/>
+            <a:lstStyle/>
+            <a:p>
+              <a:pPr algn="ctr"/>
+            </a:p>
+          </p:txBody>
+        </p:sp>
+        <p:sp>
+          <p:nvSpPr>
+            <p:cNvPr id="1064" name="Oval 1063"/>
+            <p:cNvSpPr/>
+            <p:nvPr/>
+          </p:nvSpPr>
+          <p:spPr>
+            <a:xfrm>
+              <a:off x="6546631" y="2405602"/>
+              <a:ext cx="271168" cy="271168"/>
+            </a:xfrm>
+            <a:prstGeom prst="ellipse">
+              <a:avLst/>
+            </a:prstGeom>
+            <a:solidFill>
+              <a:srgbClr val="FF6C6C"/>
+            </a:solidFill>
+            <a:ln>
+              <a:noFill/>
+            </a:ln>
+            <a:effectLst/>
+          </p:spPr>
+          <p:style>
+            <a:lnRef idx="1">
+              <a:schemeClr val="accent1"/>
+            </a:lnRef>
+            <a:fillRef idx="3">
+              <a:schemeClr val="accent1"/>
+            </a:fillRef>
+            <a:effectRef idx="2">
+              <a:schemeClr val="accent1"/>
+            </a:effectRef>
+            <a:fontRef idx="minor">
+              <a:schemeClr val="lt1"/>
+            </a:fontRef>
+          </p:style>
+          <p:txBody>
+            <a:bodyPr rtlCol="0" anchor="ctr"/>
+            <a:lstStyle/>
+            <a:p>
+              <a:pPr algn="ctr"/>
+            </a:p>
+          </p:txBody>
+        </p:sp>
+        <p:sp>
+          <p:nvSpPr>
+            <p:cNvPr id="4" name="Freeform 3"/>
+            <p:cNvSpPr/>
+            <p:nvPr/>
+          </p:nvSpPr>
+          <p:spPr>
+            <a:xfrm>
+              <a:off x="5907448" y="2909201"/>
+              <a:ext cx="387383" cy="639183"/>
+            </a:xfrm>
+            <a:custGeom>
+              <a:avLst/>
+              <a:gdLst/>
+              <a:ahLst/>
+              <a:cxnLst/>
+              <a:rect l="l" t="t" r="r" b="b"/>
+              <a:pathLst>
+                <a:path w="387383" h="639183">
+                  <a:moveTo>
+                    <a:pt x="329276" y="0"/>
+                  </a:moveTo>
+                  <a:lnTo>
+                    <a:pt x="0" y="406752"/>
+                  </a:lnTo>
+                  <a:lnTo>
+                    <a:pt x="0" y="639183"/>
+                  </a:lnTo>
+                  <a:lnTo>
+                    <a:pt x="387383" y="464860"/>
+                  </a:lnTo>
+                  <a:close/>
+                </a:path>
+              </a:pathLst>
+            </a:custGeom>
+            <a:solidFill>
+              <a:srgbClr val="FF6C6C"/>
+            </a:solidFill>
+            <a:ln>
+              <a:noFill/>
+            </a:ln>
+            <a:effectLst/>
+          </p:spPr>
+          <p:style>
+            <a:lnRef idx="1">
+              <a:schemeClr val="accent1"/>
+            </a:lnRef>
+            <a:fillRef idx="3">
+              <a:schemeClr val="accent1"/>
+            </a:fillRef>
+            <a:effectRef idx="2">
+              <a:schemeClr val="accent1"/>
+            </a:effectRef>
+            <a:fontRef idx="minor">
+              <a:schemeClr val="lt1"/>
+            </a:fontRef>
+          </p:style>
+          <p:txBody>
+            <a:bodyPr rtlCol="0" anchor="ctr"/>
+            <a:lstStyle/>
+            <a:p>
+              <a:pPr algn="ctr"/>
+            </a:p>
+          </p:txBody>
+        </p:sp>
+        <p:sp>
+          <p:nvSpPr>
+            <p:cNvPr id="5" name="Freeform 4"/>
+            <p:cNvSpPr/>
+            <p:nvPr/>
+          </p:nvSpPr>
+          <p:spPr>
+            <a:xfrm>
+              <a:off x="7069599" y="2909201"/>
+              <a:ext cx="387383" cy="639183"/>
+            </a:xfrm>
+            <a:custGeom>
+              <a:avLst/>
+              <a:gdLst/>
+              <a:ahLst/>
+              <a:cxnLst/>
+              <a:rect l="l" t="t" r="r" b="b"/>
+              <a:pathLst>
+                <a:path w="387383" h="639183">
+                  <a:moveTo>
+                    <a:pt x="58107" y="0"/>
+                  </a:moveTo>
+                  <a:lnTo>
+                    <a:pt x="387383" y="406752"/>
+                  </a:lnTo>
+                  <a:lnTo>
+                    <a:pt x="387383" y="639183"/>
+                  </a:lnTo>
+                  <a:lnTo>
+                    <a:pt x="0" y="464860"/>
+                  </a:lnTo>
+                  <a:close/>
+                </a:path>
+              </a:pathLst>
+            </a:custGeom>
+            <a:solidFill>
+              <a:srgbClr val="FF6C6C"/>
+            </a:solidFill>
+            <a:ln>
+              <a:noFill/>
+            </a:ln>
+            <a:effectLst/>
+          </p:spPr>
+          <p:style>
+            <a:lnRef idx="1">
+              <a:schemeClr val="accent1"/>
+            </a:lnRef>
+            <a:fillRef idx="3">
+              <a:schemeClr val="accent1"/>
+            </a:fillRef>
+            <a:effectRef idx="2">
+              <a:schemeClr val="accent1"/>
+            </a:effectRef>
+            <a:fontRef idx="minor">
+              <a:schemeClr val="lt1"/>
+            </a:fontRef>
+          </p:style>
+          <p:txBody>
+            <a:bodyPr rtlCol="0" anchor="ctr"/>
+            <a:lstStyle/>
+            <a:p>
+              <a:pPr algn="ctr"/>
+            </a:p>
+          </p:txBody>
+        </p:sp>
+        <p:sp>
+          <p:nvSpPr>
+            <p:cNvPr id="6" name="Freeform 5"/>
+            <p:cNvSpPr/>
+            <p:nvPr/>
+          </p:nvSpPr>
+          <p:spPr>
+            <a:xfrm>
+              <a:off x="6449785" y="3180369"/>
+              <a:ext cx="464860" cy="290538"/>
+            </a:xfrm>
+            <a:custGeom>
+              <a:avLst/>
+              <a:gdLst/>
+              <a:ahLst/>
+              <a:cxnLst/>
+              <a:rect l="l" t="t" r="r" b="b"/>
+              <a:pathLst>
+                <a:path w="464860" h="290538">
+                  <a:moveTo>
+                    <a:pt x="0" y="0"/>
+                  </a:moveTo>
+                  <a:lnTo>
+                    <a:pt x="464860" y="0"/>
+                  </a:lnTo>
+                  <a:lnTo>
+                    <a:pt x="387383" y="290538"/>
+                  </a:lnTo>
+                  <a:lnTo>
+                    <a:pt x="77477" y="290538"/>
+                  </a:lnTo>
+                  <a:close/>
+                </a:path>
+              </a:pathLst>
+            </a:custGeom>
+            <a:solidFill>
+              <a:srgbClr val="B2B2B2"/>
+            </a:solidFill>
+            <a:ln>
+              <a:noFill/>
+            </a:ln>
+            <a:effectLst/>
+          </p:spPr>
+          <p:style>
+            <a:lnRef idx="1">
+              <a:schemeClr val="accent1"/>
+            </a:lnRef>
+            <a:fillRef idx="3">
+              <a:schemeClr val="accent1"/>
+            </a:fillRef>
+            <a:effectRef idx="2">
+              <a:schemeClr val="accent1"/>
+            </a:effectRef>
+            <a:fontRef idx="minor">
+              <a:schemeClr val="lt1"/>
+            </a:fontRef>
+          </p:style>
+          <p:txBody>
+            <a:bodyPr rtlCol="0" anchor="ctr"/>
+            <a:lstStyle/>
+            <a:p>
+              <a:pPr algn="ctr"/>
+            </a:p>
+          </p:txBody>
+        </p:sp>
+        <p:sp>
+          <p:nvSpPr>
+            <p:cNvPr id="7" name="Freeform 6"/>
+            <p:cNvSpPr/>
+            <p:nvPr/>
+          </p:nvSpPr>
+          <p:spPr>
+            <a:xfrm>
+              <a:off x="6527262" y="3470907"/>
+              <a:ext cx="309906" cy="542337"/>
+            </a:xfrm>
+            <a:custGeom>
+              <a:avLst/>
+              <a:gdLst/>
+              <a:ahLst/>
+              <a:cxnLst/>
+              <a:rect l="l" t="t" r="r" b="b"/>
+              <a:pathLst>
+                <a:path w="309906" h="542337">
+                  <a:moveTo>
+                    <a:pt x="0" y="0"/>
+                  </a:moveTo>
+                  <a:lnTo>
+                    <a:pt x="309906" y="0"/>
+                  </a:lnTo>
+                  <a:lnTo>
+                    <a:pt x="307660" y="72712"/>
+                  </a:lnTo>
+                  <a:lnTo>
+                    <a:pt x="301229" y="140078"/>
+                  </a:lnTo>
+                  <a:lnTo>
+                    <a:pt x="291080" y="202563"/>
+                  </a:lnTo>
+                  <a:lnTo>
+                    <a:pt x="277676" y="260632"/>
+                  </a:lnTo>
+                  <a:lnTo>
+                    <a:pt x="261484" y="314749"/>
+                  </a:lnTo>
+                  <a:lnTo>
+                    <a:pt x="242967" y="365380"/>
+                  </a:lnTo>
+                  <a:lnTo>
+                    <a:pt x="222590" y="412990"/>
+                  </a:lnTo>
+                  <a:lnTo>
+                    <a:pt x="200819" y="458042"/>
+                  </a:lnTo>
+                  <a:lnTo>
+                    <a:pt x="178119" y="501003"/>
+                  </a:lnTo>
+                  <a:lnTo>
+                    <a:pt x="154953" y="542337"/>
+                  </a:lnTo>
+                  <a:lnTo>
+                    <a:pt x="131787" y="501003"/>
+                  </a:lnTo>
+                  <a:lnTo>
+                    <a:pt x="109087" y="458042"/>
+                  </a:lnTo>
+                  <a:lnTo>
+                    <a:pt x="87316" y="412990"/>
+                  </a:lnTo>
+                  <a:lnTo>
+                    <a:pt x="66939" y="365380"/>
+                  </a:lnTo>
+                  <a:lnTo>
+                    <a:pt x="48422" y="314749"/>
+                  </a:lnTo>
+                  <a:lnTo>
+                    <a:pt x="32230" y="260632"/>
+                  </a:lnTo>
+                  <a:lnTo>
+                    <a:pt x="18826" y="202563"/>
+                  </a:lnTo>
+                  <a:lnTo>
+                    <a:pt x="8677" y="140078"/>
+                  </a:lnTo>
+                  <a:lnTo>
+                    <a:pt x="2246" y="72712"/>
+                  </a:lnTo>
+                  <a:lnTo>
+                    <a:pt x="0" y="0"/>
+                  </a:lnTo>
+                  <a:close/>
+                </a:path>
+              </a:pathLst>
+            </a:custGeom>
+            <a:solidFill>
+              <a:srgbClr val="FF6C6C"/>
+            </a:solidFill>
+            <a:ln>
+              <a:noFill/>
+            </a:ln>
+            <a:effectLst/>
+          </p:spPr>
+          <p:style>
+            <a:lnRef idx="1">
+              <a:schemeClr val="accent1"/>
+            </a:lnRef>
+            <a:fillRef idx="3">
+              <a:schemeClr val="accent1"/>
+            </a:fillRef>
+            <a:effectRef idx="2">
+              <a:schemeClr val="accent1"/>
+            </a:effectRef>
+            <a:fontRef idx="minor">
+              <a:schemeClr val="lt1"/>
+            </a:fontRef>
+          </p:style>
+          <p:txBody>
+            <a:bodyPr rtlCol="0" anchor="ctr"/>
+            <a:lstStyle/>
+            <a:p>
+              <a:pPr algn="ctr"/>
+            </a:p>
+          </p:txBody>
+        </p:sp>
+        <p:sp>
+          <p:nvSpPr>
+            <p:cNvPr id="1065" name="Oval 1064"/>
+            <p:cNvSpPr/>
+            <p:nvPr/>
+          </p:nvSpPr>
+          <p:spPr>
+            <a:xfrm>
+              <a:off x="5568487" y="2221594"/>
+              <a:ext cx="135584" cy="135584"/>
+            </a:xfrm>
+            <a:prstGeom prst="ellipse">
+              <a:avLst/>
+            </a:prstGeom>
+            <a:solidFill>
+              <a:srgbClr val="0077FF"/>
+            </a:solidFill>
+            <a:ln>
+              <a:noFill/>
+            </a:ln>
+            <a:effectLst/>
+          </p:spPr>
+          <p:style>
+            <a:lnRef idx="1">
+              <a:schemeClr val="accent1"/>
+            </a:lnRef>
+            <a:fillRef idx="3">
+              <a:schemeClr val="accent1"/>
+            </a:fillRef>
+            <a:effectRef idx="2">
+              <a:schemeClr val="accent1"/>
+            </a:effectRef>
+            <a:fontRef idx="minor">
+              <a:schemeClr val="lt1"/>
+            </a:fontRef>
+          </p:style>
+          <p:txBody>
+            <a:bodyPr rtlCol="0" anchor="ctr"/>
+            <a:lstStyle/>
+            <a:p>
+              <a:pPr algn="ctr"/>
+            </a:p>
+          </p:txBody>
+        </p:sp>
+        <p:sp>
+          <p:nvSpPr>
+            <p:cNvPr id="1066" name="Oval 1065"/>
+            <p:cNvSpPr/>
+            <p:nvPr/>
+          </p:nvSpPr>
+          <p:spPr>
+            <a:xfrm>
+              <a:off x="7708782" y="2037587"/>
+              <a:ext cx="193691" cy="193691"/>
+            </a:xfrm>
+            <a:prstGeom prst="ellipse">
+              <a:avLst/>
+            </a:prstGeom>
+            <a:solidFill>
+              <a:srgbClr val="FF6C6C"/>
+            </a:solidFill>
+            <a:ln>
+              <a:noFill/>
+            </a:ln>
+            <a:effectLst/>
+          </p:spPr>
+          <p:style>
+            <a:lnRef idx="1">
+              <a:schemeClr val="accent1"/>
+            </a:lnRef>
+            <a:fillRef idx="3">
+              <a:schemeClr val="accent1"/>
+            </a:fillRef>
+            <a:effectRef idx="2">
+              <a:schemeClr val="accent1"/>
+            </a:effectRef>
+            <a:fontRef idx="minor">
+              <a:schemeClr val="lt1"/>
+            </a:fontRef>
+          </p:style>
+          <p:txBody>
+            <a:bodyPr rtlCol="0" anchor="ctr"/>
+            <a:lstStyle/>
+            <a:p>
+              <a:pPr algn="ctr"/>
+            </a:p>
+          </p:txBody>
+        </p:sp>
+        <p:sp>
+          <p:nvSpPr>
+            <p:cNvPr id="1067" name="Oval 1066"/>
+            <p:cNvSpPr/>
+            <p:nvPr/>
+          </p:nvSpPr>
+          <p:spPr>
+            <a:xfrm>
+              <a:off x="7883104" y="3335323"/>
+              <a:ext cx="116215" cy="116215"/>
+            </a:xfrm>
+            <a:prstGeom prst="ellipse">
+              <a:avLst/>
+            </a:prstGeom>
+            <a:solidFill>
+              <a:srgbClr val="0077FF"/>
+            </a:solidFill>
+            <a:ln>
+              <a:noFill/>
+            </a:ln>
+            <a:effectLst/>
+          </p:spPr>
+          <p:style>
+            <a:lnRef idx="1">
+              <a:schemeClr val="accent1"/>
+            </a:lnRef>
+            <a:fillRef idx="3">
+              <a:schemeClr val="accent1"/>
+            </a:fillRef>
+            <a:effectRef idx="2">
+              <a:schemeClr val="accent1"/>
+            </a:effectRef>
+            <a:fontRef idx="minor">
+              <a:schemeClr val="lt1"/>
+            </a:fontRef>
+          </p:style>
+          <p:txBody>
+            <a:bodyPr rtlCol="0" anchor="ctr"/>
+            <a:lstStyle/>
+            <a:p>
+              <a:pPr algn="ctr"/>
+            </a:p>
+          </p:txBody>
+        </p:sp>
+      </p:grpSp>
     </p:spTree>
   </p:cSld>
   <p:clrMapOvr>
@@ -9428,7 +9864,7 @@
         <p:spPr>
           <a:xfrm>
             <a:off x="1543608" y="159030"/>
-            <a:ext cx="7202525" cy="4133046"/>
+            <a:ext cx="7202525" cy="3774614"/>
           </a:xfrm>
           <a:prstGeom prst="roundRect">
             <a:avLst/>
@@ -9509,7 +9945,7 @@
                 <a:ea typeface="Play"/>
                 <a:cs typeface="Play"/>
               </a:rPr>
-              <a:t>Что мы просим решить: запуск на всю компанию</a:t>
+              <a:t>Экономия времени и повышение качества</a:t>
             </a:r>
           </a:p>
         </p:txBody>
@@ -9558,7 +9994,7 @@
                 <a:ea typeface="Play"/>
                 <a:cs typeface="Play"/>
               </a:rPr>
-              <a:t>Решение о запуске сервиса на всю компанию</a:t>
+              <a:t>Сборка колоды сократилась до 4 мин</a:t>
             </a:r>
           </a:p>
         </p:txBody>
@@ -9589,7 +10025,7 @@
               <a:spcAft>
                 <a:spcPts val="300"/>
               </a:spcAft>
-              <a:defRPr sz="2438">
+              <a:defRPr sz="2705">
                 <a:solidFill>
                   <a:srgbClr val="000000"/>
                 </a:solidFill>
@@ -9599,7 +10035,7 @@
               </a:defRPr>
             </a:pPr>
             <a:r>
-              <a:rPr sz="2438">
+              <a:rPr sz="2705">
                 <a:solidFill>
                   <a:srgbClr val="000000"/>
                 </a:solidFill>
@@ -9607,7 +10043,7 @@
                 <a:ea typeface="Play"/>
                 <a:cs typeface="Play"/>
               </a:rPr>
-              <a:t>Поддержка интеграции с корпоративным хранилищем документов</a:t>
+              <a:t>Нарушения стиля уменьшились до 2/68</a:t>
             </a:r>
           </a:p>
         </p:txBody>
